--- a/docs/Tech-overview.pptx
+++ b/docs/Tech-overview.pptx
@@ -262,7 +262,7 @@
           <a:p>
             <a:fld id="{CA855E1B-8830-B64E-B102-DB2BBD0D9567}" type="datetimeFigureOut">
               <a:rPr lang="sv-SE" smtClean="0"/>
-              <a:t>2024-12-03</a:t>
+              <a:t>2025-01-15</a:t>
             </a:fld>
             <a:endParaRPr lang="sv-SE"/>
           </a:p>
@@ -432,7 +432,7 @@
           <a:p>
             <a:fld id="{CA855E1B-8830-B64E-B102-DB2BBD0D9567}" type="datetimeFigureOut">
               <a:rPr lang="sv-SE" smtClean="0"/>
-              <a:t>2024-12-03</a:t>
+              <a:t>2025-01-15</a:t>
             </a:fld>
             <a:endParaRPr lang="sv-SE"/>
           </a:p>
@@ -612,7 +612,7 @@
           <a:p>
             <a:fld id="{CA855E1B-8830-B64E-B102-DB2BBD0D9567}" type="datetimeFigureOut">
               <a:rPr lang="sv-SE" smtClean="0"/>
-              <a:t>2024-12-03</a:t>
+              <a:t>2025-01-15</a:t>
             </a:fld>
             <a:endParaRPr lang="sv-SE"/>
           </a:p>
@@ -782,7 +782,7 @@
           <a:p>
             <a:fld id="{CA855E1B-8830-B64E-B102-DB2BBD0D9567}" type="datetimeFigureOut">
               <a:rPr lang="sv-SE" smtClean="0"/>
-              <a:t>2024-12-03</a:t>
+              <a:t>2025-01-15</a:t>
             </a:fld>
             <a:endParaRPr lang="sv-SE"/>
           </a:p>
@@ -1026,7 +1026,7 @@
           <a:p>
             <a:fld id="{CA855E1B-8830-B64E-B102-DB2BBD0D9567}" type="datetimeFigureOut">
               <a:rPr lang="sv-SE" smtClean="0"/>
-              <a:t>2024-12-03</a:t>
+              <a:t>2025-01-15</a:t>
             </a:fld>
             <a:endParaRPr lang="sv-SE"/>
           </a:p>
@@ -1258,7 +1258,7 @@
           <a:p>
             <a:fld id="{CA855E1B-8830-B64E-B102-DB2BBD0D9567}" type="datetimeFigureOut">
               <a:rPr lang="sv-SE" smtClean="0"/>
-              <a:t>2024-12-03</a:t>
+              <a:t>2025-01-15</a:t>
             </a:fld>
             <a:endParaRPr lang="sv-SE"/>
           </a:p>
@@ -1625,7 +1625,7 @@
           <a:p>
             <a:fld id="{CA855E1B-8830-B64E-B102-DB2BBD0D9567}" type="datetimeFigureOut">
               <a:rPr lang="sv-SE" smtClean="0"/>
-              <a:t>2024-12-03</a:t>
+              <a:t>2025-01-15</a:t>
             </a:fld>
             <a:endParaRPr lang="sv-SE"/>
           </a:p>
@@ -1743,7 +1743,7 @@
           <a:p>
             <a:fld id="{CA855E1B-8830-B64E-B102-DB2BBD0D9567}" type="datetimeFigureOut">
               <a:rPr lang="sv-SE" smtClean="0"/>
-              <a:t>2024-12-03</a:t>
+              <a:t>2025-01-15</a:t>
             </a:fld>
             <a:endParaRPr lang="sv-SE"/>
           </a:p>
@@ -1838,7 +1838,7 @@
           <a:p>
             <a:fld id="{CA855E1B-8830-B64E-B102-DB2BBD0D9567}" type="datetimeFigureOut">
               <a:rPr lang="sv-SE" smtClean="0"/>
-              <a:t>2024-12-03</a:t>
+              <a:t>2025-01-15</a:t>
             </a:fld>
             <a:endParaRPr lang="sv-SE"/>
           </a:p>
@@ -2115,7 +2115,7 @@
           <a:p>
             <a:fld id="{CA855E1B-8830-B64E-B102-DB2BBD0D9567}" type="datetimeFigureOut">
               <a:rPr lang="sv-SE" smtClean="0"/>
-              <a:t>2024-12-03</a:t>
+              <a:t>2025-01-15</a:t>
             </a:fld>
             <a:endParaRPr lang="sv-SE"/>
           </a:p>
@@ -2372,7 +2372,7 @@
           <a:p>
             <a:fld id="{CA855E1B-8830-B64E-B102-DB2BBD0D9567}" type="datetimeFigureOut">
               <a:rPr lang="sv-SE" smtClean="0"/>
-              <a:t>2024-12-03</a:t>
+              <a:t>2025-01-15</a:t>
             </a:fld>
             <a:endParaRPr lang="sv-SE"/>
           </a:p>
@@ -2585,7 +2585,7 @@
           <a:p>
             <a:fld id="{CA855E1B-8830-B64E-B102-DB2BBD0D9567}" type="datetimeFigureOut">
               <a:rPr lang="sv-SE" smtClean="0"/>
-              <a:t>2024-12-03</a:t>
+              <a:t>2025-01-15</a:t>
             </a:fld>
             <a:endParaRPr lang="sv-SE"/>
           </a:p>
@@ -14082,7 +14082,7 @@
         <p:spPr>
           <a:xfrm>
             <a:off x="401904" y="1545040"/>
-            <a:ext cx="3274288" cy="3539430"/>
+            <a:ext cx="3274288" cy="4154984"/>
           </a:xfrm>
           <a:prstGeom prst="rect">
             <a:avLst/>
@@ -14326,6 +14326,43 @@
               <a:rPr lang="en-US" sz="800" noProof="1"/>
               <a:t>(or similar command, use function starting on load)</a:t>
             </a:r>
+          </a:p>
+          <a:p>
+            <a:pPr marL="171450" indent="-171450">
+              <a:buFont typeface="Courier New" panose="02070309020205020404" pitchFamily="49" charset="0"/>
+              <a:buChar char="o"/>
+            </a:pPr>
+            <a:endParaRPr lang="en-US" sz="800" noProof="1"/>
+          </a:p>
+          <a:p>
+            <a:r>
+              <a:rPr lang="en-US" sz="800" b="1" noProof="1"/>
+              <a:t>Console.log to main dev console</a:t>
+            </a:r>
+          </a:p>
+          <a:p>
+            <a:pPr marL="171450" indent="-171450">
+              <a:buFont typeface="Courier New" panose="02070309020205020404" pitchFamily="49" charset="0"/>
+              <a:buChar char="o"/>
+            </a:pPr>
+            <a:r>
+              <a:rPr lang="en-US" sz="800" noProof="1"/>
+              <a:t>Define global.log function in app.js, which logs from everywhere to main dev console</a:t>
+            </a:r>
+          </a:p>
+          <a:p>
+            <a:pPr marL="171450" indent="-171450">
+              <a:buFont typeface="Courier New" panose="02070309020205020404" pitchFamily="49" charset="0"/>
+              <a:buChar char="o"/>
+            </a:pPr>
+            <a:r>
+              <a:rPr lang="en-US" sz="800" noProof="1">
+                <a:latin typeface="Courier New" panose="02070309020205020404" pitchFamily="49" charset="0"/>
+                <a:cs typeface="Courier New" panose="02070309020205020404" pitchFamily="49" charset="0"/>
+              </a:rPr>
+              <a:t>global.log(‘message’)</a:t>
+            </a:r>
+            <a:endParaRPr lang="en-US" sz="800" noProof="1"/>
           </a:p>
           <a:p>
             <a:br>

--- a/docs/Tech-overview.pptx
+++ b/docs/Tech-overview.pptx
@@ -262,7 +262,7 @@
           <a:p>
             <a:fld id="{CA855E1B-8830-B64E-B102-DB2BBD0D9567}" type="datetimeFigureOut">
               <a:rPr lang="sv-SE" smtClean="0"/>
-              <a:t>2025-01-15</a:t>
+              <a:t>2025-04-27</a:t>
             </a:fld>
             <a:endParaRPr lang="sv-SE"/>
           </a:p>
@@ -432,7 +432,7 @@
           <a:p>
             <a:fld id="{CA855E1B-8830-B64E-B102-DB2BBD0D9567}" type="datetimeFigureOut">
               <a:rPr lang="sv-SE" smtClean="0"/>
-              <a:t>2025-01-15</a:t>
+              <a:t>2025-04-27</a:t>
             </a:fld>
             <a:endParaRPr lang="sv-SE"/>
           </a:p>
@@ -612,7 +612,7 @@
           <a:p>
             <a:fld id="{CA855E1B-8830-B64E-B102-DB2BBD0D9567}" type="datetimeFigureOut">
               <a:rPr lang="sv-SE" smtClean="0"/>
-              <a:t>2025-01-15</a:t>
+              <a:t>2025-04-27</a:t>
             </a:fld>
             <a:endParaRPr lang="sv-SE"/>
           </a:p>
@@ -782,7 +782,7 @@
           <a:p>
             <a:fld id="{CA855E1B-8830-B64E-B102-DB2BBD0D9567}" type="datetimeFigureOut">
               <a:rPr lang="sv-SE" smtClean="0"/>
-              <a:t>2025-01-15</a:t>
+              <a:t>2025-04-27</a:t>
             </a:fld>
             <a:endParaRPr lang="sv-SE"/>
           </a:p>
@@ -1026,7 +1026,7 @@
           <a:p>
             <a:fld id="{CA855E1B-8830-B64E-B102-DB2BBD0D9567}" type="datetimeFigureOut">
               <a:rPr lang="sv-SE" smtClean="0"/>
-              <a:t>2025-01-15</a:t>
+              <a:t>2025-04-27</a:t>
             </a:fld>
             <a:endParaRPr lang="sv-SE"/>
           </a:p>
@@ -1258,7 +1258,7 @@
           <a:p>
             <a:fld id="{CA855E1B-8830-B64E-B102-DB2BBD0D9567}" type="datetimeFigureOut">
               <a:rPr lang="sv-SE" smtClean="0"/>
-              <a:t>2025-01-15</a:t>
+              <a:t>2025-04-27</a:t>
             </a:fld>
             <a:endParaRPr lang="sv-SE"/>
           </a:p>
@@ -1625,7 +1625,7 @@
           <a:p>
             <a:fld id="{CA855E1B-8830-B64E-B102-DB2BBD0D9567}" type="datetimeFigureOut">
               <a:rPr lang="sv-SE" smtClean="0"/>
-              <a:t>2025-01-15</a:t>
+              <a:t>2025-04-27</a:t>
             </a:fld>
             <a:endParaRPr lang="sv-SE"/>
           </a:p>
@@ -1743,7 +1743,7 @@
           <a:p>
             <a:fld id="{CA855E1B-8830-B64E-B102-DB2BBD0D9567}" type="datetimeFigureOut">
               <a:rPr lang="sv-SE" smtClean="0"/>
-              <a:t>2025-01-15</a:t>
+              <a:t>2025-04-27</a:t>
             </a:fld>
             <a:endParaRPr lang="sv-SE"/>
           </a:p>
@@ -1838,7 +1838,7 @@
           <a:p>
             <a:fld id="{CA855E1B-8830-B64E-B102-DB2BBD0D9567}" type="datetimeFigureOut">
               <a:rPr lang="sv-SE" smtClean="0"/>
-              <a:t>2025-01-15</a:t>
+              <a:t>2025-04-27</a:t>
             </a:fld>
             <a:endParaRPr lang="sv-SE"/>
           </a:p>
@@ -2115,7 +2115,7 @@
           <a:p>
             <a:fld id="{CA855E1B-8830-B64E-B102-DB2BBD0D9567}" type="datetimeFigureOut">
               <a:rPr lang="sv-SE" smtClean="0"/>
-              <a:t>2025-01-15</a:t>
+              <a:t>2025-04-27</a:t>
             </a:fld>
             <a:endParaRPr lang="sv-SE"/>
           </a:p>
@@ -2372,7 +2372,7 @@
           <a:p>
             <a:fld id="{CA855E1B-8830-B64E-B102-DB2BBD0D9567}" type="datetimeFigureOut">
               <a:rPr lang="sv-SE" smtClean="0"/>
-              <a:t>2025-01-15</a:t>
+              <a:t>2025-04-27</a:t>
             </a:fld>
             <a:endParaRPr lang="sv-SE"/>
           </a:p>
@@ -2585,7 +2585,7 @@
           <a:p>
             <a:fld id="{CA855E1B-8830-B64E-B102-DB2BBD0D9567}" type="datetimeFigureOut">
               <a:rPr lang="sv-SE" smtClean="0"/>
-              <a:t>2025-01-15</a:t>
+              <a:t>2025-04-27</a:t>
             </a:fld>
             <a:endParaRPr lang="sv-SE"/>
           </a:p>
@@ -11660,7 +11660,7 @@
         <p:spPr>
           <a:xfrm>
             <a:off x="6357319" y="953255"/>
-            <a:ext cx="4339971" cy="461665"/>
+            <a:ext cx="5727337" cy="461665"/>
           </a:xfrm>
           <a:prstGeom prst="rect">
             <a:avLst/>
@@ -11675,7 +11675,7 @@
           <a:p>
             <a:r>
               <a:rPr lang="en-US" sz="2400" b="1" noProof="1"/>
-              <a:t>askpass (password dialog for git)</a:t>
+              <a:t>askpass (integrated password dialog for git)</a:t>
             </a:r>
           </a:p>
         </p:txBody>
@@ -11695,7 +11695,7 @@
         <p:spPr>
           <a:xfrm>
             <a:off x="6367567" y="1472403"/>
-            <a:ext cx="5396401" cy="4154984"/>
+            <a:ext cx="5396401" cy="4770537"/>
           </a:xfrm>
           <a:prstGeom prst="rect">
             <a:avLst/>
@@ -11730,7 +11730,7 @@
             </a:pPr>
             <a:r>
               <a:rPr lang="en-US" sz="800" noProof="1"/>
-              <a:t>askpass is initated by git</a:t>
+              <a:t>pragma-askpass  bash script  is initated by git</a:t>
             </a:r>
           </a:p>
           <a:p>
@@ -11739,9 +11739,31 @@
               <a:buChar char="-"/>
             </a:pPr>
             <a:r>
+              <a:rPr lang="en-US" sz="800" noProof="1"/>
+              <a:t>pragma-askpass acts as a mediator between git and askpass.html dialog</a:t>
+            </a:r>
+          </a:p>
+          <a:p>
+            <a:pPr marL="171450" indent="-171450">
+              <a:buFontTx/>
+              <a:buChar char="-"/>
+            </a:pPr>
+            <a:r>
+              <a:rPr lang="en-US" sz="800" noProof="1"/>
+              <a:t>The reason for this is to 1) send entered text to stdout, and 2)  exit status which I cannot do from nwjs</a:t>
+            </a:r>
+          </a:p>
+          <a:p>
+            <a:pPr marL="171450" indent="-171450">
+              <a:buFontTx/>
+              <a:buChar char="-"/>
+            </a:pPr>
+            <a:r>
               <a:rPr lang="en-US" sz="800" b="1" noProof="1"/>
               <a:t>I had to make a bash script which places signal files, that are then picked up by pragma-git</a:t>
             </a:r>
+          </a:p>
+          <a:p>
             <a:br>
               <a:rPr lang="en-US" sz="800" b="1" noProof="1"/>
             </a:br>
@@ -12007,7 +12029,17 @@
             </a:pPr>
             <a:r>
               <a:rPr lang="en-US" sz="800" noProof="1"/>
-              <a:t>reads exit code from file ‘exit’, removes file ‘exit’, and returns the exit code </a:t>
+              <a:t>reads entered text in pragma-askpass.html, and sends that to stdout</a:t>
+            </a:r>
+          </a:p>
+          <a:p>
+            <a:pPr marL="324000" lvl="1" indent="-171450">
+              <a:buFont typeface="Arial" panose="020B0604020202020204" pitchFamily="34" charset="0"/>
+              <a:buChar char="•"/>
+            </a:pPr>
+            <a:r>
+              <a:rPr lang="en-US" sz="800" noProof="1"/>
+              <a:t>reads exit code from file ‘exit’, removes file ‘exit’, and returns with the same exit code (so git can pick it up)</a:t>
             </a:r>
             <a:br>
               <a:rPr lang="en-US" sz="800" noProof="1"/>
@@ -12079,7 +12111,7 @@
         </p:nvSpPr>
         <p:spPr>
           <a:xfrm>
-            <a:off x="6357319" y="5684870"/>
+            <a:off x="6357319" y="6355166"/>
             <a:ext cx="5396401" cy="1200329"/>
           </a:xfrm>
           <a:prstGeom prst="rect">

--- a/docs/Tech-overview.pptx
+++ b/docs/Tech-overview.pptx
@@ -11,8 +11,9 @@
     <p:sldId id="261" r:id="rId5"/>
     <p:sldId id="262" r:id="rId6"/>
     <p:sldId id="257" r:id="rId7"/>
-    <p:sldId id="258" r:id="rId8"/>
-    <p:sldId id="263" r:id="rId9"/>
+    <p:sldId id="264" r:id="rId8"/>
+    <p:sldId id="258" r:id="rId9"/>
+    <p:sldId id="263" r:id="rId10"/>
   </p:sldIdLst>
   <p:sldSz cx="12801600" cy="9601200" type="A3"/>
   <p:notesSz cx="6858000" cy="9144000"/>
@@ -11695,7 +11696,7 @@
         <p:spPr>
           <a:xfrm>
             <a:off x="6367567" y="1472403"/>
-            <a:ext cx="5396401" cy="4770537"/>
+            <a:ext cx="5396401" cy="4893647"/>
           </a:xfrm>
           <a:prstGeom prst="rect">
             <a:avLst/>
@@ -11925,7 +11926,21 @@
             </a:pPr>
             <a:r>
               <a:rPr lang="en-US" sz="800" noProof="1"/>
-              <a:t>askpass_first (first argument from git. text asking for password) askpasslog.txt, askpass.txt</a:t>
+              <a:t>askpass_first (first argument from git. text asking for password), </a:t>
+            </a:r>
+            <a:br>
+              <a:rPr lang="en-US" sz="800" noProof="1"/>
+            </a:br>
+            <a:r>
+              <a:rPr lang="en-US" sz="800" noProof="1"/>
+              <a:t>askpasslog.txt, </a:t>
+            </a:r>
+            <a:br>
+              <a:rPr lang="en-US" sz="800" noProof="1"/>
+            </a:br>
+            <a:r>
+              <a:rPr lang="en-US" sz="800" noProof="1"/>
+              <a:t>askpass.txt</a:t>
             </a:r>
           </a:p>
           <a:p>
@@ -12073,7 +12088,7 @@
         <p:spPr>
           <a:xfrm>
             <a:off x="416902" y="122259"/>
-            <a:ext cx="5469574" cy="830997"/>
+            <a:ext cx="5267468" cy="830997"/>
           </a:xfrm>
           <a:prstGeom prst="rect">
             <a:avLst/>
@@ -12092,7 +12107,7 @@
                   <a:schemeClr val="accent1"/>
                 </a:solidFill>
               </a:rPr>
-              <a:t>Git-related Windows</a:t>
+              <a:t>Git helper Windows</a:t>
             </a:r>
           </a:p>
         </p:txBody>
@@ -12111,7 +12126,7 @@
         </p:nvSpPr>
         <p:spPr>
           <a:xfrm>
-            <a:off x="6357319" y="6355166"/>
+            <a:off x="6357319" y="6423533"/>
             <a:ext cx="5396401" cy="1200329"/>
           </a:xfrm>
           <a:prstGeom prst="rect">
@@ -12219,6 +12234,787 @@
   <p:cSld>
     <p:spTree>
       <p:nvGrpSpPr>
+        <p:cNvPr id="1" name="">
+          <a:extLst>
+            <a:ext uri="{FF2B5EF4-FFF2-40B4-BE49-F238E27FC236}">
+              <a16:creationId xmlns:a16="http://schemas.microsoft.com/office/drawing/2014/main" id="{DE518DAA-53D0-1105-C6F2-C801F08D5253}"/>
+            </a:ext>
+          </a:extLst>
+        </p:cNvPr>
+        <p:cNvGrpSpPr/>
+        <p:nvPr/>
+      </p:nvGrpSpPr>
+      <p:grpSpPr>
+        <a:xfrm>
+          <a:off x="0" y="0"/>
+          <a:ext cx="0" cy="0"/>
+          <a:chOff x="0" y="0"/>
+          <a:chExt cx="0" cy="0"/>
+        </a:xfrm>
+      </p:grpSpPr>
+      <p:sp>
+        <p:nvSpPr>
+          <p:cNvPr id="4" name="textruta 3">
+            <a:extLst>
+              <a:ext uri="{FF2B5EF4-FFF2-40B4-BE49-F238E27FC236}">
+                <a16:creationId xmlns:a16="http://schemas.microsoft.com/office/drawing/2014/main" id="{84151DEA-44C4-2776-6854-868F7FB7712C}"/>
+              </a:ext>
+            </a:extLst>
+          </p:cNvPr>
+          <p:cNvSpPr txBox="1"/>
+          <p:nvPr/>
+        </p:nvSpPr>
+        <p:spPr>
+          <a:xfrm>
+            <a:off x="416902" y="122259"/>
+            <a:ext cx="7999947" cy="830997"/>
+          </a:xfrm>
+          <a:prstGeom prst="rect">
+            <a:avLst/>
+          </a:prstGeom>
+          <a:noFill/>
+        </p:spPr>
+        <p:txBody>
+          <a:bodyPr wrap="none" rtlCol="0">
+            <a:spAutoFit/>
+          </a:bodyPr>
+          <a:lstStyle/>
+          <a:p>
+            <a:r>
+              <a:rPr lang="en-US" sz="4800" b="1" noProof="1">
+                <a:solidFill>
+                  <a:schemeClr val="accent1"/>
+                </a:solidFill>
+              </a:rPr>
+              <a:t>Git providers (github, gitlab,…)</a:t>
+            </a:r>
+          </a:p>
+        </p:txBody>
+      </p:sp>
+      <p:sp>
+        <p:nvSpPr>
+          <p:cNvPr id="5" name="textruta 4">
+            <a:extLst>
+              <a:ext uri="{FF2B5EF4-FFF2-40B4-BE49-F238E27FC236}">
+                <a16:creationId xmlns:a16="http://schemas.microsoft.com/office/drawing/2014/main" id="{ADE3883B-4E67-CF9D-9EEC-2A26C5A55CD6}"/>
+              </a:ext>
+            </a:extLst>
+          </p:cNvPr>
+          <p:cNvSpPr txBox="1"/>
+          <p:nvPr/>
+        </p:nvSpPr>
+        <p:spPr>
+          <a:xfrm>
+            <a:off x="498478" y="1497415"/>
+            <a:ext cx="3274288" cy="4401205"/>
+          </a:xfrm>
+          <a:prstGeom prst="rect">
+            <a:avLst/>
+          </a:prstGeom>
+          <a:noFill/>
+          <a:ln>
+            <a:solidFill>
+              <a:schemeClr val="accent1"/>
+            </a:solidFill>
+          </a:ln>
+        </p:spPr>
+        <p:txBody>
+          <a:bodyPr wrap="square" rtlCol="0">
+            <a:spAutoFit/>
+          </a:bodyPr>
+          <a:lstStyle/>
+          <a:p>
+            <a:r>
+              <a:rPr lang="en-US" sz="800" b="1" noProof="1"/>
+              <a:t>Providers are implemented in the following way</a:t>
+            </a:r>
+            <a:br>
+              <a:rPr lang="en-US" sz="800" b="1" noProof="1"/>
+            </a:br>
+            <a:endParaRPr lang="en-US" sz="800" b="1" noProof="1"/>
+          </a:p>
+          <a:p>
+            <a:pPr marL="171450" indent="-171450">
+              <a:buFont typeface="Courier New" panose="02070309020205020404" pitchFamily="49" charset="0"/>
+              <a:buChar char="o"/>
+            </a:pPr>
+            <a:r>
+              <a:rPr lang="en-US" sz="800" noProof="1">
+                <a:solidFill>
+                  <a:schemeClr val="accent1"/>
+                </a:solidFill>
+              </a:rPr>
+              <a:t>Classes for different providers</a:t>
+            </a:r>
+            <a:r>
+              <a:rPr lang="en-US" sz="800" noProof="1"/>
+              <a:t>--  in folder apis_github_and_others</a:t>
+            </a:r>
+            <a:br>
+              <a:rPr lang="en-US" sz="800" noProof="1"/>
+            </a:br>
+            <a:endParaRPr lang="en-US" sz="800" noProof="1"/>
+          </a:p>
+          <a:p>
+            <a:pPr marL="171450" indent="-171450">
+              <a:buFont typeface="Courier New" panose="02070309020205020404" pitchFamily="49" charset="0"/>
+              <a:buChar char="o"/>
+            </a:pPr>
+            <a:r>
+              <a:rPr lang="en-US" sz="800" noProof="1">
+                <a:solidFill>
+                  <a:schemeClr val="accent1"/>
+                </a:solidFill>
+              </a:rPr>
+              <a:t>Main class</a:t>
+            </a:r>
+            <a:r>
+              <a:rPr lang="en-US" sz="800" noProof="1"/>
+              <a:t> general_git_rest_api.js</a:t>
+            </a:r>
+          </a:p>
+          <a:p>
+            <a:pPr marL="324000" lvl="1" indent="-171450">
+              <a:buFont typeface="Arial" panose="020B0604020202020204" pitchFamily="34" charset="0"/>
+              <a:buChar char="•"/>
+            </a:pPr>
+            <a:r>
+              <a:rPr lang="en-US" sz="800" noProof="1"/>
+              <a:t>Common constructor sets :</a:t>
+            </a:r>
+            <a:br>
+              <a:rPr lang="en-US" sz="800" noProof="1"/>
+            </a:br>
+            <a:r>
+              <a:rPr lang="en-US" sz="800" noProof="1"/>
+              <a:t> giturl, username, TOKEN</a:t>
+            </a:r>
+          </a:p>
+          <a:p>
+            <a:pPr marL="324000" lvl="1" indent="-171450">
+              <a:buFont typeface="Arial" panose="020B0604020202020204" pitchFamily="34" charset="0"/>
+              <a:buChar char="•"/>
+            </a:pPr>
+            <a:r>
+              <a:rPr lang="en-US" sz="800" noProof="1"/>
+              <a:t>Implements fetch function :</a:t>
+            </a:r>
+            <a:br>
+              <a:rPr lang="en-US" sz="800" noProof="1"/>
+            </a:br>
+            <a:r>
+              <a:rPr lang="en-US" sz="800" noProof="1"/>
+              <a:t> fetchWithApi</a:t>
+            </a:r>
+          </a:p>
+          <a:p>
+            <a:pPr marL="171450" indent="-171450">
+              <a:buFont typeface="Courier New" panose="02070309020205020404" pitchFamily="49" charset="0"/>
+              <a:buChar char="o"/>
+            </a:pPr>
+            <a:endParaRPr lang="en-US" sz="800" noProof="1"/>
+          </a:p>
+          <a:p>
+            <a:pPr marL="171450" indent="-171450">
+              <a:buFont typeface="Courier New" panose="02070309020205020404" pitchFamily="49" charset="0"/>
+              <a:buChar char="o"/>
+            </a:pPr>
+            <a:r>
+              <a:rPr lang="en-US" sz="800" noProof="1">
+                <a:solidFill>
+                  <a:schemeClr val="accent1"/>
+                </a:solidFill>
+              </a:rPr>
+              <a:t>Provider-specific i</a:t>
+            </a:r>
+            <a:r>
+              <a:rPr lang="en-US" sz="800" noProof="1"/>
+              <a:t>mplemented by inheriting from general_git_rest_api.js. </a:t>
+            </a:r>
+          </a:p>
+          <a:p>
+            <a:pPr marL="171450" indent="-171450">
+              <a:buFont typeface="Courier New" panose="02070309020205020404" pitchFamily="49" charset="0"/>
+              <a:buChar char="o"/>
+            </a:pPr>
+            <a:endParaRPr lang="en-US" sz="800" noProof="1"/>
+          </a:p>
+          <a:p>
+            <a:pPr marL="171450" indent="-171450">
+              <a:buFont typeface="Courier New" panose="02070309020205020404" pitchFamily="49" charset="0"/>
+              <a:buChar char="o"/>
+            </a:pPr>
+            <a:r>
+              <a:rPr lang="en-US" sz="800" noProof="1">
+                <a:solidFill>
+                  <a:schemeClr val="accent1"/>
+                </a:solidFill>
+              </a:rPr>
+              <a:t>Adding a new provider means to  implement the following methods</a:t>
+            </a:r>
+            <a:r>
+              <a:rPr lang="en-US" sz="800" noProof="1"/>
+              <a:t>: </a:t>
+            </a:r>
+          </a:p>
+          <a:p>
+            <a:pPr marL="324000" lvl="1" indent="-171450">
+              <a:buFont typeface="Arial" panose="020B0604020202020204" pitchFamily="34" charset="0"/>
+              <a:buChar char="•"/>
+            </a:pPr>
+            <a:r>
+              <a:rPr lang="en-US" sz="800" noProof="1"/>
+              <a:t>Constructor – inherits from main class, but also set this.api-url</a:t>
+            </a:r>
+          </a:p>
+          <a:p>
+            <a:pPr marL="324000" lvl="1" indent="-171450">
+              <a:buFont typeface="Arial" panose="020B0604020202020204" pitchFamily="34" charset="0"/>
+              <a:buChar char="•"/>
+            </a:pPr>
+            <a:r>
+              <a:rPr lang="en-US" sz="800" noProof="1"/>
+              <a:t>initialize – calls api and get json response from api</a:t>
+            </a:r>
+          </a:p>
+          <a:p>
+            <a:pPr marL="324000" lvl="1" indent="-171450">
+              <a:buFont typeface="Arial" panose="020B0604020202020204" pitchFamily="34" charset="0"/>
+              <a:buChar char="•"/>
+            </a:pPr>
+            <a:r>
+              <a:rPr lang="en-US" sz="800" noProof="1"/>
+              <a:t>createRepo – creates a repository through api call</a:t>
+            </a:r>
+          </a:p>
+          <a:p>
+            <a:pPr marL="324000" lvl="1" indent="-171450">
+              <a:buFont typeface="Arial" panose="020B0604020202020204" pitchFamily="34" charset="0"/>
+              <a:buChar char="•"/>
+            </a:pPr>
+            <a:r>
+              <a:rPr lang="en-US" sz="800" noProof="1"/>
+              <a:t>getValue – gets a number of values from json response in a standardized way (same for all providers)</a:t>
+            </a:r>
+          </a:p>
+          <a:p>
+            <a:pPr marL="324000" lvl="1" indent="-171450">
+              <a:buFont typeface="Arial" panose="020B0604020202020204" pitchFamily="34" charset="0"/>
+              <a:buChar char="•"/>
+            </a:pPr>
+            <a:endParaRPr lang="en-US" sz="800" noProof="1"/>
+          </a:p>
+          <a:p>
+            <a:pPr marL="171450" indent="-171450">
+              <a:buFont typeface="Courier New" panose="02070309020205020404" pitchFamily="49" charset="0"/>
+              <a:buChar char="o"/>
+            </a:pPr>
+            <a:r>
+              <a:rPr lang="en-US" sz="800" noProof="1">
+                <a:solidFill>
+                  <a:schemeClr val="accent1"/>
+                </a:solidFill>
+              </a:rPr>
+              <a:t>getValue</a:t>
+            </a:r>
+            <a:r>
+              <a:rPr lang="en-US" sz="800" noProof="1"/>
+              <a:t> can be called with these parameters  (may be updated)</a:t>
+            </a:r>
+          </a:p>
+          <a:p>
+            <a:pPr marL="152550" lvl="1"/>
+            <a:r>
+              <a:rPr lang="en-US" sz="800" b="1" noProof="1"/>
+              <a:t>   The following can be called without initialization (fast)</a:t>
+            </a:r>
+          </a:p>
+          <a:p>
+            <a:pPr marL="324000" lvl="1" indent="-171450">
+              <a:buFont typeface="Arial" panose="020B0604020202020204" pitchFamily="34" charset="0"/>
+              <a:buChar char="•"/>
+            </a:pPr>
+            <a:r>
+              <a:rPr lang="en-US" sz="800" noProof="1"/>
+              <a:t>'git-username’ – username needed</a:t>
+            </a:r>
+          </a:p>
+          <a:p>
+            <a:pPr marL="324000" lvl="1" indent="-171450">
+              <a:buFont typeface="Arial" panose="020B0604020202020204" pitchFamily="34" charset="0"/>
+              <a:buChar char="•"/>
+            </a:pPr>
+            <a:r>
+              <a:rPr lang="en-US" sz="800" noProof="1"/>
+              <a:t>'icon’ – path to 16x16 pixel icon.  Should return path to a  darkmode and lightmode icon (you can return same path, if it is a color icon that works for both). See gitlab.com.js implementation</a:t>
+            </a:r>
+          </a:p>
+          <a:p>
+            <a:pPr marL="152550" lvl="1"/>
+            <a:r>
+              <a:rPr lang="en-US" sz="800" b="1" noProof="1"/>
+              <a:t>   The following requires a call to initialize() before accessible :</a:t>
+            </a:r>
+          </a:p>
+          <a:p>
+            <a:pPr marL="324000" lvl="1" indent="-171450">
+              <a:buFont typeface="Arial" panose="020B0604020202020204" pitchFamily="34" charset="0"/>
+              <a:buChar char="•"/>
+            </a:pPr>
+            <a:r>
+              <a:rPr lang="en-US" sz="800" noProof="1"/>
+              <a:t>'web-url’ – url to providers web page for this repo </a:t>
+            </a:r>
+          </a:p>
+          <a:p>
+            <a:pPr marL="324000" lvl="1" indent="-171450">
+              <a:buFont typeface="Arial" panose="020B0604020202020204" pitchFamily="34" charset="0"/>
+              <a:buChar char="•"/>
+            </a:pPr>
+            <a:r>
+              <a:rPr lang="en-US" sz="800" noProof="1"/>
+              <a:t>api-url’ –url to call api</a:t>
+            </a:r>
+          </a:p>
+          <a:p>
+            <a:pPr marL="324000" lvl="1" indent="-171450">
+              <a:buFont typeface="Arial" panose="020B0604020202020204" pitchFamily="34" charset="0"/>
+              <a:buChar char="•"/>
+            </a:pPr>
+            <a:r>
+              <a:rPr lang="en-US" sz="800" noProof="1"/>
+              <a:t>'api-status’ – status when calling api</a:t>
+            </a:r>
+          </a:p>
+          <a:p>
+            <a:pPr marL="324000" lvl="1" indent="-171450">
+              <a:buFont typeface="Arial" panose="020B0604020202020204" pitchFamily="34" charset="0"/>
+              <a:buChar char="•"/>
+            </a:pPr>
+            <a:r>
+              <a:rPr lang="en-US" sz="800" noProof="1"/>
+              <a:t>'fork-parent’ – if a forked repo, this is the url to original repo</a:t>
+            </a:r>
+          </a:p>
+          <a:p>
+            <a:pPr marL="324000" lvl="1" indent="-171450">
+              <a:buFont typeface="Arial" panose="020B0604020202020204" pitchFamily="34" charset="0"/>
+              <a:buChar char="•"/>
+            </a:pPr>
+            <a:r>
+              <a:rPr lang="en-US" sz="800" noProof="1"/>
+              <a:t>'is-private-repo’ -- tells if private / public repo</a:t>
+            </a:r>
+          </a:p>
+          <a:p>
+            <a:endParaRPr lang="en-US" sz="800" noProof="1"/>
+          </a:p>
+          <a:p>
+            <a:pPr marL="171450" indent="-171450">
+              <a:buFont typeface="Courier New" panose="02070309020205020404" pitchFamily="49" charset="0"/>
+              <a:buChar char="o"/>
+            </a:pPr>
+            <a:r>
+              <a:rPr lang="en-US" sz="800" noProof="1">
+                <a:solidFill>
+                  <a:schemeClr val="accent1"/>
+                </a:solidFill>
+              </a:rPr>
+              <a:t>Icons and supporting material can be placed in the same folder: </a:t>
+            </a:r>
+            <a:r>
+              <a:rPr lang="en-US" sz="800" noProof="1"/>
+              <a:t>apis_github_and_others</a:t>
+            </a:r>
+          </a:p>
+        </p:txBody>
+      </p:sp>
+      <p:sp>
+        <p:nvSpPr>
+          <p:cNvPr id="6" name="textruta 5">
+            <a:extLst>
+              <a:ext uri="{FF2B5EF4-FFF2-40B4-BE49-F238E27FC236}">
+                <a16:creationId xmlns:a16="http://schemas.microsoft.com/office/drawing/2014/main" id="{943D8880-E278-C35C-CEEF-0D60AB679EF5}"/>
+              </a:ext>
+            </a:extLst>
+          </p:cNvPr>
+          <p:cNvSpPr txBox="1"/>
+          <p:nvPr/>
+        </p:nvSpPr>
+        <p:spPr>
+          <a:xfrm>
+            <a:off x="336553" y="953256"/>
+            <a:ext cx="3030125" cy="461665"/>
+          </a:xfrm>
+          <a:prstGeom prst="rect">
+            <a:avLst/>
+          </a:prstGeom>
+          <a:noFill/>
+        </p:spPr>
+        <p:txBody>
+          <a:bodyPr wrap="none" rtlCol="0">
+            <a:spAutoFit/>
+          </a:bodyPr>
+          <a:lstStyle/>
+          <a:p>
+            <a:r>
+              <a:rPr lang="en-US" sz="2400" b="1" noProof="1"/>
+              <a:t>Provider API functions</a:t>
+            </a:r>
+          </a:p>
+        </p:txBody>
+      </p:sp>
+      <p:sp>
+        <p:nvSpPr>
+          <p:cNvPr id="3" name="textruta 5">
+            <a:extLst>
+              <a:ext uri="{FF2B5EF4-FFF2-40B4-BE49-F238E27FC236}">
+                <a16:creationId xmlns:a16="http://schemas.microsoft.com/office/drawing/2014/main" id="{2987841D-179A-486D-5E40-0A0422DA3632}"/>
+              </a:ext>
+            </a:extLst>
+          </p:cNvPr>
+          <p:cNvSpPr txBox="1"/>
+          <p:nvPr/>
+        </p:nvSpPr>
+        <p:spPr>
+          <a:xfrm>
+            <a:off x="4270378" y="939343"/>
+            <a:ext cx="2729080" cy="461665"/>
+          </a:xfrm>
+          <a:prstGeom prst="rect">
+            <a:avLst/>
+          </a:prstGeom>
+          <a:noFill/>
+        </p:spPr>
+        <p:txBody>
+          <a:bodyPr wrap="none" rtlCol="0">
+            <a:spAutoFit/>
+          </a:bodyPr>
+          <a:lstStyle/>
+          <a:p>
+            <a:r>
+              <a:rPr lang="en-US" sz="2400" b="1" noProof="1"/>
+              <a:t>Provider GUI wizard</a:t>
+            </a:r>
+          </a:p>
+        </p:txBody>
+      </p:sp>
+      <p:sp>
+        <p:nvSpPr>
+          <p:cNvPr id="7" name="textruta 4">
+            <a:extLst>
+              <a:ext uri="{FF2B5EF4-FFF2-40B4-BE49-F238E27FC236}">
+                <a16:creationId xmlns:a16="http://schemas.microsoft.com/office/drawing/2014/main" id="{0BF97886-D135-15CC-61EF-28B42C9BDBDF}"/>
+              </a:ext>
+            </a:extLst>
+          </p:cNvPr>
+          <p:cNvSpPr txBox="1"/>
+          <p:nvPr/>
+        </p:nvSpPr>
+        <p:spPr>
+          <a:xfrm>
+            <a:off x="4346578" y="1497414"/>
+            <a:ext cx="3274288" cy="1938992"/>
+          </a:xfrm>
+          <a:prstGeom prst="rect">
+            <a:avLst/>
+          </a:prstGeom>
+          <a:noFill/>
+          <a:ln>
+            <a:solidFill>
+              <a:schemeClr val="accent1"/>
+            </a:solidFill>
+          </a:ln>
+        </p:spPr>
+        <p:txBody>
+          <a:bodyPr wrap="square" rtlCol="0">
+            <a:spAutoFit/>
+          </a:bodyPr>
+          <a:lstStyle/>
+          <a:p>
+            <a:r>
+              <a:rPr lang="en-US" sz="800" b="1" noProof="1"/>
+              <a:t>The GUI for providers are implemented in the following way</a:t>
+            </a:r>
+            <a:br>
+              <a:rPr lang="en-US" sz="800" b="1" noProof="1"/>
+            </a:br>
+            <a:endParaRPr lang="en-US" sz="800" b="1" noProof="1"/>
+          </a:p>
+          <a:p>
+            <a:pPr marL="171450" indent="-171450">
+              <a:buFont typeface="Courier New" panose="02070309020205020404" pitchFamily="49" charset="0"/>
+              <a:buChar char="o"/>
+            </a:pPr>
+            <a:r>
+              <a:rPr lang="en-US" sz="800" noProof="1">
+                <a:solidFill>
+                  <a:schemeClr val="accent1"/>
+                </a:solidFill>
+              </a:rPr>
+              <a:t>Common html -- </a:t>
+            </a:r>
+            <a:r>
+              <a:rPr lang="en-US" sz="800" noProof="1"/>
+              <a:t>Create_remote_repository.html</a:t>
+            </a:r>
+          </a:p>
+          <a:p>
+            <a:pPr marL="324000" lvl="1" indent="-171450">
+              <a:buFont typeface="Arial" panose="020B0604020202020204" pitchFamily="34" charset="0"/>
+              <a:buChar char="•"/>
+            </a:pPr>
+            <a:r>
+              <a:rPr lang="en-US" sz="800" noProof="1"/>
+              <a:t>Text made for Github:</a:t>
+            </a:r>
+          </a:p>
+          <a:p>
+            <a:pPr marL="324000" lvl="1" indent="-171450">
+              <a:buFont typeface="Arial" panose="020B0604020202020204" pitchFamily="34" charset="0"/>
+              <a:buChar char="•"/>
+            </a:pPr>
+            <a:endParaRPr lang="en-US" sz="800" noProof="1"/>
+          </a:p>
+          <a:p>
+            <a:pPr marL="171450" indent="-171450">
+              <a:buFont typeface="Courier New" panose="02070309020205020404" pitchFamily="49" charset="0"/>
+              <a:buChar char="o"/>
+            </a:pPr>
+            <a:r>
+              <a:rPr lang="en-US" sz="800" noProof="1">
+                <a:solidFill>
+                  <a:schemeClr val="accent1"/>
+                </a:solidFill>
+              </a:rPr>
+              <a:t>One js-file -- </a:t>
+            </a:r>
+            <a:r>
+              <a:rPr lang="en-US" sz="800" noProof="1"/>
+              <a:t>create_remote_repository.js</a:t>
+            </a:r>
+          </a:p>
+          <a:p>
+            <a:pPr marL="324000" lvl="1" indent="-171450">
+              <a:buFont typeface="Arial" panose="020B0604020202020204" pitchFamily="34" charset="0"/>
+              <a:buChar char="•"/>
+            </a:pPr>
+            <a:r>
+              <a:rPr lang="en-US" sz="800" noProof="1"/>
+              <a:t>Modifies: all text “Github”  to correct provider in html above</a:t>
+            </a:r>
+          </a:p>
+          <a:p>
+            <a:pPr marL="324000" lvl="1" indent="-171450">
+              <a:buFont typeface="Arial" panose="020B0604020202020204" pitchFamily="34" charset="0"/>
+              <a:buChar char="•"/>
+            </a:pPr>
+            <a:r>
+              <a:rPr lang="en-US" sz="800" noProof="1"/>
+              <a:t>Switch statement setting provider-specific labels for inputs</a:t>
+            </a:r>
+          </a:p>
+          <a:p>
+            <a:pPr marL="324000" lvl="1" indent="-171450">
+              <a:buFont typeface="Arial" panose="020B0604020202020204" pitchFamily="34" charset="0"/>
+              <a:buChar char="•"/>
+            </a:pPr>
+            <a:r>
+              <a:rPr lang="en-US" sz="800" noProof="1"/>
+              <a:t>Stores in git credentials</a:t>
+            </a:r>
+            <a:br>
+              <a:rPr lang="en-US" sz="800" noProof="1"/>
+            </a:br>
+            <a:endParaRPr lang="en-US" sz="800" noProof="1"/>
+          </a:p>
+          <a:p>
+            <a:pPr marL="171450" indent="-171450">
+              <a:buFont typeface="Courier New" panose="02070309020205020404" pitchFamily="49" charset="0"/>
+              <a:buChar char="o"/>
+            </a:pPr>
+            <a:r>
+              <a:rPr lang="en-US" sz="800" noProof="1">
+                <a:solidFill>
+                  <a:schemeClr val="accent1"/>
+                </a:solidFill>
+              </a:rPr>
+              <a:t>Mechanism for guessing TOKEN</a:t>
+            </a:r>
+            <a:endParaRPr lang="en-US" sz="800" noProof="1"/>
+          </a:p>
+          <a:p>
+            <a:pPr marL="324000" lvl="1" indent="-171450">
+              <a:buFont typeface="Arial" panose="020B0604020202020204" pitchFamily="34" charset="0"/>
+              <a:buChar char="•"/>
+            </a:pPr>
+            <a:r>
+              <a:rPr lang="en-US" sz="800" noProof="1"/>
+              <a:t>Caches credentials for all repos, and finds the unique usernames for current provider</a:t>
+            </a:r>
+          </a:p>
+          <a:p>
+            <a:pPr marL="324000" lvl="1" indent="-171450">
+              <a:buFont typeface="Arial" panose="020B0604020202020204" pitchFamily="34" charset="0"/>
+              <a:buChar char="•"/>
+            </a:pPr>
+            <a:r>
+              <a:rPr lang="en-US" sz="800" noProof="1"/>
+              <a:t>When user-name matches known credential, the TOKEN/password field is updated</a:t>
+            </a:r>
+          </a:p>
+        </p:txBody>
+      </p:sp>
+      <p:sp>
+        <p:nvSpPr>
+          <p:cNvPr id="8" name="textruta 4">
+            <a:extLst>
+              <a:ext uri="{FF2B5EF4-FFF2-40B4-BE49-F238E27FC236}">
+                <a16:creationId xmlns:a16="http://schemas.microsoft.com/office/drawing/2014/main" id="{0725C2E0-B09A-BD89-F02E-BED7F1342107}"/>
+              </a:ext>
+            </a:extLst>
+          </p:cNvPr>
+          <p:cNvSpPr txBox="1"/>
+          <p:nvPr/>
+        </p:nvSpPr>
+        <p:spPr>
+          <a:xfrm>
+            <a:off x="4416875" y="4478739"/>
+            <a:ext cx="3274288" cy="830997"/>
+          </a:xfrm>
+          <a:prstGeom prst="rect">
+            <a:avLst/>
+          </a:prstGeom>
+          <a:noFill/>
+          <a:ln>
+            <a:solidFill>
+              <a:schemeClr val="accent1"/>
+            </a:solidFill>
+          </a:ln>
+        </p:spPr>
+        <p:txBody>
+          <a:bodyPr wrap="square" rtlCol="0">
+            <a:spAutoFit/>
+          </a:bodyPr>
+          <a:lstStyle/>
+          <a:p>
+            <a:r>
+              <a:rPr lang="en-US" sz="800" b="1" noProof="1"/>
+              <a:t>The GUI for providers are implemented in the following way</a:t>
+            </a:r>
+            <a:br>
+              <a:rPr lang="en-US" sz="800" b="1" noProof="1"/>
+            </a:br>
+            <a:endParaRPr lang="en-US" sz="800" b="1" noProof="1"/>
+          </a:p>
+          <a:p>
+            <a:pPr marL="171450" indent="-171450">
+              <a:buFont typeface="Courier New" panose="02070309020205020404" pitchFamily="49" charset="0"/>
+              <a:buChar char="o"/>
+            </a:pPr>
+            <a:r>
+              <a:rPr lang="en-US" sz="800" noProof="1">
+                <a:solidFill>
+                  <a:schemeClr val="accent1"/>
+                </a:solidFill>
+              </a:rPr>
+              <a:t>Color icons </a:t>
+            </a:r>
+            <a:r>
+              <a:rPr lang="en-US" sz="800" noProof="1"/>
+              <a:t>must be 16x16, RGB to work in menues</a:t>
+            </a:r>
+          </a:p>
+          <a:p>
+            <a:pPr marL="171450" indent="-171450">
+              <a:buFont typeface="Courier New" panose="02070309020205020404" pitchFamily="49" charset="0"/>
+              <a:buChar char="o"/>
+            </a:pPr>
+            <a:r>
+              <a:rPr lang="en-US" sz="800" noProof="1">
+                <a:solidFill>
+                  <a:schemeClr val="accent1"/>
+                </a:solidFill>
+              </a:rPr>
+              <a:t>Seems that bigger matrix </a:t>
+            </a:r>
+            <a:r>
+              <a:rPr lang="en-US" sz="800" noProof="1"/>
+              <a:t>works for b/w github icon</a:t>
+            </a:r>
+          </a:p>
+          <a:p>
+            <a:pPr marL="171450" indent="-171450">
+              <a:buFont typeface="Courier New" panose="02070309020205020404" pitchFamily="49" charset="0"/>
+              <a:buChar char="o"/>
+            </a:pPr>
+            <a:r>
+              <a:rPr lang="en-US" sz="800" noProof="1"/>
+              <a:t>These icons are slightly fuzzy when viewed in settings.</a:t>
+            </a:r>
+          </a:p>
+          <a:p>
+            <a:pPr marL="171450" indent="-171450">
+              <a:buFont typeface="Courier New" panose="02070309020205020404" pitchFamily="49" charset="0"/>
+              <a:buChar char="o"/>
+            </a:pPr>
+            <a:endParaRPr lang="en-US" sz="800" noProof="1"/>
+          </a:p>
+        </p:txBody>
+      </p:sp>
+      <p:sp>
+        <p:nvSpPr>
+          <p:cNvPr id="9" name="textruta 5">
+            <a:extLst>
+              <a:ext uri="{FF2B5EF4-FFF2-40B4-BE49-F238E27FC236}">
+                <a16:creationId xmlns:a16="http://schemas.microsoft.com/office/drawing/2014/main" id="{2DFA1971-7891-05E5-E387-70DA5165528F}"/>
+              </a:ext>
+            </a:extLst>
+          </p:cNvPr>
+          <p:cNvSpPr txBox="1"/>
+          <p:nvPr/>
+        </p:nvSpPr>
+        <p:spPr>
+          <a:xfrm>
+            <a:off x="4270378" y="3749731"/>
+            <a:ext cx="846835" cy="461665"/>
+          </a:xfrm>
+          <a:prstGeom prst="rect">
+            <a:avLst/>
+          </a:prstGeom>
+          <a:noFill/>
+        </p:spPr>
+        <p:txBody>
+          <a:bodyPr wrap="none" rtlCol="0">
+            <a:spAutoFit/>
+          </a:bodyPr>
+          <a:lstStyle/>
+          <a:p>
+            <a:r>
+              <a:rPr lang="en-US" sz="2400" b="1" noProof="1"/>
+              <a:t>Icons</a:t>
+            </a:r>
+          </a:p>
+        </p:txBody>
+      </p:sp>
+    </p:spTree>
+    <p:extLst>
+      <p:ext uri="{BB962C8B-B14F-4D97-AF65-F5344CB8AC3E}">
+        <p14:creationId xmlns:p14="http://schemas.microsoft.com/office/powerpoint/2010/main" val="1071964948"/>
+      </p:ext>
+    </p:extLst>
+  </p:cSld>
+  <p:clrMapOvr>
+    <a:masterClrMapping/>
+  </p:clrMapOvr>
+</p:sld>
+</file>
+
+<file path=ppt/slides/slide8.xml><?xml version="1.0" encoding="utf-8"?>
+<p:sld xmlns:a="http://schemas.openxmlformats.org/drawingml/2006/main" xmlns:r="http://schemas.openxmlformats.org/officeDocument/2006/relationships" xmlns:p="http://schemas.openxmlformats.org/presentationml/2006/main">
+  <p:cSld>
+    <p:spTree>
+      <p:nvGrpSpPr>
         <p:cNvPr id="1" name=""/>
         <p:cNvGrpSpPr/>
         <p:nvPr/>
@@ -14043,7 +14839,7 @@
 </p:sld>
 </file>
 
-<file path=ppt/slides/slide8.xml><?xml version="1.0" encoding="utf-8"?>
+<file path=ppt/slides/slide9.xml><?xml version="1.0" encoding="utf-8"?>
 <p:sld xmlns:a="http://schemas.openxmlformats.org/drawingml/2006/main" xmlns:r="http://schemas.openxmlformats.org/officeDocument/2006/relationships" xmlns:p="http://schemas.openxmlformats.org/presentationml/2006/main">
   <p:cSld>
     <p:spTree>

--- a/docs/Tech-overview.pptx
+++ b/docs/Tech-overview.pptx
@@ -263,7 +263,7 @@
           <a:p>
             <a:fld id="{CA855E1B-8830-B64E-B102-DB2BBD0D9567}" type="datetimeFigureOut">
               <a:rPr lang="sv-SE" smtClean="0"/>
-              <a:t>2025-04-27</a:t>
+              <a:t>2025-05-20</a:t>
             </a:fld>
             <a:endParaRPr lang="sv-SE"/>
           </a:p>
@@ -433,7 +433,7 @@
           <a:p>
             <a:fld id="{CA855E1B-8830-B64E-B102-DB2BBD0D9567}" type="datetimeFigureOut">
               <a:rPr lang="sv-SE" smtClean="0"/>
-              <a:t>2025-04-27</a:t>
+              <a:t>2025-05-20</a:t>
             </a:fld>
             <a:endParaRPr lang="sv-SE"/>
           </a:p>
@@ -613,7 +613,7 @@
           <a:p>
             <a:fld id="{CA855E1B-8830-B64E-B102-DB2BBD0D9567}" type="datetimeFigureOut">
               <a:rPr lang="sv-SE" smtClean="0"/>
-              <a:t>2025-04-27</a:t>
+              <a:t>2025-05-20</a:t>
             </a:fld>
             <a:endParaRPr lang="sv-SE"/>
           </a:p>
@@ -783,7 +783,7 @@
           <a:p>
             <a:fld id="{CA855E1B-8830-B64E-B102-DB2BBD0D9567}" type="datetimeFigureOut">
               <a:rPr lang="sv-SE" smtClean="0"/>
-              <a:t>2025-04-27</a:t>
+              <a:t>2025-05-20</a:t>
             </a:fld>
             <a:endParaRPr lang="sv-SE"/>
           </a:p>
@@ -1027,7 +1027,7 @@
           <a:p>
             <a:fld id="{CA855E1B-8830-B64E-B102-DB2BBD0D9567}" type="datetimeFigureOut">
               <a:rPr lang="sv-SE" smtClean="0"/>
-              <a:t>2025-04-27</a:t>
+              <a:t>2025-05-20</a:t>
             </a:fld>
             <a:endParaRPr lang="sv-SE"/>
           </a:p>
@@ -1259,7 +1259,7 @@
           <a:p>
             <a:fld id="{CA855E1B-8830-B64E-B102-DB2BBD0D9567}" type="datetimeFigureOut">
               <a:rPr lang="sv-SE" smtClean="0"/>
-              <a:t>2025-04-27</a:t>
+              <a:t>2025-05-20</a:t>
             </a:fld>
             <a:endParaRPr lang="sv-SE"/>
           </a:p>
@@ -1626,7 +1626,7 @@
           <a:p>
             <a:fld id="{CA855E1B-8830-B64E-B102-DB2BBD0D9567}" type="datetimeFigureOut">
               <a:rPr lang="sv-SE" smtClean="0"/>
-              <a:t>2025-04-27</a:t>
+              <a:t>2025-05-20</a:t>
             </a:fld>
             <a:endParaRPr lang="sv-SE"/>
           </a:p>
@@ -1744,7 +1744,7 @@
           <a:p>
             <a:fld id="{CA855E1B-8830-B64E-B102-DB2BBD0D9567}" type="datetimeFigureOut">
               <a:rPr lang="sv-SE" smtClean="0"/>
-              <a:t>2025-04-27</a:t>
+              <a:t>2025-05-20</a:t>
             </a:fld>
             <a:endParaRPr lang="sv-SE"/>
           </a:p>
@@ -1839,7 +1839,7 @@
           <a:p>
             <a:fld id="{CA855E1B-8830-B64E-B102-DB2BBD0D9567}" type="datetimeFigureOut">
               <a:rPr lang="sv-SE" smtClean="0"/>
-              <a:t>2025-04-27</a:t>
+              <a:t>2025-05-20</a:t>
             </a:fld>
             <a:endParaRPr lang="sv-SE"/>
           </a:p>
@@ -2116,7 +2116,7 @@
           <a:p>
             <a:fld id="{CA855E1B-8830-B64E-B102-DB2BBD0D9567}" type="datetimeFigureOut">
               <a:rPr lang="sv-SE" smtClean="0"/>
-              <a:t>2025-04-27</a:t>
+              <a:t>2025-05-20</a:t>
             </a:fld>
             <a:endParaRPr lang="sv-SE"/>
           </a:p>
@@ -2373,7 +2373,7 @@
           <a:p>
             <a:fld id="{CA855E1B-8830-B64E-B102-DB2BBD0D9567}" type="datetimeFigureOut">
               <a:rPr lang="sv-SE" smtClean="0"/>
-              <a:t>2025-04-27</a:t>
+              <a:t>2025-05-20</a:t>
             </a:fld>
             <a:endParaRPr lang="sv-SE"/>
           </a:p>
@@ -2586,7 +2586,7 @@
           <a:p>
             <a:fld id="{CA855E1B-8830-B64E-B102-DB2BBD0D9567}" type="datetimeFigureOut">
               <a:rPr lang="sv-SE" smtClean="0"/>
-              <a:t>2025-04-27</a:t>
+              <a:t>2025-05-20</a:t>
             </a:fld>
             <a:endParaRPr lang="sv-SE"/>
           </a:p>
@@ -11129,7 +11129,7 @@
         <p:spPr>
           <a:xfrm>
             <a:off x="416902" y="1472403"/>
-            <a:ext cx="5396401" cy="5755422"/>
+            <a:ext cx="5396401" cy="5878532"/>
           </a:xfrm>
           <a:prstGeom prst="rect">
             <a:avLst/>
@@ -11182,6 +11182,16 @@
               <a:rPr lang="en-US" sz="800" b="1" noProof="1"/>
               <a:t>I had to make a bash script which places signal files, that are then picked up by pragma-git</a:t>
             </a:r>
+          </a:p>
+          <a:p>
+            <a:pPr marL="171450" indent="-171450">
+              <a:buFontTx/>
+              <a:buChar char="-"/>
+            </a:pPr>
+            <a:r>
+              <a:rPr lang="en-US" sz="800" b="1" noProof="1"/>
+              <a:t>The sigalling file “pragma-merge-running” is controlling the flow between git and pragma-merge (via pragma-git)</a:t>
+            </a:r>
             <a:br>
               <a:rPr lang="en-US" sz="800" b="1" noProof="1"/>
             </a:br>
@@ -11350,13 +11360,17 @@
               <a:buChar char="•"/>
             </a:pPr>
             <a:r>
-              <a:rPr lang="en-US" sz="800" noProof="1"/>
-              <a:t>pragma-merge-running # Flag to start pragma-merge.js. Polled by script ‘pragma-merge’ to know when finished</a:t>
+              <a:rPr lang="en-US" sz="800" b="1" noProof="1"/>
+              <a:t>pragma-merge-running</a:t>
+            </a:r>
+            <a:r>
+              <a:rPr lang="en-US" sz="800" noProof="1"/>
+              <a:t> # Flag to start pragma-merge.js. Polled by script ‘pragma-merge’ to know when finished</a:t>
             </a:r>
             <a:br>
-              <a:rPr lang="en-US" sz="800" noProof="1"/>
+              <a:rPr lang="en-US" sz="800" b="1" noProof="1"/>
             </a:br>
-            <a:endParaRPr lang="en-US" sz="800" noProof="1"/>
+            <a:endParaRPr lang="en-US" sz="800" b="1" noProof="1"/>
           </a:p>
           <a:p>
             <a:pPr marL="171450" indent="-171450">
@@ -11457,9 +11471,17 @@
                   <a:schemeClr val="accent1"/>
                 </a:solidFill>
               </a:rPr>
-              <a:t>Pragma-git listens to creation of file ‘pragma-merge-running’</a:t>
-            </a:r>
-            <a:endParaRPr lang="en-US" sz="800" noProof="1"/>
+              <a:t>Pragma-git listens to creation of file </a:t>
+            </a:r>
+            <a:r>
+              <a:rPr lang="en-US" sz="800" b="1" noProof="1">
+                <a:solidFill>
+                  <a:schemeClr val="accent1"/>
+                </a:solidFill>
+              </a:rPr>
+              <a:t>‘pragma-merge-running’</a:t>
+            </a:r>
+            <a:endParaRPr lang="en-US" sz="800" b="1" noProof="1"/>
           </a:p>
           <a:p>
             <a:pPr marL="324000" lvl="1" indent="-171450">
@@ -11498,7 +11520,15 @@
             </a:pPr>
             <a:r>
               <a:rPr lang="en-US" sz="800" noProof="1"/>
-              <a:t>file ’pragma-merge-running’ is deleted to signal that ‘pragma-merge.js’ is closed</a:t>
+              <a:t>file </a:t>
+            </a:r>
+            <a:r>
+              <a:rPr lang="en-US" sz="800" b="1" noProof="1"/>
+              <a:t>’pragma-merge-running</a:t>
+            </a:r>
+            <a:r>
+              <a:rPr lang="en-US" sz="800" noProof="1"/>
+              <a:t>’ is deleted to signal that ‘pragma-merge.js’ is closed</a:t>
             </a:r>
           </a:p>
           <a:p>
@@ -11540,7 +11570,11 @@
             </a:pPr>
             <a:r>
               <a:rPr lang="en-US" sz="800" noProof="1"/>
-              <a:t>waits for deletion of file ‘pragma-merge-running’</a:t>
+              <a:t>waits for deletion of file </a:t>
+            </a:r>
+            <a:r>
+              <a:rPr lang="en-US" sz="800" b="1" noProof="1"/>
+              <a:t>‘pragma-merge-running’</a:t>
             </a:r>
           </a:p>
           <a:p>
@@ -11587,7 +11621,7 @@
         </p:nvSpPr>
         <p:spPr>
           <a:xfrm>
-            <a:off x="416901" y="7263108"/>
+            <a:off x="416902" y="7408417"/>
             <a:ext cx="5396401" cy="584775"/>
           </a:xfrm>
           <a:prstGeom prst="rect">

--- a/docs/Tech-overview.pptx
+++ b/docs/Tech-overview.pptx
@@ -12,8 +12,9 @@
     <p:sldId id="262" r:id="rId6"/>
     <p:sldId id="257" r:id="rId7"/>
     <p:sldId id="264" r:id="rId8"/>
-    <p:sldId id="258" r:id="rId9"/>
-    <p:sldId id="263" r:id="rId10"/>
+    <p:sldId id="265" r:id="rId9"/>
+    <p:sldId id="258" r:id="rId10"/>
+    <p:sldId id="263" r:id="rId11"/>
   </p:sldIdLst>
   <p:sldSz cx="12801600" cy="9601200" type="A3"/>
   <p:notesSz cx="6858000" cy="9144000"/>
@@ -263,7 +264,7 @@
           <a:p>
             <a:fld id="{CA855E1B-8830-B64E-B102-DB2BBD0D9567}" type="datetimeFigureOut">
               <a:rPr lang="sv-SE" smtClean="0"/>
-              <a:t>2025-05-20</a:t>
+              <a:t>2025-05-23</a:t>
             </a:fld>
             <a:endParaRPr lang="sv-SE"/>
           </a:p>
@@ -433,7 +434,7 @@
           <a:p>
             <a:fld id="{CA855E1B-8830-B64E-B102-DB2BBD0D9567}" type="datetimeFigureOut">
               <a:rPr lang="sv-SE" smtClean="0"/>
-              <a:t>2025-05-20</a:t>
+              <a:t>2025-05-23</a:t>
             </a:fld>
             <a:endParaRPr lang="sv-SE"/>
           </a:p>
@@ -613,7 +614,7 @@
           <a:p>
             <a:fld id="{CA855E1B-8830-B64E-B102-DB2BBD0D9567}" type="datetimeFigureOut">
               <a:rPr lang="sv-SE" smtClean="0"/>
-              <a:t>2025-05-20</a:t>
+              <a:t>2025-05-23</a:t>
             </a:fld>
             <a:endParaRPr lang="sv-SE"/>
           </a:p>
@@ -783,7 +784,7 @@
           <a:p>
             <a:fld id="{CA855E1B-8830-B64E-B102-DB2BBD0D9567}" type="datetimeFigureOut">
               <a:rPr lang="sv-SE" smtClean="0"/>
-              <a:t>2025-05-20</a:t>
+              <a:t>2025-05-23</a:t>
             </a:fld>
             <a:endParaRPr lang="sv-SE"/>
           </a:p>
@@ -1027,7 +1028,7 @@
           <a:p>
             <a:fld id="{CA855E1B-8830-B64E-B102-DB2BBD0D9567}" type="datetimeFigureOut">
               <a:rPr lang="sv-SE" smtClean="0"/>
-              <a:t>2025-05-20</a:t>
+              <a:t>2025-05-23</a:t>
             </a:fld>
             <a:endParaRPr lang="sv-SE"/>
           </a:p>
@@ -1259,7 +1260,7 @@
           <a:p>
             <a:fld id="{CA855E1B-8830-B64E-B102-DB2BBD0D9567}" type="datetimeFigureOut">
               <a:rPr lang="sv-SE" smtClean="0"/>
-              <a:t>2025-05-20</a:t>
+              <a:t>2025-05-23</a:t>
             </a:fld>
             <a:endParaRPr lang="sv-SE"/>
           </a:p>
@@ -1626,7 +1627,7 @@
           <a:p>
             <a:fld id="{CA855E1B-8830-B64E-B102-DB2BBD0D9567}" type="datetimeFigureOut">
               <a:rPr lang="sv-SE" smtClean="0"/>
-              <a:t>2025-05-20</a:t>
+              <a:t>2025-05-23</a:t>
             </a:fld>
             <a:endParaRPr lang="sv-SE"/>
           </a:p>
@@ -1744,7 +1745,7 @@
           <a:p>
             <a:fld id="{CA855E1B-8830-B64E-B102-DB2BBD0D9567}" type="datetimeFigureOut">
               <a:rPr lang="sv-SE" smtClean="0"/>
-              <a:t>2025-05-20</a:t>
+              <a:t>2025-05-23</a:t>
             </a:fld>
             <a:endParaRPr lang="sv-SE"/>
           </a:p>
@@ -1839,7 +1840,7 @@
           <a:p>
             <a:fld id="{CA855E1B-8830-B64E-B102-DB2BBD0D9567}" type="datetimeFigureOut">
               <a:rPr lang="sv-SE" smtClean="0"/>
-              <a:t>2025-05-20</a:t>
+              <a:t>2025-05-23</a:t>
             </a:fld>
             <a:endParaRPr lang="sv-SE"/>
           </a:p>
@@ -2116,7 +2117,7 @@
           <a:p>
             <a:fld id="{CA855E1B-8830-B64E-B102-DB2BBD0D9567}" type="datetimeFigureOut">
               <a:rPr lang="sv-SE" smtClean="0"/>
-              <a:t>2025-05-20</a:t>
+              <a:t>2025-05-23</a:t>
             </a:fld>
             <a:endParaRPr lang="sv-SE"/>
           </a:p>
@@ -2373,7 +2374,7 @@
           <a:p>
             <a:fld id="{CA855E1B-8830-B64E-B102-DB2BBD0D9567}" type="datetimeFigureOut">
               <a:rPr lang="sv-SE" smtClean="0"/>
-              <a:t>2025-05-20</a:t>
+              <a:t>2025-05-23</a:t>
             </a:fld>
             <a:endParaRPr lang="sv-SE"/>
           </a:p>
@@ -2586,7 +2587,7 @@
           <a:p>
             <a:fld id="{CA855E1B-8830-B64E-B102-DB2BBD0D9567}" type="datetimeFigureOut">
               <a:rPr lang="sv-SE" smtClean="0"/>
-              <a:t>2025-05-20</a:t>
+              <a:t>2025-05-23</a:t>
             </a:fld>
             <a:endParaRPr lang="sv-SE"/>
           </a:p>
@@ -3318,6 +3319,861 @@
     <p:extLst>
       <p:ext uri="{BB962C8B-B14F-4D97-AF65-F5344CB8AC3E}">
         <p14:creationId xmlns:p14="http://schemas.microsoft.com/office/powerpoint/2010/main" val="2616709653"/>
+      </p:ext>
+    </p:extLst>
+  </p:cSld>
+  <p:clrMapOvr>
+    <a:masterClrMapping/>
+  </p:clrMapOvr>
+</p:sld>
+</file>
+
+<file path=ppt/slides/slide10.xml><?xml version="1.0" encoding="utf-8"?>
+<p:sld xmlns:a="http://schemas.openxmlformats.org/drawingml/2006/main" xmlns:r="http://schemas.openxmlformats.org/officeDocument/2006/relationships" xmlns:p="http://schemas.openxmlformats.org/presentationml/2006/main">
+  <p:cSld>
+    <p:spTree>
+      <p:nvGrpSpPr>
+        <p:cNvPr id="1" name=""/>
+        <p:cNvGrpSpPr/>
+        <p:nvPr/>
+      </p:nvGrpSpPr>
+      <p:grpSpPr>
+        <a:xfrm>
+          <a:off x="0" y="0"/>
+          <a:ext cx="0" cy="0"/>
+          <a:chOff x="0" y="0"/>
+          <a:chExt cx="0" cy="0"/>
+        </a:xfrm>
+      </p:grpSpPr>
+      <p:sp>
+        <p:nvSpPr>
+          <p:cNvPr id="4" name="textruta 3">
+            <a:extLst>
+              <a:ext uri="{FF2B5EF4-FFF2-40B4-BE49-F238E27FC236}">
+                <a16:creationId xmlns:a16="http://schemas.microsoft.com/office/drawing/2014/main" id="{83E1DA8D-DE72-7249-821E-88B0B328518E}"/>
+              </a:ext>
+            </a:extLst>
+          </p:cNvPr>
+          <p:cNvSpPr txBox="1"/>
+          <p:nvPr/>
+        </p:nvSpPr>
+        <p:spPr>
+          <a:xfrm>
+            <a:off x="416902" y="122259"/>
+            <a:ext cx="1170705" cy="830997"/>
+          </a:xfrm>
+          <a:prstGeom prst="rect">
+            <a:avLst/>
+          </a:prstGeom>
+          <a:noFill/>
+        </p:spPr>
+        <p:txBody>
+          <a:bodyPr wrap="none" rtlCol="0">
+            <a:spAutoFit/>
+          </a:bodyPr>
+          <a:lstStyle/>
+          <a:p>
+            <a:r>
+              <a:rPr lang="en-US" sz="4800" b="1" noProof="1">
+                <a:solidFill>
+                  <a:schemeClr val="accent1"/>
+                </a:solidFill>
+              </a:rPr>
+              <a:t>Dev</a:t>
+            </a:r>
+          </a:p>
+        </p:txBody>
+      </p:sp>
+      <p:sp>
+        <p:nvSpPr>
+          <p:cNvPr id="5" name="textruta 4">
+            <a:extLst>
+              <a:ext uri="{FF2B5EF4-FFF2-40B4-BE49-F238E27FC236}">
+                <a16:creationId xmlns:a16="http://schemas.microsoft.com/office/drawing/2014/main" id="{39AA015C-8BF8-B04E-A7BD-D1FFFF1FCC82}"/>
+              </a:ext>
+            </a:extLst>
+          </p:cNvPr>
+          <p:cNvSpPr txBox="1"/>
+          <p:nvPr/>
+        </p:nvSpPr>
+        <p:spPr>
+          <a:xfrm>
+            <a:off x="401904" y="1545040"/>
+            <a:ext cx="3274288" cy="4154984"/>
+          </a:xfrm>
+          <a:prstGeom prst="rect">
+            <a:avLst/>
+          </a:prstGeom>
+          <a:noFill/>
+          <a:ln>
+            <a:solidFill>
+              <a:schemeClr val="accent1"/>
+            </a:solidFill>
+          </a:ln>
+        </p:spPr>
+        <p:txBody>
+          <a:bodyPr wrap="square" rtlCol="0">
+            <a:spAutoFit/>
+          </a:bodyPr>
+          <a:lstStyle/>
+          <a:p>
+            <a:r>
+              <a:rPr lang="en-US" sz="800" b="1" noProof="1"/>
+              <a:t>Debug flags can be set from settings.json:</a:t>
+            </a:r>
+            <a:br>
+              <a:rPr lang="en-US" sz="800" b="1" noProof="1"/>
+            </a:br>
+            <a:endParaRPr lang="en-US" sz="800" b="1" noProof="1"/>
+          </a:p>
+          <a:p>
+            <a:pPr marL="171450" indent="-171450">
+              <a:buFont typeface="Courier New" panose="02070309020205020404" pitchFamily="49" charset="0"/>
+              <a:buChar char="o"/>
+            </a:pPr>
+            <a:r>
+              <a:rPr lang="en-US" sz="800" noProof="1">
+                <a:latin typeface="Courier New" panose="02070309020205020404" pitchFamily="49" charset="0"/>
+                <a:cs typeface="Courier New" panose="02070309020205020404" pitchFamily="49" charset="0"/>
+              </a:rPr>
+              <a:t>debug = true </a:t>
+            </a:r>
+            <a:r>
+              <a:rPr lang="en-US" sz="800" noProof="1"/>
+              <a:t>(git debug env variables in main)</a:t>
+            </a:r>
+            <a:br>
+              <a:rPr lang="en-US" sz="800" noProof="1"/>
+            </a:br>
+            <a:r>
+              <a:rPr lang="en-US" sz="800" noProof="1">
+                <a:latin typeface="Courier New" panose="02070309020205020404" pitchFamily="49" charset="0"/>
+                <a:cs typeface="Courier New" panose="02070309020205020404" pitchFamily="49" charset="0"/>
+              </a:rPr>
+              <a:t>graph.debug = true </a:t>
+            </a:r>
+            <a:r>
+              <a:rPr lang="en-US" sz="800" noProof="1"/>
+              <a:t>(graph layout debug info)</a:t>
+            </a:r>
+          </a:p>
+          <a:p>
+            <a:pPr marL="171450" indent="-171450">
+              <a:buFont typeface="Courier New" panose="02070309020205020404" pitchFamily="49" charset="0"/>
+              <a:buChar char="o"/>
+            </a:pPr>
+            <a:endParaRPr lang="en-US" sz="800" noProof="1"/>
+          </a:p>
+          <a:p>
+            <a:r>
+              <a:rPr lang="en-US" sz="800" b="1" noProof="1"/>
+              <a:t>Debug console, press F12 (if nwjs SDK version)</a:t>
+            </a:r>
+          </a:p>
+          <a:p>
+            <a:endParaRPr lang="en-US" sz="800" b="1" noProof="1"/>
+          </a:p>
+          <a:p>
+            <a:r>
+              <a:rPr lang="en-US" sz="800" b="1" noProof="1"/>
+              <a:t>Chrome  remote debug (useful if gui doesn’t open)</a:t>
+            </a:r>
+          </a:p>
+          <a:p>
+            <a:pPr marL="171450" indent="-171450">
+              <a:buFont typeface="Courier New" panose="02070309020205020404" pitchFamily="49" charset="0"/>
+              <a:buChar char="o"/>
+            </a:pPr>
+            <a:r>
+              <a:rPr lang="en-US" sz="800" noProof="1"/>
+              <a:t>Start with flag:</a:t>
+            </a:r>
+            <a:br>
+              <a:rPr lang="en-US" sz="800" noProof="1">
+                <a:latin typeface="Courier New" panose="02070309020205020404" pitchFamily="49" charset="0"/>
+                <a:cs typeface="Courier New" panose="02070309020205020404" pitchFamily="49" charset="0"/>
+              </a:rPr>
+            </a:br>
+            <a:r>
+              <a:rPr lang="en-US" sz="800" noProof="1">
+                <a:latin typeface="Courier New" panose="02070309020205020404" pitchFamily="49" charset="0"/>
+                <a:cs typeface="Courier New" panose="02070309020205020404" pitchFamily="49" charset="0"/>
+              </a:rPr>
+              <a:t>/Applications/nwjs.app/Contents/MacOS/nwjs  --remote-debugging-port=9222 .</a:t>
+            </a:r>
+          </a:p>
+          <a:p>
+            <a:pPr marL="171450" indent="-171450">
+              <a:buFont typeface="Courier New" panose="02070309020205020404" pitchFamily="49" charset="0"/>
+              <a:buChar char="o"/>
+            </a:pPr>
+            <a:r>
+              <a:rPr lang="en-US" sz="800" noProof="1"/>
+              <a:t>Or start from folder containing ‘package.json’:</a:t>
+            </a:r>
+            <a:br>
+              <a:rPr lang="en-US" sz="800" noProof="1">
+                <a:latin typeface="Courier New" panose="02070309020205020404" pitchFamily="49" charset="0"/>
+                <a:cs typeface="Courier New" panose="02070309020205020404" pitchFamily="49" charset="0"/>
+              </a:rPr>
+            </a:br>
+            <a:r>
+              <a:rPr lang="en-US" sz="800" noProof="1">
+                <a:latin typeface="Courier New" panose="02070309020205020404" pitchFamily="49" charset="0"/>
+                <a:cs typeface="Courier New" panose="02070309020205020404" pitchFamily="49" charset="0"/>
+              </a:rPr>
+              <a:t>npm start</a:t>
+            </a:r>
+          </a:p>
+          <a:p>
+            <a:pPr marL="171450" indent="-171450">
+              <a:buFont typeface="Courier New" panose="02070309020205020404" pitchFamily="49" charset="0"/>
+              <a:buChar char="o"/>
+            </a:pPr>
+            <a:r>
+              <a:rPr lang="en-US" sz="800" noProof="1"/>
+              <a:t>Chrome browser:</a:t>
+            </a:r>
+            <a:br>
+              <a:rPr lang="en-US" sz="800" noProof="1"/>
+            </a:br>
+            <a:r>
+              <a:rPr lang="en-US" sz="800" noProof="1">
+                <a:latin typeface="Courier New" panose="02070309020205020404" pitchFamily="49" charset="0"/>
+                <a:cs typeface="Courier New" panose="02070309020205020404" pitchFamily="49" charset="0"/>
+              </a:rPr>
+              <a:t>chrome://inspect</a:t>
+            </a:r>
+            <a:endParaRPr lang="en-US" sz="800" noProof="1"/>
+          </a:p>
+          <a:p>
+            <a:pPr marL="171450" indent="-171450">
+              <a:buFont typeface="Courier New" panose="02070309020205020404" pitchFamily="49" charset="0"/>
+              <a:buChar char="o"/>
+            </a:pPr>
+            <a:endParaRPr lang="en-US" sz="800" b="1" noProof="1"/>
+          </a:p>
+          <a:p>
+            <a:r>
+              <a:rPr lang="en-US" sz="800" b="1" noProof="1"/>
+              <a:t>Break debug on condition</a:t>
+            </a:r>
+          </a:p>
+          <a:p>
+            <a:pPr marL="171450" indent="-171450">
+              <a:buFont typeface="Courier New" panose="02070309020205020404" pitchFamily="49" charset="0"/>
+              <a:buChar char="o"/>
+            </a:pPr>
+            <a:r>
+              <a:rPr lang="en-US" sz="800" noProof="1"/>
+              <a:t>Conditional break point : </a:t>
+            </a:r>
+            <a:br>
+              <a:rPr lang="en-US" sz="800" noProof="1"/>
+            </a:br>
+            <a:r>
+              <a:rPr lang="en-US" sz="800" noProof="1"/>
+              <a:t>make break point</a:t>
+            </a:r>
+            <a:br>
+              <a:rPr lang="en-US" sz="800" noProof="1"/>
+            </a:br>
+            <a:r>
+              <a:rPr lang="en-US" sz="800" noProof="1"/>
+              <a:t>right-click and make condition</a:t>
+            </a:r>
+          </a:p>
+          <a:p>
+            <a:pPr marL="171450" indent="-171450">
+              <a:buFont typeface="Courier New" panose="02070309020205020404" pitchFamily="49" charset="0"/>
+              <a:buChar char="o"/>
+            </a:pPr>
+            <a:r>
+              <a:rPr lang="en-US" sz="800" noProof="1"/>
+              <a:t>For graph, conditional break point:  </a:t>
+            </a:r>
+            <a:r>
+              <a:rPr lang="en-US" sz="800" noProof="1">
+                <a:latin typeface="Courier New" panose="02070309020205020404" pitchFamily="49" charset="0"/>
+                <a:cs typeface="Courier New" panose="02070309020205020404" pitchFamily="49" charset="0"/>
+              </a:rPr>
+              <a:t>stop(commit)</a:t>
+            </a:r>
+            <a:br>
+              <a:rPr lang="en-US" sz="800" noProof="1"/>
+            </a:br>
+            <a:r>
+              <a:rPr lang="en-US" sz="800" noProof="1"/>
+              <a:t>stops on marked commit in graph window</a:t>
+            </a:r>
+          </a:p>
+          <a:p>
+            <a:pPr marL="171450" indent="-171450">
+              <a:buFont typeface="Courier New" panose="02070309020205020404" pitchFamily="49" charset="0"/>
+              <a:buChar char="o"/>
+            </a:pPr>
+            <a:endParaRPr lang="en-US" sz="800" noProof="1"/>
+          </a:p>
+          <a:p>
+            <a:r>
+              <a:rPr lang="en-US" sz="800" b="1" noProof="1"/>
+              <a:t>Reload window</a:t>
+            </a:r>
+          </a:p>
+          <a:p>
+            <a:pPr marL="171450" indent="-171450">
+              <a:buFont typeface="Courier New" panose="02070309020205020404" pitchFamily="49" charset="0"/>
+              <a:buChar char="o"/>
+            </a:pPr>
+            <a:r>
+              <a:rPr lang="en-US" sz="800" noProof="1"/>
+              <a:t>typically from debug console: </a:t>
+            </a:r>
+            <a:r>
+              <a:rPr lang="en-US" sz="800" noProof="1">
+                <a:latin typeface="Courier New" panose="02070309020205020404" pitchFamily="49" charset="0"/>
+                <a:cs typeface="Courier New" panose="02070309020205020404" pitchFamily="49" charset="0"/>
+              </a:rPr>
+              <a:t>injectIntoJs(document)</a:t>
+            </a:r>
+            <a:br>
+              <a:rPr lang="en-US" sz="800" noProof="1"/>
+            </a:br>
+            <a:r>
+              <a:rPr lang="en-US" sz="800" noProof="1"/>
+              <a:t>(or similar command, use function starting on load)</a:t>
+            </a:r>
+          </a:p>
+          <a:p>
+            <a:pPr marL="171450" indent="-171450">
+              <a:buFont typeface="Courier New" panose="02070309020205020404" pitchFamily="49" charset="0"/>
+              <a:buChar char="o"/>
+            </a:pPr>
+            <a:endParaRPr lang="en-US" sz="800" noProof="1"/>
+          </a:p>
+          <a:p>
+            <a:r>
+              <a:rPr lang="en-US" sz="800" b="1" noProof="1"/>
+              <a:t>Console.log to main dev console</a:t>
+            </a:r>
+          </a:p>
+          <a:p>
+            <a:pPr marL="171450" indent="-171450">
+              <a:buFont typeface="Courier New" panose="02070309020205020404" pitchFamily="49" charset="0"/>
+              <a:buChar char="o"/>
+            </a:pPr>
+            <a:r>
+              <a:rPr lang="en-US" sz="800" noProof="1"/>
+              <a:t>Define global.log function in app.js, which logs from everywhere to main dev console</a:t>
+            </a:r>
+          </a:p>
+          <a:p>
+            <a:pPr marL="171450" indent="-171450">
+              <a:buFont typeface="Courier New" panose="02070309020205020404" pitchFamily="49" charset="0"/>
+              <a:buChar char="o"/>
+            </a:pPr>
+            <a:r>
+              <a:rPr lang="en-US" sz="800" noProof="1">
+                <a:latin typeface="Courier New" panose="02070309020205020404" pitchFamily="49" charset="0"/>
+                <a:cs typeface="Courier New" panose="02070309020205020404" pitchFamily="49" charset="0"/>
+              </a:rPr>
+              <a:t>global.log(‘message’)</a:t>
+            </a:r>
+            <a:endParaRPr lang="en-US" sz="800" noProof="1"/>
+          </a:p>
+          <a:p>
+            <a:br>
+              <a:rPr lang="en-US" sz="800" noProof="1"/>
+            </a:br>
+            <a:endParaRPr lang="en-US" sz="800" noProof="1"/>
+          </a:p>
+        </p:txBody>
+      </p:sp>
+      <p:sp>
+        <p:nvSpPr>
+          <p:cNvPr id="6" name="textruta 5">
+            <a:extLst>
+              <a:ext uri="{FF2B5EF4-FFF2-40B4-BE49-F238E27FC236}">
+                <a16:creationId xmlns:a16="http://schemas.microsoft.com/office/drawing/2014/main" id="{EB22BA33-1BE2-9C4E-857E-F8FF1526BB6F}"/>
+              </a:ext>
+            </a:extLst>
+          </p:cNvPr>
+          <p:cNvSpPr txBox="1"/>
+          <p:nvPr/>
+        </p:nvSpPr>
+        <p:spPr>
+          <a:xfrm>
+            <a:off x="318798" y="953256"/>
+            <a:ext cx="1098378" cy="461665"/>
+          </a:xfrm>
+          <a:prstGeom prst="rect">
+            <a:avLst/>
+          </a:prstGeom>
+          <a:noFill/>
+        </p:spPr>
+        <p:txBody>
+          <a:bodyPr wrap="none" rtlCol="0">
+            <a:spAutoFit/>
+          </a:bodyPr>
+          <a:lstStyle/>
+          <a:p>
+            <a:r>
+              <a:rPr lang="en-US" sz="2400" b="1" noProof="1"/>
+              <a:t>DEBUG</a:t>
+            </a:r>
+          </a:p>
+        </p:txBody>
+      </p:sp>
+      <p:sp>
+        <p:nvSpPr>
+          <p:cNvPr id="7" name="textruta 6">
+            <a:extLst>
+              <a:ext uri="{FF2B5EF4-FFF2-40B4-BE49-F238E27FC236}">
+                <a16:creationId xmlns:a16="http://schemas.microsoft.com/office/drawing/2014/main" id="{3904C800-EE25-4742-BFE5-CD6F10B48921}"/>
+              </a:ext>
+            </a:extLst>
+          </p:cNvPr>
+          <p:cNvSpPr txBox="1"/>
+          <p:nvPr/>
+        </p:nvSpPr>
+        <p:spPr>
+          <a:xfrm>
+            <a:off x="4192240" y="1545040"/>
+            <a:ext cx="3274288" cy="2185214"/>
+          </a:xfrm>
+          <a:prstGeom prst="rect">
+            <a:avLst/>
+          </a:prstGeom>
+          <a:noFill/>
+          <a:ln>
+            <a:solidFill>
+              <a:schemeClr val="accent1"/>
+            </a:solidFill>
+          </a:ln>
+        </p:spPr>
+        <p:txBody>
+          <a:bodyPr wrap="square" rtlCol="0">
+            <a:spAutoFit/>
+          </a:bodyPr>
+          <a:lstStyle/>
+          <a:p>
+            <a:r>
+              <a:rPr lang="en-US" sz="800" b="1" noProof="1"/>
+              <a:t>Logging to file  ‘.Pragma-git/.tmp/pragma-git-log.txt’</a:t>
+            </a:r>
+          </a:p>
+          <a:p>
+            <a:endParaRPr lang="en-US" sz="800" b="1" noProof="1"/>
+          </a:p>
+          <a:p>
+            <a:r>
+              <a:rPr lang="en-US" sz="800" b="1" noProof="1"/>
+              <a:t>Logging messages :</a:t>
+            </a:r>
+          </a:p>
+          <a:p>
+            <a:pPr marL="171450" indent="-171450">
+              <a:buFont typeface="Courier New" panose="02070309020205020404" pitchFamily="49" charset="0"/>
+              <a:buChar char="o"/>
+            </a:pPr>
+            <a:r>
+              <a:rPr lang="en-US" sz="800" noProof="1"/>
+              <a:t>‘pragmaLog(message)’ command writes directly to file</a:t>
+            </a:r>
+            <a:br>
+              <a:rPr lang="en-US" sz="800" b="1" noProof="1"/>
+            </a:br>
+            <a:r>
+              <a:rPr lang="en-US" sz="800" noProof="1"/>
+              <a:t>auto-removes credentials in URL</a:t>
+            </a:r>
+            <a:br>
+              <a:rPr lang="en-US" sz="800" noProof="1"/>
+            </a:br>
+            <a:r>
+              <a:rPr lang="en-US" sz="800" noProof="1"/>
+              <a:t>adds time stamp</a:t>
+            </a:r>
+            <a:br>
+              <a:rPr lang="en-US" sz="800" noProof="1"/>
+            </a:br>
+            <a:endParaRPr lang="en-US" sz="800" b="1" noProof="1"/>
+          </a:p>
+          <a:p>
+            <a:r>
+              <a:rPr lang="en-US" sz="800" b="1" noProof="1"/>
+              <a:t>simpleGitLog(pwd) </a:t>
+            </a:r>
+          </a:p>
+          <a:p>
+            <a:pPr marL="171450" indent="-171450">
+              <a:buFont typeface="Courier New" panose="02070309020205020404" pitchFamily="49" charset="0"/>
+              <a:buChar char="o"/>
+            </a:pPr>
+            <a:r>
+              <a:rPr lang="en-US" sz="800" noProof="1"/>
+              <a:t>Drop-in replacement for simpleGit</a:t>
+            </a:r>
+            <a:br>
+              <a:rPr lang="en-US" sz="800" b="1" noProof="1"/>
+            </a:br>
+            <a:r>
+              <a:rPr lang="en-US" sz="800" noProof="1"/>
+              <a:t>takes one argument (I always populate it as the path to the git repo)</a:t>
+            </a:r>
+          </a:p>
+          <a:p>
+            <a:pPr marL="171450" indent="-171450">
+              <a:buFont typeface="Courier New" panose="02070309020205020404" pitchFamily="49" charset="0"/>
+              <a:buChar char="o"/>
+            </a:pPr>
+            <a:r>
+              <a:rPr lang="en-US" sz="800" noProof="1"/>
+              <a:t>Uses function ‘sendGitOutputToFile’ to write git command, stdout, stderr. Function pragmaLog is used to print to log file</a:t>
+            </a:r>
+          </a:p>
+          <a:p>
+            <a:pPr marL="171450" indent="-171450">
+              <a:buFont typeface="Courier New" panose="02070309020205020404" pitchFamily="49" charset="0"/>
+              <a:buChar char="o"/>
+            </a:pPr>
+            <a:endParaRPr lang="en-US" sz="800" b="1" noProof="1"/>
+          </a:p>
+          <a:p>
+            <a:pPr marL="171450" indent="-171450">
+              <a:buFont typeface="Courier New" panose="02070309020205020404" pitchFamily="49" charset="0"/>
+              <a:buChar char="o"/>
+            </a:pPr>
+            <a:r>
+              <a:rPr lang="en-US" sz="800" noProof="1"/>
+              <a:t>All logging commands are defined in app.js. </a:t>
+            </a:r>
+          </a:p>
+          <a:p>
+            <a:pPr marL="171450" indent="-171450">
+              <a:buFont typeface="Courier New" panose="02070309020205020404" pitchFamily="49" charset="0"/>
+              <a:buChar char="o"/>
+            </a:pPr>
+            <a:r>
+              <a:rPr lang="en-US" sz="800" noProof="1"/>
+              <a:t>Can be called from children to app.js by using ‘opener.pragmaLog’ or  ‘opener. simpleGitLog’</a:t>
+            </a:r>
+            <a:br>
+              <a:rPr lang="en-US" sz="800" noProof="1"/>
+            </a:br>
+            <a:endParaRPr lang="en-US" sz="800" noProof="1"/>
+          </a:p>
+        </p:txBody>
+      </p:sp>
+      <p:sp>
+        <p:nvSpPr>
+          <p:cNvPr id="8" name="textruta 7">
+            <a:extLst>
+              <a:ext uri="{FF2B5EF4-FFF2-40B4-BE49-F238E27FC236}">
+                <a16:creationId xmlns:a16="http://schemas.microsoft.com/office/drawing/2014/main" id="{7CCC12FE-9487-E148-A422-EE7A0D65A7FC}"/>
+              </a:ext>
+            </a:extLst>
+          </p:cNvPr>
+          <p:cNvSpPr txBox="1"/>
+          <p:nvPr/>
+        </p:nvSpPr>
+        <p:spPr>
+          <a:xfrm>
+            <a:off x="4109134" y="953256"/>
+            <a:ext cx="1160254" cy="461665"/>
+          </a:xfrm>
+          <a:prstGeom prst="rect">
+            <a:avLst/>
+          </a:prstGeom>
+          <a:noFill/>
+        </p:spPr>
+        <p:txBody>
+          <a:bodyPr wrap="none" rtlCol="0">
+            <a:spAutoFit/>
+          </a:bodyPr>
+          <a:lstStyle/>
+          <a:p>
+            <a:r>
+              <a:rPr lang="en-US" sz="2400" b="1" noProof="1"/>
+              <a:t>Logging</a:t>
+            </a:r>
+          </a:p>
+        </p:txBody>
+      </p:sp>
+      <p:sp>
+        <p:nvSpPr>
+          <p:cNvPr id="11" name="textruta 10">
+            <a:extLst>
+              <a:ext uri="{FF2B5EF4-FFF2-40B4-BE49-F238E27FC236}">
+                <a16:creationId xmlns:a16="http://schemas.microsoft.com/office/drawing/2014/main" id="{9B6E5385-1392-2740-82C6-EEFAE9D008B9}"/>
+              </a:ext>
+            </a:extLst>
+          </p:cNvPr>
+          <p:cNvSpPr txBox="1"/>
+          <p:nvPr/>
+        </p:nvSpPr>
+        <p:spPr>
+          <a:xfrm>
+            <a:off x="422126" y="7212463"/>
+            <a:ext cx="3274288" cy="1323439"/>
+          </a:xfrm>
+          <a:prstGeom prst="rect">
+            <a:avLst/>
+          </a:prstGeom>
+          <a:noFill/>
+          <a:ln>
+            <a:solidFill>
+              <a:schemeClr val="accent1"/>
+            </a:solidFill>
+          </a:ln>
+        </p:spPr>
+        <p:txBody>
+          <a:bodyPr wrap="square" rtlCol="0">
+            <a:spAutoFit/>
+          </a:bodyPr>
+          <a:lstStyle/>
+          <a:p>
+            <a:r>
+              <a:rPr lang="en-US" sz="800" b="1" noProof="1"/>
+              <a:t>Windows debug to console</a:t>
+            </a:r>
+            <a:br>
+              <a:rPr lang="en-US" sz="800" b="1" noProof="1"/>
+            </a:br>
+            <a:endParaRPr lang="en-US" sz="800" b="1" noProof="1"/>
+          </a:p>
+          <a:p>
+            <a:pPr marL="171450" indent="-171450">
+              <a:buFont typeface="Courier New" panose="02070309020205020404" pitchFamily="49" charset="0"/>
+              <a:buChar char="o"/>
+            </a:pPr>
+            <a:r>
+              <a:rPr lang="en-US" sz="800" noProof="1">
+                <a:hlinkClick r:id="rId2"/>
+              </a:rPr>
+              <a:t>https://github.com/nwutils/nwdc</a:t>
+            </a:r>
+            <a:endParaRPr lang="en-US" sz="800" noProof="1"/>
+          </a:p>
+          <a:p>
+            <a:pPr marL="171450" indent="-171450">
+              <a:buFont typeface="Courier New" panose="02070309020205020404" pitchFamily="49" charset="0"/>
+              <a:buChar char="o"/>
+            </a:pPr>
+            <a:endParaRPr lang="en-US" sz="800" noProof="1"/>
+          </a:p>
+          <a:p>
+            <a:pPr marL="171450" indent="-171450">
+              <a:buFont typeface="Courier New" panose="02070309020205020404" pitchFamily="49" charset="0"/>
+              <a:buChar char="o"/>
+            </a:pPr>
+            <a:r>
+              <a:rPr lang="en-US" sz="800" noProof="1"/>
+              <a:t>Use flag when running </a:t>
+            </a:r>
+            <a:br>
+              <a:rPr lang="en-US" sz="800" noProof="1"/>
+            </a:br>
+            <a:r>
+              <a:rPr lang="en-US" sz="800" noProof="1">
+                <a:latin typeface="Courier New" panose="02070309020205020404" pitchFamily="49" charset="0"/>
+                <a:cs typeface="Courier New" panose="02070309020205020404" pitchFamily="49" charset="0"/>
+              </a:rPr>
+              <a:t>nw.exe :   --remote-debugging-port=9222</a:t>
+            </a:r>
+            <a:br>
+              <a:rPr lang="en-US" sz="800" noProof="1"/>
+            </a:br>
+            <a:r>
+              <a:rPr lang="en-US" sz="800" noProof="1"/>
+              <a:t>can then open with Chrome browser:</a:t>
+            </a:r>
+            <a:br>
+              <a:rPr lang="en-US" sz="800" noProof="1"/>
+            </a:br>
+            <a:r>
+              <a:rPr lang="en-US" sz="800" noProof="1">
+                <a:latin typeface="Courier New" panose="02070309020205020404" pitchFamily="49" charset="0"/>
+                <a:cs typeface="Courier New" panose="02070309020205020404" pitchFamily="49" charset="0"/>
+              </a:rPr>
+              <a:t>chrome://inspect</a:t>
+            </a:r>
+            <a:endParaRPr lang="en-US" sz="800" noProof="1"/>
+          </a:p>
+          <a:p>
+            <a:br>
+              <a:rPr lang="en-US" sz="800" noProof="1"/>
+            </a:br>
+            <a:endParaRPr lang="en-US" sz="800" noProof="1"/>
+          </a:p>
+        </p:txBody>
+      </p:sp>
+      <p:sp>
+        <p:nvSpPr>
+          <p:cNvPr id="12" name="textruta 11">
+            <a:extLst>
+              <a:ext uri="{FF2B5EF4-FFF2-40B4-BE49-F238E27FC236}">
+                <a16:creationId xmlns:a16="http://schemas.microsoft.com/office/drawing/2014/main" id="{0768BF3C-2934-9848-8D68-0FE5F5153E26}"/>
+              </a:ext>
+            </a:extLst>
+          </p:cNvPr>
+          <p:cNvSpPr txBox="1"/>
+          <p:nvPr/>
+        </p:nvSpPr>
+        <p:spPr>
+          <a:xfrm>
+            <a:off x="401904" y="6566132"/>
+            <a:ext cx="2658805" cy="461665"/>
+          </a:xfrm>
+          <a:prstGeom prst="rect">
+            <a:avLst/>
+          </a:prstGeom>
+          <a:noFill/>
+        </p:spPr>
+        <p:txBody>
+          <a:bodyPr wrap="none" rtlCol="0">
+            <a:spAutoFit/>
+          </a:bodyPr>
+          <a:lstStyle/>
+          <a:p>
+            <a:r>
+              <a:rPr lang="en-US" sz="2400" b="1" noProof="1"/>
+              <a:t>Windows 10 Debug</a:t>
+            </a:r>
+          </a:p>
+        </p:txBody>
+      </p:sp>
+      <p:sp>
+        <p:nvSpPr>
+          <p:cNvPr id="13" name="textruta 12">
+            <a:extLst>
+              <a:ext uri="{FF2B5EF4-FFF2-40B4-BE49-F238E27FC236}">
+                <a16:creationId xmlns:a16="http://schemas.microsoft.com/office/drawing/2014/main" id="{2B268A20-6D98-4442-89B2-9093279232D8}"/>
+              </a:ext>
+            </a:extLst>
+          </p:cNvPr>
+          <p:cNvSpPr txBox="1"/>
+          <p:nvPr/>
+        </p:nvSpPr>
+        <p:spPr>
+          <a:xfrm>
+            <a:off x="4376199" y="7157916"/>
+            <a:ext cx="3274288" cy="954107"/>
+          </a:xfrm>
+          <a:prstGeom prst="rect">
+            <a:avLst/>
+          </a:prstGeom>
+          <a:noFill/>
+          <a:ln>
+            <a:solidFill>
+              <a:schemeClr val="accent1"/>
+            </a:solidFill>
+          </a:ln>
+        </p:spPr>
+        <p:txBody>
+          <a:bodyPr wrap="square" rtlCol="0">
+            <a:spAutoFit/>
+          </a:bodyPr>
+          <a:lstStyle/>
+          <a:p>
+            <a:r>
+              <a:rPr lang="en-US" sz="800" b="1" noProof="1"/>
+              <a:t>Allow download of pre-releases</a:t>
+            </a:r>
+          </a:p>
+          <a:p>
+            <a:pPr marL="171450" indent="-171450">
+              <a:buFont typeface="Courier New" panose="02070309020205020404" pitchFamily="49" charset="0"/>
+              <a:buChar char="o"/>
+            </a:pPr>
+            <a:r>
+              <a:rPr lang="en-US" sz="800" noProof="1"/>
+              <a:t>If release is marked as prerelease in github </a:t>
+            </a:r>
+            <a:br>
+              <a:rPr lang="en-US" sz="800" noProof="1"/>
+            </a:br>
+            <a:r>
+              <a:rPr lang="en-US" sz="800" noProof="1"/>
+              <a:t>=&gt; </a:t>
+            </a:r>
+          </a:p>
+          <a:p>
+            <a:pPr marL="171450" indent="-171450">
+              <a:buFont typeface="Courier New" panose="02070309020205020404" pitchFamily="49" charset="0"/>
+              <a:buChar char="o"/>
+            </a:pPr>
+            <a:r>
+              <a:rPr lang="en-US" sz="800" noProof="1"/>
+              <a:t>will only be updated if :</a:t>
+            </a:r>
+            <a:br>
+              <a:rPr lang="en-US" sz="800" noProof="1"/>
+            </a:br>
+            <a:r>
+              <a:rPr lang="en-US" sz="800" noProof="1"/>
+              <a:t>‘settings.json’ contains  </a:t>
+            </a:r>
+            <a:br>
+              <a:rPr lang="en-US" sz="800" noProof="1"/>
+            </a:br>
+            <a:r>
+              <a:rPr lang="en-US" sz="800" noProof="1"/>
+              <a:t>	</a:t>
+            </a:r>
+            <a:r>
+              <a:rPr lang="en-US" sz="800" noProof="1">
+                <a:latin typeface="Courier New" panose="02070309020205020404" pitchFamily="49" charset="0"/>
+                <a:cs typeface="Courier New" panose="02070309020205020404" pitchFamily="49" charset="0"/>
+              </a:rPr>
+              <a:t>allowPrerelease = true</a:t>
+            </a:r>
+            <a:br>
+              <a:rPr lang="en-US" sz="800" noProof="1"/>
+            </a:br>
+            <a:endParaRPr lang="en-US" sz="800" noProof="1"/>
+          </a:p>
+        </p:txBody>
+      </p:sp>
+      <p:sp>
+        <p:nvSpPr>
+          <p:cNvPr id="14" name="textruta 13">
+            <a:extLst>
+              <a:ext uri="{FF2B5EF4-FFF2-40B4-BE49-F238E27FC236}">
+                <a16:creationId xmlns:a16="http://schemas.microsoft.com/office/drawing/2014/main" id="{F2A811B7-0B91-3340-BDFF-F8E112007E01}"/>
+              </a:ext>
+            </a:extLst>
+          </p:cNvPr>
+          <p:cNvSpPr txBox="1"/>
+          <p:nvPr/>
+        </p:nvSpPr>
+        <p:spPr>
+          <a:xfrm>
+            <a:off x="4293093" y="6566132"/>
+            <a:ext cx="1626856" cy="461665"/>
+          </a:xfrm>
+          <a:prstGeom prst="rect">
+            <a:avLst/>
+          </a:prstGeom>
+          <a:noFill/>
+        </p:spPr>
+        <p:txBody>
+          <a:bodyPr wrap="none" rtlCol="0">
+            <a:spAutoFit/>
+          </a:bodyPr>
+          <a:lstStyle/>
+          <a:p>
+            <a:r>
+              <a:rPr lang="en-US" sz="2400" b="1" noProof="1"/>
+              <a:t>Pre-release</a:t>
+            </a:r>
+          </a:p>
+        </p:txBody>
+      </p:sp>
+    </p:spTree>
+    <p:extLst>
+      <p:ext uri="{BB962C8B-B14F-4D97-AF65-F5344CB8AC3E}">
+        <p14:creationId xmlns:p14="http://schemas.microsoft.com/office/powerpoint/2010/main" val="2209084743"/>
       </p:ext>
     </p:extLst>
   </p:cSld>
@@ -13049,7 +13905,13 @@
   <p:cSld>
     <p:spTree>
       <p:nvGrpSpPr>
-        <p:cNvPr id="1" name=""/>
+        <p:cNvPr id="1" name="">
+          <a:extLst>
+            <a:ext uri="{FF2B5EF4-FFF2-40B4-BE49-F238E27FC236}">
+              <a16:creationId xmlns:a16="http://schemas.microsoft.com/office/drawing/2014/main" id="{A0BA48A4-4062-70FA-687B-0BDD7B494A7D}"/>
+            </a:ext>
+          </a:extLst>
+        </p:cNvPr>
         <p:cNvGrpSpPr/>
         <p:nvPr/>
       </p:nvGrpSpPr>
@@ -13066,7 +13928,7 @@
           <p:cNvPr id="4" name="textruta 3">
             <a:extLst>
               <a:ext uri="{FF2B5EF4-FFF2-40B4-BE49-F238E27FC236}">
-                <a16:creationId xmlns:a16="http://schemas.microsoft.com/office/drawing/2014/main" id="{4AD88DAB-01A9-A441-A11C-9B4000367464}"/>
+                <a16:creationId xmlns:a16="http://schemas.microsoft.com/office/drawing/2014/main" id="{83423371-BCFF-813B-8CF5-793F83A1739A}"/>
               </a:ext>
             </a:extLst>
           </p:cNvPr>
@@ -13075,8 +13937,8 @@
         </p:nvSpPr>
         <p:spPr>
           <a:xfrm>
-            <a:off x="489993" y="887480"/>
-            <a:ext cx="1099660" cy="461665"/>
+            <a:off x="416902" y="122259"/>
+            <a:ext cx="9038436" cy="830997"/>
           </a:xfrm>
           <a:prstGeom prst="rect">
             <a:avLst/>
@@ -13090,506 +13952,22 @@
           <a:lstStyle/>
           <a:p>
             <a:r>
-              <a:rPr lang="en-US" sz="2400" b="1" noProof="1"/>
-              <a:t>History</a:t>
-            </a:r>
-          </a:p>
-        </p:txBody>
-      </p:sp>
-      <p:sp>
-        <p:nvSpPr>
-          <p:cNvPr id="5" name="Rektangel 4">
-            <a:extLst>
-              <a:ext uri="{FF2B5EF4-FFF2-40B4-BE49-F238E27FC236}">
-                <a16:creationId xmlns:a16="http://schemas.microsoft.com/office/drawing/2014/main" id="{6298B066-77DC-F744-A641-81AB722329F0}"/>
-              </a:ext>
-            </a:extLst>
-          </p:cNvPr>
-          <p:cNvSpPr/>
-          <p:nvPr/>
-        </p:nvSpPr>
-        <p:spPr>
-          <a:xfrm>
-            <a:off x="489993" y="1361519"/>
-            <a:ext cx="3685232" cy="3293209"/>
-          </a:xfrm>
-          <a:prstGeom prst="rect">
-            <a:avLst/>
-          </a:prstGeom>
-          <a:solidFill>
-            <a:schemeClr val="bg1"/>
-          </a:solidFill>
-          <a:ln>
-            <a:solidFill>
-              <a:schemeClr val="accent1"/>
-            </a:solidFill>
-          </a:ln>
-        </p:spPr>
-        <p:txBody>
-          <a:bodyPr wrap="square">
-            <a:spAutoFit/>
-          </a:bodyPr>
-          <a:lstStyle/>
-          <a:p>
-            <a:r>
-              <a:rPr lang="en-US" sz="800" b="1" noProof="1"/>
-              <a:t>History is browsed with arrow buttons</a:t>
-            </a:r>
-          </a:p>
-          <a:p>
-            <a:endParaRPr lang="en-US" sz="800" noProof="1"/>
-          </a:p>
-          <a:p>
-            <a:pPr marL="171450" indent="-171450">
-              <a:buFont typeface="Courier New" panose="02070309020205020404" pitchFamily="49" charset="0"/>
-              <a:buChar char="o"/>
-            </a:pPr>
-            <a:r>
-              <a:rPr lang="en-US" sz="800" noProof="1"/>
-              <a:t>History signaled by getMode() == “HISTORY”</a:t>
-            </a:r>
-          </a:p>
-          <a:p>
-            <a:pPr marL="171450" indent="-171450">
-              <a:buFont typeface="Courier New" panose="02070309020205020404" pitchFamily="49" charset="0"/>
-              <a:buChar char="o"/>
-            </a:pPr>
-            <a:r>
-              <a:rPr lang="en-US" sz="800" noProof="1"/>
-              <a:t>History list can be shortened by </a:t>
-            </a:r>
-            <a:r>
-              <a:rPr lang="en-US" sz="800" b="1" noProof="1"/>
-              <a:t>Search</a:t>
-            </a:r>
-          </a:p>
-          <a:p>
-            <a:pPr marL="171450" indent="-171450">
-              <a:buFont typeface="Courier New" panose="02070309020205020404" pitchFamily="49" charset="0"/>
-              <a:buChar char="o"/>
-            </a:pPr>
-            <a:r>
-              <a:rPr lang="en-US" sz="800" noProof="1"/>
-              <a:t>History snapshot is compared with previous commit</a:t>
-            </a:r>
-          </a:p>
-          <a:p>
-            <a:pPr marL="171450" indent="-171450">
-              <a:buFont typeface="Courier New" panose="02070309020205020404" pitchFamily="49" charset="0"/>
-              <a:buChar char="o"/>
-            </a:pPr>
-            <a:r>
-              <a:rPr lang="en-US" sz="800" noProof="1"/>
-              <a:t>History snapshot can compare with “pinned” commit (=fixed commit)</a:t>
-            </a:r>
-          </a:p>
-          <a:p>
-            <a:pPr marL="324000" lvl="1" indent="-171450">
-              <a:buFont typeface="Arial" panose="020B0604020202020204" pitchFamily="34" charset="0"/>
-              <a:buChar char="•"/>
-            </a:pPr>
-            <a:endParaRPr lang="en-US" sz="800" noProof="1"/>
-          </a:p>
-          <a:p>
-            <a:pPr marL="171450" indent="-171450">
-              <a:buFont typeface="Courier New" panose="02070309020205020404" pitchFamily="49" charset="0"/>
-              <a:buChar char="o"/>
-            </a:pPr>
-            <a:r>
-              <a:rPr lang="en-US" sz="800" noProof="1">
+              <a:rPr lang="en-US" sz="4800" b="1" noProof="1">
                 <a:solidFill>
                   <a:schemeClr val="accent1"/>
                 </a:solidFill>
               </a:rPr>
-              <a:t>gitHistory() </a:t>
-            </a:r>
-            <a:endParaRPr lang="en-US" sz="800" noProof="1"/>
-          </a:p>
-          <a:p>
-            <a:pPr marL="324000" lvl="1" indent="-171450">
-              <a:buFont typeface="Arial" panose="020B0604020202020204" pitchFamily="34" charset="0"/>
-              <a:buChar char="•"/>
-            </a:pPr>
-            <a:r>
-              <a:rPr lang="en-US" sz="800" noProof="1"/>
-              <a:t>returns history, both with and without search</a:t>
-            </a:r>
-          </a:p>
-          <a:p>
-            <a:endParaRPr lang="en-US" sz="800" noProof="1">
-              <a:solidFill>
-                <a:schemeClr val="accent1"/>
-              </a:solidFill>
-            </a:endParaRPr>
-          </a:p>
-          <a:p>
-            <a:pPr marL="171450" indent="-171450">
-              <a:buFont typeface="Courier New" panose="02070309020205020404" pitchFamily="49" charset="0"/>
-              <a:buChar char="o"/>
-            </a:pPr>
-            <a:r>
-              <a:rPr lang="en-US" sz="800" noProof="1">
-                <a:solidFill>
-                  <a:schemeClr val="accent1"/>
-                </a:solidFill>
-              </a:rPr>
-              <a:t>localState keeps track of where you are in history</a:t>
-            </a:r>
-            <a:r>
-              <a:rPr lang="en-US" sz="800" noProof="1"/>
-              <a:t>:</a:t>
-            </a:r>
-          </a:p>
-          <a:p>
-            <a:pPr marL="324000" lvl="1" indent="-171450">
-              <a:buFont typeface="Arial" panose="020B0604020202020204" pitchFamily="34" charset="0"/>
-              <a:buChar char="•"/>
-            </a:pPr>
-            <a:r>
-              <a:rPr lang="en-US" sz="800" noProof="1"/>
-              <a:t>.historyNumber (-1 if not browsing history, index to )</a:t>
-            </a:r>
-          </a:p>
-          <a:p>
-            <a:pPr marL="324000" lvl="1" indent="-171450">
-              <a:buFont typeface="Arial" panose="020B0604020202020204" pitchFamily="34" charset="0"/>
-              <a:buChar char="•"/>
-            </a:pPr>
-            <a:r>
-              <a:rPr lang="en-US" sz="800" noProof="1"/>
-              <a:t>.historyHash (hash of commit)</a:t>
-            </a:r>
-          </a:p>
-          <a:p>
-            <a:pPr marL="324000" lvl="1" indent="-171450">
-              <a:buFont typeface="Arial" panose="020B0604020202020204" pitchFamily="34" charset="0"/>
-              <a:buChar char="•"/>
-            </a:pPr>
-            <a:r>
-              <a:rPr lang="en-US" sz="800" noProof="1"/>
-              <a:t>.historyString (descriptive text for messsage window)</a:t>
-            </a:r>
-            <a:br>
-              <a:rPr lang="en-US" sz="800" noProof="1"/>
-            </a:br>
-            <a:endParaRPr lang="en-US" sz="800" noProof="1"/>
-          </a:p>
-          <a:p>
-            <a:pPr marL="324000" lvl="1" indent="-171450">
-              <a:buFont typeface="Arial" panose="020B0604020202020204" pitchFamily="34" charset="0"/>
-              <a:buChar char="•"/>
-            </a:pPr>
-            <a:r>
-              <a:rPr lang="en-US" sz="800" noProof="1"/>
-              <a:t>.pinnedCommit=”” (means ordinary history)</a:t>
-            </a:r>
-          </a:p>
-          <a:p>
-            <a:pPr marL="324000" lvl="1" indent="-171450">
-              <a:buFont typeface="Arial" panose="020B0604020202020204" pitchFamily="34" charset="0"/>
-              <a:buChar char="•"/>
-            </a:pPr>
-            <a:r>
-              <a:rPr lang="en-US" sz="800" noProof="1"/>
-              <a:t>.pinnedCommit=hash (means pinned history)</a:t>
-            </a:r>
-            <a:br>
-              <a:rPr lang="en-US" sz="800" noProof="1"/>
-            </a:br>
-            <a:endParaRPr lang="en-US" sz="800" noProof="1"/>
-          </a:p>
-          <a:p>
-            <a:pPr marL="171450" indent="-171450">
-              <a:buFont typeface="Courier New" panose="02070309020205020404" pitchFamily="49" charset="0"/>
-              <a:buChar char="o"/>
-            </a:pPr>
-            <a:r>
-              <a:rPr lang="en-US" sz="800" noProof="1">
-                <a:solidFill>
-                  <a:schemeClr val="accent1"/>
-                </a:solidFill>
-              </a:rPr>
-              <a:t>gitShowHistorical(commit) </a:t>
-            </a:r>
-            <a:endParaRPr lang="en-US" sz="800" noProof="1"/>
-          </a:p>
-          <a:p>
-            <a:pPr marL="324000" lvl="1" indent="-171450">
-              <a:buFont typeface="Arial" panose="020B0604020202020204" pitchFamily="34" charset="0"/>
-              <a:buChar char="•"/>
-            </a:pPr>
-            <a:r>
-              <a:rPr lang="en-US" sz="800" noProof="1"/>
-              <a:t>returns status_data with changed file info</a:t>
-            </a:r>
-          </a:p>
-          <a:p>
-            <a:pPr marL="324000" lvl="1" indent="-171450">
-              <a:buFont typeface="Arial" panose="020B0604020202020204" pitchFamily="34" charset="0"/>
-              <a:buChar char="•"/>
-            </a:pPr>
-            <a:r>
-              <a:rPr lang="en-US" sz="800" noProof="1"/>
-              <a:t>if pinned, the status_data is relative pinned</a:t>
-            </a:r>
-          </a:p>
-          <a:p>
-            <a:pPr marL="324000" lvl="1" indent="-171450">
-              <a:buFont typeface="Arial" panose="020B0604020202020204" pitchFamily="34" charset="0"/>
-              <a:buChar char="•"/>
-            </a:pPr>
-            <a:r>
-              <a:rPr lang="en-US" sz="800" noProof="1"/>
-              <a:t>The status_data will always be comparison between newest and oldest of the two commits (showing change going forward in time)</a:t>
-            </a:r>
-          </a:p>
-          <a:p>
-            <a:pPr marL="324000" lvl="1" indent="-171450">
-              <a:buFont typeface="Arial" panose="020B0604020202020204" pitchFamily="34" charset="0"/>
-              <a:buChar char="•"/>
-            </a:pPr>
-            <a:r>
-              <a:rPr lang="en-US" sz="800" noProof="1"/>
-              <a:t>if not-pinned, status_data is relative previous commit</a:t>
-            </a:r>
-          </a:p>
-          <a:p>
-            <a:pPr marL="324000" lvl="1" indent="-171450">
-              <a:buFont typeface="Arial" panose="020B0604020202020204" pitchFamily="34" charset="0"/>
-              <a:buChar char="•"/>
-            </a:pPr>
-            <a:r>
-              <a:rPr lang="en-US" sz="800" noProof="1"/>
-              <a:t>localState.history_status_data</a:t>
-            </a:r>
-          </a:p>
-          <a:p>
-            <a:pPr marL="324000" lvl="1" indent="-171450">
-              <a:buFont typeface="Arial" panose="020B0604020202020204" pitchFamily="34" charset="0"/>
-              <a:buChar char="•"/>
-            </a:pPr>
-            <a:endParaRPr lang="en-US" sz="800" noProof="1"/>
-          </a:p>
-        </p:txBody>
-      </p:sp>
-      <p:sp>
-        <p:nvSpPr>
-          <p:cNvPr id="14" name="Rektangel 13">
+              <a:t>Git over ssh (commands on server)</a:t>
+            </a:r>
+          </a:p>
+        </p:txBody>
+      </p:sp>
+      <p:sp>
+        <p:nvSpPr>
+          <p:cNvPr id="5" name="textruta 4">
             <a:extLst>
               <a:ext uri="{FF2B5EF4-FFF2-40B4-BE49-F238E27FC236}">
-                <a16:creationId xmlns:a16="http://schemas.microsoft.com/office/drawing/2014/main" id="{C15FF9A1-43E2-7348-9382-D2ADB3B355C8}"/>
-              </a:ext>
-            </a:extLst>
-          </p:cNvPr>
-          <p:cNvSpPr/>
-          <p:nvPr/>
-        </p:nvSpPr>
-        <p:spPr>
-          <a:xfrm>
-            <a:off x="4489123" y="3848849"/>
-            <a:ext cx="3372291" cy="2431435"/>
-          </a:xfrm>
-          <a:prstGeom prst="rect">
-            <a:avLst/>
-          </a:prstGeom>
-          <a:solidFill>
-            <a:schemeClr val="bg1"/>
-          </a:solidFill>
-          <a:ln>
-            <a:solidFill>
-              <a:schemeClr val="accent1"/>
-            </a:solidFill>
-          </a:ln>
-        </p:spPr>
-        <p:txBody>
-          <a:bodyPr wrap="square">
-            <a:spAutoFit/>
-          </a:bodyPr>
-          <a:lstStyle/>
-          <a:p>
-            <a:r>
-              <a:rPr lang="en-US" sz="800" b="1" noProof="1"/>
-              <a:t>Settings are loaded at Pragma-git start, and updated from Settings window</a:t>
-            </a:r>
-          </a:p>
-          <a:p>
-            <a:endParaRPr lang="en-US" sz="800" noProof="1">
-              <a:solidFill>
-                <a:schemeClr val="accent1"/>
-              </a:solidFill>
-            </a:endParaRPr>
-          </a:p>
-          <a:p>
-            <a:r>
-              <a:rPr lang="en-US" sz="800" noProof="1">
-                <a:solidFill>
-                  <a:schemeClr val="accent1"/>
-                </a:solidFill>
-              </a:rPr>
-              <a:t>Handling of settings in app.js</a:t>
-            </a:r>
-            <a:endParaRPr lang="en-US" sz="800" noProof="1"/>
-          </a:p>
-          <a:p>
-            <a:pPr marL="171450" indent="-171450">
-              <a:buFont typeface="Courier New" panose="02070309020205020404" pitchFamily="49" charset="0"/>
-              <a:buChar char="o"/>
-            </a:pPr>
-            <a:r>
-              <a:rPr lang="en-US" sz="800" noProof="1"/>
-              <a:t>loadSettings is called on Pragma-git start</a:t>
-            </a:r>
-          </a:p>
-          <a:p>
-            <a:pPr marL="324000" lvl="1" indent="-171450">
-              <a:buFont typeface="Arial" panose="020B0604020202020204" pitchFamily="34" charset="0"/>
-              <a:buChar char="•"/>
-            </a:pPr>
-            <a:r>
-              <a:rPr lang="en-US" sz="800" noProof="1"/>
-              <a:t>reads settings from settings.json</a:t>
-            </a:r>
-          </a:p>
-          <a:p>
-            <a:pPr marL="324000" lvl="1" indent="-171450">
-              <a:buFont typeface="Arial" panose="020B0604020202020204" pitchFamily="34" charset="0"/>
-              <a:buChar char="•"/>
-            </a:pPr>
-            <a:r>
-              <a:rPr lang="en-US" sz="800" noProof="1"/>
-              <a:t>stores settings in global.state in predefined order</a:t>
-            </a:r>
-          </a:p>
-          <a:p>
-            <a:pPr marL="171450" indent="-171450">
-              <a:buFont typeface="Courier New" panose="02070309020205020404" pitchFamily="49" charset="0"/>
-              <a:buChar char="o"/>
-            </a:pPr>
-            <a:r>
-              <a:rPr lang="en-US" sz="800" noProof="1"/>
-              <a:t>updateWithNewSettings is called :</a:t>
-            </a:r>
-          </a:p>
-          <a:p>
-            <a:pPr marL="324000" lvl="1" indent="-171450">
-              <a:buFont typeface="Arial" panose="020B0604020202020204" pitchFamily="34" charset="0"/>
-              <a:buChar char="•"/>
-            </a:pPr>
-            <a:r>
-              <a:rPr lang="en-US" sz="800" noProof="1"/>
-              <a:t>from loadSettings</a:t>
-            </a:r>
-          </a:p>
-          <a:p>
-            <a:pPr marL="324000" lvl="1" indent="-171450">
-              <a:buFont typeface="Arial" panose="020B0604020202020204" pitchFamily="34" charset="0"/>
-              <a:buChar char="•"/>
-            </a:pPr>
-            <a:r>
-              <a:rPr lang="en-US" sz="800" noProof="1"/>
-              <a:t>when leaving Settings window</a:t>
-            </a:r>
-          </a:p>
-          <a:p>
-            <a:pPr marL="171450" indent="-171450">
-              <a:buFont typeface="Courier New" panose="02070309020205020404" pitchFamily="49" charset="0"/>
-              <a:buChar char="o"/>
-            </a:pPr>
-            <a:r>
-              <a:rPr lang="en-US" sz="800" noProof="1"/>
-              <a:t>settings are saved when closing Pragma-git</a:t>
-            </a:r>
-          </a:p>
-          <a:p>
-            <a:pPr marL="171450" indent="-171450">
-              <a:buFont typeface="Courier New" panose="02070309020205020404" pitchFamily="49" charset="0"/>
-              <a:buChar char="o"/>
-            </a:pPr>
-            <a:r>
-              <a:rPr lang="en-US" sz="800" noProof="1"/>
-              <a:t>debug flags :  </a:t>
-            </a:r>
-          </a:p>
-          <a:p>
-            <a:pPr marL="324000" lvl="1" indent="-171450">
-              <a:buFont typeface="Arial" panose="020B0604020202020204" pitchFamily="34" charset="0"/>
-              <a:buChar char="•"/>
-            </a:pPr>
-            <a:r>
-              <a:rPr lang="en-US" sz="800" noProof="1"/>
-              <a:t>state.debug (main, enable git debug flags)</a:t>
-            </a:r>
-          </a:p>
-          <a:p>
-            <a:pPr marL="324000" lvl="1" indent="-171450">
-              <a:buFont typeface="Arial" panose="020B0604020202020204" pitchFamily="34" charset="0"/>
-              <a:buChar char="•"/>
-            </a:pPr>
-            <a:r>
-              <a:rPr lang="en-US" sz="800" noProof="1"/>
-              <a:t>state.graph.debug</a:t>
-            </a:r>
-            <a:br>
-              <a:rPr lang="en-US" sz="800" noProof="1"/>
-            </a:br>
-            <a:r>
-              <a:rPr lang="en-US" sz="800" noProof="1"/>
-              <a:t>are both read-only. Change directly in settings.json</a:t>
-            </a:r>
-          </a:p>
-          <a:p>
-            <a:endParaRPr lang="en-US" sz="800" noProof="1">
-              <a:solidFill>
-                <a:schemeClr val="accent1"/>
-              </a:solidFill>
-            </a:endParaRPr>
-          </a:p>
-          <a:p>
-            <a:r>
-              <a:rPr lang="en-US" sz="800" noProof="1">
-                <a:solidFill>
-                  <a:schemeClr val="accent1"/>
-                </a:solidFill>
-              </a:rPr>
-              <a:t>Settings window  settings.html :</a:t>
-            </a:r>
-            <a:endParaRPr lang="en-US" sz="800" noProof="1"/>
-          </a:p>
-          <a:p>
-            <a:pPr marL="171450" indent="-171450">
-              <a:buFont typeface="Courier New" panose="02070309020205020404" pitchFamily="49" charset="0"/>
-              <a:buChar char="o"/>
-            </a:pPr>
-            <a:r>
-              <a:rPr lang="en-US" sz="800" noProof="1"/>
-              <a:t>is populated from global.state </a:t>
-            </a:r>
-            <a:br>
-              <a:rPr lang="en-US" sz="800" noProof="1"/>
-            </a:br>
-            <a:r>
-              <a:rPr lang="en-US" sz="800" noProof="1"/>
-              <a:t>when   settings.js/injectIntoSettingsJs is called from settings.html</a:t>
-            </a:r>
-          </a:p>
-          <a:p>
-            <a:pPr marL="171450" indent="-171450">
-              <a:buFont typeface="Courier New" panose="02070309020205020404" pitchFamily="49" charset="0"/>
-              <a:buChar char="o"/>
-            </a:pPr>
-            <a:r>
-              <a:rPr lang="en-US" sz="800" noProof="1"/>
-              <a:t>closeWindow stores data in global.state before closing</a:t>
-            </a:r>
-          </a:p>
-        </p:txBody>
-      </p:sp>
-      <p:sp>
-        <p:nvSpPr>
-          <p:cNvPr id="15" name="textruta 14">
-            <a:extLst>
-              <a:ext uri="{FF2B5EF4-FFF2-40B4-BE49-F238E27FC236}">
-                <a16:creationId xmlns:a16="http://schemas.microsoft.com/office/drawing/2014/main" id="{9D47FF24-DA49-8046-9CB0-28C71CB63318}"/>
+                <a16:creationId xmlns:a16="http://schemas.microsoft.com/office/drawing/2014/main" id="{0BB3AB89-4809-925B-71E3-11418FACC157}"/>
               </a:ext>
             </a:extLst>
           </p:cNvPr>
@@ -13598,701 +13976,8 @@
         </p:nvSpPr>
         <p:spPr>
           <a:xfrm>
-            <a:off x="4447440" y="3416887"/>
-            <a:ext cx="1204882" cy="461665"/>
-          </a:xfrm>
-          <a:prstGeom prst="rect">
-            <a:avLst/>
-          </a:prstGeom>
-          <a:noFill/>
-        </p:spPr>
-        <p:txBody>
-          <a:bodyPr wrap="none" rtlCol="0">
-            <a:spAutoFit/>
-          </a:bodyPr>
-          <a:lstStyle/>
-          <a:p>
-            <a:r>
-              <a:rPr lang="en-US" sz="2400" b="1" noProof="1"/>
-              <a:t>Settings</a:t>
-            </a:r>
-          </a:p>
-        </p:txBody>
-      </p:sp>
-      <p:sp>
-        <p:nvSpPr>
-          <p:cNvPr id="16" name="textruta 15">
-            <a:extLst>
-              <a:ext uri="{FF2B5EF4-FFF2-40B4-BE49-F238E27FC236}">
-                <a16:creationId xmlns:a16="http://schemas.microsoft.com/office/drawing/2014/main" id="{9192722C-8F33-C74E-A8DA-E92B802175F0}"/>
-              </a:ext>
-            </a:extLst>
-          </p:cNvPr>
-          <p:cNvSpPr txBox="1"/>
-          <p:nvPr/>
-        </p:nvSpPr>
-        <p:spPr>
-          <a:xfrm>
-            <a:off x="489993" y="4804493"/>
-            <a:ext cx="1592103" cy="461665"/>
-          </a:xfrm>
-          <a:prstGeom prst="rect">
-            <a:avLst/>
-          </a:prstGeom>
-          <a:noFill/>
-        </p:spPr>
-        <p:txBody>
-          <a:bodyPr wrap="none" rtlCol="0">
-            <a:spAutoFit/>
-          </a:bodyPr>
-          <a:lstStyle/>
-          <a:p>
-            <a:r>
-              <a:rPr lang="en-US" sz="2400" b="1" noProof="1"/>
-              <a:t>Dark mode</a:t>
-            </a:r>
-          </a:p>
-        </p:txBody>
-      </p:sp>
-      <p:sp>
-        <p:nvSpPr>
-          <p:cNvPr id="17" name="Rektangel 16">
-            <a:extLst>
-              <a:ext uri="{FF2B5EF4-FFF2-40B4-BE49-F238E27FC236}">
-                <a16:creationId xmlns:a16="http://schemas.microsoft.com/office/drawing/2014/main" id="{0C6FE680-6AF2-4545-AE31-D52F0731E861}"/>
-              </a:ext>
-            </a:extLst>
-          </p:cNvPr>
-          <p:cNvSpPr/>
-          <p:nvPr/>
-        </p:nvSpPr>
-        <p:spPr>
-          <a:xfrm>
-            <a:off x="489993" y="5244410"/>
-            <a:ext cx="3685232" cy="2554545"/>
-          </a:xfrm>
-          <a:prstGeom prst="rect">
-            <a:avLst/>
-          </a:prstGeom>
-          <a:solidFill>
-            <a:schemeClr val="bg1"/>
-          </a:solidFill>
-          <a:ln>
-            <a:solidFill>
-              <a:schemeClr val="accent1"/>
-            </a:solidFill>
-          </a:ln>
-        </p:spPr>
-        <p:txBody>
-          <a:bodyPr wrap="square">
-            <a:spAutoFit/>
-          </a:bodyPr>
-          <a:lstStyle/>
-          <a:p>
-            <a:r>
-              <a:rPr lang="en-US" sz="800" b="1" noProof="1"/>
-              <a:t>Dark / light mode is defined from color_styles.css using css variables</a:t>
-            </a:r>
-          </a:p>
-          <a:p>
-            <a:endParaRPr lang="en-US" sz="800" noProof="1">
-              <a:solidFill>
-                <a:schemeClr val="accent1"/>
-              </a:solidFill>
-            </a:endParaRPr>
-          </a:p>
-          <a:p>
-            <a:r>
-              <a:rPr lang="en-US" sz="800" noProof="1">
-                <a:solidFill>
-                  <a:schemeClr val="accent1"/>
-                </a:solidFill>
-              </a:rPr>
-              <a:t>The mechanism</a:t>
-            </a:r>
-            <a:endParaRPr lang="en-US" sz="800" noProof="1"/>
-          </a:p>
-          <a:p>
-            <a:pPr marL="171450" indent="-171450">
-              <a:buFont typeface="Courier New" panose="02070309020205020404" pitchFamily="49" charset="0"/>
-              <a:buChar char="o"/>
-            </a:pPr>
-            <a:r>
-              <a:rPr lang="en-US" sz="800" noProof="1"/>
-              <a:t>&lt;body&gt; of each document is predefined with class=“light”</a:t>
-            </a:r>
-          </a:p>
-          <a:p>
-            <a:pPr marL="171450" indent="-171450">
-              <a:buFont typeface="Courier New" panose="02070309020205020404" pitchFamily="49" charset="0"/>
-              <a:buChar char="o"/>
-            </a:pPr>
-            <a:r>
-              <a:rPr lang="en-US" sz="800" noProof="1"/>
-              <a:t>script after &lt;body&gt;  adds a class=”dark” if dark mode</a:t>
-            </a:r>
-          </a:p>
-          <a:p>
-            <a:pPr marL="171450" indent="-171450">
-              <a:buFont typeface="Courier New" panose="02070309020205020404" pitchFamily="49" charset="0"/>
-              <a:buChar char="o"/>
-            </a:pPr>
-            <a:r>
-              <a:rPr lang="en-US" sz="800" noProof="1"/>
-              <a:t>darkmode is defined by localState.dark (true if darkmode, false if light)</a:t>
-            </a:r>
-          </a:p>
-          <a:p>
-            <a:pPr marL="171450" indent="-171450">
-              <a:buFont typeface="Courier New" panose="02070309020205020404" pitchFamily="49" charset="0"/>
-              <a:buChar char="o"/>
-            </a:pPr>
-            <a:r>
-              <a:rPr lang="en-US" sz="800" noProof="1"/>
-              <a:t> localState.dark is set from value of state.darkmode setting</a:t>
-            </a:r>
-          </a:p>
-          <a:p>
-            <a:pPr marL="171450" indent="-171450">
-              <a:buFont typeface="Courier New" panose="02070309020205020404" pitchFamily="49" charset="0"/>
-              <a:buChar char="o"/>
-            </a:pPr>
-            <a:endParaRPr lang="en-US" sz="800" noProof="1"/>
-          </a:p>
-          <a:p>
-            <a:r>
-              <a:rPr lang="en-US" sz="800" noProof="1">
-                <a:solidFill>
-                  <a:schemeClr val="accent1"/>
-                </a:solidFill>
-              </a:rPr>
-              <a:t>Main app :</a:t>
-            </a:r>
-            <a:endParaRPr lang="en-US" sz="800" noProof="1"/>
-          </a:p>
-          <a:p>
-            <a:pPr marL="171450" indent="-171450">
-              <a:buFont typeface="Courier New" panose="02070309020205020404" pitchFamily="49" charset="0"/>
-              <a:buChar char="o"/>
-            </a:pPr>
-            <a:r>
-              <a:rPr lang="en-US" sz="800" noProof="1"/>
-              <a:t>Main. window is mostly constant (except for text-fields and input texts)</a:t>
-            </a:r>
-            <a:br>
-              <a:rPr lang="en-US" sz="800" noProof="1"/>
-            </a:br>
-            <a:endParaRPr lang="en-US" sz="800" noProof="1"/>
-          </a:p>
-          <a:p>
-            <a:r>
-              <a:rPr lang="en-US" sz="800" noProof="1">
-                <a:solidFill>
-                  <a:schemeClr val="accent1"/>
-                </a:solidFill>
-              </a:rPr>
-              <a:t>Other windows behaves differently :</a:t>
-            </a:r>
-            <a:endParaRPr lang="en-US" sz="800" noProof="1"/>
-          </a:p>
-          <a:p>
-            <a:pPr marL="171450" indent="-171450">
-              <a:buFont typeface="Courier New" panose="02070309020205020404" pitchFamily="49" charset="0"/>
-              <a:buChar char="o"/>
-            </a:pPr>
-            <a:r>
-              <a:rPr lang="en-US" sz="800" noProof="1"/>
-              <a:t>Have styles reading css variables from color_styles.css</a:t>
-            </a:r>
-          </a:p>
-          <a:p>
-            <a:pPr marL="171450" indent="-171450">
-              <a:buFont typeface="Courier New" panose="02070309020205020404" pitchFamily="49" charset="0"/>
-              <a:buChar char="o"/>
-            </a:pPr>
-            <a:r>
-              <a:rPr lang="en-US" sz="800" noProof="1"/>
-              <a:t>A general img invert filter is applied which transforms black icons to white </a:t>
-            </a:r>
-            <a:br>
-              <a:rPr lang="en-US" sz="800" noProof="1"/>
-            </a:br>
-            <a:r>
-              <a:rPr lang="en-US" sz="800" noProof="1"/>
-              <a:t>(exceptions for color icons are defined in each document’s style section)</a:t>
-            </a:r>
-          </a:p>
-          <a:p>
-            <a:pPr marL="171450" indent="-171450">
-              <a:buFont typeface="Courier New" panose="02070309020205020404" pitchFamily="49" charset="0"/>
-              <a:buChar char="o"/>
-            </a:pPr>
-            <a:endParaRPr lang="en-US" sz="800" noProof="1"/>
-          </a:p>
-          <a:p>
-            <a:r>
-              <a:rPr lang="en-US" sz="800" noProof="1">
-                <a:solidFill>
-                  <a:schemeClr val="accent1"/>
-                </a:solidFill>
-              </a:rPr>
-              <a:t>Merge and Notes windows :</a:t>
-            </a:r>
-            <a:endParaRPr lang="en-US" sz="800" noProof="1"/>
-          </a:p>
-          <a:p>
-            <a:pPr marL="171450" indent="-171450">
-              <a:buFont typeface="Courier New" panose="02070309020205020404" pitchFamily="49" charset="0"/>
-              <a:buChar char="o"/>
-            </a:pPr>
-            <a:r>
-              <a:rPr lang="en-US" sz="800" noProof="1"/>
-              <a:t>Merge: hacked the CodeMirror css in pragma-merge.html</a:t>
-            </a:r>
-          </a:p>
-          <a:p>
-            <a:pPr marL="171450" indent="-171450">
-              <a:buFont typeface="Courier New" panose="02070309020205020404" pitchFamily="49" charset="0"/>
-              <a:buChar char="o"/>
-            </a:pPr>
-            <a:r>
-              <a:rPr lang="en-US" sz="800" noProof="1"/>
-              <a:t>Notes: hacked ToastUI editor css in notes.html</a:t>
-            </a:r>
-          </a:p>
-          <a:p>
-            <a:pPr marL="171450" indent="-171450">
-              <a:buFont typeface="Courier New" panose="02070309020205020404" pitchFamily="49" charset="0"/>
-              <a:buChar char="o"/>
-            </a:pPr>
-            <a:r>
-              <a:rPr lang="en-US" sz="800" noProof="1"/>
-              <a:t>Both have special css for icons and text-based buttons</a:t>
-            </a:r>
-          </a:p>
-        </p:txBody>
-      </p:sp>
-      <p:sp>
-        <p:nvSpPr>
-          <p:cNvPr id="18" name="Rektangel 17">
-            <a:extLst>
-              <a:ext uri="{FF2B5EF4-FFF2-40B4-BE49-F238E27FC236}">
-                <a16:creationId xmlns:a16="http://schemas.microsoft.com/office/drawing/2014/main" id="{1DB0E46F-C9CA-A948-A22C-D89EEA13217F}"/>
-              </a:ext>
-            </a:extLst>
-          </p:cNvPr>
-          <p:cNvSpPr/>
-          <p:nvPr/>
-        </p:nvSpPr>
-        <p:spPr>
-          <a:xfrm>
-            <a:off x="4496434" y="6939072"/>
-            <a:ext cx="3364980" cy="2062103"/>
-          </a:xfrm>
-          <a:prstGeom prst="rect">
-            <a:avLst/>
-          </a:prstGeom>
-          <a:solidFill>
-            <a:schemeClr val="bg1"/>
-          </a:solidFill>
-          <a:ln>
-            <a:solidFill>
-              <a:schemeClr val="accent1"/>
-            </a:solidFill>
-          </a:ln>
-        </p:spPr>
-        <p:txBody>
-          <a:bodyPr wrap="square">
-            <a:spAutoFit/>
-          </a:bodyPr>
-          <a:lstStyle/>
-          <a:p>
-            <a:pPr marL="171450" indent="-171450">
-              <a:buFont typeface="Courier New" panose="02070309020205020404" pitchFamily="49" charset="0"/>
-              <a:buChar char="o"/>
-            </a:pPr>
-            <a:r>
-              <a:rPr lang="en-US" sz="800" noProof="1">
-                <a:solidFill>
-                  <a:schemeClr val="accent1"/>
-                </a:solidFill>
-              </a:rPr>
-              <a:t>Notes, Graph window, Pragma-merge </a:t>
-            </a:r>
-          </a:p>
-          <a:p>
-            <a:pPr marL="324000" lvl="1" indent="-171450">
-              <a:buFont typeface="Arial" panose="020B0604020202020204" pitchFamily="34" charset="0"/>
-              <a:buChar char="•"/>
-            </a:pPr>
-            <a:r>
-              <a:rPr lang="en-US" sz="800" noProof="1"/>
-              <a:t>Based on npm find-in-nw</a:t>
-            </a:r>
-          </a:p>
-          <a:p>
-            <a:pPr marL="324000" lvl="1" indent="-171450">
-              <a:buFont typeface="Arial" panose="020B0604020202020204" pitchFamily="34" charset="0"/>
-              <a:buChar char="•"/>
-            </a:pPr>
-            <a:r>
-              <a:rPr lang="en-US" sz="800" noProof="1"/>
-              <a:t>Extend npm find-in-nw on the fly, with “extend_find-in-nw.js”</a:t>
-            </a:r>
-            <a:br>
-              <a:rPr lang="en-US" sz="800" noProof="1"/>
-            </a:br>
-            <a:r>
-              <a:rPr lang="en-US" sz="800" noProof="1"/>
-              <a:t>- make search case insensitive, add navigation CTRL-G, ↑,↓</a:t>
-            </a:r>
-            <a:br>
-              <a:rPr lang="en-US" sz="800" noProof="1"/>
-            </a:br>
-            <a:r>
-              <a:rPr lang="en-US" sz="800" noProof="1"/>
-              <a:t>- in Graph : searches document.body</a:t>
-            </a:r>
-            <a:br>
-              <a:rPr lang="en-US" sz="800" noProof="1"/>
-            </a:br>
-            <a:r>
-              <a:rPr lang="en-US" sz="800" noProof="1"/>
-              <a:t>- in Notes : search depends on wysiwyg / markdown modes</a:t>
-            </a:r>
-            <a:br>
-              <a:rPr lang="en-US" sz="800" noProof="1"/>
-            </a:br>
-            <a:r>
-              <a:rPr lang="en-US" sz="800" noProof="1"/>
-              <a:t>- in Pragma-merge : editor id in pragmaMergeSearchInEditorId</a:t>
-            </a:r>
-          </a:p>
-          <a:p>
-            <a:pPr marL="324000" lvl="1" indent="-171450">
-              <a:buFont typeface="Arial" panose="020B0604020202020204" pitchFamily="34" charset="0"/>
-              <a:buChar char="•"/>
-            </a:pPr>
-            <a:r>
-              <a:rPr lang="en-US" sz="800" noProof="1"/>
-              <a:t>Code added at end of Notes.html, graph.html, pragma-merge.html</a:t>
-            </a:r>
-          </a:p>
-          <a:p>
-            <a:pPr marL="324000" lvl="1" indent="-171450">
-              <a:buFont typeface="Arial" panose="020B0604020202020204" pitchFamily="34" charset="0"/>
-              <a:buChar char="•"/>
-            </a:pPr>
-            <a:endParaRPr lang="en-US" sz="800" noProof="1"/>
-          </a:p>
-          <a:p>
-            <a:pPr marL="171450" indent="-171450">
-              <a:buFont typeface="Courier New" panose="02070309020205020404" pitchFamily="49" charset="0"/>
-              <a:buChar char="o"/>
-            </a:pPr>
-            <a:r>
-              <a:rPr lang="en-US" sz="800" noProof="1">
-                <a:solidFill>
-                  <a:schemeClr val="accent1"/>
-                </a:solidFill>
-              </a:rPr>
-              <a:t>Notes window extra</a:t>
-            </a:r>
-          </a:p>
-          <a:p>
-            <a:pPr marL="324000" lvl="1" indent="-171450">
-              <a:buFont typeface="Arial" panose="020B0604020202020204" pitchFamily="34" charset="0"/>
-              <a:buChar char="•"/>
-            </a:pPr>
-            <a:r>
-              <a:rPr lang="en-US" sz="800" noProof="1"/>
-              <a:t>“Notes.html” : Listen to mouseover on markdown/wysiwyg switches</a:t>
-            </a:r>
-            <a:br>
-              <a:rPr lang="en-US" sz="800" noProof="1"/>
-            </a:br>
-            <a:r>
-              <a:rPr lang="en-US" sz="800" noProof="1"/>
-              <a:t>and clear marked finds (“tokens”), before switching.</a:t>
-            </a:r>
-            <a:br>
-              <a:rPr lang="en-US" sz="800" noProof="1"/>
-            </a:br>
-            <a:r>
-              <a:rPr lang="en-US" sz="800" noProof="1"/>
-              <a:t>Then close search box.</a:t>
-            </a:r>
-          </a:p>
-          <a:p>
-            <a:pPr marL="324000" lvl="1" indent="-171450">
-              <a:buFont typeface="Arial" panose="020B0604020202020204" pitchFamily="34" charset="0"/>
-              <a:buChar char="•"/>
-            </a:pPr>
-            <a:r>
-              <a:rPr lang="en-US" sz="800" noProof="1"/>
-              <a:t>“Notes.js” : Stop save from happening if find is active</a:t>
-            </a:r>
-          </a:p>
-          <a:p>
-            <a:pPr marL="324000" lvl="1" indent="-171450">
-              <a:buFont typeface="Arial" panose="020B0604020202020204" pitchFamily="34" charset="0"/>
-              <a:buChar char="•"/>
-            </a:pPr>
-            <a:endParaRPr lang="en-US" sz="800" noProof="1"/>
-          </a:p>
-          <a:p>
-            <a:pPr marL="324000" lvl="1" indent="-171450">
-              <a:buFont typeface="Arial" panose="020B0604020202020204" pitchFamily="34" charset="0"/>
-              <a:buChar char="•"/>
-            </a:pPr>
-            <a:endParaRPr lang="en-US" sz="800" noProof="1"/>
-          </a:p>
-        </p:txBody>
-      </p:sp>
-      <p:sp>
-        <p:nvSpPr>
-          <p:cNvPr id="19" name="textruta 18">
-            <a:extLst>
-              <a:ext uri="{FF2B5EF4-FFF2-40B4-BE49-F238E27FC236}">
-                <a16:creationId xmlns:a16="http://schemas.microsoft.com/office/drawing/2014/main" id="{A7C2C043-D2F7-C944-B558-2BA54F5E7D29}"/>
-              </a:ext>
-            </a:extLst>
-          </p:cNvPr>
-          <p:cNvSpPr txBox="1"/>
-          <p:nvPr/>
-        </p:nvSpPr>
-        <p:spPr>
-          <a:xfrm>
-            <a:off x="4447440" y="6494382"/>
-            <a:ext cx="1704634" cy="461665"/>
-          </a:xfrm>
-          <a:prstGeom prst="rect">
-            <a:avLst/>
-          </a:prstGeom>
-          <a:noFill/>
-        </p:spPr>
-        <p:txBody>
-          <a:bodyPr wrap="none" rtlCol="0">
-            <a:spAutoFit/>
-          </a:bodyPr>
-          <a:lstStyle/>
-          <a:p>
-            <a:r>
-              <a:rPr lang="en-US" sz="2400" b="1" noProof="1"/>
-              <a:t>Find in html</a:t>
-            </a:r>
-          </a:p>
-        </p:txBody>
-      </p:sp>
-      <p:sp>
-        <p:nvSpPr>
-          <p:cNvPr id="20" name="Rektangel 19">
-            <a:extLst>
-              <a:ext uri="{FF2B5EF4-FFF2-40B4-BE49-F238E27FC236}">
-                <a16:creationId xmlns:a16="http://schemas.microsoft.com/office/drawing/2014/main" id="{116B39BA-29B4-7748-8FA3-5994271F75AA}"/>
-              </a:ext>
-            </a:extLst>
-          </p:cNvPr>
-          <p:cNvSpPr/>
-          <p:nvPr/>
-        </p:nvSpPr>
-        <p:spPr>
-          <a:xfrm>
-            <a:off x="465896" y="8400871"/>
-            <a:ext cx="3685232" cy="1200329"/>
-          </a:xfrm>
-          <a:prstGeom prst="rect">
-            <a:avLst/>
-          </a:prstGeom>
-          <a:solidFill>
-            <a:schemeClr val="bg1"/>
-          </a:solidFill>
-          <a:ln>
-            <a:solidFill>
-              <a:schemeClr val="accent1"/>
-            </a:solidFill>
-          </a:ln>
-        </p:spPr>
-        <p:txBody>
-          <a:bodyPr wrap="square">
-            <a:spAutoFit/>
-          </a:bodyPr>
-          <a:lstStyle/>
-          <a:p>
-            <a:r>
-              <a:rPr lang="en-US" sz="800" noProof="1">
-                <a:solidFill>
-                  <a:schemeClr val="accent1"/>
-                </a:solidFill>
-              </a:rPr>
-              <a:t>About.html</a:t>
-            </a:r>
-            <a:endParaRPr lang="en-US" sz="800" noProof="1"/>
-          </a:p>
-          <a:p>
-            <a:pPr marL="171450" indent="-171450">
-              <a:buFont typeface="Courier New" panose="02070309020205020404" pitchFamily="49" charset="0"/>
-              <a:buChar char="o"/>
-            </a:pPr>
-            <a:r>
-              <a:rPr lang="en-US" sz="800" noProof="1"/>
-              <a:t>is self-contained</a:t>
-            </a:r>
-          </a:p>
-          <a:p>
-            <a:pPr marL="171450" indent="-171450">
-              <a:buFont typeface="Courier New" panose="02070309020205020404" pitchFamily="49" charset="0"/>
-              <a:buChar char="o"/>
-            </a:pPr>
-            <a:r>
-              <a:rPr lang="en-US" sz="800" noProof="1"/>
-              <a:t>inserts “about_search.html” in div, to have same text here as in help for history search.</a:t>
-            </a:r>
-            <a:endParaRPr lang="en-US" sz="800" noProof="1">
-              <a:solidFill>
-                <a:schemeClr val="accent1"/>
-              </a:solidFill>
-            </a:endParaRPr>
-          </a:p>
-          <a:p>
-            <a:r>
-              <a:rPr lang="en-US" sz="800" noProof="1">
-                <a:solidFill>
-                  <a:schemeClr val="accent1"/>
-                </a:solidFill>
-              </a:rPr>
-              <a:t>about_search.html</a:t>
-            </a:r>
-            <a:endParaRPr lang="en-US" sz="800" noProof="1"/>
-          </a:p>
-          <a:p>
-            <a:pPr marL="171450" indent="-171450">
-              <a:buFont typeface="Courier New" panose="02070309020205020404" pitchFamily="49" charset="0"/>
-              <a:buChar char="o"/>
-            </a:pPr>
-            <a:r>
-              <a:rPr lang="en-US" sz="800" noProof="1"/>
-              <a:t>is self-contained</a:t>
-            </a:r>
-            <a:endParaRPr lang="en-US" sz="800" noProof="1">
-              <a:solidFill>
-                <a:schemeClr val="accent1"/>
-              </a:solidFill>
-            </a:endParaRPr>
-          </a:p>
-          <a:p>
-            <a:r>
-              <a:rPr lang="en-US" sz="800" noProof="1">
-                <a:solidFill>
-                  <a:schemeClr val="accent1"/>
-                </a:solidFill>
-              </a:rPr>
-              <a:t>Other help texts</a:t>
-            </a:r>
-            <a:endParaRPr lang="en-US" sz="800" noProof="1"/>
-          </a:p>
-          <a:p>
-            <a:pPr marL="171450" indent="-171450">
-              <a:buFont typeface="Courier New" panose="02070309020205020404" pitchFamily="49" charset="0"/>
-              <a:buChar char="o"/>
-            </a:pPr>
-            <a:r>
-              <a:rPr lang="en-US" sz="800" noProof="1"/>
-              <a:t>HELP/TEMPLATE_help.html &lt;div id="inner-content"&gt;, is replaced with text from HELP/ by app.js</a:t>
-            </a:r>
-          </a:p>
-        </p:txBody>
-      </p:sp>
-      <p:sp>
-        <p:nvSpPr>
-          <p:cNvPr id="21" name="textruta 20">
-            <a:extLst>
-              <a:ext uri="{FF2B5EF4-FFF2-40B4-BE49-F238E27FC236}">
-                <a16:creationId xmlns:a16="http://schemas.microsoft.com/office/drawing/2014/main" id="{7DE9AEB1-C5B0-C249-BF18-9D6FEFA03971}"/>
-              </a:ext>
-            </a:extLst>
-          </p:cNvPr>
-          <p:cNvSpPr txBox="1"/>
-          <p:nvPr/>
-        </p:nvSpPr>
-        <p:spPr>
-          <a:xfrm>
-            <a:off x="416902" y="7929139"/>
-            <a:ext cx="885388" cy="461665"/>
-          </a:xfrm>
-          <a:prstGeom prst="rect">
-            <a:avLst/>
-          </a:prstGeom>
-          <a:noFill/>
-        </p:spPr>
-        <p:txBody>
-          <a:bodyPr wrap="square" rtlCol="0">
-            <a:spAutoFit/>
-          </a:bodyPr>
-          <a:lstStyle/>
-          <a:p>
-            <a:r>
-              <a:rPr lang="en-US" sz="2400" b="1" noProof="1"/>
-              <a:t>Help</a:t>
-            </a:r>
-          </a:p>
-        </p:txBody>
-      </p:sp>
-      <p:sp>
-        <p:nvSpPr>
-          <p:cNvPr id="22" name="textruta 21">
-            <a:extLst>
-              <a:ext uri="{FF2B5EF4-FFF2-40B4-BE49-F238E27FC236}">
-                <a16:creationId xmlns:a16="http://schemas.microsoft.com/office/drawing/2014/main" id="{AF028C6E-A947-D149-8E6C-A4419B0C31F8}"/>
-              </a:ext>
-            </a:extLst>
-          </p:cNvPr>
-          <p:cNvSpPr txBox="1"/>
-          <p:nvPr/>
-        </p:nvSpPr>
-        <p:spPr>
-          <a:xfrm>
-            <a:off x="416902" y="122259"/>
-            <a:ext cx="4211089" cy="830997"/>
-          </a:xfrm>
-          <a:prstGeom prst="rect">
-            <a:avLst/>
-          </a:prstGeom>
-          <a:noFill/>
-        </p:spPr>
-        <p:txBody>
-          <a:bodyPr wrap="none" rtlCol="0">
-            <a:spAutoFit/>
-          </a:bodyPr>
-          <a:lstStyle/>
-          <a:p>
-            <a:r>
-              <a:rPr lang="en-US" sz="4800" b="1" noProof="1">
-                <a:solidFill>
-                  <a:schemeClr val="accent1"/>
-                </a:solidFill>
-              </a:rPr>
-              <a:t>Other Windows</a:t>
-            </a:r>
-          </a:p>
-        </p:txBody>
-      </p:sp>
-      <p:sp>
-        <p:nvSpPr>
-          <p:cNvPr id="2" name="textruta 1">
-            <a:extLst>
-              <a:ext uri="{FF2B5EF4-FFF2-40B4-BE49-F238E27FC236}">
-                <a16:creationId xmlns:a16="http://schemas.microsoft.com/office/drawing/2014/main" id="{9851A2CD-4B90-C07F-1152-611E6755CCD9}"/>
-              </a:ext>
-            </a:extLst>
-          </p:cNvPr>
-          <p:cNvSpPr txBox="1"/>
-          <p:nvPr/>
-        </p:nvSpPr>
-        <p:spPr>
-          <a:xfrm>
-            <a:off x="4489123" y="1381925"/>
-            <a:ext cx="3274288" cy="1938992"/>
+            <a:off x="498478" y="1497415"/>
+            <a:ext cx="3274288" cy="1200329"/>
           </a:xfrm>
           <a:prstGeom prst="rect">
             <a:avLst/>
@@ -14312,8 +13997,12 @@
           <a:p>
             <a:r>
               <a:rPr lang="en-US" sz="800" b="1" noProof="1"/>
-              <a:t>Explicitly defined in .html file</a:t>
-            </a:r>
+              <a:t>Running git commands transparently on a server is implemented this way :</a:t>
+            </a:r>
+            <a:br>
+              <a:rPr lang="en-US" sz="800" b="1" noProof="1"/>
+            </a:br>
+            <a:endParaRPr lang="en-US" sz="800" b="1" noProof="1"/>
           </a:p>
           <a:p>
             <a:pPr marL="171450" indent="-171450">
@@ -14321,9 +14010,48 @@
               <a:buChar char="o"/>
             </a:pPr>
             <a:r>
-              <a:rPr lang="en-US" sz="800" noProof="1"/>
-              <a:t>This is for dialogs with predefined content</a:t>
-            </a:r>
+              <a:rPr lang="en-US" sz="800" noProof="1">
+                <a:solidFill>
+                  <a:schemeClr val="accent1"/>
+                </a:solidFill>
+              </a:rPr>
+              <a:t>ssh-git-client</a:t>
+            </a:r>
+            <a:r>
+              <a:rPr lang="en-US" sz="800" noProof="1"/>
+              <a:t>-  is a bash script which runs git-commands on server</a:t>
+            </a:r>
+          </a:p>
+          <a:p>
+            <a:pPr marL="324000" lvl="1" indent="-171450">
+              <a:buFont typeface="Arial" panose="020B0604020202020204" pitchFamily="34" charset="0"/>
+              <a:buChar char="•"/>
+            </a:pPr>
+            <a:r>
+              <a:rPr lang="en-US" sz="800" noProof="1"/>
+              <a:t>simpleGit uses ssh-git-client as a new binary instead of builtin git</a:t>
+            </a:r>
+          </a:p>
+          <a:p>
+            <a:pPr marL="324000" lvl="1" indent="-171450">
+              <a:buFont typeface="Arial" panose="020B0604020202020204" pitchFamily="34" charset="0"/>
+              <a:buChar char="•"/>
+            </a:pPr>
+            <a:r>
+              <a:rPr lang="en-US" sz="800" noProof="1"/>
+              <a:t>first argument is the ssh URL to the repo on server</a:t>
+            </a:r>
+          </a:p>
+          <a:p>
+            <a:pPr marL="324000" lvl="1" indent="-171450">
+              <a:buFont typeface="Arial" panose="020B0604020202020204" pitchFamily="34" charset="0"/>
+              <a:buChar char="•"/>
+            </a:pPr>
+            <a:r>
+              <a:rPr lang="en-US" sz="800" noProof="1"/>
+              <a:t>Other arguments are same as for local git</a:t>
+            </a:r>
+            <a:endParaRPr lang="en-US" sz="800" b="1" noProof="1"/>
           </a:p>
           <a:p>
             <a:pPr marL="171450" indent="-171450">
@@ -14331,105 +14059,33 @@
               <a:buChar char="o"/>
             </a:pPr>
             <a:r>
-              <a:rPr lang="en-US" sz="800" noProof="1"/>
-              <a:t>Shows as html-dialog , inside main app.js window</a:t>
-            </a:r>
-            <a:endParaRPr lang="en-US" sz="800" b="1" noProof="1"/>
-          </a:p>
-          <a:p>
+              <a:rPr lang="en-US" sz="800" noProof="1">
+                <a:solidFill>
+                  <a:schemeClr val="accent1"/>
+                </a:solidFill>
+              </a:rPr>
+              <a:t>SSH URL example format</a:t>
+            </a:r>
             <a:endParaRPr lang="en-US" sz="800" noProof="1"/>
           </a:p>
           <a:p>
-            <a:r>
-              <a:rPr lang="en-US" sz="800" b="1" noProof="1"/>
-              <a:t>Template-dialog in.html file</a:t>
-            </a:r>
-          </a:p>
-          <a:p>
-            <a:pPr marL="171450" indent="-171450">
-              <a:buFont typeface="Courier New" panose="02070309020205020404" pitchFamily="49" charset="0"/>
-              <a:buChar char="o"/>
-            </a:pPr>
-            <a:r>
-              <a:rPr lang="en-US" sz="800" noProof="1"/>
-              <a:t>Local to app.html, and settings.html</a:t>
-            </a:r>
-          </a:p>
-          <a:p>
-            <a:pPr marL="171450" indent="-171450">
-              <a:buFont typeface="Courier New" panose="02070309020205020404" pitchFamily="49" charset="0"/>
-              <a:buChar char="o"/>
-            </a:pPr>
-            <a:r>
-              <a:rPr lang="en-US" sz="800" noProof="1"/>
-              <a:t>displayAlert(title, message)</a:t>
-            </a:r>
-          </a:p>
-          <a:p>
-            <a:pPr marL="171450" indent="-171450">
-              <a:buFont typeface="Courier New" panose="02070309020205020404" pitchFamily="49" charset="0"/>
-              <a:buChar char="o"/>
-            </a:pPr>
-            <a:r>
-              <a:rPr lang="en-US" sz="800" noProof="1"/>
-              <a:t>Shows as html-dialog , inside main window</a:t>
-            </a:r>
-          </a:p>
-          <a:p>
-            <a:pPr marL="171450" indent="-171450">
-              <a:buFont typeface="Courier New" panose="02070309020205020404" pitchFamily="49" charset="0"/>
-              <a:buChar char="o"/>
-            </a:pPr>
-            <a:endParaRPr lang="en-US" sz="800" b="1" noProof="1"/>
-          </a:p>
-          <a:p>
-            <a:r>
-              <a:rPr lang="en-US" sz="800" b="1" noProof="1"/>
-              <a:t>exernalDialog.html (sizing performed in app.html)</a:t>
-            </a:r>
-          </a:p>
-          <a:p>
-            <a:pPr marL="171450" indent="-171450">
-              <a:buFont typeface="Courier New" panose="02070309020205020404" pitchFamily="49" charset="0"/>
-              <a:buChar char="o"/>
-            </a:pPr>
-            <a:r>
-              <a:rPr lang="en-US" sz="800" noProof="1"/>
-              <a:t>displayLongAlert(title, message, type)</a:t>
-            </a:r>
-            <a:br>
-              <a:rPr lang="en-US" sz="800" noProof="1"/>
-            </a:br>
-            <a:r>
-              <a:rPr lang="en-US" sz="800" noProof="1"/>
-              <a:t>defined in app.js</a:t>
-            </a:r>
-          </a:p>
-          <a:p>
-            <a:pPr marL="171450" indent="-171450">
-              <a:buFont typeface="Courier New" panose="02070309020205020404" pitchFamily="49" charset="0"/>
-              <a:buChar char="o"/>
-            </a:pPr>
-            <a:r>
-              <a:rPr lang="en-US" sz="800" noProof="1"/>
-              <a:t>Shows as external window, on top of main  app.js window</a:t>
-            </a:r>
-            <a:br>
-              <a:rPr lang="en-US" sz="800" noProof="1"/>
-            </a:br>
-            <a:br>
-              <a:rPr lang="en-US" sz="800" noProof="1"/>
-            </a:br>
-            <a:endParaRPr lang="en-US" sz="800" noProof="1"/>
-          </a:p>
-        </p:txBody>
-      </p:sp>
-      <p:sp>
-        <p:nvSpPr>
-          <p:cNvPr id="3" name="textruta 2">
+            <a:pPr marL="324000" lvl="1" indent="-171450">
+              <a:buFont typeface="Arial" panose="020B0604020202020204" pitchFamily="34" charset="0"/>
+              <a:buChar char="•"/>
+            </a:pPr>
+            <a:r>
+              <a:rPr lang="en-US" sz="800" noProof="1"/>
+              <a:t>ssh://jan@linus/usr/local/MATLAB/imlook4d/imlook4d_DEVELOP</a:t>
+            </a:r>
+          </a:p>
+        </p:txBody>
+      </p:sp>
+      <p:sp>
+        <p:nvSpPr>
+          <p:cNvPr id="6" name="textruta 5">
             <a:extLst>
               <a:ext uri="{FF2B5EF4-FFF2-40B4-BE49-F238E27FC236}">
-                <a16:creationId xmlns:a16="http://schemas.microsoft.com/office/drawing/2014/main" id="{06DEBF44-050B-2220-C4D8-56D460476702}"/>
+                <a16:creationId xmlns:a16="http://schemas.microsoft.com/office/drawing/2014/main" id="{D4CC239A-FBA7-870A-44C9-D36BD394F293}"/>
               </a:ext>
             </a:extLst>
           </p:cNvPr>
@@ -14438,8 +14094,8 @@
         </p:nvSpPr>
         <p:spPr>
           <a:xfrm>
-            <a:off x="4489123" y="841210"/>
-            <a:ext cx="1116011" cy="461665"/>
+            <a:off x="336553" y="953256"/>
+            <a:ext cx="1829155" cy="461665"/>
           </a:xfrm>
           <a:prstGeom prst="rect">
             <a:avLst/>
@@ -14454,17 +14110,17 @@
           <a:p>
             <a:r>
               <a:rPr lang="en-US" sz="2400" b="1" noProof="1"/>
-              <a:t>Dialogs</a:t>
-            </a:r>
-          </a:p>
-        </p:txBody>
-      </p:sp>
-      <p:sp>
-        <p:nvSpPr>
-          <p:cNvPr id="6" name="textruta 5">
+              <a:t>Git on server</a:t>
+            </a:r>
+          </a:p>
+        </p:txBody>
+      </p:sp>
+      <p:sp>
+        <p:nvSpPr>
+          <p:cNvPr id="2" name="textruta 4">
             <a:extLst>
               <a:ext uri="{FF2B5EF4-FFF2-40B4-BE49-F238E27FC236}">
-                <a16:creationId xmlns:a16="http://schemas.microsoft.com/office/drawing/2014/main" id="{A188559A-F5E8-46DD-F138-41217EC70A89}"/>
+                <a16:creationId xmlns:a16="http://schemas.microsoft.com/office/drawing/2014/main" id="{4F8EF986-C685-6786-DD73-97E044DC219F}"/>
               </a:ext>
             </a:extLst>
           </p:cNvPr>
@@ -14473,8 +14129,8 @@
         </p:nvSpPr>
         <p:spPr>
           <a:xfrm>
-            <a:off x="8256717" y="4608845"/>
-            <a:ext cx="3274288" cy="2554545"/>
+            <a:off x="498478" y="3422956"/>
+            <a:ext cx="3274288" cy="6124754"/>
           </a:xfrm>
           <a:prstGeom prst="rect">
             <a:avLst/>
@@ -14494,7 +14150,7 @@
           <a:p>
             <a:r>
               <a:rPr lang="en-US" sz="800" b="1" noProof="1"/>
-              <a:t>Windows menu (MacOS only):</a:t>
+              <a:t>Interacting with pragma-merge with git on a server is a lot more complicated, since the difftool has to send multiple files back to client’s pragma-merge.</a:t>
             </a:r>
             <a:br>
               <a:rPr lang="en-US" sz="800" b="1" noProof="1"/>
@@ -14512,16 +14168,129 @@
                   <a:schemeClr val="accent1"/>
                 </a:solidFill>
               </a:rPr>
-              <a:t>initializeWindowMenu</a:t>
-            </a:r>
-            <a:r>
-              <a:rPr lang="en-US" sz="800" noProof="1"/>
-              <a:t>: creates default MacOs menu in native language. Windows menu is recreated</a:t>
+              <a:t>SERVER; pragma-merge </a:t>
+            </a:r>
+            <a:r>
+              <a:rPr lang="en-US" sz="800" noProof="1"/>
+              <a:t>-  works differently on the server: </a:t>
+            </a:r>
+          </a:p>
+          <a:p>
+            <a:pPr marL="324000" lvl="1" indent="-171450">
+              <a:buFont typeface="Arial" panose="020B0604020202020204" pitchFamily="34" charset="0"/>
+              <a:buChar char="•"/>
+            </a:pPr>
+            <a:r>
+              <a:rPr lang="en-US" sz="800" noProof="1"/>
+              <a:t>Initiated through git diff and merge commands, but over </a:t>
+            </a:r>
+            <a:br>
+              <a:rPr lang="en-US" sz="800" noProof="1"/>
+            </a:br>
+            <a:r>
+              <a:rPr lang="en-US" sz="800" noProof="1"/>
+              <a:t>git-client-ssh instead of local git</a:t>
+            </a:r>
+          </a:p>
+          <a:p>
+            <a:pPr marL="324000" lvl="1" indent="-171450">
+              <a:buFont typeface="Arial" panose="020B0604020202020204" pitchFamily="34" charset="0"/>
+              <a:buChar char="•"/>
+            </a:pPr>
+            <a:r>
+              <a:rPr lang="en-US" sz="800" noProof="1"/>
+              <a:t>SIGNALING FILE: $TMP/pragma-merge-running-ssh</a:t>
+            </a:r>
+            <a:br>
+              <a:rPr lang="en-US" sz="800" noProof="1"/>
+            </a:br>
+            <a:r>
+              <a:rPr lang="en-US" sz="800" noProof="1"/>
+              <a:t>OUTPUT FILE: $FILE_LIST_ON_SSH </a:t>
             </a:r>
             <a:br>
               <a:rPr lang="en-US" sz="800" noProof="1"/>
             </a:br>
             <a:endParaRPr lang="en-US" sz="800" noProof="1"/>
+          </a:p>
+          <a:p>
+            <a:pPr marL="324000" lvl="1" indent="-171450">
+              <a:buFont typeface="Arial" panose="020B0604020202020204" pitchFamily="34" charset="0"/>
+              <a:buChar char="•"/>
+            </a:pPr>
+            <a:r>
+              <a:rPr lang="en-US" sz="800" noProof="1"/>
+              <a:t>Config file must contain row (note argument 5 = ‘ssh’):</a:t>
+            </a:r>
+            <a:br>
+              <a:rPr lang="en-US" sz="800" noProof="1"/>
+            </a:br>
+            <a:r>
+              <a:rPr lang="en-US" sz="800" noProof="1"/>
+              <a:t>cmd = /home/jan/Desktop/Pragma-git-dev/pragma-merge $BASE $LOCAL $REMOTE $MERGED 'ssh'</a:t>
+            </a:r>
+          </a:p>
+          <a:p>
+            <a:pPr marL="324000" lvl="1" indent="-171450">
+              <a:buFont typeface="Arial" panose="020B0604020202020204" pitchFamily="34" charset="0"/>
+              <a:buChar char="•"/>
+            </a:pPr>
+            <a:r>
+              <a:rPr lang="en-US" sz="800" noProof="1"/>
+              <a:t>Identifies that it is an ‘ssh’ command by argument 5</a:t>
+            </a:r>
+          </a:p>
+          <a:p>
+            <a:pPr marL="324000" lvl="1" indent="-171450">
+              <a:buFont typeface="Arial" panose="020B0604020202020204" pitchFamily="34" charset="0"/>
+              <a:buChar char="•"/>
+            </a:pPr>
+            <a:r>
+              <a:rPr lang="en-US" sz="800" noProof="1"/>
+              <a:t>Creates signaling file $TMP/pragma-merge-running-ssh</a:t>
+            </a:r>
+            <a:br>
+              <a:rPr lang="en-US" sz="800" noProof="1"/>
+            </a:br>
+            <a:r>
+              <a:rPr lang="en-US" sz="800" noProof="1"/>
+              <a:t>(instead of $TMP/pragma-merge-running)</a:t>
+            </a:r>
+            <a:br>
+              <a:rPr lang="en-US" sz="800" noProof="1"/>
+            </a:br>
+            <a:r>
+              <a:rPr lang="en-US" sz="800" noProof="1"/>
+              <a:t>NOTE: stays open pragma-merge on client closes TODO!</a:t>
+            </a:r>
+          </a:p>
+          <a:p>
+            <a:pPr marL="324000" lvl="1" indent="-171450">
+              <a:buFont typeface="Arial" panose="020B0604020202020204" pitchFamily="34" charset="0"/>
+              <a:buChar char="•"/>
+            </a:pPr>
+            <a:r>
+              <a:rPr lang="en-US" sz="800" noProof="1"/>
+              <a:t>Creates :</a:t>
+            </a:r>
+            <a:br>
+              <a:rPr lang="en-US" sz="800" noProof="1"/>
+            </a:br>
+            <a:r>
+              <a:rPr lang="en-US" sz="800" noProof="1"/>
+              <a:t>$FILE_LIST_ON_SSH – file listing 4 files given by git difftool command : $BASE $LOCAL $REMOTE $MERGED</a:t>
+            </a:r>
+            <a:br>
+              <a:rPr lang="en-US" sz="800" noProof="1"/>
+            </a:br>
+            <a:r>
+              <a:rPr lang="en-US" sz="800" noProof="1"/>
+              <a:t>(FILE_LIST_ON_SSH  = /tmp/test.txt)</a:t>
+            </a:r>
+            <a:br>
+              <a:rPr lang="en-US" sz="800" b="1" noProof="1"/>
+            </a:br>
+            <a:endParaRPr lang="en-US" sz="800" b="1" noProof="1"/>
           </a:p>
           <a:p>
             <a:pPr marL="171450" indent="-171450">
@@ -14534,16 +14303,47 @@
                   <a:schemeClr val="accent1"/>
                 </a:solidFill>
               </a:rPr>
-              <a:t>addWindowMenu</a:t>
-            </a:r>
-            <a:r>
-              <a:rPr lang="en-US" sz="800" noProof="1"/>
-              <a:t> : stores the submenu handle with the title as key window_menu_handles_mapping[title]</a:t>
+              <a:t>CLIENT : ssh-git-client (when difftool or mergetool) </a:t>
+            </a:r>
+            <a:r>
+              <a:rPr lang="en-US" sz="800" noProof="1"/>
+              <a:t>starts new shell</a:t>
+            </a:r>
+          </a:p>
+          <a:p>
+            <a:pPr marL="324000" lvl="1" indent="-171450">
+              <a:buFont typeface="Arial" panose="020B0604020202020204" pitchFamily="34" charset="0"/>
+              <a:buChar char="•"/>
+            </a:pPr>
+            <a:r>
+              <a:rPr lang="en-US" sz="800" noProof="1"/>
+              <a:t>If difftool or mergetool command, </a:t>
             </a:r>
             <a:br>
               <a:rPr lang="en-US" sz="800" noProof="1"/>
             </a:br>
-            <a:endParaRPr lang="en-US" sz="800" noProof="1"/>
+            <a:r>
+              <a:rPr lang="en-US" sz="800" noProof="1"/>
+              <a:t>start “delayed-start-pragma-merge” in new shell</a:t>
+            </a:r>
+          </a:p>
+          <a:p>
+            <a:pPr marL="324000" lvl="1" indent="-171450">
+              <a:buFont typeface="Arial" panose="020B0604020202020204" pitchFamily="34" charset="0"/>
+              <a:buChar char="•"/>
+            </a:pPr>
+            <a:r>
+              <a:rPr lang="en-US" sz="800" noProof="1"/>
+              <a:t>Run the git diff/merge command on server</a:t>
+            </a:r>
+            <a:br>
+              <a:rPr lang="en-US" sz="800" noProof="1"/>
+            </a:br>
+            <a:endParaRPr lang="en-US" sz="800" noProof="1">
+              <a:solidFill>
+                <a:schemeClr val="accent1"/>
+              </a:solidFill>
+            </a:endParaRPr>
           </a:p>
           <a:p>
             <a:pPr marL="171450" indent="-171450">
@@ -14556,16 +14356,47 @@
                   <a:schemeClr val="accent1"/>
                 </a:solidFill>
               </a:rPr>
-              <a:t>deleteWindowMenu </a:t>
-            </a:r>
-            <a:r>
-              <a:rPr lang="en-US" sz="800" noProof="1"/>
-              <a:t>: close using window title to find submenu handle.  </a:t>
+              <a:t>-&gt; CLIENT : delayed-start-pragma-merge</a:t>
+            </a:r>
+            <a:endParaRPr lang="en-US" sz="800" noProof="1"/>
+          </a:p>
+          <a:p>
+            <a:pPr marL="324000" lvl="1" indent="-171450">
+              <a:buFont typeface="Arial" panose="020B0604020202020204" pitchFamily="34" charset="0"/>
+              <a:buChar char="•"/>
+            </a:pPr>
+            <a:r>
+              <a:rPr lang="en-US" sz="800" noProof="1"/>
+              <a:t>Waits a few second for ssh-git-client to run on server</a:t>
             </a:r>
             <a:br>
               <a:rPr lang="en-US" sz="800" noProof="1"/>
             </a:br>
-            <a:endParaRPr lang="en-US" sz="800" noProof="1"/>
+            <a:r>
+              <a:rPr lang="en-US" sz="800" noProof="1"/>
+              <a:t>TODO: instead, check if $FILE_LIST_ON_SSH has been created</a:t>
+            </a:r>
+          </a:p>
+          <a:p>
+            <a:pPr marL="324000" lvl="1" indent="-171450">
+              <a:buFont typeface="Arial" panose="020B0604020202020204" pitchFamily="34" charset="0"/>
+              <a:buChar char="•"/>
+            </a:pPr>
+            <a:r>
+              <a:rPr lang="en-US" sz="800" noProof="1"/>
+              <a:t>Start ssh-pragma-merge-files, to pick up files from server</a:t>
+            </a:r>
+          </a:p>
+          <a:p>
+            <a:pPr marL="171450" indent="-171450">
+              <a:buFont typeface="Courier New" panose="02070309020205020404" pitchFamily="49" charset="0"/>
+              <a:buChar char="o"/>
+            </a:pPr>
+            <a:endParaRPr lang="en-US" sz="800" noProof="1">
+              <a:solidFill>
+                <a:schemeClr val="accent1"/>
+              </a:solidFill>
+            </a:endParaRPr>
           </a:p>
           <a:p>
             <a:pPr marL="171450" indent="-171450">
@@ -14578,11 +14409,86 @@
                   <a:schemeClr val="accent1"/>
                 </a:solidFill>
               </a:rPr>
-              <a:t>recreateAllWindowsMenu </a:t>
-            </a:r>
-            <a:r>
-              <a:rPr lang="en-US" sz="800" noProof="1"/>
-              <a:t>: generates a populated MacOS window menu from scratch (used by Main when restarting after Settings scale change) </a:t>
+              <a:t>-&gt; CLIENT; ssh-pragma-merge-files – </a:t>
+            </a:r>
+            <a:r>
+              <a:rPr lang="en-US" sz="800" noProof="1"/>
+              <a:t>picks up server files to client</a:t>
+            </a:r>
+          </a:p>
+          <a:p>
+            <a:pPr marL="324000" lvl="1" indent="-171450">
+              <a:buFont typeface="Arial" panose="020B0604020202020204" pitchFamily="34" charset="0"/>
+              <a:buChar char="•"/>
+            </a:pPr>
+            <a:r>
+              <a:rPr lang="en-US" sz="800" noProof="1"/>
+              <a:t>OUTPUT FILES: </a:t>
+            </a:r>
+            <a:br>
+              <a:rPr lang="en-US" sz="800" noProof="1"/>
+            </a:br>
+            <a:r>
+              <a:rPr lang="en-US" sz="800" noProof="1"/>
+              <a:t>$FILE_LIST_ON_SSH </a:t>
+            </a:r>
+            <a:br>
+              <a:rPr lang="en-US" sz="800" noProof="1"/>
+            </a:br>
+            <a:r>
+              <a:rPr lang="en-US" sz="800" noProof="1"/>
+              <a:t>Files in $TEMP_FILE_LOCATION folder</a:t>
+            </a:r>
+            <a:br>
+              <a:rPr lang="en-US" sz="800" noProof="1"/>
+            </a:br>
+            <a:endParaRPr lang="en-US" sz="800" noProof="1"/>
+          </a:p>
+          <a:p>
+            <a:pPr marL="324000" lvl="1" indent="-171450">
+              <a:buFont typeface="Arial" panose="020B0604020202020204" pitchFamily="34" charset="0"/>
+              <a:buChar char="•"/>
+            </a:pPr>
+            <a:r>
+              <a:rPr lang="en-US" sz="800" noProof="1"/>
+              <a:t>First argument = SSH URL</a:t>
+            </a:r>
+          </a:p>
+          <a:p>
+            <a:pPr marL="324000" lvl="1" indent="-171450">
+              <a:buFont typeface="Arial" panose="020B0604020202020204" pitchFamily="34" charset="0"/>
+              <a:buChar char="•"/>
+            </a:pPr>
+            <a:r>
+              <a:rPr lang="en-US" sz="800" noProof="1"/>
+              <a:t>Picks up $FILE_LIST_ON_SSH from server</a:t>
+            </a:r>
+          </a:p>
+          <a:p>
+            <a:pPr marL="324000" lvl="1" indent="-171450">
+              <a:buFont typeface="Arial" panose="020B0604020202020204" pitchFamily="34" charset="0"/>
+              <a:buChar char="•"/>
+            </a:pPr>
+            <a:r>
+              <a:rPr lang="en-US" sz="800" noProof="1"/>
+              <a:t>Copy 4 listed files to client folder $TEMP_FILE_LOCATION</a:t>
+            </a:r>
+            <a:br>
+              <a:rPr lang="en-US" sz="800" noProof="1"/>
+            </a:br>
+            <a:r>
+              <a:rPr lang="en-US" sz="800" noProof="1"/>
+              <a:t>(= '/tmp/pragma-git-ssh-folders’ )</a:t>
+            </a:r>
+          </a:p>
+          <a:p>
+            <a:pPr marL="324000" lvl="1" indent="-171450">
+              <a:buFont typeface="Arial" panose="020B0604020202020204" pitchFamily="34" charset="0"/>
+              <a:buChar char="•"/>
+            </a:pPr>
+            <a:r>
+              <a:rPr lang="en-US" sz="800" noProof="1"/>
+              <a:t>Convert $FILE_LIST_ON_SSH relative paths to $ABSOLUTE_FILE_LOCATIONS on client</a:t>
             </a:r>
           </a:p>
           <a:p>
@@ -14590,7 +14496,11 @@
               <a:buFont typeface="Courier New" panose="02070309020205020404" pitchFamily="49" charset="0"/>
               <a:buChar char="o"/>
             </a:pPr>
-            <a:endParaRPr lang="en-US" sz="800" noProof="1"/>
+            <a:endParaRPr lang="en-US" sz="800" noProof="1">
+              <a:solidFill>
+                <a:schemeClr val="accent1"/>
+              </a:solidFill>
+            </a:endParaRPr>
           </a:p>
           <a:p>
             <a:pPr marL="171450" indent="-171450">
@@ -14603,21 +14513,48 @@
                   <a:schemeClr val="accent1"/>
                 </a:solidFill>
               </a:rPr>
-              <a:t>gui.Window.getAll</a:t>
-            </a:r>
-            <a:r>
-              <a:rPr lang="en-US" sz="800" noProof="1"/>
-              <a:t> is used several places to find open windows (and child windows that are not supposed to be in the windows menu).  A function is called that iterates each found window, and performs the action.  See ‘minimizeWindow’, ‘closeAllWindows’, ‘hideAllWindows’,’ showAllWindows’</a:t>
-            </a:r>
-          </a:p>
-        </p:txBody>
-      </p:sp>
-      <p:sp>
-        <p:nvSpPr>
-          <p:cNvPr id="7" name="textruta 6">
+              <a:t>CLIENT; ssh-close-pragma-merge-ssh </a:t>
+            </a:r>
+            <a:endParaRPr lang="en-US" sz="800" noProof="1"/>
+          </a:p>
+          <a:p>
+            <a:pPr marL="324000" lvl="1" indent="-171450">
+              <a:buFont typeface="Arial" panose="020B0604020202020204" pitchFamily="34" charset="0"/>
+              <a:buChar char="•"/>
+            </a:pPr>
+            <a:r>
+              <a:rPr lang="en-US" sz="800" noProof="1"/>
+              <a:t>initiated when closing local pragma-merge window</a:t>
+            </a:r>
+          </a:p>
+          <a:p>
+            <a:pPr marL="324000" lvl="1" indent="-171450">
+              <a:buFont typeface="Arial" panose="020B0604020202020204" pitchFamily="34" charset="0"/>
+              <a:buChar char="•"/>
+            </a:pPr>
+            <a:r>
+              <a:rPr lang="en-US" sz="800" noProof="1"/>
+              <a:t>Removes SIGNALING FILE: $TMP/pragma-merge-running-ssh on server </a:t>
+            </a:r>
+          </a:p>
+          <a:p>
+            <a:pPr marL="324000" lvl="1" indent="-171450">
+              <a:buFont typeface="Arial" panose="020B0604020202020204" pitchFamily="34" charset="0"/>
+              <a:buChar char="•"/>
+            </a:pPr>
+            <a:r>
+              <a:rPr lang="en-US" sz="800" noProof="1"/>
+              <a:t>Removes $FILE_LIST_ON_SSH on server</a:t>
+            </a:r>
+          </a:p>
+        </p:txBody>
+      </p:sp>
+      <p:sp>
+        <p:nvSpPr>
+          <p:cNvPr id="10" name="textruta 5">
             <a:extLst>
               <a:ext uri="{FF2B5EF4-FFF2-40B4-BE49-F238E27FC236}">
-                <a16:creationId xmlns:a16="http://schemas.microsoft.com/office/drawing/2014/main" id="{4108F045-DC67-5945-2D67-046A62557881}"/>
+                <a16:creationId xmlns:a16="http://schemas.microsoft.com/office/drawing/2014/main" id="{888AD4D2-EC1F-D93E-0C03-32EE71D053F5}"/>
               </a:ext>
             </a:extLst>
           </p:cNvPr>
@@ -14626,8 +14563,8 @@
         </p:nvSpPr>
         <p:spPr>
           <a:xfrm>
-            <a:off x="8173611" y="4017061"/>
-            <a:ext cx="3974871" cy="461665"/>
+            <a:off x="336553" y="2878797"/>
+            <a:ext cx="2054537" cy="461665"/>
           </a:xfrm>
           <a:prstGeom prst="rect">
             <a:avLst/>
@@ -14642,220 +14579,7 @@
           <a:p>
             <a:r>
               <a:rPr lang="en-US" sz="2400" b="1" noProof="1"/>
-              <a:t>Windows menu (MacOS only)</a:t>
-            </a:r>
-          </a:p>
-        </p:txBody>
-      </p:sp>
-      <p:sp>
-        <p:nvSpPr>
-          <p:cNvPr id="8" name="textruta 7">
-            <a:extLst>
-              <a:ext uri="{FF2B5EF4-FFF2-40B4-BE49-F238E27FC236}">
-                <a16:creationId xmlns:a16="http://schemas.microsoft.com/office/drawing/2014/main" id="{C2961014-07D4-C6A9-2F8B-DEB31EC6254D}"/>
-              </a:ext>
-            </a:extLst>
-          </p:cNvPr>
-          <p:cNvSpPr txBox="1"/>
-          <p:nvPr/>
-        </p:nvSpPr>
-        <p:spPr>
-          <a:xfrm>
-            <a:off x="8256717" y="1376136"/>
-            <a:ext cx="3274288" cy="2431435"/>
-          </a:xfrm>
-          <a:prstGeom prst="rect">
-            <a:avLst/>
-          </a:prstGeom>
-          <a:noFill/>
-          <a:ln>
-            <a:solidFill>
-              <a:schemeClr val="accent1"/>
-            </a:solidFill>
-          </a:ln>
-        </p:spPr>
-        <p:txBody>
-          <a:bodyPr wrap="square" rtlCol="0">
-            <a:spAutoFit/>
-          </a:bodyPr>
-          <a:lstStyle/>
-          <a:p>
-            <a:r>
-              <a:rPr lang="en-US" sz="800" b="1" noProof="1"/>
-              <a:t>Windows opened from Main, Settings</a:t>
-            </a:r>
-            <a:br>
-              <a:rPr lang="en-US" sz="800" b="1" noProof="1"/>
-            </a:br>
-            <a:endParaRPr lang="en-US" sz="800" b="1" noProof="1"/>
-          </a:p>
-          <a:p>
-            <a:pPr marL="171450" indent="-171450">
-              <a:buFont typeface="Courier New" panose="02070309020205020404" pitchFamily="49" charset="0"/>
-              <a:buChar char="o"/>
-            </a:pPr>
-            <a:r>
-              <a:rPr lang="en-US" sz="800" noProof="1"/>
-              <a:t>.</a:t>
-            </a:r>
-            <a:r>
-              <a:rPr lang="en-US" sz="800" noProof="1">
-                <a:solidFill>
-                  <a:schemeClr val="accent1"/>
-                </a:solidFill>
-              </a:rPr>
-              <a:t> localState </a:t>
-            </a:r>
-            <a:r>
-              <a:rPr lang="en-US" sz="800" noProof="1"/>
-              <a:t>(transient info) :</a:t>
-            </a:r>
-            <a:br>
-              <a:rPr lang="en-US" sz="800" noProof="1"/>
-            </a:br>
-            <a:r>
-              <a:rPr lang="en-US" sz="800" noProof="1"/>
-              <a:t> helpWindow, .settings, . fileListWindow, …</a:t>
-            </a:r>
-            <a:br>
-              <a:rPr lang="en-US" sz="800" noProof="1"/>
-            </a:br>
-            <a:r>
-              <a:rPr lang="en-US" sz="800" noProof="1"/>
-              <a:t>(true if window is open, false if closed)</a:t>
-            </a:r>
-            <a:br>
-              <a:rPr lang="en-US" sz="800" noProof="1"/>
-            </a:br>
-            <a:endParaRPr lang="en-US" sz="800" noProof="1"/>
-          </a:p>
-          <a:p>
-            <a:pPr marL="171450" indent="-171450">
-              <a:buFont typeface="Courier New" panose="02070309020205020404" pitchFamily="49" charset="0"/>
-              <a:buChar char="o"/>
-            </a:pPr>
-            <a:r>
-              <a:rPr lang="en-US" sz="800" noProof="1"/>
-              <a:t>External windows are opened hidden, with option ’show: false’</a:t>
-            </a:r>
-            <a:br>
-              <a:rPr lang="en-US" sz="800" noProof="1"/>
-            </a:br>
-            <a:r>
-              <a:rPr lang="en-US" sz="800" noProof="1"/>
-              <a:t>(to work around buggy multiple workspaces).  </a:t>
-            </a:r>
-            <a:br>
-              <a:rPr lang="en-US" sz="800" noProof="1"/>
-            </a:br>
-            <a:endParaRPr lang="en-US" sz="800" noProof="1"/>
-          </a:p>
-          <a:p>
-            <a:pPr marL="171450" indent="-171450">
-              <a:buFont typeface="Courier New" panose="02070309020205020404" pitchFamily="49" charset="0"/>
-              <a:buChar char="o"/>
-            </a:pPr>
-            <a:r>
-              <a:rPr lang="en-US" sz="800" noProof="1">
-                <a:solidFill>
-                  <a:schemeClr val="accent1"/>
-                </a:solidFill>
-              </a:rPr>
-              <a:t>showWindow(win) </a:t>
-            </a:r>
-            <a:r>
-              <a:rPr lang="en-US" sz="800" noProof="1"/>
-              <a:t>is used to show hidden window.   </a:t>
-            </a:r>
-          </a:p>
-          <a:p>
-            <a:pPr marL="355600" lvl="1" indent="-177800">
-              <a:buFont typeface="Arial" panose="020B0604020202020204" pitchFamily="34" charset="0"/>
-              <a:buChar char="•"/>
-            </a:pPr>
-            <a:r>
-              <a:rPr lang="en-US" sz="800" noProof="1"/>
-              <a:t>Called from 'loaded’ event, when opening new window using ‘nw.Window.open’.   </a:t>
-            </a:r>
-          </a:p>
-          <a:p>
-            <a:pPr marL="355600" lvl="1" indent="-177800">
-              <a:buFont typeface="Arial" panose="020B0604020202020204" pitchFamily="34" charset="0"/>
-              <a:buChar char="•"/>
-            </a:pPr>
-            <a:r>
-              <a:rPr lang="en-US" sz="800" noProof="1"/>
-              <a:t>See two versions in ‘app.js’:</a:t>
-            </a:r>
-            <a:br>
-              <a:rPr lang="en-US" sz="800" noProof="1"/>
-            </a:br>
-            <a:r>
-              <a:rPr lang="en-US" sz="800" noProof="1"/>
-              <a:t>- callback’, case statement 'clicked-notes’</a:t>
-            </a:r>
-            <a:br>
-              <a:rPr lang="en-US" sz="800" noProof="1"/>
-            </a:br>
-            <a:r>
-              <a:rPr lang="en-US" sz="800" noProof="1"/>
-              <a:t>or</a:t>
-            </a:r>
-            <a:br>
-              <a:rPr lang="en-US" sz="800" noProof="1"/>
-            </a:br>
-            <a:r>
-              <a:rPr lang="en-US" sz="800" noProof="1"/>
-              <a:t>- ‘showAbout’ function</a:t>
-            </a:r>
-          </a:p>
-          <a:p>
-            <a:pPr marL="355600" lvl="1" indent="-177800">
-              <a:buFont typeface="Arial" panose="020B0604020202020204" pitchFamily="34" charset="0"/>
-              <a:buChar char="•"/>
-            </a:pPr>
-            <a:r>
-              <a:rPr lang="en-US" sz="800" noProof="1"/>
-              <a:t>Two ways to handle multiple windows (MacOS and Linux behaves differently)</a:t>
-            </a:r>
-            <a:br>
-              <a:rPr lang="en-US" sz="800" noProof="1"/>
-            </a:br>
-            <a:endParaRPr lang="en-US" sz="800" noProof="1"/>
-          </a:p>
-        </p:txBody>
-      </p:sp>
-      <p:sp>
-        <p:nvSpPr>
-          <p:cNvPr id="9" name="textruta 8">
-            <a:extLst>
-              <a:ext uri="{FF2B5EF4-FFF2-40B4-BE49-F238E27FC236}">
-                <a16:creationId xmlns:a16="http://schemas.microsoft.com/office/drawing/2014/main" id="{279F5223-2ED1-3322-DF84-D0ED0C8FE18E}"/>
-              </a:ext>
-            </a:extLst>
-          </p:cNvPr>
-          <p:cNvSpPr txBox="1"/>
-          <p:nvPr/>
-        </p:nvSpPr>
-        <p:spPr>
-          <a:xfrm>
-            <a:off x="8173611" y="784352"/>
-            <a:ext cx="3523400" cy="461665"/>
-          </a:xfrm>
-          <a:prstGeom prst="rect">
-            <a:avLst/>
-          </a:prstGeom>
-          <a:noFill/>
-        </p:spPr>
-        <p:txBody>
-          <a:bodyPr wrap="none" rtlCol="0">
-            <a:spAutoFit/>
-          </a:bodyPr>
-          <a:lstStyle/>
-          <a:p>
-            <a:r>
-              <a:rPr lang="en-US" sz="2400" b="1" noProof="1"/>
-              <a:t>External Windows general</a:t>
+              <a:t>Pragma-merge</a:t>
             </a:r>
           </a:p>
         </p:txBody>
@@ -14863,7 +14587,7 @@
     </p:spTree>
     <p:extLst>
       <p:ext uri="{BB962C8B-B14F-4D97-AF65-F5344CB8AC3E}">
-        <p14:creationId xmlns:p14="http://schemas.microsoft.com/office/powerpoint/2010/main" val="748310116"/>
+        <p14:creationId xmlns:p14="http://schemas.microsoft.com/office/powerpoint/2010/main" val="3253474692"/>
       </p:ext>
     </p:extLst>
   </p:cSld>
@@ -14895,7 +14619,7 @@
           <p:cNvPr id="4" name="textruta 3">
             <a:extLst>
               <a:ext uri="{FF2B5EF4-FFF2-40B4-BE49-F238E27FC236}">
-                <a16:creationId xmlns:a16="http://schemas.microsoft.com/office/drawing/2014/main" id="{83E1DA8D-DE72-7249-821E-88B0B328518E}"/>
+                <a16:creationId xmlns:a16="http://schemas.microsoft.com/office/drawing/2014/main" id="{4AD88DAB-01A9-A441-A11C-9B4000367464}"/>
               </a:ext>
             </a:extLst>
           </p:cNvPr>
@@ -14904,8 +14628,1185 @@
         </p:nvSpPr>
         <p:spPr>
           <a:xfrm>
+            <a:off x="489993" y="887480"/>
+            <a:ext cx="1099660" cy="461665"/>
+          </a:xfrm>
+          <a:prstGeom prst="rect">
+            <a:avLst/>
+          </a:prstGeom>
+          <a:noFill/>
+        </p:spPr>
+        <p:txBody>
+          <a:bodyPr wrap="none" rtlCol="0">
+            <a:spAutoFit/>
+          </a:bodyPr>
+          <a:lstStyle/>
+          <a:p>
+            <a:r>
+              <a:rPr lang="en-US" sz="2400" b="1" noProof="1"/>
+              <a:t>History</a:t>
+            </a:r>
+          </a:p>
+        </p:txBody>
+      </p:sp>
+      <p:sp>
+        <p:nvSpPr>
+          <p:cNvPr id="5" name="Rektangel 4">
+            <a:extLst>
+              <a:ext uri="{FF2B5EF4-FFF2-40B4-BE49-F238E27FC236}">
+                <a16:creationId xmlns:a16="http://schemas.microsoft.com/office/drawing/2014/main" id="{6298B066-77DC-F744-A641-81AB722329F0}"/>
+              </a:ext>
+            </a:extLst>
+          </p:cNvPr>
+          <p:cNvSpPr/>
+          <p:nvPr/>
+        </p:nvSpPr>
+        <p:spPr>
+          <a:xfrm>
+            <a:off x="489993" y="1361519"/>
+            <a:ext cx="3685232" cy="3293209"/>
+          </a:xfrm>
+          <a:prstGeom prst="rect">
+            <a:avLst/>
+          </a:prstGeom>
+          <a:solidFill>
+            <a:schemeClr val="bg1"/>
+          </a:solidFill>
+          <a:ln>
+            <a:solidFill>
+              <a:schemeClr val="accent1"/>
+            </a:solidFill>
+          </a:ln>
+        </p:spPr>
+        <p:txBody>
+          <a:bodyPr wrap="square">
+            <a:spAutoFit/>
+          </a:bodyPr>
+          <a:lstStyle/>
+          <a:p>
+            <a:r>
+              <a:rPr lang="en-US" sz="800" b="1" noProof="1"/>
+              <a:t>History is browsed with arrow buttons</a:t>
+            </a:r>
+          </a:p>
+          <a:p>
+            <a:endParaRPr lang="en-US" sz="800" noProof="1"/>
+          </a:p>
+          <a:p>
+            <a:pPr marL="171450" indent="-171450">
+              <a:buFont typeface="Courier New" panose="02070309020205020404" pitchFamily="49" charset="0"/>
+              <a:buChar char="o"/>
+            </a:pPr>
+            <a:r>
+              <a:rPr lang="en-US" sz="800" noProof="1"/>
+              <a:t>History signaled by getMode() == “HISTORY”</a:t>
+            </a:r>
+          </a:p>
+          <a:p>
+            <a:pPr marL="171450" indent="-171450">
+              <a:buFont typeface="Courier New" panose="02070309020205020404" pitchFamily="49" charset="0"/>
+              <a:buChar char="o"/>
+            </a:pPr>
+            <a:r>
+              <a:rPr lang="en-US" sz="800" noProof="1"/>
+              <a:t>History list can be shortened by </a:t>
+            </a:r>
+            <a:r>
+              <a:rPr lang="en-US" sz="800" b="1" noProof="1"/>
+              <a:t>Search</a:t>
+            </a:r>
+          </a:p>
+          <a:p>
+            <a:pPr marL="171450" indent="-171450">
+              <a:buFont typeface="Courier New" panose="02070309020205020404" pitchFamily="49" charset="0"/>
+              <a:buChar char="o"/>
+            </a:pPr>
+            <a:r>
+              <a:rPr lang="en-US" sz="800" noProof="1"/>
+              <a:t>History snapshot is compared with previous commit</a:t>
+            </a:r>
+          </a:p>
+          <a:p>
+            <a:pPr marL="171450" indent="-171450">
+              <a:buFont typeface="Courier New" panose="02070309020205020404" pitchFamily="49" charset="0"/>
+              <a:buChar char="o"/>
+            </a:pPr>
+            <a:r>
+              <a:rPr lang="en-US" sz="800" noProof="1"/>
+              <a:t>History snapshot can compare with “pinned” commit (=fixed commit)</a:t>
+            </a:r>
+          </a:p>
+          <a:p>
+            <a:pPr marL="324000" lvl="1" indent="-171450">
+              <a:buFont typeface="Arial" panose="020B0604020202020204" pitchFamily="34" charset="0"/>
+              <a:buChar char="•"/>
+            </a:pPr>
+            <a:endParaRPr lang="en-US" sz="800" noProof="1"/>
+          </a:p>
+          <a:p>
+            <a:pPr marL="171450" indent="-171450">
+              <a:buFont typeface="Courier New" panose="02070309020205020404" pitchFamily="49" charset="0"/>
+              <a:buChar char="o"/>
+            </a:pPr>
+            <a:r>
+              <a:rPr lang="en-US" sz="800" noProof="1">
+                <a:solidFill>
+                  <a:schemeClr val="accent1"/>
+                </a:solidFill>
+              </a:rPr>
+              <a:t>gitHistory() </a:t>
+            </a:r>
+            <a:endParaRPr lang="en-US" sz="800" noProof="1"/>
+          </a:p>
+          <a:p>
+            <a:pPr marL="324000" lvl="1" indent="-171450">
+              <a:buFont typeface="Arial" panose="020B0604020202020204" pitchFamily="34" charset="0"/>
+              <a:buChar char="•"/>
+            </a:pPr>
+            <a:r>
+              <a:rPr lang="en-US" sz="800" noProof="1"/>
+              <a:t>returns history, both with and without search</a:t>
+            </a:r>
+          </a:p>
+          <a:p>
+            <a:endParaRPr lang="en-US" sz="800" noProof="1">
+              <a:solidFill>
+                <a:schemeClr val="accent1"/>
+              </a:solidFill>
+            </a:endParaRPr>
+          </a:p>
+          <a:p>
+            <a:pPr marL="171450" indent="-171450">
+              <a:buFont typeface="Courier New" panose="02070309020205020404" pitchFamily="49" charset="0"/>
+              <a:buChar char="o"/>
+            </a:pPr>
+            <a:r>
+              <a:rPr lang="en-US" sz="800" noProof="1">
+                <a:solidFill>
+                  <a:schemeClr val="accent1"/>
+                </a:solidFill>
+              </a:rPr>
+              <a:t>localState keeps track of where you are in history</a:t>
+            </a:r>
+            <a:r>
+              <a:rPr lang="en-US" sz="800" noProof="1"/>
+              <a:t>:</a:t>
+            </a:r>
+          </a:p>
+          <a:p>
+            <a:pPr marL="324000" lvl="1" indent="-171450">
+              <a:buFont typeface="Arial" panose="020B0604020202020204" pitchFamily="34" charset="0"/>
+              <a:buChar char="•"/>
+            </a:pPr>
+            <a:r>
+              <a:rPr lang="en-US" sz="800" noProof="1"/>
+              <a:t>.historyNumber (-1 if not browsing history, index to )</a:t>
+            </a:r>
+          </a:p>
+          <a:p>
+            <a:pPr marL="324000" lvl="1" indent="-171450">
+              <a:buFont typeface="Arial" panose="020B0604020202020204" pitchFamily="34" charset="0"/>
+              <a:buChar char="•"/>
+            </a:pPr>
+            <a:r>
+              <a:rPr lang="en-US" sz="800" noProof="1"/>
+              <a:t>.historyHash (hash of commit)</a:t>
+            </a:r>
+          </a:p>
+          <a:p>
+            <a:pPr marL="324000" lvl="1" indent="-171450">
+              <a:buFont typeface="Arial" panose="020B0604020202020204" pitchFamily="34" charset="0"/>
+              <a:buChar char="•"/>
+            </a:pPr>
+            <a:r>
+              <a:rPr lang="en-US" sz="800" noProof="1"/>
+              <a:t>.historyString (descriptive text for messsage window)</a:t>
+            </a:r>
+            <a:br>
+              <a:rPr lang="en-US" sz="800" noProof="1"/>
+            </a:br>
+            <a:endParaRPr lang="en-US" sz="800" noProof="1"/>
+          </a:p>
+          <a:p>
+            <a:pPr marL="324000" lvl="1" indent="-171450">
+              <a:buFont typeface="Arial" panose="020B0604020202020204" pitchFamily="34" charset="0"/>
+              <a:buChar char="•"/>
+            </a:pPr>
+            <a:r>
+              <a:rPr lang="en-US" sz="800" noProof="1"/>
+              <a:t>.pinnedCommit=”” (means ordinary history)</a:t>
+            </a:r>
+          </a:p>
+          <a:p>
+            <a:pPr marL="324000" lvl="1" indent="-171450">
+              <a:buFont typeface="Arial" panose="020B0604020202020204" pitchFamily="34" charset="0"/>
+              <a:buChar char="•"/>
+            </a:pPr>
+            <a:r>
+              <a:rPr lang="en-US" sz="800" noProof="1"/>
+              <a:t>.pinnedCommit=hash (means pinned history)</a:t>
+            </a:r>
+            <a:br>
+              <a:rPr lang="en-US" sz="800" noProof="1"/>
+            </a:br>
+            <a:endParaRPr lang="en-US" sz="800" noProof="1"/>
+          </a:p>
+          <a:p>
+            <a:pPr marL="171450" indent="-171450">
+              <a:buFont typeface="Courier New" panose="02070309020205020404" pitchFamily="49" charset="0"/>
+              <a:buChar char="o"/>
+            </a:pPr>
+            <a:r>
+              <a:rPr lang="en-US" sz="800" noProof="1">
+                <a:solidFill>
+                  <a:schemeClr val="accent1"/>
+                </a:solidFill>
+              </a:rPr>
+              <a:t>gitShowHistorical(commit) </a:t>
+            </a:r>
+            <a:endParaRPr lang="en-US" sz="800" noProof="1"/>
+          </a:p>
+          <a:p>
+            <a:pPr marL="324000" lvl="1" indent="-171450">
+              <a:buFont typeface="Arial" panose="020B0604020202020204" pitchFamily="34" charset="0"/>
+              <a:buChar char="•"/>
+            </a:pPr>
+            <a:r>
+              <a:rPr lang="en-US" sz="800" noProof="1"/>
+              <a:t>returns status_data with changed file info</a:t>
+            </a:r>
+          </a:p>
+          <a:p>
+            <a:pPr marL="324000" lvl="1" indent="-171450">
+              <a:buFont typeface="Arial" panose="020B0604020202020204" pitchFamily="34" charset="0"/>
+              <a:buChar char="•"/>
+            </a:pPr>
+            <a:r>
+              <a:rPr lang="en-US" sz="800" noProof="1"/>
+              <a:t>if pinned, the status_data is relative pinned</a:t>
+            </a:r>
+          </a:p>
+          <a:p>
+            <a:pPr marL="324000" lvl="1" indent="-171450">
+              <a:buFont typeface="Arial" panose="020B0604020202020204" pitchFamily="34" charset="0"/>
+              <a:buChar char="•"/>
+            </a:pPr>
+            <a:r>
+              <a:rPr lang="en-US" sz="800" noProof="1"/>
+              <a:t>The status_data will always be comparison between newest and oldest of the two commits (showing change going forward in time)</a:t>
+            </a:r>
+          </a:p>
+          <a:p>
+            <a:pPr marL="324000" lvl="1" indent="-171450">
+              <a:buFont typeface="Arial" panose="020B0604020202020204" pitchFamily="34" charset="0"/>
+              <a:buChar char="•"/>
+            </a:pPr>
+            <a:r>
+              <a:rPr lang="en-US" sz="800" noProof="1"/>
+              <a:t>if not-pinned, status_data is relative previous commit</a:t>
+            </a:r>
+          </a:p>
+          <a:p>
+            <a:pPr marL="324000" lvl="1" indent="-171450">
+              <a:buFont typeface="Arial" panose="020B0604020202020204" pitchFamily="34" charset="0"/>
+              <a:buChar char="•"/>
+            </a:pPr>
+            <a:r>
+              <a:rPr lang="en-US" sz="800" noProof="1"/>
+              <a:t>localState.history_status_data</a:t>
+            </a:r>
+          </a:p>
+          <a:p>
+            <a:pPr marL="324000" lvl="1" indent="-171450">
+              <a:buFont typeface="Arial" panose="020B0604020202020204" pitchFamily="34" charset="0"/>
+              <a:buChar char="•"/>
+            </a:pPr>
+            <a:endParaRPr lang="en-US" sz="800" noProof="1"/>
+          </a:p>
+        </p:txBody>
+      </p:sp>
+      <p:sp>
+        <p:nvSpPr>
+          <p:cNvPr id="14" name="Rektangel 13">
+            <a:extLst>
+              <a:ext uri="{FF2B5EF4-FFF2-40B4-BE49-F238E27FC236}">
+                <a16:creationId xmlns:a16="http://schemas.microsoft.com/office/drawing/2014/main" id="{C15FF9A1-43E2-7348-9382-D2ADB3B355C8}"/>
+              </a:ext>
+            </a:extLst>
+          </p:cNvPr>
+          <p:cNvSpPr/>
+          <p:nvPr/>
+        </p:nvSpPr>
+        <p:spPr>
+          <a:xfrm>
+            <a:off x="4489123" y="3848849"/>
+            <a:ext cx="3372291" cy="2431435"/>
+          </a:xfrm>
+          <a:prstGeom prst="rect">
+            <a:avLst/>
+          </a:prstGeom>
+          <a:solidFill>
+            <a:schemeClr val="bg1"/>
+          </a:solidFill>
+          <a:ln>
+            <a:solidFill>
+              <a:schemeClr val="accent1"/>
+            </a:solidFill>
+          </a:ln>
+        </p:spPr>
+        <p:txBody>
+          <a:bodyPr wrap="square">
+            <a:spAutoFit/>
+          </a:bodyPr>
+          <a:lstStyle/>
+          <a:p>
+            <a:r>
+              <a:rPr lang="en-US" sz="800" b="1" noProof="1"/>
+              <a:t>Settings are loaded at Pragma-git start, and updated from Settings window</a:t>
+            </a:r>
+          </a:p>
+          <a:p>
+            <a:endParaRPr lang="en-US" sz="800" noProof="1">
+              <a:solidFill>
+                <a:schemeClr val="accent1"/>
+              </a:solidFill>
+            </a:endParaRPr>
+          </a:p>
+          <a:p>
+            <a:r>
+              <a:rPr lang="en-US" sz="800" noProof="1">
+                <a:solidFill>
+                  <a:schemeClr val="accent1"/>
+                </a:solidFill>
+              </a:rPr>
+              <a:t>Handling of settings in app.js</a:t>
+            </a:r>
+            <a:endParaRPr lang="en-US" sz="800" noProof="1"/>
+          </a:p>
+          <a:p>
+            <a:pPr marL="171450" indent="-171450">
+              <a:buFont typeface="Courier New" panose="02070309020205020404" pitchFamily="49" charset="0"/>
+              <a:buChar char="o"/>
+            </a:pPr>
+            <a:r>
+              <a:rPr lang="en-US" sz="800" noProof="1"/>
+              <a:t>loadSettings is called on Pragma-git start</a:t>
+            </a:r>
+          </a:p>
+          <a:p>
+            <a:pPr marL="324000" lvl="1" indent="-171450">
+              <a:buFont typeface="Arial" panose="020B0604020202020204" pitchFamily="34" charset="0"/>
+              <a:buChar char="•"/>
+            </a:pPr>
+            <a:r>
+              <a:rPr lang="en-US" sz="800" noProof="1"/>
+              <a:t>reads settings from settings.json</a:t>
+            </a:r>
+          </a:p>
+          <a:p>
+            <a:pPr marL="324000" lvl="1" indent="-171450">
+              <a:buFont typeface="Arial" panose="020B0604020202020204" pitchFamily="34" charset="0"/>
+              <a:buChar char="•"/>
+            </a:pPr>
+            <a:r>
+              <a:rPr lang="en-US" sz="800" noProof="1"/>
+              <a:t>stores settings in global.state in predefined order</a:t>
+            </a:r>
+          </a:p>
+          <a:p>
+            <a:pPr marL="171450" indent="-171450">
+              <a:buFont typeface="Courier New" panose="02070309020205020404" pitchFamily="49" charset="0"/>
+              <a:buChar char="o"/>
+            </a:pPr>
+            <a:r>
+              <a:rPr lang="en-US" sz="800" noProof="1"/>
+              <a:t>updateWithNewSettings is called :</a:t>
+            </a:r>
+          </a:p>
+          <a:p>
+            <a:pPr marL="324000" lvl="1" indent="-171450">
+              <a:buFont typeface="Arial" panose="020B0604020202020204" pitchFamily="34" charset="0"/>
+              <a:buChar char="•"/>
+            </a:pPr>
+            <a:r>
+              <a:rPr lang="en-US" sz="800" noProof="1"/>
+              <a:t>from loadSettings</a:t>
+            </a:r>
+          </a:p>
+          <a:p>
+            <a:pPr marL="324000" lvl="1" indent="-171450">
+              <a:buFont typeface="Arial" panose="020B0604020202020204" pitchFamily="34" charset="0"/>
+              <a:buChar char="•"/>
+            </a:pPr>
+            <a:r>
+              <a:rPr lang="en-US" sz="800" noProof="1"/>
+              <a:t>when leaving Settings window</a:t>
+            </a:r>
+          </a:p>
+          <a:p>
+            <a:pPr marL="171450" indent="-171450">
+              <a:buFont typeface="Courier New" panose="02070309020205020404" pitchFamily="49" charset="0"/>
+              <a:buChar char="o"/>
+            </a:pPr>
+            <a:r>
+              <a:rPr lang="en-US" sz="800" noProof="1"/>
+              <a:t>settings are saved when closing Pragma-git</a:t>
+            </a:r>
+          </a:p>
+          <a:p>
+            <a:pPr marL="171450" indent="-171450">
+              <a:buFont typeface="Courier New" panose="02070309020205020404" pitchFamily="49" charset="0"/>
+              <a:buChar char="o"/>
+            </a:pPr>
+            <a:r>
+              <a:rPr lang="en-US" sz="800" noProof="1"/>
+              <a:t>debug flags :  </a:t>
+            </a:r>
+          </a:p>
+          <a:p>
+            <a:pPr marL="324000" lvl="1" indent="-171450">
+              <a:buFont typeface="Arial" panose="020B0604020202020204" pitchFamily="34" charset="0"/>
+              <a:buChar char="•"/>
+            </a:pPr>
+            <a:r>
+              <a:rPr lang="en-US" sz="800" noProof="1"/>
+              <a:t>state.debug (main, enable git debug flags)</a:t>
+            </a:r>
+          </a:p>
+          <a:p>
+            <a:pPr marL="324000" lvl="1" indent="-171450">
+              <a:buFont typeface="Arial" panose="020B0604020202020204" pitchFamily="34" charset="0"/>
+              <a:buChar char="•"/>
+            </a:pPr>
+            <a:r>
+              <a:rPr lang="en-US" sz="800" noProof="1"/>
+              <a:t>state.graph.debug</a:t>
+            </a:r>
+            <a:br>
+              <a:rPr lang="en-US" sz="800" noProof="1"/>
+            </a:br>
+            <a:r>
+              <a:rPr lang="en-US" sz="800" noProof="1"/>
+              <a:t>are both read-only. Change directly in settings.json</a:t>
+            </a:r>
+          </a:p>
+          <a:p>
+            <a:endParaRPr lang="en-US" sz="800" noProof="1">
+              <a:solidFill>
+                <a:schemeClr val="accent1"/>
+              </a:solidFill>
+            </a:endParaRPr>
+          </a:p>
+          <a:p>
+            <a:r>
+              <a:rPr lang="en-US" sz="800" noProof="1">
+                <a:solidFill>
+                  <a:schemeClr val="accent1"/>
+                </a:solidFill>
+              </a:rPr>
+              <a:t>Settings window  settings.html :</a:t>
+            </a:r>
+            <a:endParaRPr lang="en-US" sz="800" noProof="1"/>
+          </a:p>
+          <a:p>
+            <a:pPr marL="171450" indent="-171450">
+              <a:buFont typeface="Courier New" panose="02070309020205020404" pitchFamily="49" charset="0"/>
+              <a:buChar char="o"/>
+            </a:pPr>
+            <a:r>
+              <a:rPr lang="en-US" sz="800" noProof="1"/>
+              <a:t>is populated from global.state </a:t>
+            </a:r>
+            <a:br>
+              <a:rPr lang="en-US" sz="800" noProof="1"/>
+            </a:br>
+            <a:r>
+              <a:rPr lang="en-US" sz="800" noProof="1"/>
+              <a:t>when   settings.js/injectIntoSettingsJs is called from settings.html</a:t>
+            </a:r>
+          </a:p>
+          <a:p>
+            <a:pPr marL="171450" indent="-171450">
+              <a:buFont typeface="Courier New" panose="02070309020205020404" pitchFamily="49" charset="0"/>
+              <a:buChar char="o"/>
+            </a:pPr>
+            <a:r>
+              <a:rPr lang="en-US" sz="800" noProof="1"/>
+              <a:t>closeWindow stores data in global.state before closing</a:t>
+            </a:r>
+          </a:p>
+        </p:txBody>
+      </p:sp>
+      <p:sp>
+        <p:nvSpPr>
+          <p:cNvPr id="15" name="textruta 14">
+            <a:extLst>
+              <a:ext uri="{FF2B5EF4-FFF2-40B4-BE49-F238E27FC236}">
+                <a16:creationId xmlns:a16="http://schemas.microsoft.com/office/drawing/2014/main" id="{9D47FF24-DA49-8046-9CB0-28C71CB63318}"/>
+              </a:ext>
+            </a:extLst>
+          </p:cNvPr>
+          <p:cNvSpPr txBox="1"/>
+          <p:nvPr/>
+        </p:nvSpPr>
+        <p:spPr>
+          <a:xfrm>
+            <a:off x="4447440" y="3416887"/>
+            <a:ext cx="1204882" cy="461665"/>
+          </a:xfrm>
+          <a:prstGeom prst="rect">
+            <a:avLst/>
+          </a:prstGeom>
+          <a:noFill/>
+        </p:spPr>
+        <p:txBody>
+          <a:bodyPr wrap="none" rtlCol="0">
+            <a:spAutoFit/>
+          </a:bodyPr>
+          <a:lstStyle/>
+          <a:p>
+            <a:r>
+              <a:rPr lang="en-US" sz="2400" b="1" noProof="1"/>
+              <a:t>Settings</a:t>
+            </a:r>
+          </a:p>
+        </p:txBody>
+      </p:sp>
+      <p:sp>
+        <p:nvSpPr>
+          <p:cNvPr id="16" name="textruta 15">
+            <a:extLst>
+              <a:ext uri="{FF2B5EF4-FFF2-40B4-BE49-F238E27FC236}">
+                <a16:creationId xmlns:a16="http://schemas.microsoft.com/office/drawing/2014/main" id="{9192722C-8F33-C74E-A8DA-E92B802175F0}"/>
+              </a:ext>
+            </a:extLst>
+          </p:cNvPr>
+          <p:cNvSpPr txBox="1"/>
+          <p:nvPr/>
+        </p:nvSpPr>
+        <p:spPr>
+          <a:xfrm>
+            <a:off x="489993" y="4804493"/>
+            <a:ext cx="1592103" cy="461665"/>
+          </a:xfrm>
+          <a:prstGeom prst="rect">
+            <a:avLst/>
+          </a:prstGeom>
+          <a:noFill/>
+        </p:spPr>
+        <p:txBody>
+          <a:bodyPr wrap="none" rtlCol="0">
+            <a:spAutoFit/>
+          </a:bodyPr>
+          <a:lstStyle/>
+          <a:p>
+            <a:r>
+              <a:rPr lang="en-US" sz="2400" b="1" noProof="1"/>
+              <a:t>Dark mode</a:t>
+            </a:r>
+          </a:p>
+        </p:txBody>
+      </p:sp>
+      <p:sp>
+        <p:nvSpPr>
+          <p:cNvPr id="17" name="Rektangel 16">
+            <a:extLst>
+              <a:ext uri="{FF2B5EF4-FFF2-40B4-BE49-F238E27FC236}">
+                <a16:creationId xmlns:a16="http://schemas.microsoft.com/office/drawing/2014/main" id="{0C6FE680-6AF2-4545-AE31-D52F0731E861}"/>
+              </a:ext>
+            </a:extLst>
+          </p:cNvPr>
+          <p:cNvSpPr/>
+          <p:nvPr/>
+        </p:nvSpPr>
+        <p:spPr>
+          <a:xfrm>
+            <a:off x="489993" y="5244410"/>
+            <a:ext cx="3685232" cy="2554545"/>
+          </a:xfrm>
+          <a:prstGeom prst="rect">
+            <a:avLst/>
+          </a:prstGeom>
+          <a:solidFill>
+            <a:schemeClr val="bg1"/>
+          </a:solidFill>
+          <a:ln>
+            <a:solidFill>
+              <a:schemeClr val="accent1"/>
+            </a:solidFill>
+          </a:ln>
+        </p:spPr>
+        <p:txBody>
+          <a:bodyPr wrap="square">
+            <a:spAutoFit/>
+          </a:bodyPr>
+          <a:lstStyle/>
+          <a:p>
+            <a:r>
+              <a:rPr lang="en-US" sz="800" b="1" noProof="1"/>
+              <a:t>Dark / light mode is defined from color_styles.css using css variables</a:t>
+            </a:r>
+          </a:p>
+          <a:p>
+            <a:endParaRPr lang="en-US" sz="800" noProof="1">
+              <a:solidFill>
+                <a:schemeClr val="accent1"/>
+              </a:solidFill>
+            </a:endParaRPr>
+          </a:p>
+          <a:p>
+            <a:r>
+              <a:rPr lang="en-US" sz="800" noProof="1">
+                <a:solidFill>
+                  <a:schemeClr val="accent1"/>
+                </a:solidFill>
+              </a:rPr>
+              <a:t>The mechanism</a:t>
+            </a:r>
+            <a:endParaRPr lang="en-US" sz="800" noProof="1"/>
+          </a:p>
+          <a:p>
+            <a:pPr marL="171450" indent="-171450">
+              <a:buFont typeface="Courier New" panose="02070309020205020404" pitchFamily="49" charset="0"/>
+              <a:buChar char="o"/>
+            </a:pPr>
+            <a:r>
+              <a:rPr lang="en-US" sz="800" noProof="1"/>
+              <a:t>&lt;body&gt; of each document is predefined with class=“light”</a:t>
+            </a:r>
+          </a:p>
+          <a:p>
+            <a:pPr marL="171450" indent="-171450">
+              <a:buFont typeface="Courier New" panose="02070309020205020404" pitchFamily="49" charset="0"/>
+              <a:buChar char="o"/>
+            </a:pPr>
+            <a:r>
+              <a:rPr lang="en-US" sz="800" noProof="1"/>
+              <a:t>script after &lt;body&gt;  adds a class=”dark” if dark mode</a:t>
+            </a:r>
+          </a:p>
+          <a:p>
+            <a:pPr marL="171450" indent="-171450">
+              <a:buFont typeface="Courier New" panose="02070309020205020404" pitchFamily="49" charset="0"/>
+              <a:buChar char="o"/>
+            </a:pPr>
+            <a:r>
+              <a:rPr lang="en-US" sz="800" noProof="1"/>
+              <a:t>darkmode is defined by localState.dark (true if darkmode, false if light)</a:t>
+            </a:r>
+          </a:p>
+          <a:p>
+            <a:pPr marL="171450" indent="-171450">
+              <a:buFont typeface="Courier New" panose="02070309020205020404" pitchFamily="49" charset="0"/>
+              <a:buChar char="o"/>
+            </a:pPr>
+            <a:r>
+              <a:rPr lang="en-US" sz="800" noProof="1"/>
+              <a:t> localState.dark is set from value of state.darkmode setting</a:t>
+            </a:r>
+          </a:p>
+          <a:p>
+            <a:pPr marL="171450" indent="-171450">
+              <a:buFont typeface="Courier New" panose="02070309020205020404" pitchFamily="49" charset="0"/>
+              <a:buChar char="o"/>
+            </a:pPr>
+            <a:endParaRPr lang="en-US" sz="800" noProof="1"/>
+          </a:p>
+          <a:p>
+            <a:r>
+              <a:rPr lang="en-US" sz="800" noProof="1">
+                <a:solidFill>
+                  <a:schemeClr val="accent1"/>
+                </a:solidFill>
+              </a:rPr>
+              <a:t>Main app :</a:t>
+            </a:r>
+            <a:endParaRPr lang="en-US" sz="800" noProof="1"/>
+          </a:p>
+          <a:p>
+            <a:pPr marL="171450" indent="-171450">
+              <a:buFont typeface="Courier New" panose="02070309020205020404" pitchFamily="49" charset="0"/>
+              <a:buChar char="o"/>
+            </a:pPr>
+            <a:r>
+              <a:rPr lang="en-US" sz="800" noProof="1"/>
+              <a:t>Main. window is mostly constant (except for text-fields and input texts)</a:t>
+            </a:r>
+            <a:br>
+              <a:rPr lang="en-US" sz="800" noProof="1"/>
+            </a:br>
+            <a:endParaRPr lang="en-US" sz="800" noProof="1"/>
+          </a:p>
+          <a:p>
+            <a:r>
+              <a:rPr lang="en-US" sz="800" noProof="1">
+                <a:solidFill>
+                  <a:schemeClr val="accent1"/>
+                </a:solidFill>
+              </a:rPr>
+              <a:t>Other windows behaves differently :</a:t>
+            </a:r>
+            <a:endParaRPr lang="en-US" sz="800" noProof="1"/>
+          </a:p>
+          <a:p>
+            <a:pPr marL="171450" indent="-171450">
+              <a:buFont typeface="Courier New" panose="02070309020205020404" pitchFamily="49" charset="0"/>
+              <a:buChar char="o"/>
+            </a:pPr>
+            <a:r>
+              <a:rPr lang="en-US" sz="800" noProof="1"/>
+              <a:t>Have styles reading css variables from color_styles.css</a:t>
+            </a:r>
+          </a:p>
+          <a:p>
+            <a:pPr marL="171450" indent="-171450">
+              <a:buFont typeface="Courier New" panose="02070309020205020404" pitchFamily="49" charset="0"/>
+              <a:buChar char="o"/>
+            </a:pPr>
+            <a:r>
+              <a:rPr lang="en-US" sz="800" noProof="1"/>
+              <a:t>A general img invert filter is applied which transforms black icons to white </a:t>
+            </a:r>
+            <a:br>
+              <a:rPr lang="en-US" sz="800" noProof="1"/>
+            </a:br>
+            <a:r>
+              <a:rPr lang="en-US" sz="800" noProof="1"/>
+              <a:t>(exceptions for color icons are defined in each document’s style section)</a:t>
+            </a:r>
+          </a:p>
+          <a:p>
+            <a:pPr marL="171450" indent="-171450">
+              <a:buFont typeface="Courier New" panose="02070309020205020404" pitchFamily="49" charset="0"/>
+              <a:buChar char="o"/>
+            </a:pPr>
+            <a:endParaRPr lang="en-US" sz="800" noProof="1"/>
+          </a:p>
+          <a:p>
+            <a:r>
+              <a:rPr lang="en-US" sz="800" noProof="1">
+                <a:solidFill>
+                  <a:schemeClr val="accent1"/>
+                </a:solidFill>
+              </a:rPr>
+              <a:t>Merge and Notes windows :</a:t>
+            </a:r>
+            <a:endParaRPr lang="en-US" sz="800" noProof="1"/>
+          </a:p>
+          <a:p>
+            <a:pPr marL="171450" indent="-171450">
+              <a:buFont typeface="Courier New" panose="02070309020205020404" pitchFamily="49" charset="0"/>
+              <a:buChar char="o"/>
+            </a:pPr>
+            <a:r>
+              <a:rPr lang="en-US" sz="800" noProof="1"/>
+              <a:t>Merge: hacked the CodeMirror css in pragma-merge.html</a:t>
+            </a:r>
+          </a:p>
+          <a:p>
+            <a:pPr marL="171450" indent="-171450">
+              <a:buFont typeface="Courier New" panose="02070309020205020404" pitchFamily="49" charset="0"/>
+              <a:buChar char="o"/>
+            </a:pPr>
+            <a:r>
+              <a:rPr lang="en-US" sz="800" noProof="1"/>
+              <a:t>Notes: hacked ToastUI editor css in notes.html</a:t>
+            </a:r>
+          </a:p>
+          <a:p>
+            <a:pPr marL="171450" indent="-171450">
+              <a:buFont typeface="Courier New" panose="02070309020205020404" pitchFamily="49" charset="0"/>
+              <a:buChar char="o"/>
+            </a:pPr>
+            <a:r>
+              <a:rPr lang="en-US" sz="800" noProof="1"/>
+              <a:t>Both have special css for icons and text-based buttons</a:t>
+            </a:r>
+          </a:p>
+        </p:txBody>
+      </p:sp>
+      <p:sp>
+        <p:nvSpPr>
+          <p:cNvPr id="18" name="Rektangel 17">
+            <a:extLst>
+              <a:ext uri="{FF2B5EF4-FFF2-40B4-BE49-F238E27FC236}">
+                <a16:creationId xmlns:a16="http://schemas.microsoft.com/office/drawing/2014/main" id="{1DB0E46F-C9CA-A948-A22C-D89EEA13217F}"/>
+              </a:ext>
+            </a:extLst>
+          </p:cNvPr>
+          <p:cNvSpPr/>
+          <p:nvPr/>
+        </p:nvSpPr>
+        <p:spPr>
+          <a:xfrm>
+            <a:off x="4496434" y="6939072"/>
+            <a:ext cx="3364980" cy="2062103"/>
+          </a:xfrm>
+          <a:prstGeom prst="rect">
+            <a:avLst/>
+          </a:prstGeom>
+          <a:solidFill>
+            <a:schemeClr val="bg1"/>
+          </a:solidFill>
+          <a:ln>
+            <a:solidFill>
+              <a:schemeClr val="accent1"/>
+            </a:solidFill>
+          </a:ln>
+        </p:spPr>
+        <p:txBody>
+          <a:bodyPr wrap="square">
+            <a:spAutoFit/>
+          </a:bodyPr>
+          <a:lstStyle/>
+          <a:p>
+            <a:pPr marL="171450" indent="-171450">
+              <a:buFont typeface="Courier New" panose="02070309020205020404" pitchFamily="49" charset="0"/>
+              <a:buChar char="o"/>
+            </a:pPr>
+            <a:r>
+              <a:rPr lang="en-US" sz="800" noProof="1">
+                <a:solidFill>
+                  <a:schemeClr val="accent1"/>
+                </a:solidFill>
+              </a:rPr>
+              <a:t>Notes, Graph window, Pragma-merge </a:t>
+            </a:r>
+          </a:p>
+          <a:p>
+            <a:pPr marL="324000" lvl="1" indent="-171450">
+              <a:buFont typeface="Arial" panose="020B0604020202020204" pitchFamily="34" charset="0"/>
+              <a:buChar char="•"/>
+            </a:pPr>
+            <a:r>
+              <a:rPr lang="en-US" sz="800" noProof="1"/>
+              <a:t>Based on npm find-in-nw</a:t>
+            </a:r>
+          </a:p>
+          <a:p>
+            <a:pPr marL="324000" lvl="1" indent="-171450">
+              <a:buFont typeface="Arial" panose="020B0604020202020204" pitchFamily="34" charset="0"/>
+              <a:buChar char="•"/>
+            </a:pPr>
+            <a:r>
+              <a:rPr lang="en-US" sz="800" noProof="1"/>
+              <a:t>Extend npm find-in-nw on the fly, with “extend_find-in-nw.js”</a:t>
+            </a:r>
+            <a:br>
+              <a:rPr lang="en-US" sz="800" noProof="1"/>
+            </a:br>
+            <a:r>
+              <a:rPr lang="en-US" sz="800" noProof="1"/>
+              <a:t>- make search case insensitive, add navigation CTRL-G, ↑,↓</a:t>
+            </a:r>
+            <a:br>
+              <a:rPr lang="en-US" sz="800" noProof="1"/>
+            </a:br>
+            <a:r>
+              <a:rPr lang="en-US" sz="800" noProof="1"/>
+              <a:t>- in Graph : searches document.body</a:t>
+            </a:r>
+            <a:br>
+              <a:rPr lang="en-US" sz="800" noProof="1"/>
+            </a:br>
+            <a:r>
+              <a:rPr lang="en-US" sz="800" noProof="1"/>
+              <a:t>- in Notes : search depends on wysiwyg / markdown modes</a:t>
+            </a:r>
+            <a:br>
+              <a:rPr lang="en-US" sz="800" noProof="1"/>
+            </a:br>
+            <a:r>
+              <a:rPr lang="en-US" sz="800" noProof="1"/>
+              <a:t>- in Pragma-merge : editor id in pragmaMergeSearchInEditorId</a:t>
+            </a:r>
+          </a:p>
+          <a:p>
+            <a:pPr marL="324000" lvl="1" indent="-171450">
+              <a:buFont typeface="Arial" panose="020B0604020202020204" pitchFamily="34" charset="0"/>
+              <a:buChar char="•"/>
+            </a:pPr>
+            <a:r>
+              <a:rPr lang="en-US" sz="800" noProof="1"/>
+              <a:t>Code added at end of Notes.html, graph.html, pragma-merge.html</a:t>
+            </a:r>
+          </a:p>
+          <a:p>
+            <a:pPr marL="324000" lvl="1" indent="-171450">
+              <a:buFont typeface="Arial" panose="020B0604020202020204" pitchFamily="34" charset="0"/>
+              <a:buChar char="•"/>
+            </a:pPr>
+            <a:endParaRPr lang="en-US" sz="800" noProof="1"/>
+          </a:p>
+          <a:p>
+            <a:pPr marL="171450" indent="-171450">
+              <a:buFont typeface="Courier New" panose="02070309020205020404" pitchFamily="49" charset="0"/>
+              <a:buChar char="o"/>
+            </a:pPr>
+            <a:r>
+              <a:rPr lang="en-US" sz="800" noProof="1">
+                <a:solidFill>
+                  <a:schemeClr val="accent1"/>
+                </a:solidFill>
+              </a:rPr>
+              <a:t>Notes window extra</a:t>
+            </a:r>
+          </a:p>
+          <a:p>
+            <a:pPr marL="324000" lvl="1" indent="-171450">
+              <a:buFont typeface="Arial" panose="020B0604020202020204" pitchFamily="34" charset="0"/>
+              <a:buChar char="•"/>
+            </a:pPr>
+            <a:r>
+              <a:rPr lang="en-US" sz="800" noProof="1"/>
+              <a:t>“Notes.html” : Listen to mouseover on markdown/wysiwyg switches</a:t>
+            </a:r>
+            <a:br>
+              <a:rPr lang="en-US" sz="800" noProof="1"/>
+            </a:br>
+            <a:r>
+              <a:rPr lang="en-US" sz="800" noProof="1"/>
+              <a:t>and clear marked finds (“tokens”), before switching.</a:t>
+            </a:r>
+            <a:br>
+              <a:rPr lang="en-US" sz="800" noProof="1"/>
+            </a:br>
+            <a:r>
+              <a:rPr lang="en-US" sz="800" noProof="1"/>
+              <a:t>Then close search box.</a:t>
+            </a:r>
+          </a:p>
+          <a:p>
+            <a:pPr marL="324000" lvl="1" indent="-171450">
+              <a:buFont typeface="Arial" panose="020B0604020202020204" pitchFamily="34" charset="0"/>
+              <a:buChar char="•"/>
+            </a:pPr>
+            <a:r>
+              <a:rPr lang="en-US" sz="800" noProof="1"/>
+              <a:t>“Notes.js” : Stop save from happening if find is active</a:t>
+            </a:r>
+          </a:p>
+          <a:p>
+            <a:pPr marL="324000" lvl="1" indent="-171450">
+              <a:buFont typeface="Arial" panose="020B0604020202020204" pitchFamily="34" charset="0"/>
+              <a:buChar char="•"/>
+            </a:pPr>
+            <a:endParaRPr lang="en-US" sz="800" noProof="1"/>
+          </a:p>
+          <a:p>
+            <a:pPr marL="324000" lvl="1" indent="-171450">
+              <a:buFont typeface="Arial" panose="020B0604020202020204" pitchFamily="34" charset="0"/>
+              <a:buChar char="•"/>
+            </a:pPr>
+            <a:endParaRPr lang="en-US" sz="800" noProof="1"/>
+          </a:p>
+        </p:txBody>
+      </p:sp>
+      <p:sp>
+        <p:nvSpPr>
+          <p:cNvPr id="19" name="textruta 18">
+            <a:extLst>
+              <a:ext uri="{FF2B5EF4-FFF2-40B4-BE49-F238E27FC236}">
+                <a16:creationId xmlns:a16="http://schemas.microsoft.com/office/drawing/2014/main" id="{A7C2C043-D2F7-C944-B558-2BA54F5E7D29}"/>
+              </a:ext>
+            </a:extLst>
+          </p:cNvPr>
+          <p:cNvSpPr txBox="1"/>
+          <p:nvPr/>
+        </p:nvSpPr>
+        <p:spPr>
+          <a:xfrm>
+            <a:off x="4447440" y="6494382"/>
+            <a:ext cx="1704634" cy="461665"/>
+          </a:xfrm>
+          <a:prstGeom prst="rect">
+            <a:avLst/>
+          </a:prstGeom>
+          <a:noFill/>
+        </p:spPr>
+        <p:txBody>
+          <a:bodyPr wrap="none" rtlCol="0">
+            <a:spAutoFit/>
+          </a:bodyPr>
+          <a:lstStyle/>
+          <a:p>
+            <a:r>
+              <a:rPr lang="en-US" sz="2400" b="1" noProof="1"/>
+              <a:t>Find in html</a:t>
+            </a:r>
+          </a:p>
+        </p:txBody>
+      </p:sp>
+      <p:sp>
+        <p:nvSpPr>
+          <p:cNvPr id="20" name="Rektangel 19">
+            <a:extLst>
+              <a:ext uri="{FF2B5EF4-FFF2-40B4-BE49-F238E27FC236}">
+                <a16:creationId xmlns:a16="http://schemas.microsoft.com/office/drawing/2014/main" id="{116B39BA-29B4-7748-8FA3-5994271F75AA}"/>
+              </a:ext>
+            </a:extLst>
+          </p:cNvPr>
+          <p:cNvSpPr/>
+          <p:nvPr/>
+        </p:nvSpPr>
+        <p:spPr>
+          <a:xfrm>
+            <a:off x="465896" y="8400871"/>
+            <a:ext cx="3685232" cy="1200329"/>
+          </a:xfrm>
+          <a:prstGeom prst="rect">
+            <a:avLst/>
+          </a:prstGeom>
+          <a:solidFill>
+            <a:schemeClr val="bg1"/>
+          </a:solidFill>
+          <a:ln>
+            <a:solidFill>
+              <a:schemeClr val="accent1"/>
+            </a:solidFill>
+          </a:ln>
+        </p:spPr>
+        <p:txBody>
+          <a:bodyPr wrap="square">
+            <a:spAutoFit/>
+          </a:bodyPr>
+          <a:lstStyle/>
+          <a:p>
+            <a:r>
+              <a:rPr lang="en-US" sz="800" noProof="1">
+                <a:solidFill>
+                  <a:schemeClr val="accent1"/>
+                </a:solidFill>
+              </a:rPr>
+              <a:t>About.html</a:t>
+            </a:r>
+            <a:endParaRPr lang="en-US" sz="800" noProof="1"/>
+          </a:p>
+          <a:p>
+            <a:pPr marL="171450" indent="-171450">
+              <a:buFont typeface="Courier New" panose="02070309020205020404" pitchFamily="49" charset="0"/>
+              <a:buChar char="o"/>
+            </a:pPr>
+            <a:r>
+              <a:rPr lang="en-US" sz="800" noProof="1"/>
+              <a:t>is self-contained</a:t>
+            </a:r>
+          </a:p>
+          <a:p>
+            <a:pPr marL="171450" indent="-171450">
+              <a:buFont typeface="Courier New" panose="02070309020205020404" pitchFamily="49" charset="0"/>
+              <a:buChar char="o"/>
+            </a:pPr>
+            <a:r>
+              <a:rPr lang="en-US" sz="800" noProof="1"/>
+              <a:t>inserts “about_search.html” in div, to have same text here as in help for history search.</a:t>
+            </a:r>
+            <a:endParaRPr lang="en-US" sz="800" noProof="1">
+              <a:solidFill>
+                <a:schemeClr val="accent1"/>
+              </a:solidFill>
+            </a:endParaRPr>
+          </a:p>
+          <a:p>
+            <a:r>
+              <a:rPr lang="en-US" sz="800" noProof="1">
+                <a:solidFill>
+                  <a:schemeClr val="accent1"/>
+                </a:solidFill>
+              </a:rPr>
+              <a:t>about_search.html</a:t>
+            </a:r>
+            <a:endParaRPr lang="en-US" sz="800" noProof="1"/>
+          </a:p>
+          <a:p>
+            <a:pPr marL="171450" indent="-171450">
+              <a:buFont typeface="Courier New" panose="02070309020205020404" pitchFamily="49" charset="0"/>
+              <a:buChar char="o"/>
+            </a:pPr>
+            <a:r>
+              <a:rPr lang="en-US" sz="800" noProof="1"/>
+              <a:t>is self-contained</a:t>
+            </a:r>
+            <a:endParaRPr lang="en-US" sz="800" noProof="1">
+              <a:solidFill>
+                <a:schemeClr val="accent1"/>
+              </a:solidFill>
+            </a:endParaRPr>
+          </a:p>
+          <a:p>
+            <a:r>
+              <a:rPr lang="en-US" sz="800" noProof="1">
+                <a:solidFill>
+                  <a:schemeClr val="accent1"/>
+                </a:solidFill>
+              </a:rPr>
+              <a:t>Other help texts</a:t>
+            </a:r>
+            <a:endParaRPr lang="en-US" sz="800" noProof="1"/>
+          </a:p>
+          <a:p>
+            <a:pPr marL="171450" indent="-171450">
+              <a:buFont typeface="Courier New" panose="02070309020205020404" pitchFamily="49" charset="0"/>
+              <a:buChar char="o"/>
+            </a:pPr>
+            <a:r>
+              <a:rPr lang="en-US" sz="800" noProof="1"/>
+              <a:t>HELP/TEMPLATE_help.html &lt;div id="inner-content"&gt;, is replaced with text from HELP/ by app.js</a:t>
+            </a:r>
+          </a:p>
+        </p:txBody>
+      </p:sp>
+      <p:sp>
+        <p:nvSpPr>
+          <p:cNvPr id="21" name="textruta 20">
+            <a:extLst>
+              <a:ext uri="{FF2B5EF4-FFF2-40B4-BE49-F238E27FC236}">
+                <a16:creationId xmlns:a16="http://schemas.microsoft.com/office/drawing/2014/main" id="{7DE9AEB1-C5B0-C249-BF18-9D6FEFA03971}"/>
+              </a:ext>
+            </a:extLst>
+          </p:cNvPr>
+          <p:cNvSpPr txBox="1"/>
+          <p:nvPr/>
+        </p:nvSpPr>
+        <p:spPr>
+          <a:xfrm>
+            <a:off x="416902" y="7929139"/>
+            <a:ext cx="885388" cy="461665"/>
+          </a:xfrm>
+          <a:prstGeom prst="rect">
+            <a:avLst/>
+          </a:prstGeom>
+          <a:noFill/>
+        </p:spPr>
+        <p:txBody>
+          <a:bodyPr wrap="square" rtlCol="0">
+            <a:spAutoFit/>
+          </a:bodyPr>
+          <a:lstStyle/>
+          <a:p>
+            <a:r>
+              <a:rPr lang="en-US" sz="2400" b="1" noProof="1"/>
+              <a:t>Help</a:t>
+            </a:r>
+          </a:p>
+        </p:txBody>
+      </p:sp>
+      <p:sp>
+        <p:nvSpPr>
+          <p:cNvPr id="22" name="textruta 21">
+            <a:extLst>
+              <a:ext uri="{FF2B5EF4-FFF2-40B4-BE49-F238E27FC236}">
+                <a16:creationId xmlns:a16="http://schemas.microsoft.com/office/drawing/2014/main" id="{AF028C6E-A947-D149-8E6C-A4419B0C31F8}"/>
+              </a:ext>
+            </a:extLst>
+          </p:cNvPr>
+          <p:cNvSpPr txBox="1"/>
+          <p:nvPr/>
+        </p:nvSpPr>
+        <p:spPr>
+          <a:xfrm>
             <a:off x="416902" y="122259"/>
-            <a:ext cx="1170705" cy="830997"/>
+            <a:ext cx="4211089" cy="830997"/>
           </a:xfrm>
           <a:prstGeom prst="rect">
             <a:avLst/>
@@ -14924,17 +15825,17 @@
                   <a:schemeClr val="accent1"/>
                 </a:solidFill>
               </a:rPr>
-              <a:t>Dev</a:t>
-            </a:r>
-          </a:p>
-        </p:txBody>
-      </p:sp>
-      <p:sp>
-        <p:nvSpPr>
-          <p:cNvPr id="5" name="textruta 4">
+              <a:t>Other Windows</a:t>
+            </a:r>
+          </a:p>
+        </p:txBody>
+      </p:sp>
+      <p:sp>
+        <p:nvSpPr>
+          <p:cNvPr id="2" name="textruta 1">
             <a:extLst>
               <a:ext uri="{FF2B5EF4-FFF2-40B4-BE49-F238E27FC236}">
-                <a16:creationId xmlns:a16="http://schemas.microsoft.com/office/drawing/2014/main" id="{39AA015C-8BF8-B04E-A7BD-D1FFFF1FCC82}"/>
+                <a16:creationId xmlns:a16="http://schemas.microsoft.com/office/drawing/2014/main" id="{9851A2CD-4B90-C07F-1152-611E6755CCD9}"/>
               </a:ext>
             </a:extLst>
           </p:cNvPr>
@@ -14943,8 +15844,8 @@
         </p:nvSpPr>
         <p:spPr>
           <a:xfrm>
-            <a:off x="401904" y="1545040"/>
-            <a:ext cx="3274288" cy="4154984"/>
+            <a:off x="4489123" y="1381925"/>
+            <a:ext cx="3274288" cy="1938992"/>
           </a:xfrm>
           <a:prstGeom prst="rect">
             <a:avLst/>
@@ -14964,12 +15865,8 @@
           <a:p>
             <a:r>
               <a:rPr lang="en-US" sz="800" b="1" noProof="1"/>
-              <a:t>Debug flags can be set from settings.json:</a:t>
-            </a:r>
-            <a:br>
-              <a:rPr lang="en-US" sz="800" b="1" noProof="1"/>
-            </a:br>
-            <a:endParaRPr lang="en-US" sz="800" b="1" noProof="1"/>
+              <a:t>Explicitly defined in .html file</a:t>
+            </a:r>
           </a:p>
           <a:p>
             <a:pPr marL="171450" indent="-171450">
@@ -14977,29 +15874,8 @@
               <a:buChar char="o"/>
             </a:pPr>
             <a:r>
-              <a:rPr lang="en-US" sz="800" noProof="1">
-                <a:latin typeface="Courier New" panose="02070309020205020404" pitchFamily="49" charset="0"/>
-                <a:cs typeface="Courier New" panose="02070309020205020404" pitchFamily="49" charset="0"/>
-              </a:rPr>
-              <a:t>debug = true </a:t>
-            </a:r>
-            <a:r>
-              <a:rPr lang="en-US" sz="800" noProof="1"/>
-              <a:t>(git debug env variables in main)</a:t>
-            </a:r>
-            <a:br>
-              <a:rPr lang="en-US" sz="800" noProof="1"/>
-            </a:br>
-            <a:r>
-              <a:rPr lang="en-US" sz="800" noProof="1">
-                <a:latin typeface="Courier New" panose="02070309020205020404" pitchFamily="49" charset="0"/>
-                <a:cs typeface="Courier New" panose="02070309020205020404" pitchFamily="49" charset="0"/>
-              </a:rPr>
-              <a:t>graph.debug = true </a:t>
-            </a:r>
-            <a:r>
-              <a:rPr lang="en-US" sz="800" noProof="1"/>
-              <a:t>(graph layout debug info)</a:t>
+              <a:rPr lang="en-US" sz="800" noProof="1"/>
+              <a:t>This is for dialogs with predefined content</a:t>
             </a:r>
           </a:p>
           <a:p>
@@ -15007,21 +15883,19 @@
               <a:buFont typeface="Courier New" panose="02070309020205020404" pitchFamily="49" charset="0"/>
               <a:buChar char="o"/>
             </a:pPr>
+            <a:r>
+              <a:rPr lang="en-US" sz="800" noProof="1"/>
+              <a:t>Shows as html-dialog , inside main app.js window</a:t>
+            </a:r>
+            <a:endParaRPr lang="en-US" sz="800" b="1" noProof="1"/>
+          </a:p>
+          <a:p>
             <a:endParaRPr lang="en-US" sz="800" noProof="1"/>
           </a:p>
           <a:p>
             <a:r>
               <a:rPr lang="en-US" sz="800" b="1" noProof="1"/>
-              <a:t>Debug console, press F12 (if nwjs SDK version)</a:t>
-            </a:r>
-          </a:p>
-          <a:p>
-            <a:endParaRPr lang="en-US" sz="800" b="1" noProof="1"/>
-          </a:p>
-          <a:p>
-            <a:r>
-              <a:rPr lang="en-US" sz="800" b="1" noProof="1"/>
-              <a:t>Chrome  remote debug (useful if gui doesn’t open)</a:t>
+              <a:t>Template-dialog in.html file</a:t>
             </a:r>
           </a:p>
           <a:p>
@@ -15031,20 +15905,7 @@
             </a:pPr>
             <a:r>
               <a:rPr lang="en-US" sz="800" noProof="1"/>
-              <a:t>Start with flag:</a:t>
-            </a:r>
-            <a:br>
-              <a:rPr lang="en-US" sz="800" noProof="1">
-                <a:latin typeface="Courier New" panose="02070309020205020404" pitchFamily="49" charset="0"/>
-                <a:cs typeface="Courier New" panose="02070309020205020404" pitchFamily="49" charset="0"/>
-              </a:rPr>
-            </a:br>
-            <a:r>
-              <a:rPr lang="en-US" sz="800" noProof="1">
-                <a:latin typeface="Courier New" panose="02070309020205020404" pitchFamily="49" charset="0"/>
-                <a:cs typeface="Courier New" panose="02070309020205020404" pitchFamily="49" charset="0"/>
-              </a:rPr>
-              <a:t>/Applications/nwjs.app/Contents/MacOS/nwjs  --remote-debugging-port=9222 .</a:t>
+              <a:t>Local to app.html, and settings.html</a:t>
             </a:r>
           </a:p>
           <a:p>
@@ -15054,20 +15915,7 @@
             </a:pPr>
             <a:r>
               <a:rPr lang="en-US" sz="800" noProof="1"/>
-              <a:t>Or start from folder containing ‘package.json’:</a:t>
-            </a:r>
-            <a:br>
-              <a:rPr lang="en-US" sz="800" noProof="1">
-                <a:latin typeface="Courier New" panose="02070309020205020404" pitchFamily="49" charset="0"/>
-                <a:cs typeface="Courier New" panose="02070309020205020404" pitchFamily="49" charset="0"/>
-              </a:rPr>
-            </a:br>
-            <a:r>
-              <a:rPr lang="en-US" sz="800" noProof="1">
-                <a:latin typeface="Courier New" panose="02070309020205020404" pitchFamily="49" charset="0"/>
-                <a:cs typeface="Courier New" panose="02070309020205020404" pitchFamily="49" charset="0"/>
-              </a:rPr>
-              <a:t>npm start</a:t>
+              <a:t>displayAlert(title, message)</a:t>
             </a:r>
           </a:p>
           <a:p>
@@ -15077,19 +15925,8 @@
             </a:pPr>
             <a:r>
               <a:rPr lang="en-US" sz="800" noProof="1"/>
-              <a:t>Chrome browser:</a:t>
-            </a:r>
-            <a:br>
-              <a:rPr lang="en-US" sz="800" noProof="1"/>
-            </a:br>
-            <a:r>
-              <a:rPr lang="en-US" sz="800" noProof="1">
-                <a:latin typeface="Courier New" panose="02070309020205020404" pitchFamily="49" charset="0"/>
-                <a:cs typeface="Courier New" panose="02070309020205020404" pitchFamily="49" charset="0"/>
-              </a:rPr>
-              <a:t>chrome://inspect</a:t>
-            </a:r>
-            <a:endParaRPr lang="en-US" sz="800" noProof="1"/>
+              <a:t>Shows as html-dialog , inside main window</a:t>
+            </a:r>
           </a:p>
           <a:p>
             <a:pPr marL="171450" indent="-171450">
@@ -15101,7 +15938,7 @@
           <a:p>
             <a:r>
               <a:rPr lang="en-US" sz="800" b="1" noProof="1"/>
-              <a:t>Break debug on condition</a:t>
+              <a:t>exernalDialog.html (sizing performed in app.html)</a:t>
             </a:r>
           </a:p>
           <a:p>
@@ -15111,21 +15948,14 @@
             </a:pPr>
             <a:r>
               <a:rPr lang="en-US" sz="800" noProof="1"/>
-              <a:t>Conditional break point : </a:t>
+              <a:t>displayLongAlert(title, message, type)</a:t>
             </a:r>
             <a:br>
               <a:rPr lang="en-US" sz="800" noProof="1"/>
             </a:br>
             <a:r>
               <a:rPr lang="en-US" sz="800" noProof="1"/>
-              <a:t>make break point</a:t>
-            </a:r>
-            <a:br>
-              <a:rPr lang="en-US" sz="800" noProof="1"/>
-            </a:br>
-            <a:r>
-              <a:rPr lang="en-US" sz="800" noProof="1"/>
-              <a:t>right-click and make condition</a:t>
+              <a:t>defined in app.js</a:t>
             </a:r>
           </a:p>
           <a:p>
@@ -15135,98 +15965,11 @@
             </a:pPr>
             <a:r>
               <a:rPr lang="en-US" sz="800" noProof="1"/>
-              <a:t>For graph, conditional break point:  </a:t>
-            </a:r>
-            <a:r>
-              <a:rPr lang="en-US" sz="800" noProof="1">
-                <a:latin typeface="Courier New" panose="02070309020205020404" pitchFamily="49" charset="0"/>
-                <a:cs typeface="Courier New" panose="02070309020205020404" pitchFamily="49" charset="0"/>
-              </a:rPr>
-              <a:t>stop(commit)</a:t>
+              <a:t>Shows as external window, on top of main  app.js window</a:t>
             </a:r>
             <a:br>
               <a:rPr lang="en-US" sz="800" noProof="1"/>
             </a:br>
-            <a:r>
-              <a:rPr lang="en-US" sz="800" noProof="1"/>
-              <a:t>stops on marked commit in graph window</a:t>
-            </a:r>
-          </a:p>
-          <a:p>
-            <a:pPr marL="171450" indent="-171450">
-              <a:buFont typeface="Courier New" panose="02070309020205020404" pitchFamily="49" charset="0"/>
-              <a:buChar char="o"/>
-            </a:pPr>
-            <a:endParaRPr lang="en-US" sz="800" noProof="1"/>
-          </a:p>
-          <a:p>
-            <a:r>
-              <a:rPr lang="en-US" sz="800" b="1" noProof="1"/>
-              <a:t>Reload window</a:t>
-            </a:r>
-          </a:p>
-          <a:p>
-            <a:pPr marL="171450" indent="-171450">
-              <a:buFont typeface="Courier New" panose="02070309020205020404" pitchFamily="49" charset="0"/>
-              <a:buChar char="o"/>
-            </a:pPr>
-            <a:r>
-              <a:rPr lang="en-US" sz="800" noProof="1"/>
-              <a:t>typically from debug console: </a:t>
-            </a:r>
-            <a:r>
-              <a:rPr lang="en-US" sz="800" noProof="1">
-                <a:latin typeface="Courier New" panose="02070309020205020404" pitchFamily="49" charset="0"/>
-                <a:cs typeface="Courier New" panose="02070309020205020404" pitchFamily="49" charset="0"/>
-              </a:rPr>
-              <a:t>injectIntoJs(document)</a:t>
-            </a:r>
-            <a:br>
-              <a:rPr lang="en-US" sz="800" noProof="1"/>
-            </a:br>
-            <a:r>
-              <a:rPr lang="en-US" sz="800" noProof="1"/>
-              <a:t>(or similar command, use function starting on load)</a:t>
-            </a:r>
-          </a:p>
-          <a:p>
-            <a:pPr marL="171450" indent="-171450">
-              <a:buFont typeface="Courier New" panose="02070309020205020404" pitchFamily="49" charset="0"/>
-              <a:buChar char="o"/>
-            </a:pPr>
-            <a:endParaRPr lang="en-US" sz="800" noProof="1"/>
-          </a:p>
-          <a:p>
-            <a:r>
-              <a:rPr lang="en-US" sz="800" b="1" noProof="1"/>
-              <a:t>Console.log to main dev console</a:t>
-            </a:r>
-          </a:p>
-          <a:p>
-            <a:pPr marL="171450" indent="-171450">
-              <a:buFont typeface="Courier New" panose="02070309020205020404" pitchFamily="49" charset="0"/>
-              <a:buChar char="o"/>
-            </a:pPr>
-            <a:r>
-              <a:rPr lang="en-US" sz="800" noProof="1"/>
-              <a:t>Define global.log function in app.js, which logs from everywhere to main dev console</a:t>
-            </a:r>
-          </a:p>
-          <a:p>
-            <a:pPr marL="171450" indent="-171450">
-              <a:buFont typeface="Courier New" panose="02070309020205020404" pitchFamily="49" charset="0"/>
-              <a:buChar char="o"/>
-            </a:pPr>
-            <a:r>
-              <a:rPr lang="en-US" sz="800" noProof="1">
-                <a:latin typeface="Courier New" panose="02070309020205020404" pitchFamily="49" charset="0"/>
-                <a:cs typeface="Courier New" panose="02070309020205020404" pitchFamily="49" charset="0"/>
-              </a:rPr>
-              <a:t>global.log(‘message’)</a:t>
-            </a:r>
-            <a:endParaRPr lang="en-US" sz="800" noProof="1"/>
-          </a:p>
-          <a:p>
             <a:br>
               <a:rPr lang="en-US" sz="800" noProof="1"/>
             </a:br>
@@ -15236,10 +15979,10 @@
       </p:sp>
       <p:sp>
         <p:nvSpPr>
-          <p:cNvPr id="6" name="textruta 5">
+          <p:cNvPr id="3" name="textruta 2">
             <a:extLst>
               <a:ext uri="{FF2B5EF4-FFF2-40B4-BE49-F238E27FC236}">
-                <a16:creationId xmlns:a16="http://schemas.microsoft.com/office/drawing/2014/main" id="{EB22BA33-1BE2-9C4E-857E-F8FF1526BB6F}"/>
+                <a16:creationId xmlns:a16="http://schemas.microsoft.com/office/drawing/2014/main" id="{06DEBF44-050B-2220-C4D8-56D460476702}"/>
               </a:ext>
             </a:extLst>
           </p:cNvPr>
@@ -15248,8 +15991,8 @@
         </p:nvSpPr>
         <p:spPr>
           <a:xfrm>
-            <a:off x="318798" y="953256"/>
-            <a:ext cx="1098378" cy="461665"/>
+            <a:off x="4489123" y="841210"/>
+            <a:ext cx="1116011" cy="461665"/>
           </a:xfrm>
           <a:prstGeom prst="rect">
             <a:avLst/>
@@ -15264,17 +16007,17 @@
           <a:p>
             <a:r>
               <a:rPr lang="en-US" sz="2400" b="1" noProof="1"/>
-              <a:t>DEBUG</a:t>
-            </a:r>
-          </a:p>
-        </p:txBody>
-      </p:sp>
-      <p:sp>
-        <p:nvSpPr>
-          <p:cNvPr id="7" name="textruta 6">
+              <a:t>Dialogs</a:t>
+            </a:r>
+          </a:p>
+        </p:txBody>
+      </p:sp>
+      <p:sp>
+        <p:nvSpPr>
+          <p:cNvPr id="6" name="textruta 5">
             <a:extLst>
               <a:ext uri="{FF2B5EF4-FFF2-40B4-BE49-F238E27FC236}">
-                <a16:creationId xmlns:a16="http://schemas.microsoft.com/office/drawing/2014/main" id="{3904C800-EE25-4742-BFE5-CD6F10B48921}"/>
+                <a16:creationId xmlns:a16="http://schemas.microsoft.com/office/drawing/2014/main" id="{A188559A-F5E8-46DD-F138-41217EC70A89}"/>
               </a:ext>
             </a:extLst>
           </p:cNvPr>
@@ -15283,8 +16026,8 @@
         </p:nvSpPr>
         <p:spPr>
           <a:xfrm>
-            <a:off x="4192240" y="1545040"/>
-            <a:ext cx="3274288" cy="2185214"/>
+            <a:off x="8256717" y="4608845"/>
+            <a:ext cx="3274288" cy="2554545"/>
           </a:xfrm>
           <a:prstGeom prst="rect">
             <a:avLst/>
@@ -15304,51 +16047,12 @@
           <a:p>
             <a:r>
               <a:rPr lang="en-US" sz="800" b="1" noProof="1"/>
-              <a:t>Logging to file  ‘.Pragma-git/.tmp/pragma-git-log.txt’</a:t>
-            </a:r>
-          </a:p>
-          <a:p>
-            <a:endParaRPr lang="en-US" sz="800" b="1" noProof="1"/>
-          </a:p>
-          <a:p>
-            <a:r>
-              <a:rPr lang="en-US" sz="800" b="1" noProof="1"/>
-              <a:t>Logging messages :</a:t>
-            </a:r>
-          </a:p>
-          <a:p>
-            <a:pPr marL="171450" indent="-171450">
-              <a:buFont typeface="Courier New" panose="02070309020205020404" pitchFamily="49" charset="0"/>
-              <a:buChar char="o"/>
-            </a:pPr>
-            <a:r>
-              <a:rPr lang="en-US" sz="800" noProof="1"/>
-              <a:t>‘pragmaLog(message)’ command writes directly to file</a:t>
+              <a:t>Windows menu (MacOS only):</a:t>
             </a:r>
             <a:br>
               <a:rPr lang="en-US" sz="800" b="1" noProof="1"/>
             </a:br>
-            <a:r>
-              <a:rPr lang="en-US" sz="800" noProof="1"/>
-              <a:t>auto-removes credentials in URL</a:t>
-            </a:r>
-            <a:br>
-              <a:rPr lang="en-US" sz="800" noProof="1"/>
-            </a:br>
-            <a:r>
-              <a:rPr lang="en-US" sz="800" noProof="1"/>
-              <a:t>adds time stamp</a:t>
-            </a:r>
-            <a:br>
-              <a:rPr lang="en-US" sz="800" noProof="1"/>
-            </a:br>
             <a:endParaRPr lang="en-US" sz="800" b="1" noProof="1"/>
-          </a:p>
-          <a:p>
-            <a:r>
-              <a:rPr lang="en-US" sz="800" b="1" noProof="1"/>
-              <a:t>simpleGitLog(pwd) </a:t>
-            </a:r>
           </a:p>
           <a:p>
             <a:pPr marL="171450" indent="-171450">
@@ -15356,16 +16060,21 @@
               <a:buChar char="o"/>
             </a:pPr>
             <a:r>
-              <a:rPr lang="en-US" sz="800" noProof="1"/>
-              <a:t>Drop-in replacement for simpleGit</a:t>
+              <a:rPr lang="en-US" sz="800" noProof="1">
+                <a:solidFill>
+                  <a:schemeClr val="accent1"/>
+                </a:solidFill>
+              </a:rPr>
+              <a:t>initializeWindowMenu</a:t>
+            </a:r>
+            <a:r>
+              <a:rPr lang="en-US" sz="800" noProof="1"/>
+              <a:t>: creates default MacOs menu in native language. Windows menu is recreated</a:t>
             </a:r>
             <a:br>
-              <a:rPr lang="en-US" sz="800" b="1" noProof="1"/>
+              <a:rPr lang="en-US" sz="800" noProof="1"/>
             </a:br>
-            <a:r>
-              <a:rPr lang="en-US" sz="800" noProof="1"/>
-              <a:t>takes one argument (I always populate it as the path to the git repo)</a:t>
-            </a:r>
+            <a:endParaRPr lang="en-US" sz="800" noProof="1"/>
           </a:p>
           <a:p>
             <a:pPr marL="171450" indent="-171450">
@@ -15373,16 +16082,43 @@
               <a:buChar char="o"/>
             </a:pPr>
             <a:r>
-              <a:rPr lang="en-US" sz="800" noProof="1"/>
-              <a:t>Uses function ‘sendGitOutputToFile’ to write git command, stdout, stderr. Function pragmaLog is used to print to log file</a:t>
-            </a:r>
+              <a:rPr lang="en-US" sz="800" noProof="1">
+                <a:solidFill>
+                  <a:schemeClr val="accent1"/>
+                </a:solidFill>
+              </a:rPr>
+              <a:t>addWindowMenu</a:t>
+            </a:r>
+            <a:r>
+              <a:rPr lang="en-US" sz="800" noProof="1"/>
+              <a:t> : stores the submenu handle with the title as key window_menu_handles_mapping[title]</a:t>
+            </a:r>
+            <a:br>
+              <a:rPr lang="en-US" sz="800" noProof="1"/>
+            </a:br>
+            <a:endParaRPr lang="en-US" sz="800" noProof="1"/>
           </a:p>
           <a:p>
             <a:pPr marL="171450" indent="-171450">
               <a:buFont typeface="Courier New" panose="02070309020205020404" pitchFamily="49" charset="0"/>
               <a:buChar char="o"/>
             </a:pPr>
-            <a:endParaRPr lang="en-US" sz="800" b="1" noProof="1"/>
+            <a:r>
+              <a:rPr lang="en-US" sz="800" noProof="1">
+                <a:solidFill>
+                  <a:schemeClr val="accent1"/>
+                </a:solidFill>
+              </a:rPr>
+              <a:t>deleteWindowMenu </a:t>
+            </a:r>
+            <a:r>
+              <a:rPr lang="en-US" sz="800" noProof="1"/>
+              <a:t>: close using window title to find submenu handle.  </a:t>
+            </a:r>
+            <a:br>
+              <a:rPr lang="en-US" sz="800" noProof="1"/>
+            </a:br>
+            <a:endParaRPr lang="en-US" sz="800" noProof="1"/>
           </a:p>
           <a:p>
             <a:pPr marL="171450" indent="-171450">
@@ -15390,8 +16126,16 @@
               <a:buChar char="o"/>
             </a:pPr>
             <a:r>
-              <a:rPr lang="en-US" sz="800" noProof="1"/>
-              <a:t>All logging commands are defined in app.js. </a:t>
+              <a:rPr lang="en-US" sz="800" noProof="1">
+                <a:solidFill>
+                  <a:schemeClr val="accent1"/>
+                </a:solidFill>
+              </a:rPr>
+              <a:t>recreateAllWindowsMenu </a:t>
+            </a:r>
+            <a:r>
+              <a:rPr lang="en-US" sz="800" noProof="1"/>
+              <a:t>: generates a populated MacOS window menu from scratch (used by Main when restarting after Settings scale change) </a:t>
             </a:r>
           </a:p>
           <a:p>
@@ -15399,23 +16143,34 @@
               <a:buFont typeface="Courier New" panose="02070309020205020404" pitchFamily="49" charset="0"/>
               <a:buChar char="o"/>
             </a:pPr>
-            <a:r>
-              <a:rPr lang="en-US" sz="800" noProof="1"/>
-              <a:t>Can be called from children to app.js by using ‘opener.pragmaLog’ or  ‘opener. simpleGitLog’</a:t>
-            </a:r>
-            <a:br>
-              <a:rPr lang="en-US" sz="800" noProof="1"/>
-            </a:br>
             <a:endParaRPr lang="en-US" sz="800" noProof="1"/>
           </a:p>
-        </p:txBody>
-      </p:sp>
-      <p:sp>
-        <p:nvSpPr>
-          <p:cNvPr id="8" name="textruta 7">
+          <a:p>
+            <a:pPr marL="171450" indent="-171450">
+              <a:buFont typeface="Courier New" panose="02070309020205020404" pitchFamily="49" charset="0"/>
+              <a:buChar char="o"/>
+            </a:pPr>
+            <a:r>
+              <a:rPr lang="en-US" sz="800" noProof="1">
+                <a:solidFill>
+                  <a:schemeClr val="accent1"/>
+                </a:solidFill>
+              </a:rPr>
+              <a:t>gui.Window.getAll</a:t>
+            </a:r>
+            <a:r>
+              <a:rPr lang="en-US" sz="800" noProof="1"/>
+              <a:t> is used several places to find open windows (and child windows that are not supposed to be in the windows menu).  A function is called that iterates each found window, and performs the action.  See ‘minimizeWindow’, ‘closeAllWindows’, ‘hideAllWindows’,’ showAllWindows’</a:t>
+            </a:r>
+          </a:p>
+        </p:txBody>
+      </p:sp>
+      <p:sp>
+        <p:nvSpPr>
+          <p:cNvPr id="7" name="textruta 6">
             <a:extLst>
               <a:ext uri="{FF2B5EF4-FFF2-40B4-BE49-F238E27FC236}">
-                <a16:creationId xmlns:a16="http://schemas.microsoft.com/office/drawing/2014/main" id="{7CCC12FE-9487-E148-A422-EE7A0D65A7FC}"/>
+                <a16:creationId xmlns:a16="http://schemas.microsoft.com/office/drawing/2014/main" id="{4108F045-DC67-5945-2D67-046A62557881}"/>
               </a:ext>
             </a:extLst>
           </p:cNvPr>
@@ -15424,8 +16179,8 @@
         </p:nvSpPr>
         <p:spPr>
           <a:xfrm>
-            <a:off x="4109134" y="953256"/>
-            <a:ext cx="1160254" cy="461665"/>
+            <a:off x="8173611" y="4017061"/>
+            <a:ext cx="3974871" cy="461665"/>
           </a:xfrm>
           <a:prstGeom prst="rect">
             <a:avLst/>
@@ -15440,17 +16195,17 @@
           <a:p>
             <a:r>
               <a:rPr lang="en-US" sz="2400" b="1" noProof="1"/>
-              <a:t>Logging</a:t>
-            </a:r>
-          </a:p>
-        </p:txBody>
-      </p:sp>
-      <p:sp>
-        <p:nvSpPr>
-          <p:cNvPr id="11" name="textruta 10">
+              <a:t>Windows menu (MacOS only)</a:t>
+            </a:r>
+          </a:p>
+        </p:txBody>
+      </p:sp>
+      <p:sp>
+        <p:nvSpPr>
+          <p:cNvPr id="8" name="textruta 7">
             <a:extLst>
               <a:ext uri="{FF2B5EF4-FFF2-40B4-BE49-F238E27FC236}">
-                <a16:creationId xmlns:a16="http://schemas.microsoft.com/office/drawing/2014/main" id="{9B6E5385-1392-2740-82C6-EEFAE9D008B9}"/>
+                <a16:creationId xmlns:a16="http://schemas.microsoft.com/office/drawing/2014/main" id="{C2961014-07D4-C6A9-2F8B-DEB31EC6254D}"/>
               </a:ext>
             </a:extLst>
           </p:cNvPr>
@@ -15459,8 +16214,8 @@
         </p:nvSpPr>
         <p:spPr>
           <a:xfrm>
-            <a:off x="422126" y="7212463"/>
-            <a:ext cx="3274288" cy="1323439"/>
+            <a:off x="8256717" y="1376136"/>
+            <a:ext cx="3274288" cy="2431435"/>
           </a:xfrm>
           <a:prstGeom prst="rect">
             <a:avLst/>
@@ -15480,7 +16235,7 @@
           <a:p>
             <a:r>
               <a:rPr lang="en-US" sz="800" b="1" noProof="1"/>
-              <a:t>Windows debug to console</a:t>
+              <a:t>Windows opened from Main, Settings</a:t>
             </a:r>
             <a:br>
               <a:rPr lang="en-US" sz="800" b="1" noProof="1"/>
@@ -15493,11 +16248,38 @@
               <a:buChar char="o"/>
             </a:pPr>
             <a:r>
+              <a:rPr lang="en-US" sz="800" noProof="1"/>
+              <a:t>.</a:t>
+            </a:r>
+            <a:r>
               <a:rPr lang="en-US" sz="800" noProof="1">
-                <a:hlinkClick r:id="rId2"/>
+                <a:solidFill>
+                  <a:schemeClr val="accent1"/>
+                </a:solidFill>
               </a:rPr>
-              <a:t>https://github.com/nwutils/nwdc</a:t>
-            </a:r>
+              <a:t> localState </a:t>
+            </a:r>
+            <a:r>
+              <a:rPr lang="en-US" sz="800" noProof="1"/>
+              <a:t>(transient info) :</a:t>
+            </a:r>
+            <a:br>
+              <a:rPr lang="en-US" sz="800" noProof="1"/>
+            </a:br>
+            <a:r>
+              <a:rPr lang="en-US" sz="800" noProof="1"/>
+              <a:t> helpWindow, .settings, . fileListWindow, …</a:t>
+            </a:r>
+            <a:br>
+              <a:rPr lang="en-US" sz="800" noProof="1"/>
+            </a:br>
+            <a:r>
+              <a:rPr lang="en-US" sz="800" noProof="1"/>
+              <a:t>(true if window is open, false if closed)</a:t>
+            </a:r>
+            <a:br>
+              <a:rPr lang="en-US" sz="800" noProof="1"/>
+            </a:br>
             <a:endParaRPr lang="en-US" sz="800" noProof="1"/>
           </a:p>
           <a:p>
@@ -15505,6 +16287,20 @@
               <a:buFont typeface="Courier New" panose="02070309020205020404" pitchFamily="49" charset="0"/>
               <a:buChar char="o"/>
             </a:pPr>
+            <a:r>
+              <a:rPr lang="en-US" sz="800" noProof="1"/>
+              <a:t>External windows are opened hidden, with option ’show: false’</a:t>
+            </a:r>
+            <a:br>
+              <a:rPr lang="en-US" sz="800" noProof="1"/>
+            </a:br>
+            <a:r>
+              <a:rPr lang="en-US" sz="800" noProof="1"/>
+              <a:t>(to work around buggy multiple workspaces).  </a:t>
+            </a:r>
+            <a:br>
+              <a:rPr lang="en-US" sz="800" noProof="1"/>
+            </a:br>
             <a:endParaRPr lang="en-US" sz="800" noProof="1"/>
           </a:p>
           <a:p>
@@ -15513,39 +16309,68 @@
               <a:buChar char="o"/>
             </a:pPr>
             <a:r>
-              <a:rPr lang="en-US" sz="800" noProof="1"/>
-              <a:t>Use flag when running </a:t>
+              <a:rPr lang="en-US" sz="800" noProof="1">
+                <a:solidFill>
+                  <a:schemeClr val="accent1"/>
+                </a:solidFill>
+              </a:rPr>
+              <a:t>showWindow(win) </a:t>
+            </a:r>
+            <a:r>
+              <a:rPr lang="en-US" sz="800" noProof="1"/>
+              <a:t>is used to show hidden window.   </a:t>
+            </a:r>
+          </a:p>
+          <a:p>
+            <a:pPr marL="355600" lvl="1" indent="-177800">
+              <a:buFont typeface="Arial" panose="020B0604020202020204" pitchFamily="34" charset="0"/>
+              <a:buChar char="•"/>
+            </a:pPr>
+            <a:r>
+              <a:rPr lang="en-US" sz="800" noProof="1"/>
+              <a:t>Called from 'loaded’ event, when opening new window using ‘nw.Window.open’.   </a:t>
+            </a:r>
+          </a:p>
+          <a:p>
+            <a:pPr marL="355600" lvl="1" indent="-177800">
+              <a:buFont typeface="Arial" panose="020B0604020202020204" pitchFamily="34" charset="0"/>
+              <a:buChar char="•"/>
+            </a:pPr>
+            <a:r>
+              <a:rPr lang="en-US" sz="800" noProof="1"/>
+              <a:t>See two versions in ‘app.js’:</a:t>
             </a:r>
             <a:br>
               <a:rPr lang="en-US" sz="800" noProof="1"/>
             </a:br>
             <a:r>
-              <a:rPr lang="en-US" sz="800" noProof="1">
-                <a:latin typeface="Courier New" panose="02070309020205020404" pitchFamily="49" charset="0"/>
-                <a:cs typeface="Courier New" panose="02070309020205020404" pitchFamily="49" charset="0"/>
-              </a:rPr>
-              <a:t>nw.exe :   --remote-debugging-port=9222</a:t>
+              <a:rPr lang="en-US" sz="800" noProof="1"/>
+              <a:t>- callback’, case statement 'clicked-notes’</a:t>
             </a:r>
             <a:br>
               <a:rPr lang="en-US" sz="800" noProof="1"/>
             </a:br>
             <a:r>
               <a:rPr lang="en-US" sz="800" noProof="1"/>
-              <a:t>can then open with Chrome browser:</a:t>
+              <a:t>or</a:t>
             </a:r>
             <a:br>
               <a:rPr lang="en-US" sz="800" noProof="1"/>
             </a:br>
             <a:r>
-              <a:rPr lang="en-US" sz="800" noProof="1">
-                <a:latin typeface="Courier New" panose="02070309020205020404" pitchFamily="49" charset="0"/>
-                <a:cs typeface="Courier New" panose="02070309020205020404" pitchFamily="49" charset="0"/>
-              </a:rPr>
-              <a:t>chrome://inspect</a:t>
-            </a:r>
-            <a:endParaRPr lang="en-US" sz="800" noProof="1"/>
-          </a:p>
-          <a:p>
+              <a:rPr lang="en-US" sz="800" noProof="1"/>
+              <a:t>- ‘showAbout’ function</a:t>
+            </a:r>
+          </a:p>
+          <a:p>
+            <a:pPr marL="355600" lvl="1" indent="-177800">
+              <a:buFont typeface="Arial" panose="020B0604020202020204" pitchFamily="34" charset="0"/>
+              <a:buChar char="•"/>
+            </a:pPr>
+            <a:r>
+              <a:rPr lang="en-US" sz="800" noProof="1"/>
+              <a:t>Two ways to handle multiple windows (MacOS and Linux behaves differently)</a:t>
+            </a:r>
             <a:br>
               <a:rPr lang="en-US" sz="800" noProof="1"/>
             </a:br>
@@ -15555,10 +16380,10 @@
       </p:sp>
       <p:sp>
         <p:nvSpPr>
-          <p:cNvPr id="12" name="textruta 11">
+          <p:cNvPr id="9" name="textruta 8">
             <a:extLst>
               <a:ext uri="{FF2B5EF4-FFF2-40B4-BE49-F238E27FC236}">
-                <a16:creationId xmlns:a16="http://schemas.microsoft.com/office/drawing/2014/main" id="{0768BF3C-2934-9848-8D68-0FE5F5153E26}"/>
+                <a16:creationId xmlns:a16="http://schemas.microsoft.com/office/drawing/2014/main" id="{279F5223-2ED1-3322-DF84-D0ED0C8FE18E}"/>
               </a:ext>
             </a:extLst>
           </p:cNvPr>
@@ -15567,8 +16392,8 @@
         </p:nvSpPr>
         <p:spPr>
           <a:xfrm>
-            <a:off x="401904" y="6566132"/>
-            <a:ext cx="2658805" cy="461665"/>
+            <a:off x="8173611" y="784352"/>
+            <a:ext cx="3523400" cy="461665"/>
           </a:xfrm>
           <a:prstGeom prst="rect">
             <a:avLst/>
@@ -15583,134 +16408,7 @@
           <a:p>
             <a:r>
               <a:rPr lang="en-US" sz="2400" b="1" noProof="1"/>
-              <a:t>Windows 10 Debug</a:t>
-            </a:r>
-          </a:p>
-        </p:txBody>
-      </p:sp>
-      <p:sp>
-        <p:nvSpPr>
-          <p:cNvPr id="13" name="textruta 12">
-            <a:extLst>
-              <a:ext uri="{FF2B5EF4-FFF2-40B4-BE49-F238E27FC236}">
-                <a16:creationId xmlns:a16="http://schemas.microsoft.com/office/drawing/2014/main" id="{2B268A20-6D98-4442-89B2-9093279232D8}"/>
-              </a:ext>
-            </a:extLst>
-          </p:cNvPr>
-          <p:cNvSpPr txBox="1"/>
-          <p:nvPr/>
-        </p:nvSpPr>
-        <p:spPr>
-          <a:xfrm>
-            <a:off x="4376199" y="7157916"/>
-            <a:ext cx="3274288" cy="954107"/>
-          </a:xfrm>
-          <a:prstGeom prst="rect">
-            <a:avLst/>
-          </a:prstGeom>
-          <a:noFill/>
-          <a:ln>
-            <a:solidFill>
-              <a:schemeClr val="accent1"/>
-            </a:solidFill>
-          </a:ln>
-        </p:spPr>
-        <p:txBody>
-          <a:bodyPr wrap="square" rtlCol="0">
-            <a:spAutoFit/>
-          </a:bodyPr>
-          <a:lstStyle/>
-          <a:p>
-            <a:r>
-              <a:rPr lang="en-US" sz="800" b="1" noProof="1"/>
-              <a:t>Allow download of pre-releases</a:t>
-            </a:r>
-          </a:p>
-          <a:p>
-            <a:pPr marL="171450" indent="-171450">
-              <a:buFont typeface="Courier New" panose="02070309020205020404" pitchFamily="49" charset="0"/>
-              <a:buChar char="o"/>
-            </a:pPr>
-            <a:r>
-              <a:rPr lang="en-US" sz="800" noProof="1"/>
-              <a:t>If release is marked as prerelease in github </a:t>
-            </a:r>
-            <a:br>
-              <a:rPr lang="en-US" sz="800" noProof="1"/>
-            </a:br>
-            <a:r>
-              <a:rPr lang="en-US" sz="800" noProof="1"/>
-              <a:t>=&gt; </a:t>
-            </a:r>
-          </a:p>
-          <a:p>
-            <a:pPr marL="171450" indent="-171450">
-              <a:buFont typeface="Courier New" panose="02070309020205020404" pitchFamily="49" charset="0"/>
-              <a:buChar char="o"/>
-            </a:pPr>
-            <a:r>
-              <a:rPr lang="en-US" sz="800" noProof="1"/>
-              <a:t>will only be updated if :</a:t>
-            </a:r>
-            <a:br>
-              <a:rPr lang="en-US" sz="800" noProof="1"/>
-            </a:br>
-            <a:r>
-              <a:rPr lang="en-US" sz="800" noProof="1"/>
-              <a:t>‘settings.json’ contains  </a:t>
-            </a:r>
-            <a:br>
-              <a:rPr lang="en-US" sz="800" noProof="1"/>
-            </a:br>
-            <a:r>
-              <a:rPr lang="en-US" sz="800" noProof="1"/>
-              <a:t>	</a:t>
-            </a:r>
-            <a:r>
-              <a:rPr lang="en-US" sz="800" noProof="1">
-                <a:latin typeface="Courier New" panose="02070309020205020404" pitchFamily="49" charset="0"/>
-                <a:cs typeface="Courier New" panose="02070309020205020404" pitchFamily="49" charset="0"/>
-              </a:rPr>
-              <a:t>allowPrerelease = true</a:t>
-            </a:r>
-            <a:br>
-              <a:rPr lang="en-US" sz="800" noProof="1"/>
-            </a:br>
-            <a:endParaRPr lang="en-US" sz="800" noProof="1"/>
-          </a:p>
-        </p:txBody>
-      </p:sp>
-      <p:sp>
-        <p:nvSpPr>
-          <p:cNvPr id="14" name="textruta 13">
-            <a:extLst>
-              <a:ext uri="{FF2B5EF4-FFF2-40B4-BE49-F238E27FC236}">
-                <a16:creationId xmlns:a16="http://schemas.microsoft.com/office/drawing/2014/main" id="{F2A811B7-0B91-3340-BDFF-F8E112007E01}"/>
-              </a:ext>
-            </a:extLst>
-          </p:cNvPr>
-          <p:cNvSpPr txBox="1"/>
-          <p:nvPr/>
-        </p:nvSpPr>
-        <p:spPr>
-          <a:xfrm>
-            <a:off x="4293093" y="6566132"/>
-            <a:ext cx="1626856" cy="461665"/>
-          </a:xfrm>
-          <a:prstGeom prst="rect">
-            <a:avLst/>
-          </a:prstGeom>
-          <a:noFill/>
-        </p:spPr>
-        <p:txBody>
-          <a:bodyPr wrap="none" rtlCol="0">
-            <a:spAutoFit/>
-          </a:bodyPr>
-          <a:lstStyle/>
-          <a:p>
-            <a:r>
-              <a:rPr lang="en-US" sz="2400" b="1" noProof="1"/>
-              <a:t>Pre-release</a:t>
+              <a:t>External Windows general</a:t>
             </a:r>
           </a:p>
         </p:txBody>
@@ -15718,7 +16416,7 @@
     </p:spTree>
     <p:extLst>
       <p:ext uri="{BB962C8B-B14F-4D97-AF65-F5344CB8AC3E}">
-        <p14:creationId xmlns:p14="http://schemas.microsoft.com/office/powerpoint/2010/main" val="2209084743"/>
+        <p14:creationId xmlns:p14="http://schemas.microsoft.com/office/powerpoint/2010/main" val="748310116"/>
       </p:ext>
     </p:extLst>
   </p:cSld>

--- a/docs/Tech-overview.pptx
+++ b/docs/Tech-overview.pptx
@@ -13925,6 +13925,113 @@
       </p:grpSpPr>
       <p:sp>
         <p:nvSpPr>
+          <p:cNvPr id="122" name="Rectangle 121">
+            <a:extLst>
+              <a:ext uri="{FF2B5EF4-FFF2-40B4-BE49-F238E27FC236}">
+                <a16:creationId xmlns:a16="http://schemas.microsoft.com/office/drawing/2014/main" id="{4E4F468A-0631-842A-FCA7-FC0E33825BE9}"/>
+              </a:ext>
+            </a:extLst>
+          </p:cNvPr>
+          <p:cNvSpPr/>
+          <p:nvPr/>
+        </p:nvSpPr>
+        <p:spPr>
+          <a:xfrm>
+            <a:off x="451706" y="3328078"/>
+            <a:ext cx="11226129" cy="5950956"/>
+          </a:xfrm>
+          <a:prstGeom prst="rect">
+            <a:avLst/>
+          </a:prstGeom>
+          <a:solidFill>
+            <a:schemeClr val="bg2">
+              <a:lumMod val="90000"/>
+              <a:alpha val="33000"/>
+            </a:schemeClr>
+          </a:solidFill>
+          <a:ln w="0"/>
+        </p:spPr>
+        <p:style>
+          <a:lnRef idx="2">
+            <a:schemeClr val="accent1">
+              <a:shade val="15000"/>
+            </a:schemeClr>
+          </a:lnRef>
+          <a:fillRef idx="1">
+            <a:schemeClr val="accent1"/>
+          </a:fillRef>
+          <a:effectRef idx="0">
+            <a:schemeClr val="accent1"/>
+          </a:effectRef>
+          <a:fontRef idx="minor">
+            <a:schemeClr val="lt1"/>
+          </a:fontRef>
+        </p:style>
+        <p:txBody>
+          <a:bodyPr rtlCol="0" anchor="ctr"/>
+          <a:lstStyle/>
+          <a:p>
+            <a:pPr algn="ctr"/>
+            <a:endParaRPr lang="en-US" dirty="0">
+              <a:highlight>
+                <a:srgbClr val="C0C0C0"/>
+              </a:highlight>
+            </a:endParaRPr>
+          </a:p>
+        </p:txBody>
+      </p:sp>
+      <p:sp>
+        <p:nvSpPr>
+          <p:cNvPr id="114" name="Rectangle 113">
+            <a:extLst>
+              <a:ext uri="{FF2B5EF4-FFF2-40B4-BE49-F238E27FC236}">
+                <a16:creationId xmlns:a16="http://schemas.microsoft.com/office/drawing/2014/main" id="{2A41965A-DA7A-7196-60F2-57BE4824CBCE}"/>
+              </a:ext>
+            </a:extLst>
+          </p:cNvPr>
+          <p:cNvSpPr/>
+          <p:nvPr/>
+        </p:nvSpPr>
+        <p:spPr>
+          <a:xfrm>
+            <a:off x="6096044" y="3562275"/>
+            <a:ext cx="5154004" cy="4462272"/>
+          </a:xfrm>
+          <a:prstGeom prst="rect">
+            <a:avLst/>
+          </a:prstGeom>
+          <a:solidFill>
+            <a:schemeClr val="bg1"/>
+          </a:solidFill>
+          <a:ln w="0"/>
+        </p:spPr>
+        <p:style>
+          <a:lnRef idx="2">
+            <a:schemeClr val="accent1">
+              <a:shade val="15000"/>
+            </a:schemeClr>
+          </a:lnRef>
+          <a:fillRef idx="1">
+            <a:schemeClr val="accent1"/>
+          </a:fillRef>
+          <a:effectRef idx="0">
+            <a:schemeClr val="accent1"/>
+          </a:effectRef>
+          <a:fontRef idx="minor">
+            <a:schemeClr val="lt1"/>
+          </a:fontRef>
+        </p:style>
+        <p:txBody>
+          <a:bodyPr rtlCol="0" anchor="ctr"/>
+          <a:lstStyle/>
+          <a:p>
+            <a:pPr algn="ctr"/>
+            <a:endParaRPr lang="en-US"/>
+          </a:p>
+        </p:txBody>
+      </p:sp>
+      <p:sp>
+        <p:nvSpPr>
           <p:cNvPr id="4" name="textruta 3">
             <a:extLst>
               <a:ext uri="{FF2B5EF4-FFF2-40B4-BE49-F238E27FC236}">
@@ -14129,13 +14236,15 @@
         </p:nvSpPr>
         <p:spPr>
           <a:xfrm>
-            <a:off x="498478" y="3422956"/>
-            <a:ext cx="3274288" cy="6124754"/>
+            <a:off x="599550" y="3562275"/>
+            <a:ext cx="5019594" cy="5509200"/>
           </a:xfrm>
           <a:prstGeom prst="rect">
             <a:avLst/>
           </a:prstGeom>
-          <a:noFill/>
+          <a:solidFill>
+            <a:schemeClr val="bg1"/>
+          </a:solidFill>
           <a:ln>
             <a:solidFill>
               <a:schemeClr val="accent1"/>
@@ -14563,8 +14672,8 @@
         </p:nvSpPr>
         <p:spPr>
           <a:xfrm>
-            <a:off x="336553" y="2878797"/>
-            <a:ext cx="2054537" cy="461665"/>
+            <a:off x="462390" y="2889686"/>
+            <a:ext cx="3176062" cy="461665"/>
           </a:xfrm>
           <a:prstGeom prst="rect">
             <a:avLst/>
@@ -14579,8 +14688,1545 @@
           <a:p>
             <a:r>
               <a:rPr lang="en-US" sz="2400" b="1" noProof="1"/>
+              <a:t>Pragma-merge over ssh</a:t>
+            </a:r>
+          </a:p>
+        </p:txBody>
+      </p:sp>
+      <p:cxnSp>
+        <p:nvCxnSpPr>
+          <p:cNvPr id="13" name="Straight Connector 12">
+            <a:extLst>
+              <a:ext uri="{FF2B5EF4-FFF2-40B4-BE49-F238E27FC236}">
+                <a16:creationId xmlns:a16="http://schemas.microsoft.com/office/drawing/2014/main" id="{AEDD6223-7018-132C-0215-5CEDAE45D71E}"/>
+              </a:ext>
+            </a:extLst>
+          </p:cNvPr>
+          <p:cNvCxnSpPr>
+            <a:cxnSpLocks/>
+          </p:cNvCxnSpPr>
+          <p:nvPr/>
+        </p:nvCxnSpPr>
+        <p:spPr>
+          <a:xfrm>
+            <a:off x="8662374" y="3777582"/>
+            <a:ext cx="0" cy="3660950"/>
+          </a:xfrm>
+          <a:prstGeom prst="line">
+            <a:avLst/>
+          </a:prstGeom>
+        </p:spPr>
+        <p:style>
+          <a:lnRef idx="1">
+            <a:schemeClr val="accent1"/>
+          </a:lnRef>
+          <a:fillRef idx="0">
+            <a:schemeClr val="accent1"/>
+          </a:fillRef>
+          <a:effectRef idx="0">
+            <a:schemeClr val="accent1"/>
+          </a:effectRef>
+          <a:fontRef idx="minor">
+            <a:schemeClr val="tx1"/>
+          </a:fontRef>
+        </p:style>
+      </p:cxnSp>
+      <p:cxnSp>
+        <p:nvCxnSpPr>
+          <p:cNvPr id="20" name="Straight Connector 19">
+            <a:extLst>
+              <a:ext uri="{FF2B5EF4-FFF2-40B4-BE49-F238E27FC236}">
+                <a16:creationId xmlns:a16="http://schemas.microsoft.com/office/drawing/2014/main" id="{20DDA672-5FBE-49E1-4339-C38C0F628F39}"/>
+              </a:ext>
+            </a:extLst>
+          </p:cNvPr>
+          <p:cNvCxnSpPr>
+            <a:cxnSpLocks/>
+          </p:cNvCxnSpPr>
+          <p:nvPr/>
+        </p:nvCxnSpPr>
+        <p:spPr>
+          <a:xfrm>
+            <a:off x="8607627" y="3793130"/>
+            <a:ext cx="0" cy="3660950"/>
+          </a:xfrm>
+          <a:prstGeom prst="line">
+            <a:avLst/>
+          </a:prstGeom>
+        </p:spPr>
+        <p:style>
+          <a:lnRef idx="1">
+            <a:schemeClr val="accent1"/>
+          </a:lnRef>
+          <a:fillRef idx="0">
+            <a:schemeClr val="accent1"/>
+          </a:fillRef>
+          <a:effectRef idx="0">
+            <a:schemeClr val="accent1"/>
+          </a:effectRef>
+          <a:fontRef idx="minor">
+            <a:schemeClr val="tx1"/>
+          </a:fontRef>
+        </p:style>
+      </p:cxnSp>
+      <p:sp>
+        <p:nvSpPr>
+          <p:cNvPr id="22" name="TextBox 21">
+            <a:extLst>
+              <a:ext uri="{FF2B5EF4-FFF2-40B4-BE49-F238E27FC236}">
+                <a16:creationId xmlns:a16="http://schemas.microsoft.com/office/drawing/2014/main" id="{B171B19D-1094-8E83-91A6-310B6F4C49B2}"/>
+              </a:ext>
+            </a:extLst>
+          </p:cNvPr>
+          <p:cNvSpPr txBox="1"/>
+          <p:nvPr/>
+        </p:nvSpPr>
+        <p:spPr>
+          <a:xfrm>
+            <a:off x="6729172" y="3670019"/>
+            <a:ext cx="572366" cy="246221"/>
+          </a:xfrm>
+          <a:prstGeom prst="rect">
+            <a:avLst/>
+          </a:prstGeom>
+          <a:noFill/>
+        </p:spPr>
+        <p:txBody>
+          <a:bodyPr wrap="square">
+            <a:spAutoFit/>
+          </a:bodyPr>
+          <a:lstStyle/>
+          <a:p>
+            <a:r>
+              <a:rPr lang="en-US" sz="1000" b="1" noProof="1"/>
+              <a:t>CLIENT</a:t>
+            </a:r>
+            <a:endParaRPr lang="en-US" sz="1000" b="1" dirty="0"/>
+          </a:p>
+        </p:txBody>
+      </p:sp>
+      <p:sp>
+        <p:nvSpPr>
+          <p:cNvPr id="23" name="TextBox 22">
+            <a:extLst>
+              <a:ext uri="{FF2B5EF4-FFF2-40B4-BE49-F238E27FC236}">
+                <a16:creationId xmlns:a16="http://schemas.microsoft.com/office/drawing/2014/main" id="{400136D7-C5AA-7877-0320-1A2EF067C287}"/>
+              </a:ext>
+            </a:extLst>
+          </p:cNvPr>
+          <p:cNvSpPr txBox="1"/>
+          <p:nvPr/>
+        </p:nvSpPr>
+        <p:spPr>
+          <a:xfrm>
+            <a:off x="9281254" y="3639459"/>
+            <a:ext cx="820793" cy="246221"/>
+          </a:xfrm>
+          <a:prstGeom prst="rect">
+            <a:avLst/>
+          </a:prstGeom>
+          <a:noFill/>
+        </p:spPr>
+        <p:txBody>
+          <a:bodyPr wrap="square">
+            <a:spAutoFit/>
+          </a:bodyPr>
+          <a:lstStyle/>
+          <a:p>
+            <a:r>
+              <a:rPr lang="en-US" sz="1000" b="1" noProof="1"/>
+              <a:t>SERVER</a:t>
+            </a:r>
+            <a:endParaRPr lang="en-US" sz="1000" b="1" dirty="0"/>
+          </a:p>
+        </p:txBody>
+      </p:sp>
+      <p:sp>
+        <p:nvSpPr>
+          <p:cNvPr id="26" name="TextBox 25">
+            <a:extLst>
+              <a:ext uri="{FF2B5EF4-FFF2-40B4-BE49-F238E27FC236}">
+                <a16:creationId xmlns:a16="http://schemas.microsoft.com/office/drawing/2014/main" id="{62660ABB-182B-9D0E-3E01-E1CD397DF493}"/>
+              </a:ext>
+            </a:extLst>
+          </p:cNvPr>
+          <p:cNvSpPr txBox="1"/>
+          <p:nvPr/>
+        </p:nvSpPr>
+        <p:spPr>
+          <a:xfrm>
+            <a:off x="6398112" y="4092381"/>
+            <a:ext cx="2017955" cy="400110"/>
+          </a:xfrm>
+          <a:prstGeom prst="rect">
+            <a:avLst/>
+          </a:prstGeom>
+          <a:noFill/>
+        </p:spPr>
+        <p:txBody>
+          <a:bodyPr wrap="square">
+            <a:spAutoFit/>
+          </a:bodyPr>
+          <a:lstStyle/>
+          <a:p>
+            <a:r>
+              <a:rPr lang="en-US" sz="1000" noProof="1">
+                <a:solidFill>
+                  <a:schemeClr val="accent1"/>
+                </a:solidFill>
+              </a:rPr>
+              <a:t>ssh-git-client ...</a:t>
+            </a:r>
+            <a:br>
+              <a:rPr lang="en-US" sz="1000" noProof="1">
+                <a:solidFill>
+                  <a:schemeClr val="accent1"/>
+                </a:solidFill>
+              </a:rPr>
+            </a:br>
+            <a:r>
+              <a:rPr lang="en-US" sz="1000" noProof="1">
+                <a:solidFill>
+                  <a:schemeClr val="accent1"/>
+                </a:solidFill>
+              </a:rPr>
+              <a:t>…difftool –tool pragma-merge ….</a:t>
+            </a:r>
+            <a:endParaRPr lang="en-US" sz="1000" dirty="0"/>
+          </a:p>
+        </p:txBody>
+      </p:sp>
+      <p:sp>
+        <p:nvSpPr>
+          <p:cNvPr id="27" name="TextBox 26">
+            <a:extLst>
+              <a:ext uri="{FF2B5EF4-FFF2-40B4-BE49-F238E27FC236}">
+                <a16:creationId xmlns:a16="http://schemas.microsoft.com/office/drawing/2014/main" id="{5F48E1E5-4708-8811-A2C3-E6832D47D186}"/>
+              </a:ext>
+            </a:extLst>
+          </p:cNvPr>
+          <p:cNvSpPr txBox="1"/>
+          <p:nvPr/>
+        </p:nvSpPr>
+        <p:spPr>
+          <a:xfrm>
+            <a:off x="6316175" y="6954099"/>
+            <a:ext cx="1933523" cy="400110"/>
+          </a:xfrm>
+          <a:prstGeom prst="rect">
+            <a:avLst/>
+          </a:prstGeom>
+          <a:noFill/>
+        </p:spPr>
+        <p:txBody>
+          <a:bodyPr wrap="square">
+            <a:spAutoFit/>
+          </a:bodyPr>
+          <a:lstStyle/>
+          <a:p>
+            <a:r>
+              <a:rPr lang="en-US" sz="1000" noProof="1">
+                <a:solidFill>
+                  <a:schemeClr val="accent1"/>
+                </a:solidFill>
+              </a:rPr>
+              <a:t>User closing pragma-merge , runs</a:t>
+            </a:r>
+          </a:p>
+          <a:p>
+            <a:r>
+              <a:rPr lang="en-US" sz="1000" noProof="1">
+                <a:solidFill>
+                  <a:schemeClr val="accent1"/>
+                </a:solidFill>
+              </a:rPr>
+              <a:t>ssh-close-pragma-merge-ssh</a:t>
+            </a:r>
+            <a:endParaRPr lang="en-US" sz="1000" dirty="0"/>
+          </a:p>
+        </p:txBody>
+      </p:sp>
+      <p:sp>
+        <p:nvSpPr>
+          <p:cNvPr id="28" name="TextBox 27">
+            <a:extLst>
+              <a:ext uri="{FF2B5EF4-FFF2-40B4-BE49-F238E27FC236}">
+                <a16:creationId xmlns:a16="http://schemas.microsoft.com/office/drawing/2014/main" id="{5813F1E9-ED83-A50E-4EC1-55B9E8B4303A}"/>
+              </a:ext>
+            </a:extLst>
+          </p:cNvPr>
+          <p:cNvSpPr txBox="1"/>
+          <p:nvPr/>
+        </p:nvSpPr>
+        <p:spPr>
+          <a:xfrm>
+            <a:off x="6450266" y="4610042"/>
+            <a:ext cx="1933528" cy="246221"/>
+          </a:xfrm>
+          <a:prstGeom prst="rect">
+            <a:avLst/>
+          </a:prstGeom>
+          <a:noFill/>
+        </p:spPr>
+        <p:txBody>
+          <a:bodyPr wrap="square">
+            <a:spAutoFit/>
+          </a:bodyPr>
+          <a:lstStyle/>
+          <a:p>
+            <a:r>
+              <a:rPr lang="en-US" sz="1000" noProof="1">
+                <a:solidFill>
+                  <a:schemeClr val="accent1"/>
+                </a:solidFill>
+              </a:rPr>
+              <a:t>delayed-start-pragma-merge</a:t>
+            </a:r>
+            <a:endParaRPr lang="en-US" sz="1000" dirty="0"/>
+          </a:p>
+        </p:txBody>
+      </p:sp>
+      <p:sp>
+        <p:nvSpPr>
+          <p:cNvPr id="29" name="TextBox 28">
+            <a:extLst>
+              <a:ext uri="{FF2B5EF4-FFF2-40B4-BE49-F238E27FC236}">
+                <a16:creationId xmlns:a16="http://schemas.microsoft.com/office/drawing/2014/main" id="{C461B8D8-3994-94CC-FC6D-C267418FEE83}"/>
+              </a:ext>
+            </a:extLst>
+          </p:cNvPr>
+          <p:cNvSpPr txBox="1"/>
+          <p:nvPr/>
+        </p:nvSpPr>
+        <p:spPr>
+          <a:xfrm>
+            <a:off x="6520892" y="5394482"/>
+            <a:ext cx="1527306" cy="246221"/>
+          </a:xfrm>
+          <a:prstGeom prst="rect">
+            <a:avLst/>
+          </a:prstGeom>
+          <a:noFill/>
+        </p:spPr>
+        <p:txBody>
+          <a:bodyPr wrap="square">
+            <a:spAutoFit/>
+          </a:bodyPr>
+          <a:lstStyle/>
+          <a:p>
+            <a:r>
+              <a:rPr lang="en-US" sz="1000" noProof="1">
+                <a:solidFill>
+                  <a:schemeClr val="accent1"/>
+                </a:solidFill>
+              </a:rPr>
+              <a:t>ssh-pragma-merge-files</a:t>
+            </a:r>
+            <a:endParaRPr lang="en-US" sz="1000" dirty="0"/>
+          </a:p>
+        </p:txBody>
+      </p:sp>
+      <p:sp>
+        <p:nvSpPr>
+          <p:cNvPr id="32" name="TextBox 31">
+            <a:extLst>
+              <a:ext uri="{FF2B5EF4-FFF2-40B4-BE49-F238E27FC236}">
+                <a16:creationId xmlns:a16="http://schemas.microsoft.com/office/drawing/2014/main" id="{A04ED13C-32DC-0FB1-B3B7-5BC6F4EE854C}"/>
+              </a:ext>
+            </a:extLst>
+          </p:cNvPr>
+          <p:cNvSpPr txBox="1"/>
+          <p:nvPr/>
+        </p:nvSpPr>
+        <p:spPr>
+          <a:xfrm>
+            <a:off x="8730617" y="4996254"/>
+            <a:ext cx="1007468" cy="246221"/>
+          </a:xfrm>
+          <a:prstGeom prst="rect">
+            <a:avLst/>
+          </a:prstGeom>
+          <a:noFill/>
+        </p:spPr>
+        <p:txBody>
+          <a:bodyPr wrap="square">
+            <a:spAutoFit/>
+          </a:bodyPr>
+          <a:lstStyle/>
+          <a:p>
+            <a:r>
+              <a:rPr lang="en-US" sz="1000" noProof="1">
+                <a:solidFill>
+                  <a:schemeClr val="accent1"/>
+                </a:solidFill>
+              </a:rPr>
               <a:t>Pragma-merge</a:t>
             </a:r>
+            <a:endParaRPr lang="en-US" sz="1000" dirty="0"/>
+          </a:p>
+        </p:txBody>
+      </p:sp>
+      <p:sp>
+        <p:nvSpPr>
+          <p:cNvPr id="37" name="TextBox 36">
+            <a:extLst>
+              <a:ext uri="{FF2B5EF4-FFF2-40B4-BE49-F238E27FC236}">
+                <a16:creationId xmlns:a16="http://schemas.microsoft.com/office/drawing/2014/main" id="{03EB1486-6DBD-0ACE-D455-C6B6EFA9C921}"/>
+              </a:ext>
+            </a:extLst>
+          </p:cNvPr>
+          <p:cNvSpPr txBox="1"/>
+          <p:nvPr/>
+        </p:nvSpPr>
+        <p:spPr>
+          <a:xfrm>
+            <a:off x="9063029" y="4478912"/>
+            <a:ext cx="1348913" cy="400110"/>
+          </a:xfrm>
+          <a:prstGeom prst="rect">
+            <a:avLst/>
+          </a:prstGeom>
+          <a:noFill/>
+        </p:spPr>
+        <p:txBody>
+          <a:bodyPr wrap="square">
+            <a:spAutoFit/>
+          </a:bodyPr>
+          <a:lstStyle/>
+          <a:p>
+            <a:r>
+              <a:rPr lang="en-US" sz="1000" noProof="1"/>
+              <a:t>$BASE, $LOCAL, $REMOTE, $MERGED</a:t>
+            </a:r>
+            <a:endParaRPr lang="en-US" sz="1000" dirty="0"/>
+          </a:p>
+        </p:txBody>
+      </p:sp>
+      <p:sp>
+        <p:nvSpPr>
+          <p:cNvPr id="41" name="TextBox 40">
+            <a:extLst>
+              <a:ext uri="{FF2B5EF4-FFF2-40B4-BE49-F238E27FC236}">
+                <a16:creationId xmlns:a16="http://schemas.microsoft.com/office/drawing/2014/main" id="{7B632211-FD9F-9528-0621-7867C8F1306F}"/>
+              </a:ext>
+            </a:extLst>
+          </p:cNvPr>
+          <p:cNvSpPr txBox="1"/>
+          <p:nvPr/>
+        </p:nvSpPr>
+        <p:spPr>
+          <a:xfrm>
+            <a:off x="6483101" y="6442409"/>
+            <a:ext cx="1007468" cy="246221"/>
+          </a:xfrm>
+          <a:prstGeom prst="rect">
+            <a:avLst/>
+          </a:prstGeom>
+          <a:noFill/>
+        </p:spPr>
+        <p:txBody>
+          <a:bodyPr wrap="square">
+            <a:spAutoFit/>
+          </a:bodyPr>
+          <a:lstStyle/>
+          <a:p>
+            <a:r>
+              <a:rPr lang="en-US" sz="1000" noProof="1">
+                <a:solidFill>
+                  <a:schemeClr val="accent1"/>
+                </a:solidFill>
+              </a:rPr>
+              <a:t>pragma-merge</a:t>
+            </a:r>
+            <a:endParaRPr lang="en-US" sz="1000" dirty="0"/>
+          </a:p>
+        </p:txBody>
+      </p:sp>
+      <p:cxnSp>
+        <p:nvCxnSpPr>
+          <p:cNvPr id="42" name="Straight Arrow Connector 41">
+            <a:extLst>
+              <a:ext uri="{FF2B5EF4-FFF2-40B4-BE49-F238E27FC236}">
+                <a16:creationId xmlns:a16="http://schemas.microsoft.com/office/drawing/2014/main" id="{FBE719B7-B585-1413-3EBC-825AA7D8846B}"/>
+              </a:ext>
+            </a:extLst>
+          </p:cNvPr>
+          <p:cNvCxnSpPr>
+            <a:cxnSpLocks/>
+          </p:cNvCxnSpPr>
+          <p:nvPr/>
+        </p:nvCxnSpPr>
+        <p:spPr>
+          <a:xfrm>
+            <a:off x="6818173" y="4946241"/>
+            <a:ext cx="0" cy="493894"/>
+          </a:xfrm>
+          <a:prstGeom prst="straightConnector1">
+            <a:avLst/>
+          </a:prstGeom>
+          <a:ln>
+            <a:tailEnd type="triangle"/>
+          </a:ln>
+        </p:spPr>
+        <p:style>
+          <a:lnRef idx="1">
+            <a:schemeClr val="accent1"/>
+          </a:lnRef>
+          <a:fillRef idx="0">
+            <a:schemeClr val="accent1"/>
+          </a:fillRef>
+          <a:effectRef idx="0">
+            <a:schemeClr val="accent1"/>
+          </a:effectRef>
+          <a:fontRef idx="minor">
+            <a:schemeClr val="tx1"/>
+          </a:fontRef>
+        </p:style>
+      </p:cxnSp>
+      <p:sp>
+        <p:nvSpPr>
+          <p:cNvPr id="46" name="TextBox 45">
+            <a:extLst>
+              <a:ext uri="{FF2B5EF4-FFF2-40B4-BE49-F238E27FC236}">
+                <a16:creationId xmlns:a16="http://schemas.microsoft.com/office/drawing/2014/main" id="{077A5128-E8B7-5834-2321-F1AF04ED1419}"/>
+              </a:ext>
+            </a:extLst>
+          </p:cNvPr>
+          <p:cNvSpPr txBox="1"/>
+          <p:nvPr/>
+        </p:nvSpPr>
+        <p:spPr>
+          <a:xfrm>
+            <a:off x="9139275" y="5193914"/>
+            <a:ext cx="2317325" cy="246221"/>
+          </a:xfrm>
+          <a:prstGeom prst="rect">
+            <a:avLst/>
+          </a:prstGeom>
+          <a:noFill/>
+        </p:spPr>
+        <p:txBody>
+          <a:bodyPr wrap="square">
+            <a:spAutoFit/>
+          </a:bodyPr>
+          <a:lstStyle/>
+          <a:p>
+            <a:r>
+              <a:rPr lang="en-US" sz="1000" noProof="1"/>
+              <a:t>$TMP/pragma-merge-running-ssh</a:t>
+            </a:r>
+            <a:endParaRPr lang="en-US" sz="1000" dirty="0"/>
+          </a:p>
+        </p:txBody>
+      </p:sp>
+      <p:sp>
+        <p:nvSpPr>
+          <p:cNvPr id="47" name="TextBox 46">
+            <a:extLst>
+              <a:ext uri="{FF2B5EF4-FFF2-40B4-BE49-F238E27FC236}">
+                <a16:creationId xmlns:a16="http://schemas.microsoft.com/office/drawing/2014/main" id="{5073D0FC-C31D-2BD7-5554-ACD7B5EE87D9}"/>
+              </a:ext>
+            </a:extLst>
+          </p:cNvPr>
+          <p:cNvSpPr txBox="1"/>
+          <p:nvPr/>
+        </p:nvSpPr>
+        <p:spPr>
+          <a:xfrm>
+            <a:off x="9139275" y="5408002"/>
+            <a:ext cx="2317325" cy="400110"/>
+          </a:xfrm>
+          <a:prstGeom prst="rect">
+            <a:avLst/>
+          </a:prstGeom>
+          <a:noFill/>
+        </p:spPr>
+        <p:txBody>
+          <a:bodyPr wrap="square">
+            <a:spAutoFit/>
+          </a:bodyPr>
+          <a:lstStyle/>
+          <a:p>
+            <a:r>
+              <a:rPr lang="en-US" sz="1000" noProof="1"/>
+              <a:t>$FILE_LIST_ON_SSH</a:t>
+            </a:r>
+          </a:p>
+          <a:p>
+            <a:r>
+              <a:rPr lang="en-US" sz="1000" noProof="1"/>
+              <a:t>(list of $BASE, …, $MERGED)</a:t>
+            </a:r>
+            <a:endParaRPr lang="en-US" sz="1000" dirty="0"/>
+          </a:p>
+        </p:txBody>
+      </p:sp>
+      <p:cxnSp>
+        <p:nvCxnSpPr>
+          <p:cNvPr id="52" name="Straight Arrow Connector 51">
+            <a:extLst>
+              <a:ext uri="{FF2B5EF4-FFF2-40B4-BE49-F238E27FC236}">
+                <a16:creationId xmlns:a16="http://schemas.microsoft.com/office/drawing/2014/main" id="{6A72B33F-8720-5478-7BE4-58A901E1E409}"/>
+              </a:ext>
+            </a:extLst>
+          </p:cNvPr>
+          <p:cNvCxnSpPr>
+            <a:cxnSpLocks/>
+          </p:cNvCxnSpPr>
+          <p:nvPr/>
+        </p:nvCxnSpPr>
+        <p:spPr>
+          <a:xfrm>
+            <a:off x="6729172" y="5673826"/>
+            <a:ext cx="0" cy="790035"/>
+          </a:xfrm>
+          <a:prstGeom prst="straightConnector1">
+            <a:avLst/>
+          </a:prstGeom>
+          <a:ln>
+            <a:tailEnd type="triangle"/>
+          </a:ln>
+        </p:spPr>
+        <p:style>
+          <a:lnRef idx="1">
+            <a:schemeClr val="accent1"/>
+          </a:lnRef>
+          <a:fillRef idx="0">
+            <a:schemeClr val="accent1"/>
+          </a:fillRef>
+          <a:effectRef idx="0">
+            <a:schemeClr val="accent1"/>
+          </a:effectRef>
+          <a:fontRef idx="minor">
+            <a:schemeClr val="tx1"/>
+          </a:fontRef>
+        </p:style>
+      </p:cxnSp>
+      <p:sp>
+        <p:nvSpPr>
+          <p:cNvPr id="55" name="TextBox 54">
+            <a:extLst>
+              <a:ext uri="{FF2B5EF4-FFF2-40B4-BE49-F238E27FC236}">
+                <a16:creationId xmlns:a16="http://schemas.microsoft.com/office/drawing/2014/main" id="{01C0E38B-FEC3-0661-0883-6B52B7D25C76}"/>
+              </a:ext>
+            </a:extLst>
+          </p:cNvPr>
+          <p:cNvSpPr txBox="1"/>
+          <p:nvPr/>
+        </p:nvSpPr>
+        <p:spPr>
+          <a:xfrm>
+            <a:off x="6742370" y="5613252"/>
+            <a:ext cx="2145471" cy="400110"/>
+          </a:xfrm>
+          <a:prstGeom prst="rect">
+            <a:avLst/>
+          </a:prstGeom>
+          <a:noFill/>
+        </p:spPr>
+        <p:txBody>
+          <a:bodyPr wrap="square">
+            <a:spAutoFit/>
+          </a:bodyPr>
+          <a:lstStyle/>
+          <a:p>
+            <a:r>
+              <a:rPr lang="en-US" sz="1000" noProof="1"/>
+              <a:t>Download $FILE_LIST_ON_SSH to</a:t>
+            </a:r>
+            <a:br>
+              <a:rPr lang="en-US" sz="1000" noProof="1"/>
+            </a:br>
+            <a:r>
+              <a:rPr lang="en-US" sz="1000" noProof="1"/>
+              <a:t>$TEMP_FILE_LOCATION</a:t>
+            </a:r>
+            <a:endParaRPr lang="en-US" sz="1000" dirty="0"/>
+          </a:p>
+        </p:txBody>
+      </p:sp>
+      <p:sp>
+        <p:nvSpPr>
+          <p:cNvPr id="59" name="TextBox 58">
+            <a:extLst>
+              <a:ext uri="{FF2B5EF4-FFF2-40B4-BE49-F238E27FC236}">
+                <a16:creationId xmlns:a16="http://schemas.microsoft.com/office/drawing/2014/main" id="{6BD01BB4-853E-EDB9-0FB1-56005E292D73}"/>
+              </a:ext>
+            </a:extLst>
+          </p:cNvPr>
+          <p:cNvSpPr txBox="1"/>
+          <p:nvPr/>
+        </p:nvSpPr>
+        <p:spPr>
+          <a:xfrm>
+            <a:off x="8752878" y="4083946"/>
+            <a:ext cx="2370855" cy="400110"/>
+          </a:xfrm>
+          <a:prstGeom prst="rect">
+            <a:avLst/>
+          </a:prstGeom>
+          <a:noFill/>
+        </p:spPr>
+        <p:txBody>
+          <a:bodyPr wrap="square">
+            <a:spAutoFit/>
+          </a:bodyPr>
+          <a:lstStyle/>
+          <a:p>
+            <a:r>
+              <a:rPr lang="en-US" sz="1000" noProof="1">
+                <a:solidFill>
+                  <a:schemeClr val="accent1"/>
+                </a:solidFill>
+              </a:rPr>
+              <a:t>git difftool –tool pragma-merge ….</a:t>
+            </a:r>
+            <a:br>
+              <a:rPr lang="en-US" sz="1000" noProof="1">
+                <a:solidFill>
+                  <a:schemeClr val="accent1"/>
+                </a:solidFill>
+              </a:rPr>
+            </a:br>
+            <a:r>
+              <a:rPr lang="en-US" sz="1000" noProof="1">
+                <a:solidFill>
+                  <a:schemeClr val="accent1"/>
+                </a:solidFill>
+              </a:rPr>
+              <a:t>              Generates temp-files:</a:t>
+            </a:r>
+            <a:endParaRPr lang="en-US" sz="1000" dirty="0"/>
+          </a:p>
+        </p:txBody>
+      </p:sp>
+      <p:cxnSp>
+        <p:nvCxnSpPr>
+          <p:cNvPr id="62" name="Straight Arrow Connector 61">
+            <a:extLst>
+              <a:ext uri="{FF2B5EF4-FFF2-40B4-BE49-F238E27FC236}">
+                <a16:creationId xmlns:a16="http://schemas.microsoft.com/office/drawing/2014/main" id="{923F2FBD-ED69-F293-9816-58ECA6943E7B}"/>
+              </a:ext>
+            </a:extLst>
+          </p:cNvPr>
+          <p:cNvCxnSpPr>
+            <a:cxnSpLocks/>
+          </p:cNvCxnSpPr>
+          <p:nvPr/>
+        </p:nvCxnSpPr>
+        <p:spPr>
+          <a:xfrm>
+            <a:off x="8972052" y="4318770"/>
+            <a:ext cx="0" cy="726962"/>
+          </a:xfrm>
+          <a:prstGeom prst="straightConnector1">
+            <a:avLst/>
+          </a:prstGeom>
+          <a:ln>
+            <a:tailEnd type="triangle"/>
+          </a:ln>
+        </p:spPr>
+        <p:style>
+          <a:lnRef idx="1">
+            <a:schemeClr val="accent1"/>
+          </a:lnRef>
+          <a:fillRef idx="0">
+            <a:schemeClr val="accent1"/>
+          </a:fillRef>
+          <a:effectRef idx="0">
+            <a:schemeClr val="accent1"/>
+          </a:effectRef>
+          <a:fontRef idx="minor">
+            <a:schemeClr val="tx1"/>
+          </a:fontRef>
+        </p:style>
+      </p:cxnSp>
+      <p:cxnSp>
+        <p:nvCxnSpPr>
+          <p:cNvPr id="66" name="Elbow Connector 65">
+            <a:extLst>
+              <a:ext uri="{FF2B5EF4-FFF2-40B4-BE49-F238E27FC236}">
+                <a16:creationId xmlns:a16="http://schemas.microsoft.com/office/drawing/2014/main" id="{5CCCFA7F-13DB-D954-5F20-89FE38ABC7AA}"/>
+              </a:ext>
+            </a:extLst>
+          </p:cNvPr>
+          <p:cNvCxnSpPr>
+            <a:cxnSpLocks/>
+          </p:cNvCxnSpPr>
+          <p:nvPr/>
+        </p:nvCxnSpPr>
+        <p:spPr>
+          <a:xfrm rot="10800000" flipV="1">
+            <a:off x="8136388" y="4647961"/>
+            <a:ext cx="2279630" cy="1234283"/>
+          </a:xfrm>
+          <a:prstGeom prst="bentConnector3">
+            <a:avLst>
+              <a:gd name="adj1" fmla="val -29674"/>
+            </a:avLst>
+          </a:prstGeom>
+          <a:ln>
+            <a:solidFill>
+              <a:schemeClr val="accent2"/>
+            </a:solidFill>
+            <a:tailEnd type="triangle"/>
+          </a:ln>
+        </p:spPr>
+        <p:style>
+          <a:lnRef idx="1">
+            <a:schemeClr val="accent1"/>
+          </a:lnRef>
+          <a:fillRef idx="0">
+            <a:schemeClr val="accent1"/>
+          </a:fillRef>
+          <a:effectRef idx="0">
+            <a:schemeClr val="accent1"/>
+          </a:effectRef>
+          <a:fontRef idx="minor">
+            <a:schemeClr val="tx1"/>
+          </a:fontRef>
+        </p:style>
+      </p:cxnSp>
+      <p:cxnSp>
+        <p:nvCxnSpPr>
+          <p:cNvPr id="75" name="Straight Arrow Connector 74">
+            <a:extLst>
+              <a:ext uri="{FF2B5EF4-FFF2-40B4-BE49-F238E27FC236}">
+                <a16:creationId xmlns:a16="http://schemas.microsoft.com/office/drawing/2014/main" id="{638B10A2-02E3-7441-F8D6-0840D96F9BF6}"/>
+              </a:ext>
+            </a:extLst>
+          </p:cNvPr>
+          <p:cNvCxnSpPr>
+            <a:cxnSpLocks/>
+          </p:cNvCxnSpPr>
+          <p:nvPr/>
+        </p:nvCxnSpPr>
+        <p:spPr>
+          <a:xfrm flipH="1">
+            <a:off x="7867597" y="5510256"/>
+            <a:ext cx="1271678" cy="15691"/>
+          </a:xfrm>
+          <a:prstGeom prst="straightConnector1">
+            <a:avLst/>
+          </a:prstGeom>
+          <a:ln>
+            <a:solidFill>
+              <a:schemeClr val="accent2"/>
+            </a:solidFill>
+            <a:tailEnd type="triangle"/>
+          </a:ln>
+        </p:spPr>
+        <p:style>
+          <a:lnRef idx="1">
+            <a:schemeClr val="accent1"/>
+          </a:lnRef>
+          <a:fillRef idx="0">
+            <a:schemeClr val="accent1"/>
+          </a:fillRef>
+          <a:effectRef idx="0">
+            <a:schemeClr val="accent1"/>
+          </a:effectRef>
+          <a:fontRef idx="minor">
+            <a:schemeClr val="tx1"/>
+          </a:fontRef>
+        </p:style>
+      </p:cxnSp>
+      <p:sp>
+        <p:nvSpPr>
+          <p:cNvPr id="82" name="TextBox 81">
+            <a:extLst>
+              <a:ext uri="{FF2B5EF4-FFF2-40B4-BE49-F238E27FC236}">
+                <a16:creationId xmlns:a16="http://schemas.microsoft.com/office/drawing/2014/main" id="{4A781A0F-F4DC-7C9E-1FB2-7158F21FDFFC}"/>
+              </a:ext>
+            </a:extLst>
+          </p:cNvPr>
+          <p:cNvSpPr txBox="1"/>
+          <p:nvPr/>
+        </p:nvSpPr>
+        <p:spPr>
+          <a:xfrm>
+            <a:off x="6748642" y="6601328"/>
+            <a:ext cx="1762477" cy="246221"/>
+          </a:xfrm>
+          <a:prstGeom prst="rect">
+            <a:avLst/>
+          </a:prstGeom>
+          <a:noFill/>
+        </p:spPr>
+        <p:txBody>
+          <a:bodyPr wrap="square">
+            <a:spAutoFit/>
+          </a:bodyPr>
+          <a:lstStyle/>
+          <a:p>
+            <a:r>
+              <a:rPr lang="en-US" sz="1000" noProof="1"/>
+              <a:t>$ABSOLUTE_FILE_LOCATIONS</a:t>
+            </a:r>
+          </a:p>
+        </p:txBody>
+      </p:sp>
+      <p:sp>
+        <p:nvSpPr>
+          <p:cNvPr id="85" name="TextBox 84">
+            <a:extLst>
+              <a:ext uri="{FF2B5EF4-FFF2-40B4-BE49-F238E27FC236}">
+                <a16:creationId xmlns:a16="http://schemas.microsoft.com/office/drawing/2014/main" id="{6A618C09-2663-5F67-3D91-7E50361E0D84}"/>
+              </a:ext>
+            </a:extLst>
+          </p:cNvPr>
+          <p:cNvSpPr txBox="1"/>
+          <p:nvPr/>
+        </p:nvSpPr>
+        <p:spPr>
+          <a:xfrm>
+            <a:off x="8937565" y="7133618"/>
+            <a:ext cx="2317325" cy="707886"/>
+          </a:xfrm>
+          <a:prstGeom prst="rect">
+            <a:avLst/>
+          </a:prstGeom>
+          <a:noFill/>
+        </p:spPr>
+        <p:txBody>
+          <a:bodyPr wrap="square">
+            <a:spAutoFit/>
+          </a:bodyPr>
+          <a:lstStyle/>
+          <a:p>
+            <a:r>
+              <a:rPr lang="en-US" sz="1000" noProof="1"/>
+              <a:t>$TMP/pragma-merge-running-ssh</a:t>
+            </a:r>
+          </a:p>
+          <a:p>
+            <a:r>
+              <a:rPr lang="en-US" sz="1000" noProof="1"/>
+              <a:t>(remove signaling file, </a:t>
+            </a:r>
+            <a:br>
+              <a:rPr lang="en-US" sz="1000" noProof="1"/>
+            </a:br>
+            <a:r>
+              <a:rPr lang="en-US" sz="1000" noProof="1"/>
+              <a:t>which close git difftool,</a:t>
+            </a:r>
+            <a:br>
+              <a:rPr lang="en-US" sz="1000" noProof="1"/>
+            </a:br>
+            <a:r>
+              <a:rPr lang="en-US" sz="1000" noProof="1"/>
+              <a:t>which removes temp-files)</a:t>
+            </a:r>
+            <a:endParaRPr lang="en-US" sz="1000" dirty="0"/>
+          </a:p>
+        </p:txBody>
+      </p:sp>
+      <p:grpSp>
+        <p:nvGrpSpPr>
+          <p:cNvPr id="109" name="Group 108">
+            <a:extLst>
+              <a:ext uri="{FF2B5EF4-FFF2-40B4-BE49-F238E27FC236}">
+                <a16:creationId xmlns:a16="http://schemas.microsoft.com/office/drawing/2014/main" id="{F0CD306D-9270-4B65-82C0-765ABFC09271}"/>
+              </a:ext>
+            </a:extLst>
+          </p:cNvPr>
+          <p:cNvGrpSpPr/>
+          <p:nvPr/>
+        </p:nvGrpSpPr>
+        <p:grpSpPr>
+          <a:xfrm>
+            <a:off x="9029193" y="7201954"/>
+            <a:ext cx="1796511" cy="122851"/>
+            <a:chOff x="6875510" y="8853970"/>
+            <a:chExt cx="1796511" cy="122851"/>
+          </a:xfrm>
+        </p:grpSpPr>
+        <p:cxnSp>
+          <p:nvCxnSpPr>
+            <p:cNvPr id="87" name="Straight Connector 86">
+              <a:extLst>
+                <a:ext uri="{FF2B5EF4-FFF2-40B4-BE49-F238E27FC236}">
+                  <a16:creationId xmlns:a16="http://schemas.microsoft.com/office/drawing/2014/main" id="{A24F06F0-49FF-E61B-3D5F-2AC786B3394B}"/>
+                </a:ext>
+              </a:extLst>
+            </p:cNvPr>
+            <p:cNvCxnSpPr>
+              <a:cxnSpLocks/>
+            </p:cNvCxnSpPr>
+            <p:nvPr/>
+          </p:nvCxnSpPr>
+          <p:spPr>
+            <a:xfrm>
+              <a:off x="6875510" y="8853970"/>
+              <a:ext cx="1796511" cy="122851"/>
+            </a:xfrm>
+            <a:prstGeom prst="line">
+              <a:avLst/>
+            </a:prstGeom>
+            <a:ln>
+              <a:solidFill>
+                <a:srgbClr val="FF0000"/>
+              </a:solidFill>
+            </a:ln>
+          </p:spPr>
+          <p:style>
+            <a:lnRef idx="1">
+              <a:schemeClr val="accent2"/>
+            </a:lnRef>
+            <a:fillRef idx="0">
+              <a:schemeClr val="accent2"/>
+            </a:fillRef>
+            <a:effectRef idx="0">
+              <a:schemeClr val="accent2"/>
+            </a:effectRef>
+            <a:fontRef idx="minor">
+              <a:schemeClr val="tx1"/>
+            </a:fontRef>
+          </p:style>
+        </p:cxnSp>
+        <p:cxnSp>
+          <p:nvCxnSpPr>
+            <p:cNvPr id="88" name="Straight Connector 87">
+              <a:extLst>
+                <a:ext uri="{FF2B5EF4-FFF2-40B4-BE49-F238E27FC236}">
+                  <a16:creationId xmlns:a16="http://schemas.microsoft.com/office/drawing/2014/main" id="{B4E50141-491C-C131-7192-8561BF572BE0}"/>
+                </a:ext>
+              </a:extLst>
+            </p:cNvPr>
+            <p:cNvCxnSpPr>
+              <a:cxnSpLocks/>
+            </p:cNvCxnSpPr>
+            <p:nvPr/>
+          </p:nvCxnSpPr>
+          <p:spPr>
+            <a:xfrm flipV="1">
+              <a:off x="6890075" y="8853970"/>
+              <a:ext cx="1696517" cy="122851"/>
+            </a:xfrm>
+            <a:prstGeom prst="line">
+              <a:avLst/>
+            </a:prstGeom>
+            <a:ln>
+              <a:solidFill>
+                <a:srgbClr val="FF0000"/>
+              </a:solidFill>
+            </a:ln>
+          </p:spPr>
+          <p:style>
+            <a:lnRef idx="1">
+              <a:schemeClr val="accent2"/>
+            </a:lnRef>
+            <a:fillRef idx="0">
+              <a:schemeClr val="accent2"/>
+            </a:fillRef>
+            <a:effectRef idx="0">
+              <a:schemeClr val="accent2"/>
+            </a:effectRef>
+            <a:fontRef idx="minor">
+              <a:schemeClr val="tx1"/>
+            </a:fontRef>
+          </p:style>
+        </p:cxnSp>
+      </p:grpSp>
+      <p:cxnSp>
+        <p:nvCxnSpPr>
+          <p:cNvPr id="90" name="Straight Arrow Connector 89">
+            <a:extLst>
+              <a:ext uri="{FF2B5EF4-FFF2-40B4-BE49-F238E27FC236}">
+                <a16:creationId xmlns:a16="http://schemas.microsoft.com/office/drawing/2014/main" id="{9CA630EE-0C17-1BD7-CA20-1BFFF039B2D7}"/>
+              </a:ext>
+            </a:extLst>
+          </p:cNvPr>
+          <p:cNvCxnSpPr>
+            <a:cxnSpLocks/>
+          </p:cNvCxnSpPr>
+          <p:nvPr/>
+        </p:nvCxnSpPr>
+        <p:spPr>
+          <a:xfrm flipV="1">
+            <a:off x="7998776" y="7248660"/>
+            <a:ext cx="912866" cy="8146"/>
+          </a:xfrm>
+          <a:prstGeom prst="straightConnector1">
+            <a:avLst/>
+          </a:prstGeom>
+          <a:ln>
+            <a:solidFill>
+              <a:schemeClr val="accent2"/>
+            </a:solidFill>
+            <a:tailEnd type="triangle"/>
+          </a:ln>
+        </p:spPr>
+        <p:style>
+          <a:lnRef idx="1">
+            <a:schemeClr val="accent1"/>
+          </a:lnRef>
+          <a:fillRef idx="0">
+            <a:schemeClr val="accent1"/>
+          </a:fillRef>
+          <a:effectRef idx="0">
+            <a:schemeClr val="accent1"/>
+          </a:effectRef>
+          <a:fontRef idx="minor">
+            <a:schemeClr val="tx1"/>
+          </a:fontRef>
+        </p:style>
+      </p:cxnSp>
+      <p:sp>
+        <p:nvSpPr>
+          <p:cNvPr id="92" name="TextBox 91">
+            <a:extLst>
+              <a:ext uri="{FF2B5EF4-FFF2-40B4-BE49-F238E27FC236}">
+                <a16:creationId xmlns:a16="http://schemas.microsoft.com/office/drawing/2014/main" id="{258CDA59-4306-7694-39FE-F77F19A86D31}"/>
+              </a:ext>
+            </a:extLst>
+          </p:cNvPr>
+          <p:cNvSpPr txBox="1"/>
+          <p:nvPr/>
+        </p:nvSpPr>
+        <p:spPr>
+          <a:xfrm>
+            <a:off x="6742370" y="5990542"/>
+            <a:ext cx="1906068" cy="400110"/>
+          </a:xfrm>
+          <a:prstGeom prst="rect">
+            <a:avLst/>
+          </a:prstGeom>
+          <a:noFill/>
+        </p:spPr>
+        <p:txBody>
+          <a:bodyPr wrap="square">
+            <a:spAutoFit/>
+          </a:bodyPr>
+          <a:lstStyle/>
+          <a:p>
+            <a:r>
+              <a:rPr lang="en-US" sz="1000" noProof="1"/>
+              <a:t>Make absolute paths of these in </a:t>
+            </a:r>
+            <a:br>
+              <a:rPr lang="en-US" sz="1000" noProof="1"/>
+            </a:br>
+            <a:r>
+              <a:rPr lang="en-US" sz="1000" noProof="1"/>
+              <a:t>$ABSOLUTE_FILE_LOCATIONS</a:t>
+            </a:r>
+          </a:p>
+        </p:txBody>
+      </p:sp>
+      <p:cxnSp>
+        <p:nvCxnSpPr>
+          <p:cNvPr id="110" name="Straight Arrow Connector 109">
+            <a:extLst>
+              <a:ext uri="{FF2B5EF4-FFF2-40B4-BE49-F238E27FC236}">
+                <a16:creationId xmlns:a16="http://schemas.microsoft.com/office/drawing/2014/main" id="{ED05C266-01F6-F76D-D8F4-B73A83F678E7}"/>
+              </a:ext>
+            </a:extLst>
+          </p:cNvPr>
+          <p:cNvCxnSpPr>
+            <a:cxnSpLocks/>
+          </p:cNvCxnSpPr>
+          <p:nvPr/>
+        </p:nvCxnSpPr>
+        <p:spPr>
+          <a:xfrm flipV="1">
+            <a:off x="8136388" y="4220299"/>
+            <a:ext cx="635279" cy="98471"/>
+          </a:xfrm>
+          <a:prstGeom prst="straightConnector1">
+            <a:avLst/>
+          </a:prstGeom>
+          <a:ln>
+            <a:tailEnd type="triangle"/>
+          </a:ln>
+        </p:spPr>
+        <p:style>
+          <a:lnRef idx="1">
+            <a:schemeClr val="accent1"/>
+          </a:lnRef>
+          <a:fillRef idx="0">
+            <a:schemeClr val="accent1"/>
+          </a:fillRef>
+          <a:effectRef idx="0">
+            <a:schemeClr val="accent1"/>
+          </a:effectRef>
+          <a:fontRef idx="minor">
+            <a:schemeClr val="tx1"/>
+          </a:fontRef>
+        </p:style>
+      </p:cxnSp>
+      <p:cxnSp>
+        <p:nvCxnSpPr>
+          <p:cNvPr id="116" name="Straight Arrow Connector 115">
+            <a:extLst>
+              <a:ext uri="{FF2B5EF4-FFF2-40B4-BE49-F238E27FC236}">
+                <a16:creationId xmlns:a16="http://schemas.microsoft.com/office/drawing/2014/main" id="{2C06213A-570A-2B83-9122-ABF77924BFCA}"/>
+              </a:ext>
+            </a:extLst>
+          </p:cNvPr>
+          <p:cNvCxnSpPr>
+            <a:cxnSpLocks/>
+          </p:cNvCxnSpPr>
+          <p:nvPr/>
+        </p:nvCxnSpPr>
+        <p:spPr>
+          <a:xfrm>
+            <a:off x="6470853" y="7747611"/>
+            <a:ext cx="247820" cy="0"/>
+          </a:xfrm>
+          <a:prstGeom prst="straightConnector1">
+            <a:avLst/>
+          </a:prstGeom>
+          <a:ln>
+            <a:tailEnd type="triangle"/>
+          </a:ln>
+        </p:spPr>
+        <p:style>
+          <a:lnRef idx="1">
+            <a:schemeClr val="accent1"/>
+          </a:lnRef>
+          <a:fillRef idx="0">
+            <a:schemeClr val="accent1"/>
+          </a:fillRef>
+          <a:effectRef idx="0">
+            <a:schemeClr val="accent1"/>
+          </a:effectRef>
+          <a:fontRef idx="minor">
+            <a:schemeClr val="tx1"/>
+          </a:fontRef>
+        </p:style>
+      </p:cxnSp>
+      <p:cxnSp>
+        <p:nvCxnSpPr>
+          <p:cNvPr id="118" name="Straight Arrow Connector 117">
+            <a:extLst>
+              <a:ext uri="{FF2B5EF4-FFF2-40B4-BE49-F238E27FC236}">
+                <a16:creationId xmlns:a16="http://schemas.microsoft.com/office/drawing/2014/main" id="{84AE73E9-94DA-8070-100A-50CBB784CFA3}"/>
+              </a:ext>
+            </a:extLst>
+          </p:cNvPr>
+          <p:cNvCxnSpPr>
+            <a:cxnSpLocks/>
+          </p:cNvCxnSpPr>
+          <p:nvPr/>
+        </p:nvCxnSpPr>
+        <p:spPr>
+          <a:xfrm>
+            <a:off x="6483578" y="7900262"/>
+            <a:ext cx="252358" cy="0"/>
+          </a:xfrm>
+          <a:prstGeom prst="straightConnector1">
+            <a:avLst/>
+          </a:prstGeom>
+          <a:ln>
+            <a:solidFill>
+              <a:schemeClr val="accent2"/>
+            </a:solidFill>
+            <a:tailEnd type="triangle"/>
+          </a:ln>
+        </p:spPr>
+        <p:style>
+          <a:lnRef idx="1">
+            <a:schemeClr val="accent1"/>
+          </a:lnRef>
+          <a:fillRef idx="0">
+            <a:schemeClr val="accent1"/>
+          </a:fillRef>
+          <a:effectRef idx="0">
+            <a:schemeClr val="accent1"/>
+          </a:effectRef>
+          <a:fontRef idx="minor">
+            <a:schemeClr val="tx1"/>
+          </a:fontRef>
+        </p:style>
+      </p:cxnSp>
+      <p:sp>
+        <p:nvSpPr>
+          <p:cNvPr id="121" name="TextBox 120">
+            <a:extLst>
+              <a:ext uri="{FF2B5EF4-FFF2-40B4-BE49-F238E27FC236}">
+                <a16:creationId xmlns:a16="http://schemas.microsoft.com/office/drawing/2014/main" id="{8D66560C-3E53-AE28-C998-53DE7641AE5E}"/>
+              </a:ext>
+            </a:extLst>
+          </p:cNvPr>
+          <p:cNvSpPr txBox="1"/>
+          <p:nvPr/>
+        </p:nvSpPr>
+        <p:spPr>
+          <a:xfrm>
+            <a:off x="6687254" y="7619678"/>
+            <a:ext cx="1039841" cy="400110"/>
+          </a:xfrm>
+          <a:prstGeom prst="rect">
+            <a:avLst/>
+          </a:prstGeom>
+          <a:noFill/>
+        </p:spPr>
+        <p:txBody>
+          <a:bodyPr wrap="square">
+            <a:spAutoFit/>
+          </a:bodyPr>
+          <a:lstStyle/>
+          <a:p>
+            <a:r>
+              <a:rPr lang="en-US" sz="1000" noProof="1">
+                <a:solidFill>
+                  <a:schemeClr val="accent1"/>
+                </a:solidFill>
+              </a:rPr>
+              <a:t>commands</a:t>
+            </a:r>
+          </a:p>
+          <a:p>
+            <a:r>
+              <a:rPr lang="en-US" sz="1000" noProof="1">
+                <a:solidFill>
+                  <a:schemeClr val="accent1"/>
+                </a:solidFill>
+              </a:rPr>
+              <a:t>file operations</a:t>
+            </a:r>
+            <a:endParaRPr lang="en-US" sz="1000" dirty="0"/>
+          </a:p>
+        </p:txBody>
+      </p:sp>
+      <p:sp>
+        <p:nvSpPr>
+          <p:cNvPr id="123" name="TextBox 122">
+            <a:extLst>
+              <a:ext uri="{FF2B5EF4-FFF2-40B4-BE49-F238E27FC236}">
+                <a16:creationId xmlns:a16="http://schemas.microsoft.com/office/drawing/2014/main" id="{E906DC65-386F-A065-C39D-E8F9213D6FA3}"/>
+              </a:ext>
+            </a:extLst>
+          </p:cNvPr>
+          <p:cNvSpPr txBox="1"/>
+          <p:nvPr/>
+        </p:nvSpPr>
+        <p:spPr>
+          <a:xfrm>
+            <a:off x="10554968" y="4039443"/>
+            <a:ext cx="370614" cy="369332"/>
+          </a:xfrm>
+          <a:prstGeom prst="rect">
+            <a:avLst/>
+          </a:prstGeom>
+          <a:noFill/>
+        </p:spPr>
+        <p:txBody>
+          <a:bodyPr wrap="none" rtlCol="0">
+            <a:spAutoFit/>
+          </a:bodyPr>
+          <a:lstStyle/>
+          <a:p>
+            <a:r>
+              <a:rPr lang="en-US" dirty="0"/>
+              <a:t>*)</a:t>
+            </a:r>
+          </a:p>
+        </p:txBody>
+      </p:sp>
+      <p:sp>
+        <p:nvSpPr>
+          <p:cNvPr id="124" name="TextBox 123">
+            <a:extLst>
+              <a:ext uri="{FF2B5EF4-FFF2-40B4-BE49-F238E27FC236}">
+                <a16:creationId xmlns:a16="http://schemas.microsoft.com/office/drawing/2014/main" id="{A3A75491-E066-021D-9B1B-CCADDB40C015}"/>
+              </a:ext>
+            </a:extLst>
+          </p:cNvPr>
+          <p:cNvSpPr txBox="1"/>
+          <p:nvPr/>
+        </p:nvSpPr>
+        <p:spPr>
+          <a:xfrm>
+            <a:off x="6193794" y="8117958"/>
+            <a:ext cx="5484041" cy="400110"/>
+          </a:xfrm>
+          <a:prstGeom prst="rect">
+            <a:avLst/>
+          </a:prstGeom>
+          <a:noFill/>
+        </p:spPr>
+        <p:txBody>
+          <a:bodyPr wrap="square">
+            <a:spAutoFit/>
+          </a:bodyPr>
+          <a:lstStyle/>
+          <a:p>
+            <a:r>
+              <a:rPr lang="en-US" sz="1000" noProof="1"/>
+              <a:t>*)  NOTE, git difftool waits until pragma-merge is closed. That’s why I start a delayed local</a:t>
+            </a:r>
+          </a:p>
+          <a:p>
+            <a:r>
+              <a:rPr lang="en-US" sz="1000" noProof="1"/>
+              <a:t> pick-up of files -- to give server difftool time to generate BASE, … .</a:t>
+            </a:r>
+            <a:endParaRPr lang="en-US" sz="1000" dirty="0"/>
+          </a:p>
+        </p:txBody>
+      </p:sp>
+      <p:sp>
+        <p:nvSpPr>
+          <p:cNvPr id="125" name="TextBox 124">
+            <a:extLst>
+              <a:ext uri="{FF2B5EF4-FFF2-40B4-BE49-F238E27FC236}">
+                <a16:creationId xmlns:a16="http://schemas.microsoft.com/office/drawing/2014/main" id="{6EC5E2B6-56D8-2950-2989-2CA956431A57}"/>
+              </a:ext>
+            </a:extLst>
+          </p:cNvPr>
+          <p:cNvSpPr txBox="1"/>
+          <p:nvPr/>
+        </p:nvSpPr>
+        <p:spPr>
+          <a:xfrm>
+            <a:off x="7972947" y="4546745"/>
+            <a:ext cx="370614" cy="369332"/>
+          </a:xfrm>
+          <a:prstGeom prst="rect">
+            <a:avLst/>
+          </a:prstGeom>
+          <a:noFill/>
+        </p:spPr>
+        <p:txBody>
+          <a:bodyPr wrap="none" rtlCol="0">
+            <a:spAutoFit/>
+          </a:bodyPr>
+          <a:lstStyle/>
+          <a:p>
+            <a:r>
+              <a:rPr lang="en-US" dirty="0"/>
+              <a:t>*)</a:t>
+            </a:r>
+          </a:p>
+        </p:txBody>
+      </p:sp>
+      <p:cxnSp>
+        <p:nvCxnSpPr>
+          <p:cNvPr id="148" name="Elbow Connector 147">
+            <a:extLst>
+              <a:ext uri="{FF2B5EF4-FFF2-40B4-BE49-F238E27FC236}">
+                <a16:creationId xmlns:a16="http://schemas.microsoft.com/office/drawing/2014/main" id="{E2C22964-1A79-DF6F-11CB-AA2ED2389F3B}"/>
+              </a:ext>
+            </a:extLst>
+          </p:cNvPr>
+          <p:cNvCxnSpPr>
+            <a:cxnSpLocks/>
+          </p:cNvCxnSpPr>
+          <p:nvPr/>
+        </p:nvCxnSpPr>
+        <p:spPr>
+          <a:xfrm rot="10800000" flipH="1" flipV="1">
+            <a:off x="6398112" y="4219283"/>
+            <a:ext cx="61298" cy="504725"/>
+          </a:xfrm>
+          <a:prstGeom prst="bentConnector3">
+            <a:avLst>
+              <a:gd name="adj1" fmla="val -372932"/>
+            </a:avLst>
+          </a:prstGeom>
+          <a:ln>
+            <a:tailEnd type="triangle"/>
+          </a:ln>
+        </p:spPr>
+        <p:style>
+          <a:lnRef idx="1">
+            <a:schemeClr val="accent1"/>
+          </a:lnRef>
+          <a:fillRef idx="0">
+            <a:schemeClr val="accent1"/>
+          </a:fillRef>
+          <a:effectRef idx="0">
+            <a:schemeClr val="accent1"/>
+          </a:effectRef>
+          <a:fontRef idx="minor">
+            <a:schemeClr val="tx1"/>
+          </a:fontRef>
+        </p:style>
+      </p:cxnSp>
+      <p:sp>
+        <p:nvSpPr>
+          <p:cNvPr id="152" name="TextBox 151">
+            <a:extLst>
+              <a:ext uri="{FF2B5EF4-FFF2-40B4-BE49-F238E27FC236}">
+                <a16:creationId xmlns:a16="http://schemas.microsoft.com/office/drawing/2014/main" id="{F71DA6D7-CCD9-ADBB-97CA-8528B218DF66}"/>
+              </a:ext>
+            </a:extLst>
+          </p:cNvPr>
+          <p:cNvSpPr txBox="1"/>
+          <p:nvPr/>
+        </p:nvSpPr>
+        <p:spPr>
+          <a:xfrm>
+            <a:off x="6886416" y="5026821"/>
+            <a:ext cx="696003" cy="246221"/>
+          </a:xfrm>
+          <a:prstGeom prst="rect">
+            <a:avLst/>
+          </a:prstGeom>
+          <a:noFill/>
+        </p:spPr>
+        <p:txBody>
+          <a:bodyPr wrap="square">
+            <a:spAutoFit/>
+          </a:bodyPr>
+          <a:lstStyle/>
+          <a:p>
+            <a:r>
+              <a:rPr lang="en-US" sz="1000" noProof="1">
+                <a:solidFill>
+                  <a:schemeClr val="accent1"/>
+                </a:solidFill>
+              </a:rPr>
+              <a:t>(wait 2 s)</a:t>
+            </a:r>
+            <a:endParaRPr lang="en-US" sz="1000" dirty="0"/>
+          </a:p>
+        </p:txBody>
+      </p:sp>
+      <p:sp>
+        <p:nvSpPr>
+          <p:cNvPr id="154" name="Right Brace 153">
+            <a:extLst>
+              <a:ext uri="{FF2B5EF4-FFF2-40B4-BE49-F238E27FC236}">
+                <a16:creationId xmlns:a16="http://schemas.microsoft.com/office/drawing/2014/main" id="{8581082B-D67F-93AE-F34A-EE44EE6041E9}"/>
+              </a:ext>
+            </a:extLst>
+          </p:cNvPr>
+          <p:cNvSpPr/>
+          <p:nvPr/>
+        </p:nvSpPr>
+        <p:spPr>
+          <a:xfrm>
+            <a:off x="10232136" y="4496533"/>
+            <a:ext cx="138162" cy="393374"/>
+          </a:xfrm>
+          <a:prstGeom prst="rightBrace">
+            <a:avLst/>
+          </a:prstGeom>
+        </p:spPr>
+        <p:style>
+          <a:lnRef idx="1">
+            <a:schemeClr val="accent1"/>
+          </a:lnRef>
+          <a:fillRef idx="0">
+            <a:schemeClr val="accent1"/>
+          </a:fillRef>
+          <a:effectRef idx="0">
+            <a:schemeClr val="accent1"/>
+          </a:effectRef>
+          <a:fontRef idx="minor">
+            <a:schemeClr val="tx1"/>
+          </a:fontRef>
+        </p:style>
+        <p:txBody>
+          <a:bodyPr rtlCol="0" anchor="ctr"/>
+          <a:lstStyle/>
+          <a:p>
+            <a:pPr algn="ctr"/>
+            <a:endParaRPr lang="en-US"/>
           </a:p>
         </p:txBody>
       </p:sp>

--- a/docs/Tech-overview.pptx
+++ b/docs/Tech-overview.pptx
@@ -264,7 +264,7 @@
           <a:p>
             <a:fld id="{CA855E1B-8830-B64E-B102-DB2BBD0D9567}" type="datetimeFigureOut">
               <a:rPr lang="sv-SE" smtClean="0"/>
-              <a:t>2025-05-23</a:t>
+              <a:t>2025-05-30</a:t>
             </a:fld>
             <a:endParaRPr lang="sv-SE"/>
           </a:p>
@@ -434,7 +434,7 @@
           <a:p>
             <a:fld id="{CA855E1B-8830-B64E-B102-DB2BBD0D9567}" type="datetimeFigureOut">
               <a:rPr lang="sv-SE" smtClean="0"/>
-              <a:t>2025-05-23</a:t>
+              <a:t>2025-05-30</a:t>
             </a:fld>
             <a:endParaRPr lang="sv-SE"/>
           </a:p>
@@ -614,7 +614,7 @@
           <a:p>
             <a:fld id="{CA855E1B-8830-B64E-B102-DB2BBD0D9567}" type="datetimeFigureOut">
               <a:rPr lang="sv-SE" smtClean="0"/>
-              <a:t>2025-05-23</a:t>
+              <a:t>2025-05-30</a:t>
             </a:fld>
             <a:endParaRPr lang="sv-SE"/>
           </a:p>
@@ -784,7 +784,7 @@
           <a:p>
             <a:fld id="{CA855E1B-8830-B64E-B102-DB2BBD0D9567}" type="datetimeFigureOut">
               <a:rPr lang="sv-SE" smtClean="0"/>
-              <a:t>2025-05-23</a:t>
+              <a:t>2025-05-30</a:t>
             </a:fld>
             <a:endParaRPr lang="sv-SE"/>
           </a:p>
@@ -1028,7 +1028,7 @@
           <a:p>
             <a:fld id="{CA855E1B-8830-B64E-B102-DB2BBD0D9567}" type="datetimeFigureOut">
               <a:rPr lang="sv-SE" smtClean="0"/>
-              <a:t>2025-05-23</a:t>
+              <a:t>2025-05-30</a:t>
             </a:fld>
             <a:endParaRPr lang="sv-SE"/>
           </a:p>
@@ -1260,7 +1260,7 @@
           <a:p>
             <a:fld id="{CA855E1B-8830-B64E-B102-DB2BBD0D9567}" type="datetimeFigureOut">
               <a:rPr lang="sv-SE" smtClean="0"/>
-              <a:t>2025-05-23</a:t>
+              <a:t>2025-05-30</a:t>
             </a:fld>
             <a:endParaRPr lang="sv-SE"/>
           </a:p>
@@ -1627,7 +1627,7 @@
           <a:p>
             <a:fld id="{CA855E1B-8830-B64E-B102-DB2BBD0D9567}" type="datetimeFigureOut">
               <a:rPr lang="sv-SE" smtClean="0"/>
-              <a:t>2025-05-23</a:t>
+              <a:t>2025-05-30</a:t>
             </a:fld>
             <a:endParaRPr lang="sv-SE"/>
           </a:p>
@@ -1745,7 +1745,7 @@
           <a:p>
             <a:fld id="{CA855E1B-8830-B64E-B102-DB2BBD0D9567}" type="datetimeFigureOut">
               <a:rPr lang="sv-SE" smtClean="0"/>
-              <a:t>2025-05-23</a:t>
+              <a:t>2025-05-30</a:t>
             </a:fld>
             <a:endParaRPr lang="sv-SE"/>
           </a:p>
@@ -1840,7 +1840,7 @@
           <a:p>
             <a:fld id="{CA855E1B-8830-B64E-B102-DB2BBD0D9567}" type="datetimeFigureOut">
               <a:rPr lang="sv-SE" smtClean="0"/>
-              <a:t>2025-05-23</a:t>
+              <a:t>2025-05-30</a:t>
             </a:fld>
             <a:endParaRPr lang="sv-SE"/>
           </a:p>
@@ -2117,7 +2117,7 @@
           <a:p>
             <a:fld id="{CA855E1B-8830-B64E-B102-DB2BBD0D9567}" type="datetimeFigureOut">
               <a:rPr lang="sv-SE" smtClean="0"/>
-              <a:t>2025-05-23</a:t>
+              <a:t>2025-05-30</a:t>
             </a:fld>
             <a:endParaRPr lang="sv-SE"/>
           </a:p>
@@ -2374,7 +2374,7 @@
           <a:p>
             <a:fld id="{CA855E1B-8830-B64E-B102-DB2BBD0D9567}" type="datetimeFigureOut">
               <a:rPr lang="sv-SE" smtClean="0"/>
-              <a:t>2025-05-23</a:t>
+              <a:t>2025-05-30</a:t>
             </a:fld>
             <a:endParaRPr lang="sv-SE"/>
           </a:p>
@@ -2587,7 +2587,7 @@
           <a:p>
             <a:fld id="{CA855E1B-8830-B64E-B102-DB2BBD0D9567}" type="datetimeFigureOut">
               <a:rPr lang="sv-SE" smtClean="0"/>
-              <a:t>2025-05-23</a:t>
+              <a:t>2025-05-30</a:t>
             </a:fld>
             <a:endParaRPr lang="sv-SE"/>
           </a:p>
@@ -14493,7 +14493,7 @@
             </a:pPr>
             <a:r>
               <a:rPr lang="en-US" sz="800" noProof="1"/>
-              <a:t>Start ssh-pragma-merge-files, to pick up files from server</a:t>
+              <a:t>Start ssh-get-merge-files, to pick up files from server</a:t>
             </a:r>
           </a:p>
           <a:p>
@@ -14518,7 +14518,7 @@
                   <a:schemeClr val="accent1"/>
                 </a:solidFill>
               </a:rPr>
-              <a:t>-&gt; CLIENT; ssh-pragma-merge-files – </a:t>
+              <a:t>-&gt; CLIENT; ssh-get-merge-files – </a:t>
             </a:r>
             <a:r>
               <a:rPr lang="en-US" sz="800" noProof="1"/>
@@ -15020,7 +15020,7 @@
                   <a:schemeClr val="accent1"/>
                 </a:solidFill>
               </a:rPr>
-              <a:t>ssh-pragma-merge-files</a:t>
+              <a:t>ssh-get-merge-files</a:t>
             </a:r>
             <a:endParaRPr lang="en-US" sz="1000" dirty="0"/>
           </a:p>

--- a/docs/Tech-overview.pptx
+++ b/docs/Tech-overview.pptx
@@ -264,7 +264,7 @@
           <a:p>
             <a:fld id="{CA855E1B-8830-B64E-B102-DB2BBD0D9567}" type="datetimeFigureOut">
               <a:rPr lang="sv-SE" smtClean="0"/>
-              <a:t>2025-05-30</a:t>
+              <a:t>2025-06-04</a:t>
             </a:fld>
             <a:endParaRPr lang="sv-SE"/>
           </a:p>
@@ -434,7 +434,7 @@
           <a:p>
             <a:fld id="{CA855E1B-8830-B64E-B102-DB2BBD0D9567}" type="datetimeFigureOut">
               <a:rPr lang="sv-SE" smtClean="0"/>
-              <a:t>2025-05-30</a:t>
+              <a:t>2025-06-04</a:t>
             </a:fld>
             <a:endParaRPr lang="sv-SE"/>
           </a:p>
@@ -614,7 +614,7 @@
           <a:p>
             <a:fld id="{CA855E1B-8830-B64E-B102-DB2BBD0D9567}" type="datetimeFigureOut">
               <a:rPr lang="sv-SE" smtClean="0"/>
-              <a:t>2025-05-30</a:t>
+              <a:t>2025-06-04</a:t>
             </a:fld>
             <a:endParaRPr lang="sv-SE"/>
           </a:p>
@@ -784,7 +784,7 @@
           <a:p>
             <a:fld id="{CA855E1B-8830-B64E-B102-DB2BBD0D9567}" type="datetimeFigureOut">
               <a:rPr lang="sv-SE" smtClean="0"/>
-              <a:t>2025-05-30</a:t>
+              <a:t>2025-06-04</a:t>
             </a:fld>
             <a:endParaRPr lang="sv-SE"/>
           </a:p>
@@ -1028,7 +1028,7 @@
           <a:p>
             <a:fld id="{CA855E1B-8830-B64E-B102-DB2BBD0D9567}" type="datetimeFigureOut">
               <a:rPr lang="sv-SE" smtClean="0"/>
-              <a:t>2025-05-30</a:t>
+              <a:t>2025-06-04</a:t>
             </a:fld>
             <a:endParaRPr lang="sv-SE"/>
           </a:p>
@@ -1260,7 +1260,7 @@
           <a:p>
             <a:fld id="{CA855E1B-8830-B64E-B102-DB2BBD0D9567}" type="datetimeFigureOut">
               <a:rPr lang="sv-SE" smtClean="0"/>
-              <a:t>2025-05-30</a:t>
+              <a:t>2025-06-04</a:t>
             </a:fld>
             <a:endParaRPr lang="sv-SE"/>
           </a:p>
@@ -1627,7 +1627,7 @@
           <a:p>
             <a:fld id="{CA855E1B-8830-B64E-B102-DB2BBD0D9567}" type="datetimeFigureOut">
               <a:rPr lang="sv-SE" smtClean="0"/>
-              <a:t>2025-05-30</a:t>
+              <a:t>2025-06-04</a:t>
             </a:fld>
             <a:endParaRPr lang="sv-SE"/>
           </a:p>
@@ -1745,7 +1745,7 @@
           <a:p>
             <a:fld id="{CA855E1B-8830-B64E-B102-DB2BBD0D9567}" type="datetimeFigureOut">
               <a:rPr lang="sv-SE" smtClean="0"/>
-              <a:t>2025-05-30</a:t>
+              <a:t>2025-06-04</a:t>
             </a:fld>
             <a:endParaRPr lang="sv-SE"/>
           </a:p>
@@ -1840,7 +1840,7 @@
           <a:p>
             <a:fld id="{CA855E1B-8830-B64E-B102-DB2BBD0D9567}" type="datetimeFigureOut">
               <a:rPr lang="sv-SE" smtClean="0"/>
-              <a:t>2025-05-30</a:t>
+              <a:t>2025-06-04</a:t>
             </a:fld>
             <a:endParaRPr lang="sv-SE"/>
           </a:p>
@@ -2117,7 +2117,7 @@
           <a:p>
             <a:fld id="{CA855E1B-8830-B64E-B102-DB2BBD0D9567}" type="datetimeFigureOut">
               <a:rPr lang="sv-SE" smtClean="0"/>
-              <a:t>2025-05-30</a:t>
+              <a:t>2025-06-04</a:t>
             </a:fld>
             <a:endParaRPr lang="sv-SE"/>
           </a:p>
@@ -2374,7 +2374,7 @@
           <a:p>
             <a:fld id="{CA855E1B-8830-B64E-B102-DB2BBD0D9567}" type="datetimeFigureOut">
               <a:rPr lang="sv-SE" smtClean="0"/>
-              <a:t>2025-05-30</a:t>
+              <a:t>2025-06-04</a:t>
             </a:fld>
             <a:endParaRPr lang="sv-SE"/>
           </a:p>
@@ -2587,7 +2587,7 @@
           <a:p>
             <a:fld id="{CA855E1B-8830-B64E-B102-DB2BBD0D9567}" type="datetimeFigureOut">
               <a:rPr lang="sv-SE" smtClean="0"/>
-              <a:t>2025-05-30</a:t>
+              <a:t>2025-06-04</a:t>
             </a:fld>
             <a:endParaRPr lang="sv-SE"/>
           </a:p>
@@ -14202,7 +14202,7 @@
         <p:spPr>
           <a:xfrm>
             <a:off x="336553" y="953256"/>
-            <a:ext cx="1829155" cy="461665"/>
+            <a:ext cx="2351734" cy="461665"/>
           </a:xfrm>
           <a:prstGeom prst="rect">
             <a:avLst/>
@@ -14217,7 +14217,7 @@
           <a:p>
             <a:r>
               <a:rPr lang="en-US" sz="2400" b="1" noProof="1"/>
-              <a:t>Git on server</a:t>
+              <a:t>Run git on server</a:t>
             </a:r>
           </a:p>
         </p:txBody>
@@ -16227,6 +16227,150 @@
           <a:p>
             <a:pPr algn="ctr"/>
             <a:endParaRPr lang="en-US"/>
+          </a:p>
+        </p:txBody>
+      </p:sp>
+      <p:sp>
+        <p:nvSpPr>
+          <p:cNvPr id="3" name="textruta 5">
+            <a:extLst>
+              <a:ext uri="{FF2B5EF4-FFF2-40B4-BE49-F238E27FC236}">
+                <a16:creationId xmlns:a16="http://schemas.microsoft.com/office/drawing/2014/main" id="{DCD37A85-53A7-04DE-FAA1-BB7E94E9B34E}"/>
+              </a:ext>
+            </a:extLst>
+          </p:cNvPr>
+          <p:cNvSpPr txBox="1"/>
+          <p:nvPr/>
+        </p:nvSpPr>
+        <p:spPr>
+          <a:xfrm>
+            <a:off x="4651737" y="947704"/>
+            <a:ext cx="6694077" cy="461665"/>
+          </a:xfrm>
+          <a:prstGeom prst="rect">
+            <a:avLst/>
+          </a:prstGeom>
+          <a:noFill/>
+        </p:spPr>
+        <p:txBody>
+          <a:bodyPr wrap="none" rtlCol="0">
+            <a:spAutoFit/>
+          </a:bodyPr>
+          <a:lstStyle/>
+          <a:p>
+            <a:r>
+              <a:rPr lang="en-US" sz="2400" b="1" noProof="1"/>
+              <a:t>File operations that works locally and on ssh server</a:t>
+            </a:r>
+          </a:p>
+        </p:txBody>
+      </p:sp>
+      <p:sp>
+        <p:nvSpPr>
+          <p:cNvPr id="7" name="textruta 4">
+            <a:extLst>
+              <a:ext uri="{FF2B5EF4-FFF2-40B4-BE49-F238E27FC236}">
+                <a16:creationId xmlns:a16="http://schemas.microsoft.com/office/drawing/2014/main" id="{FF3C9341-A2A2-DB9D-5BC3-402F8F43647B}"/>
+              </a:ext>
+            </a:extLst>
+          </p:cNvPr>
+          <p:cNvSpPr txBox="1"/>
+          <p:nvPr/>
+        </p:nvSpPr>
+        <p:spPr>
+          <a:xfrm>
+            <a:off x="4813121" y="1521282"/>
+            <a:ext cx="5927153" cy="954107"/>
+          </a:xfrm>
+          <a:prstGeom prst="rect">
+            <a:avLst/>
+          </a:prstGeom>
+          <a:noFill/>
+          <a:ln>
+            <a:solidFill>
+              <a:schemeClr val="accent1"/>
+            </a:solidFill>
+          </a:ln>
+        </p:spPr>
+        <p:txBody>
+          <a:bodyPr wrap="square" rtlCol="0">
+            <a:spAutoFit/>
+          </a:bodyPr>
+          <a:lstStyle/>
+          <a:p>
+            <a:r>
+              <a:rPr lang="en-US" sz="800" b="1" noProof="1"/>
+              <a:t>Some file operations should work both locally and on server.  </a:t>
+            </a:r>
+            <a:br>
+              <a:rPr lang="en-US" sz="800" b="1" noProof="1"/>
+            </a:br>
+            <a:endParaRPr lang="en-US" sz="800" b="1" noProof="1"/>
+          </a:p>
+          <a:p>
+            <a:pPr marL="171450" indent="-171450">
+              <a:buFont typeface="Courier New" panose="02070309020205020404" pitchFamily="49" charset="0"/>
+              <a:buChar char="o"/>
+            </a:pPr>
+            <a:r>
+              <a:rPr lang="en-US" sz="800" noProof="1">
+                <a:solidFill>
+                  <a:schemeClr val="accent1"/>
+                </a:solidFill>
+              </a:rPr>
+              <a:t>ssh_folder/ssh-folderlib.js </a:t>
+            </a:r>
+            <a:r>
+              <a:rPr lang="en-US" sz="800" noProof="1"/>
+              <a:t>is  javascript wrappers to bash scripts in “ssh_folder”.</a:t>
+            </a:r>
+            <a:br>
+              <a:rPr lang="en-US" sz="800" noProof="1"/>
+            </a:br>
+            <a:r>
+              <a:rPr lang="en-US" sz="800" noProof="1"/>
+              <a:t>Some functions are exclusive ssh, some are made to work both locally and over ssh</a:t>
+            </a:r>
+          </a:p>
+          <a:p>
+            <a:pPr marL="171450" indent="-171450">
+              <a:buFont typeface="Courier New" panose="02070309020205020404" pitchFamily="49" charset="0"/>
+              <a:buChar char="o"/>
+            </a:pPr>
+            <a:r>
+              <a:rPr lang="en-US" sz="800" noProof="1">
+                <a:solidFill>
+                  <a:schemeClr val="accent1"/>
+                </a:solidFill>
+              </a:rPr>
+              <a:t>fs_existsSync  </a:t>
+            </a:r>
+            <a:r>
+              <a:rPr lang="en-US" sz="800" noProof="1"/>
+              <a:t>-- works transparently as fs.existsSync both  on server and locally</a:t>
+            </a:r>
+            <a:br>
+              <a:rPr lang="en-US" sz="800" noProof="1"/>
+            </a:br>
+            <a:r>
+              <a:rPr lang="en-US" sz="800" noProof="1">
+                <a:solidFill>
+                  <a:schemeClr val="accent1"/>
+                </a:solidFill>
+              </a:rPr>
+              <a:t>fs.existsSync  </a:t>
+            </a:r>
+            <a:r>
+              <a:rPr lang="en-US" sz="800" noProof="1"/>
+              <a:t>-- works only locally (used for signal files, settings, Notes, etc that should not be on ssh server)</a:t>
+            </a:r>
+          </a:p>
+          <a:p>
+            <a:pPr marL="171450" indent="-171450">
+              <a:buFont typeface="Courier New" panose="02070309020205020404" pitchFamily="49" charset="0"/>
+              <a:buChar char="o"/>
+            </a:pPr>
+            <a:endParaRPr lang="en-US" sz="800" noProof="1"/>
           </a:p>
         </p:txBody>
       </p:sp>

--- a/docs/Tech-overview.pptx
+++ b/docs/Tech-overview.pptx
@@ -4166,6 +4166,269 @@
             <a:r>
               <a:rPr lang="en-US" sz="2400" b="1" noProof="1"/>
               <a:t>Pre-release</a:t>
+            </a:r>
+          </a:p>
+        </p:txBody>
+      </p:sp>
+      <p:sp>
+        <p:nvSpPr>
+          <p:cNvPr id="2" name="textruta 7">
+            <a:extLst>
+              <a:ext uri="{FF2B5EF4-FFF2-40B4-BE49-F238E27FC236}">
+                <a16:creationId xmlns:a16="http://schemas.microsoft.com/office/drawing/2014/main" id="{BA4EEBAF-B070-ABA0-6841-81950B660846}"/>
+              </a:ext>
+            </a:extLst>
+          </p:cNvPr>
+          <p:cNvSpPr txBox="1"/>
+          <p:nvPr/>
+        </p:nvSpPr>
+        <p:spPr>
+          <a:xfrm>
+            <a:off x="8057615" y="955246"/>
+            <a:ext cx="2816540" cy="461665"/>
+          </a:xfrm>
+          <a:prstGeom prst="rect">
+            <a:avLst/>
+          </a:prstGeom>
+          <a:noFill/>
+        </p:spPr>
+        <p:txBody>
+          <a:bodyPr wrap="none" rtlCol="0">
+            <a:spAutoFit/>
+          </a:bodyPr>
+          <a:lstStyle/>
+          <a:p>
+            <a:r>
+              <a:rPr lang="en-US" sz="2400" b="1" noProof="1"/>
+              <a:t>Change nwjs-version</a:t>
+            </a:r>
+          </a:p>
+        </p:txBody>
+      </p:sp>
+      <p:sp>
+        <p:nvSpPr>
+          <p:cNvPr id="3" name="textruta 6">
+            <a:extLst>
+              <a:ext uri="{FF2B5EF4-FFF2-40B4-BE49-F238E27FC236}">
+                <a16:creationId xmlns:a16="http://schemas.microsoft.com/office/drawing/2014/main" id="{DB43E805-6425-D6EA-8BA3-2E44D0EF7CBB}"/>
+              </a:ext>
+            </a:extLst>
+          </p:cNvPr>
+          <p:cNvSpPr txBox="1"/>
+          <p:nvPr/>
+        </p:nvSpPr>
+        <p:spPr>
+          <a:xfrm>
+            <a:off x="8067140" y="1545040"/>
+            <a:ext cx="3274288" cy="2800767"/>
+          </a:xfrm>
+          <a:prstGeom prst="rect">
+            <a:avLst/>
+          </a:prstGeom>
+          <a:noFill/>
+          <a:ln>
+            <a:solidFill>
+              <a:schemeClr val="accent1"/>
+            </a:solidFill>
+          </a:ln>
+        </p:spPr>
+        <p:txBody>
+          <a:bodyPr wrap="square" rtlCol="0">
+            <a:spAutoFit/>
+          </a:bodyPr>
+          <a:lstStyle/>
+          <a:p>
+            <a:pPr marL="228600" indent="-228600">
+              <a:buFont typeface="+mj-lt"/>
+              <a:buAutoNum type="arabicPeriod"/>
+            </a:pPr>
+            <a:r>
+              <a:rPr lang="en-US" sz="800" b="1" noProof="1"/>
+              <a:t>Download</a:t>
+            </a:r>
+            <a:r>
+              <a:rPr lang="en-US" sz="800" noProof="1"/>
+              <a:t> new nwjs-version to /Apps/nwjs.app</a:t>
+            </a:r>
+          </a:p>
+          <a:p>
+            <a:pPr marL="228600" indent="-228600">
+              <a:buFont typeface="+mj-lt"/>
+              <a:buAutoNum type="arabicPeriod"/>
+            </a:pPr>
+            <a:endParaRPr lang="en-US" sz="800" noProof="1"/>
+          </a:p>
+          <a:p>
+            <a:pPr marL="228600" indent="-228600">
+              <a:buFont typeface="+mj-lt"/>
+              <a:buAutoNum type="arabicPeriod"/>
+            </a:pPr>
+            <a:r>
+              <a:rPr lang="en-US" sz="800" b="1" noProof="1"/>
+              <a:t>Make runnable:</a:t>
+            </a:r>
+            <a:br>
+              <a:rPr lang="en-US" sz="800" b="1" noProof="1"/>
+            </a:br>
+            <a:r>
+              <a:rPr lang="en-US" sz="800" noProof="1"/>
+              <a:t>sudo xattr -r -d com.apple.quarantine /Applications/nwjs.app</a:t>
+            </a:r>
+          </a:p>
+          <a:p>
+            <a:pPr marL="228600" indent="-228600">
+              <a:buFont typeface="+mj-lt"/>
+              <a:buAutoNum type="arabicPeriod"/>
+            </a:pPr>
+            <a:endParaRPr lang="en-US" sz="800" noProof="1"/>
+          </a:p>
+          <a:p>
+            <a:pPr marL="228600" indent="-228600">
+              <a:buFont typeface="+mj-lt"/>
+              <a:buAutoNum type="arabicPeriod"/>
+            </a:pPr>
+            <a:r>
+              <a:rPr lang="en-US" sz="800" b="1" noProof="1"/>
+              <a:t>Update</a:t>
+            </a:r>
+            <a:r>
+              <a:rPr lang="en-US" sz="800" noProof="1"/>
+              <a:t> </a:t>
+            </a:r>
+            <a:r>
+              <a:rPr lang="en-US" sz="800" b="1" noProof="1"/>
+              <a:t>package.json </a:t>
+            </a:r>
+            <a:r>
+              <a:rPr lang="en-US" sz="800" noProof="1"/>
+              <a:t>to correct nwjs version</a:t>
+            </a:r>
+          </a:p>
+          <a:p>
+            <a:pPr marL="228600" indent="-228600">
+              <a:buFont typeface="+mj-lt"/>
+              <a:buAutoNum type="arabicPeriod"/>
+            </a:pPr>
+            <a:endParaRPr lang="en-US" sz="800" noProof="1"/>
+          </a:p>
+          <a:p>
+            <a:pPr marL="228600" indent="-228600">
+              <a:buFont typeface="+mj-lt"/>
+              <a:buAutoNum type="arabicPeriod"/>
+            </a:pPr>
+            <a:r>
+              <a:rPr lang="en-US" sz="800" b="1" noProof="1"/>
+              <a:t>F12 when running pragma-git, then</a:t>
+            </a:r>
+            <a:br>
+              <a:rPr lang="en-US" sz="800" noProof="1"/>
+            </a:br>
+            <a:r>
+              <a:rPr lang="en-US" sz="800" noProof="1"/>
+              <a:t>process.version  // gives node version (also Settings Info)</a:t>
+            </a:r>
+          </a:p>
+          <a:p>
+            <a:pPr marL="228600" indent="-228600">
+              <a:buFont typeface="+mj-lt"/>
+              <a:buAutoNum type="arabicPeriod"/>
+            </a:pPr>
+            <a:endParaRPr lang="en-US" sz="800" noProof="1"/>
+          </a:p>
+          <a:p>
+            <a:pPr marL="228600" indent="-228600">
+              <a:buFont typeface="+mj-lt"/>
+              <a:buAutoNum type="arabicPeriod"/>
+            </a:pPr>
+            <a:r>
+              <a:rPr lang="en-US" sz="800" b="1" noProof="1"/>
+              <a:t>Update NODE  to same version as prcess.version.  In bash :</a:t>
+            </a:r>
+            <a:br>
+              <a:rPr lang="en-US" sz="800" noProof="1"/>
+            </a:br>
+            <a:r>
+              <a:rPr lang="en-US" sz="800" noProof="1"/>
+              <a:t>cd /Users/jan/Documents/Projects/Pragma-git/pragma-git/</a:t>
+            </a:r>
+            <a:br>
+              <a:rPr lang="en-US" sz="800" noProof="1"/>
+            </a:br>
+            <a:r>
+              <a:rPr lang="en-US" sz="800" noProof="1"/>
+              <a:t>volta install node@VERSION  # for instance: “node@21.1.0”</a:t>
+            </a:r>
+          </a:p>
+          <a:p>
+            <a:pPr marL="228600" indent="-228600">
+              <a:buFont typeface="+mj-lt"/>
+              <a:buAutoNum type="arabicPeriod"/>
+            </a:pPr>
+            <a:endParaRPr lang="en-US" sz="800" noProof="1"/>
+          </a:p>
+          <a:p>
+            <a:pPr marL="228600" indent="-228600">
+              <a:buFont typeface="+mj-lt"/>
+              <a:buAutoNum type="arabicPeriod"/>
+            </a:pPr>
+            <a:r>
+              <a:rPr lang="en-US" sz="800" b="1" noProof="1"/>
+              <a:t>Update npm versions in bash :</a:t>
+            </a:r>
+            <a:br>
+              <a:rPr lang="en-US" sz="800" noProof="1"/>
+            </a:br>
+            <a:r>
+              <a:rPr lang="en-US" sz="800" noProof="1"/>
+              <a:t>cd /Users/jan/Documents/Projects/Pragma-git/pragma-git/</a:t>
+            </a:r>
+            <a:br>
+              <a:rPr lang="en-US" sz="800" noProof="1"/>
+            </a:br>
+            <a:r>
+              <a:rPr lang="en-US" sz="800" noProof="1"/>
+              <a:t>npm update</a:t>
+            </a:r>
+          </a:p>
+          <a:p>
+            <a:pPr marL="228600" indent="-228600">
+              <a:buFont typeface="+mj-lt"/>
+              <a:buAutoNum type="arabicPeriod"/>
+            </a:pPr>
+            <a:endParaRPr lang="en-US" sz="800" noProof="1"/>
+          </a:p>
+          <a:p>
+            <a:pPr marL="228600" indent="-228600">
+              <a:buFont typeface="+mj-lt"/>
+              <a:buAutoNum type="arabicPeriod"/>
+            </a:pPr>
+            <a:r>
+              <a:rPr lang="en-US" sz="800" b="1" noProof="1"/>
+              <a:t>Check what package versions are not updated .</a:t>
+            </a:r>
+            <a:r>
+              <a:rPr lang="en-US" sz="800" noProof="1"/>
+              <a:t> </a:t>
+            </a:r>
+            <a:r>
+              <a:rPr lang="en-US" sz="800" b="1" noProof="1"/>
+              <a:t>In bash:</a:t>
+            </a:r>
+            <a:br>
+              <a:rPr lang="en-US" sz="800" b="1" noProof="1"/>
+            </a:br>
+            <a:r>
+              <a:rPr lang="en-US" sz="800" noProof="1"/>
+              <a:t>npm outdated</a:t>
+            </a:r>
+          </a:p>
+          <a:p>
+            <a:endParaRPr lang="en-US" sz="800" noProof="1"/>
+          </a:p>
+          <a:p>
+            <a:r>
+              <a:rPr lang="en-US" sz="800" b="1" noProof="1"/>
+              <a:t>... keep working ...</a:t>
             </a:r>
           </a:p>
         </p:txBody>

--- a/docs/Tech-overview.pptx
+++ b/docs/Tech-overview.pptx
@@ -264,7 +264,7 @@
           <a:p>
             <a:fld id="{CA855E1B-8830-B64E-B102-DB2BBD0D9567}" type="datetimeFigureOut">
               <a:rPr lang="sv-SE" smtClean="0"/>
-              <a:t>2025-06-04</a:t>
+              <a:t>2025-06-27</a:t>
             </a:fld>
             <a:endParaRPr lang="sv-SE"/>
           </a:p>
@@ -434,7 +434,7 @@
           <a:p>
             <a:fld id="{CA855E1B-8830-B64E-B102-DB2BBD0D9567}" type="datetimeFigureOut">
               <a:rPr lang="sv-SE" smtClean="0"/>
-              <a:t>2025-06-04</a:t>
+              <a:t>2025-06-27</a:t>
             </a:fld>
             <a:endParaRPr lang="sv-SE"/>
           </a:p>
@@ -614,7 +614,7 @@
           <a:p>
             <a:fld id="{CA855E1B-8830-B64E-B102-DB2BBD0D9567}" type="datetimeFigureOut">
               <a:rPr lang="sv-SE" smtClean="0"/>
-              <a:t>2025-06-04</a:t>
+              <a:t>2025-06-27</a:t>
             </a:fld>
             <a:endParaRPr lang="sv-SE"/>
           </a:p>
@@ -784,7 +784,7 @@
           <a:p>
             <a:fld id="{CA855E1B-8830-B64E-B102-DB2BBD0D9567}" type="datetimeFigureOut">
               <a:rPr lang="sv-SE" smtClean="0"/>
-              <a:t>2025-06-04</a:t>
+              <a:t>2025-06-27</a:t>
             </a:fld>
             <a:endParaRPr lang="sv-SE"/>
           </a:p>
@@ -1028,7 +1028,7 @@
           <a:p>
             <a:fld id="{CA855E1B-8830-B64E-B102-DB2BBD0D9567}" type="datetimeFigureOut">
               <a:rPr lang="sv-SE" smtClean="0"/>
-              <a:t>2025-06-04</a:t>
+              <a:t>2025-06-27</a:t>
             </a:fld>
             <a:endParaRPr lang="sv-SE"/>
           </a:p>
@@ -1260,7 +1260,7 @@
           <a:p>
             <a:fld id="{CA855E1B-8830-B64E-B102-DB2BBD0D9567}" type="datetimeFigureOut">
               <a:rPr lang="sv-SE" smtClean="0"/>
-              <a:t>2025-06-04</a:t>
+              <a:t>2025-06-27</a:t>
             </a:fld>
             <a:endParaRPr lang="sv-SE"/>
           </a:p>
@@ -1627,7 +1627,7 @@
           <a:p>
             <a:fld id="{CA855E1B-8830-B64E-B102-DB2BBD0D9567}" type="datetimeFigureOut">
               <a:rPr lang="sv-SE" smtClean="0"/>
-              <a:t>2025-06-04</a:t>
+              <a:t>2025-06-27</a:t>
             </a:fld>
             <a:endParaRPr lang="sv-SE"/>
           </a:p>
@@ -1745,7 +1745,7 @@
           <a:p>
             <a:fld id="{CA855E1B-8830-B64E-B102-DB2BBD0D9567}" type="datetimeFigureOut">
               <a:rPr lang="sv-SE" smtClean="0"/>
-              <a:t>2025-06-04</a:t>
+              <a:t>2025-06-27</a:t>
             </a:fld>
             <a:endParaRPr lang="sv-SE"/>
           </a:p>
@@ -1840,7 +1840,7 @@
           <a:p>
             <a:fld id="{CA855E1B-8830-B64E-B102-DB2BBD0D9567}" type="datetimeFigureOut">
               <a:rPr lang="sv-SE" smtClean="0"/>
-              <a:t>2025-06-04</a:t>
+              <a:t>2025-06-27</a:t>
             </a:fld>
             <a:endParaRPr lang="sv-SE"/>
           </a:p>
@@ -2117,7 +2117,7 @@
           <a:p>
             <a:fld id="{CA855E1B-8830-B64E-B102-DB2BBD0D9567}" type="datetimeFigureOut">
               <a:rPr lang="sv-SE" smtClean="0"/>
-              <a:t>2025-06-04</a:t>
+              <a:t>2025-06-27</a:t>
             </a:fld>
             <a:endParaRPr lang="sv-SE"/>
           </a:p>
@@ -2374,7 +2374,7 @@
           <a:p>
             <a:fld id="{CA855E1B-8830-B64E-B102-DB2BBD0D9567}" type="datetimeFigureOut">
               <a:rPr lang="sv-SE" smtClean="0"/>
-              <a:t>2025-06-04</a:t>
+              <a:t>2025-06-27</a:t>
             </a:fld>
             <a:endParaRPr lang="sv-SE"/>
           </a:p>
@@ -2587,7 +2587,7 @@
           <a:p>
             <a:fld id="{CA855E1B-8830-B64E-B102-DB2BBD0D9567}" type="datetimeFigureOut">
               <a:rPr lang="sv-SE" smtClean="0"/>
-              <a:t>2025-06-04</a:t>
+              <a:t>2025-06-27</a:t>
             </a:fld>
             <a:endParaRPr lang="sv-SE"/>
           </a:p>
@@ -14201,7 +14201,7 @@
         <p:spPr>
           <a:xfrm>
             <a:off x="451706" y="3328078"/>
-            <a:ext cx="11226129" cy="5950956"/>
+            <a:ext cx="11226129" cy="6066014"/>
           </a:xfrm>
           <a:prstGeom prst="rect">
             <a:avLst/>
@@ -14257,8 +14257,8 @@
         </p:nvSpPr>
         <p:spPr>
           <a:xfrm>
-            <a:off x="6096044" y="3562275"/>
-            <a:ext cx="5154004" cy="4462272"/>
+            <a:off x="5979753" y="3784842"/>
+            <a:ext cx="5608633" cy="4868654"/>
           </a:xfrm>
           <a:prstGeom prst="rect">
             <a:avLst/>
@@ -14266,7 +14266,11 @@
           <a:solidFill>
             <a:schemeClr val="bg1"/>
           </a:solidFill>
-          <a:ln w="0"/>
+          <a:ln w="12700">
+            <a:solidFill>
+              <a:schemeClr val="accent1"/>
+            </a:solidFill>
+          </a:ln>
         </p:spPr>
         <p:style>
           <a:lnRef idx="2">
@@ -14353,7 +14357,7 @@
             <a:avLst/>
           </a:prstGeom>
           <a:noFill/>
-          <a:ln>
+          <a:ln w="12700">
             <a:solidFill>
               <a:schemeClr val="accent1"/>
             </a:solidFill>
@@ -14499,7 +14503,7 @@
         </p:nvSpPr>
         <p:spPr>
           <a:xfrm>
-            <a:off x="599550" y="3562275"/>
+            <a:off x="559609" y="3786855"/>
             <a:ext cx="5019594" cy="5509200"/>
           </a:xfrm>
           <a:prstGeom prst="rect">
@@ -14508,7 +14512,7 @@
           <a:solidFill>
             <a:schemeClr val="bg1"/>
           </a:solidFill>
-          <a:ln>
+          <a:ln w="12700">
             <a:solidFill>
               <a:schemeClr val="accent1"/>
             </a:solidFill>
@@ -15046,7 +15050,7 @@
         </p:nvSpPr>
         <p:spPr>
           <a:xfrm>
-            <a:off x="6729172" y="3670019"/>
+            <a:off x="6818173" y="3832476"/>
             <a:ext cx="572366" cy="246221"/>
           </a:xfrm>
           <a:prstGeom prst="rect">
@@ -15082,7 +15086,7 @@
         </p:nvSpPr>
         <p:spPr>
           <a:xfrm>
-            <a:off x="9281254" y="3639459"/>
+            <a:off x="9370255" y="3801916"/>
             <a:ext cx="820793" cy="246221"/>
           </a:xfrm>
           <a:prstGeom prst="rect">
@@ -16291,48 +16295,6 @@
       </p:sp>
       <p:sp>
         <p:nvSpPr>
-          <p:cNvPr id="124" name="TextBox 123">
-            <a:extLst>
-              <a:ext uri="{FF2B5EF4-FFF2-40B4-BE49-F238E27FC236}">
-                <a16:creationId xmlns:a16="http://schemas.microsoft.com/office/drawing/2014/main" id="{A3A75491-E066-021D-9B1B-CCADDB40C015}"/>
-              </a:ext>
-            </a:extLst>
-          </p:cNvPr>
-          <p:cNvSpPr txBox="1"/>
-          <p:nvPr/>
-        </p:nvSpPr>
-        <p:spPr>
-          <a:xfrm>
-            <a:off x="6193794" y="8117958"/>
-            <a:ext cx="5484041" cy="400110"/>
-          </a:xfrm>
-          <a:prstGeom prst="rect">
-            <a:avLst/>
-          </a:prstGeom>
-          <a:noFill/>
-        </p:spPr>
-        <p:txBody>
-          <a:bodyPr wrap="square">
-            <a:spAutoFit/>
-          </a:bodyPr>
-          <a:lstStyle/>
-          <a:p>
-            <a:r>
-              <a:rPr lang="en-US" sz="1000" noProof="1"/>
-              <a:t>*)  NOTE, git difftool waits until pragma-merge is closed. That’s why I start a delayed local</a:t>
-            </a:r>
-          </a:p>
-          <a:p>
-            <a:r>
-              <a:rPr lang="en-US" sz="1000" noProof="1"/>
-              <a:t> pick-up of files -- to give server difftool time to generate BASE, … .</a:t>
-            </a:r>
-            <a:endParaRPr lang="en-US" sz="1000" dirty="0"/>
-          </a:p>
-        </p:txBody>
-      </p:sp>
-      <p:sp>
-        <p:nvSpPr>
           <p:cNvPr id="125" name="TextBox 124">
             <a:extLst>
               <a:ext uri="{FF2B5EF4-FFF2-40B4-BE49-F238E27FC236}">
@@ -16549,7 +16511,7 @@
             <a:avLst/>
           </a:prstGeom>
           <a:noFill/>
-          <a:ln>
+          <a:ln w="12700">
             <a:solidFill>
               <a:schemeClr val="accent1"/>
             </a:solidFill>
@@ -16634,6 +16596,156 @@
               <a:buChar char="o"/>
             </a:pPr>
             <a:endParaRPr lang="en-US" sz="800" noProof="1"/>
+          </a:p>
+        </p:txBody>
+      </p:sp>
+      <p:sp>
+        <p:nvSpPr>
+          <p:cNvPr id="9" name="TextBox 8">
+            <a:extLst>
+              <a:ext uri="{FF2B5EF4-FFF2-40B4-BE49-F238E27FC236}">
+                <a16:creationId xmlns:a16="http://schemas.microsoft.com/office/drawing/2014/main" id="{ABB4C26E-1F75-21FF-1C5B-FA2AA1E1E0E0}"/>
+              </a:ext>
+            </a:extLst>
+          </p:cNvPr>
+          <p:cNvSpPr txBox="1"/>
+          <p:nvPr/>
+        </p:nvSpPr>
+        <p:spPr>
+          <a:xfrm>
+            <a:off x="513990" y="3407195"/>
+            <a:ext cx="5019595" cy="307777"/>
+          </a:xfrm>
+          <a:prstGeom prst="rect">
+            <a:avLst/>
+          </a:prstGeom>
+          <a:noFill/>
+        </p:spPr>
+        <p:txBody>
+          <a:bodyPr wrap="square">
+            <a:spAutoFit/>
+          </a:bodyPr>
+          <a:lstStyle/>
+          <a:p>
+            <a:r>
+              <a:rPr lang="en-US" sz="1000" b="1" noProof="1"/>
+              <a:t>BELOW IS DOCUMENTED IN  </a:t>
+            </a:r>
+            <a:r>
+              <a:rPr lang="en-US" sz="1400" b="1" noProof="1">
+                <a:hlinkClick r:id="rId2"/>
+              </a:rPr>
+              <a:t>SSH-folder-documentation.xlsx</a:t>
+            </a:r>
+            <a:endParaRPr lang="en-US" sz="1400" b="1" dirty="0"/>
+          </a:p>
+        </p:txBody>
+      </p:sp>
+      <p:sp>
+        <p:nvSpPr>
+          <p:cNvPr id="11" name="TextBox 10">
+            <a:extLst>
+              <a:ext uri="{FF2B5EF4-FFF2-40B4-BE49-F238E27FC236}">
+                <a16:creationId xmlns:a16="http://schemas.microsoft.com/office/drawing/2014/main" id="{6AD517F4-28AB-E486-0DB1-C8B56C3E504D}"/>
+              </a:ext>
+            </a:extLst>
+          </p:cNvPr>
+          <p:cNvSpPr txBox="1"/>
+          <p:nvPr/>
+        </p:nvSpPr>
+        <p:spPr>
+          <a:xfrm>
+            <a:off x="5996356" y="8720843"/>
+            <a:ext cx="5592030" cy="553998"/>
+          </a:xfrm>
+          <a:prstGeom prst="rect">
+            <a:avLst/>
+          </a:prstGeom>
+          <a:solidFill>
+            <a:schemeClr val="bg1"/>
+          </a:solidFill>
+          <a:ln>
+            <a:solidFill>
+              <a:schemeClr val="accent1"/>
+            </a:solidFill>
+          </a:ln>
+        </p:spPr>
+        <p:txBody>
+          <a:bodyPr wrap="square">
+            <a:spAutoFit/>
+          </a:bodyPr>
+          <a:lstStyle/>
+          <a:p>
+            <a:r>
+              <a:rPr lang="en-US" sz="1000" b="1" noProof="1"/>
+              <a:t>Reading and Writing files </a:t>
+            </a:r>
+            <a:r>
+              <a:rPr lang="en-US" sz="1000" noProof="1"/>
+              <a:t>relative the server’s repo base, is done with additional scripts:</a:t>
+            </a:r>
+          </a:p>
+          <a:p>
+            <a:pPr marL="171450" indent="-171450">
+              <a:buFont typeface="Arial" panose="020B0604020202020204" pitchFamily="34" charset="0"/>
+              <a:buChar char="•"/>
+            </a:pPr>
+            <a:r>
+              <a:rPr lang="en-US" sz="1000" noProof="1"/>
+              <a:t>ssh-get  --  Used for edit-link in changed list, and for .gitignore tool</a:t>
+            </a:r>
+          </a:p>
+          <a:p>
+            <a:pPr marL="171450" indent="-171450">
+              <a:buFont typeface="Arial" panose="020B0604020202020204" pitchFamily="34" charset="0"/>
+              <a:buChar char="•"/>
+            </a:pPr>
+            <a:r>
+              <a:rPr lang="en-US" sz="1000" noProof="1"/>
+              <a:t>ssh-put  --  Used to update server file after a file is modified in pragma-merge. Also for .gitignore tool</a:t>
+            </a:r>
+          </a:p>
+        </p:txBody>
+      </p:sp>
+      <p:sp>
+        <p:nvSpPr>
+          <p:cNvPr id="124" name="TextBox 123">
+            <a:extLst>
+              <a:ext uri="{FF2B5EF4-FFF2-40B4-BE49-F238E27FC236}">
+                <a16:creationId xmlns:a16="http://schemas.microsoft.com/office/drawing/2014/main" id="{A3A75491-E066-021D-9B1B-CCADDB40C015}"/>
+              </a:ext>
+            </a:extLst>
+          </p:cNvPr>
+          <p:cNvSpPr txBox="1"/>
+          <p:nvPr/>
+        </p:nvSpPr>
+        <p:spPr>
+          <a:xfrm>
+            <a:off x="6035314" y="8179239"/>
+            <a:ext cx="5484041" cy="400110"/>
+          </a:xfrm>
+          <a:prstGeom prst="rect">
+            <a:avLst/>
+          </a:prstGeom>
+          <a:noFill/>
+        </p:spPr>
+        <p:txBody>
+          <a:bodyPr wrap="square">
+            <a:spAutoFit/>
+          </a:bodyPr>
+          <a:lstStyle/>
+          <a:p>
+            <a:r>
+              <a:rPr lang="en-US" sz="1000" noProof="1"/>
+              <a:t>*)  NOTE, git difftool waits until pragma-merge is closed. That’s why I start a delayed local</a:t>
+            </a:r>
+          </a:p>
+          <a:p>
+            <a:r>
+              <a:rPr lang="en-US" sz="1000" noProof="1"/>
+              <a:t> pick-up of files -- to give server difftool time to generate BASE, … .</a:t>
+            </a:r>
+            <a:endParaRPr lang="en-US" sz="1000" dirty="0"/>
           </a:p>
         </p:txBody>
       </p:sp>

--- a/docs/Tech-overview.pptx
+++ b/docs/Tech-overview.pptx
@@ -264,7 +264,7 @@
           <a:p>
             <a:fld id="{CA855E1B-8830-B64E-B102-DB2BBD0D9567}" type="datetimeFigureOut">
               <a:rPr lang="sv-SE" smtClean="0"/>
-              <a:t>2025-06-27</a:t>
+              <a:t>2025-09-10</a:t>
             </a:fld>
             <a:endParaRPr lang="sv-SE"/>
           </a:p>
@@ -434,7 +434,7 @@
           <a:p>
             <a:fld id="{CA855E1B-8830-B64E-B102-DB2BBD0D9567}" type="datetimeFigureOut">
               <a:rPr lang="sv-SE" smtClean="0"/>
-              <a:t>2025-06-27</a:t>
+              <a:t>2025-09-10</a:t>
             </a:fld>
             <a:endParaRPr lang="sv-SE"/>
           </a:p>
@@ -614,7 +614,7 @@
           <a:p>
             <a:fld id="{CA855E1B-8830-B64E-B102-DB2BBD0D9567}" type="datetimeFigureOut">
               <a:rPr lang="sv-SE" smtClean="0"/>
-              <a:t>2025-06-27</a:t>
+              <a:t>2025-09-10</a:t>
             </a:fld>
             <a:endParaRPr lang="sv-SE"/>
           </a:p>
@@ -784,7 +784,7 @@
           <a:p>
             <a:fld id="{CA855E1B-8830-B64E-B102-DB2BBD0D9567}" type="datetimeFigureOut">
               <a:rPr lang="sv-SE" smtClean="0"/>
-              <a:t>2025-06-27</a:t>
+              <a:t>2025-09-10</a:t>
             </a:fld>
             <a:endParaRPr lang="sv-SE"/>
           </a:p>
@@ -1028,7 +1028,7 @@
           <a:p>
             <a:fld id="{CA855E1B-8830-B64E-B102-DB2BBD0D9567}" type="datetimeFigureOut">
               <a:rPr lang="sv-SE" smtClean="0"/>
-              <a:t>2025-06-27</a:t>
+              <a:t>2025-09-10</a:t>
             </a:fld>
             <a:endParaRPr lang="sv-SE"/>
           </a:p>
@@ -1260,7 +1260,7 @@
           <a:p>
             <a:fld id="{CA855E1B-8830-B64E-B102-DB2BBD0D9567}" type="datetimeFigureOut">
               <a:rPr lang="sv-SE" smtClean="0"/>
-              <a:t>2025-06-27</a:t>
+              <a:t>2025-09-10</a:t>
             </a:fld>
             <a:endParaRPr lang="sv-SE"/>
           </a:p>
@@ -1627,7 +1627,7 @@
           <a:p>
             <a:fld id="{CA855E1B-8830-B64E-B102-DB2BBD0D9567}" type="datetimeFigureOut">
               <a:rPr lang="sv-SE" smtClean="0"/>
-              <a:t>2025-06-27</a:t>
+              <a:t>2025-09-10</a:t>
             </a:fld>
             <a:endParaRPr lang="sv-SE"/>
           </a:p>
@@ -1745,7 +1745,7 @@
           <a:p>
             <a:fld id="{CA855E1B-8830-B64E-B102-DB2BBD0D9567}" type="datetimeFigureOut">
               <a:rPr lang="sv-SE" smtClean="0"/>
-              <a:t>2025-06-27</a:t>
+              <a:t>2025-09-10</a:t>
             </a:fld>
             <a:endParaRPr lang="sv-SE"/>
           </a:p>
@@ -1840,7 +1840,7 @@
           <a:p>
             <a:fld id="{CA855E1B-8830-B64E-B102-DB2BBD0D9567}" type="datetimeFigureOut">
               <a:rPr lang="sv-SE" smtClean="0"/>
-              <a:t>2025-06-27</a:t>
+              <a:t>2025-09-10</a:t>
             </a:fld>
             <a:endParaRPr lang="sv-SE"/>
           </a:p>
@@ -2117,7 +2117,7 @@
           <a:p>
             <a:fld id="{CA855E1B-8830-B64E-B102-DB2BBD0D9567}" type="datetimeFigureOut">
               <a:rPr lang="sv-SE" smtClean="0"/>
-              <a:t>2025-06-27</a:t>
+              <a:t>2025-09-10</a:t>
             </a:fld>
             <a:endParaRPr lang="sv-SE"/>
           </a:p>
@@ -2374,7 +2374,7 @@
           <a:p>
             <a:fld id="{CA855E1B-8830-B64E-B102-DB2BBD0D9567}" type="datetimeFigureOut">
               <a:rPr lang="sv-SE" smtClean="0"/>
-              <a:t>2025-06-27</a:t>
+              <a:t>2025-09-10</a:t>
             </a:fld>
             <a:endParaRPr lang="sv-SE"/>
           </a:p>
@@ -2587,7 +2587,7 @@
           <a:p>
             <a:fld id="{CA855E1B-8830-B64E-B102-DB2BBD0D9567}" type="datetimeFigureOut">
               <a:rPr lang="sv-SE" smtClean="0"/>
-              <a:t>2025-06-27</a:t>
+              <a:t>2025-09-10</a:t>
             </a:fld>
             <a:endParaRPr lang="sv-SE"/>
           </a:p>

--- a/docs/Tech-overview.pptx
+++ b/docs/Tech-overview.pptx
@@ -11,10 +11,11 @@
     <p:sldId id="261" r:id="rId5"/>
     <p:sldId id="262" r:id="rId6"/>
     <p:sldId id="257" r:id="rId7"/>
-    <p:sldId id="264" r:id="rId8"/>
+    <p:sldId id="258" r:id="rId8"/>
     <p:sldId id="265" r:id="rId9"/>
-    <p:sldId id="258" r:id="rId10"/>
-    <p:sldId id="263" r:id="rId11"/>
+    <p:sldId id="266" r:id="rId10"/>
+    <p:sldId id="264" r:id="rId11"/>
+    <p:sldId id="263" r:id="rId12"/>
   </p:sldIdLst>
   <p:sldSz cx="12801600" cy="9601200" type="A3"/>
   <p:notesSz cx="6858000" cy="9144000"/>
@@ -264,7 +265,7 @@
           <a:p>
             <a:fld id="{CA855E1B-8830-B64E-B102-DB2BBD0D9567}" type="datetimeFigureOut">
               <a:rPr lang="sv-SE" smtClean="0"/>
-              <a:t>2025-09-10</a:t>
+              <a:t>2025-10-07</a:t>
             </a:fld>
             <a:endParaRPr lang="sv-SE"/>
           </a:p>
@@ -434,7 +435,7 @@
           <a:p>
             <a:fld id="{CA855E1B-8830-B64E-B102-DB2BBD0D9567}" type="datetimeFigureOut">
               <a:rPr lang="sv-SE" smtClean="0"/>
-              <a:t>2025-09-10</a:t>
+              <a:t>2025-10-07</a:t>
             </a:fld>
             <a:endParaRPr lang="sv-SE"/>
           </a:p>
@@ -614,7 +615,7 @@
           <a:p>
             <a:fld id="{CA855E1B-8830-B64E-B102-DB2BBD0D9567}" type="datetimeFigureOut">
               <a:rPr lang="sv-SE" smtClean="0"/>
-              <a:t>2025-09-10</a:t>
+              <a:t>2025-10-07</a:t>
             </a:fld>
             <a:endParaRPr lang="sv-SE"/>
           </a:p>
@@ -784,7 +785,7 @@
           <a:p>
             <a:fld id="{CA855E1B-8830-B64E-B102-DB2BBD0D9567}" type="datetimeFigureOut">
               <a:rPr lang="sv-SE" smtClean="0"/>
-              <a:t>2025-09-10</a:t>
+              <a:t>2025-10-07</a:t>
             </a:fld>
             <a:endParaRPr lang="sv-SE"/>
           </a:p>
@@ -1028,7 +1029,7 @@
           <a:p>
             <a:fld id="{CA855E1B-8830-B64E-B102-DB2BBD0D9567}" type="datetimeFigureOut">
               <a:rPr lang="sv-SE" smtClean="0"/>
-              <a:t>2025-09-10</a:t>
+              <a:t>2025-10-07</a:t>
             </a:fld>
             <a:endParaRPr lang="sv-SE"/>
           </a:p>
@@ -1260,7 +1261,7 @@
           <a:p>
             <a:fld id="{CA855E1B-8830-B64E-B102-DB2BBD0D9567}" type="datetimeFigureOut">
               <a:rPr lang="sv-SE" smtClean="0"/>
-              <a:t>2025-09-10</a:t>
+              <a:t>2025-10-07</a:t>
             </a:fld>
             <a:endParaRPr lang="sv-SE"/>
           </a:p>
@@ -1627,7 +1628,7 @@
           <a:p>
             <a:fld id="{CA855E1B-8830-B64E-B102-DB2BBD0D9567}" type="datetimeFigureOut">
               <a:rPr lang="sv-SE" smtClean="0"/>
-              <a:t>2025-09-10</a:t>
+              <a:t>2025-10-07</a:t>
             </a:fld>
             <a:endParaRPr lang="sv-SE"/>
           </a:p>
@@ -1745,7 +1746,7 @@
           <a:p>
             <a:fld id="{CA855E1B-8830-B64E-B102-DB2BBD0D9567}" type="datetimeFigureOut">
               <a:rPr lang="sv-SE" smtClean="0"/>
-              <a:t>2025-09-10</a:t>
+              <a:t>2025-10-07</a:t>
             </a:fld>
             <a:endParaRPr lang="sv-SE"/>
           </a:p>
@@ -1840,7 +1841,7 @@
           <a:p>
             <a:fld id="{CA855E1B-8830-B64E-B102-DB2BBD0D9567}" type="datetimeFigureOut">
               <a:rPr lang="sv-SE" smtClean="0"/>
-              <a:t>2025-09-10</a:t>
+              <a:t>2025-10-07</a:t>
             </a:fld>
             <a:endParaRPr lang="sv-SE"/>
           </a:p>
@@ -2117,7 +2118,7 @@
           <a:p>
             <a:fld id="{CA855E1B-8830-B64E-B102-DB2BBD0D9567}" type="datetimeFigureOut">
               <a:rPr lang="sv-SE" smtClean="0"/>
-              <a:t>2025-09-10</a:t>
+              <a:t>2025-10-07</a:t>
             </a:fld>
             <a:endParaRPr lang="sv-SE"/>
           </a:p>
@@ -2374,7 +2375,7 @@
           <a:p>
             <a:fld id="{CA855E1B-8830-B64E-B102-DB2BBD0D9567}" type="datetimeFigureOut">
               <a:rPr lang="sv-SE" smtClean="0"/>
-              <a:t>2025-09-10</a:t>
+              <a:t>2025-10-07</a:t>
             </a:fld>
             <a:endParaRPr lang="sv-SE"/>
           </a:p>
@@ -2587,7 +2588,7 @@
           <a:p>
             <a:fld id="{CA855E1B-8830-B64E-B102-DB2BBD0D9567}" type="datetimeFigureOut">
               <a:rPr lang="sv-SE" smtClean="0"/>
-              <a:t>2025-09-10</a:t>
+              <a:t>2025-10-07</a:t>
             </a:fld>
             <a:endParaRPr lang="sv-SE"/>
           </a:p>
@@ -3329,6 +3330,787 @@
 </file>
 
 <file path=ppt/slides/slide10.xml><?xml version="1.0" encoding="utf-8"?>
+<p:sld xmlns:a="http://schemas.openxmlformats.org/drawingml/2006/main" xmlns:r="http://schemas.openxmlformats.org/officeDocument/2006/relationships" xmlns:p="http://schemas.openxmlformats.org/presentationml/2006/main">
+  <p:cSld>
+    <p:spTree>
+      <p:nvGrpSpPr>
+        <p:cNvPr id="1" name="">
+          <a:extLst>
+            <a:ext uri="{FF2B5EF4-FFF2-40B4-BE49-F238E27FC236}">
+              <a16:creationId xmlns:a16="http://schemas.microsoft.com/office/drawing/2014/main" id="{DE518DAA-53D0-1105-C6F2-C801F08D5253}"/>
+            </a:ext>
+          </a:extLst>
+        </p:cNvPr>
+        <p:cNvGrpSpPr/>
+        <p:nvPr/>
+      </p:nvGrpSpPr>
+      <p:grpSpPr>
+        <a:xfrm>
+          <a:off x="0" y="0"/>
+          <a:ext cx="0" cy="0"/>
+          <a:chOff x="0" y="0"/>
+          <a:chExt cx="0" cy="0"/>
+        </a:xfrm>
+      </p:grpSpPr>
+      <p:sp>
+        <p:nvSpPr>
+          <p:cNvPr id="4" name="textruta 3">
+            <a:extLst>
+              <a:ext uri="{FF2B5EF4-FFF2-40B4-BE49-F238E27FC236}">
+                <a16:creationId xmlns:a16="http://schemas.microsoft.com/office/drawing/2014/main" id="{84151DEA-44C4-2776-6854-868F7FB7712C}"/>
+              </a:ext>
+            </a:extLst>
+          </p:cNvPr>
+          <p:cNvSpPr txBox="1"/>
+          <p:nvPr/>
+        </p:nvSpPr>
+        <p:spPr>
+          <a:xfrm>
+            <a:off x="416902" y="122259"/>
+            <a:ext cx="7999947" cy="830997"/>
+          </a:xfrm>
+          <a:prstGeom prst="rect">
+            <a:avLst/>
+          </a:prstGeom>
+          <a:noFill/>
+        </p:spPr>
+        <p:txBody>
+          <a:bodyPr wrap="none" rtlCol="0">
+            <a:spAutoFit/>
+          </a:bodyPr>
+          <a:lstStyle/>
+          <a:p>
+            <a:r>
+              <a:rPr lang="en-US" sz="4800" b="1" noProof="1">
+                <a:solidFill>
+                  <a:schemeClr val="accent1"/>
+                </a:solidFill>
+              </a:rPr>
+              <a:t>Git providers (github, gitlab,…)</a:t>
+            </a:r>
+          </a:p>
+        </p:txBody>
+      </p:sp>
+      <p:sp>
+        <p:nvSpPr>
+          <p:cNvPr id="5" name="textruta 4">
+            <a:extLst>
+              <a:ext uri="{FF2B5EF4-FFF2-40B4-BE49-F238E27FC236}">
+                <a16:creationId xmlns:a16="http://schemas.microsoft.com/office/drawing/2014/main" id="{ADE3883B-4E67-CF9D-9EEC-2A26C5A55CD6}"/>
+              </a:ext>
+            </a:extLst>
+          </p:cNvPr>
+          <p:cNvSpPr txBox="1"/>
+          <p:nvPr/>
+        </p:nvSpPr>
+        <p:spPr>
+          <a:xfrm>
+            <a:off x="498478" y="1497415"/>
+            <a:ext cx="3274288" cy="4401205"/>
+          </a:xfrm>
+          <a:prstGeom prst="rect">
+            <a:avLst/>
+          </a:prstGeom>
+          <a:noFill/>
+          <a:ln>
+            <a:solidFill>
+              <a:schemeClr val="accent1"/>
+            </a:solidFill>
+          </a:ln>
+        </p:spPr>
+        <p:txBody>
+          <a:bodyPr wrap="square" rtlCol="0">
+            <a:spAutoFit/>
+          </a:bodyPr>
+          <a:lstStyle/>
+          <a:p>
+            <a:r>
+              <a:rPr lang="en-US" sz="800" b="1" noProof="1"/>
+              <a:t>Providers are implemented in the following way</a:t>
+            </a:r>
+            <a:br>
+              <a:rPr lang="en-US" sz="800" b="1" noProof="1"/>
+            </a:br>
+            <a:endParaRPr lang="en-US" sz="800" b="1" noProof="1"/>
+          </a:p>
+          <a:p>
+            <a:pPr marL="171450" indent="-171450">
+              <a:buFont typeface="Courier New" panose="02070309020205020404" pitchFamily="49" charset="0"/>
+              <a:buChar char="o"/>
+            </a:pPr>
+            <a:r>
+              <a:rPr lang="en-US" sz="800" noProof="1">
+                <a:solidFill>
+                  <a:schemeClr val="accent1"/>
+                </a:solidFill>
+              </a:rPr>
+              <a:t>Classes for different providers</a:t>
+            </a:r>
+            <a:r>
+              <a:rPr lang="en-US" sz="800" noProof="1"/>
+              <a:t>--  in folder apis_github_and_others</a:t>
+            </a:r>
+            <a:br>
+              <a:rPr lang="en-US" sz="800" noProof="1"/>
+            </a:br>
+            <a:endParaRPr lang="en-US" sz="800" noProof="1"/>
+          </a:p>
+          <a:p>
+            <a:pPr marL="171450" indent="-171450">
+              <a:buFont typeface="Courier New" panose="02070309020205020404" pitchFamily="49" charset="0"/>
+              <a:buChar char="o"/>
+            </a:pPr>
+            <a:r>
+              <a:rPr lang="en-US" sz="800" noProof="1">
+                <a:solidFill>
+                  <a:schemeClr val="accent1"/>
+                </a:solidFill>
+              </a:rPr>
+              <a:t>Main class</a:t>
+            </a:r>
+            <a:r>
+              <a:rPr lang="en-US" sz="800" noProof="1"/>
+              <a:t> general_git_rest_api.js</a:t>
+            </a:r>
+          </a:p>
+          <a:p>
+            <a:pPr marL="324000" lvl="1" indent="-171450">
+              <a:buFont typeface="Arial" panose="020B0604020202020204" pitchFamily="34" charset="0"/>
+              <a:buChar char="•"/>
+            </a:pPr>
+            <a:r>
+              <a:rPr lang="en-US" sz="800" noProof="1"/>
+              <a:t>Common constructor sets :</a:t>
+            </a:r>
+            <a:br>
+              <a:rPr lang="en-US" sz="800" noProof="1"/>
+            </a:br>
+            <a:r>
+              <a:rPr lang="en-US" sz="800" noProof="1"/>
+              <a:t> giturl, username, TOKEN</a:t>
+            </a:r>
+          </a:p>
+          <a:p>
+            <a:pPr marL="324000" lvl="1" indent="-171450">
+              <a:buFont typeface="Arial" panose="020B0604020202020204" pitchFamily="34" charset="0"/>
+              <a:buChar char="•"/>
+            </a:pPr>
+            <a:r>
+              <a:rPr lang="en-US" sz="800" noProof="1"/>
+              <a:t>Implements fetch function :</a:t>
+            </a:r>
+            <a:br>
+              <a:rPr lang="en-US" sz="800" noProof="1"/>
+            </a:br>
+            <a:r>
+              <a:rPr lang="en-US" sz="800" noProof="1"/>
+              <a:t> fetchWithApi</a:t>
+            </a:r>
+          </a:p>
+          <a:p>
+            <a:pPr marL="171450" indent="-171450">
+              <a:buFont typeface="Courier New" panose="02070309020205020404" pitchFamily="49" charset="0"/>
+              <a:buChar char="o"/>
+            </a:pPr>
+            <a:endParaRPr lang="en-US" sz="800" noProof="1"/>
+          </a:p>
+          <a:p>
+            <a:pPr marL="171450" indent="-171450">
+              <a:buFont typeface="Courier New" panose="02070309020205020404" pitchFamily="49" charset="0"/>
+              <a:buChar char="o"/>
+            </a:pPr>
+            <a:r>
+              <a:rPr lang="en-US" sz="800" noProof="1">
+                <a:solidFill>
+                  <a:schemeClr val="accent1"/>
+                </a:solidFill>
+              </a:rPr>
+              <a:t>Provider-specific i</a:t>
+            </a:r>
+            <a:r>
+              <a:rPr lang="en-US" sz="800" noProof="1"/>
+              <a:t>mplemented by inheriting from general_git_rest_api.js. </a:t>
+            </a:r>
+          </a:p>
+          <a:p>
+            <a:pPr marL="171450" indent="-171450">
+              <a:buFont typeface="Courier New" panose="02070309020205020404" pitchFamily="49" charset="0"/>
+              <a:buChar char="o"/>
+            </a:pPr>
+            <a:endParaRPr lang="en-US" sz="800" noProof="1"/>
+          </a:p>
+          <a:p>
+            <a:pPr marL="171450" indent="-171450">
+              <a:buFont typeface="Courier New" panose="02070309020205020404" pitchFamily="49" charset="0"/>
+              <a:buChar char="o"/>
+            </a:pPr>
+            <a:r>
+              <a:rPr lang="en-US" sz="800" noProof="1">
+                <a:solidFill>
+                  <a:schemeClr val="accent1"/>
+                </a:solidFill>
+              </a:rPr>
+              <a:t>Adding a new provider means to  implement the following methods</a:t>
+            </a:r>
+            <a:r>
+              <a:rPr lang="en-US" sz="800" noProof="1"/>
+              <a:t>: </a:t>
+            </a:r>
+          </a:p>
+          <a:p>
+            <a:pPr marL="324000" lvl="1" indent="-171450">
+              <a:buFont typeface="Arial" panose="020B0604020202020204" pitchFamily="34" charset="0"/>
+              <a:buChar char="•"/>
+            </a:pPr>
+            <a:r>
+              <a:rPr lang="en-US" sz="800" noProof="1"/>
+              <a:t>Constructor – inherits from main class, but also set this.api-url</a:t>
+            </a:r>
+          </a:p>
+          <a:p>
+            <a:pPr marL="324000" lvl="1" indent="-171450">
+              <a:buFont typeface="Arial" panose="020B0604020202020204" pitchFamily="34" charset="0"/>
+              <a:buChar char="•"/>
+            </a:pPr>
+            <a:r>
+              <a:rPr lang="en-US" sz="800" noProof="1"/>
+              <a:t>initialize – calls api and get json response from api</a:t>
+            </a:r>
+          </a:p>
+          <a:p>
+            <a:pPr marL="324000" lvl="1" indent="-171450">
+              <a:buFont typeface="Arial" panose="020B0604020202020204" pitchFamily="34" charset="0"/>
+              <a:buChar char="•"/>
+            </a:pPr>
+            <a:r>
+              <a:rPr lang="en-US" sz="800" noProof="1"/>
+              <a:t>createRepo – creates a repository through api call</a:t>
+            </a:r>
+          </a:p>
+          <a:p>
+            <a:pPr marL="324000" lvl="1" indent="-171450">
+              <a:buFont typeface="Arial" panose="020B0604020202020204" pitchFamily="34" charset="0"/>
+              <a:buChar char="•"/>
+            </a:pPr>
+            <a:r>
+              <a:rPr lang="en-US" sz="800" noProof="1"/>
+              <a:t>getValue – gets a number of values from json response in a standardized way (same for all providers)</a:t>
+            </a:r>
+          </a:p>
+          <a:p>
+            <a:pPr marL="324000" lvl="1" indent="-171450">
+              <a:buFont typeface="Arial" panose="020B0604020202020204" pitchFamily="34" charset="0"/>
+              <a:buChar char="•"/>
+            </a:pPr>
+            <a:endParaRPr lang="en-US" sz="800" noProof="1"/>
+          </a:p>
+          <a:p>
+            <a:pPr marL="171450" indent="-171450">
+              <a:buFont typeface="Courier New" panose="02070309020205020404" pitchFamily="49" charset="0"/>
+              <a:buChar char="o"/>
+            </a:pPr>
+            <a:r>
+              <a:rPr lang="en-US" sz="800" noProof="1">
+                <a:solidFill>
+                  <a:schemeClr val="accent1"/>
+                </a:solidFill>
+              </a:rPr>
+              <a:t>getValue</a:t>
+            </a:r>
+            <a:r>
+              <a:rPr lang="en-US" sz="800" noProof="1"/>
+              <a:t> can be called with these parameters  (may be updated)</a:t>
+            </a:r>
+          </a:p>
+          <a:p>
+            <a:pPr marL="152550" lvl="1"/>
+            <a:r>
+              <a:rPr lang="en-US" sz="800" b="1" noProof="1"/>
+              <a:t>   The following can be called without initialization (fast)</a:t>
+            </a:r>
+          </a:p>
+          <a:p>
+            <a:pPr marL="324000" lvl="1" indent="-171450">
+              <a:buFont typeface="Arial" panose="020B0604020202020204" pitchFamily="34" charset="0"/>
+              <a:buChar char="•"/>
+            </a:pPr>
+            <a:r>
+              <a:rPr lang="en-US" sz="800" noProof="1"/>
+              <a:t>'git-username’ – username needed</a:t>
+            </a:r>
+          </a:p>
+          <a:p>
+            <a:pPr marL="324000" lvl="1" indent="-171450">
+              <a:buFont typeface="Arial" panose="020B0604020202020204" pitchFamily="34" charset="0"/>
+              <a:buChar char="•"/>
+            </a:pPr>
+            <a:r>
+              <a:rPr lang="en-US" sz="800" noProof="1"/>
+              <a:t>'icon’ – path to 16x16 pixel icon.  Should return path to a  darkmode and lightmode icon (you can return same path, if it is a color icon that works for both). See gitlab.com.js implementation</a:t>
+            </a:r>
+          </a:p>
+          <a:p>
+            <a:pPr marL="152550" lvl="1"/>
+            <a:r>
+              <a:rPr lang="en-US" sz="800" b="1" noProof="1"/>
+              <a:t>   The following requires a call to initialize() before accessible :</a:t>
+            </a:r>
+          </a:p>
+          <a:p>
+            <a:pPr marL="324000" lvl="1" indent="-171450">
+              <a:buFont typeface="Arial" panose="020B0604020202020204" pitchFamily="34" charset="0"/>
+              <a:buChar char="•"/>
+            </a:pPr>
+            <a:r>
+              <a:rPr lang="en-US" sz="800" noProof="1"/>
+              <a:t>'web-url’ – url to providers web page for this repo </a:t>
+            </a:r>
+          </a:p>
+          <a:p>
+            <a:pPr marL="324000" lvl="1" indent="-171450">
+              <a:buFont typeface="Arial" panose="020B0604020202020204" pitchFamily="34" charset="0"/>
+              <a:buChar char="•"/>
+            </a:pPr>
+            <a:r>
+              <a:rPr lang="en-US" sz="800" noProof="1"/>
+              <a:t>api-url’ –url to call api</a:t>
+            </a:r>
+          </a:p>
+          <a:p>
+            <a:pPr marL="324000" lvl="1" indent="-171450">
+              <a:buFont typeface="Arial" panose="020B0604020202020204" pitchFamily="34" charset="0"/>
+              <a:buChar char="•"/>
+            </a:pPr>
+            <a:r>
+              <a:rPr lang="en-US" sz="800" noProof="1"/>
+              <a:t>'api-status’ – status when calling api</a:t>
+            </a:r>
+          </a:p>
+          <a:p>
+            <a:pPr marL="324000" lvl="1" indent="-171450">
+              <a:buFont typeface="Arial" panose="020B0604020202020204" pitchFamily="34" charset="0"/>
+              <a:buChar char="•"/>
+            </a:pPr>
+            <a:r>
+              <a:rPr lang="en-US" sz="800" noProof="1"/>
+              <a:t>'fork-parent’ – if a forked repo, this is the url to original repo</a:t>
+            </a:r>
+          </a:p>
+          <a:p>
+            <a:pPr marL="324000" lvl="1" indent="-171450">
+              <a:buFont typeface="Arial" panose="020B0604020202020204" pitchFamily="34" charset="0"/>
+              <a:buChar char="•"/>
+            </a:pPr>
+            <a:r>
+              <a:rPr lang="en-US" sz="800" noProof="1"/>
+              <a:t>'is-private-repo’ -- tells if private / public repo</a:t>
+            </a:r>
+          </a:p>
+          <a:p>
+            <a:endParaRPr lang="en-US" sz="800" noProof="1"/>
+          </a:p>
+          <a:p>
+            <a:pPr marL="171450" indent="-171450">
+              <a:buFont typeface="Courier New" panose="02070309020205020404" pitchFamily="49" charset="0"/>
+              <a:buChar char="o"/>
+            </a:pPr>
+            <a:r>
+              <a:rPr lang="en-US" sz="800" noProof="1">
+                <a:solidFill>
+                  <a:schemeClr val="accent1"/>
+                </a:solidFill>
+              </a:rPr>
+              <a:t>Icons and supporting material can be placed in the same folder: </a:t>
+            </a:r>
+            <a:r>
+              <a:rPr lang="en-US" sz="800" noProof="1"/>
+              <a:t>apis_github_and_others</a:t>
+            </a:r>
+          </a:p>
+        </p:txBody>
+      </p:sp>
+      <p:sp>
+        <p:nvSpPr>
+          <p:cNvPr id="6" name="textruta 5">
+            <a:extLst>
+              <a:ext uri="{FF2B5EF4-FFF2-40B4-BE49-F238E27FC236}">
+                <a16:creationId xmlns:a16="http://schemas.microsoft.com/office/drawing/2014/main" id="{943D8880-E278-C35C-CEEF-0D60AB679EF5}"/>
+              </a:ext>
+            </a:extLst>
+          </p:cNvPr>
+          <p:cNvSpPr txBox="1"/>
+          <p:nvPr/>
+        </p:nvSpPr>
+        <p:spPr>
+          <a:xfrm>
+            <a:off x="336553" y="953256"/>
+            <a:ext cx="3030125" cy="461665"/>
+          </a:xfrm>
+          <a:prstGeom prst="rect">
+            <a:avLst/>
+          </a:prstGeom>
+          <a:noFill/>
+        </p:spPr>
+        <p:txBody>
+          <a:bodyPr wrap="none" rtlCol="0">
+            <a:spAutoFit/>
+          </a:bodyPr>
+          <a:lstStyle/>
+          <a:p>
+            <a:r>
+              <a:rPr lang="en-US" sz="2400" b="1" noProof="1"/>
+              <a:t>Provider API functions</a:t>
+            </a:r>
+          </a:p>
+        </p:txBody>
+      </p:sp>
+      <p:sp>
+        <p:nvSpPr>
+          <p:cNvPr id="3" name="textruta 5">
+            <a:extLst>
+              <a:ext uri="{FF2B5EF4-FFF2-40B4-BE49-F238E27FC236}">
+                <a16:creationId xmlns:a16="http://schemas.microsoft.com/office/drawing/2014/main" id="{2987841D-179A-486D-5E40-0A0422DA3632}"/>
+              </a:ext>
+            </a:extLst>
+          </p:cNvPr>
+          <p:cNvSpPr txBox="1"/>
+          <p:nvPr/>
+        </p:nvSpPr>
+        <p:spPr>
+          <a:xfrm>
+            <a:off x="4270378" y="939343"/>
+            <a:ext cx="2729080" cy="461665"/>
+          </a:xfrm>
+          <a:prstGeom prst="rect">
+            <a:avLst/>
+          </a:prstGeom>
+          <a:noFill/>
+        </p:spPr>
+        <p:txBody>
+          <a:bodyPr wrap="none" rtlCol="0">
+            <a:spAutoFit/>
+          </a:bodyPr>
+          <a:lstStyle/>
+          <a:p>
+            <a:r>
+              <a:rPr lang="en-US" sz="2400" b="1" noProof="1"/>
+              <a:t>Provider GUI wizard</a:t>
+            </a:r>
+          </a:p>
+        </p:txBody>
+      </p:sp>
+      <p:sp>
+        <p:nvSpPr>
+          <p:cNvPr id="7" name="textruta 4">
+            <a:extLst>
+              <a:ext uri="{FF2B5EF4-FFF2-40B4-BE49-F238E27FC236}">
+                <a16:creationId xmlns:a16="http://schemas.microsoft.com/office/drawing/2014/main" id="{0BF97886-D135-15CC-61EF-28B42C9BDBDF}"/>
+              </a:ext>
+            </a:extLst>
+          </p:cNvPr>
+          <p:cNvSpPr txBox="1"/>
+          <p:nvPr/>
+        </p:nvSpPr>
+        <p:spPr>
+          <a:xfrm>
+            <a:off x="4346578" y="1497414"/>
+            <a:ext cx="3274288" cy="1938992"/>
+          </a:xfrm>
+          <a:prstGeom prst="rect">
+            <a:avLst/>
+          </a:prstGeom>
+          <a:noFill/>
+          <a:ln>
+            <a:solidFill>
+              <a:schemeClr val="accent1"/>
+            </a:solidFill>
+          </a:ln>
+        </p:spPr>
+        <p:txBody>
+          <a:bodyPr wrap="square" rtlCol="0">
+            <a:spAutoFit/>
+          </a:bodyPr>
+          <a:lstStyle/>
+          <a:p>
+            <a:r>
+              <a:rPr lang="en-US" sz="800" b="1" noProof="1"/>
+              <a:t>The GUI for providers are implemented in the following way</a:t>
+            </a:r>
+            <a:br>
+              <a:rPr lang="en-US" sz="800" b="1" noProof="1"/>
+            </a:br>
+            <a:endParaRPr lang="en-US" sz="800" b="1" noProof="1"/>
+          </a:p>
+          <a:p>
+            <a:pPr marL="171450" indent="-171450">
+              <a:buFont typeface="Courier New" panose="02070309020205020404" pitchFamily="49" charset="0"/>
+              <a:buChar char="o"/>
+            </a:pPr>
+            <a:r>
+              <a:rPr lang="en-US" sz="800" noProof="1">
+                <a:solidFill>
+                  <a:schemeClr val="accent1"/>
+                </a:solidFill>
+              </a:rPr>
+              <a:t>Common html -- </a:t>
+            </a:r>
+            <a:r>
+              <a:rPr lang="en-US" sz="800" noProof="1"/>
+              <a:t>Create_remote_repository.html</a:t>
+            </a:r>
+          </a:p>
+          <a:p>
+            <a:pPr marL="324000" lvl="1" indent="-171450">
+              <a:buFont typeface="Arial" panose="020B0604020202020204" pitchFamily="34" charset="0"/>
+              <a:buChar char="•"/>
+            </a:pPr>
+            <a:r>
+              <a:rPr lang="en-US" sz="800" noProof="1"/>
+              <a:t>Text made for Github:</a:t>
+            </a:r>
+          </a:p>
+          <a:p>
+            <a:pPr marL="324000" lvl="1" indent="-171450">
+              <a:buFont typeface="Arial" panose="020B0604020202020204" pitchFamily="34" charset="0"/>
+              <a:buChar char="•"/>
+            </a:pPr>
+            <a:endParaRPr lang="en-US" sz="800" noProof="1"/>
+          </a:p>
+          <a:p>
+            <a:pPr marL="171450" indent="-171450">
+              <a:buFont typeface="Courier New" panose="02070309020205020404" pitchFamily="49" charset="0"/>
+              <a:buChar char="o"/>
+            </a:pPr>
+            <a:r>
+              <a:rPr lang="en-US" sz="800" noProof="1">
+                <a:solidFill>
+                  <a:schemeClr val="accent1"/>
+                </a:solidFill>
+              </a:rPr>
+              <a:t>One js-file -- </a:t>
+            </a:r>
+            <a:r>
+              <a:rPr lang="en-US" sz="800" noProof="1"/>
+              <a:t>create_remote_repository.js</a:t>
+            </a:r>
+          </a:p>
+          <a:p>
+            <a:pPr marL="324000" lvl="1" indent="-171450">
+              <a:buFont typeface="Arial" panose="020B0604020202020204" pitchFamily="34" charset="0"/>
+              <a:buChar char="•"/>
+            </a:pPr>
+            <a:r>
+              <a:rPr lang="en-US" sz="800" noProof="1"/>
+              <a:t>Modifies: all text “Github”  to correct provider in html above</a:t>
+            </a:r>
+          </a:p>
+          <a:p>
+            <a:pPr marL="324000" lvl="1" indent="-171450">
+              <a:buFont typeface="Arial" panose="020B0604020202020204" pitchFamily="34" charset="0"/>
+              <a:buChar char="•"/>
+            </a:pPr>
+            <a:r>
+              <a:rPr lang="en-US" sz="800" noProof="1"/>
+              <a:t>Switch statement setting provider-specific labels for inputs</a:t>
+            </a:r>
+          </a:p>
+          <a:p>
+            <a:pPr marL="324000" lvl="1" indent="-171450">
+              <a:buFont typeface="Arial" panose="020B0604020202020204" pitchFamily="34" charset="0"/>
+              <a:buChar char="•"/>
+            </a:pPr>
+            <a:r>
+              <a:rPr lang="en-US" sz="800" noProof="1"/>
+              <a:t>Stores in git credentials</a:t>
+            </a:r>
+            <a:br>
+              <a:rPr lang="en-US" sz="800" noProof="1"/>
+            </a:br>
+            <a:endParaRPr lang="en-US" sz="800" noProof="1"/>
+          </a:p>
+          <a:p>
+            <a:pPr marL="171450" indent="-171450">
+              <a:buFont typeface="Courier New" panose="02070309020205020404" pitchFamily="49" charset="0"/>
+              <a:buChar char="o"/>
+            </a:pPr>
+            <a:r>
+              <a:rPr lang="en-US" sz="800" noProof="1">
+                <a:solidFill>
+                  <a:schemeClr val="accent1"/>
+                </a:solidFill>
+              </a:rPr>
+              <a:t>Mechanism for guessing TOKEN</a:t>
+            </a:r>
+            <a:endParaRPr lang="en-US" sz="800" noProof="1"/>
+          </a:p>
+          <a:p>
+            <a:pPr marL="324000" lvl="1" indent="-171450">
+              <a:buFont typeface="Arial" panose="020B0604020202020204" pitchFamily="34" charset="0"/>
+              <a:buChar char="•"/>
+            </a:pPr>
+            <a:r>
+              <a:rPr lang="en-US" sz="800" noProof="1"/>
+              <a:t>Caches credentials for all repos, and finds the unique usernames for current provider</a:t>
+            </a:r>
+          </a:p>
+          <a:p>
+            <a:pPr marL="324000" lvl="1" indent="-171450">
+              <a:buFont typeface="Arial" panose="020B0604020202020204" pitchFamily="34" charset="0"/>
+              <a:buChar char="•"/>
+            </a:pPr>
+            <a:r>
+              <a:rPr lang="en-US" sz="800" noProof="1"/>
+              <a:t>When user-name matches known credential, the TOKEN/password field is updated</a:t>
+            </a:r>
+          </a:p>
+        </p:txBody>
+      </p:sp>
+      <p:sp>
+        <p:nvSpPr>
+          <p:cNvPr id="8" name="textruta 4">
+            <a:extLst>
+              <a:ext uri="{FF2B5EF4-FFF2-40B4-BE49-F238E27FC236}">
+                <a16:creationId xmlns:a16="http://schemas.microsoft.com/office/drawing/2014/main" id="{0725C2E0-B09A-BD89-F02E-BED7F1342107}"/>
+              </a:ext>
+            </a:extLst>
+          </p:cNvPr>
+          <p:cNvSpPr txBox="1"/>
+          <p:nvPr/>
+        </p:nvSpPr>
+        <p:spPr>
+          <a:xfrm>
+            <a:off x="4416875" y="4478739"/>
+            <a:ext cx="3274288" cy="830997"/>
+          </a:xfrm>
+          <a:prstGeom prst="rect">
+            <a:avLst/>
+          </a:prstGeom>
+          <a:noFill/>
+          <a:ln>
+            <a:solidFill>
+              <a:schemeClr val="accent1"/>
+            </a:solidFill>
+          </a:ln>
+        </p:spPr>
+        <p:txBody>
+          <a:bodyPr wrap="square" rtlCol="0">
+            <a:spAutoFit/>
+          </a:bodyPr>
+          <a:lstStyle/>
+          <a:p>
+            <a:r>
+              <a:rPr lang="en-US" sz="800" b="1" noProof="1"/>
+              <a:t>The GUI for providers are implemented in the following way</a:t>
+            </a:r>
+            <a:br>
+              <a:rPr lang="en-US" sz="800" b="1" noProof="1"/>
+            </a:br>
+            <a:endParaRPr lang="en-US" sz="800" b="1" noProof="1"/>
+          </a:p>
+          <a:p>
+            <a:pPr marL="171450" indent="-171450">
+              <a:buFont typeface="Courier New" panose="02070309020205020404" pitchFamily="49" charset="0"/>
+              <a:buChar char="o"/>
+            </a:pPr>
+            <a:r>
+              <a:rPr lang="en-US" sz="800" noProof="1">
+                <a:solidFill>
+                  <a:schemeClr val="accent1"/>
+                </a:solidFill>
+              </a:rPr>
+              <a:t>Color icons </a:t>
+            </a:r>
+            <a:r>
+              <a:rPr lang="en-US" sz="800" noProof="1"/>
+              <a:t>must be 16x16, RGB to work in menues</a:t>
+            </a:r>
+          </a:p>
+          <a:p>
+            <a:pPr marL="171450" indent="-171450">
+              <a:buFont typeface="Courier New" panose="02070309020205020404" pitchFamily="49" charset="0"/>
+              <a:buChar char="o"/>
+            </a:pPr>
+            <a:r>
+              <a:rPr lang="en-US" sz="800" noProof="1">
+                <a:solidFill>
+                  <a:schemeClr val="accent1"/>
+                </a:solidFill>
+              </a:rPr>
+              <a:t>Seems that bigger matrix </a:t>
+            </a:r>
+            <a:r>
+              <a:rPr lang="en-US" sz="800" noProof="1"/>
+              <a:t>works for b/w github icon</a:t>
+            </a:r>
+          </a:p>
+          <a:p>
+            <a:pPr marL="171450" indent="-171450">
+              <a:buFont typeface="Courier New" panose="02070309020205020404" pitchFamily="49" charset="0"/>
+              <a:buChar char="o"/>
+            </a:pPr>
+            <a:r>
+              <a:rPr lang="en-US" sz="800" noProof="1"/>
+              <a:t>These icons are slightly fuzzy when viewed in settings.</a:t>
+            </a:r>
+          </a:p>
+          <a:p>
+            <a:pPr marL="171450" indent="-171450">
+              <a:buFont typeface="Courier New" panose="02070309020205020404" pitchFamily="49" charset="0"/>
+              <a:buChar char="o"/>
+            </a:pPr>
+            <a:endParaRPr lang="en-US" sz="800" noProof="1"/>
+          </a:p>
+        </p:txBody>
+      </p:sp>
+      <p:sp>
+        <p:nvSpPr>
+          <p:cNvPr id="9" name="textruta 5">
+            <a:extLst>
+              <a:ext uri="{FF2B5EF4-FFF2-40B4-BE49-F238E27FC236}">
+                <a16:creationId xmlns:a16="http://schemas.microsoft.com/office/drawing/2014/main" id="{2DFA1971-7891-05E5-E387-70DA5165528F}"/>
+              </a:ext>
+            </a:extLst>
+          </p:cNvPr>
+          <p:cNvSpPr txBox="1"/>
+          <p:nvPr/>
+        </p:nvSpPr>
+        <p:spPr>
+          <a:xfrm>
+            <a:off x="4270378" y="3749731"/>
+            <a:ext cx="846835" cy="461665"/>
+          </a:xfrm>
+          <a:prstGeom prst="rect">
+            <a:avLst/>
+          </a:prstGeom>
+          <a:noFill/>
+        </p:spPr>
+        <p:txBody>
+          <a:bodyPr wrap="none" rtlCol="0">
+            <a:spAutoFit/>
+          </a:bodyPr>
+          <a:lstStyle/>
+          <a:p>
+            <a:r>
+              <a:rPr lang="en-US" sz="2400" b="1" noProof="1"/>
+              <a:t>Icons</a:t>
+            </a:r>
+          </a:p>
+        </p:txBody>
+      </p:sp>
+    </p:spTree>
+    <p:extLst>
+      <p:ext uri="{BB962C8B-B14F-4D97-AF65-F5344CB8AC3E}">
+        <p14:creationId xmlns:p14="http://schemas.microsoft.com/office/powerpoint/2010/main" val="1071964948"/>
+      </p:ext>
+    </p:extLst>
+  </p:cSld>
+  <p:clrMapOvr>
+    <a:masterClrMapping/>
+  </p:clrMapOvr>
+</p:sld>
+</file>
+
+<file path=ppt/slides/slide11.xml><?xml version="1.0" encoding="utf-8"?>
 <p:sld xmlns:a="http://schemas.openxmlformats.org/drawingml/2006/main" xmlns:r="http://schemas.openxmlformats.org/officeDocument/2006/relationships" xmlns:p="http://schemas.openxmlformats.org/presentationml/2006/main">
   <p:cSld>
     <p:spTree>
@@ -12200,41 +12982,6 @@
       </p:grpSpPr>
       <p:sp>
         <p:nvSpPr>
-          <p:cNvPr id="4" name="textruta 3">
-            <a:extLst>
-              <a:ext uri="{FF2B5EF4-FFF2-40B4-BE49-F238E27FC236}">
-                <a16:creationId xmlns:a16="http://schemas.microsoft.com/office/drawing/2014/main" id="{8B784B0E-8C78-2B47-8EE8-76C10C231606}"/>
-              </a:ext>
-            </a:extLst>
-          </p:cNvPr>
-          <p:cNvSpPr txBox="1"/>
-          <p:nvPr/>
-        </p:nvSpPr>
-        <p:spPr>
-          <a:xfrm>
-            <a:off x="416902" y="953256"/>
-            <a:ext cx="5257530" cy="461665"/>
-          </a:xfrm>
-          <a:prstGeom prst="rect">
-            <a:avLst/>
-          </a:prstGeom>
-          <a:noFill/>
-        </p:spPr>
-        <p:txBody>
-          <a:bodyPr wrap="none" rtlCol="0">
-            <a:spAutoFit/>
-          </a:bodyPr>
-          <a:lstStyle/>
-          <a:p>
-            <a:r>
-              <a:rPr lang="en-US" sz="2400" b="1" noProof="1"/>
-              <a:t>Pragma-merge (built-in diff/merge tool)</a:t>
-            </a:r>
-          </a:p>
-        </p:txBody>
-      </p:sp>
-      <p:sp>
-        <p:nvSpPr>
           <p:cNvPr id="5" name="Rektangel 4">
             <a:extLst>
               <a:ext uri="{FF2B5EF4-FFF2-40B4-BE49-F238E27FC236}">
@@ -12247,8 +12994,8 @@
         </p:nvSpPr>
         <p:spPr>
           <a:xfrm>
-            <a:off x="416902" y="1472403"/>
-            <a:ext cx="5396401" cy="5878532"/>
+            <a:off x="389841" y="1624870"/>
+            <a:ext cx="5567899" cy="7232749"/>
           </a:xfrm>
           <a:prstGeom prst="rect">
             <a:avLst/>
@@ -12268,6 +13015,48 @@
           </a:bodyPr>
           <a:lstStyle/>
           <a:p>
+            <a:endParaRPr lang="en-US" sz="800" b="1" noProof="1"/>
+          </a:p>
+          <a:p>
+            <a:endParaRPr lang="en-US" sz="800" b="1" noProof="1"/>
+          </a:p>
+          <a:p>
+            <a:endParaRPr lang="en-US" sz="800" b="1" noProof="1"/>
+          </a:p>
+          <a:p>
+            <a:endParaRPr lang="en-US" sz="800" b="1" noProof="1"/>
+          </a:p>
+          <a:p>
+            <a:endParaRPr lang="en-US" sz="800" b="1" noProof="1"/>
+          </a:p>
+          <a:p>
+            <a:endParaRPr lang="en-US" sz="800" b="1" noProof="1"/>
+          </a:p>
+          <a:p>
+            <a:endParaRPr lang="en-US" sz="800" b="1" noProof="1"/>
+          </a:p>
+          <a:p>
+            <a:endParaRPr lang="en-US" sz="800" b="1" noProof="1"/>
+          </a:p>
+          <a:p>
+            <a:endParaRPr lang="en-US" sz="800" b="1" noProof="1"/>
+          </a:p>
+          <a:p>
+            <a:endParaRPr lang="en-US" sz="800" b="1" noProof="1"/>
+          </a:p>
+          <a:p>
+            <a:endParaRPr lang="en-US" sz="800" b="1" noProof="1"/>
+          </a:p>
+          <a:p>
+            <a:endParaRPr lang="en-US" sz="800" b="1" noProof="1"/>
+          </a:p>
+          <a:p>
+            <a:endParaRPr lang="en-US" sz="800" b="1" noProof="1"/>
+          </a:p>
+          <a:p>
+            <a:endParaRPr lang="en-US" sz="800" b="1" noProof="1"/>
+          </a:p>
+          <a:p>
             <a:r>
               <a:rPr lang="en-US" sz="800" b="1" noProof="1"/>
               <a:t>How it works </a:t>
@@ -12590,7 +13379,7 @@
                   <a:schemeClr val="accent1"/>
                 </a:solidFill>
               </a:rPr>
-              <a:t>Pragma-git listens to creation of file </a:t>
+              <a:t>Pragma-git GUI listens to creation of file </a:t>
             </a:r>
             <a:r>
               <a:rPr lang="en-US" sz="800" b="1" noProof="1">
@@ -12713,25 +13502,14 @@
               <a:t>(=&gt; git, which started this script gets the exit code)</a:t>
             </a:r>
           </a:p>
-          <a:p>
-            <a:pPr marL="171450" indent="-171450">
-              <a:buFont typeface="Courier New" panose="02070309020205020404" pitchFamily="49" charset="0"/>
-              <a:buChar char="o"/>
-            </a:pPr>
-            <a:endParaRPr lang="en-US" sz="800" noProof="1">
-              <a:solidFill>
-                <a:schemeClr val="accent1"/>
-              </a:solidFill>
-            </a:endParaRPr>
-          </a:p>
-        </p:txBody>
-      </p:sp>
-      <p:sp>
-        <p:nvSpPr>
-          <p:cNvPr id="6" name="Rektangel 5">
-            <a:extLst>
-              <a:ext uri="{FF2B5EF4-FFF2-40B4-BE49-F238E27FC236}">
-                <a16:creationId xmlns:a16="http://schemas.microsoft.com/office/drawing/2014/main" id="{BFF3040E-0B07-4743-8C2E-DEB02A9AC67D}"/>
+        </p:txBody>
+      </p:sp>
+      <p:sp>
+        <p:nvSpPr>
+          <p:cNvPr id="41" name="Rectangle 40">
+            <a:extLst>
+              <a:ext uri="{FF2B5EF4-FFF2-40B4-BE49-F238E27FC236}">
+                <a16:creationId xmlns:a16="http://schemas.microsoft.com/office/drawing/2014/main" id="{C70FD0AC-6E4A-CC2F-94D7-8A5B3A905EBB}"/>
               </a:ext>
             </a:extLst>
           </p:cNvPr>
@@ -12740,8 +13518,62 @@
         </p:nvSpPr>
         <p:spPr>
           <a:xfrm>
-            <a:off x="416902" y="7408417"/>
-            <a:ext cx="5396401" cy="584775"/>
+            <a:off x="2449600" y="1851628"/>
+            <a:ext cx="3434018" cy="1644807"/>
+          </a:xfrm>
+          <a:prstGeom prst="rect">
+            <a:avLst/>
+          </a:prstGeom>
+          <a:solidFill>
+            <a:schemeClr val="accent1">
+              <a:alpha val="8000"/>
+            </a:schemeClr>
+          </a:solidFill>
+          <a:ln>
+            <a:noFill/>
+          </a:ln>
+        </p:spPr>
+        <p:style>
+          <a:lnRef idx="2">
+            <a:schemeClr val="accent1">
+              <a:shade val="15000"/>
+            </a:schemeClr>
+          </a:lnRef>
+          <a:fillRef idx="1">
+            <a:schemeClr val="accent1"/>
+          </a:fillRef>
+          <a:effectRef idx="0">
+            <a:schemeClr val="accent1"/>
+          </a:effectRef>
+          <a:fontRef idx="minor">
+            <a:schemeClr val="lt1"/>
+          </a:fontRef>
+        </p:style>
+        <p:txBody>
+          <a:bodyPr rtlCol="0" anchor="ctr"/>
+          <a:lstStyle/>
+          <a:p>
+            <a:pPr algn="ctr"/>
+            <a:endParaRPr lang="en-US"/>
+          </a:p>
+        </p:txBody>
+      </p:sp>
+      <p:sp>
+        <p:nvSpPr>
+          <p:cNvPr id="8" name="Rektangel 7">
+            <a:extLst>
+              <a:ext uri="{FF2B5EF4-FFF2-40B4-BE49-F238E27FC236}">
+                <a16:creationId xmlns:a16="http://schemas.microsoft.com/office/drawing/2014/main" id="{E0FCE908-93B6-2442-9EF2-02ED84A9339A}"/>
+              </a:ext>
+            </a:extLst>
+          </p:cNvPr>
+          <p:cNvSpPr/>
+          <p:nvPr/>
+        </p:nvSpPr>
+        <p:spPr>
+          <a:xfrm>
+            <a:off x="6247616" y="1620797"/>
+            <a:ext cx="5875253" cy="6561669"/>
           </a:xfrm>
           <a:prstGeom prst="rect">
             <a:avLst/>
@@ -12761,9 +13593,54 @@
           </a:bodyPr>
           <a:lstStyle/>
           <a:p>
+            <a:endParaRPr lang="en-US" sz="800" b="1" noProof="1"/>
+          </a:p>
+          <a:p>
+            <a:endParaRPr lang="en-US" sz="800" b="1" noProof="1"/>
+          </a:p>
+          <a:p>
+            <a:endParaRPr lang="en-US" sz="800" b="1" noProof="1"/>
+          </a:p>
+          <a:p>
+            <a:endParaRPr lang="en-US" sz="800" b="1" noProof="1"/>
+          </a:p>
+          <a:p>
+            <a:endParaRPr lang="en-US" sz="800" b="1" noProof="1"/>
+          </a:p>
+          <a:p>
+            <a:endParaRPr lang="en-US" sz="800" b="1" noProof="1"/>
+          </a:p>
+          <a:p>
+            <a:endParaRPr lang="en-US" sz="800" b="1" noProof="1"/>
+          </a:p>
+          <a:p>
+            <a:endParaRPr lang="en-US" sz="800" b="1" noProof="1"/>
+          </a:p>
+          <a:p>
+            <a:endParaRPr lang="en-US" sz="800" b="1" noProof="1"/>
+          </a:p>
+          <a:p>
+            <a:endParaRPr lang="en-US" sz="800" b="1" noProof="1"/>
+          </a:p>
+          <a:p>
+            <a:endParaRPr lang="en-US" sz="800" b="1" noProof="1"/>
+          </a:p>
+          <a:p>
+            <a:endParaRPr lang="en-US" sz="800" b="1" noProof="1"/>
+          </a:p>
+          <a:p>
+            <a:endParaRPr lang="en-US" sz="800" b="1" noProof="1"/>
+          </a:p>
+          <a:p>
+            <a:endParaRPr lang="en-US" sz="800" b="1" noProof="1"/>
+          </a:p>
+          <a:p>
+            <a:endParaRPr lang="en-US" sz="800" b="1" noProof="1"/>
+          </a:p>
+          <a:p>
             <a:r>
               <a:rPr lang="en-US" sz="800" b="1" noProof="1"/>
-              <a:t>Note</a:t>
+              <a:t>How it works </a:t>
             </a:r>
           </a:p>
           <a:p>
@@ -12771,40 +13648,352 @@
           </a:p>
           <a:p>
             <a:pPr marL="171450" indent="-171450">
-              <a:buFont typeface="Arial" panose="020B0604020202020204" pitchFamily="34" charset="0"/>
-              <a:buChar char="•"/>
-            </a:pPr>
-            <a:r>
-              <a:rPr lang="en-US" sz="800" noProof="1"/>
-              <a:t>merge folder and askpass folders have their own package.json</a:t>
+              <a:buFontTx/>
+              <a:buChar char="-"/>
+            </a:pPr>
+            <a:r>
+              <a:rPr lang="en-US" sz="800" noProof="1"/>
+              <a:t>pragma-askpass  bash script  is initated by git</a:t>
             </a:r>
           </a:p>
           <a:p>
             <a:pPr marL="171450" indent="-171450">
-              <a:buFont typeface="Arial" panose="020B0604020202020204" pitchFamily="34" charset="0"/>
-              <a:buChar char="•"/>
+              <a:buFontTx/>
+              <a:buChar char="-"/>
+            </a:pPr>
+            <a:r>
+              <a:rPr lang="en-US" sz="800" noProof="1"/>
+              <a:t>pragma-askpass acts as a mediator between git and askpass.html dialog</a:t>
+            </a:r>
+          </a:p>
+          <a:p>
+            <a:pPr marL="171450" indent="-171450">
+              <a:buFontTx/>
+              <a:buChar char="-"/>
+            </a:pPr>
+            <a:r>
+              <a:rPr lang="en-US" sz="800" noProof="1"/>
+              <a:t>The reason for this is to 1) send entered text to stdout, and 2)  exit status which I cannot do from nwjs</a:t>
+            </a:r>
+          </a:p>
+          <a:p>
+            <a:pPr marL="171450" indent="-171450">
+              <a:buFontTx/>
+              <a:buChar char="-"/>
             </a:pPr>
             <a:r>
               <a:rPr lang="en-US" sz="800" b="1" noProof="1"/>
-              <a:t>Do not npm install </a:t>
-            </a:r>
-            <a:r>
-              <a:rPr lang="en-US" sz="800" noProof="1"/>
-              <a:t>in these, but in folder above</a:t>
-            </a:r>
-            <a:r>
+              <a:t>I had to make a bash script which places signal files, that are then picked up by pragma-git</a:t>
+            </a:r>
+          </a:p>
+          <a:p>
+            <a:br>
               <a:rPr lang="en-US" sz="800" b="1" noProof="1"/>
-              <a:t>.</a:t>
-            </a:r>
-          </a:p>
-        </p:txBody>
-      </p:sp>
-      <p:sp>
-        <p:nvSpPr>
-          <p:cNvPr id="7" name="textruta 6">
-            <a:extLst>
-              <a:ext uri="{FF2B5EF4-FFF2-40B4-BE49-F238E27FC236}">
-                <a16:creationId xmlns:a16="http://schemas.microsoft.com/office/drawing/2014/main" id="{2CC61761-C09E-854F-879E-5E98858E6D80}"/>
+            </a:br>
+            <a:endParaRPr lang="en-US" sz="800" noProof="1"/>
+          </a:p>
+          <a:p>
+            <a:r>
+              <a:rPr lang="en-US" sz="800" b="1" noProof="1"/>
+              <a:t>Setup :</a:t>
+            </a:r>
+          </a:p>
+          <a:p>
+            <a:pPr marL="171450" indent="-171450">
+              <a:buFont typeface="Courier New" panose="02070309020205020404" pitchFamily="49" charset="0"/>
+              <a:buChar char="o"/>
+            </a:pPr>
+            <a:r>
+              <a:rPr lang="en-US" sz="800" noProof="1">
+                <a:solidFill>
+                  <a:schemeClr val="accent1"/>
+                </a:solidFill>
+              </a:rPr>
+              <a:t>gitconfig  --global  include.path  is set when Pragma-git starts (different for Mac, Linux and Windows) </a:t>
+            </a:r>
+            <a:br>
+              <a:rPr lang="en-US" sz="800" noProof="1">
+                <a:solidFill>
+                  <a:schemeClr val="accent1"/>
+                </a:solidFill>
+              </a:rPr>
+            </a:br>
+            <a:r>
+              <a:rPr lang="en-US" sz="800" noProof="1"/>
+              <a:t>include.path=/Users/jan/Documents/Projects/Pragma-git/Pragma-git/gitconfigs/pragma-git-config_dev_mac</a:t>
+            </a:r>
+          </a:p>
+          <a:p>
+            <a:pPr marL="171450" indent="-171450">
+              <a:buFont typeface="Courier New" panose="02070309020205020404" pitchFamily="49" charset="0"/>
+              <a:buChar char="o"/>
+            </a:pPr>
+            <a:endParaRPr lang="en-US" sz="800" noProof="1"/>
+          </a:p>
+          <a:p>
+            <a:pPr marL="171450" indent="-171450">
+              <a:buFont typeface="Courier New" panose="02070309020205020404" pitchFamily="49" charset="0"/>
+              <a:buChar char="o"/>
+            </a:pPr>
+            <a:r>
+              <a:rPr lang="en-US" sz="800" noProof="1">
+                <a:solidFill>
+                  <a:schemeClr val="accent1"/>
+                </a:solidFill>
+              </a:rPr>
+              <a:t>core. askpass -- defines script, that starts pragma-askpass when git wants a password</a:t>
+            </a:r>
+          </a:p>
+          <a:p>
+            <a:pPr marL="152550" lvl="1"/>
+            <a:r>
+              <a:rPr lang="en-US" sz="800" noProof="1"/>
+              <a:t>[core]</a:t>
+            </a:r>
+          </a:p>
+          <a:p>
+            <a:pPr marL="152550" lvl="1"/>
+            <a:r>
+              <a:rPr lang="en-US" sz="800" noProof="1"/>
+              <a:t>    askpass = /Users/jan/Documents/Projects/Pragma-git/Pragma-git/pragma-askpass</a:t>
+            </a:r>
+          </a:p>
+          <a:p>
+            <a:pPr marL="152550" lvl="1"/>
+            <a:endParaRPr lang="en-US" sz="800" noProof="1"/>
+          </a:p>
+          <a:p>
+            <a:pPr indent="-304650"/>
+            <a:r>
+              <a:rPr lang="en-US" sz="800" b="1" noProof="1"/>
+              <a:t>Execution :</a:t>
+            </a:r>
+          </a:p>
+          <a:p>
+            <a:pPr marL="171450" indent="-171450">
+              <a:buFont typeface="Courier New" panose="02070309020205020404" pitchFamily="49" charset="0"/>
+              <a:buChar char="o"/>
+            </a:pPr>
+            <a:r>
+              <a:rPr lang="en-US" sz="800" noProof="1">
+                <a:solidFill>
+                  <a:schemeClr val="accent1"/>
+                </a:solidFill>
+              </a:rPr>
+              <a:t>Pragma-askpass makes git call external dialog called ‘pragma-askpass’ (see above)</a:t>
+            </a:r>
+          </a:p>
+          <a:p>
+            <a:pPr marL="171450" indent="-171450">
+              <a:buFont typeface="Courier New" panose="02070309020205020404" pitchFamily="49" charset="0"/>
+              <a:buChar char="o"/>
+            </a:pPr>
+            <a:r>
+              <a:rPr lang="en-US" sz="800" noProof="1">
+                <a:solidFill>
+                  <a:schemeClr val="accent1"/>
+                </a:solidFill>
+              </a:rPr>
+              <a:t>Git calls the bash script pragma-askpass, defined above in ‘askpass=  … pragma-askpass …’ </a:t>
+            </a:r>
+          </a:p>
+          <a:p>
+            <a:pPr marL="171450" indent="-171450">
+              <a:buFont typeface="Courier New" panose="02070309020205020404" pitchFamily="49" charset="0"/>
+              <a:buChar char="o"/>
+            </a:pPr>
+            <a:r>
+              <a:rPr lang="en-US" sz="800" noProof="1">
+                <a:solidFill>
+                  <a:schemeClr val="accent1"/>
+                </a:solidFill>
+              </a:rPr>
+              <a:t>script ‘pragma-askpass’ looks for file ‘pragma-git-running’ in $HOME or $USERPROFILE (Windows)  /.Pragma-git/.tmp</a:t>
+            </a:r>
+          </a:p>
+          <a:p>
+            <a:pPr marL="171450" indent="-171450">
+              <a:buFont typeface="Courier New" panose="02070309020205020404" pitchFamily="49" charset="0"/>
+              <a:buChar char="o"/>
+            </a:pPr>
+            <a:r>
+              <a:rPr lang="en-US" sz="800" noProof="1">
+                <a:solidFill>
+                  <a:schemeClr val="accent1"/>
+                </a:solidFill>
+              </a:rPr>
+              <a:t>script bails out if file ‘pragma-git-running’  does not exist (means pragma-git is not up)</a:t>
+            </a:r>
+            <a:endParaRPr lang="en-US" sz="800" noProof="1"/>
+          </a:p>
+          <a:p>
+            <a:pPr marL="171450" indent="-171450">
+              <a:buFont typeface="Courier New" panose="02070309020205020404" pitchFamily="49" charset="0"/>
+              <a:buChar char="o"/>
+            </a:pPr>
+            <a:r>
+              <a:rPr lang="en-US" sz="800" noProof="1">
+                <a:solidFill>
+                  <a:schemeClr val="accent1"/>
+                </a:solidFill>
+              </a:rPr>
+              <a:t>script ‘pragma-askpass’ stores the following variable values in files in $HOME or $USERPROFILE (Windows)  /.Pragma-git/.tmp :</a:t>
+            </a:r>
+            <a:endParaRPr lang="en-US" sz="800" noProof="1"/>
+          </a:p>
+          <a:p>
+            <a:pPr marL="324000" lvl="1" indent="-171450">
+              <a:buFont typeface="Arial" panose="020B0604020202020204" pitchFamily="34" charset="0"/>
+              <a:buChar char="•"/>
+            </a:pPr>
+            <a:r>
+              <a:rPr lang="en-US" sz="800" noProof="1"/>
+              <a:t>askpass_first (first argument from git. text asking for password), </a:t>
+            </a:r>
+            <a:br>
+              <a:rPr lang="en-US" sz="800" noProof="1"/>
+            </a:br>
+            <a:r>
+              <a:rPr lang="en-US" sz="800" noProof="1"/>
+              <a:t>askpasslog.txt, </a:t>
+            </a:r>
+            <a:br>
+              <a:rPr lang="en-US" sz="800" noProof="1"/>
+            </a:br>
+            <a:r>
+              <a:rPr lang="en-US" sz="800" noProof="1"/>
+              <a:t>askpass.txt</a:t>
+            </a:r>
+          </a:p>
+          <a:p>
+            <a:pPr marL="324000" lvl="1" indent="-171450">
+              <a:buFont typeface="Arial" panose="020B0604020202020204" pitchFamily="34" charset="0"/>
+              <a:buChar char="•"/>
+            </a:pPr>
+            <a:r>
+              <a:rPr lang="en-US" sz="800" noProof="1"/>
+              <a:t>pragma-askpass-running # Flag to start pragma-merge.js. Polled by script ‘pragma-merge’ to know when finished</a:t>
+            </a:r>
+          </a:p>
+          <a:p>
+            <a:pPr marL="324000" lvl="1" indent="-171450">
+              <a:buFont typeface="Arial" panose="020B0604020202020204" pitchFamily="34" charset="0"/>
+              <a:buChar char="•"/>
+            </a:pPr>
+            <a:endParaRPr lang="en-US" sz="800" noProof="1"/>
+          </a:p>
+          <a:p>
+            <a:pPr marL="171450" indent="-171450">
+              <a:buFont typeface="Courier New" panose="02070309020205020404" pitchFamily="49" charset="0"/>
+              <a:buChar char="o"/>
+            </a:pPr>
+            <a:r>
+              <a:rPr lang="en-US" sz="800" noProof="1">
+                <a:solidFill>
+                  <a:schemeClr val="accent1"/>
+                </a:solidFill>
+              </a:rPr>
+              <a:t>Pragma-git GUI listens to creation of file ‘pragma-askpass-running’</a:t>
+            </a:r>
+            <a:endParaRPr lang="en-US" sz="800" noProof="1"/>
+          </a:p>
+          <a:p>
+            <a:pPr marL="324000" lvl="1" indent="-171450">
+              <a:buFont typeface="Arial" panose="020B0604020202020204" pitchFamily="34" charset="0"/>
+              <a:buChar char="•"/>
+            </a:pPr>
+            <a:r>
+              <a:rPr lang="en-US" sz="800" noProof="1"/>
+              <a:t>and opens pragma-askpass.js with input transferred from git via file askpass_first</a:t>
+            </a:r>
+          </a:p>
+          <a:p>
+            <a:pPr marL="324000" lvl="1" indent="-171450">
+              <a:buFont typeface="Arial" panose="020B0604020202020204" pitchFamily="34" charset="0"/>
+              <a:buChar char="•"/>
+            </a:pPr>
+            <a:r>
+              <a:rPr lang="en-US" sz="800" noProof="1"/>
+              <a:t>file pragma-askpass-running’ is deleted to signal that ‘pragma-askpass.js’ is closed</a:t>
+            </a:r>
+          </a:p>
+          <a:p>
+            <a:pPr marL="324000" lvl="1" indent="-171450">
+              <a:buFont typeface="Arial" panose="020B0604020202020204" pitchFamily="34" charset="0"/>
+              <a:buChar char="•"/>
+            </a:pPr>
+            <a:r>
+              <a:rPr lang="en-US" sz="800" noProof="1"/>
+              <a:t>window is closed</a:t>
+            </a:r>
+          </a:p>
+          <a:p>
+            <a:pPr marL="324000" lvl="1" indent="-171450">
+              <a:buFont typeface="Arial" panose="020B0604020202020204" pitchFamily="34" charset="0"/>
+              <a:buChar char="•"/>
+            </a:pPr>
+            <a:endParaRPr lang="en-US" sz="800" noProof="1"/>
+          </a:p>
+          <a:p>
+            <a:pPr marL="171450" indent="-171450">
+              <a:buFont typeface="Courier New" panose="02070309020205020404" pitchFamily="49" charset="0"/>
+              <a:buChar char="o"/>
+            </a:pPr>
+            <a:r>
+              <a:rPr lang="en-US" sz="800" noProof="1">
+                <a:solidFill>
+                  <a:schemeClr val="accent1"/>
+                </a:solidFill>
+              </a:rPr>
+              <a:t>script pragma-askpass </a:t>
+            </a:r>
+            <a:endParaRPr lang="en-US" sz="800" noProof="1"/>
+          </a:p>
+          <a:p>
+            <a:pPr marL="324000" lvl="1" indent="-171450">
+              <a:buFont typeface="Arial" panose="020B0604020202020204" pitchFamily="34" charset="0"/>
+              <a:buChar char="•"/>
+            </a:pPr>
+            <a:r>
+              <a:rPr lang="en-US" sz="800" noProof="1"/>
+              <a:t>waits for deletion of file ‘pragma-askpass-running’</a:t>
+            </a:r>
+          </a:p>
+          <a:p>
+            <a:pPr marL="324000" lvl="1" indent="-171450">
+              <a:buFont typeface="Arial" panose="020B0604020202020204" pitchFamily="34" charset="0"/>
+              <a:buChar char="•"/>
+            </a:pPr>
+            <a:r>
+              <a:rPr lang="en-US" sz="800" noProof="1"/>
+              <a:t>reads entered text in pragma-askpass.html, and sends that to stdout</a:t>
+            </a:r>
+          </a:p>
+          <a:p>
+            <a:pPr marL="324000" lvl="1" indent="-171450">
+              <a:buFont typeface="Arial" panose="020B0604020202020204" pitchFamily="34" charset="0"/>
+              <a:buChar char="•"/>
+            </a:pPr>
+            <a:r>
+              <a:rPr lang="en-US" sz="800" noProof="1"/>
+              <a:t>reads exit code from file ‘exit’, removes file ‘exit’, and returns with the same exit code (so git can pick it up)</a:t>
+            </a:r>
+            <a:br>
+              <a:rPr lang="en-US" sz="800" noProof="1"/>
+            </a:br>
+            <a:r>
+              <a:rPr lang="en-US" sz="800" noProof="1"/>
+              <a:t>(=&gt; git, which started this script gets the exit code)</a:t>
+            </a:r>
+          </a:p>
+        </p:txBody>
+      </p:sp>
+      <p:sp>
+        <p:nvSpPr>
+          <p:cNvPr id="4" name="textruta 3">
+            <a:extLst>
+              <a:ext uri="{FF2B5EF4-FFF2-40B4-BE49-F238E27FC236}">
+                <a16:creationId xmlns:a16="http://schemas.microsoft.com/office/drawing/2014/main" id="{8B784B0E-8C78-2B47-8EE8-76C10C231606}"/>
               </a:ext>
             </a:extLst>
           </p:cNvPr>
@@ -12813,8 +14002,8 @@
         </p:nvSpPr>
         <p:spPr>
           <a:xfrm>
-            <a:off x="6357319" y="953255"/>
-            <a:ext cx="5727337" cy="461665"/>
+            <a:off x="395063" y="1620797"/>
+            <a:ext cx="2054537" cy="461665"/>
           </a:xfrm>
           <a:prstGeom prst="rect">
             <a:avLst/>
@@ -12829,17 +14018,17 @@
           <a:p>
             <a:r>
               <a:rPr lang="en-US" sz="2400" b="1" noProof="1"/>
-              <a:t>askpass (integrated password dialog for git)</a:t>
-            </a:r>
-          </a:p>
-        </p:txBody>
-      </p:sp>
-      <p:sp>
-        <p:nvSpPr>
-          <p:cNvPr id="8" name="Rektangel 7">
-            <a:extLst>
-              <a:ext uri="{FF2B5EF4-FFF2-40B4-BE49-F238E27FC236}">
-                <a16:creationId xmlns:a16="http://schemas.microsoft.com/office/drawing/2014/main" id="{E0FCE908-93B6-2442-9EF2-02ED84A9339A}"/>
+              <a:t>Pragma-merge</a:t>
+            </a:r>
+          </a:p>
+        </p:txBody>
+      </p:sp>
+      <p:sp>
+        <p:nvSpPr>
+          <p:cNvPr id="6" name="Rektangel 5">
+            <a:extLst>
+              <a:ext uri="{FF2B5EF4-FFF2-40B4-BE49-F238E27FC236}">
+                <a16:creationId xmlns:a16="http://schemas.microsoft.com/office/drawing/2014/main" id="{BFF3040E-0B07-4743-8C2E-DEB02A9AC67D}"/>
               </a:ext>
             </a:extLst>
           </p:cNvPr>
@@ -12848,8 +14037,8 @@
         </p:nvSpPr>
         <p:spPr>
           <a:xfrm>
-            <a:off x="6367567" y="1472403"/>
-            <a:ext cx="5396401" cy="4893647"/>
+            <a:off x="389841" y="8921347"/>
+            <a:ext cx="5567899" cy="584775"/>
           </a:xfrm>
           <a:prstGeom prst="rect">
             <a:avLst/>
@@ -12871,7 +14060,7 @@
           <a:p>
             <a:r>
               <a:rPr lang="en-US" sz="800" b="1" noProof="1"/>
-              <a:t>How it works </a:t>
+              <a:t>Note</a:t>
             </a:r>
           </a:p>
           <a:p>
@@ -12879,350 +14068,66 @@
           </a:p>
           <a:p>
             <a:pPr marL="171450" indent="-171450">
-              <a:buFontTx/>
-              <a:buChar char="-"/>
-            </a:pPr>
-            <a:r>
-              <a:rPr lang="en-US" sz="800" noProof="1"/>
-              <a:t>pragma-askpass  bash script  is initated by git</a:t>
+              <a:buFont typeface="Arial" panose="020B0604020202020204" pitchFamily="34" charset="0"/>
+              <a:buChar char="•"/>
+            </a:pPr>
+            <a:r>
+              <a:rPr lang="en-US" sz="800" noProof="1"/>
+              <a:t>merge folder and askpass folders have their own package.json</a:t>
             </a:r>
           </a:p>
           <a:p>
             <a:pPr marL="171450" indent="-171450">
-              <a:buFontTx/>
-              <a:buChar char="-"/>
-            </a:pPr>
-            <a:r>
-              <a:rPr lang="en-US" sz="800" noProof="1"/>
-              <a:t>pragma-askpass acts as a mediator between git and askpass.html dialog</a:t>
-            </a:r>
-          </a:p>
-          <a:p>
-            <a:pPr marL="171450" indent="-171450">
-              <a:buFontTx/>
-              <a:buChar char="-"/>
-            </a:pPr>
-            <a:r>
-              <a:rPr lang="en-US" sz="800" noProof="1"/>
-              <a:t>The reason for this is to 1) send entered text to stdout, and 2)  exit status which I cannot do from nwjs</a:t>
-            </a:r>
-          </a:p>
-          <a:p>
-            <a:pPr marL="171450" indent="-171450">
-              <a:buFontTx/>
-              <a:buChar char="-"/>
+              <a:buFont typeface="Arial" panose="020B0604020202020204" pitchFamily="34" charset="0"/>
+              <a:buChar char="•"/>
             </a:pPr>
             <a:r>
               <a:rPr lang="en-US" sz="800" b="1" noProof="1"/>
-              <a:t>I had to make a bash script which places signal files, that are then picked up by pragma-git</a:t>
-            </a:r>
-          </a:p>
-          <a:p>
-            <a:br>
+              <a:t>Do not npm install </a:t>
+            </a:r>
+            <a:r>
+              <a:rPr lang="en-US" sz="800" noProof="1"/>
+              <a:t>in these, but in folder above</a:t>
+            </a:r>
+            <a:r>
               <a:rPr lang="en-US" sz="800" b="1" noProof="1"/>
-            </a:br>
-            <a:endParaRPr lang="en-US" sz="800" noProof="1"/>
-          </a:p>
-          <a:p>
-            <a:r>
-              <a:rPr lang="en-US" sz="800" b="1" noProof="1"/>
-              <a:t>Setup :</a:t>
-            </a:r>
-          </a:p>
-          <a:p>
-            <a:pPr marL="171450" indent="-171450">
-              <a:buFont typeface="Courier New" panose="02070309020205020404" pitchFamily="49" charset="0"/>
-              <a:buChar char="o"/>
-            </a:pPr>
-            <a:r>
-              <a:rPr lang="en-US" sz="800" noProof="1">
-                <a:solidFill>
-                  <a:schemeClr val="accent1"/>
-                </a:solidFill>
-              </a:rPr>
-              <a:t>gitconfig  --global  include.path  is set when Pragma-git starts (different for Mac, Linux and Windows) </a:t>
-            </a:r>
-            <a:br>
-              <a:rPr lang="en-US" sz="800" noProof="1">
-                <a:solidFill>
-                  <a:schemeClr val="accent1"/>
-                </a:solidFill>
-              </a:rPr>
-            </a:br>
-            <a:r>
-              <a:rPr lang="en-US" sz="800" noProof="1"/>
-              <a:t>include.path=/Users/jan/Documents/Projects/Pragma-git/Pragma-git/gitconfigs/pragma-git-config_dev_mac</a:t>
-            </a:r>
-          </a:p>
-          <a:p>
-            <a:pPr marL="171450" indent="-171450">
-              <a:buFont typeface="Courier New" panose="02070309020205020404" pitchFamily="49" charset="0"/>
-              <a:buChar char="o"/>
-            </a:pPr>
-            <a:endParaRPr lang="en-US" sz="800" noProof="1"/>
-          </a:p>
-          <a:p>
-            <a:pPr marL="171450" indent="-171450">
-              <a:buFont typeface="Courier New" panose="02070309020205020404" pitchFamily="49" charset="0"/>
-              <a:buChar char="o"/>
-            </a:pPr>
-            <a:r>
-              <a:rPr lang="en-US" sz="800" noProof="1">
-                <a:solidFill>
-                  <a:schemeClr val="accent1"/>
-                </a:solidFill>
-              </a:rPr>
-              <a:t>core. askpass -- defines script, that starts pragma-askpass when git wants a password</a:t>
-            </a:r>
-          </a:p>
-          <a:p>
-            <a:pPr marL="152550" lvl="1"/>
-            <a:r>
-              <a:rPr lang="en-US" sz="800" noProof="1"/>
-              <a:t>[core]</a:t>
-            </a:r>
-          </a:p>
-          <a:p>
-            <a:pPr marL="152550" lvl="1"/>
-            <a:r>
-              <a:rPr lang="en-US" sz="800" noProof="1"/>
-              <a:t>    askpass = /Users/jan/Documents/Projects/Pragma-git/Pragma-git/pragma-askpass</a:t>
-            </a:r>
-          </a:p>
-          <a:p>
-            <a:pPr marL="152550" lvl="1"/>
-            <a:endParaRPr lang="en-US" sz="800" noProof="1"/>
-          </a:p>
-          <a:p>
-            <a:pPr indent="-304650"/>
-            <a:r>
-              <a:rPr lang="en-US" sz="800" b="1" noProof="1"/>
-              <a:t>Execution :</a:t>
-            </a:r>
-          </a:p>
-          <a:p>
-            <a:pPr marL="171450" indent="-171450">
-              <a:buFont typeface="Courier New" panose="02070309020205020404" pitchFamily="49" charset="0"/>
-              <a:buChar char="o"/>
-            </a:pPr>
-            <a:r>
-              <a:rPr lang="en-US" sz="800" noProof="1">
-                <a:solidFill>
-                  <a:schemeClr val="accent1"/>
-                </a:solidFill>
-              </a:rPr>
-              <a:t>Pragma-askpass makes git call external dialog called ‘pragma-askpass’ (see above)</a:t>
-            </a:r>
-          </a:p>
-          <a:p>
-            <a:pPr marL="171450" indent="-171450">
-              <a:buFont typeface="Courier New" panose="02070309020205020404" pitchFamily="49" charset="0"/>
-              <a:buChar char="o"/>
-            </a:pPr>
-            <a:r>
-              <a:rPr lang="en-US" sz="800" noProof="1">
-                <a:solidFill>
-                  <a:schemeClr val="accent1"/>
-                </a:solidFill>
-              </a:rPr>
-              <a:t>Git calls the bash script pragma-askpass, defined above in ‘askpass=  … pragma-askpass …’ </a:t>
-            </a:r>
-          </a:p>
-          <a:p>
-            <a:pPr marL="171450" indent="-171450">
-              <a:buFont typeface="Courier New" panose="02070309020205020404" pitchFamily="49" charset="0"/>
-              <a:buChar char="o"/>
-            </a:pPr>
-            <a:r>
-              <a:rPr lang="en-US" sz="800" noProof="1">
-                <a:solidFill>
-                  <a:schemeClr val="accent1"/>
-                </a:solidFill>
-              </a:rPr>
-              <a:t>script ‘pragma-askpass’ looks for file ‘pragma-git-running’ in $HOME or $USERPROFILE (Windows)  /.Pragma-git/.tmp</a:t>
-            </a:r>
-          </a:p>
-          <a:p>
-            <a:pPr marL="171450" indent="-171450">
-              <a:buFont typeface="Courier New" panose="02070309020205020404" pitchFamily="49" charset="0"/>
-              <a:buChar char="o"/>
-            </a:pPr>
-            <a:r>
-              <a:rPr lang="en-US" sz="800" noProof="1">
-                <a:solidFill>
-                  <a:schemeClr val="accent1"/>
-                </a:solidFill>
-              </a:rPr>
-              <a:t>script bails out if file ‘pragma-git-running’  does not exist (means pragma-git is not up)</a:t>
-            </a:r>
-            <a:endParaRPr lang="en-US" sz="800" noProof="1"/>
-          </a:p>
-          <a:p>
-            <a:pPr marL="171450" indent="-171450">
-              <a:buFont typeface="Courier New" panose="02070309020205020404" pitchFamily="49" charset="0"/>
-              <a:buChar char="o"/>
-            </a:pPr>
-            <a:r>
-              <a:rPr lang="en-US" sz="800" noProof="1">
-                <a:solidFill>
-                  <a:schemeClr val="accent1"/>
-                </a:solidFill>
-              </a:rPr>
-              <a:t>script ‘pragma-askpass’ stores the following variable values in files in $HOME or $USERPROFILE (Windows)  /.Pragma-git/.tmp :</a:t>
-            </a:r>
-            <a:endParaRPr lang="en-US" sz="800" noProof="1"/>
-          </a:p>
-          <a:p>
-            <a:pPr marL="324000" lvl="1" indent="-171450">
-              <a:buFont typeface="Arial" panose="020B0604020202020204" pitchFamily="34" charset="0"/>
-              <a:buChar char="•"/>
-            </a:pPr>
-            <a:r>
-              <a:rPr lang="en-US" sz="800" noProof="1"/>
-              <a:t>askpass_first (first argument from git. text asking for password), </a:t>
-            </a:r>
-            <a:br>
-              <a:rPr lang="en-US" sz="800" noProof="1"/>
-            </a:br>
-            <a:r>
-              <a:rPr lang="en-US" sz="800" noProof="1"/>
-              <a:t>askpasslog.txt, </a:t>
-            </a:r>
-            <a:br>
-              <a:rPr lang="en-US" sz="800" noProof="1"/>
-            </a:br>
-            <a:r>
-              <a:rPr lang="en-US" sz="800" noProof="1"/>
-              <a:t>askpass.txt</a:t>
-            </a:r>
-          </a:p>
-          <a:p>
-            <a:pPr marL="324000" lvl="1" indent="-171450">
-              <a:buFont typeface="Arial" panose="020B0604020202020204" pitchFamily="34" charset="0"/>
-              <a:buChar char="•"/>
-            </a:pPr>
-            <a:r>
-              <a:rPr lang="en-US" sz="800" noProof="1"/>
-              <a:t>pragma-askpass-running # Flag to start pragma-merge.js. Polled by script ‘pragma-merge’ to know when finished</a:t>
-            </a:r>
-          </a:p>
-          <a:p>
-            <a:pPr marL="324000" lvl="1" indent="-171450">
-              <a:buFont typeface="Arial" panose="020B0604020202020204" pitchFamily="34" charset="0"/>
-              <a:buChar char="•"/>
-            </a:pPr>
-            <a:endParaRPr lang="en-US" sz="800" noProof="1"/>
-          </a:p>
-          <a:p>
-            <a:pPr marL="171450" indent="-171450">
-              <a:buFont typeface="Courier New" panose="02070309020205020404" pitchFamily="49" charset="0"/>
-              <a:buChar char="o"/>
-            </a:pPr>
-            <a:r>
-              <a:rPr lang="en-US" sz="800" noProof="1">
-                <a:solidFill>
-                  <a:schemeClr val="accent1"/>
-                </a:solidFill>
-              </a:rPr>
-              <a:t>Pragma-git listens to creation of file ‘pragma-askpass-running’</a:t>
-            </a:r>
-            <a:endParaRPr lang="en-US" sz="800" noProof="1"/>
-          </a:p>
-          <a:p>
-            <a:pPr marL="324000" lvl="1" indent="-171450">
-              <a:buFont typeface="Arial" panose="020B0604020202020204" pitchFamily="34" charset="0"/>
-              <a:buChar char="•"/>
-            </a:pPr>
-            <a:r>
-              <a:rPr lang="en-US" sz="800" noProof="1"/>
-              <a:t>and opens pragma-askpass.js with input transferred from git via file askpass_first</a:t>
-            </a:r>
-          </a:p>
-          <a:p>
-            <a:pPr marL="324000" lvl="1" indent="-171450">
-              <a:buFont typeface="Arial" panose="020B0604020202020204" pitchFamily="34" charset="0"/>
-              <a:buChar char="•"/>
-            </a:pPr>
-            <a:r>
-              <a:rPr lang="en-US" sz="800" noProof="1"/>
-              <a:t>file pragma-askpass-running’ is deleted to signal that ‘pragma-askpass.js’ is closed</a:t>
-            </a:r>
-          </a:p>
-          <a:p>
-            <a:pPr marL="324000" lvl="1" indent="-171450">
-              <a:buFont typeface="Arial" panose="020B0604020202020204" pitchFamily="34" charset="0"/>
-              <a:buChar char="•"/>
-            </a:pPr>
-            <a:r>
-              <a:rPr lang="en-US" sz="800" noProof="1"/>
-              <a:t>window is closed</a:t>
-            </a:r>
-          </a:p>
-          <a:p>
-            <a:pPr marL="324000" lvl="1" indent="-171450">
-              <a:buFont typeface="Arial" panose="020B0604020202020204" pitchFamily="34" charset="0"/>
-              <a:buChar char="•"/>
-            </a:pPr>
-            <a:endParaRPr lang="en-US" sz="800" noProof="1"/>
-          </a:p>
-          <a:p>
-            <a:pPr marL="171450" indent="-171450">
-              <a:buFont typeface="Courier New" panose="02070309020205020404" pitchFamily="49" charset="0"/>
-              <a:buChar char="o"/>
-            </a:pPr>
-            <a:r>
-              <a:rPr lang="en-US" sz="800" noProof="1">
-                <a:solidFill>
-                  <a:schemeClr val="accent1"/>
-                </a:solidFill>
-              </a:rPr>
-              <a:t>script pragma-askpass </a:t>
-            </a:r>
-            <a:endParaRPr lang="en-US" sz="800" noProof="1"/>
-          </a:p>
-          <a:p>
-            <a:pPr marL="324000" lvl="1" indent="-171450">
-              <a:buFont typeface="Arial" panose="020B0604020202020204" pitchFamily="34" charset="0"/>
-              <a:buChar char="•"/>
-            </a:pPr>
-            <a:r>
-              <a:rPr lang="en-US" sz="800" noProof="1"/>
-              <a:t>waits for deletion of file ‘pragma-askpass-running’</a:t>
-            </a:r>
-          </a:p>
-          <a:p>
-            <a:pPr marL="324000" lvl="1" indent="-171450">
-              <a:buFont typeface="Arial" panose="020B0604020202020204" pitchFamily="34" charset="0"/>
-              <a:buChar char="•"/>
-            </a:pPr>
-            <a:r>
-              <a:rPr lang="en-US" sz="800" noProof="1"/>
-              <a:t>reads entered text in pragma-askpass.html, and sends that to stdout</a:t>
-            </a:r>
-          </a:p>
-          <a:p>
-            <a:pPr marL="324000" lvl="1" indent="-171450">
-              <a:buFont typeface="Arial" panose="020B0604020202020204" pitchFamily="34" charset="0"/>
-              <a:buChar char="•"/>
-            </a:pPr>
-            <a:r>
-              <a:rPr lang="en-US" sz="800" noProof="1"/>
-              <a:t>reads exit code from file ‘exit’, removes file ‘exit’, and returns with the same exit code (so git can pick it up)</a:t>
-            </a:r>
-            <a:br>
-              <a:rPr lang="en-US" sz="800" noProof="1"/>
-            </a:br>
-            <a:r>
-              <a:rPr lang="en-US" sz="800" noProof="1"/>
-              <a:t>(=&gt; git, which started this script gets the exit code)</a:t>
-            </a:r>
-          </a:p>
-          <a:p>
-            <a:endParaRPr lang="en-US" sz="800" noProof="1">
-              <a:solidFill>
-                <a:schemeClr val="accent1"/>
-              </a:solidFill>
-            </a:endParaRPr>
+              <a:t>.</a:t>
+            </a:r>
+          </a:p>
+        </p:txBody>
+      </p:sp>
+      <p:sp>
+        <p:nvSpPr>
+          <p:cNvPr id="7" name="textruta 6">
+            <a:extLst>
+              <a:ext uri="{FF2B5EF4-FFF2-40B4-BE49-F238E27FC236}">
+                <a16:creationId xmlns:a16="http://schemas.microsoft.com/office/drawing/2014/main" id="{2CC61761-C09E-854F-879E-5E98858E6D80}"/>
+              </a:ext>
+            </a:extLst>
+          </p:cNvPr>
+          <p:cNvSpPr txBox="1"/>
+          <p:nvPr/>
+        </p:nvSpPr>
+        <p:spPr>
+          <a:xfrm>
+            <a:off x="6247615" y="1620796"/>
+            <a:ext cx="2232984" cy="461665"/>
+          </a:xfrm>
+          <a:prstGeom prst="rect">
+            <a:avLst/>
+          </a:prstGeom>
+          <a:noFill/>
+        </p:spPr>
+        <p:txBody>
+          <a:bodyPr wrap="none" rtlCol="0">
+            <a:spAutoFit/>
+          </a:bodyPr>
+          <a:lstStyle/>
+          <a:p>
+            <a:r>
+              <a:rPr lang="en-US" sz="2400" b="1" noProof="1"/>
+              <a:t>Pragma-askpass</a:t>
+            </a:r>
           </a:p>
         </p:txBody>
       </p:sp>
@@ -13279,8 +14184,8 @@
         </p:nvSpPr>
         <p:spPr>
           <a:xfrm>
-            <a:off x="6357319" y="6423533"/>
-            <a:ext cx="5396401" cy="1200329"/>
+            <a:off x="6247615" y="8264309"/>
+            <a:ext cx="5875254" cy="1200329"/>
           </a:xfrm>
           <a:prstGeom prst="rect">
             <a:avLst/>
@@ -13366,6 +14271,982 @@
               <a:rPr lang="en-US" sz="800" noProof="1"/>
               <a:t>echo "url=${url}" | git credential fill </a:t>
             </a:r>
+          </a:p>
+        </p:txBody>
+      </p:sp>
+      <p:sp>
+        <p:nvSpPr>
+          <p:cNvPr id="10" name="TextBox 9">
+            <a:extLst>
+              <a:ext uri="{FF2B5EF4-FFF2-40B4-BE49-F238E27FC236}">
+                <a16:creationId xmlns:a16="http://schemas.microsoft.com/office/drawing/2014/main" id="{4CA166D7-6A0E-7F5A-7A4B-123E544F7934}"/>
+              </a:ext>
+            </a:extLst>
+          </p:cNvPr>
+          <p:cNvSpPr txBox="1"/>
+          <p:nvPr/>
+        </p:nvSpPr>
+        <p:spPr>
+          <a:xfrm>
+            <a:off x="334652" y="840220"/>
+            <a:ext cx="6782580" cy="707886"/>
+          </a:xfrm>
+          <a:prstGeom prst="rect">
+            <a:avLst/>
+          </a:prstGeom>
+          <a:noFill/>
+        </p:spPr>
+        <p:txBody>
+          <a:bodyPr wrap="square">
+            <a:spAutoFit/>
+          </a:bodyPr>
+          <a:lstStyle/>
+          <a:p>
+            <a:r>
+              <a:rPr lang="en-US" sz="1000" noProof="1"/>
+              <a:t>The helpers are started by git itself.  It knows about them through the git config</a:t>
+            </a:r>
+            <a:br>
+              <a:rPr lang="en-US" sz="1000" noProof="1"/>
+            </a:br>
+            <a:endParaRPr lang="en-US" sz="1000" noProof="1"/>
+          </a:p>
+          <a:p>
+            <a:r>
+              <a:rPr lang="en-US" sz="1000" noProof="1"/>
+              <a:t>In the case of using ssh-git-client, the helpers are started by the git on server, while ssh-git-client transfers things to local for Pragma-git GUI to pick it up.  See slides about “Git over ssh”</a:t>
+            </a:r>
+            <a:endParaRPr lang="en-US" sz="1000" dirty="0"/>
+          </a:p>
+        </p:txBody>
+      </p:sp>
+      <p:sp>
+        <p:nvSpPr>
+          <p:cNvPr id="11" name="TextBox 10">
+            <a:extLst>
+              <a:ext uri="{FF2B5EF4-FFF2-40B4-BE49-F238E27FC236}">
+                <a16:creationId xmlns:a16="http://schemas.microsoft.com/office/drawing/2014/main" id="{74277D03-7B19-1FBE-1E5D-7C9DDB8A3D79}"/>
+              </a:ext>
+            </a:extLst>
+          </p:cNvPr>
+          <p:cNvSpPr txBox="1"/>
+          <p:nvPr/>
+        </p:nvSpPr>
+        <p:spPr>
+          <a:xfrm>
+            <a:off x="2465009" y="2190292"/>
+            <a:ext cx="1527306" cy="707886"/>
+          </a:xfrm>
+          <a:prstGeom prst="rect">
+            <a:avLst/>
+          </a:prstGeom>
+          <a:noFill/>
+        </p:spPr>
+        <p:txBody>
+          <a:bodyPr wrap="square">
+            <a:spAutoFit/>
+          </a:bodyPr>
+          <a:lstStyle/>
+          <a:p>
+            <a:r>
+              <a:rPr lang="en-US" sz="1000" noProof="1">
+                <a:solidFill>
+                  <a:schemeClr val="accent1"/>
+                </a:solidFill>
+              </a:rPr>
+              <a:t>git starts merge</a:t>
+            </a:r>
+          </a:p>
+          <a:p>
+            <a:r>
+              <a:rPr lang="en-US" sz="1000" noProof="1">
+                <a:solidFill>
+                  <a:schemeClr val="accent1"/>
+                </a:solidFill>
+              </a:rPr>
+              <a:t>-&gt; runs pragma-merge</a:t>
+            </a:r>
+          </a:p>
+          <a:p>
+            <a:r>
+              <a:rPr lang="en-US" sz="1000" dirty="0"/>
+              <a:t>(creates pragma-merge-running)</a:t>
+            </a:r>
+          </a:p>
+        </p:txBody>
+      </p:sp>
+      <p:sp>
+        <p:nvSpPr>
+          <p:cNvPr id="12" name="TextBox 11">
+            <a:extLst>
+              <a:ext uri="{FF2B5EF4-FFF2-40B4-BE49-F238E27FC236}">
+                <a16:creationId xmlns:a16="http://schemas.microsoft.com/office/drawing/2014/main" id="{1E9D8ED9-348C-B8C6-A243-D218A493BFD8}"/>
+              </a:ext>
+            </a:extLst>
+          </p:cNvPr>
+          <p:cNvSpPr txBox="1"/>
+          <p:nvPr/>
+        </p:nvSpPr>
+        <p:spPr>
+          <a:xfrm>
+            <a:off x="4356312" y="2473781"/>
+            <a:ext cx="1527306" cy="400110"/>
+          </a:xfrm>
+          <a:prstGeom prst="rect">
+            <a:avLst/>
+          </a:prstGeom>
+          <a:noFill/>
+        </p:spPr>
+        <p:txBody>
+          <a:bodyPr wrap="square">
+            <a:spAutoFit/>
+          </a:bodyPr>
+          <a:lstStyle/>
+          <a:p>
+            <a:r>
+              <a:rPr lang="en-US" sz="1000" noProof="1">
+                <a:solidFill>
+                  <a:schemeClr val="accent1"/>
+                </a:solidFill>
+              </a:rPr>
+              <a:t>Pragma-git GUI opens merge window</a:t>
+            </a:r>
+            <a:endParaRPr lang="en-US" sz="1000" dirty="0"/>
+          </a:p>
+        </p:txBody>
+      </p:sp>
+      <p:sp>
+        <p:nvSpPr>
+          <p:cNvPr id="13" name="TextBox 12">
+            <a:extLst>
+              <a:ext uri="{FF2B5EF4-FFF2-40B4-BE49-F238E27FC236}">
+                <a16:creationId xmlns:a16="http://schemas.microsoft.com/office/drawing/2014/main" id="{29BF9B47-13F7-58E7-ADB5-9837A9E901A2}"/>
+              </a:ext>
+            </a:extLst>
+          </p:cNvPr>
+          <p:cNvSpPr txBox="1"/>
+          <p:nvPr/>
+        </p:nvSpPr>
+        <p:spPr>
+          <a:xfrm>
+            <a:off x="4356312" y="2942437"/>
+            <a:ext cx="1527306" cy="553998"/>
+          </a:xfrm>
+          <a:prstGeom prst="rect">
+            <a:avLst/>
+          </a:prstGeom>
+          <a:noFill/>
+        </p:spPr>
+        <p:txBody>
+          <a:bodyPr wrap="square">
+            <a:spAutoFit/>
+          </a:bodyPr>
+          <a:lstStyle/>
+          <a:p>
+            <a:r>
+              <a:rPr lang="en-US" sz="1000" noProof="1">
+                <a:solidFill>
+                  <a:schemeClr val="accent1"/>
+                </a:solidFill>
+              </a:rPr>
+              <a:t>User close merge window</a:t>
+            </a:r>
+            <a:br>
+              <a:rPr lang="en-US" sz="1000" noProof="1">
+                <a:solidFill>
+                  <a:schemeClr val="accent1"/>
+                </a:solidFill>
+              </a:rPr>
+            </a:br>
+            <a:r>
+              <a:rPr lang="en-US" sz="1000" noProof="1"/>
+              <a:t>(delete pragma-merge-running)</a:t>
+            </a:r>
+            <a:endParaRPr lang="en-US" sz="1000" dirty="0"/>
+          </a:p>
+        </p:txBody>
+      </p:sp>
+      <p:sp>
+        <p:nvSpPr>
+          <p:cNvPr id="14" name="TextBox 13">
+            <a:extLst>
+              <a:ext uri="{FF2B5EF4-FFF2-40B4-BE49-F238E27FC236}">
+                <a16:creationId xmlns:a16="http://schemas.microsoft.com/office/drawing/2014/main" id="{977685FC-D130-5792-CAF1-EEB23E98E37B}"/>
+              </a:ext>
+            </a:extLst>
+          </p:cNvPr>
+          <p:cNvSpPr txBox="1"/>
+          <p:nvPr/>
+        </p:nvSpPr>
+        <p:spPr>
+          <a:xfrm>
+            <a:off x="3755005" y="1936322"/>
+            <a:ext cx="1521014" cy="400110"/>
+          </a:xfrm>
+          <a:prstGeom prst="rect">
+            <a:avLst/>
+          </a:prstGeom>
+          <a:noFill/>
+        </p:spPr>
+        <p:txBody>
+          <a:bodyPr wrap="square">
+            <a:spAutoFit/>
+          </a:bodyPr>
+          <a:lstStyle/>
+          <a:p>
+            <a:r>
+              <a:rPr lang="en-US" sz="1000" noProof="1"/>
+              <a:t>pragma-merge-running</a:t>
+            </a:r>
+            <a:br>
+              <a:rPr lang="en-US" sz="1000" noProof="1"/>
+            </a:br>
+            <a:r>
+              <a:rPr lang="en-US" sz="1000" noProof="1"/>
+              <a:t>signal file exists</a:t>
+            </a:r>
+            <a:endParaRPr lang="en-US" sz="1000" dirty="0"/>
+          </a:p>
+        </p:txBody>
+      </p:sp>
+      <p:sp>
+        <p:nvSpPr>
+          <p:cNvPr id="19" name="TextBox 18">
+            <a:extLst>
+              <a:ext uri="{FF2B5EF4-FFF2-40B4-BE49-F238E27FC236}">
+                <a16:creationId xmlns:a16="http://schemas.microsoft.com/office/drawing/2014/main" id="{3ED2D339-8E33-7FBF-03BF-35AAC79B156E}"/>
+              </a:ext>
+            </a:extLst>
+          </p:cNvPr>
+          <p:cNvSpPr txBox="1"/>
+          <p:nvPr/>
+        </p:nvSpPr>
+        <p:spPr>
+          <a:xfrm>
+            <a:off x="2465009" y="2980021"/>
+            <a:ext cx="1527306" cy="400110"/>
+          </a:xfrm>
+          <a:prstGeom prst="rect">
+            <a:avLst/>
+          </a:prstGeom>
+          <a:noFill/>
+        </p:spPr>
+        <p:txBody>
+          <a:bodyPr wrap="square">
+            <a:spAutoFit/>
+          </a:bodyPr>
+          <a:lstStyle/>
+          <a:p>
+            <a:r>
+              <a:rPr lang="en-US" sz="1000" noProof="1">
+                <a:solidFill>
+                  <a:schemeClr val="accent1"/>
+                </a:solidFill>
+              </a:rPr>
+              <a:t>pragma-merge script returns exit code to git</a:t>
+            </a:r>
+            <a:endParaRPr lang="en-US" sz="1000" dirty="0"/>
+          </a:p>
+        </p:txBody>
+      </p:sp>
+      <p:cxnSp>
+        <p:nvCxnSpPr>
+          <p:cNvPr id="21" name="Straight Connector 20">
+            <a:extLst>
+              <a:ext uri="{FF2B5EF4-FFF2-40B4-BE49-F238E27FC236}">
+                <a16:creationId xmlns:a16="http://schemas.microsoft.com/office/drawing/2014/main" id="{AE38906A-B6E8-103E-E689-1C4A49EBDE5D}"/>
+              </a:ext>
+            </a:extLst>
+          </p:cNvPr>
+          <p:cNvCxnSpPr>
+            <a:cxnSpLocks/>
+          </p:cNvCxnSpPr>
+          <p:nvPr/>
+        </p:nvCxnSpPr>
+        <p:spPr>
+          <a:xfrm flipH="1">
+            <a:off x="3992315" y="2474802"/>
+            <a:ext cx="1573" cy="590745"/>
+          </a:xfrm>
+          <a:prstGeom prst="line">
+            <a:avLst/>
+          </a:prstGeom>
+          <a:ln cap="flat">
+            <a:solidFill>
+              <a:schemeClr val="tx1"/>
+            </a:solidFill>
+            <a:headEnd type="oval"/>
+            <a:tailEnd type="oval"/>
+          </a:ln>
+        </p:spPr>
+        <p:style>
+          <a:lnRef idx="1">
+            <a:schemeClr val="accent1"/>
+          </a:lnRef>
+          <a:fillRef idx="0">
+            <a:schemeClr val="accent1"/>
+          </a:fillRef>
+          <a:effectRef idx="0">
+            <a:schemeClr val="accent1"/>
+          </a:effectRef>
+          <a:fontRef idx="minor">
+            <a:schemeClr val="tx1"/>
+          </a:fontRef>
+        </p:style>
+      </p:cxnSp>
+      <p:cxnSp>
+        <p:nvCxnSpPr>
+          <p:cNvPr id="25" name="Straight Arrow Connector 24">
+            <a:extLst>
+              <a:ext uri="{FF2B5EF4-FFF2-40B4-BE49-F238E27FC236}">
+                <a16:creationId xmlns:a16="http://schemas.microsoft.com/office/drawing/2014/main" id="{21E233CD-6720-FE70-7E45-9B473038CBD5}"/>
+              </a:ext>
+            </a:extLst>
+          </p:cNvPr>
+          <p:cNvCxnSpPr/>
+          <p:nvPr/>
+        </p:nvCxnSpPr>
+        <p:spPr>
+          <a:xfrm>
+            <a:off x="3715058" y="2473781"/>
+            <a:ext cx="209697" cy="0"/>
+          </a:xfrm>
+          <a:prstGeom prst="straightConnector1">
+            <a:avLst/>
+          </a:prstGeom>
+          <a:ln>
+            <a:tailEnd type="triangle"/>
+          </a:ln>
+        </p:spPr>
+        <p:style>
+          <a:lnRef idx="1">
+            <a:schemeClr val="accent1"/>
+          </a:lnRef>
+          <a:fillRef idx="0">
+            <a:schemeClr val="accent1"/>
+          </a:fillRef>
+          <a:effectRef idx="0">
+            <a:schemeClr val="accent1"/>
+          </a:effectRef>
+          <a:fontRef idx="minor">
+            <a:schemeClr val="tx1"/>
+          </a:fontRef>
+        </p:style>
+      </p:cxnSp>
+      <p:cxnSp>
+        <p:nvCxnSpPr>
+          <p:cNvPr id="26" name="Straight Arrow Connector 25">
+            <a:extLst>
+              <a:ext uri="{FF2B5EF4-FFF2-40B4-BE49-F238E27FC236}">
+                <a16:creationId xmlns:a16="http://schemas.microsoft.com/office/drawing/2014/main" id="{A60C3D28-D419-9C06-D19C-DB603B4D9438}"/>
+              </a:ext>
+            </a:extLst>
+          </p:cNvPr>
+          <p:cNvCxnSpPr/>
+          <p:nvPr/>
+        </p:nvCxnSpPr>
+        <p:spPr>
+          <a:xfrm>
+            <a:off x="4085142" y="2590995"/>
+            <a:ext cx="209697" cy="0"/>
+          </a:xfrm>
+          <a:prstGeom prst="straightConnector1">
+            <a:avLst/>
+          </a:prstGeom>
+          <a:ln>
+            <a:tailEnd type="triangle"/>
+          </a:ln>
+        </p:spPr>
+        <p:style>
+          <a:lnRef idx="1">
+            <a:schemeClr val="accent1"/>
+          </a:lnRef>
+          <a:fillRef idx="0">
+            <a:schemeClr val="accent1"/>
+          </a:fillRef>
+          <a:effectRef idx="0">
+            <a:schemeClr val="accent1"/>
+          </a:effectRef>
+          <a:fontRef idx="minor">
+            <a:schemeClr val="tx1"/>
+          </a:fontRef>
+        </p:style>
+      </p:cxnSp>
+      <p:cxnSp>
+        <p:nvCxnSpPr>
+          <p:cNvPr id="27" name="Straight Arrow Connector 26">
+            <a:extLst>
+              <a:ext uri="{FF2B5EF4-FFF2-40B4-BE49-F238E27FC236}">
+                <a16:creationId xmlns:a16="http://schemas.microsoft.com/office/drawing/2014/main" id="{9CD3E3AA-5E0D-0A11-6B0A-753DC6BA24C8}"/>
+              </a:ext>
+            </a:extLst>
+          </p:cNvPr>
+          <p:cNvCxnSpPr>
+            <a:cxnSpLocks/>
+          </p:cNvCxnSpPr>
+          <p:nvPr/>
+        </p:nvCxnSpPr>
+        <p:spPr>
+          <a:xfrm flipH="1">
+            <a:off x="3755005" y="3164195"/>
+            <a:ext cx="169813" cy="0"/>
+          </a:xfrm>
+          <a:prstGeom prst="straightConnector1">
+            <a:avLst/>
+          </a:prstGeom>
+          <a:ln>
+            <a:tailEnd type="triangle"/>
+          </a:ln>
+        </p:spPr>
+        <p:style>
+          <a:lnRef idx="1">
+            <a:schemeClr val="accent1"/>
+          </a:lnRef>
+          <a:fillRef idx="0">
+            <a:schemeClr val="accent1"/>
+          </a:fillRef>
+          <a:effectRef idx="0">
+            <a:schemeClr val="accent1"/>
+          </a:effectRef>
+          <a:fontRef idx="minor">
+            <a:schemeClr val="tx1"/>
+          </a:fontRef>
+        </p:style>
+      </p:cxnSp>
+      <p:cxnSp>
+        <p:nvCxnSpPr>
+          <p:cNvPr id="30" name="Straight Arrow Connector 29">
+            <a:extLst>
+              <a:ext uri="{FF2B5EF4-FFF2-40B4-BE49-F238E27FC236}">
+                <a16:creationId xmlns:a16="http://schemas.microsoft.com/office/drawing/2014/main" id="{C4BF5415-BCE8-43A1-CE3E-360C8E50A716}"/>
+              </a:ext>
+            </a:extLst>
+          </p:cNvPr>
+          <p:cNvCxnSpPr>
+            <a:cxnSpLocks/>
+          </p:cNvCxnSpPr>
+          <p:nvPr/>
+        </p:nvCxnSpPr>
+        <p:spPr>
+          <a:xfrm flipH="1">
+            <a:off x="4124418" y="3074039"/>
+            <a:ext cx="169813" cy="0"/>
+          </a:xfrm>
+          <a:prstGeom prst="straightConnector1">
+            <a:avLst/>
+          </a:prstGeom>
+          <a:ln>
+            <a:tailEnd type="triangle"/>
+          </a:ln>
+        </p:spPr>
+        <p:style>
+          <a:lnRef idx="1">
+            <a:schemeClr val="accent1"/>
+          </a:lnRef>
+          <a:fillRef idx="0">
+            <a:schemeClr val="accent1"/>
+          </a:fillRef>
+          <a:effectRef idx="0">
+            <a:schemeClr val="accent1"/>
+          </a:effectRef>
+          <a:fontRef idx="minor">
+            <a:schemeClr val="tx1"/>
+          </a:fontRef>
+        </p:style>
+      </p:cxnSp>
+      <p:sp>
+        <p:nvSpPr>
+          <p:cNvPr id="31" name="TextBox 30">
+            <a:extLst>
+              <a:ext uri="{FF2B5EF4-FFF2-40B4-BE49-F238E27FC236}">
+                <a16:creationId xmlns:a16="http://schemas.microsoft.com/office/drawing/2014/main" id="{91BE05AE-2BC5-5E96-C434-691C1C5B3241}"/>
+              </a:ext>
+            </a:extLst>
+          </p:cNvPr>
+          <p:cNvSpPr txBox="1"/>
+          <p:nvPr/>
+        </p:nvSpPr>
+        <p:spPr>
+          <a:xfrm>
+            <a:off x="8623470" y="2101506"/>
+            <a:ext cx="1527306" cy="707886"/>
+          </a:xfrm>
+          <a:prstGeom prst="rect">
+            <a:avLst/>
+          </a:prstGeom>
+          <a:noFill/>
+        </p:spPr>
+        <p:txBody>
+          <a:bodyPr wrap="square">
+            <a:spAutoFit/>
+          </a:bodyPr>
+          <a:lstStyle/>
+          <a:p>
+            <a:r>
+              <a:rPr lang="en-US" sz="1000" noProof="1">
+                <a:solidFill>
+                  <a:schemeClr val="accent1"/>
+                </a:solidFill>
+              </a:rPr>
+              <a:t>git starts askpass</a:t>
+            </a:r>
+          </a:p>
+          <a:p>
+            <a:r>
+              <a:rPr lang="en-US" sz="1000" noProof="1">
+                <a:solidFill>
+                  <a:schemeClr val="accent1"/>
+                </a:solidFill>
+              </a:rPr>
+              <a:t>-&gt; runs pragma-askpass</a:t>
+            </a:r>
+          </a:p>
+          <a:p>
+            <a:r>
+              <a:rPr lang="en-US" sz="1000" dirty="0"/>
+              <a:t>(creates pragma-</a:t>
+            </a:r>
+            <a:r>
+              <a:rPr lang="en-US" sz="1000" dirty="0" err="1"/>
+              <a:t>askpass</a:t>
+            </a:r>
+            <a:r>
+              <a:rPr lang="en-US" sz="1000" dirty="0"/>
+              <a:t>-running)</a:t>
+            </a:r>
+          </a:p>
+        </p:txBody>
+      </p:sp>
+      <p:sp>
+        <p:nvSpPr>
+          <p:cNvPr id="32" name="TextBox 31">
+            <a:extLst>
+              <a:ext uri="{FF2B5EF4-FFF2-40B4-BE49-F238E27FC236}">
+                <a16:creationId xmlns:a16="http://schemas.microsoft.com/office/drawing/2014/main" id="{A0FEB3CD-054C-9C71-6174-AFC07E4DABBA}"/>
+              </a:ext>
+            </a:extLst>
+          </p:cNvPr>
+          <p:cNvSpPr txBox="1"/>
+          <p:nvPr/>
+        </p:nvSpPr>
+        <p:spPr>
+          <a:xfrm>
+            <a:off x="10514773" y="2384995"/>
+            <a:ext cx="1527306" cy="400110"/>
+          </a:xfrm>
+          <a:prstGeom prst="rect">
+            <a:avLst/>
+          </a:prstGeom>
+          <a:noFill/>
+        </p:spPr>
+        <p:txBody>
+          <a:bodyPr wrap="square">
+            <a:spAutoFit/>
+          </a:bodyPr>
+          <a:lstStyle/>
+          <a:p>
+            <a:r>
+              <a:rPr lang="en-US" sz="1000" noProof="1">
+                <a:solidFill>
+                  <a:schemeClr val="accent1"/>
+                </a:solidFill>
+              </a:rPr>
+              <a:t>Pragma-git GUI opens askpass window</a:t>
+            </a:r>
+            <a:endParaRPr lang="en-US" sz="1000" dirty="0"/>
+          </a:p>
+        </p:txBody>
+      </p:sp>
+      <p:sp>
+        <p:nvSpPr>
+          <p:cNvPr id="33" name="TextBox 32">
+            <a:extLst>
+              <a:ext uri="{FF2B5EF4-FFF2-40B4-BE49-F238E27FC236}">
+                <a16:creationId xmlns:a16="http://schemas.microsoft.com/office/drawing/2014/main" id="{C9D1E035-4EDD-D323-0357-9558E039E3D5}"/>
+              </a:ext>
+            </a:extLst>
+          </p:cNvPr>
+          <p:cNvSpPr txBox="1"/>
+          <p:nvPr/>
+        </p:nvSpPr>
+        <p:spPr>
+          <a:xfrm>
+            <a:off x="10514773" y="2853651"/>
+            <a:ext cx="1527306" cy="707886"/>
+          </a:xfrm>
+          <a:prstGeom prst="rect">
+            <a:avLst/>
+          </a:prstGeom>
+          <a:noFill/>
+        </p:spPr>
+        <p:txBody>
+          <a:bodyPr wrap="square">
+            <a:spAutoFit/>
+          </a:bodyPr>
+          <a:lstStyle/>
+          <a:p>
+            <a:r>
+              <a:rPr lang="en-US" sz="1000" noProof="1">
+                <a:solidFill>
+                  <a:schemeClr val="accent1"/>
+                </a:solidFill>
+              </a:rPr>
+              <a:t>User close askpass window</a:t>
+            </a:r>
+            <a:br>
+              <a:rPr lang="en-US" sz="1000" noProof="1">
+                <a:solidFill>
+                  <a:schemeClr val="accent1"/>
+                </a:solidFill>
+              </a:rPr>
+            </a:br>
+            <a:r>
+              <a:rPr lang="en-US" sz="1000" noProof="1"/>
+              <a:t>(delete pragma-askpass-running)</a:t>
+            </a:r>
+            <a:endParaRPr lang="en-US" sz="1000" dirty="0"/>
+          </a:p>
+        </p:txBody>
+      </p:sp>
+      <p:sp>
+        <p:nvSpPr>
+          <p:cNvPr id="34" name="TextBox 33">
+            <a:extLst>
+              <a:ext uri="{FF2B5EF4-FFF2-40B4-BE49-F238E27FC236}">
+                <a16:creationId xmlns:a16="http://schemas.microsoft.com/office/drawing/2014/main" id="{AD8E956F-88D5-1DC2-D2CA-FFFB625DB841}"/>
+              </a:ext>
+            </a:extLst>
+          </p:cNvPr>
+          <p:cNvSpPr txBox="1"/>
+          <p:nvPr/>
+        </p:nvSpPr>
+        <p:spPr>
+          <a:xfrm>
+            <a:off x="9913466" y="1847536"/>
+            <a:ext cx="1521014" cy="400110"/>
+          </a:xfrm>
+          <a:prstGeom prst="rect">
+            <a:avLst/>
+          </a:prstGeom>
+          <a:noFill/>
+        </p:spPr>
+        <p:txBody>
+          <a:bodyPr wrap="square">
+            <a:spAutoFit/>
+          </a:bodyPr>
+          <a:lstStyle/>
+          <a:p>
+            <a:r>
+              <a:rPr lang="en-US" sz="1000" noProof="1"/>
+              <a:t>pragma-askpass-running</a:t>
+            </a:r>
+            <a:br>
+              <a:rPr lang="en-US" sz="1000" noProof="1"/>
+            </a:br>
+            <a:r>
+              <a:rPr lang="en-US" sz="1000" noProof="1"/>
+              <a:t>signal file exists</a:t>
+            </a:r>
+            <a:endParaRPr lang="en-US" sz="1000" dirty="0"/>
+          </a:p>
+        </p:txBody>
+      </p:sp>
+      <p:sp>
+        <p:nvSpPr>
+          <p:cNvPr id="35" name="TextBox 34">
+            <a:extLst>
+              <a:ext uri="{FF2B5EF4-FFF2-40B4-BE49-F238E27FC236}">
+                <a16:creationId xmlns:a16="http://schemas.microsoft.com/office/drawing/2014/main" id="{0A3B649B-7B85-F930-93AC-06C2DFAF6B86}"/>
+              </a:ext>
+            </a:extLst>
+          </p:cNvPr>
+          <p:cNvSpPr txBox="1"/>
+          <p:nvPr/>
+        </p:nvSpPr>
+        <p:spPr>
+          <a:xfrm>
+            <a:off x="8623470" y="2891235"/>
+            <a:ext cx="1527306" cy="553998"/>
+          </a:xfrm>
+          <a:prstGeom prst="rect">
+            <a:avLst/>
+          </a:prstGeom>
+          <a:noFill/>
+        </p:spPr>
+        <p:txBody>
+          <a:bodyPr wrap="square">
+            <a:spAutoFit/>
+          </a:bodyPr>
+          <a:lstStyle/>
+          <a:p>
+            <a:r>
+              <a:rPr lang="en-US" sz="1000" noProof="1">
+                <a:solidFill>
+                  <a:schemeClr val="accent1"/>
+                </a:solidFill>
+              </a:rPr>
+              <a:t>pragma-askpass script returns exit code and user/password text to git</a:t>
+            </a:r>
+            <a:endParaRPr lang="en-US" sz="1000" dirty="0"/>
+          </a:p>
+        </p:txBody>
+      </p:sp>
+      <p:cxnSp>
+        <p:nvCxnSpPr>
+          <p:cNvPr id="36" name="Straight Connector 35">
+            <a:extLst>
+              <a:ext uri="{FF2B5EF4-FFF2-40B4-BE49-F238E27FC236}">
+                <a16:creationId xmlns:a16="http://schemas.microsoft.com/office/drawing/2014/main" id="{172B5D85-FF60-C79F-ACAB-379CE20FAEEF}"/>
+              </a:ext>
+            </a:extLst>
+          </p:cNvPr>
+          <p:cNvCxnSpPr>
+            <a:cxnSpLocks/>
+          </p:cNvCxnSpPr>
+          <p:nvPr/>
+        </p:nvCxnSpPr>
+        <p:spPr>
+          <a:xfrm flipH="1">
+            <a:off x="10150776" y="2386016"/>
+            <a:ext cx="1573" cy="590745"/>
+          </a:xfrm>
+          <a:prstGeom prst="line">
+            <a:avLst/>
+          </a:prstGeom>
+          <a:ln cap="flat">
+            <a:solidFill>
+              <a:schemeClr val="tx1"/>
+            </a:solidFill>
+            <a:headEnd type="oval"/>
+            <a:tailEnd type="oval"/>
+          </a:ln>
+        </p:spPr>
+        <p:style>
+          <a:lnRef idx="1">
+            <a:schemeClr val="accent1"/>
+          </a:lnRef>
+          <a:fillRef idx="0">
+            <a:schemeClr val="accent1"/>
+          </a:fillRef>
+          <a:effectRef idx="0">
+            <a:schemeClr val="accent1"/>
+          </a:effectRef>
+          <a:fontRef idx="minor">
+            <a:schemeClr val="tx1"/>
+          </a:fontRef>
+        </p:style>
+      </p:cxnSp>
+      <p:cxnSp>
+        <p:nvCxnSpPr>
+          <p:cNvPr id="37" name="Straight Arrow Connector 36">
+            <a:extLst>
+              <a:ext uri="{FF2B5EF4-FFF2-40B4-BE49-F238E27FC236}">
+                <a16:creationId xmlns:a16="http://schemas.microsoft.com/office/drawing/2014/main" id="{D9587865-8500-EC99-A016-199FEDF1C2F3}"/>
+              </a:ext>
+            </a:extLst>
+          </p:cNvPr>
+          <p:cNvCxnSpPr/>
+          <p:nvPr/>
+        </p:nvCxnSpPr>
+        <p:spPr>
+          <a:xfrm>
+            <a:off x="9873519" y="2384995"/>
+            <a:ext cx="209697" cy="0"/>
+          </a:xfrm>
+          <a:prstGeom prst="straightConnector1">
+            <a:avLst/>
+          </a:prstGeom>
+          <a:ln>
+            <a:tailEnd type="triangle"/>
+          </a:ln>
+        </p:spPr>
+        <p:style>
+          <a:lnRef idx="1">
+            <a:schemeClr val="accent1"/>
+          </a:lnRef>
+          <a:fillRef idx="0">
+            <a:schemeClr val="accent1"/>
+          </a:fillRef>
+          <a:effectRef idx="0">
+            <a:schemeClr val="accent1"/>
+          </a:effectRef>
+          <a:fontRef idx="minor">
+            <a:schemeClr val="tx1"/>
+          </a:fontRef>
+        </p:style>
+      </p:cxnSp>
+      <p:cxnSp>
+        <p:nvCxnSpPr>
+          <p:cNvPr id="38" name="Straight Arrow Connector 37">
+            <a:extLst>
+              <a:ext uri="{FF2B5EF4-FFF2-40B4-BE49-F238E27FC236}">
+                <a16:creationId xmlns:a16="http://schemas.microsoft.com/office/drawing/2014/main" id="{0A7E26D0-96DA-8CFB-5311-F40C923E5A06}"/>
+              </a:ext>
+            </a:extLst>
+          </p:cNvPr>
+          <p:cNvCxnSpPr/>
+          <p:nvPr/>
+        </p:nvCxnSpPr>
+        <p:spPr>
+          <a:xfrm>
+            <a:off x="10243603" y="2502209"/>
+            <a:ext cx="209697" cy="0"/>
+          </a:xfrm>
+          <a:prstGeom prst="straightConnector1">
+            <a:avLst/>
+          </a:prstGeom>
+          <a:ln>
+            <a:tailEnd type="triangle"/>
+          </a:ln>
+        </p:spPr>
+        <p:style>
+          <a:lnRef idx="1">
+            <a:schemeClr val="accent1"/>
+          </a:lnRef>
+          <a:fillRef idx="0">
+            <a:schemeClr val="accent1"/>
+          </a:fillRef>
+          <a:effectRef idx="0">
+            <a:schemeClr val="accent1"/>
+          </a:effectRef>
+          <a:fontRef idx="minor">
+            <a:schemeClr val="tx1"/>
+          </a:fontRef>
+        </p:style>
+      </p:cxnSp>
+      <p:cxnSp>
+        <p:nvCxnSpPr>
+          <p:cNvPr id="39" name="Straight Arrow Connector 38">
+            <a:extLst>
+              <a:ext uri="{FF2B5EF4-FFF2-40B4-BE49-F238E27FC236}">
+                <a16:creationId xmlns:a16="http://schemas.microsoft.com/office/drawing/2014/main" id="{8B96D955-E9CB-A942-54F4-649311AF54BA}"/>
+              </a:ext>
+            </a:extLst>
+          </p:cNvPr>
+          <p:cNvCxnSpPr>
+            <a:cxnSpLocks/>
+          </p:cNvCxnSpPr>
+          <p:nvPr/>
+        </p:nvCxnSpPr>
+        <p:spPr>
+          <a:xfrm flipH="1">
+            <a:off x="9913466" y="3075409"/>
+            <a:ext cx="169813" cy="0"/>
+          </a:xfrm>
+          <a:prstGeom prst="straightConnector1">
+            <a:avLst/>
+          </a:prstGeom>
+          <a:ln>
+            <a:tailEnd type="triangle"/>
+          </a:ln>
+        </p:spPr>
+        <p:style>
+          <a:lnRef idx="1">
+            <a:schemeClr val="accent1"/>
+          </a:lnRef>
+          <a:fillRef idx="0">
+            <a:schemeClr val="accent1"/>
+          </a:fillRef>
+          <a:effectRef idx="0">
+            <a:schemeClr val="accent1"/>
+          </a:effectRef>
+          <a:fontRef idx="minor">
+            <a:schemeClr val="tx1"/>
+          </a:fontRef>
+        </p:style>
+      </p:cxnSp>
+      <p:cxnSp>
+        <p:nvCxnSpPr>
+          <p:cNvPr id="40" name="Straight Arrow Connector 39">
+            <a:extLst>
+              <a:ext uri="{FF2B5EF4-FFF2-40B4-BE49-F238E27FC236}">
+                <a16:creationId xmlns:a16="http://schemas.microsoft.com/office/drawing/2014/main" id="{8867BB98-E827-21C2-99C7-7EE98D993D83}"/>
+              </a:ext>
+            </a:extLst>
+          </p:cNvPr>
+          <p:cNvCxnSpPr>
+            <a:cxnSpLocks/>
+          </p:cNvCxnSpPr>
+          <p:nvPr/>
+        </p:nvCxnSpPr>
+        <p:spPr>
+          <a:xfrm flipH="1">
+            <a:off x="10282879" y="2985253"/>
+            <a:ext cx="169813" cy="0"/>
+          </a:xfrm>
+          <a:prstGeom prst="straightConnector1">
+            <a:avLst/>
+          </a:prstGeom>
+          <a:ln>
+            <a:tailEnd type="triangle"/>
+          </a:ln>
+        </p:spPr>
+        <p:style>
+          <a:lnRef idx="1">
+            <a:schemeClr val="accent1"/>
+          </a:lnRef>
+          <a:fillRef idx="0">
+            <a:schemeClr val="accent1"/>
+          </a:fillRef>
+          <a:effectRef idx="0">
+            <a:schemeClr val="accent1"/>
+          </a:effectRef>
+          <a:fontRef idx="minor">
+            <a:schemeClr val="tx1"/>
+          </a:fontRef>
+        </p:style>
+      </p:cxnSp>
+      <p:sp>
+        <p:nvSpPr>
+          <p:cNvPr id="42" name="Rectangle 41">
+            <a:extLst>
+              <a:ext uri="{FF2B5EF4-FFF2-40B4-BE49-F238E27FC236}">
+                <a16:creationId xmlns:a16="http://schemas.microsoft.com/office/drawing/2014/main" id="{0E379860-F3B7-5279-7444-B835CA5E49AF}"/>
+              </a:ext>
+            </a:extLst>
+          </p:cNvPr>
+          <p:cNvSpPr/>
+          <p:nvPr/>
+        </p:nvSpPr>
+        <p:spPr>
+          <a:xfrm>
+            <a:off x="8561388" y="1879400"/>
+            <a:ext cx="3434018" cy="1644807"/>
+          </a:xfrm>
+          <a:prstGeom prst="rect">
+            <a:avLst/>
+          </a:prstGeom>
+          <a:solidFill>
+            <a:schemeClr val="accent1">
+              <a:alpha val="8000"/>
+            </a:schemeClr>
+          </a:solidFill>
+          <a:ln>
+            <a:noFill/>
+          </a:ln>
+        </p:spPr>
+        <p:style>
+          <a:lnRef idx="2">
+            <a:schemeClr val="accent1">
+              <a:shade val="15000"/>
+            </a:schemeClr>
+          </a:lnRef>
+          <a:fillRef idx="1">
+            <a:schemeClr val="accent1"/>
+          </a:fillRef>
+          <a:effectRef idx="0">
+            <a:schemeClr val="accent1"/>
+          </a:effectRef>
+          <a:fontRef idx="minor">
+            <a:schemeClr val="lt1"/>
+          </a:fontRef>
+        </p:style>
+        <p:txBody>
+          <a:bodyPr rtlCol="0" anchor="ctr"/>
+          <a:lstStyle/>
+          <a:p>
+            <a:pPr algn="ctr"/>
+            <a:endParaRPr lang="en-US"/>
           </a:p>
         </p:txBody>
       </p:sp>
@@ -13387,13 +15268,7 @@
   <p:cSld>
     <p:spTree>
       <p:nvGrpSpPr>
-        <p:cNvPr id="1" name="">
-          <a:extLst>
-            <a:ext uri="{FF2B5EF4-FFF2-40B4-BE49-F238E27FC236}">
-              <a16:creationId xmlns:a16="http://schemas.microsoft.com/office/drawing/2014/main" id="{DE518DAA-53D0-1105-C6F2-C801F08D5253}"/>
-            </a:ext>
-          </a:extLst>
-        </p:cNvPr>
+        <p:cNvPr id="1" name=""/>
         <p:cNvGrpSpPr/>
         <p:nvPr/>
       </p:nvGrpSpPr>
@@ -13410,7 +15285,7 @@
           <p:cNvPr id="4" name="textruta 3">
             <a:extLst>
               <a:ext uri="{FF2B5EF4-FFF2-40B4-BE49-F238E27FC236}">
-                <a16:creationId xmlns:a16="http://schemas.microsoft.com/office/drawing/2014/main" id="{84151DEA-44C4-2776-6854-868F7FB7712C}"/>
+                <a16:creationId xmlns:a16="http://schemas.microsoft.com/office/drawing/2014/main" id="{4AD88DAB-01A9-A441-A11C-9B4000367464}"/>
               </a:ext>
             </a:extLst>
           </p:cNvPr>
@@ -13419,8 +15294,1185 @@
         </p:nvSpPr>
         <p:spPr>
           <a:xfrm>
+            <a:off x="489993" y="887480"/>
+            <a:ext cx="1099660" cy="461665"/>
+          </a:xfrm>
+          <a:prstGeom prst="rect">
+            <a:avLst/>
+          </a:prstGeom>
+          <a:noFill/>
+        </p:spPr>
+        <p:txBody>
+          <a:bodyPr wrap="none" rtlCol="0">
+            <a:spAutoFit/>
+          </a:bodyPr>
+          <a:lstStyle/>
+          <a:p>
+            <a:r>
+              <a:rPr lang="en-US" sz="2400" b="1" noProof="1"/>
+              <a:t>History</a:t>
+            </a:r>
+          </a:p>
+        </p:txBody>
+      </p:sp>
+      <p:sp>
+        <p:nvSpPr>
+          <p:cNvPr id="5" name="Rektangel 4">
+            <a:extLst>
+              <a:ext uri="{FF2B5EF4-FFF2-40B4-BE49-F238E27FC236}">
+                <a16:creationId xmlns:a16="http://schemas.microsoft.com/office/drawing/2014/main" id="{6298B066-77DC-F744-A641-81AB722329F0}"/>
+              </a:ext>
+            </a:extLst>
+          </p:cNvPr>
+          <p:cNvSpPr/>
+          <p:nvPr/>
+        </p:nvSpPr>
+        <p:spPr>
+          <a:xfrm>
+            <a:off x="489993" y="1361519"/>
+            <a:ext cx="3685232" cy="3293209"/>
+          </a:xfrm>
+          <a:prstGeom prst="rect">
+            <a:avLst/>
+          </a:prstGeom>
+          <a:solidFill>
+            <a:schemeClr val="bg1"/>
+          </a:solidFill>
+          <a:ln>
+            <a:solidFill>
+              <a:schemeClr val="accent1"/>
+            </a:solidFill>
+          </a:ln>
+        </p:spPr>
+        <p:txBody>
+          <a:bodyPr wrap="square">
+            <a:spAutoFit/>
+          </a:bodyPr>
+          <a:lstStyle/>
+          <a:p>
+            <a:r>
+              <a:rPr lang="en-US" sz="800" b="1" noProof="1"/>
+              <a:t>History is browsed with arrow buttons</a:t>
+            </a:r>
+          </a:p>
+          <a:p>
+            <a:endParaRPr lang="en-US" sz="800" noProof="1"/>
+          </a:p>
+          <a:p>
+            <a:pPr marL="171450" indent="-171450">
+              <a:buFont typeface="Courier New" panose="02070309020205020404" pitchFamily="49" charset="0"/>
+              <a:buChar char="o"/>
+            </a:pPr>
+            <a:r>
+              <a:rPr lang="en-US" sz="800" noProof="1"/>
+              <a:t>History signaled by getMode() == “HISTORY”</a:t>
+            </a:r>
+          </a:p>
+          <a:p>
+            <a:pPr marL="171450" indent="-171450">
+              <a:buFont typeface="Courier New" panose="02070309020205020404" pitchFamily="49" charset="0"/>
+              <a:buChar char="o"/>
+            </a:pPr>
+            <a:r>
+              <a:rPr lang="en-US" sz="800" noProof="1"/>
+              <a:t>History list can be shortened by </a:t>
+            </a:r>
+            <a:r>
+              <a:rPr lang="en-US" sz="800" b="1" noProof="1"/>
+              <a:t>Search</a:t>
+            </a:r>
+          </a:p>
+          <a:p>
+            <a:pPr marL="171450" indent="-171450">
+              <a:buFont typeface="Courier New" panose="02070309020205020404" pitchFamily="49" charset="0"/>
+              <a:buChar char="o"/>
+            </a:pPr>
+            <a:r>
+              <a:rPr lang="en-US" sz="800" noProof="1"/>
+              <a:t>History snapshot is compared with previous commit</a:t>
+            </a:r>
+          </a:p>
+          <a:p>
+            <a:pPr marL="171450" indent="-171450">
+              <a:buFont typeface="Courier New" panose="02070309020205020404" pitchFamily="49" charset="0"/>
+              <a:buChar char="o"/>
+            </a:pPr>
+            <a:r>
+              <a:rPr lang="en-US" sz="800" noProof="1"/>
+              <a:t>History snapshot can compare with “pinned” commit (=fixed commit)</a:t>
+            </a:r>
+          </a:p>
+          <a:p>
+            <a:pPr marL="324000" lvl="1" indent="-171450">
+              <a:buFont typeface="Arial" panose="020B0604020202020204" pitchFamily="34" charset="0"/>
+              <a:buChar char="•"/>
+            </a:pPr>
+            <a:endParaRPr lang="en-US" sz="800" noProof="1"/>
+          </a:p>
+          <a:p>
+            <a:pPr marL="171450" indent="-171450">
+              <a:buFont typeface="Courier New" panose="02070309020205020404" pitchFamily="49" charset="0"/>
+              <a:buChar char="o"/>
+            </a:pPr>
+            <a:r>
+              <a:rPr lang="en-US" sz="800" noProof="1">
+                <a:solidFill>
+                  <a:schemeClr val="accent1"/>
+                </a:solidFill>
+              </a:rPr>
+              <a:t>gitHistory() </a:t>
+            </a:r>
+            <a:endParaRPr lang="en-US" sz="800" noProof="1"/>
+          </a:p>
+          <a:p>
+            <a:pPr marL="324000" lvl="1" indent="-171450">
+              <a:buFont typeface="Arial" panose="020B0604020202020204" pitchFamily="34" charset="0"/>
+              <a:buChar char="•"/>
+            </a:pPr>
+            <a:r>
+              <a:rPr lang="en-US" sz="800" noProof="1"/>
+              <a:t>returns history, both with and without search</a:t>
+            </a:r>
+          </a:p>
+          <a:p>
+            <a:endParaRPr lang="en-US" sz="800" noProof="1">
+              <a:solidFill>
+                <a:schemeClr val="accent1"/>
+              </a:solidFill>
+            </a:endParaRPr>
+          </a:p>
+          <a:p>
+            <a:pPr marL="171450" indent="-171450">
+              <a:buFont typeface="Courier New" panose="02070309020205020404" pitchFamily="49" charset="0"/>
+              <a:buChar char="o"/>
+            </a:pPr>
+            <a:r>
+              <a:rPr lang="en-US" sz="800" noProof="1">
+                <a:solidFill>
+                  <a:schemeClr val="accent1"/>
+                </a:solidFill>
+              </a:rPr>
+              <a:t>localState keeps track of where you are in history</a:t>
+            </a:r>
+            <a:r>
+              <a:rPr lang="en-US" sz="800" noProof="1"/>
+              <a:t>:</a:t>
+            </a:r>
+          </a:p>
+          <a:p>
+            <a:pPr marL="324000" lvl="1" indent="-171450">
+              <a:buFont typeface="Arial" panose="020B0604020202020204" pitchFamily="34" charset="0"/>
+              <a:buChar char="•"/>
+            </a:pPr>
+            <a:r>
+              <a:rPr lang="en-US" sz="800" noProof="1"/>
+              <a:t>.historyNumber (-1 if not browsing history, index to )</a:t>
+            </a:r>
+          </a:p>
+          <a:p>
+            <a:pPr marL="324000" lvl="1" indent="-171450">
+              <a:buFont typeface="Arial" panose="020B0604020202020204" pitchFamily="34" charset="0"/>
+              <a:buChar char="•"/>
+            </a:pPr>
+            <a:r>
+              <a:rPr lang="en-US" sz="800" noProof="1"/>
+              <a:t>.historyHash (hash of commit)</a:t>
+            </a:r>
+          </a:p>
+          <a:p>
+            <a:pPr marL="324000" lvl="1" indent="-171450">
+              <a:buFont typeface="Arial" panose="020B0604020202020204" pitchFamily="34" charset="0"/>
+              <a:buChar char="•"/>
+            </a:pPr>
+            <a:r>
+              <a:rPr lang="en-US" sz="800" noProof="1"/>
+              <a:t>.historyString (descriptive text for messsage window)</a:t>
+            </a:r>
+            <a:br>
+              <a:rPr lang="en-US" sz="800" noProof="1"/>
+            </a:br>
+            <a:endParaRPr lang="en-US" sz="800" noProof="1"/>
+          </a:p>
+          <a:p>
+            <a:pPr marL="324000" lvl="1" indent="-171450">
+              <a:buFont typeface="Arial" panose="020B0604020202020204" pitchFamily="34" charset="0"/>
+              <a:buChar char="•"/>
+            </a:pPr>
+            <a:r>
+              <a:rPr lang="en-US" sz="800" noProof="1"/>
+              <a:t>.pinnedCommit=”” (means ordinary history)</a:t>
+            </a:r>
+          </a:p>
+          <a:p>
+            <a:pPr marL="324000" lvl="1" indent="-171450">
+              <a:buFont typeface="Arial" panose="020B0604020202020204" pitchFamily="34" charset="0"/>
+              <a:buChar char="•"/>
+            </a:pPr>
+            <a:r>
+              <a:rPr lang="en-US" sz="800" noProof="1"/>
+              <a:t>.pinnedCommit=hash (means pinned history)</a:t>
+            </a:r>
+            <a:br>
+              <a:rPr lang="en-US" sz="800" noProof="1"/>
+            </a:br>
+            <a:endParaRPr lang="en-US" sz="800" noProof="1"/>
+          </a:p>
+          <a:p>
+            <a:pPr marL="171450" indent="-171450">
+              <a:buFont typeface="Courier New" panose="02070309020205020404" pitchFamily="49" charset="0"/>
+              <a:buChar char="o"/>
+            </a:pPr>
+            <a:r>
+              <a:rPr lang="en-US" sz="800" noProof="1">
+                <a:solidFill>
+                  <a:schemeClr val="accent1"/>
+                </a:solidFill>
+              </a:rPr>
+              <a:t>gitShowHistorical(commit) </a:t>
+            </a:r>
+            <a:endParaRPr lang="en-US" sz="800" noProof="1"/>
+          </a:p>
+          <a:p>
+            <a:pPr marL="324000" lvl="1" indent="-171450">
+              <a:buFont typeface="Arial" panose="020B0604020202020204" pitchFamily="34" charset="0"/>
+              <a:buChar char="•"/>
+            </a:pPr>
+            <a:r>
+              <a:rPr lang="en-US" sz="800" noProof="1"/>
+              <a:t>returns status_data with changed file info</a:t>
+            </a:r>
+          </a:p>
+          <a:p>
+            <a:pPr marL="324000" lvl="1" indent="-171450">
+              <a:buFont typeface="Arial" panose="020B0604020202020204" pitchFamily="34" charset="0"/>
+              <a:buChar char="•"/>
+            </a:pPr>
+            <a:r>
+              <a:rPr lang="en-US" sz="800" noProof="1"/>
+              <a:t>if pinned, the status_data is relative pinned</a:t>
+            </a:r>
+          </a:p>
+          <a:p>
+            <a:pPr marL="324000" lvl="1" indent="-171450">
+              <a:buFont typeface="Arial" panose="020B0604020202020204" pitchFamily="34" charset="0"/>
+              <a:buChar char="•"/>
+            </a:pPr>
+            <a:r>
+              <a:rPr lang="en-US" sz="800" noProof="1"/>
+              <a:t>The status_data will always be comparison between newest and oldest of the two commits (showing change going forward in time)</a:t>
+            </a:r>
+          </a:p>
+          <a:p>
+            <a:pPr marL="324000" lvl="1" indent="-171450">
+              <a:buFont typeface="Arial" panose="020B0604020202020204" pitchFamily="34" charset="0"/>
+              <a:buChar char="•"/>
+            </a:pPr>
+            <a:r>
+              <a:rPr lang="en-US" sz="800" noProof="1"/>
+              <a:t>if not-pinned, status_data is relative previous commit</a:t>
+            </a:r>
+          </a:p>
+          <a:p>
+            <a:pPr marL="324000" lvl="1" indent="-171450">
+              <a:buFont typeface="Arial" panose="020B0604020202020204" pitchFamily="34" charset="0"/>
+              <a:buChar char="•"/>
+            </a:pPr>
+            <a:r>
+              <a:rPr lang="en-US" sz="800" noProof="1"/>
+              <a:t>localState.history_status_data</a:t>
+            </a:r>
+          </a:p>
+          <a:p>
+            <a:pPr marL="324000" lvl="1" indent="-171450">
+              <a:buFont typeface="Arial" panose="020B0604020202020204" pitchFamily="34" charset="0"/>
+              <a:buChar char="•"/>
+            </a:pPr>
+            <a:endParaRPr lang="en-US" sz="800" noProof="1"/>
+          </a:p>
+        </p:txBody>
+      </p:sp>
+      <p:sp>
+        <p:nvSpPr>
+          <p:cNvPr id="14" name="Rektangel 13">
+            <a:extLst>
+              <a:ext uri="{FF2B5EF4-FFF2-40B4-BE49-F238E27FC236}">
+                <a16:creationId xmlns:a16="http://schemas.microsoft.com/office/drawing/2014/main" id="{C15FF9A1-43E2-7348-9382-D2ADB3B355C8}"/>
+              </a:ext>
+            </a:extLst>
+          </p:cNvPr>
+          <p:cNvSpPr/>
+          <p:nvPr/>
+        </p:nvSpPr>
+        <p:spPr>
+          <a:xfrm>
+            <a:off x="4489123" y="3848849"/>
+            <a:ext cx="3372291" cy="2431435"/>
+          </a:xfrm>
+          <a:prstGeom prst="rect">
+            <a:avLst/>
+          </a:prstGeom>
+          <a:solidFill>
+            <a:schemeClr val="bg1"/>
+          </a:solidFill>
+          <a:ln>
+            <a:solidFill>
+              <a:schemeClr val="accent1"/>
+            </a:solidFill>
+          </a:ln>
+        </p:spPr>
+        <p:txBody>
+          <a:bodyPr wrap="square">
+            <a:spAutoFit/>
+          </a:bodyPr>
+          <a:lstStyle/>
+          <a:p>
+            <a:r>
+              <a:rPr lang="en-US" sz="800" b="1" noProof="1"/>
+              <a:t>Settings are loaded at Pragma-git start, and updated from Settings window</a:t>
+            </a:r>
+          </a:p>
+          <a:p>
+            <a:endParaRPr lang="en-US" sz="800" noProof="1">
+              <a:solidFill>
+                <a:schemeClr val="accent1"/>
+              </a:solidFill>
+            </a:endParaRPr>
+          </a:p>
+          <a:p>
+            <a:r>
+              <a:rPr lang="en-US" sz="800" noProof="1">
+                <a:solidFill>
+                  <a:schemeClr val="accent1"/>
+                </a:solidFill>
+              </a:rPr>
+              <a:t>Handling of settings in app.js</a:t>
+            </a:r>
+            <a:endParaRPr lang="en-US" sz="800" noProof="1"/>
+          </a:p>
+          <a:p>
+            <a:pPr marL="171450" indent="-171450">
+              <a:buFont typeface="Courier New" panose="02070309020205020404" pitchFamily="49" charset="0"/>
+              <a:buChar char="o"/>
+            </a:pPr>
+            <a:r>
+              <a:rPr lang="en-US" sz="800" noProof="1"/>
+              <a:t>loadSettings is called on Pragma-git start</a:t>
+            </a:r>
+          </a:p>
+          <a:p>
+            <a:pPr marL="324000" lvl="1" indent="-171450">
+              <a:buFont typeface="Arial" panose="020B0604020202020204" pitchFamily="34" charset="0"/>
+              <a:buChar char="•"/>
+            </a:pPr>
+            <a:r>
+              <a:rPr lang="en-US" sz="800" noProof="1"/>
+              <a:t>reads settings from settings.json</a:t>
+            </a:r>
+          </a:p>
+          <a:p>
+            <a:pPr marL="324000" lvl="1" indent="-171450">
+              <a:buFont typeface="Arial" panose="020B0604020202020204" pitchFamily="34" charset="0"/>
+              <a:buChar char="•"/>
+            </a:pPr>
+            <a:r>
+              <a:rPr lang="en-US" sz="800" noProof="1"/>
+              <a:t>stores settings in global.state in predefined order</a:t>
+            </a:r>
+          </a:p>
+          <a:p>
+            <a:pPr marL="171450" indent="-171450">
+              <a:buFont typeface="Courier New" panose="02070309020205020404" pitchFamily="49" charset="0"/>
+              <a:buChar char="o"/>
+            </a:pPr>
+            <a:r>
+              <a:rPr lang="en-US" sz="800" noProof="1"/>
+              <a:t>updateWithNewSettings is called :</a:t>
+            </a:r>
+          </a:p>
+          <a:p>
+            <a:pPr marL="324000" lvl="1" indent="-171450">
+              <a:buFont typeface="Arial" panose="020B0604020202020204" pitchFamily="34" charset="0"/>
+              <a:buChar char="•"/>
+            </a:pPr>
+            <a:r>
+              <a:rPr lang="en-US" sz="800" noProof="1"/>
+              <a:t>from loadSettings</a:t>
+            </a:r>
+          </a:p>
+          <a:p>
+            <a:pPr marL="324000" lvl="1" indent="-171450">
+              <a:buFont typeface="Arial" panose="020B0604020202020204" pitchFamily="34" charset="0"/>
+              <a:buChar char="•"/>
+            </a:pPr>
+            <a:r>
+              <a:rPr lang="en-US" sz="800" noProof="1"/>
+              <a:t>when leaving Settings window</a:t>
+            </a:r>
+          </a:p>
+          <a:p>
+            <a:pPr marL="171450" indent="-171450">
+              <a:buFont typeface="Courier New" panose="02070309020205020404" pitchFamily="49" charset="0"/>
+              <a:buChar char="o"/>
+            </a:pPr>
+            <a:r>
+              <a:rPr lang="en-US" sz="800" noProof="1"/>
+              <a:t>settings are saved when closing Pragma-git</a:t>
+            </a:r>
+          </a:p>
+          <a:p>
+            <a:pPr marL="171450" indent="-171450">
+              <a:buFont typeface="Courier New" panose="02070309020205020404" pitchFamily="49" charset="0"/>
+              <a:buChar char="o"/>
+            </a:pPr>
+            <a:r>
+              <a:rPr lang="en-US" sz="800" noProof="1"/>
+              <a:t>debug flags :  </a:t>
+            </a:r>
+          </a:p>
+          <a:p>
+            <a:pPr marL="324000" lvl="1" indent="-171450">
+              <a:buFont typeface="Arial" panose="020B0604020202020204" pitchFamily="34" charset="0"/>
+              <a:buChar char="•"/>
+            </a:pPr>
+            <a:r>
+              <a:rPr lang="en-US" sz="800" noProof="1"/>
+              <a:t>state.debug (main, enable git debug flags)</a:t>
+            </a:r>
+          </a:p>
+          <a:p>
+            <a:pPr marL="324000" lvl="1" indent="-171450">
+              <a:buFont typeface="Arial" panose="020B0604020202020204" pitchFamily="34" charset="0"/>
+              <a:buChar char="•"/>
+            </a:pPr>
+            <a:r>
+              <a:rPr lang="en-US" sz="800" noProof="1"/>
+              <a:t>state.graph.debug</a:t>
+            </a:r>
+            <a:br>
+              <a:rPr lang="en-US" sz="800" noProof="1"/>
+            </a:br>
+            <a:r>
+              <a:rPr lang="en-US" sz="800" noProof="1"/>
+              <a:t>are both read-only. Change directly in settings.json</a:t>
+            </a:r>
+          </a:p>
+          <a:p>
+            <a:endParaRPr lang="en-US" sz="800" noProof="1">
+              <a:solidFill>
+                <a:schemeClr val="accent1"/>
+              </a:solidFill>
+            </a:endParaRPr>
+          </a:p>
+          <a:p>
+            <a:r>
+              <a:rPr lang="en-US" sz="800" noProof="1">
+                <a:solidFill>
+                  <a:schemeClr val="accent1"/>
+                </a:solidFill>
+              </a:rPr>
+              <a:t>Settings window  settings.html :</a:t>
+            </a:r>
+            <a:endParaRPr lang="en-US" sz="800" noProof="1"/>
+          </a:p>
+          <a:p>
+            <a:pPr marL="171450" indent="-171450">
+              <a:buFont typeface="Courier New" panose="02070309020205020404" pitchFamily="49" charset="0"/>
+              <a:buChar char="o"/>
+            </a:pPr>
+            <a:r>
+              <a:rPr lang="en-US" sz="800" noProof="1"/>
+              <a:t>is populated from global.state </a:t>
+            </a:r>
+            <a:br>
+              <a:rPr lang="en-US" sz="800" noProof="1"/>
+            </a:br>
+            <a:r>
+              <a:rPr lang="en-US" sz="800" noProof="1"/>
+              <a:t>when   settings.js/injectIntoSettingsJs is called from settings.html</a:t>
+            </a:r>
+          </a:p>
+          <a:p>
+            <a:pPr marL="171450" indent="-171450">
+              <a:buFont typeface="Courier New" panose="02070309020205020404" pitchFamily="49" charset="0"/>
+              <a:buChar char="o"/>
+            </a:pPr>
+            <a:r>
+              <a:rPr lang="en-US" sz="800" noProof="1"/>
+              <a:t>closeWindow stores data in global.state before closing</a:t>
+            </a:r>
+          </a:p>
+        </p:txBody>
+      </p:sp>
+      <p:sp>
+        <p:nvSpPr>
+          <p:cNvPr id="15" name="textruta 14">
+            <a:extLst>
+              <a:ext uri="{FF2B5EF4-FFF2-40B4-BE49-F238E27FC236}">
+                <a16:creationId xmlns:a16="http://schemas.microsoft.com/office/drawing/2014/main" id="{9D47FF24-DA49-8046-9CB0-28C71CB63318}"/>
+              </a:ext>
+            </a:extLst>
+          </p:cNvPr>
+          <p:cNvSpPr txBox="1"/>
+          <p:nvPr/>
+        </p:nvSpPr>
+        <p:spPr>
+          <a:xfrm>
+            <a:off x="4447440" y="3416887"/>
+            <a:ext cx="1204882" cy="461665"/>
+          </a:xfrm>
+          <a:prstGeom prst="rect">
+            <a:avLst/>
+          </a:prstGeom>
+          <a:noFill/>
+        </p:spPr>
+        <p:txBody>
+          <a:bodyPr wrap="none" rtlCol="0">
+            <a:spAutoFit/>
+          </a:bodyPr>
+          <a:lstStyle/>
+          <a:p>
+            <a:r>
+              <a:rPr lang="en-US" sz="2400" b="1" noProof="1"/>
+              <a:t>Settings</a:t>
+            </a:r>
+          </a:p>
+        </p:txBody>
+      </p:sp>
+      <p:sp>
+        <p:nvSpPr>
+          <p:cNvPr id="16" name="textruta 15">
+            <a:extLst>
+              <a:ext uri="{FF2B5EF4-FFF2-40B4-BE49-F238E27FC236}">
+                <a16:creationId xmlns:a16="http://schemas.microsoft.com/office/drawing/2014/main" id="{9192722C-8F33-C74E-A8DA-E92B802175F0}"/>
+              </a:ext>
+            </a:extLst>
+          </p:cNvPr>
+          <p:cNvSpPr txBox="1"/>
+          <p:nvPr/>
+        </p:nvSpPr>
+        <p:spPr>
+          <a:xfrm>
+            <a:off x="489993" y="4804493"/>
+            <a:ext cx="1592103" cy="461665"/>
+          </a:xfrm>
+          <a:prstGeom prst="rect">
+            <a:avLst/>
+          </a:prstGeom>
+          <a:noFill/>
+        </p:spPr>
+        <p:txBody>
+          <a:bodyPr wrap="none" rtlCol="0">
+            <a:spAutoFit/>
+          </a:bodyPr>
+          <a:lstStyle/>
+          <a:p>
+            <a:r>
+              <a:rPr lang="en-US" sz="2400" b="1" noProof="1"/>
+              <a:t>Dark mode</a:t>
+            </a:r>
+          </a:p>
+        </p:txBody>
+      </p:sp>
+      <p:sp>
+        <p:nvSpPr>
+          <p:cNvPr id="17" name="Rektangel 16">
+            <a:extLst>
+              <a:ext uri="{FF2B5EF4-FFF2-40B4-BE49-F238E27FC236}">
+                <a16:creationId xmlns:a16="http://schemas.microsoft.com/office/drawing/2014/main" id="{0C6FE680-6AF2-4545-AE31-D52F0731E861}"/>
+              </a:ext>
+            </a:extLst>
+          </p:cNvPr>
+          <p:cNvSpPr/>
+          <p:nvPr/>
+        </p:nvSpPr>
+        <p:spPr>
+          <a:xfrm>
+            <a:off x="489993" y="5244410"/>
+            <a:ext cx="3685232" cy="2554545"/>
+          </a:xfrm>
+          <a:prstGeom prst="rect">
+            <a:avLst/>
+          </a:prstGeom>
+          <a:solidFill>
+            <a:schemeClr val="bg1"/>
+          </a:solidFill>
+          <a:ln>
+            <a:solidFill>
+              <a:schemeClr val="accent1"/>
+            </a:solidFill>
+          </a:ln>
+        </p:spPr>
+        <p:txBody>
+          <a:bodyPr wrap="square">
+            <a:spAutoFit/>
+          </a:bodyPr>
+          <a:lstStyle/>
+          <a:p>
+            <a:r>
+              <a:rPr lang="en-US" sz="800" b="1" noProof="1"/>
+              <a:t>Dark / light mode is defined from color_styles.css using css variables</a:t>
+            </a:r>
+          </a:p>
+          <a:p>
+            <a:endParaRPr lang="en-US" sz="800" noProof="1">
+              <a:solidFill>
+                <a:schemeClr val="accent1"/>
+              </a:solidFill>
+            </a:endParaRPr>
+          </a:p>
+          <a:p>
+            <a:r>
+              <a:rPr lang="en-US" sz="800" noProof="1">
+                <a:solidFill>
+                  <a:schemeClr val="accent1"/>
+                </a:solidFill>
+              </a:rPr>
+              <a:t>The mechanism</a:t>
+            </a:r>
+            <a:endParaRPr lang="en-US" sz="800" noProof="1"/>
+          </a:p>
+          <a:p>
+            <a:pPr marL="171450" indent="-171450">
+              <a:buFont typeface="Courier New" panose="02070309020205020404" pitchFamily="49" charset="0"/>
+              <a:buChar char="o"/>
+            </a:pPr>
+            <a:r>
+              <a:rPr lang="en-US" sz="800" noProof="1"/>
+              <a:t>&lt;body&gt; of each document is predefined with class=“light”</a:t>
+            </a:r>
+          </a:p>
+          <a:p>
+            <a:pPr marL="171450" indent="-171450">
+              <a:buFont typeface="Courier New" panose="02070309020205020404" pitchFamily="49" charset="0"/>
+              <a:buChar char="o"/>
+            </a:pPr>
+            <a:r>
+              <a:rPr lang="en-US" sz="800" noProof="1"/>
+              <a:t>script after &lt;body&gt;  adds a class=”dark” if dark mode</a:t>
+            </a:r>
+          </a:p>
+          <a:p>
+            <a:pPr marL="171450" indent="-171450">
+              <a:buFont typeface="Courier New" panose="02070309020205020404" pitchFamily="49" charset="0"/>
+              <a:buChar char="o"/>
+            </a:pPr>
+            <a:r>
+              <a:rPr lang="en-US" sz="800" noProof="1"/>
+              <a:t>darkmode is defined by localState.dark (true if darkmode, false if light)</a:t>
+            </a:r>
+          </a:p>
+          <a:p>
+            <a:pPr marL="171450" indent="-171450">
+              <a:buFont typeface="Courier New" panose="02070309020205020404" pitchFamily="49" charset="0"/>
+              <a:buChar char="o"/>
+            </a:pPr>
+            <a:r>
+              <a:rPr lang="en-US" sz="800" noProof="1"/>
+              <a:t> localState.dark is set from value of state.darkmode setting</a:t>
+            </a:r>
+          </a:p>
+          <a:p>
+            <a:pPr marL="171450" indent="-171450">
+              <a:buFont typeface="Courier New" panose="02070309020205020404" pitchFamily="49" charset="0"/>
+              <a:buChar char="o"/>
+            </a:pPr>
+            <a:endParaRPr lang="en-US" sz="800" noProof="1"/>
+          </a:p>
+          <a:p>
+            <a:r>
+              <a:rPr lang="en-US" sz="800" noProof="1">
+                <a:solidFill>
+                  <a:schemeClr val="accent1"/>
+                </a:solidFill>
+              </a:rPr>
+              <a:t>Main app :</a:t>
+            </a:r>
+            <a:endParaRPr lang="en-US" sz="800" noProof="1"/>
+          </a:p>
+          <a:p>
+            <a:pPr marL="171450" indent="-171450">
+              <a:buFont typeface="Courier New" panose="02070309020205020404" pitchFamily="49" charset="0"/>
+              <a:buChar char="o"/>
+            </a:pPr>
+            <a:r>
+              <a:rPr lang="en-US" sz="800" noProof="1"/>
+              <a:t>Main. window is mostly constant (except for text-fields and input texts)</a:t>
+            </a:r>
+            <a:br>
+              <a:rPr lang="en-US" sz="800" noProof="1"/>
+            </a:br>
+            <a:endParaRPr lang="en-US" sz="800" noProof="1"/>
+          </a:p>
+          <a:p>
+            <a:r>
+              <a:rPr lang="en-US" sz="800" noProof="1">
+                <a:solidFill>
+                  <a:schemeClr val="accent1"/>
+                </a:solidFill>
+              </a:rPr>
+              <a:t>Other windows behaves differently :</a:t>
+            </a:r>
+            <a:endParaRPr lang="en-US" sz="800" noProof="1"/>
+          </a:p>
+          <a:p>
+            <a:pPr marL="171450" indent="-171450">
+              <a:buFont typeface="Courier New" panose="02070309020205020404" pitchFamily="49" charset="0"/>
+              <a:buChar char="o"/>
+            </a:pPr>
+            <a:r>
+              <a:rPr lang="en-US" sz="800" noProof="1"/>
+              <a:t>Have styles reading css variables from color_styles.css</a:t>
+            </a:r>
+          </a:p>
+          <a:p>
+            <a:pPr marL="171450" indent="-171450">
+              <a:buFont typeface="Courier New" panose="02070309020205020404" pitchFamily="49" charset="0"/>
+              <a:buChar char="o"/>
+            </a:pPr>
+            <a:r>
+              <a:rPr lang="en-US" sz="800" noProof="1"/>
+              <a:t>A general img invert filter is applied which transforms black icons to white </a:t>
+            </a:r>
+            <a:br>
+              <a:rPr lang="en-US" sz="800" noProof="1"/>
+            </a:br>
+            <a:r>
+              <a:rPr lang="en-US" sz="800" noProof="1"/>
+              <a:t>(exceptions for color icons are defined in each document’s style section)</a:t>
+            </a:r>
+          </a:p>
+          <a:p>
+            <a:pPr marL="171450" indent="-171450">
+              <a:buFont typeface="Courier New" panose="02070309020205020404" pitchFamily="49" charset="0"/>
+              <a:buChar char="o"/>
+            </a:pPr>
+            <a:endParaRPr lang="en-US" sz="800" noProof="1"/>
+          </a:p>
+          <a:p>
+            <a:r>
+              <a:rPr lang="en-US" sz="800" noProof="1">
+                <a:solidFill>
+                  <a:schemeClr val="accent1"/>
+                </a:solidFill>
+              </a:rPr>
+              <a:t>Merge and Notes windows :</a:t>
+            </a:r>
+            <a:endParaRPr lang="en-US" sz="800" noProof="1"/>
+          </a:p>
+          <a:p>
+            <a:pPr marL="171450" indent="-171450">
+              <a:buFont typeface="Courier New" panose="02070309020205020404" pitchFamily="49" charset="0"/>
+              <a:buChar char="o"/>
+            </a:pPr>
+            <a:r>
+              <a:rPr lang="en-US" sz="800" noProof="1"/>
+              <a:t>Merge: hacked the CodeMirror css in pragma-merge.html</a:t>
+            </a:r>
+          </a:p>
+          <a:p>
+            <a:pPr marL="171450" indent="-171450">
+              <a:buFont typeface="Courier New" panose="02070309020205020404" pitchFamily="49" charset="0"/>
+              <a:buChar char="o"/>
+            </a:pPr>
+            <a:r>
+              <a:rPr lang="en-US" sz="800" noProof="1"/>
+              <a:t>Notes: hacked ToastUI editor css in notes.html</a:t>
+            </a:r>
+          </a:p>
+          <a:p>
+            <a:pPr marL="171450" indent="-171450">
+              <a:buFont typeface="Courier New" panose="02070309020205020404" pitchFamily="49" charset="0"/>
+              <a:buChar char="o"/>
+            </a:pPr>
+            <a:r>
+              <a:rPr lang="en-US" sz="800" noProof="1"/>
+              <a:t>Both have special css for icons and text-based buttons</a:t>
+            </a:r>
+          </a:p>
+        </p:txBody>
+      </p:sp>
+      <p:sp>
+        <p:nvSpPr>
+          <p:cNvPr id="18" name="Rektangel 17">
+            <a:extLst>
+              <a:ext uri="{FF2B5EF4-FFF2-40B4-BE49-F238E27FC236}">
+                <a16:creationId xmlns:a16="http://schemas.microsoft.com/office/drawing/2014/main" id="{1DB0E46F-C9CA-A948-A22C-D89EEA13217F}"/>
+              </a:ext>
+            </a:extLst>
+          </p:cNvPr>
+          <p:cNvSpPr/>
+          <p:nvPr/>
+        </p:nvSpPr>
+        <p:spPr>
+          <a:xfrm>
+            <a:off x="4496434" y="6939072"/>
+            <a:ext cx="3364980" cy="2062103"/>
+          </a:xfrm>
+          <a:prstGeom prst="rect">
+            <a:avLst/>
+          </a:prstGeom>
+          <a:solidFill>
+            <a:schemeClr val="bg1"/>
+          </a:solidFill>
+          <a:ln>
+            <a:solidFill>
+              <a:schemeClr val="accent1"/>
+            </a:solidFill>
+          </a:ln>
+        </p:spPr>
+        <p:txBody>
+          <a:bodyPr wrap="square">
+            <a:spAutoFit/>
+          </a:bodyPr>
+          <a:lstStyle/>
+          <a:p>
+            <a:pPr marL="171450" indent="-171450">
+              <a:buFont typeface="Courier New" panose="02070309020205020404" pitchFamily="49" charset="0"/>
+              <a:buChar char="o"/>
+            </a:pPr>
+            <a:r>
+              <a:rPr lang="en-US" sz="800" noProof="1">
+                <a:solidFill>
+                  <a:schemeClr val="accent1"/>
+                </a:solidFill>
+              </a:rPr>
+              <a:t>Notes, Graph window, Pragma-merge </a:t>
+            </a:r>
+          </a:p>
+          <a:p>
+            <a:pPr marL="324000" lvl="1" indent="-171450">
+              <a:buFont typeface="Arial" panose="020B0604020202020204" pitchFamily="34" charset="0"/>
+              <a:buChar char="•"/>
+            </a:pPr>
+            <a:r>
+              <a:rPr lang="en-US" sz="800" noProof="1"/>
+              <a:t>Based on npm find-in-nw</a:t>
+            </a:r>
+          </a:p>
+          <a:p>
+            <a:pPr marL="324000" lvl="1" indent="-171450">
+              <a:buFont typeface="Arial" panose="020B0604020202020204" pitchFamily="34" charset="0"/>
+              <a:buChar char="•"/>
+            </a:pPr>
+            <a:r>
+              <a:rPr lang="en-US" sz="800" noProof="1"/>
+              <a:t>Extend npm find-in-nw on the fly, with “extend_find-in-nw.js”</a:t>
+            </a:r>
+            <a:br>
+              <a:rPr lang="en-US" sz="800" noProof="1"/>
+            </a:br>
+            <a:r>
+              <a:rPr lang="en-US" sz="800" noProof="1"/>
+              <a:t>- make search case insensitive, add navigation CTRL-G, ↑,↓</a:t>
+            </a:r>
+            <a:br>
+              <a:rPr lang="en-US" sz="800" noProof="1"/>
+            </a:br>
+            <a:r>
+              <a:rPr lang="en-US" sz="800" noProof="1"/>
+              <a:t>- in Graph : searches document.body</a:t>
+            </a:r>
+            <a:br>
+              <a:rPr lang="en-US" sz="800" noProof="1"/>
+            </a:br>
+            <a:r>
+              <a:rPr lang="en-US" sz="800" noProof="1"/>
+              <a:t>- in Notes : search depends on wysiwyg / markdown modes</a:t>
+            </a:r>
+            <a:br>
+              <a:rPr lang="en-US" sz="800" noProof="1"/>
+            </a:br>
+            <a:r>
+              <a:rPr lang="en-US" sz="800" noProof="1"/>
+              <a:t>- in Pragma-merge : editor id in pragmaMergeSearchInEditorId</a:t>
+            </a:r>
+          </a:p>
+          <a:p>
+            <a:pPr marL="324000" lvl="1" indent="-171450">
+              <a:buFont typeface="Arial" panose="020B0604020202020204" pitchFamily="34" charset="0"/>
+              <a:buChar char="•"/>
+            </a:pPr>
+            <a:r>
+              <a:rPr lang="en-US" sz="800" noProof="1"/>
+              <a:t>Code added at end of Notes.html, graph.html, pragma-merge.html</a:t>
+            </a:r>
+          </a:p>
+          <a:p>
+            <a:pPr marL="324000" lvl="1" indent="-171450">
+              <a:buFont typeface="Arial" panose="020B0604020202020204" pitchFamily="34" charset="0"/>
+              <a:buChar char="•"/>
+            </a:pPr>
+            <a:endParaRPr lang="en-US" sz="800" noProof="1"/>
+          </a:p>
+          <a:p>
+            <a:pPr marL="171450" indent="-171450">
+              <a:buFont typeface="Courier New" panose="02070309020205020404" pitchFamily="49" charset="0"/>
+              <a:buChar char="o"/>
+            </a:pPr>
+            <a:r>
+              <a:rPr lang="en-US" sz="800" noProof="1">
+                <a:solidFill>
+                  <a:schemeClr val="accent1"/>
+                </a:solidFill>
+              </a:rPr>
+              <a:t>Notes window extra</a:t>
+            </a:r>
+          </a:p>
+          <a:p>
+            <a:pPr marL="324000" lvl="1" indent="-171450">
+              <a:buFont typeface="Arial" panose="020B0604020202020204" pitchFamily="34" charset="0"/>
+              <a:buChar char="•"/>
+            </a:pPr>
+            <a:r>
+              <a:rPr lang="en-US" sz="800" noProof="1"/>
+              <a:t>“Notes.html” : Listen to mouseover on markdown/wysiwyg switches</a:t>
+            </a:r>
+            <a:br>
+              <a:rPr lang="en-US" sz="800" noProof="1"/>
+            </a:br>
+            <a:r>
+              <a:rPr lang="en-US" sz="800" noProof="1"/>
+              <a:t>and clear marked finds (“tokens”), before switching.</a:t>
+            </a:r>
+            <a:br>
+              <a:rPr lang="en-US" sz="800" noProof="1"/>
+            </a:br>
+            <a:r>
+              <a:rPr lang="en-US" sz="800" noProof="1"/>
+              <a:t>Then close search box.</a:t>
+            </a:r>
+          </a:p>
+          <a:p>
+            <a:pPr marL="324000" lvl="1" indent="-171450">
+              <a:buFont typeface="Arial" panose="020B0604020202020204" pitchFamily="34" charset="0"/>
+              <a:buChar char="•"/>
+            </a:pPr>
+            <a:r>
+              <a:rPr lang="en-US" sz="800" noProof="1"/>
+              <a:t>“Notes.js” : Stop save from happening if find is active</a:t>
+            </a:r>
+          </a:p>
+          <a:p>
+            <a:pPr marL="324000" lvl="1" indent="-171450">
+              <a:buFont typeface="Arial" panose="020B0604020202020204" pitchFamily="34" charset="0"/>
+              <a:buChar char="•"/>
+            </a:pPr>
+            <a:endParaRPr lang="en-US" sz="800" noProof="1"/>
+          </a:p>
+          <a:p>
+            <a:pPr marL="324000" lvl="1" indent="-171450">
+              <a:buFont typeface="Arial" panose="020B0604020202020204" pitchFamily="34" charset="0"/>
+              <a:buChar char="•"/>
+            </a:pPr>
+            <a:endParaRPr lang="en-US" sz="800" noProof="1"/>
+          </a:p>
+        </p:txBody>
+      </p:sp>
+      <p:sp>
+        <p:nvSpPr>
+          <p:cNvPr id="19" name="textruta 18">
+            <a:extLst>
+              <a:ext uri="{FF2B5EF4-FFF2-40B4-BE49-F238E27FC236}">
+                <a16:creationId xmlns:a16="http://schemas.microsoft.com/office/drawing/2014/main" id="{A7C2C043-D2F7-C944-B558-2BA54F5E7D29}"/>
+              </a:ext>
+            </a:extLst>
+          </p:cNvPr>
+          <p:cNvSpPr txBox="1"/>
+          <p:nvPr/>
+        </p:nvSpPr>
+        <p:spPr>
+          <a:xfrm>
+            <a:off x="4447440" y="6494382"/>
+            <a:ext cx="1704634" cy="461665"/>
+          </a:xfrm>
+          <a:prstGeom prst="rect">
+            <a:avLst/>
+          </a:prstGeom>
+          <a:noFill/>
+        </p:spPr>
+        <p:txBody>
+          <a:bodyPr wrap="none" rtlCol="0">
+            <a:spAutoFit/>
+          </a:bodyPr>
+          <a:lstStyle/>
+          <a:p>
+            <a:r>
+              <a:rPr lang="en-US" sz="2400" b="1" noProof="1"/>
+              <a:t>Find in html</a:t>
+            </a:r>
+          </a:p>
+        </p:txBody>
+      </p:sp>
+      <p:sp>
+        <p:nvSpPr>
+          <p:cNvPr id="20" name="Rektangel 19">
+            <a:extLst>
+              <a:ext uri="{FF2B5EF4-FFF2-40B4-BE49-F238E27FC236}">
+                <a16:creationId xmlns:a16="http://schemas.microsoft.com/office/drawing/2014/main" id="{116B39BA-29B4-7748-8FA3-5994271F75AA}"/>
+              </a:ext>
+            </a:extLst>
+          </p:cNvPr>
+          <p:cNvSpPr/>
+          <p:nvPr/>
+        </p:nvSpPr>
+        <p:spPr>
+          <a:xfrm>
+            <a:off x="465896" y="8400871"/>
+            <a:ext cx="3685232" cy="1200329"/>
+          </a:xfrm>
+          <a:prstGeom prst="rect">
+            <a:avLst/>
+          </a:prstGeom>
+          <a:solidFill>
+            <a:schemeClr val="bg1"/>
+          </a:solidFill>
+          <a:ln>
+            <a:solidFill>
+              <a:schemeClr val="accent1"/>
+            </a:solidFill>
+          </a:ln>
+        </p:spPr>
+        <p:txBody>
+          <a:bodyPr wrap="square">
+            <a:spAutoFit/>
+          </a:bodyPr>
+          <a:lstStyle/>
+          <a:p>
+            <a:r>
+              <a:rPr lang="en-US" sz="800" noProof="1">
+                <a:solidFill>
+                  <a:schemeClr val="accent1"/>
+                </a:solidFill>
+              </a:rPr>
+              <a:t>About.html</a:t>
+            </a:r>
+            <a:endParaRPr lang="en-US" sz="800" noProof="1"/>
+          </a:p>
+          <a:p>
+            <a:pPr marL="171450" indent="-171450">
+              <a:buFont typeface="Courier New" panose="02070309020205020404" pitchFamily="49" charset="0"/>
+              <a:buChar char="o"/>
+            </a:pPr>
+            <a:r>
+              <a:rPr lang="en-US" sz="800" noProof="1"/>
+              <a:t>is self-contained</a:t>
+            </a:r>
+          </a:p>
+          <a:p>
+            <a:pPr marL="171450" indent="-171450">
+              <a:buFont typeface="Courier New" panose="02070309020205020404" pitchFamily="49" charset="0"/>
+              <a:buChar char="o"/>
+            </a:pPr>
+            <a:r>
+              <a:rPr lang="en-US" sz="800" noProof="1"/>
+              <a:t>inserts “about_search.html” in div, to have same text here as in help for history search.</a:t>
+            </a:r>
+            <a:endParaRPr lang="en-US" sz="800" noProof="1">
+              <a:solidFill>
+                <a:schemeClr val="accent1"/>
+              </a:solidFill>
+            </a:endParaRPr>
+          </a:p>
+          <a:p>
+            <a:r>
+              <a:rPr lang="en-US" sz="800" noProof="1">
+                <a:solidFill>
+                  <a:schemeClr val="accent1"/>
+                </a:solidFill>
+              </a:rPr>
+              <a:t>about_search.html</a:t>
+            </a:r>
+            <a:endParaRPr lang="en-US" sz="800" noProof="1"/>
+          </a:p>
+          <a:p>
+            <a:pPr marL="171450" indent="-171450">
+              <a:buFont typeface="Courier New" panose="02070309020205020404" pitchFamily="49" charset="0"/>
+              <a:buChar char="o"/>
+            </a:pPr>
+            <a:r>
+              <a:rPr lang="en-US" sz="800" noProof="1"/>
+              <a:t>is self-contained</a:t>
+            </a:r>
+            <a:endParaRPr lang="en-US" sz="800" noProof="1">
+              <a:solidFill>
+                <a:schemeClr val="accent1"/>
+              </a:solidFill>
+            </a:endParaRPr>
+          </a:p>
+          <a:p>
+            <a:r>
+              <a:rPr lang="en-US" sz="800" noProof="1">
+                <a:solidFill>
+                  <a:schemeClr val="accent1"/>
+                </a:solidFill>
+              </a:rPr>
+              <a:t>Other help texts</a:t>
+            </a:r>
+            <a:endParaRPr lang="en-US" sz="800" noProof="1"/>
+          </a:p>
+          <a:p>
+            <a:pPr marL="171450" indent="-171450">
+              <a:buFont typeface="Courier New" panose="02070309020205020404" pitchFamily="49" charset="0"/>
+              <a:buChar char="o"/>
+            </a:pPr>
+            <a:r>
+              <a:rPr lang="en-US" sz="800" noProof="1"/>
+              <a:t>HELP/TEMPLATE_help.html &lt;div id="inner-content"&gt;, is replaced with text from HELP/ by app.js</a:t>
+            </a:r>
+          </a:p>
+        </p:txBody>
+      </p:sp>
+      <p:sp>
+        <p:nvSpPr>
+          <p:cNvPr id="21" name="textruta 20">
+            <a:extLst>
+              <a:ext uri="{FF2B5EF4-FFF2-40B4-BE49-F238E27FC236}">
+                <a16:creationId xmlns:a16="http://schemas.microsoft.com/office/drawing/2014/main" id="{7DE9AEB1-C5B0-C249-BF18-9D6FEFA03971}"/>
+              </a:ext>
+            </a:extLst>
+          </p:cNvPr>
+          <p:cNvSpPr txBox="1"/>
+          <p:nvPr/>
+        </p:nvSpPr>
+        <p:spPr>
+          <a:xfrm>
+            <a:off x="416902" y="7929139"/>
+            <a:ext cx="885388" cy="461665"/>
+          </a:xfrm>
+          <a:prstGeom prst="rect">
+            <a:avLst/>
+          </a:prstGeom>
+          <a:noFill/>
+        </p:spPr>
+        <p:txBody>
+          <a:bodyPr wrap="square" rtlCol="0">
+            <a:spAutoFit/>
+          </a:bodyPr>
+          <a:lstStyle/>
+          <a:p>
+            <a:r>
+              <a:rPr lang="en-US" sz="2400" b="1" noProof="1"/>
+              <a:t>Help</a:t>
+            </a:r>
+          </a:p>
+        </p:txBody>
+      </p:sp>
+      <p:sp>
+        <p:nvSpPr>
+          <p:cNvPr id="22" name="textruta 21">
+            <a:extLst>
+              <a:ext uri="{FF2B5EF4-FFF2-40B4-BE49-F238E27FC236}">
+                <a16:creationId xmlns:a16="http://schemas.microsoft.com/office/drawing/2014/main" id="{AF028C6E-A947-D149-8E6C-A4419B0C31F8}"/>
+              </a:ext>
+            </a:extLst>
+          </p:cNvPr>
+          <p:cNvSpPr txBox="1"/>
+          <p:nvPr/>
+        </p:nvSpPr>
+        <p:spPr>
+          <a:xfrm>
             <a:off x="416902" y="122259"/>
-            <a:ext cx="7999947" cy="830997"/>
+            <a:ext cx="4211089" cy="830997"/>
           </a:xfrm>
           <a:prstGeom prst="rect">
             <a:avLst/>
@@ -13439,17 +16491,17 @@
                   <a:schemeClr val="accent1"/>
                 </a:solidFill>
               </a:rPr>
-              <a:t>Git providers (github, gitlab,…)</a:t>
-            </a:r>
-          </a:p>
-        </p:txBody>
-      </p:sp>
-      <p:sp>
-        <p:nvSpPr>
-          <p:cNvPr id="5" name="textruta 4">
-            <a:extLst>
-              <a:ext uri="{FF2B5EF4-FFF2-40B4-BE49-F238E27FC236}">
-                <a16:creationId xmlns:a16="http://schemas.microsoft.com/office/drawing/2014/main" id="{ADE3883B-4E67-CF9D-9EEC-2A26C5A55CD6}"/>
+              <a:t>Other Windows</a:t>
+            </a:r>
+          </a:p>
+        </p:txBody>
+      </p:sp>
+      <p:sp>
+        <p:nvSpPr>
+          <p:cNvPr id="2" name="textruta 1">
+            <a:extLst>
+              <a:ext uri="{FF2B5EF4-FFF2-40B4-BE49-F238E27FC236}">
+                <a16:creationId xmlns:a16="http://schemas.microsoft.com/office/drawing/2014/main" id="{9851A2CD-4B90-C07F-1152-611E6755CCD9}"/>
               </a:ext>
             </a:extLst>
           </p:cNvPr>
@@ -13458,8 +16510,8 @@
         </p:nvSpPr>
         <p:spPr>
           <a:xfrm>
-            <a:off x="498478" y="1497415"/>
-            <a:ext cx="3274288" cy="4401205"/>
+            <a:off x="4489123" y="1381925"/>
+            <a:ext cx="3274288" cy="1938992"/>
           </a:xfrm>
           <a:prstGeom prst="rect">
             <a:avLst/>
@@ -13479,12 +16531,8 @@
           <a:p>
             <a:r>
               <a:rPr lang="en-US" sz="800" b="1" noProof="1"/>
-              <a:t>Providers are implemented in the following way</a:t>
-            </a:r>
-            <a:br>
-              <a:rPr lang="en-US" sz="800" b="1" noProof="1"/>
-            </a:br>
-            <a:endParaRPr lang="en-US" sz="800" b="1" noProof="1"/>
+              <a:t>Explicitly defined in .html file</a:t>
+            </a:r>
           </a:p>
           <a:p>
             <a:pPr marL="171450" indent="-171450">
@@ -13492,21 +16540,9 @@
               <a:buChar char="o"/>
             </a:pPr>
             <a:r>
-              <a:rPr lang="en-US" sz="800" noProof="1">
-                <a:solidFill>
-                  <a:schemeClr val="accent1"/>
-                </a:solidFill>
-              </a:rPr>
-              <a:t>Classes for different providers</a:t>
-            </a:r>
-            <a:r>
-              <a:rPr lang="en-US" sz="800" noProof="1"/>
-              <a:t>--  in folder apis_github_and_others</a:t>
-            </a:r>
-            <a:br>
-              <a:rPr lang="en-US" sz="800" noProof="1"/>
-            </a:br>
-            <a:endParaRPr lang="en-US" sz="800" noProof="1"/>
+              <a:rPr lang="en-US" sz="800" noProof="1"/>
+              <a:t>This is for dialogs with predefined content</a:t>
+            </a:r>
           </a:p>
           <a:p>
             <a:pPr marL="171450" indent="-171450">
@@ -13514,50 +16550,18 @@
               <a:buChar char="o"/>
             </a:pPr>
             <a:r>
-              <a:rPr lang="en-US" sz="800" noProof="1">
-                <a:solidFill>
-                  <a:schemeClr val="accent1"/>
-                </a:solidFill>
-              </a:rPr>
-              <a:t>Main class</a:t>
-            </a:r>
-            <a:r>
-              <a:rPr lang="en-US" sz="800" noProof="1"/>
-              <a:t> general_git_rest_api.js</a:t>
-            </a:r>
-          </a:p>
-          <a:p>
-            <a:pPr marL="324000" lvl="1" indent="-171450">
-              <a:buFont typeface="Arial" panose="020B0604020202020204" pitchFamily="34" charset="0"/>
-              <a:buChar char="•"/>
-            </a:pPr>
-            <a:r>
-              <a:rPr lang="en-US" sz="800" noProof="1"/>
-              <a:t>Common constructor sets :</a:t>
-            </a:r>
-            <a:br>
-              <a:rPr lang="en-US" sz="800" noProof="1"/>
-            </a:br>
-            <a:r>
-              <a:rPr lang="en-US" sz="800" noProof="1"/>
-              <a:t> giturl, username, TOKEN</a:t>
-            </a:r>
-          </a:p>
-          <a:p>
-            <a:pPr marL="324000" lvl="1" indent="-171450">
-              <a:buFont typeface="Arial" panose="020B0604020202020204" pitchFamily="34" charset="0"/>
-              <a:buChar char="•"/>
-            </a:pPr>
-            <a:r>
-              <a:rPr lang="en-US" sz="800" noProof="1"/>
-              <a:t>Implements fetch function :</a:t>
-            </a:r>
-            <a:br>
-              <a:rPr lang="en-US" sz="800" noProof="1"/>
-            </a:br>
-            <a:r>
-              <a:rPr lang="en-US" sz="800" noProof="1"/>
-              <a:t> fetchWithApi</a:t>
+              <a:rPr lang="en-US" sz="800" noProof="1"/>
+              <a:t>Shows as html-dialog , inside main app.js window</a:t>
+            </a:r>
+            <a:endParaRPr lang="en-US" sz="800" b="1" noProof="1"/>
+          </a:p>
+          <a:p>
+            <a:endParaRPr lang="en-US" sz="800" noProof="1"/>
+          </a:p>
+          <a:p>
+            <a:r>
+              <a:rPr lang="en-US" sz="800" b="1" noProof="1"/>
+              <a:t>Template-dialog in.html file</a:t>
             </a:r>
           </a:p>
           <a:p>
@@ -13565,7 +16569,10 @@
               <a:buFont typeface="Courier New" panose="02070309020205020404" pitchFamily="49" charset="0"/>
               <a:buChar char="o"/>
             </a:pPr>
-            <a:endParaRPr lang="en-US" sz="800" noProof="1"/>
+            <a:r>
+              <a:rPr lang="en-US" sz="800" noProof="1"/>
+              <a:t>Local to app.html, and settings.html</a:t>
+            </a:r>
           </a:p>
           <a:p>
             <a:pPr marL="171450" indent="-171450">
@@ -13573,16 +16580,8 @@
               <a:buChar char="o"/>
             </a:pPr>
             <a:r>
-              <a:rPr lang="en-US" sz="800" noProof="1">
-                <a:solidFill>
-                  <a:schemeClr val="accent1"/>
-                </a:solidFill>
-              </a:rPr>
-              <a:t>Provider-specific i</a:t>
-            </a:r>
-            <a:r>
-              <a:rPr lang="en-US" sz="800" noProof="1"/>
-              <a:t>mplemented by inheriting from general_git_rest_api.js. </a:t>
+              <a:rPr lang="en-US" sz="800" noProof="1"/>
+              <a:t>displayAlert(title, message)</a:t>
             </a:r>
           </a:p>
           <a:p>
@@ -13590,72 +16589,23 @@
               <a:buFont typeface="Courier New" panose="02070309020205020404" pitchFamily="49" charset="0"/>
               <a:buChar char="o"/>
             </a:pPr>
-            <a:endParaRPr lang="en-US" sz="800" noProof="1"/>
+            <a:r>
+              <a:rPr lang="en-US" sz="800" noProof="1"/>
+              <a:t>Shows as html-dialog , inside main window</a:t>
+            </a:r>
           </a:p>
           <a:p>
             <a:pPr marL="171450" indent="-171450">
               <a:buFont typeface="Courier New" panose="02070309020205020404" pitchFamily="49" charset="0"/>
               <a:buChar char="o"/>
             </a:pPr>
-            <a:r>
-              <a:rPr lang="en-US" sz="800" noProof="1">
-                <a:solidFill>
-                  <a:schemeClr val="accent1"/>
-                </a:solidFill>
-              </a:rPr>
-              <a:t>Adding a new provider means to  implement the following methods</a:t>
-            </a:r>
-            <a:r>
-              <a:rPr lang="en-US" sz="800" noProof="1"/>
-              <a:t>: </a:t>
-            </a:r>
-          </a:p>
-          <a:p>
-            <a:pPr marL="324000" lvl="1" indent="-171450">
-              <a:buFont typeface="Arial" panose="020B0604020202020204" pitchFamily="34" charset="0"/>
-              <a:buChar char="•"/>
-            </a:pPr>
-            <a:r>
-              <a:rPr lang="en-US" sz="800" noProof="1"/>
-              <a:t>Constructor – inherits from main class, but also set this.api-url</a:t>
-            </a:r>
-          </a:p>
-          <a:p>
-            <a:pPr marL="324000" lvl="1" indent="-171450">
-              <a:buFont typeface="Arial" panose="020B0604020202020204" pitchFamily="34" charset="0"/>
-              <a:buChar char="•"/>
-            </a:pPr>
-            <a:r>
-              <a:rPr lang="en-US" sz="800" noProof="1"/>
-              <a:t>initialize – calls api and get json response from api</a:t>
-            </a:r>
-          </a:p>
-          <a:p>
-            <a:pPr marL="324000" lvl="1" indent="-171450">
-              <a:buFont typeface="Arial" panose="020B0604020202020204" pitchFamily="34" charset="0"/>
-              <a:buChar char="•"/>
-            </a:pPr>
-            <a:r>
-              <a:rPr lang="en-US" sz="800" noProof="1"/>
-              <a:t>createRepo – creates a repository through api call</a:t>
-            </a:r>
-          </a:p>
-          <a:p>
-            <a:pPr marL="324000" lvl="1" indent="-171450">
-              <a:buFont typeface="Arial" panose="020B0604020202020204" pitchFamily="34" charset="0"/>
-              <a:buChar char="•"/>
-            </a:pPr>
-            <a:r>
-              <a:rPr lang="en-US" sz="800" noProof="1"/>
-              <a:t>getValue – gets a number of values from json response in a standardized way (same for all providers)</a:t>
-            </a:r>
-          </a:p>
-          <a:p>
-            <a:pPr marL="324000" lvl="1" indent="-171450">
-              <a:buFont typeface="Arial" panose="020B0604020202020204" pitchFamily="34" charset="0"/>
-              <a:buChar char="•"/>
-            </a:pPr>
-            <a:endParaRPr lang="en-US" sz="800" noProof="1"/>
+            <a:endParaRPr lang="en-US" sz="800" b="1" noProof="1"/>
+          </a:p>
+          <a:p>
+            <a:r>
+              <a:rPr lang="en-US" sz="800" b="1" noProof="1"/>
+              <a:t>exernalDialog.html (sizing performed in app.html)</a:t>
+            </a:r>
           </a:p>
           <a:p>
             <a:pPr marL="171450" indent="-171450">
@@ -13663,104 +16613,16 @@
               <a:buChar char="o"/>
             </a:pPr>
             <a:r>
-              <a:rPr lang="en-US" sz="800" noProof="1">
-                <a:solidFill>
-                  <a:schemeClr val="accent1"/>
-                </a:solidFill>
-              </a:rPr>
-              <a:t>getValue</a:t>
-            </a:r>
-            <a:r>
-              <a:rPr lang="en-US" sz="800" noProof="1"/>
-              <a:t> can be called with these parameters  (may be updated)</a:t>
-            </a:r>
-          </a:p>
-          <a:p>
-            <a:pPr marL="152550" lvl="1"/>
-            <a:r>
-              <a:rPr lang="en-US" sz="800" b="1" noProof="1"/>
-              <a:t>   The following can be called without initialization (fast)</a:t>
-            </a:r>
-          </a:p>
-          <a:p>
-            <a:pPr marL="324000" lvl="1" indent="-171450">
-              <a:buFont typeface="Arial" panose="020B0604020202020204" pitchFamily="34" charset="0"/>
-              <a:buChar char="•"/>
-            </a:pPr>
-            <a:r>
-              <a:rPr lang="en-US" sz="800" noProof="1"/>
-              <a:t>'git-username’ – username needed</a:t>
-            </a:r>
-          </a:p>
-          <a:p>
-            <a:pPr marL="324000" lvl="1" indent="-171450">
-              <a:buFont typeface="Arial" panose="020B0604020202020204" pitchFamily="34" charset="0"/>
-              <a:buChar char="•"/>
-            </a:pPr>
-            <a:r>
-              <a:rPr lang="en-US" sz="800" noProof="1"/>
-              <a:t>'icon’ – path to 16x16 pixel icon.  Should return path to a  darkmode and lightmode icon (you can return same path, if it is a color icon that works for both). See gitlab.com.js implementation</a:t>
-            </a:r>
-          </a:p>
-          <a:p>
-            <a:pPr marL="152550" lvl="1"/>
-            <a:r>
-              <a:rPr lang="en-US" sz="800" b="1" noProof="1"/>
-              <a:t>   The following requires a call to initialize() before accessible :</a:t>
-            </a:r>
-          </a:p>
-          <a:p>
-            <a:pPr marL="324000" lvl="1" indent="-171450">
-              <a:buFont typeface="Arial" panose="020B0604020202020204" pitchFamily="34" charset="0"/>
-              <a:buChar char="•"/>
-            </a:pPr>
-            <a:r>
-              <a:rPr lang="en-US" sz="800" noProof="1"/>
-              <a:t>'web-url’ – url to providers web page for this repo </a:t>
-            </a:r>
-          </a:p>
-          <a:p>
-            <a:pPr marL="324000" lvl="1" indent="-171450">
-              <a:buFont typeface="Arial" panose="020B0604020202020204" pitchFamily="34" charset="0"/>
-              <a:buChar char="•"/>
-            </a:pPr>
-            <a:r>
-              <a:rPr lang="en-US" sz="800" noProof="1"/>
-              <a:t>api-url’ –url to call api</a:t>
-            </a:r>
-          </a:p>
-          <a:p>
-            <a:pPr marL="324000" lvl="1" indent="-171450">
-              <a:buFont typeface="Arial" panose="020B0604020202020204" pitchFamily="34" charset="0"/>
-              <a:buChar char="•"/>
-            </a:pPr>
-            <a:r>
-              <a:rPr lang="en-US" sz="800" noProof="1"/>
-              <a:t>'api-status’ – status when calling api</a:t>
-            </a:r>
-          </a:p>
-          <a:p>
-            <a:pPr marL="324000" lvl="1" indent="-171450">
-              <a:buFont typeface="Arial" panose="020B0604020202020204" pitchFamily="34" charset="0"/>
-              <a:buChar char="•"/>
-            </a:pPr>
-            <a:r>
-              <a:rPr lang="en-US" sz="800" noProof="1"/>
-              <a:t>'fork-parent’ – if a forked repo, this is the url to original repo</a:t>
-            </a:r>
-          </a:p>
-          <a:p>
-            <a:pPr marL="324000" lvl="1" indent="-171450">
-              <a:buFont typeface="Arial" panose="020B0604020202020204" pitchFamily="34" charset="0"/>
-              <a:buChar char="•"/>
-            </a:pPr>
-            <a:r>
-              <a:rPr lang="en-US" sz="800" noProof="1"/>
-              <a:t>'is-private-repo’ -- tells if private / public repo</a:t>
-            </a:r>
-          </a:p>
-          <a:p>
-            <a:endParaRPr lang="en-US" sz="800" noProof="1"/>
+              <a:rPr lang="en-US" sz="800" noProof="1"/>
+              <a:t>displayLongAlert(title, message, type)</a:t>
+            </a:r>
+            <a:br>
+              <a:rPr lang="en-US" sz="800" noProof="1"/>
+            </a:br>
+            <a:r>
+              <a:rPr lang="en-US" sz="800" noProof="1"/>
+              <a:t>defined in app.js</a:t>
+            </a:r>
           </a:p>
           <a:p>
             <a:pPr marL="171450" indent="-171450">
@@ -13768,26 +16630,25 @@
               <a:buChar char="o"/>
             </a:pPr>
             <a:r>
-              <a:rPr lang="en-US" sz="800" noProof="1">
-                <a:solidFill>
-                  <a:schemeClr val="accent1"/>
-                </a:solidFill>
-              </a:rPr>
-              <a:t>Icons and supporting material can be placed in the same folder: </a:t>
-            </a:r>
-            <a:r>
-              <a:rPr lang="en-US" sz="800" noProof="1"/>
-              <a:t>apis_github_and_others</a:t>
-            </a:r>
-          </a:p>
-        </p:txBody>
-      </p:sp>
-      <p:sp>
-        <p:nvSpPr>
-          <p:cNvPr id="6" name="textruta 5">
-            <a:extLst>
-              <a:ext uri="{FF2B5EF4-FFF2-40B4-BE49-F238E27FC236}">
-                <a16:creationId xmlns:a16="http://schemas.microsoft.com/office/drawing/2014/main" id="{943D8880-E278-C35C-CEEF-0D60AB679EF5}"/>
+              <a:rPr lang="en-US" sz="800" noProof="1"/>
+              <a:t>Shows as external window, on top of main  app.js window</a:t>
+            </a:r>
+            <a:br>
+              <a:rPr lang="en-US" sz="800" noProof="1"/>
+            </a:br>
+            <a:br>
+              <a:rPr lang="en-US" sz="800" noProof="1"/>
+            </a:br>
+            <a:endParaRPr lang="en-US" sz="800" noProof="1"/>
+          </a:p>
+        </p:txBody>
+      </p:sp>
+      <p:sp>
+        <p:nvSpPr>
+          <p:cNvPr id="3" name="textruta 2">
+            <a:extLst>
+              <a:ext uri="{FF2B5EF4-FFF2-40B4-BE49-F238E27FC236}">
+                <a16:creationId xmlns:a16="http://schemas.microsoft.com/office/drawing/2014/main" id="{06DEBF44-050B-2220-C4D8-56D460476702}"/>
               </a:ext>
             </a:extLst>
           </p:cNvPr>
@@ -13796,8 +16657,8 @@
         </p:nvSpPr>
         <p:spPr>
           <a:xfrm>
-            <a:off x="336553" y="953256"/>
-            <a:ext cx="3030125" cy="461665"/>
+            <a:off x="4489123" y="841210"/>
+            <a:ext cx="1116011" cy="461665"/>
           </a:xfrm>
           <a:prstGeom prst="rect">
             <a:avLst/>
@@ -13812,17 +16673,17 @@
           <a:p>
             <a:r>
               <a:rPr lang="en-US" sz="2400" b="1" noProof="1"/>
-              <a:t>Provider API functions</a:t>
-            </a:r>
-          </a:p>
-        </p:txBody>
-      </p:sp>
-      <p:sp>
-        <p:nvSpPr>
-          <p:cNvPr id="3" name="textruta 5">
-            <a:extLst>
-              <a:ext uri="{FF2B5EF4-FFF2-40B4-BE49-F238E27FC236}">
-                <a16:creationId xmlns:a16="http://schemas.microsoft.com/office/drawing/2014/main" id="{2987841D-179A-486D-5E40-0A0422DA3632}"/>
+              <a:t>Dialogs</a:t>
+            </a:r>
+          </a:p>
+        </p:txBody>
+      </p:sp>
+      <p:sp>
+        <p:nvSpPr>
+          <p:cNvPr id="6" name="textruta 5">
+            <a:extLst>
+              <a:ext uri="{FF2B5EF4-FFF2-40B4-BE49-F238E27FC236}">
+                <a16:creationId xmlns:a16="http://schemas.microsoft.com/office/drawing/2014/main" id="{A188559A-F5E8-46DD-F138-41217EC70A89}"/>
               </a:ext>
             </a:extLst>
           </p:cNvPr>
@@ -13831,43 +16692,8 @@
         </p:nvSpPr>
         <p:spPr>
           <a:xfrm>
-            <a:off x="4270378" y="939343"/>
-            <a:ext cx="2729080" cy="461665"/>
-          </a:xfrm>
-          <a:prstGeom prst="rect">
-            <a:avLst/>
-          </a:prstGeom>
-          <a:noFill/>
-        </p:spPr>
-        <p:txBody>
-          <a:bodyPr wrap="none" rtlCol="0">
-            <a:spAutoFit/>
-          </a:bodyPr>
-          <a:lstStyle/>
-          <a:p>
-            <a:r>
-              <a:rPr lang="en-US" sz="2400" b="1" noProof="1"/>
-              <a:t>Provider GUI wizard</a:t>
-            </a:r>
-          </a:p>
-        </p:txBody>
-      </p:sp>
-      <p:sp>
-        <p:nvSpPr>
-          <p:cNvPr id="7" name="textruta 4">
-            <a:extLst>
-              <a:ext uri="{FF2B5EF4-FFF2-40B4-BE49-F238E27FC236}">
-                <a16:creationId xmlns:a16="http://schemas.microsoft.com/office/drawing/2014/main" id="{0BF97886-D135-15CC-61EF-28B42C9BDBDF}"/>
-              </a:ext>
-            </a:extLst>
-          </p:cNvPr>
-          <p:cNvSpPr txBox="1"/>
-          <p:nvPr/>
-        </p:nvSpPr>
-        <p:spPr>
-          <a:xfrm>
-            <a:off x="4346578" y="1497414"/>
-            <a:ext cx="3274288" cy="1938992"/>
+            <a:off x="8256717" y="4608845"/>
+            <a:ext cx="3274288" cy="2554545"/>
           </a:xfrm>
           <a:prstGeom prst="rect">
             <a:avLst/>
@@ -13887,7 +16713,7 @@
           <a:p>
             <a:r>
               <a:rPr lang="en-US" sz="800" b="1" noProof="1"/>
-              <a:t>The GUI for providers are implemented in the following way</a:t>
+              <a:t>Windows menu (MacOS only):</a:t>
             </a:r>
             <a:br>
               <a:rPr lang="en-US" sz="800" b="1" noProof="1"/>
@@ -13905,28 +16731,15 @@
                   <a:schemeClr val="accent1"/>
                 </a:solidFill>
               </a:rPr>
-              <a:t>Common html -- </a:t>
-            </a:r>
-            <a:r>
-              <a:rPr lang="en-US" sz="800" noProof="1"/>
-              <a:t>Create_remote_repository.html</a:t>
-            </a:r>
-          </a:p>
-          <a:p>
-            <a:pPr marL="324000" lvl="1" indent="-171450">
-              <a:buFont typeface="Arial" panose="020B0604020202020204" pitchFamily="34" charset="0"/>
-              <a:buChar char="•"/>
-            </a:pPr>
-            <a:r>
-              <a:rPr lang="en-US" sz="800" noProof="1"/>
-              <a:t>Text made for Github:</a:t>
-            </a:r>
-          </a:p>
-          <a:p>
-            <a:pPr marL="324000" lvl="1" indent="-171450">
-              <a:buFont typeface="Arial" panose="020B0604020202020204" pitchFamily="34" charset="0"/>
-              <a:buChar char="•"/>
-            </a:pPr>
+              <a:t>initializeWindowMenu</a:t>
+            </a:r>
+            <a:r>
+              <a:rPr lang="en-US" sz="800" noProof="1"/>
+              <a:t>: creates default MacOs menu in native language. Windows menu is recreated</a:t>
+            </a:r>
+            <a:br>
+              <a:rPr lang="en-US" sz="800" noProof="1"/>
+            </a:br>
             <a:endParaRPr lang="en-US" sz="800" noProof="1"/>
           </a:p>
           <a:p>
@@ -13940,41 +16753,11 @@
                   <a:schemeClr val="accent1"/>
                 </a:solidFill>
               </a:rPr>
-              <a:t>One js-file -- </a:t>
-            </a:r>
-            <a:r>
-              <a:rPr lang="en-US" sz="800" noProof="1"/>
-              <a:t>create_remote_repository.js</a:t>
-            </a:r>
-          </a:p>
-          <a:p>
-            <a:pPr marL="324000" lvl="1" indent="-171450">
-              <a:buFont typeface="Arial" panose="020B0604020202020204" pitchFamily="34" charset="0"/>
-              <a:buChar char="•"/>
-            </a:pPr>
-            <a:r>
-              <a:rPr lang="en-US" sz="800" noProof="1"/>
-              <a:t>Modifies: all text “Github”  to correct provider in html above</a:t>
-            </a:r>
-          </a:p>
-          <a:p>
-            <a:pPr marL="324000" lvl="1" indent="-171450">
-              <a:buFont typeface="Arial" panose="020B0604020202020204" pitchFamily="34" charset="0"/>
-              <a:buChar char="•"/>
-            </a:pPr>
-            <a:r>
-              <a:rPr lang="en-US" sz="800" noProof="1"/>
-              <a:t>Switch statement setting provider-specific labels for inputs</a:t>
-            </a:r>
-          </a:p>
-          <a:p>
-            <a:pPr marL="324000" lvl="1" indent="-171450">
-              <a:buFont typeface="Arial" panose="020B0604020202020204" pitchFamily="34" charset="0"/>
-              <a:buChar char="•"/>
-            </a:pPr>
-            <a:r>
-              <a:rPr lang="en-US" sz="800" noProof="1"/>
-              <a:t>Stores in git credentials</a:t>
+              <a:t>addWindowMenu</a:t>
+            </a:r>
+            <a:r>
+              <a:rPr lang="en-US" sz="800" noProof="1"/>
+              <a:t> : stores the submenu handle with the title as key window_menu_handles_mapping[title]</a:t>
             </a:r>
             <a:br>
               <a:rPr lang="en-US" sz="800" noProof="1"/>
@@ -13992,38 +16775,68 @@
                   <a:schemeClr val="accent1"/>
                 </a:solidFill>
               </a:rPr>
-              <a:t>Mechanism for guessing TOKEN</a:t>
-            </a:r>
+              <a:t>deleteWindowMenu </a:t>
+            </a:r>
+            <a:r>
+              <a:rPr lang="en-US" sz="800" noProof="1"/>
+              <a:t>: close using window title to find submenu handle.  </a:t>
+            </a:r>
+            <a:br>
+              <a:rPr lang="en-US" sz="800" noProof="1"/>
+            </a:br>
             <a:endParaRPr lang="en-US" sz="800" noProof="1"/>
           </a:p>
           <a:p>
-            <a:pPr marL="324000" lvl="1" indent="-171450">
-              <a:buFont typeface="Arial" panose="020B0604020202020204" pitchFamily="34" charset="0"/>
-              <a:buChar char="•"/>
-            </a:pPr>
-            <a:r>
-              <a:rPr lang="en-US" sz="800" noProof="1"/>
-              <a:t>Caches credentials for all repos, and finds the unique usernames for current provider</a:t>
-            </a:r>
-          </a:p>
-          <a:p>
-            <a:pPr marL="324000" lvl="1" indent="-171450">
-              <a:buFont typeface="Arial" panose="020B0604020202020204" pitchFamily="34" charset="0"/>
-              <a:buChar char="•"/>
-            </a:pPr>
-            <a:r>
-              <a:rPr lang="en-US" sz="800" noProof="1"/>
-              <a:t>When user-name matches known credential, the TOKEN/password field is updated</a:t>
-            </a:r>
-          </a:p>
-        </p:txBody>
-      </p:sp>
-      <p:sp>
-        <p:nvSpPr>
-          <p:cNvPr id="8" name="textruta 4">
-            <a:extLst>
-              <a:ext uri="{FF2B5EF4-FFF2-40B4-BE49-F238E27FC236}">
-                <a16:creationId xmlns:a16="http://schemas.microsoft.com/office/drawing/2014/main" id="{0725C2E0-B09A-BD89-F02E-BED7F1342107}"/>
+            <a:pPr marL="171450" indent="-171450">
+              <a:buFont typeface="Courier New" panose="02070309020205020404" pitchFamily="49" charset="0"/>
+              <a:buChar char="o"/>
+            </a:pPr>
+            <a:r>
+              <a:rPr lang="en-US" sz="800" noProof="1">
+                <a:solidFill>
+                  <a:schemeClr val="accent1"/>
+                </a:solidFill>
+              </a:rPr>
+              <a:t>recreateAllWindowsMenu </a:t>
+            </a:r>
+            <a:r>
+              <a:rPr lang="en-US" sz="800" noProof="1"/>
+              <a:t>: generates a populated MacOS window menu from scratch (used by Main when restarting after Settings scale change) </a:t>
+            </a:r>
+          </a:p>
+          <a:p>
+            <a:pPr marL="171450" indent="-171450">
+              <a:buFont typeface="Courier New" panose="02070309020205020404" pitchFamily="49" charset="0"/>
+              <a:buChar char="o"/>
+            </a:pPr>
+            <a:endParaRPr lang="en-US" sz="800" noProof="1"/>
+          </a:p>
+          <a:p>
+            <a:pPr marL="171450" indent="-171450">
+              <a:buFont typeface="Courier New" panose="02070309020205020404" pitchFamily="49" charset="0"/>
+              <a:buChar char="o"/>
+            </a:pPr>
+            <a:r>
+              <a:rPr lang="en-US" sz="800" noProof="1">
+                <a:solidFill>
+                  <a:schemeClr val="accent1"/>
+                </a:solidFill>
+              </a:rPr>
+              <a:t>gui.Window.getAll</a:t>
+            </a:r>
+            <a:r>
+              <a:rPr lang="en-US" sz="800" noProof="1"/>
+              <a:t> is used several places to find open windows (and child windows that are not supposed to be in the windows menu).  A function is called that iterates each found window, and performs the action.  See ‘minimizeWindow’, ‘closeAllWindows’, ‘hideAllWindows’,’ showAllWindows’</a:t>
+            </a:r>
+          </a:p>
+        </p:txBody>
+      </p:sp>
+      <p:sp>
+        <p:nvSpPr>
+          <p:cNvPr id="7" name="textruta 6">
+            <a:extLst>
+              <a:ext uri="{FF2B5EF4-FFF2-40B4-BE49-F238E27FC236}">
+                <a16:creationId xmlns:a16="http://schemas.microsoft.com/office/drawing/2014/main" id="{4108F045-DC67-5945-2D67-046A62557881}"/>
               </a:ext>
             </a:extLst>
           </p:cNvPr>
@@ -14032,8 +16845,43 @@
         </p:nvSpPr>
         <p:spPr>
           <a:xfrm>
-            <a:off x="4416875" y="4478739"/>
-            <a:ext cx="3274288" cy="830997"/>
+            <a:off x="8173611" y="4017061"/>
+            <a:ext cx="3974871" cy="461665"/>
+          </a:xfrm>
+          <a:prstGeom prst="rect">
+            <a:avLst/>
+          </a:prstGeom>
+          <a:noFill/>
+        </p:spPr>
+        <p:txBody>
+          <a:bodyPr wrap="none" rtlCol="0">
+            <a:spAutoFit/>
+          </a:bodyPr>
+          <a:lstStyle/>
+          <a:p>
+            <a:r>
+              <a:rPr lang="en-US" sz="2400" b="1" noProof="1"/>
+              <a:t>Windows menu (MacOS only)</a:t>
+            </a:r>
+          </a:p>
+        </p:txBody>
+      </p:sp>
+      <p:sp>
+        <p:nvSpPr>
+          <p:cNvPr id="8" name="textruta 7">
+            <a:extLst>
+              <a:ext uri="{FF2B5EF4-FFF2-40B4-BE49-F238E27FC236}">
+                <a16:creationId xmlns:a16="http://schemas.microsoft.com/office/drawing/2014/main" id="{C2961014-07D4-C6A9-2F8B-DEB31EC6254D}"/>
+              </a:ext>
+            </a:extLst>
+          </p:cNvPr>
+          <p:cNvSpPr txBox="1"/>
+          <p:nvPr/>
+        </p:nvSpPr>
+        <p:spPr>
+          <a:xfrm>
+            <a:off x="8256717" y="1376136"/>
+            <a:ext cx="3274288" cy="2431435"/>
           </a:xfrm>
           <a:prstGeom prst="rect">
             <a:avLst/>
@@ -14053,7 +16901,7 @@
           <a:p>
             <a:r>
               <a:rPr lang="en-US" sz="800" b="1" noProof="1"/>
-              <a:t>The GUI for providers are implemented in the following way</a:t>
+              <a:t>Windows opened from Main, Settings</a:t>
             </a:r>
             <a:br>
               <a:rPr lang="en-US" sz="800" b="1" noProof="1"/>
@@ -14065,18 +16913,61 @@
               <a:buFont typeface="Courier New" panose="02070309020205020404" pitchFamily="49" charset="0"/>
               <a:buChar char="o"/>
             </a:pPr>
+            <a:r>
+              <a:rPr lang="en-US" sz="800" noProof="1"/>
+              <a:t>.</a:t>
+            </a:r>
             <a:r>
               <a:rPr lang="en-US" sz="800" noProof="1">
                 <a:solidFill>
                   <a:schemeClr val="accent1"/>
                 </a:solidFill>
               </a:rPr>
-              <a:t>Color icons </a:t>
-            </a:r>
-            <a:r>
-              <a:rPr lang="en-US" sz="800" noProof="1"/>
-              <a:t>must be 16x16, RGB to work in menues</a:t>
-            </a:r>
+              <a:t> localState </a:t>
+            </a:r>
+            <a:r>
+              <a:rPr lang="en-US" sz="800" noProof="1"/>
+              <a:t>(transient info) :</a:t>
+            </a:r>
+            <a:br>
+              <a:rPr lang="en-US" sz="800" noProof="1"/>
+            </a:br>
+            <a:r>
+              <a:rPr lang="en-US" sz="800" noProof="1"/>
+              <a:t> helpWindow, .settings, . fileListWindow, …</a:t>
+            </a:r>
+            <a:br>
+              <a:rPr lang="en-US" sz="800" noProof="1"/>
+            </a:br>
+            <a:r>
+              <a:rPr lang="en-US" sz="800" noProof="1"/>
+              <a:t>(true if window is open, false if closed)</a:t>
+            </a:r>
+            <a:br>
+              <a:rPr lang="en-US" sz="800" noProof="1"/>
+            </a:br>
+            <a:endParaRPr lang="en-US" sz="800" noProof="1"/>
+          </a:p>
+          <a:p>
+            <a:pPr marL="171450" indent="-171450">
+              <a:buFont typeface="Courier New" panose="02070309020205020404" pitchFamily="49" charset="0"/>
+              <a:buChar char="o"/>
+            </a:pPr>
+            <a:r>
+              <a:rPr lang="en-US" sz="800" noProof="1"/>
+              <a:t>External windows are opened hidden, with option ’show: false’</a:t>
+            </a:r>
+            <a:br>
+              <a:rPr lang="en-US" sz="800" noProof="1"/>
+            </a:br>
+            <a:r>
+              <a:rPr lang="en-US" sz="800" noProof="1"/>
+              <a:t>(to work around buggy multiple workspaces).  </a:t>
+            </a:r>
+            <a:br>
+              <a:rPr lang="en-US" sz="800" noProof="1"/>
+            </a:br>
+            <a:endParaRPr lang="en-US" sz="800" noProof="1"/>
           </a:p>
           <a:p>
             <a:pPr marL="171450" indent="-171450">
@@ -14089,38 +16980,76 @@
                   <a:schemeClr val="accent1"/>
                 </a:solidFill>
               </a:rPr>
-              <a:t>Seems that bigger matrix </a:t>
-            </a:r>
-            <a:r>
-              <a:rPr lang="en-US" sz="800" noProof="1"/>
-              <a:t>works for b/w github icon</a:t>
-            </a:r>
-          </a:p>
-          <a:p>
-            <a:pPr marL="171450" indent="-171450">
-              <a:buFont typeface="Courier New" panose="02070309020205020404" pitchFamily="49" charset="0"/>
-              <a:buChar char="o"/>
-            </a:pPr>
-            <a:r>
-              <a:rPr lang="en-US" sz="800" noProof="1"/>
-              <a:t>These icons are slightly fuzzy when viewed in settings.</a:t>
-            </a:r>
-          </a:p>
-          <a:p>
-            <a:pPr marL="171450" indent="-171450">
-              <a:buFont typeface="Courier New" panose="02070309020205020404" pitchFamily="49" charset="0"/>
-              <a:buChar char="o"/>
-            </a:pPr>
+              <a:t>showWindow(win) </a:t>
+            </a:r>
+            <a:r>
+              <a:rPr lang="en-US" sz="800" noProof="1"/>
+              <a:t>is used to show hidden window.   </a:t>
+            </a:r>
+          </a:p>
+          <a:p>
+            <a:pPr marL="355600" lvl="1" indent="-177800">
+              <a:buFont typeface="Arial" panose="020B0604020202020204" pitchFamily="34" charset="0"/>
+              <a:buChar char="•"/>
+            </a:pPr>
+            <a:r>
+              <a:rPr lang="en-US" sz="800" noProof="1"/>
+              <a:t>Called from 'loaded’ event, when opening new window using ‘nw.Window.open’.   </a:t>
+            </a:r>
+          </a:p>
+          <a:p>
+            <a:pPr marL="355600" lvl="1" indent="-177800">
+              <a:buFont typeface="Arial" panose="020B0604020202020204" pitchFamily="34" charset="0"/>
+              <a:buChar char="•"/>
+            </a:pPr>
+            <a:r>
+              <a:rPr lang="en-US" sz="800" noProof="1"/>
+              <a:t>See two versions in ‘app.js’:</a:t>
+            </a:r>
+            <a:br>
+              <a:rPr lang="en-US" sz="800" noProof="1"/>
+            </a:br>
+            <a:r>
+              <a:rPr lang="en-US" sz="800" noProof="1"/>
+              <a:t>- callback’, case statement 'clicked-notes’</a:t>
+            </a:r>
+            <a:br>
+              <a:rPr lang="en-US" sz="800" noProof="1"/>
+            </a:br>
+            <a:r>
+              <a:rPr lang="en-US" sz="800" noProof="1"/>
+              <a:t>or</a:t>
+            </a:r>
+            <a:br>
+              <a:rPr lang="en-US" sz="800" noProof="1"/>
+            </a:br>
+            <a:r>
+              <a:rPr lang="en-US" sz="800" noProof="1"/>
+              <a:t>- ‘showAbout’ function</a:t>
+            </a:r>
+          </a:p>
+          <a:p>
+            <a:pPr marL="355600" lvl="1" indent="-177800">
+              <a:buFont typeface="Arial" panose="020B0604020202020204" pitchFamily="34" charset="0"/>
+              <a:buChar char="•"/>
+            </a:pPr>
+            <a:r>
+              <a:rPr lang="en-US" sz="800" noProof="1"/>
+              <a:t>Two ways to handle multiple windows (MacOS and Linux behaves differently)</a:t>
+            </a:r>
+            <a:br>
+              <a:rPr lang="en-US" sz="800" noProof="1"/>
+            </a:br>
             <a:endParaRPr lang="en-US" sz="800" noProof="1"/>
           </a:p>
         </p:txBody>
       </p:sp>
       <p:sp>
         <p:nvSpPr>
-          <p:cNvPr id="9" name="textruta 5">
-            <a:extLst>
-              <a:ext uri="{FF2B5EF4-FFF2-40B4-BE49-F238E27FC236}">
-                <a16:creationId xmlns:a16="http://schemas.microsoft.com/office/drawing/2014/main" id="{2DFA1971-7891-05E5-E387-70DA5165528F}"/>
+          <p:cNvPr id="9" name="textruta 8">
+            <a:extLst>
+              <a:ext uri="{FF2B5EF4-FFF2-40B4-BE49-F238E27FC236}">
+                <a16:creationId xmlns:a16="http://schemas.microsoft.com/office/drawing/2014/main" id="{279F5223-2ED1-3322-DF84-D0ED0C8FE18E}"/>
               </a:ext>
             </a:extLst>
           </p:cNvPr>
@@ -14129,8 +17058,8 @@
         </p:nvSpPr>
         <p:spPr>
           <a:xfrm>
-            <a:off x="4270378" y="3749731"/>
-            <a:ext cx="846835" cy="461665"/>
+            <a:off x="8173611" y="784352"/>
+            <a:ext cx="3523400" cy="461665"/>
           </a:xfrm>
           <a:prstGeom prst="rect">
             <a:avLst/>
@@ -14145,7 +17074,7 @@
           <a:p>
             <a:r>
               <a:rPr lang="en-US" sz="2400" b="1" noProof="1"/>
-              <a:t>Icons</a:t>
+              <a:t>External Windows general</a:t>
             </a:r>
           </a:p>
         </p:txBody>
@@ -14153,7 +17082,7 @@
     </p:spTree>
     <p:extLst>
       <p:ext uri="{BB962C8B-B14F-4D97-AF65-F5344CB8AC3E}">
-        <p14:creationId xmlns:p14="http://schemas.microsoft.com/office/powerpoint/2010/main" val="1071964948"/>
+        <p14:creationId xmlns:p14="http://schemas.microsoft.com/office/powerpoint/2010/main" val="748310116"/>
       </p:ext>
     </p:extLst>
   </p:cSld>
@@ -14188,10 +17117,1245 @@
       </p:grpSpPr>
       <p:sp>
         <p:nvSpPr>
-          <p:cNvPr id="122" name="Rectangle 121">
-            <a:extLst>
-              <a:ext uri="{FF2B5EF4-FFF2-40B4-BE49-F238E27FC236}">
-                <a16:creationId xmlns:a16="http://schemas.microsoft.com/office/drawing/2014/main" id="{4E4F468A-0631-842A-FCA7-FC0E33825BE9}"/>
+          <p:cNvPr id="4" name="textruta 3">
+            <a:extLst>
+              <a:ext uri="{FF2B5EF4-FFF2-40B4-BE49-F238E27FC236}">
+                <a16:creationId xmlns:a16="http://schemas.microsoft.com/office/drawing/2014/main" id="{83423371-BCFF-813B-8CF5-793F83A1739A}"/>
+              </a:ext>
+            </a:extLst>
+          </p:cNvPr>
+          <p:cNvSpPr txBox="1"/>
+          <p:nvPr/>
+        </p:nvSpPr>
+        <p:spPr>
+          <a:xfrm>
+            <a:off x="416902" y="122259"/>
+            <a:ext cx="10288586" cy="830997"/>
+          </a:xfrm>
+          <a:prstGeom prst="rect">
+            <a:avLst/>
+          </a:prstGeom>
+          <a:noFill/>
+        </p:spPr>
+        <p:txBody>
+          <a:bodyPr wrap="none" rtlCol="0">
+            <a:spAutoFit/>
+          </a:bodyPr>
+          <a:lstStyle/>
+          <a:p>
+            <a:r>
+              <a:rPr lang="en-US" sz="4800" b="1" noProof="1">
+                <a:solidFill>
+                  <a:schemeClr val="accent1"/>
+                </a:solidFill>
+              </a:rPr>
+              <a:t>Git over ssh 1 (git commands on server)</a:t>
+            </a:r>
+          </a:p>
+        </p:txBody>
+      </p:sp>
+      <p:sp>
+        <p:nvSpPr>
+          <p:cNvPr id="5" name="textruta 4">
+            <a:extLst>
+              <a:ext uri="{FF2B5EF4-FFF2-40B4-BE49-F238E27FC236}">
+                <a16:creationId xmlns:a16="http://schemas.microsoft.com/office/drawing/2014/main" id="{0BB3AB89-4809-925B-71E3-11418FACC157}"/>
+              </a:ext>
+            </a:extLst>
+          </p:cNvPr>
+          <p:cNvSpPr txBox="1"/>
+          <p:nvPr/>
+        </p:nvSpPr>
+        <p:spPr>
+          <a:xfrm>
+            <a:off x="498476" y="1440853"/>
+            <a:ext cx="5497880" cy="3908762"/>
+          </a:xfrm>
+          <a:prstGeom prst="rect">
+            <a:avLst/>
+          </a:prstGeom>
+          <a:noFill/>
+          <a:ln w="12700">
+            <a:solidFill>
+              <a:schemeClr val="accent1"/>
+            </a:solidFill>
+          </a:ln>
+        </p:spPr>
+        <p:txBody>
+          <a:bodyPr wrap="square" rtlCol="0">
+            <a:spAutoFit/>
+          </a:bodyPr>
+          <a:lstStyle/>
+          <a:p>
+            <a:r>
+              <a:rPr lang="en-US" sz="800" b="1" noProof="1"/>
+              <a:t>Running git commands transparently on a server is implemented this way :</a:t>
+            </a:r>
+            <a:br>
+              <a:rPr lang="en-US" sz="800" b="1" noProof="1"/>
+            </a:br>
+            <a:endParaRPr lang="en-US" sz="800" b="1" noProof="1"/>
+          </a:p>
+          <a:p>
+            <a:pPr marL="171450" indent="-171450">
+              <a:buFont typeface="Courier New" panose="02070309020205020404" pitchFamily="49" charset="0"/>
+              <a:buChar char="o"/>
+            </a:pPr>
+            <a:r>
+              <a:rPr lang="en-US" sz="800" noProof="1">
+                <a:solidFill>
+                  <a:schemeClr val="accent1"/>
+                </a:solidFill>
+              </a:rPr>
+              <a:t>Pragma-git</a:t>
+            </a:r>
+            <a:endParaRPr lang="en-US" sz="800" noProof="1"/>
+          </a:p>
+          <a:p>
+            <a:pPr marL="324000" lvl="1" indent="-171450">
+              <a:buFont typeface="Arial" panose="020B0604020202020204" pitchFamily="34" charset="0"/>
+              <a:buChar char="•"/>
+            </a:pPr>
+            <a:r>
+              <a:rPr lang="en-US" sz="800" noProof="1"/>
+              <a:t>Copies config file </a:t>
+            </a:r>
+            <a:r>
+              <a:rPr lang="en-US" sz="800" b="1" noProof="1"/>
+              <a:t>pragma-git-config_linux_ssh </a:t>
+            </a:r>
+            <a:r>
+              <a:rPr lang="en-US" sz="800" noProof="1"/>
+              <a:t>to server file </a:t>
+            </a:r>
+            <a:r>
+              <a:rPr lang="en-US" sz="800" b="1" noProof="1"/>
+              <a:t>pragma-git-config-ssh</a:t>
+            </a:r>
+          </a:p>
+          <a:p>
+            <a:pPr marL="324000" lvl="1" indent="-171450">
+              <a:buFont typeface="Arial" panose="020B0604020202020204" pitchFamily="34" charset="0"/>
+              <a:buChar char="•"/>
+            </a:pPr>
+            <a:r>
+              <a:rPr lang="en-US" sz="800" noProof="1"/>
+              <a:t>The config defines pragma-merge command (adds extra argument ‘ssh’ at end)</a:t>
+            </a:r>
+          </a:p>
+          <a:p>
+            <a:pPr marL="324000" lvl="1" indent="-171450">
+              <a:buFont typeface="Arial" panose="020B0604020202020204" pitchFamily="34" charset="0"/>
+              <a:buChar char="•"/>
+            </a:pPr>
+            <a:r>
+              <a:rPr lang="en-US" sz="800" noProof="1"/>
+              <a:t>pragma-askpass is not defined here, because $HOME cannot be expanded, </a:t>
+            </a:r>
+            <a:br>
+              <a:rPr lang="en-US" sz="800" noProof="1"/>
+            </a:br>
+            <a:r>
+              <a:rPr lang="en-US" sz="800" noProof="1"/>
+              <a:t>and is therefore defined in ssh-git-client instead</a:t>
+            </a:r>
+          </a:p>
+          <a:p>
+            <a:pPr marL="171450" indent="-171450">
+              <a:buFont typeface="Courier New" panose="02070309020205020404" pitchFamily="49" charset="0"/>
+              <a:buChar char="o"/>
+            </a:pPr>
+            <a:endParaRPr lang="en-US" sz="800" noProof="1">
+              <a:solidFill>
+                <a:schemeClr val="accent1"/>
+              </a:solidFill>
+            </a:endParaRPr>
+          </a:p>
+          <a:p>
+            <a:pPr marL="171450" indent="-171450">
+              <a:buFont typeface="Courier New" panose="02070309020205020404" pitchFamily="49" charset="0"/>
+              <a:buChar char="o"/>
+            </a:pPr>
+            <a:r>
+              <a:rPr lang="en-US" sz="800" noProof="1">
+                <a:solidFill>
+                  <a:schemeClr val="accent1"/>
+                </a:solidFill>
+              </a:rPr>
+              <a:t>ssh-git-client</a:t>
+            </a:r>
+            <a:r>
+              <a:rPr lang="en-US" sz="800" noProof="1"/>
+              <a:t>-  is a bash script which runs git-commands on server</a:t>
+            </a:r>
+          </a:p>
+          <a:p>
+            <a:pPr marL="324000" lvl="1" indent="-171450">
+              <a:buFont typeface="Arial" panose="020B0604020202020204" pitchFamily="34" charset="0"/>
+              <a:buChar char="•"/>
+            </a:pPr>
+            <a:r>
+              <a:rPr lang="en-US" sz="800" noProof="1"/>
+              <a:t>simpleGit uses ssh-git-client as a new binary instead of builtin git</a:t>
+            </a:r>
+          </a:p>
+          <a:p>
+            <a:pPr marL="324000" lvl="1" indent="-171450">
+              <a:buFont typeface="Arial" panose="020B0604020202020204" pitchFamily="34" charset="0"/>
+              <a:buChar char="•"/>
+            </a:pPr>
+            <a:r>
+              <a:rPr lang="en-US" sz="800" noProof="1"/>
+              <a:t>first two argument caryy the ssh URL to the repo on server (-c " SSHURL=… " )</a:t>
+            </a:r>
+          </a:p>
+          <a:p>
+            <a:pPr marL="324000" lvl="1" indent="-171450">
+              <a:buFont typeface="Arial" panose="020B0604020202020204" pitchFamily="34" charset="0"/>
+              <a:buChar char="•"/>
+            </a:pPr>
+            <a:r>
+              <a:rPr lang="en-US" sz="800" noProof="1"/>
+              <a:t>Other arguments are same as for local git (except –PIPED, see below)</a:t>
+            </a:r>
+          </a:p>
+          <a:p>
+            <a:pPr marL="324000" lvl="1" indent="-171450">
+              <a:buFont typeface="Arial" panose="020B0604020202020204" pitchFamily="34" charset="0"/>
+              <a:buChar char="•"/>
+            </a:pPr>
+            <a:endParaRPr lang="en-US" sz="800" b="1" noProof="1"/>
+          </a:p>
+          <a:p>
+            <a:pPr marL="171450" indent="-171450">
+              <a:buFont typeface="Courier New" panose="02070309020205020404" pitchFamily="49" charset="0"/>
+              <a:buChar char="o"/>
+            </a:pPr>
+            <a:r>
+              <a:rPr lang="en-US" sz="800" noProof="1">
+                <a:solidFill>
+                  <a:schemeClr val="accent1"/>
+                </a:solidFill>
+              </a:rPr>
+              <a:t>SSH URL example format</a:t>
+            </a:r>
+            <a:endParaRPr lang="en-US" sz="800" noProof="1"/>
+          </a:p>
+          <a:p>
+            <a:pPr marL="324000" lvl="1" indent="-171450">
+              <a:buFont typeface="Arial" panose="020B0604020202020204" pitchFamily="34" charset="0"/>
+              <a:buChar char="•"/>
+            </a:pPr>
+            <a:r>
+              <a:rPr lang="en-US" sz="800" noProof="1"/>
+              <a:t>ssh://jan@linus/usr/local/MATLAB/imlook4d/imlook4d_DEVELOP</a:t>
+            </a:r>
+          </a:p>
+          <a:p>
+            <a:pPr marL="171450" indent="-171450">
+              <a:buFont typeface="Courier New" panose="02070309020205020404" pitchFamily="49" charset="0"/>
+              <a:buChar char="o"/>
+            </a:pPr>
+            <a:endParaRPr lang="en-US" sz="800" noProof="1">
+              <a:solidFill>
+                <a:schemeClr val="accent1"/>
+              </a:solidFill>
+            </a:endParaRPr>
+          </a:p>
+          <a:p>
+            <a:pPr marL="171450" indent="-171450">
+              <a:buFont typeface="Courier New" panose="02070309020205020404" pitchFamily="49" charset="0"/>
+              <a:buChar char="o"/>
+            </a:pPr>
+            <a:r>
+              <a:rPr lang="en-US" sz="800" noProof="1">
+                <a:solidFill>
+                  <a:schemeClr val="accent1"/>
+                </a:solidFill>
+              </a:rPr>
+              <a:t>git example over ssh</a:t>
+            </a:r>
+            <a:endParaRPr lang="en-US" sz="800" noProof="1"/>
+          </a:p>
+          <a:p>
+            <a:pPr marL="324000" lvl="1" indent="-171450">
+              <a:buFont typeface="Arial" panose="020B0604020202020204" pitchFamily="34" charset="0"/>
+              <a:buChar char="•"/>
+            </a:pPr>
+            <a:r>
+              <a:rPr lang="en-US" sz="800" noProof="1"/>
+              <a:t>./ssh-git-client -c "SSHURL=ssh://jan@localhost/Users/jan/Documents/Projects/Pragma-git/testRepos -- local on ssh/imlook4d_DEVELOP" version</a:t>
+            </a:r>
+          </a:p>
+          <a:p>
+            <a:pPr marL="152550" lvl="1"/>
+            <a:endParaRPr lang="en-US" sz="800" noProof="1"/>
+          </a:p>
+          <a:p>
+            <a:pPr marL="171450" indent="-171450">
+              <a:buFont typeface="Courier New" panose="02070309020205020404" pitchFamily="49" charset="0"/>
+              <a:buChar char="o"/>
+            </a:pPr>
+            <a:r>
+              <a:rPr lang="en-US" sz="800" noProof="1">
+                <a:solidFill>
+                  <a:schemeClr val="accent1"/>
+                </a:solidFill>
+              </a:rPr>
+              <a:t>-PIPED</a:t>
+            </a:r>
+            <a:endParaRPr lang="en-US" sz="800" noProof="1"/>
+          </a:p>
+          <a:p>
+            <a:pPr marL="324000" lvl="1" indent="-171450">
+              <a:buFont typeface="Arial" panose="020B0604020202020204" pitchFamily="34" charset="0"/>
+              <a:buChar char="•"/>
+            </a:pPr>
+            <a:r>
+              <a:rPr lang="en-US" sz="800" noProof="1"/>
+              <a:t>Runs git over ssh, listening to stdin input (through the pipe)</a:t>
+            </a:r>
+          </a:p>
+          <a:p>
+            <a:pPr marL="324000" lvl="1" indent="-171450">
+              <a:buFont typeface="Arial" panose="020B0604020202020204" pitchFamily="34" charset="0"/>
+              <a:buChar char="•"/>
+            </a:pPr>
+            <a:r>
+              <a:rPr lang="en-US" sz="800" noProof="1"/>
+              <a:t>echo xxxx | git … is called this way:</a:t>
+            </a:r>
+            <a:br>
+              <a:rPr lang="en-US" sz="800" noProof="1"/>
+            </a:br>
+            <a:r>
+              <a:rPr lang="en-US" sz="800" noProof="1"/>
+              <a:t>echo xxxx | ssh-git-client -c "SSHURL=…" –PIPED … </a:t>
+            </a:r>
+            <a:br>
+              <a:rPr lang="en-US" sz="800" noProof="1"/>
+            </a:br>
+            <a:r>
+              <a:rPr lang="en-US" sz="800" noProof="1"/>
+              <a:t>(thus hinting for ssh-git-client that it is expecting a piped input)</a:t>
+            </a:r>
+          </a:p>
+          <a:p>
+            <a:pPr marL="324000" lvl="1" indent="-171450">
+              <a:buFont typeface="Arial" panose="020B0604020202020204" pitchFamily="34" charset="0"/>
+              <a:buChar char="•"/>
+            </a:pPr>
+            <a:endParaRPr lang="en-US" sz="800" noProof="1"/>
+          </a:p>
+          <a:p>
+            <a:pPr marL="152550" lvl="1"/>
+            <a:endParaRPr lang="en-US" sz="800" noProof="1"/>
+          </a:p>
+          <a:p>
+            <a:pPr marL="171450" indent="-171450">
+              <a:buFont typeface="Courier New" panose="02070309020205020404" pitchFamily="49" charset="0"/>
+              <a:buChar char="o"/>
+            </a:pPr>
+            <a:r>
+              <a:rPr lang="en-US" sz="800" noProof="1">
+                <a:solidFill>
+                  <a:schemeClr val="accent1"/>
+                </a:solidFill>
+              </a:rPr>
+              <a:t>merge or askpass  </a:t>
+            </a:r>
+            <a:r>
+              <a:rPr lang="en-US" sz="800" noProof="1"/>
+              <a:t>from server are handled by transferring it from server to local, for pragma-git to handle guis., </a:t>
+            </a:r>
+            <a:br>
+              <a:rPr lang="en-US" sz="800" noProof="1"/>
+            </a:br>
+            <a:r>
+              <a:rPr lang="en-US" sz="800" noProof="1"/>
+              <a:t>and then put results back on server</a:t>
+            </a:r>
+            <a:br>
+              <a:rPr lang="en-US" sz="800" noProof="1"/>
+            </a:br>
+            <a:r>
+              <a:rPr lang="en-US" sz="800" noProof="1"/>
+              <a:t>(see ”ssh-git-client internally” to the right)</a:t>
+            </a:r>
+          </a:p>
+          <a:p>
+            <a:pPr marL="324000" lvl="1" indent="-171450">
+              <a:buFont typeface="Arial" panose="020B0604020202020204" pitchFamily="34" charset="0"/>
+              <a:buChar char="•"/>
+            </a:pPr>
+            <a:endParaRPr lang="en-US" sz="800" noProof="1"/>
+          </a:p>
+        </p:txBody>
+      </p:sp>
+      <p:sp>
+        <p:nvSpPr>
+          <p:cNvPr id="6" name="textruta 5">
+            <a:extLst>
+              <a:ext uri="{FF2B5EF4-FFF2-40B4-BE49-F238E27FC236}">
+                <a16:creationId xmlns:a16="http://schemas.microsoft.com/office/drawing/2014/main" id="{D4CC239A-FBA7-870A-44C9-D36BD394F293}"/>
+              </a:ext>
+            </a:extLst>
+          </p:cNvPr>
+          <p:cNvSpPr txBox="1"/>
+          <p:nvPr/>
+        </p:nvSpPr>
+        <p:spPr>
+          <a:xfrm>
+            <a:off x="336553" y="953256"/>
+            <a:ext cx="2351734" cy="461665"/>
+          </a:xfrm>
+          <a:prstGeom prst="rect">
+            <a:avLst/>
+          </a:prstGeom>
+          <a:noFill/>
+        </p:spPr>
+        <p:txBody>
+          <a:bodyPr wrap="none" rtlCol="0">
+            <a:spAutoFit/>
+          </a:bodyPr>
+          <a:lstStyle/>
+          <a:p>
+            <a:r>
+              <a:rPr lang="en-US" sz="2400" b="1" noProof="1"/>
+              <a:t>Run git on server</a:t>
+            </a:r>
+          </a:p>
+        </p:txBody>
+      </p:sp>
+      <p:sp>
+        <p:nvSpPr>
+          <p:cNvPr id="2" name="textruta 4">
+            <a:extLst>
+              <a:ext uri="{FF2B5EF4-FFF2-40B4-BE49-F238E27FC236}">
+                <a16:creationId xmlns:a16="http://schemas.microsoft.com/office/drawing/2014/main" id="{4F8EF986-C685-6786-DD73-97E044DC219F}"/>
+              </a:ext>
+            </a:extLst>
+          </p:cNvPr>
+          <p:cNvSpPr txBox="1"/>
+          <p:nvPr/>
+        </p:nvSpPr>
+        <p:spPr>
+          <a:xfrm>
+            <a:off x="6451812" y="5334949"/>
+            <a:ext cx="5019594" cy="2800767"/>
+          </a:xfrm>
+          <a:prstGeom prst="rect">
+            <a:avLst/>
+          </a:prstGeom>
+          <a:solidFill>
+            <a:schemeClr val="bg1"/>
+          </a:solidFill>
+          <a:ln w="12700">
+            <a:solidFill>
+              <a:schemeClr val="accent1"/>
+            </a:solidFill>
+          </a:ln>
+        </p:spPr>
+        <p:txBody>
+          <a:bodyPr wrap="square" rtlCol="0">
+            <a:spAutoFit/>
+          </a:bodyPr>
+          <a:lstStyle/>
+          <a:p>
+            <a:r>
+              <a:rPr lang="en-US" sz="800" b="1" noProof="1"/>
+              <a:t>This describes how pragma-askpass over ssh connects with local pragma-askpass mechanism</a:t>
+            </a:r>
+            <a:br>
+              <a:rPr lang="en-US" sz="800" b="1" noProof="1"/>
+            </a:br>
+            <a:endParaRPr lang="en-US" sz="800" b="1" noProof="1"/>
+          </a:p>
+          <a:p>
+            <a:pPr marL="171450" indent="-171450">
+              <a:buFont typeface="Courier New" panose="02070309020205020404" pitchFamily="49" charset="0"/>
+              <a:buChar char="o"/>
+            </a:pPr>
+            <a:r>
+              <a:rPr lang="en-US" sz="800" noProof="1">
+                <a:solidFill>
+                  <a:schemeClr val="accent1"/>
+                </a:solidFill>
+              </a:rPr>
+              <a:t>ssh-git-client </a:t>
+            </a:r>
+            <a:endParaRPr lang="en-US" sz="800" noProof="1"/>
+          </a:p>
+          <a:p>
+            <a:pPr marL="324000" lvl="1" indent="-171450">
+              <a:buFont typeface="Arial" panose="020B0604020202020204" pitchFamily="34" charset="0"/>
+              <a:buChar char="•"/>
+            </a:pPr>
+            <a:r>
+              <a:rPr lang="en-US" sz="800" noProof="1"/>
+              <a:t>has defined pragma-askpass command on server (which kicks in and works on signalling file on server (see list below)</a:t>
+            </a:r>
+          </a:p>
+          <a:p>
+            <a:pPr marL="324000" lvl="1" indent="-171450">
+              <a:buFont typeface="Arial" panose="020B0604020202020204" pitchFamily="34" charset="0"/>
+              <a:buChar char="•"/>
+            </a:pPr>
+            <a:r>
+              <a:rPr lang="en-US" sz="800" noProof="1"/>
+              <a:t>transfer signalling files from server to local equivalients</a:t>
+            </a:r>
+          </a:p>
+          <a:p>
+            <a:pPr marL="324000" lvl="1" indent="-171450">
+              <a:buFont typeface="Arial" panose="020B0604020202020204" pitchFamily="34" charset="0"/>
+              <a:buChar char="•"/>
+            </a:pPr>
+            <a:r>
+              <a:rPr lang="en-US" sz="800" noProof="1"/>
+              <a:t>which makes local pragma-askpass run by normal mechanism, and generate signal files when finished</a:t>
+            </a:r>
+          </a:p>
+          <a:p>
+            <a:pPr marL="324000" lvl="1" indent="-171450">
+              <a:buFont typeface="Arial" panose="020B0604020202020204" pitchFamily="34" charset="0"/>
+              <a:buChar char="•"/>
+            </a:pPr>
+            <a:r>
+              <a:rPr lang="en-US" sz="800" noProof="1"/>
+              <a:t>ssh-git-client then picks up an copy back files to server signalling files</a:t>
+            </a:r>
+            <a:br>
+              <a:rPr lang="en-US" sz="800" noProof="1"/>
+            </a:br>
+            <a:r>
+              <a:rPr lang="en-US" sz="800" noProof="1"/>
+              <a:t>which then server pragma-askpass handles with exit codes, and returned input</a:t>
+            </a:r>
+            <a:br>
+              <a:rPr lang="en-US" sz="800" noProof="1"/>
+            </a:br>
+            <a:r>
+              <a:rPr lang="en-US" sz="800" noProof="1"/>
+              <a:t>(to git command input comes in exactly same way as if it had been run locally)</a:t>
+            </a:r>
+          </a:p>
+          <a:p>
+            <a:endParaRPr lang="en-US" sz="800" noProof="1">
+              <a:solidFill>
+                <a:schemeClr val="accent1"/>
+              </a:solidFill>
+            </a:endParaRPr>
+          </a:p>
+          <a:p>
+            <a:pPr marL="171450" indent="-171450">
+              <a:buFont typeface="Courier New" panose="02070309020205020404" pitchFamily="49" charset="0"/>
+              <a:buChar char="o"/>
+            </a:pPr>
+            <a:r>
+              <a:rPr lang="en-US" sz="800" noProof="1">
+                <a:solidFill>
+                  <a:schemeClr val="accent1"/>
+                </a:solidFill>
+              </a:rPr>
+              <a:t>SERVER; pragma-askpass </a:t>
+            </a:r>
+            <a:r>
+              <a:rPr lang="en-US" sz="800" noProof="1"/>
+              <a:t>– different signalling files  on the server, compared to local: </a:t>
+            </a:r>
+          </a:p>
+          <a:p>
+            <a:pPr marL="324000" lvl="1" indent="-171450">
+              <a:buFont typeface="Arial" panose="020B0604020202020204" pitchFamily="34" charset="0"/>
+              <a:buChar char="•"/>
+            </a:pPr>
+            <a:r>
+              <a:rPr lang="en-US" sz="800" noProof="1"/>
+              <a:t>REMOTE_SIGNAL_FILE="$REMOTE_TMP/pragma-askpass-running-ssh"</a:t>
+            </a:r>
+          </a:p>
+          <a:p>
+            <a:pPr marL="324000" lvl="1" indent="-171450">
+              <a:buFont typeface="Arial" panose="020B0604020202020204" pitchFamily="34" charset="0"/>
+              <a:buChar char="•"/>
+            </a:pPr>
+            <a:r>
+              <a:rPr lang="en-US" sz="800" noProof="1"/>
+              <a:t>REMOTE_PROMPT_FILE="$REMOTE_TMP/askpass_first-ssh"</a:t>
+            </a:r>
+          </a:p>
+          <a:p>
+            <a:pPr marL="324000" lvl="1" indent="-171450">
+              <a:buFont typeface="Arial" panose="020B0604020202020204" pitchFamily="34" charset="0"/>
+              <a:buChar char="•"/>
+            </a:pPr>
+            <a:r>
+              <a:rPr lang="en-US" sz="800" noProof="1"/>
+              <a:t>REMOTE_EXIT="$REMOTE_TMP/exit-pragma-askpass-ssh" </a:t>
+            </a:r>
+          </a:p>
+          <a:p>
+            <a:pPr marL="324000" lvl="1" indent="-171450">
+              <a:buFont typeface="Arial" panose="020B0604020202020204" pitchFamily="34" charset="0"/>
+              <a:buChar char="•"/>
+            </a:pPr>
+            <a:r>
+              <a:rPr lang="en-US" sz="800" noProof="1"/>
+              <a:t>REMOTE_EXITMESSAGEFILE="$REMOTE_TMP/exit-message-pragma-askpass-ssh" </a:t>
+            </a:r>
+            <a:br>
+              <a:rPr lang="en-US" sz="800" b="1" noProof="1"/>
+            </a:br>
+            <a:endParaRPr lang="en-US" sz="800" b="1" noProof="1"/>
+          </a:p>
+          <a:p>
+            <a:pPr marL="171450" indent="-171450">
+              <a:buFont typeface="Courier New" panose="02070309020205020404" pitchFamily="49" charset="0"/>
+              <a:buChar char="o"/>
+            </a:pPr>
+            <a:r>
+              <a:rPr lang="en-US" sz="800" noProof="1">
+                <a:solidFill>
+                  <a:schemeClr val="accent1"/>
+                </a:solidFill>
+              </a:rPr>
+              <a:t>LOCAL; pragma-askpass </a:t>
+            </a:r>
+            <a:r>
+              <a:rPr lang="en-US" sz="800" noProof="1"/>
+              <a:t>-  works as usual</a:t>
+            </a:r>
+          </a:p>
+          <a:p>
+            <a:pPr marL="324000" lvl="1" indent="-171450">
+              <a:buFont typeface="Arial" panose="020B0604020202020204" pitchFamily="34" charset="0"/>
+              <a:buChar char="•"/>
+            </a:pPr>
+            <a:r>
+              <a:rPr lang="en-US" sz="800" noProof="1"/>
+              <a:t>LOCAL_EXIT="$TMP/exit-pragma-askpass"  </a:t>
+            </a:r>
+          </a:p>
+          <a:p>
+            <a:pPr marL="324000" lvl="1" indent="-171450">
+              <a:buFont typeface="Arial" panose="020B0604020202020204" pitchFamily="34" charset="0"/>
+              <a:buChar char="•"/>
+            </a:pPr>
+            <a:r>
+              <a:rPr lang="en-US" sz="800" noProof="1"/>
+              <a:t>LOCAL_PROMPT_FILE="$TMP/askpass_first"</a:t>
+            </a:r>
+          </a:p>
+          <a:p>
+            <a:pPr marL="324000" lvl="1" indent="-171450">
+              <a:buFont typeface="Arial" panose="020B0604020202020204" pitchFamily="34" charset="0"/>
+              <a:buChar char="•"/>
+            </a:pPr>
+            <a:r>
+              <a:rPr lang="en-US" sz="800" noProof="1"/>
+              <a:t>LOCAL_EXITMESSAGEFILE="$TMP/exit-message-pragma-askpass" </a:t>
+            </a:r>
+            <a:br>
+              <a:rPr lang="en-US" sz="800" noProof="1"/>
+            </a:br>
+            <a:endParaRPr lang="en-US" sz="800" noProof="1"/>
+          </a:p>
+        </p:txBody>
+      </p:sp>
+      <p:sp>
+        <p:nvSpPr>
+          <p:cNvPr id="3" name="textruta 5">
+            <a:extLst>
+              <a:ext uri="{FF2B5EF4-FFF2-40B4-BE49-F238E27FC236}">
+                <a16:creationId xmlns:a16="http://schemas.microsoft.com/office/drawing/2014/main" id="{DCD37A85-53A7-04DE-FAA1-BB7E94E9B34E}"/>
+              </a:ext>
+            </a:extLst>
+          </p:cNvPr>
+          <p:cNvSpPr txBox="1"/>
+          <p:nvPr/>
+        </p:nvSpPr>
+        <p:spPr>
+          <a:xfrm>
+            <a:off x="336553" y="5622864"/>
+            <a:ext cx="4251485" cy="830997"/>
+          </a:xfrm>
+          <a:prstGeom prst="rect">
+            <a:avLst/>
+          </a:prstGeom>
+          <a:noFill/>
+        </p:spPr>
+        <p:txBody>
+          <a:bodyPr wrap="none" rtlCol="0">
+            <a:spAutoFit/>
+          </a:bodyPr>
+          <a:lstStyle/>
+          <a:p>
+            <a:r>
+              <a:rPr lang="en-US" sz="2400" b="1" noProof="1"/>
+              <a:t>File operations that works both </a:t>
+            </a:r>
+            <a:br>
+              <a:rPr lang="en-US" sz="2400" b="1" noProof="1"/>
+            </a:br>
+            <a:r>
+              <a:rPr lang="en-US" sz="2400" b="1" noProof="1"/>
+              <a:t>locally and on ssh server</a:t>
+            </a:r>
+          </a:p>
+        </p:txBody>
+      </p:sp>
+      <p:sp>
+        <p:nvSpPr>
+          <p:cNvPr id="11" name="TextBox 10">
+            <a:extLst>
+              <a:ext uri="{FF2B5EF4-FFF2-40B4-BE49-F238E27FC236}">
+                <a16:creationId xmlns:a16="http://schemas.microsoft.com/office/drawing/2014/main" id="{6AD517F4-28AB-E486-0DB1-C8B56C3E504D}"/>
+              </a:ext>
+            </a:extLst>
+          </p:cNvPr>
+          <p:cNvSpPr txBox="1"/>
+          <p:nvPr/>
+        </p:nvSpPr>
+        <p:spPr>
+          <a:xfrm>
+            <a:off x="498476" y="7779133"/>
+            <a:ext cx="5442360" cy="707886"/>
+          </a:xfrm>
+          <a:prstGeom prst="rect">
+            <a:avLst/>
+          </a:prstGeom>
+          <a:solidFill>
+            <a:schemeClr val="bg1"/>
+          </a:solidFill>
+          <a:ln w="12700">
+            <a:solidFill>
+              <a:schemeClr val="accent1"/>
+            </a:solidFill>
+          </a:ln>
+        </p:spPr>
+        <p:txBody>
+          <a:bodyPr wrap="square">
+            <a:spAutoFit/>
+          </a:bodyPr>
+          <a:lstStyle/>
+          <a:p>
+            <a:r>
+              <a:rPr lang="en-US" sz="1000" b="1" noProof="1"/>
+              <a:t>Reading and Writing files </a:t>
+            </a:r>
+            <a:r>
+              <a:rPr lang="en-US" sz="1000" noProof="1"/>
+              <a:t>relative the server’s repo base, is done with additional scripts:</a:t>
+            </a:r>
+          </a:p>
+          <a:p>
+            <a:pPr marL="171450" indent="-171450">
+              <a:buFont typeface="Arial" panose="020B0604020202020204" pitchFamily="34" charset="0"/>
+              <a:buChar char="•"/>
+            </a:pPr>
+            <a:r>
+              <a:rPr lang="en-US" sz="1000" noProof="1"/>
+              <a:t>ssh-get  --  Used for edit-link in changed list, and for .gitignore tool</a:t>
+            </a:r>
+          </a:p>
+          <a:p>
+            <a:pPr marL="171450" indent="-171450">
+              <a:buFont typeface="Arial" panose="020B0604020202020204" pitchFamily="34" charset="0"/>
+              <a:buChar char="•"/>
+            </a:pPr>
+            <a:r>
+              <a:rPr lang="en-US" sz="1000" noProof="1"/>
+              <a:t>ssh-put  --  Used to update server file after a file is modified in pragma-merge. Also for .gitignore tool</a:t>
+            </a:r>
+          </a:p>
+        </p:txBody>
+      </p:sp>
+      <p:sp>
+        <p:nvSpPr>
+          <p:cNvPr id="7" name="textruta 4">
+            <a:extLst>
+              <a:ext uri="{FF2B5EF4-FFF2-40B4-BE49-F238E27FC236}">
+                <a16:creationId xmlns:a16="http://schemas.microsoft.com/office/drawing/2014/main" id="{FF3C9341-A2A2-DB9D-5BC3-402F8F43647B}"/>
+              </a:ext>
+            </a:extLst>
+          </p:cNvPr>
+          <p:cNvSpPr txBox="1"/>
+          <p:nvPr/>
+        </p:nvSpPr>
+        <p:spPr>
+          <a:xfrm>
+            <a:off x="498476" y="6574807"/>
+            <a:ext cx="5442360" cy="1077218"/>
+          </a:xfrm>
+          <a:prstGeom prst="rect">
+            <a:avLst/>
+          </a:prstGeom>
+          <a:solidFill>
+            <a:schemeClr val="bg1"/>
+          </a:solidFill>
+          <a:ln w="12700">
+            <a:solidFill>
+              <a:schemeClr val="accent1"/>
+            </a:solidFill>
+          </a:ln>
+        </p:spPr>
+        <p:txBody>
+          <a:bodyPr wrap="square" rtlCol="0">
+            <a:spAutoFit/>
+          </a:bodyPr>
+          <a:lstStyle/>
+          <a:p>
+            <a:r>
+              <a:rPr lang="en-US" sz="800" b="1" noProof="1"/>
+              <a:t>Some file operations should work both locally and on server.  </a:t>
+            </a:r>
+            <a:br>
+              <a:rPr lang="en-US" sz="800" b="1" noProof="1"/>
+            </a:br>
+            <a:endParaRPr lang="en-US" sz="800" b="1" noProof="1"/>
+          </a:p>
+          <a:p>
+            <a:pPr marL="171450" indent="-171450">
+              <a:buFont typeface="Courier New" panose="02070309020205020404" pitchFamily="49" charset="0"/>
+              <a:buChar char="o"/>
+            </a:pPr>
+            <a:r>
+              <a:rPr lang="en-US" sz="800" noProof="1">
+                <a:solidFill>
+                  <a:schemeClr val="accent1"/>
+                </a:solidFill>
+              </a:rPr>
+              <a:t>ssh_folder/ssh-folderlib.js </a:t>
+            </a:r>
+            <a:r>
+              <a:rPr lang="en-US" sz="800" noProof="1"/>
+              <a:t>is  javascript wrappers to bash scripts in “ssh_folder”.</a:t>
+            </a:r>
+            <a:br>
+              <a:rPr lang="en-US" sz="800" noProof="1"/>
+            </a:br>
+            <a:r>
+              <a:rPr lang="en-US" sz="800" noProof="1"/>
+              <a:t>Some functions are exclusive ssh, some are made to work both locally and over ssh</a:t>
+            </a:r>
+            <a:br>
+              <a:rPr lang="en-US" sz="800" noProof="1"/>
+            </a:br>
+            <a:endParaRPr lang="en-US" sz="800" noProof="1"/>
+          </a:p>
+          <a:p>
+            <a:pPr marL="171450" indent="-171450">
+              <a:buFont typeface="Courier New" panose="02070309020205020404" pitchFamily="49" charset="0"/>
+              <a:buChar char="o"/>
+            </a:pPr>
+            <a:r>
+              <a:rPr lang="en-US" sz="800" noProof="1">
+                <a:solidFill>
+                  <a:schemeClr val="accent1"/>
+                </a:solidFill>
+              </a:rPr>
+              <a:t>fs_existsSync  </a:t>
+            </a:r>
+            <a:r>
+              <a:rPr lang="en-US" sz="800" noProof="1"/>
+              <a:t>-- works transparently as fs.existsSync </a:t>
+            </a:r>
+            <a:r>
+              <a:rPr lang="en-US" sz="800" b="1" noProof="1"/>
+              <a:t>both</a:t>
+            </a:r>
+            <a:r>
+              <a:rPr lang="en-US" sz="800" noProof="1"/>
+              <a:t>  on server and locally</a:t>
+            </a:r>
+            <a:br>
+              <a:rPr lang="en-US" sz="800" noProof="1"/>
+            </a:br>
+            <a:r>
+              <a:rPr lang="en-US" sz="800" noProof="1">
+                <a:solidFill>
+                  <a:schemeClr val="accent1"/>
+                </a:solidFill>
+              </a:rPr>
+              <a:t>fs.existsSync  </a:t>
+            </a:r>
+            <a:r>
+              <a:rPr lang="en-US" sz="800" noProof="1"/>
+              <a:t>-- works only locally (used for signal files, settings, Notes, etc that should not be on ssh server)</a:t>
+            </a:r>
+          </a:p>
+          <a:p>
+            <a:pPr marL="171450" indent="-171450">
+              <a:buFont typeface="Courier New" panose="02070309020205020404" pitchFamily="49" charset="0"/>
+              <a:buChar char="o"/>
+            </a:pPr>
+            <a:endParaRPr lang="en-US" sz="800" noProof="1"/>
+          </a:p>
+        </p:txBody>
+      </p:sp>
+      <p:sp>
+        <p:nvSpPr>
+          <p:cNvPr id="8" name="textruta 4">
+            <a:extLst>
+              <a:ext uri="{FF2B5EF4-FFF2-40B4-BE49-F238E27FC236}">
+                <a16:creationId xmlns:a16="http://schemas.microsoft.com/office/drawing/2014/main" id="{9E8A15FB-FD02-38CF-FFEC-F946CA5098A8}"/>
+              </a:ext>
+            </a:extLst>
+          </p:cNvPr>
+          <p:cNvSpPr txBox="1"/>
+          <p:nvPr/>
+        </p:nvSpPr>
+        <p:spPr>
+          <a:xfrm>
+            <a:off x="6424164" y="1456305"/>
+            <a:ext cx="5497880" cy="3170099"/>
+          </a:xfrm>
+          <a:prstGeom prst="rect">
+            <a:avLst/>
+          </a:prstGeom>
+          <a:noFill/>
+          <a:ln w="12700">
+            <a:solidFill>
+              <a:schemeClr val="accent1"/>
+            </a:solidFill>
+          </a:ln>
+        </p:spPr>
+        <p:txBody>
+          <a:bodyPr wrap="square" rtlCol="0">
+            <a:spAutoFit/>
+          </a:bodyPr>
+          <a:lstStyle/>
+          <a:p>
+            <a:r>
+              <a:rPr lang="en-US" sz="800" b="1" noProof="1"/>
+              <a:t>ssh-git-client bash script – internal work flow</a:t>
+            </a:r>
+            <a:br>
+              <a:rPr lang="en-US" sz="800" b="1" noProof="1"/>
+            </a:br>
+            <a:endParaRPr lang="en-US" sz="800" b="1" noProof="1"/>
+          </a:p>
+          <a:p>
+            <a:pPr marL="171450" indent="-171450">
+              <a:buFont typeface="Courier New" panose="02070309020205020404" pitchFamily="49" charset="0"/>
+              <a:buChar char="o"/>
+            </a:pPr>
+            <a:r>
+              <a:rPr lang="en-US" sz="800" noProof="1">
+                <a:solidFill>
+                  <a:schemeClr val="accent1"/>
+                </a:solidFill>
+              </a:rPr>
+              <a:t>ssh-git-client</a:t>
+            </a:r>
+            <a:endParaRPr lang="en-US" sz="800" noProof="1"/>
+          </a:p>
+          <a:p>
+            <a:pPr marL="324000" lvl="1" indent="-171450">
+              <a:buFont typeface="Arial" panose="020B0604020202020204" pitchFamily="34" charset="0"/>
+              <a:buChar char="•"/>
+            </a:pPr>
+            <a:r>
+              <a:rPr lang="en-US" sz="800" noProof="1"/>
+              <a:t>Removes extra control arguments which git does not understand ( SSHURL=…, -PIPED)</a:t>
+            </a:r>
+          </a:p>
+          <a:p>
+            <a:pPr marL="324000" lvl="1" indent="-171450">
+              <a:buFont typeface="Arial" panose="020B0604020202020204" pitchFamily="34" charset="0"/>
+              <a:buChar char="•"/>
+            </a:pPr>
+            <a:r>
+              <a:rPr lang="en-US" sz="800" noProof="1"/>
+              <a:t>Makes a string REMAINING_ARGUMENTS where each argument is quoted ( ‘ ). Quoting makes spaces in paths work</a:t>
+            </a:r>
+          </a:p>
+          <a:p>
+            <a:pPr marL="324000" lvl="1" indent="-171450">
+              <a:buFont typeface="Arial" panose="020B0604020202020204" pitchFamily="34" charset="0"/>
+              <a:buChar char="•"/>
+            </a:pPr>
+            <a:endParaRPr lang="en-US" sz="800" noProof="1"/>
+          </a:p>
+          <a:p>
+            <a:pPr marL="324000" lvl="1" indent="-171450">
+              <a:buFont typeface="Arial" panose="020B0604020202020204" pitchFamily="34" charset="0"/>
+              <a:buChar char="•"/>
+            </a:pPr>
+            <a:r>
+              <a:rPr lang="en-US" sz="800" noProof="1"/>
+              <a:t>If </a:t>
+            </a:r>
+            <a:r>
+              <a:rPr lang="en-US" sz="800" b="1" noProof="1"/>
+              <a:t>mergetool</a:t>
+            </a:r>
+            <a:r>
+              <a:rPr lang="en-US" sz="800" noProof="1"/>
+              <a:t> or </a:t>
+            </a:r>
+            <a:r>
+              <a:rPr lang="en-US" sz="800" b="1" noProof="1"/>
+              <a:t>difftool</a:t>
+            </a:r>
+            <a:r>
+              <a:rPr lang="en-US" sz="800" noProof="1"/>
+              <a:t>, run script  </a:t>
+            </a:r>
+            <a:r>
+              <a:rPr lang="en-US" sz="800" b="1" noProof="1"/>
+              <a:t>delayed-start-pragma-merge</a:t>
+            </a:r>
+            <a:r>
+              <a:rPr lang="en-US" sz="800" noProof="1"/>
+              <a:t> in background</a:t>
+            </a:r>
+            <a:br>
+              <a:rPr lang="en-US" sz="800" noProof="1"/>
+            </a:br>
+            <a:r>
+              <a:rPr lang="en-US" sz="800" noProof="1"/>
+              <a:t> (see next powerpoint slide for details)</a:t>
+            </a:r>
+          </a:p>
+          <a:p>
+            <a:pPr marL="324000" lvl="1" indent="-171450">
+              <a:buFont typeface="Arial" panose="020B0604020202020204" pitchFamily="34" charset="0"/>
+              <a:buChar char="•"/>
+            </a:pPr>
+            <a:endParaRPr lang="en-US" sz="800" noProof="1"/>
+          </a:p>
+          <a:p>
+            <a:pPr marL="324000" lvl="1" indent="-171450">
+              <a:buFont typeface="Arial" panose="020B0604020202020204" pitchFamily="34" charset="0"/>
+              <a:buChar char="•"/>
+            </a:pPr>
+            <a:r>
+              <a:rPr lang="en-US" sz="800" noProof="1"/>
+              <a:t>Run the git command by an ssh connection, on server</a:t>
+            </a:r>
+            <a:br>
+              <a:rPr lang="en-US" sz="800" noProof="1"/>
+            </a:br>
+            <a:r>
+              <a:rPr lang="en-US" sz="800" noProof="1"/>
+              <a:t>(here pragma-askpass path is defined over ssh in variable GIT_ASKPASS, which git picks up)</a:t>
+            </a:r>
+          </a:p>
+          <a:p>
+            <a:pPr marL="324000" lvl="1" indent="-171450">
+              <a:buFont typeface="Arial" panose="020B0604020202020204" pitchFamily="34" charset="0"/>
+              <a:buChar char="•"/>
+            </a:pPr>
+            <a:endParaRPr lang="en-US" sz="800" noProof="1"/>
+          </a:p>
+          <a:p>
+            <a:pPr marL="324000" lvl="1" indent="-171450">
+              <a:buFont typeface="Arial" panose="020B0604020202020204" pitchFamily="34" charset="0"/>
+              <a:buChar char="•"/>
+            </a:pPr>
+            <a:r>
+              <a:rPr lang="en-US" sz="800" noProof="1"/>
+              <a:t>First second, wait for ssh command to finish pollig every 100 ms</a:t>
+            </a:r>
+            <a:br>
+              <a:rPr lang="en-US" sz="800" noProof="1"/>
+            </a:br>
+            <a:r>
+              <a:rPr lang="en-US" sz="800" noProof="1"/>
+              <a:t>(no extra ssh connections made – this is the fast track)</a:t>
+            </a:r>
+          </a:p>
+          <a:p>
+            <a:pPr marL="324000" lvl="1" indent="-171450">
+              <a:buFont typeface="Arial" panose="020B0604020202020204" pitchFamily="34" charset="0"/>
+              <a:buChar char="•"/>
+            </a:pPr>
+            <a:endParaRPr lang="en-US" sz="800" noProof="1"/>
+          </a:p>
+          <a:p>
+            <a:pPr marL="324000" lvl="1" indent="-171450">
+              <a:buFont typeface="Arial" panose="020B0604020202020204" pitchFamily="34" charset="0"/>
+              <a:buChar char="•"/>
+            </a:pPr>
+            <a:r>
+              <a:rPr lang="en-US" sz="800" noProof="1"/>
+              <a:t>If ssh command has not finished, wait for it to finish (here polling over extra ssh connections are made)</a:t>
+            </a:r>
+            <a:br>
+              <a:rPr lang="en-US" sz="800" noProof="1"/>
+            </a:br>
+            <a:br>
+              <a:rPr lang="en-US" sz="800" noProof="1"/>
+            </a:br>
+            <a:r>
+              <a:rPr lang="en-US" sz="800" noProof="1"/>
+              <a:t>In wait loop, poll for askpass request (since that could be reason for it not to finish)</a:t>
+            </a:r>
+            <a:br>
+              <a:rPr lang="en-US" sz="800" noProof="1"/>
+            </a:br>
+            <a:r>
+              <a:rPr lang="en-US" sz="800" noProof="1"/>
+              <a:t>(detected by : REMOTE_SIGNAL_FILE="$REMOTE_TMP/pragma-askpass-running-ssh”)</a:t>
+            </a:r>
+            <a:br>
+              <a:rPr lang="en-US" sz="800" noProof="1"/>
+            </a:br>
+            <a:r>
+              <a:rPr lang="en-US" sz="800" noProof="1"/>
+              <a:t>If askpass – handle dialog on client and return result to server</a:t>
+            </a:r>
+            <a:br>
+              <a:rPr lang="en-US" sz="800" noProof="1"/>
+            </a:br>
+            <a:br>
+              <a:rPr lang="en-US" sz="800" noProof="1"/>
+            </a:br>
+            <a:r>
+              <a:rPr lang="en-US" sz="800" noProof="1"/>
+              <a:t>Exit when git command finished</a:t>
+            </a:r>
+          </a:p>
+          <a:p>
+            <a:pPr marL="324000" lvl="1" indent="-171450">
+              <a:buFont typeface="Arial" panose="020B0604020202020204" pitchFamily="34" charset="0"/>
+              <a:buChar char="•"/>
+            </a:pPr>
+            <a:endParaRPr lang="en-US" sz="800" noProof="1"/>
+          </a:p>
+          <a:p>
+            <a:pPr marL="324000" lvl="1" indent="-171450">
+              <a:buFont typeface="Arial" panose="020B0604020202020204" pitchFamily="34" charset="0"/>
+              <a:buChar char="•"/>
+            </a:pPr>
+            <a:r>
+              <a:rPr lang="en-US" sz="800" noProof="1"/>
+              <a:t>If askpass, see “Pragma-askpass over ssh” below</a:t>
+            </a:r>
+          </a:p>
+          <a:p>
+            <a:pPr marL="324000" lvl="1" indent="-171450">
+              <a:buFont typeface="Arial" panose="020B0604020202020204" pitchFamily="34" charset="0"/>
+              <a:buChar char="•"/>
+            </a:pPr>
+            <a:endParaRPr lang="en-US" sz="800" noProof="1"/>
+          </a:p>
+        </p:txBody>
+      </p:sp>
+      <p:sp>
+        <p:nvSpPr>
+          <p:cNvPr id="12" name="textruta 5">
+            <a:extLst>
+              <a:ext uri="{FF2B5EF4-FFF2-40B4-BE49-F238E27FC236}">
+                <a16:creationId xmlns:a16="http://schemas.microsoft.com/office/drawing/2014/main" id="{19C1CBC3-5D0E-E8C7-6A6B-001CA4E1BE70}"/>
+              </a:ext>
+            </a:extLst>
+          </p:cNvPr>
+          <p:cNvSpPr txBox="1"/>
+          <p:nvPr/>
+        </p:nvSpPr>
+        <p:spPr>
+          <a:xfrm>
+            <a:off x="6314718" y="953255"/>
+            <a:ext cx="3121945" cy="461665"/>
+          </a:xfrm>
+          <a:prstGeom prst="rect">
+            <a:avLst/>
+          </a:prstGeom>
+          <a:noFill/>
+        </p:spPr>
+        <p:txBody>
+          <a:bodyPr wrap="none" rtlCol="0">
+            <a:spAutoFit/>
+          </a:bodyPr>
+          <a:lstStyle/>
+          <a:p>
+            <a:r>
+              <a:rPr lang="en-US" sz="2400" b="1" noProof="1"/>
+              <a:t>ssh-git-client internally</a:t>
+            </a:r>
+          </a:p>
+        </p:txBody>
+      </p:sp>
+      <p:sp>
+        <p:nvSpPr>
+          <p:cNvPr id="14" name="textruta 5">
+            <a:extLst>
+              <a:ext uri="{FF2B5EF4-FFF2-40B4-BE49-F238E27FC236}">
+                <a16:creationId xmlns:a16="http://schemas.microsoft.com/office/drawing/2014/main" id="{789CADAB-4BE0-AD44-EF55-AE46BCDD3E4B}"/>
+              </a:ext>
+            </a:extLst>
+          </p:cNvPr>
+          <p:cNvSpPr txBox="1"/>
+          <p:nvPr/>
+        </p:nvSpPr>
+        <p:spPr>
+          <a:xfrm>
+            <a:off x="6314718" y="4800600"/>
+            <a:ext cx="3354508" cy="461665"/>
+          </a:xfrm>
+          <a:prstGeom prst="rect">
+            <a:avLst/>
+          </a:prstGeom>
+          <a:noFill/>
+        </p:spPr>
+        <p:txBody>
+          <a:bodyPr wrap="none" rtlCol="0">
+            <a:spAutoFit/>
+          </a:bodyPr>
+          <a:lstStyle/>
+          <a:p>
+            <a:r>
+              <a:rPr lang="en-US" sz="2400" b="1" noProof="1"/>
+              <a:t>Pragma-askpass over ssh</a:t>
+            </a:r>
+          </a:p>
+        </p:txBody>
+      </p:sp>
+    </p:spTree>
+    <p:extLst>
+      <p:ext uri="{BB962C8B-B14F-4D97-AF65-F5344CB8AC3E}">
+        <p14:creationId xmlns:p14="http://schemas.microsoft.com/office/powerpoint/2010/main" val="3253474692"/>
+      </p:ext>
+    </p:extLst>
+  </p:cSld>
+  <p:clrMapOvr>
+    <a:masterClrMapping/>
+  </p:clrMapOvr>
+</p:sld>
+</file>
+
+<file path=ppt/slides/slide9.xml><?xml version="1.0" encoding="utf-8"?>
+<p:sld xmlns:a="http://schemas.openxmlformats.org/drawingml/2006/main" xmlns:r="http://schemas.openxmlformats.org/officeDocument/2006/relationships" xmlns:p="http://schemas.openxmlformats.org/presentationml/2006/main">
+  <p:cSld>
+    <p:spTree>
+      <p:nvGrpSpPr>
+        <p:cNvPr id="1" name="">
+          <a:extLst>
+            <a:ext uri="{FF2B5EF4-FFF2-40B4-BE49-F238E27FC236}">
+              <a16:creationId xmlns:a16="http://schemas.microsoft.com/office/drawing/2014/main" id="{363AAB76-ADD0-5DDF-838E-B5CF5CC2D577}"/>
+            </a:ext>
+          </a:extLst>
+        </p:cNvPr>
+        <p:cNvGrpSpPr/>
+        <p:nvPr/>
+      </p:nvGrpSpPr>
+      <p:grpSpPr>
+        <a:xfrm>
+          <a:off x="0" y="0"/>
+          <a:ext cx="0" cy="0"/>
+          <a:chOff x="0" y="0"/>
+          <a:chExt cx="0" cy="0"/>
+        </a:xfrm>
+      </p:grpSpPr>
+      <p:sp>
+        <p:nvSpPr>
+          <p:cNvPr id="114" name="Rectangle 113">
+            <a:extLst>
+              <a:ext uri="{FF2B5EF4-FFF2-40B4-BE49-F238E27FC236}">
+                <a16:creationId xmlns:a16="http://schemas.microsoft.com/office/drawing/2014/main" id="{828F37FB-65EB-DEBA-C4B9-854B5FFEAB90}"/>
               </a:ext>
             </a:extLst>
           </p:cNvPr>
@@ -14200,19 +18364,20 @@
         </p:nvSpPr>
         <p:spPr>
           <a:xfrm>
-            <a:off x="451706" y="3328078"/>
-            <a:ext cx="11226129" cy="6066014"/>
+            <a:off x="6026887" y="1974896"/>
+            <a:ext cx="5608633" cy="4868654"/>
           </a:xfrm>
           <a:prstGeom prst="rect">
             <a:avLst/>
           </a:prstGeom>
           <a:solidFill>
-            <a:schemeClr val="bg2">
-              <a:lumMod val="90000"/>
-              <a:alpha val="33000"/>
-            </a:schemeClr>
+            <a:schemeClr val="bg1"/>
           </a:solidFill>
-          <a:ln w="0"/>
+          <a:ln w="12700">
+            <a:solidFill>
+              <a:schemeClr val="accent1"/>
+            </a:solidFill>
+          </a:ln>
         </p:spPr>
         <p:style>
           <a:lnRef idx="2">
@@ -14235,30 +18400,65 @@
           <a:lstStyle/>
           <a:p>
             <a:pPr algn="ctr"/>
-            <a:endParaRPr lang="en-US" dirty="0">
-              <a:highlight>
-                <a:srgbClr val="C0C0C0"/>
-              </a:highlight>
-            </a:endParaRPr>
-          </a:p>
-        </p:txBody>
-      </p:sp>
-      <p:sp>
-        <p:nvSpPr>
-          <p:cNvPr id="114" name="Rectangle 113">
-            <a:extLst>
-              <a:ext uri="{FF2B5EF4-FFF2-40B4-BE49-F238E27FC236}">
-                <a16:creationId xmlns:a16="http://schemas.microsoft.com/office/drawing/2014/main" id="{2A41965A-DA7A-7196-60F2-57BE4824CBCE}"/>
-              </a:ext>
-            </a:extLst>
-          </p:cNvPr>
-          <p:cNvSpPr/>
-          <p:nvPr/>
-        </p:nvSpPr>
-        <p:spPr>
-          <a:xfrm>
-            <a:off x="5979753" y="3784842"/>
-            <a:ext cx="5608633" cy="4868654"/>
+            <a:endParaRPr lang="en-US"/>
+          </a:p>
+        </p:txBody>
+      </p:sp>
+      <p:sp>
+        <p:nvSpPr>
+          <p:cNvPr id="4" name="textruta 3">
+            <a:extLst>
+              <a:ext uri="{FF2B5EF4-FFF2-40B4-BE49-F238E27FC236}">
+                <a16:creationId xmlns:a16="http://schemas.microsoft.com/office/drawing/2014/main" id="{B50065A8-BFC4-44F6-BAAD-53D7E541D2BB}"/>
+              </a:ext>
+            </a:extLst>
+          </p:cNvPr>
+          <p:cNvSpPr txBox="1"/>
+          <p:nvPr/>
+        </p:nvSpPr>
+        <p:spPr>
+          <a:xfrm>
+            <a:off x="416902" y="122259"/>
+            <a:ext cx="11880753" cy="830997"/>
+          </a:xfrm>
+          <a:prstGeom prst="rect">
+            <a:avLst/>
+          </a:prstGeom>
+          <a:noFill/>
+        </p:spPr>
+        <p:txBody>
+          <a:bodyPr wrap="none" rtlCol="0">
+            <a:spAutoFit/>
+          </a:bodyPr>
+          <a:lstStyle/>
+          <a:p>
+            <a:r>
+              <a:rPr lang="en-US" sz="4800" b="1" noProof="1">
+                <a:solidFill>
+                  <a:schemeClr val="accent1"/>
+                </a:solidFill>
+              </a:rPr>
+              <a:t>Git over ssh 2 (pragma-merge over ssh server)</a:t>
+            </a:r>
+          </a:p>
+        </p:txBody>
+      </p:sp>
+      <p:sp>
+        <p:nvSpPr>
+          <p:cNvPr id="2" name="textruta 4">
+            <a:extLst>
+              <a:ext uri="{FF2B5EF4-FFF2-40B4-BE49-F238E27FC236}">
+                <a16:creationId xmlns:a16="http://schemas.microsoft.com/office/drawing/2014/main" id="{5A148EB5-2467-BF05-A2D1-92400A84E757}"/>
+              </a:ext>
+            </a:extLst>
+          </p:cNvPr>
+          <p:cNvSpPr txBox="1"/>
+          <p:nvPr/>
+        </p:nvSpPr>
+        <p:spPr>
+          <a:xfrm>
+            <a:off x="606743" y="1976909"/>
+            <a:ext cx="5019594" cy="5509200"/>
           </a:xfrm>
           <a:prstGeom prst="rect">
             <a:avLst/>
@@ -14272,252 +18472,6 @@
             </a:solidFill>
           </a:ln>
         </p:spPr>
-        <p:style>
-          <a:lnRef idx="2">
-            <a:schemeClr val="accent1">
-              <a:shade val="15000"/>
-            </a:schemeClr>
-          </a:lnRef>
-          <a:fillRef idx="1">
-            <a:schemeClr val="accent1"/>
-          </a:fillRef>
-          <a:effectRef idx="0">
-            <a:schemeClr val="accent1"/>
-          </a:effectRef>
-          <a:fontRef idx="minor">
-            <a:schemeClr val="lt1"/>
-          </a:fontRef>
-        </p:style>
-        <p:txBody>
-          <a:bodyPr rtlCol="0" anchor="ctr"/>
-          <a:lstStyle/>
-          <a:p>
-            <a:pPr algn="ctr"/>
-            <a:endParaRPr lang="en-US"/>
-          </a:p>
-        </p:txBody>
-      </p:sp>
-      <p:sp>
-        <p:nvSpPr>
-          <p:cNvPr id="4" name="textruta 3">
-            <a:extLst>
-              <a:ext uri="{FF2B5EF4-FFF2-40B4-BE49-F238E27FC236}">
-                <a16:creationId xmlns:a16="http://schemas.microsoft.com/office/drawing/2014/main" id="{83423371-BCFF-813B-8CF5-793F83A1739A}"/>
-              </a:ext>
-            </a:extLst>
-          </p:cNvPr>
-          <p:cNvSpPr txBox="1"/>
-          <p:nvPr/>
-        </p:nvSpPr>
-        <p:spPr>
-          <a:xfrm>
-            <a:off x="416902" y="122259"/>
-            <a:ext cx="9038436" cy="830997"/>
-          </a:xfrm>
-          <a:prstGeom prst="rect">
-            <a:avLst/>
-          </a:prstGeom>
-          <a:noFill/>
-        </p:spPr>
-        <p:txBody>
-          <a:bodyPr wrap="none" rtlCol="0">
-            <a:spAutoFit/>
-          </a:bodyPr>
-          <a:lstStyle/>
-          <a:p>
-            <a:r>
-              <a:rPr lang="en-US" sz="4800" b="1" noProof="1">
-                <a:solidFill>
-                  <a:schemeClr val="accent1"/>
-                </a:solidFill>
-              </a:rPr>
-              <a:t>Git over ssh (commands on server)</a:t>
-            </a:r>
-          </a:p>
-        </p:txBody>
-      </p:sp>
-      <p:sp>
-        <p:nvSpPr>
-          <p:cNvPr id="5" name="textruta 4">
-            <a:extLst>
-              <a:ext uri="{FF2B5EF4-FFF2-40B4-BE49-F238E27FC236}">
-                <a16:creationId xmlns:a16="http://schemas.microsoft.com/office/drawing/2014/main" id="{0BB3AB89-4809-925B-71E3-11418FACC157}"/>
-              </a:ext>
-            </a:extLst>
-          </p:cNvPr>
-          <p:cNvSpPr txBox="1"/>
-          <p:nvPr/>
-        </p:nvSpPr>
-        <p:spPr>
-          <a:xfrm>
-            <a:off x="498478" y="1497415"/>
-            <a:ext cx="3274288" cy="1200329"/>
-          </a:xfrm>
-          <a:prstGeom prst="rect">
-            <a:avLst/>
-          </a:prstGeom>
-          <a:noFill/>
-          <a:ln w="12700">
-            <a:solidFill>
-              <a:schemeClr val="accent1"/>
-            </a:solidFill>
-          </a:ln>
-        </p:spPr>
-        <p:txBody>
-          <a:bodyPr wrap="square" rtlCol="0">
-            <a:spAutoFit/>
-          </a:bodyPr>
-          <a:lstStyle/>
-          <a:p>
-            <a:r>
-              <a:rPr lang="en-US" sz="800" b="1" noProof="1"/>
-              <a:t>Running git commands transparently on a server is implemented this way :</a:t>
-            </a:r>
-            <a:br>
-              <a:rPr lang="en-US" sz="800" b="1" noProof="1"/>
-            </a:br>
-            <a:endParaRPr lang="en-US" sz="800" b="1" noProof="1"/>
-          </a:p>
-          <a:p>
-            <a:pPr marL="171450" indent="-171450">
-              <a:buFont typeface="Courier New" panose="02070309020205020404" pitchFamily="49" charset="0"/>
-              <a:buChar char="o"/>
-            </a:pPr>
-            <a:r>
-              <a:rPr lang="en-US" sz="800" noProof="1">
-                <a:solidFill>
-                  <a:schemeClr val="accent1"/>
-                </a:solidFill>
-              </a:rPr>
-              <a:t>ssh-git-client</a:t>
-            </a:r>
-            <a:r>
-              <a:rPr lang="en-US" sz="800" noProof="1"/>
-              <a:t>-  is a bash script which runs git-commands on server</a:t>
-            </a:r>
-          </a:p>
-          <a:p>
-            <a:pPr marL="324000" lvl="1" indent="-171450">
-              <a:buFont typeface="Arial" panose="020B0604020202020204" pitchFamily="34" charset="0"/>
-              <a:buChar char="•"/>
-            </a:pPr>
-            <a:r>
-              <a:rPr lang="en-US" sz="800" noProof="1"/>
-              <a:t>simpleGit uses ssh-git-client as a new binary instead of builtin git</a:t>
-            </a:r>
-          </a:p>
-          <a:p>
-            <a:pPr marL="324000" lvl="1" indent="-171450">
-              <a:buFont typeface="Arial" panose="020B0604020202020204" pitchFamily="34" charset="0"/>
-              <a:buChar char="•"/>
-            </a:pPr>
-            <a:r>
-              <a:rPr lang="en-US" sz="800" noProof="1"/>
-              <a:t>first argument is the ssh URL to the repo on server</a:t>
-            </a:r>
-          </a:p>
-          <a:p>
-            <a:pPr marL="324000" lvl="1" indent="-171450">
-              <a:buFont typeface="Arial" panose="020B0604020202020204" pitchFamily="34" charset="0"/>
-              <a:buChar char="•"/>
-            </a:pPr>
-            <a:r>
-              <a:rPr lang="en-US" sz="800" noProof="1"/>
-              <a:t>Other arguments are same as for local git</a:t>
-            </a:r>
-            <a:endParaRPr lang="en-US" sz="800" b="1" noProof="1"/>
-          </a:p>
-          <a:p>
-            <a:pPr marL="171450" indent="-171450">
-              <a:buFont typeface="Courier New" panose="02070309020205020404" pitchFamily="49" charset="0"/>
-              <a:buChar char="o"/>
-            </a:pPr>
-            <a:r>
-              <a:rPr lang="en-US" sz="800" noProof="1">
-                <a:solidFill>
-                  <a:schemeClr val="accent1"/>
-                </a:solidFill>
-              </a:rPr>
-              <a:t>SSH URL example format</a:t>
-            </a:r>
-            <a:endParaRPr lang="en-US" sz="800" noProof="1"/>
-          </a:p>
-          <a:p>
-            <a:pPr marL="324000" lvl="1" indent="-171450">
-              <a:buFont typeface="Arial" panose="020B0604020202020204" pitchFamily="34" charset="0"/>
-              <a:buChar char="•"/>
-            </a:pPr>
-            <a:r>
-              <a:rPr lang="en-US" sz="800" noProof="1"/>
-              <a:t>ssh://jan@linus/usr/local/MATLAB/imlook4d/imlook4d_DEVELOP</a:t>
-            </a:r>
-          </a:p>
-        </p:txBody>
-      </p:sp>
-      <p:sp>
-        <p:nvSpPr>
-          <p:cNvPr id="6" name="textruta 5">
-            <a:extLst>
-              <a:ext uri="{FF2B5EF4-FFF2-40B4-BE49-F238E27FC236}">
-                <a16:creationId xmlns:a16="http://schemas.microsoft.com/office/drawing/2014/main" id="{D4CC239A-FBA7-870A-44C9-D36BD394F293}"/>
-              </a:ext>
-            </a:extLst>
-          </p:cNvPr>
-          <p:cNvSpPr txBox="1"/>
-          <p:nvPr/>
-        </p:nvSpPr>
-        <p:spPr>
-          <a:xfrm>
-            <a:off x="336553" y="953256"/>
-            <a:ext cx="2351734" cy="461665"/>
-          </a:xfrm>
-          <a:prstGeom prst="rect">
-            <a:avLst/>
-          </a:prstGeom>
-          <a:noFill/>
-        </p:spPr>
-        <p:txBody>
-          <a:bodyPr wrap="none" rtlCol="0">
-            <a:spAutoFit/>
-          </a:bodyPr>
-          <a:lstStyle/>
-          <a:p>
-            <a:r>
-              <a:rPr lang="en-US" sz="2400" b="1" noProof="1"/>
-              <a:t>Run git on server</a:t>
-            </a:r>
-          </a:p>
-        </p:txBody>
-      </p:sp>
-      <p:sp>
-        <p:nvSpPr>
-          <p:cNvPr id="2" name="textruta 4">
-            <a:extLst>
-              <a:ext uri="{FF2B5EF4-FFF2-40B4-BE49-F238E27FC236}">
-                <a16:creationId xmlns:a16="http://schemas.microsoft.com/office/drawing/2014/main" id="{4F8EF986-C685-6786-DD73-97E044DC219F}"/>
-              </a:ext>
-            </a:extLst>
-          </p:cNvPr>
-          <p:cNvSpPr txBox="1"/>
-          <p:nvPr/>
-        </p:nvSpPr>
-        <p:spPr>
-          <a:xfrm>
-            <a:off x="559609" y="3786855"/>
-            <a:ext cx="5019594" cy="5509200"/>
-          </a:xfrm>
-          <a:prstGeom prst="rect">
-            <a:avLst/>
-          </a:prstGeom>
-          <a:solidFill>
-            <a:schemeClr val="bg1"/>
-          </a:solidFill>
-          <a:ln w="12700">
-            <a:solidFill>
-              <a:schemeClr val="accent1"/>
-            </a:solidFill>
-          </a:ln>
-        </p:spPr>
         <p:txBody>
           <a:bodyPr wrap="square" rtlCol="0">
             <a:spAutoFit/>
@@ -14930,7 +18884,7 @@
           <p:cNvPr id="10" name="textruta 5">
             <a:extLst>
               <a:ext uri="{FF2B5EF4-FFF2-40B4-BE49-F238E27FC236}">
-                <a16:creationId xmlns:a16="http://schemas.microsoft.com/office/drawing/2014/main" id="{888AD4D2-EC1F-D93E-0C03-32EE71D053F5}"/>
+                <a16:creationId xmlns:a16="http://schemas.microsoft.com/office/drawing/2014/main" id="{CA64B139-9C1F-6F05-86D2-EE0896DBEE63}"/>
               </a:ext>
             </a:extLst>
           </p:cNvPr>
@@ -14939,7 +18893,7 @@
         </p:nvSpPr>
         <p:spPr>
           <a:xfrm>
-            <a:off x="462390" y="2889686"/>
+            <a:off x="509524" y="1079740"/>
             <a:ext cx="3176062" cy="461665"/>
           </a:xfrm>
           <a:prstGeom prst="rect">
@@ -14965,7 +18919,7 @@
           <p:cNvPr id="13" name="Straight Connector 12">
             <a:extLst>
               <a:ext uri="{FF2B5EF4-FFF2-40B4-BE49-F238E27FC236}">
-                <a16:creationId xmlns:a16="http://schemas.microsoft.com/office/drawing/2014/main" id="{AEDD6223-7018-132C-0215-5CEDAE45D71E}"/>
+                <a16:creationId xmlns:a16="http://schemas.microsoft.com/office/drawing/2014/main" id="{8D28E703-C1B9-B7BB-D913-46D56A256E05}"/>
               </a:ext>
             </a:extLst>
           </p:cNvPr>
@@ -14976,7 +18930,7 @@
         </p:nvCxnSpPr>
         <p:spPr>
           <a:xfrm>
-            <a:off x="8662374" y="3777582"/>
+            <a:off x="8709508" y="1967636"/>
             <a:ext cx="0" cy="3660950"/>
           </a:xfrm>
           <a:prstGeom prst="line">
@@ -15003,7 +18957,7 @@
           <p:cNvPr id="20" name="Straight Connector 19">
             <a:extLst>
               <a:ext uri="{FF2B5EF4-FFF2-40B4-BE49-F238E27FC236}">
-                <a16:creationId xmlns:a16="http://schemas.microsoft.com/office/drawing/2014/main" id="{20DDA672-5FBE-49E1-4339-C38C0F628F39}"/>
+                <a16:creationId xmlns:a16="http://schemas.microsoft.com/office/drawing/2014/main" id="{928A3D56-0A9F-1124-1811-962C450D7841}"/>
               </a:ext>
             </a:extLst>
           </p:cNvPr>
@@ -15014,7 +18968,7 @@
         </p:nvCxnSpPr>
         <p:spPr>
           <a:xfrm>
-            <a:off x="8607627" y="3793130"/>
+            <a:off x="8654761" y="1983184"/>
             <a:ext cx="0" cy="3660950"/>
           </a:xfrm>
           <a:prstGeom prst="line">
@@ -15041,7 +18995,7 @@
           <p:cNvPr id="22" name="TextBox 21">
             <a:extLst>
               <a:ext uri="{FF2B5EF4-FFF2-40B4-BE49-F238E27FC236}">
-                <a16:creationId xmlns:a16="http://schemas.microsoft.com/office/drawing/2014/main" id="{B171B19D-1094-8E83-91A6-310B6F4C49B2}"/>
+                <a16:creationId xmlns:a16="http://schemas.microsoft.com/office/drawing/2014/main" id="{DCF54B3A-548E-9C93-3587-A98A1DEF6456}"/>
               </a:ext>
             </a:extLst>
           </p:cNvPr>
@@ -15050,7 +19004,7 @@
         </p:nvSpPr>
         <p:spPr>
           <a:xfrm>
-            <a:off x="6818173" y="3832476"/>
+            <a:off x="6865307" y="2022530"/>
             <a:ext cx="572366" cy="246221"/>
           </a:xfrm>
           <a:prstGeom prst="rect">
@@ -15077,7 +19031,7 @@
           <p:cNvPr id="23" name="TextBox 22">
             <a:extLst>
               <a:ext uri="{FF2B5EF4-FFF2-40B4-BE49-F238E27FC236}">
-                <a16:creationId xmlns:a16="http://schemas.microsoft.com/office/drawing/2014/main" id="{400136D7-C5AA-7877-0320-1A2EF067C287}"/>
+                <a16:creationId xmlns:a16="http://schemas.microsoft.com/office/drawing/2014/main" id="{E2268410-0EE1-C6BB-A065-3DE5A1293125}"/>
               </a:ext>
             </a:extLst>
           </p:cNvPr>
@@ -15086,7 +19040,7 @@
         </p:nvSpPr>
         <p:spPr>
           <a:xfrm>
-            <a:off x="9370255" y="3801916"/>
+            <a:off x="9417389" y="1991970"/>
             <a:ext cx="820793" cy="246221"/>
           </a:xfrm>
           <a:prstGeom prst="rect">
@@ -15113,7 +19067,7 @@
           <p:cNvPr id="26" name="TextBox 25">
             <a:extLst>
               <a:ext uri="{FF2B5EF4-FFF2-40B4-BE49-F238E27FC236}">
-                <a16:creationId xmlns:a16="http://schemas.microsoft.com/office/drawing/2014/main" id="{62660ABB-182B-9D0E-3E01-E1CD397DF493}"/>
+                <a16:creationId xmlns:a16="http://schemas.microsoft.com/office/drawing/2014/main" id="{FA913F54-B532-348D-42B4-1CCCC328C71C}"/>
               </a:ext>
             </a:extLst>
           </p:cNvPr>
@@ -15122,7 +19076,7 @@
         </p:nvSpPr>
         <p:spPr>
           <a:xfrm>
-            <a:off x="6398112" y="4092381"/>
+            <a:off x="6445246" y="2282435"/>
             <a:ext cx="2017955" cy="400110"/>
           </a:xfrm>
           <a:prstGeom prst="rect">
@@ -15168,7 +19122,7 @@
           <p:cNvPr id="27" name="TextBox 26">
             <a:extLst>
               <a:ext uri="{FF2B5EF4-FFF2-40B4-BE49-F238E27FC236}">
-                <a16:creationId xmlns:a16="http://schemas.microsoft.com/office/drawing/2014/main" id="{5F48E1E5-4708-8811-A2C3-E6832D47D186}"/>
+                <a16:creationId xmlns:a16="http://schemas.microsoft.com/office/drawing/2014/main" id="{572CB322-FF95-DC29-4F5C-E3CF7FDBC7C7}"/>
               </a:ext>
             </a:extLst>
           </p:cNvPr>
@@ -15177,7 +19131,7 @@
         </p:nvSpPr>
         <p:spPr>
           <a:xfrm>
-            <a:off x="6316175" y="6954099"/>
+            <a:off x="6363309" y="5144153"/>
             <a:ext cx="1933523" cy="400110"/>
           </a:xfrm>
           <a:prstGeom prst="rect">
@@ -15218,7 +19172,7 @@
           <p:cNvPr id="28" name="TextBox 27">
             <a:extLst>
               <a:ext uri="{FF2B5EF4-FFF2-40B4-BE49-F238E27FC236}">
-                <a16:creationId xmlns:a16="http://schemas.microsoft.com/office/drawing/2014/main" id="{5813F1E9-ED83-A50E-4EC1-55B9E8B4303A}"/>
+                <a16:creationId xmlns:a16="http://schemas.microsoft.com/office/drawing/2014/main" id="{CC1CC32D-4682-DDFA-08D8-F2BCB69E4AC2}"/>
               </a:ext>
             </a:extLst>
           </p:cNvPr>
@@ -15227,7 +19181,7 @@
         </p:nvSpPr>
         <p:spPr>
           <a:xfrm>
-            <a:off x="6450266" y="4610042"/>
+            <a:off x="6497400" y="2800096"/>
             <a:ext cx="1933528" cy="246221"/>
           </a:xfrm>
           <a:prstGeom prst="rect">
@@ -15258,7 +19212,7 @@
           <p:cNvPr id="29" name="TextBox 28">
             <a:extLst>
               <a:ext uri="{FF2B5EF4-FFF2-40B4-BE49-F238E27FC236}">
-                <a16:creationId xmlns:a16="http://schemas.microsoft.com/office/drawing/2014/main" id="{C461B8D8-3994-94CC-FC6D-C267418FEE83}"/>
+                <a16:creationId xmlns:a16="http://schemas.microsoft.com/office/drawing/2014/main" id="{81933DFB-C5F6-568D-D20A-6F3B394BF4DE}"/>
               </a:ext>
             </a:extLst>
           </p:cNvPr>
@@ -15267,7 +19221,7 @@
         </p:nvSpPr>
         <p:spPr>
           <a:xfrm>
-            <a:off x="6520892" y="5394482"/>
+            <a:off x="6568026" y="3584536"/>
             <a:ext cx="1527306" cy="246221"/>
           </a:xfrm>
           <a:prstGeom prst="rect">
@@ -15298,7 +19252,7 @@
           <p:cNvPr id="32" name="TextBox 31">
             <a:extLst>
               <a:ext uri="{FF2B5EF4-FFF2-40B4-BE49-F238E27FC236}">
-                <a16:creationId xmlns:a16="http://schemas.microsoft.com/office/drawing/2014/main" id="{A04ED13C-32DC-0FB1-B3B7-5BC6F4EE854C}"/>
+                <a16:creationId xmlns:a16="http://schemas.microsoft.com/office/drawing/2014/main" id="{F9163503-DDBD-5964-D3D3-8B65DAC8A4EC}"/>
               </a:ext>
             </a:extLst>
           </p:cNvPr>
@@ -15307,83 +19261,7 @@
         </p:nvSpPr>
         <p:spPr>
           <a:xfrm>
-            <a:off x="8730617" y="4996254"/>
-            <a:ext cx="1007468" cy="246221"/>
-          </a:xfrm>
-          <a:prstGeom prst="rect">
-            <a:avLst/>
-          </a:prstGeom>
-          <a:noFill/>
-        </p:spPr>
-        <p:txBody>
-          <a:bodyPr wrap="square">
-            <a:spAutoFit/>
-          </a:bodyPr>
-          <a:lstStyle/>
-          <a:p>
-            <a:r>
-              <a:rPr lang="en-US" sz="1000" noProof="1">
-                <a:solidFill>
-                  <a:schemeClr val="accent1"/>
-                </a:solidFill>
-              </a:rPr>
-              <a:t>Pragma-merge</a:t>
-            </a:r>
-            <a:endParaRPr lang="en-US" sz="1000" dirty="0"/>
-          </a:p>
-        </p:txBody>
-      </p:sp>
-      <p:sp>
-        <p:nvSpPr>
-          <p:cNvPr id="37" name="TextBox 36">
-            <a:extLst>
-              <a:ext uri="{FF2B5EF4-FFF2-40B4-BE49-F238E27FC236}">
-                <a16:creationId xmlns:a16="http://schemas.microsoft.com/office/drawing/2014/main" id="{03EB1486-6DBD-0ACE-D455-C6B6EFA9C921}"/>
-              </a:ext>
-            </a:extLst>
-          </p:cNvPr>
-          <p:cNvSpPr txBox="1"/>
-          <p:nvPr/>
-        </p:nvSpPr>
-        <p:spPr>
-          <a:xfrm>
-            <a:off x="9063029" y="4478912"/>
-            <a:ext cx="1348913" cy="400110"/>
-          </a:xfrm>
-          <a:prstGeom prst="rect">
-            <a:avLst/>
-          </a:prstGeom>
-          <a:noFill/>
-        </p:spPr>
-        <p:txBody>
-          <a:bodyPr wrap="square">
-            <a:spAutoFit/>
-          </a:bodyPr>
-          <a:lstStyle/>
-          <a:p>
-            <a:r>
-              <a:rPr lang="en-US" sz="1000" noProof="1"/>
-              <a:t>$BASE, $LOCAL, $REMOTE, $MERGED</a:t>
-            </a:r>
-            <a:endParaRPr lang="en-US" sz="1000" dirty="0"/>
-          </a:p>
-        </p:txBody>
-      </p:sp>
-      <p:sp>
-        <p:nvSpPr>
-          <p:cNvPr id="41" name="TextBox 40">
-            <a:extLst>
-              <a:ext uri="{FF2B5EF4-FFF2-40B4-BE49-F238E27FC236}">
-                <a16:creationId xmlns:a16="http://schemas.microsoft.com/office/drawing/2014/main" id="{7B632211-FD9F-9528-0621-7867C8F1306F}"/>
-              </a:ext>
-            </a:extLst>
-          </p:cNvPr>
-          <p:cNvSpPr txBox="1"/>
-          <p:nvPr/>
-        </p:nvSpPr>
-        <p:spPr>
-          <a:xfrm>
-            <a:off x="6483101" y="6442409"/>
+            <a:off x="8777751" y="3186308"/>
             <a:ext cx="1007468" cy="246221"/>
           </a:xfrm>
           <a:prstGeom prst="rect">
@@ -15409,12 +19287,88 @@
           </a:p>
         </p:txBody>
       </p:sp>
+      <p:sp>
+        <p:nvSpPr>
+          <p:cNvPr id="37" name="TextBox 36">
+            <a:extLst>
+              <a:ext uri="{FF2B5EF4-FFF2-40B4-BE49-F238E27FC236}">
+                <a16:creationId xmlns:a16="http://schemas.microsoft.com/office/drawing/2014/main" id="{50C3FEB6-6118-B8D0-2712-B50F1D8D00A6}"/>
+              </a:ext>
+            </a:extLst>
+          </p:cNvPr>
+          <p:cNvSpPr txBox="1"/>
+          <p:nvPr/>
+        </p:nvSpPr>
+        <p:spPr>
+          <a:xfrm>
+            <a:off x="9110163" y="2668966"/>
+            <a:ext cx="1348913" cy="400110"/>
+          </a:xfrm>
+          <a:prstGeom prst="rect">
+            <a:avLst/>
+          </a:prstGeom>
+          <a:noFill/>
+        </p:spPr>
+        <p:txBody>
+          <a:bodyPr wrap="square">
+            <a:spAutoFit/>
+          </a:bodyPr>
+          <a:lstStyle/>
+          <a:p>
+            <a:r>
+              <a:rPr lang="en-US" sz="1000" noProof="1"/>
+              <a:t>$BASE, $LOCAL, $REMOTE, $MERGED</a:t>
+            </a:r>
+            <a:endParaRPr lang="en-US" sz="1000" dirty="0"/>
+          </a:p>
+        </p:txBody>
+      </p:sp>
+      <p:sp>
+        <p:nvSpPr>
+          <p:cNvPr id="41" name="TextBox 40">
+            <a:extLst>
+              <a:ext uri="{FF2B5EF4-FFF2-40B4-BE49-F238E27FC236}">
+                <a16:creationId xmlns:a16="http://schemas.microsoft.com/office/drawing/2014/main" id="{281F771B-B775-532F-F9CD-6D13341A1781}"/>
+              </a:ext>
+            </a:extLst>
+          </p:cNvPr>
+          <p:cNvSpPr txBox="1"/>
+          <p:nvPr/>
+        </p:nvSpPr>
+        <p:spPr>
+          <a:xfrm>
+            <a:off x="6530235" y="4632463"/>
+            <a:ext cx="1007468" cy="246221"/>
+          </a:xfrm>
+          <a:prstGeom prst="rect">
+            <a:avLst/>
+          </a:prstGeom>
+          <a:noFill/>
+        </p:spPr>
+        <p:txBody>
+          <a:bodyPr wrap="square">
+            <a:spAutoFit/>
+          </a:bodyPr>
+          <a:lstStyle/>
+          <a:p>
+            <a:r>
+              <a:rPr lang="en-US" sz="1000" noProof="1">
+                <a:solidFill>
+                  <a:schemeClr val="accent1"/>
+                </a:solidFill>
+              </a:rPr>
+              <a:t>pragma-merge</a:t>
+            </a:r>
+            <a:endParaRPr lang="en-US" sz="1000" dirty="0"/>
+          </a:p>
+        </p:txBody>
+      </p:sp>
       <p:cxnSp>
         <p:nvCxnSpPr>
           <p:cNvPr id="42" name="Straight Arrow Connector 41">
             <a:extLst>
               <a:ext uri="{FF2B5EF4-FFF2-40B4-BE49-F238E27FC236}">
-                <a16:creationId xmlns:a16="http://schemas.microsoft.com/office/drawing/2014/main" id="{FBE719B7-B585-1413-3EBC-825AA7D8846B}"/>
+                <a16:creationId xmlns:a16="http://schemas.microsoft.com/office/drawing/2014/main" id="{60903B31-E932-61A5-A3D1-E1DB5CF7681A}"/>
               </a:ext>
             </a:extLst>
           </p:cNvPr>
@@ -15425,7 +19379,7 @@
         </p:nvCxnSpPr>
         <p:spPr>
           <a:xfrm>
-            <a:off x="6818173" y="4946241"/>
+            <a:off x="6865307" y="3136295"/>
             <a:ext cx="0" cy="493894"/>
           </a:xfrm>
           <a:prstGeom prst="straightConnector1">
@@ -15455,7 +19409,7 @@
           <p:cNvPr id="46" name="TextBox 45">
             <a:extLst>
               <a:ext uri="{FF2B5EF4-FFF2-40B4-BE49-F238E27FC236}">
-                <a16:creationId xmlns:a16="http://schemas.microsoft.com/office/drawing/2014/main" id="{077A5128-E8B7-5834-2321-F1AF04ED1419}"/>
+                <a16:creationId xmlns:a16="http://schemas.microsoft.com/office/drawing/2014/main" id="{F19CDB1A-EBE4-CE30-3404-1F0553AA9FF5}"/>
               </a:ext>
             </a:extLst>
           </p:cNvPr>
@@ -15464,7 +19418,7 @@
         </p:nvSpPr>
         <p:spPr>
           <a:xfrm>
-            <a:off x="9139275" y="5193914"/>
+            <a:off x="9186409" y="3383968"/>
             <a:ext cx="2317325" cy="246221"/>
           </a:xfrm>
           <a:prstGeom prst="rect">
@@ -15491,7 +19445,7 @@
           <p:cNvPr id="47" name="TextBox 46">
             <a:extLst>
               <a:ext uri="{FF2B5EF4-FFF2-40B4-BE49-F238E27FC236}">
-                <a16:creationId xmlns:a16="http://schemas.microsoft.com/office/drawing/2014/main" id="{5073D0FC-C31D-2BD7-5554-ACD7B5EE87D9}"/>
+                <a16:creationId xmlns:a16="http://schemas.microsoft.com/office/drawing/2014/main" id="{8646281E-85BC-5DF3-3988-A0AA51D3C13B}"/>
               </a:ext>
             </a:extLst>
           </p:cNvPr>
@@ -15500,7 +19454,7 @@
         </p:nvSpPr>
         <p:spPr>
           <a:xfrm>
-            <a:off x="9139275" y="5408002"/>
+            <a:off x="9186409" y="3598056"/>
             <a:ext cx="2317325" cy="400110"/>
           </a:xfrm>
           <a:prstGeom prst="rect">
@@ -15533,7 +19487,7 @@
           <p:cNvPr id="52" name="Straight Arrow Connector 51">
             <a:extLst>
               <a:ext uri="{FF2B5EF4-FFF2-40B4-BE49-F238E27FC236}">
-                <a16:creationId xmlns:a16="http://schemas.microsoft.com/office/drawing/2014/main" id="{6A72B33F-8720-5478-7BE4-58A901E1E409}"/>
+                <a16:creationId xmlns:a16="http://schemas.microsoft.com/office/drawing/2014/main" id="{0E714552-0705-9D58-E461-2C8491339554}"/>
               </a:ext>
             </a:extLst>
           </p:cNvPr>
@@ -15544,7 +19498,7 @@
         </p:nvCxnSpPr>
         <p:spPr>
           <a:xfrm>
-            <a:off x="6729172" y="5673826"/>
+            <a:off x="6776306" y="3863880"/>
             <a:ext cx="0" cy="790035"/>
           </a:xfrm>
           <a:prstGeom prst="straightConnector1">
@@ -15574,7 +19528,7 @@
           <p:cNvPr id="55" name="TextBox 54">
             <a:extLst>
               <a:ext uri="{FF2B5EF4-FFF2-40B4-BE49-F238E27FC236}">
-                <a16:creationId xmlns:a16="http://schemas.microsoft.com/office/drawing/2014/main" id="{01C0E38B-FEC3-0661-0883-6B52B7D25C76}"/>
+                <a16:creationId xmlns:a16="http://schemas.microsoft.com/office/drawing/2014/main" id="{387A9F6C-A406-5B6C-7E8B-C14BBD414588}"/>
               </a:ext>
             </a:extLst>
           </p:cNvPr>
@@ -15583,7 +19537,7 @@
         </p:nvSpPr>
         <p:spPr>
           <a:xfrm>
-            <a:off x="6742370" y="5613252"/>
+            <a:off x="6789504" y="3803306"/>
             <a:ext cx="2145471" cy="400110"/>
           </a:xfrm>
           <a:prstGeom prst="rect">
@@ -15617,7 +19571,7 @@
           <p:cNvPr id="59" name="TextBox 58">
             <a:extLst>
               <a:ext uri="{FF2B5EF4-FFF2-40B4-BE49-F238E27FC236}">
-                <a16:creationId xmlns:a16="http://schemas.microsoft.com/office/drawing/2014/main" id="{6BD01BB4-853E-EDB9-0FB1-56005E292D73}"/>
+                <a16:creationId xmlns:a16="http://schemas.microsoft.com/office/drawing/2014/main" id="{4FC11A26-A596-7AA5-F09A-A330A6B90626}"/>
               </a:ext>
             </a:extLst>
           </p:cNvPr>
@@ -15626,7 +19580,7 @@
         </p:nvSpPr>
         <p:spPr>
           <a:xfrm>
-            <a:off x="8752878" y="4083946"/>
+            <a:off x="8800012" y="2274000"/>
             <a:ext cx="2370855" cy="400110"/>
           </a:xfrm>
           <a:prstGeom prst="rect">
@@ -15672,7 +19626,7 @@
           <p:cNvPr id="62" name="Straight Arrow Connector 61">
             <a:extLst>
               <a:ext uri="{FF2B5EF4-FFF2-40B4-BE49-F238E27FC236}">
-                <a16:creationId xmlns:a16="http://schemas.microsoft.com/office/drawing/2014/main" id="{923F2FBD-ED69-F293-9816-58ECA6943E7B}"/>
+                <a16:creationId xmlns:a16="http://schemas.microsoft.com/office/drawing/2014/main" id="{FC9DF0EB-7072-2AE7-0A82-38609AB984B1}"/>
               </a:ext>
             </a:extLst>
           </p:cNvPr>
@@ -15683,7 +19637,7 @@
         </p:nvCxnSpPr>
         <p:spPr>
           <a:xfrm>
-            <a:off x="8972052" y="4318770"/>
+            <a:off x="9019186" y="2508824"/>
             <a:ext cx="0" cy="726962"/>
           </a:xfrm>
           <a:prstGeom prst="straightConnector1">
@@ -15713,7 +19667,7 @@
           <p:cNvPr id="66" name="Elbow Connector 65">
             <a:extLst>
               <a:ext uri="{FF2B5EF4-FFF2-40B4-BE49-F238E27FC236}">
-                <a16:creationId xmlns:a16="http://schemas.microsoft.com/office/drawing/2014/main" id="{5CCCFA7F-13DB-D954-5F20-89FE38ABC7AA}"/>
+                <a16:creationId xmlns:a16="http://schemas.microsoft.com/office/drawing/2014/main" id="{7ABB7199-27AA-B50A-E399-E00A5C5C6651}"/>
               </a:ext>
             </a:extLst>
           </p:cNvPr>
@@ -15724,7 +19678,7 @@
         </p:nvCxnSpPr>
         <p:spPr>
           <a:xfrm rot="10800000" flipV="1">
-            <a:off x="8136388" y="4647961"/>
+            <a:off x="8183522" y="2838015"/>
             <a:ext cx="2279630" cy="1234283"/>
           </a:xfrm>
           <a:prstGeom prst="bentConnector3">
@@ -15759,7 +19713,7 @@
           <p:cNvPr id="75" name="Straight Arrow Connector 74">
             <a:extLst>
               <a:ext uri="{FF2B5EF4-FFF2-40B4-BE49-F238E27FC236}">
-                <a16:creationId xmlns:a16="http://schemas.microsoft.com/office/drawing/2014/main" id="{638B10A2-02E3-7441-F8D6-0840D96F9BF6}"/>
+                <a16:creationId xmlns:a16="http://schemas.microsoft.com/office/drawing/2014/main" id="{F80C1261-0D28-1BF3-BAA5-B1C76859F46A}"/>
               </a:ext>
             </a:extLst>
           </p:cNvPr>
@@ -15770,7 +19724,7 @@
         </p:nvCxnSpPr>
         <p:spPr>
           <a:xfrm flipH="1">
-            <a:off x="7867597" y="5510256"/>
+            <a:off x="7914731" y="3700310"/>
             <a:ext cx="1271678" cy="15691"/>
           </a:xfrm>
           <a:prstGeom prst="straightConnector1">
@@ -15803,7 +19757,7 @@
           <p:cNvPr id="82" name="TextBox 81">
             <a:extLst>
               <a:ext uri="{FF2B5EF4-FFF2-40B4-BE49-F238E27FC236}">
-                <a16:creationId xmlns:a16="http://schemas.microsoft.com/office/drawing/2014/main" id="{4A781A0F-F4DC-7C9E-1FB2-7158F21FDFFC}"/>
+                <a16:creationId xmlns:a16="http://schemas.microsoft.com/office/drawing/2014/main" id="{424CA27A-760E-8DA7-0840-E63E0037A51C}"/>
               </a:ext>
             </a:extLst>
           </p:cNvPr>
@@ -15812,7 +19766,7 @@
         </p:nvSpPr>
         <p:spPr>
           <a:xfrm>
-            <a:off x="6748642" y="6601328"/>
+            <a:off x="6795776" y="4791382"/>
             <a:ext cx="1762477" cy="246221"/>
           </a:xfrm>
           <a:prstGeom prst="rect">
@@ -15838,7 +19792,7 @@
           <p:cNvPr id="85" name="TextBox 84">
             <a:extLst>
               <a:ext uri="{FF2B5EF4-FFF2-40B4-BE49-F238E27FC236}">
-                <a16:creationId xmlns:a16="http://schemas.microsoft.com/office/drawing/2014/main" id="{6A618C09-2663-5F67-3D91-7E50361E0D84}"/>
+                <a16:creationId xmlns:a16="http://schemas.microsoft.com/office/drawing/2014/main" id="{C291B2F7-A006-F34E-63B2-68CEA2926A64}"/>
               </a:ext>
             </a:extLst>
           </p:cNvPr>
@@ -15847,7 +19801,7 @@
         </p:nvSpPr>
         <p:spPr>
           <a:xfrm>
-            <a:off x="8937565" y="7133618"/>
+            <a:off x="8984699" y="5323672"/>
             <a:ext cx="2317325" cy="707886"/>
           </a:xfrm>
           <a:prstGeom prst="rect">
@@ -15894,7 +19848,7 @@
           <p:cNvPr id="109" name="Group 108">
             <a:extLst>
               <a:ext uri="{FF2B5EF4-FFF2-40B4-BE49-F238E27FC236}">
-                <a16:creationId xmlns:a16="http://schemas.microsoft.com/office/drawing/2014/main" id="{F0CD306D-9270-4B65-82C0-765ABFC09271}"/>
+                <a16:creationId xmlns:a16="http://schemas.microsoft.com/office/drawing/2014/main" id="{D7108608-4CE1-B717-5BEC-977A13BE96A9}"/>
               </a:ext>
             </a:extLst>
           </p:cNvPr>
@@ -15903,7 +19857,7 @@
         </p:nvGrpSpPr>
         <p:grpSpPr>
           <a:xfrm>
-            <a:off x="9029193" y="7201954"/>
+            <a:off x="9076327" y="5392008"/>
             <a:ext cx="1796511" cy="122851"/>
             <a:chOff x="6875510" y="8853970"/>
             <a:chExt cx="1796511" cy="122851"/>
@@ -15914,7 +19868,7 @@
             <p:cNvPr id="87" name="Straight Connector 86">
               <a:extLst>
                 <a:ext uri="{FF2B5EF4-FFF2-40B4-BE49-F238E27FC236}">
-                  <a16:creationId xmlns:a16="http://schemas.microsoft.com/office/drawing/2014/main" id="{A24F06F0-49FF-E61B-3D5F-2AC786B3394B}"/>
+                  <a16:creationId xmlns:a16="http://schemas.microsoft.com/office/drawing/2014/main" id="{975D3637-007B-1D52-C3A6-E25C2CC3CDC6}"/>
                 </a:ext>
               </a:extLst>
             </p:cNvPr>
@@ -15957,7 +19911,7 @@
             <p:cNvPr id="88" name="Straight Connector 87">
               <a:extLst>
                 <a:ext uri="{FF2B5EF4-FFF2-40B4-BE49-F238E27FC236}">
-                  <a16:creationId xmlns:a16="http://schemas.microsoft.com/office/drawing/2014/main" id="{B4E50141-491C-C131-7192-8561BF572BE0}"/>
+                  <a16:creationId xmlns:a16="http://schemas.microsoft.com/office/drawing/2014/main" id="{B4BBC0BA-C2AC-7722-472A-45CC8BC4437C}"/>
                 </a:ext>
               </a:extLst>
             </p:cNvPr>
@@ -16001,7 +19955,7 @@
           <p:cNvPr id="90" name="Straight Arrow Connector 89">
             <a:extLst>
               <a:ext uri="{FF2B5EF4-FFF2-40B4-BE49-F238E27FC236}">
-                <a16:creationId xmlns:a16="http://schemas.microsoft.com/office/drawing/2014/main" id="{9CA630EE-0C17-1BD7-CA20-1BFFF039B2D7}"/>
+                <a16:creationId xmlns:a16="http://schemas.microsoft.com/office/drawing/2014/main" id="{5102363E-26D3-1648-63E4-5ABCA27419C9}"/>
               </a:ext>
             </a:extLst>
           </p:cNvPr>
@@ -16012,7 +19966,7 @@
         </p:nvCxnSpPr>
         <p:spPr>
           <a:xfrm flipV="1">
-            <a:off x="7998776" y="7248660"/>
+            <a:off x="8045910" y="5438714"/>
             <a:ext cx="912866" cy="8146"/>
           </a:xfrm>
           <a:prstGeom prst="straightConnector1">
@@ -16045,7 +19999,7 @@
           <p:cNvPr id="92" name="TextBox 91">
             <a:extLst>
               <a:ext uri="{FF2B5EF4-FFF2-40B4-BE49-F238E27FC236}">
-                <a16:creationId xmlns:a16="http://schemas.microsoft.com/office/drawing/2014/main" id="{258CDA59-4306-7694-39FE-F77F19A86D31}"/>
+                <a16:creationId xmlns:a16="http://schemas.microsoft.com/office/drawing/2014/main" id="{51F33587-B3A9-F929-E5B2-6BA115D4171C}"/>
               </a:ext>
             </a:extLst>
           </p:cNvPr>
@@ -16054,7 +20008,7 @@
         </p:nvSpPr>
         <p:spPr>
           <a:xfrm>
-            <a:off x="6742370" y="5990542"/>
+            <a:off x="6789504" y="4180596"/>
             <a:ext cx="1906068" cy="400110"/>
           </a:xfrm>
           <a:prstGeom prst="rect">
@@ -16087,7 +20041,7 @@
           <p:cNvPr id="110" name="Straight Arrow Connector 109">
             <a:extLst>
               <a:ext uri="{FF2B5EF4-FFF2-40B4-BE49-F238E27FC236}">
-                <a16:creationId xmlns:a16="http://schemas.microsoft.com/office/drawing/2014/main" id="{ED05C266-01F6-F76D-D8F4-B73A83F678E7}"/>
+                <a16:creationId xmlns:a16="http://schemas.microsoft.com/office/drawing/2014/main" id="{31581E4D-7F5D-13A7-45AB-17FA6D786F19}"/>
               </a:ext>
             </a:extLst>
           </p:cNvPr>
@@ -16098,7 +20052,7 @@
         </p:nvCxnSpPr>
         <p:spPr>
           <a:xfrm flipV="1">
-            <a:off x="8136388" y="4220299"/>
+            <a:off x="8183522" y="2410353"/>
             <a:ext cx="635279" cy="98471"/>
           </a:xfrm>
           <a:prstGeom prst="straightConnector1">
@@ -16128,7 +20082,7 @@
           <p:cNvPr id="116" name="Straight Arrow Connector 115">
             <a:extLst>
               <a:ext uri="{FF2B5EF4-FFF2-40B4-BE49-F238E27FC236}">
-                <a16:creationId xmlns:a16="http://schemas.microsoft.com/office/drawing/2014/main" id="{2C06213A-570A-2B83-9122-ABF77924BFCA}"/>
+                <a16:creationId xmlns:a16="http://schemas.microsoft.com/office/drawing/2014/main" id="{8820FE45-C6B1-23E5-5D97-0973F4532EE2}"/>
               </a:ext>
             </a:extLst>
           </p:cNvPr>
@@ -16139,7 +20093,7 @@
         </p:nvCxnSpPr>
         <p:spPr>
           <a:xfrm>
-            <a:off x="6470853" y="7747611"/>
+            <a:off x="6517987" y="5937665"/>
             <a:ext cx="247820" cy="0"/>
           </a:xfrm>
           <a:prstGeom prst="straightConnector1">
@@ -16169,7 +20123,7 @@
           <p:cNvPr id="118" name="Straight Arrow Connector 117">
             <a:extLst>
               <a:ext uri="{FF2B5EF4-FFF2-40B4-BE49-F238E27FC236}">
-                <a16:creationId xmlns:a16="http://schemas.microsoft.com/office/drawing/2014/main" id="{84AE73E9-94DA-8070-100A-50CBB784CFA3}"/>
+                <a16:creationId xmlns:a16="http://schemas.microsoft.com/office/drawing/2014/main" id="{CA75E41B-FC16-F680-B2A3-0AE1EDF53A57}"/>
               </a:ext>
             </a:extLst>
           </p:cNvPr>
@@ -16180,7 +20134,7 @@
         </p:nvCxnSpPr>
         <p:spPr>
           <a:xfrm>
-            <a:off x="6483578" y="7900262"/>
+            <a:off x="6530712" y="6090316"/>
             <a:ext cx="252358" cy="0"/>
           </a:xfrm>
           <a:prstGeom prst="straightConnector1">
@@ -16213,7 +20167,7 @@
           <p:cNvPr id="121" name="TextBox 120">
             <a:extLst>
               <a:ext uri="{FF2B5EF4-FFF2-40B4-BE49-F238E27FC236}">
-                <a16:creationId xmlns:a16="http://schemas.microsoft.com/office/drawing/2014/main" id="{8D66560C-3E53-AE28-C998-53DE7641AE5E}"/>
+                <a16:creationId xmlns:a16="http://schemas.microsoft.com/office/drawing/2014/main" id="{964D8B4C-C537-9A0A-117A-B5DAFA734A9A}"/>
               </a:ext>
             </a:extLst>
           </p:cNvPr>
@@ -16222,7 +20176,7 @@
         </p:nvSpPr>
         <p:spPr>
           <a:xfrm>
-            <a:off x="6687254" y="7619678"/>
+            <a:off x="6734388" y="5809732"/>
             <a:ext cx="1039841" cy="400110"/>
           </a:xfrm>
           <a:prstGeom prst="rect">
@@ -16263,7 +20217,7 @@
           <p:cNvPr id="123" name="TextBox 122">
             <a:extLst>
               <a:ext uri="{FF2B5EF4-FFF2-40B4-BE49-F238E27FC236}">
-                <a16:creationId xmlns:a16="http://schemas.microsoft.com/office/drawing/2014/main" id="{E906DC65-386F-A065-C39D-E8F9213D6FA3}"/>
+                <a16:creationId xmlns:a16="http://schemas.microsoft.com/office/drawing/2014/main" id="{82A768C5-C01A-F7A0-9460-AB7B5E06D572}"/>
               </a:ext>
             </a:extLst>
           </p:cNvPr>
@@ -16272,7 +20226,7 @@
         </p:nvSpPr>
         <p:spPr>
           <a:xfrm>
-            <a:off x="10554968" y="4039443"/>
+            <a:off x="10602102" y="2229497"/>
             <a:ext cx="370614" cy="369332"/>
           </a:xfrm>
           <a:prstGeom prst="rect">
@@ -16298,7 +20252,7 @@
           <p:cNvPr id="125" name="TextBox 124">
             <a:extLst>
               <a:ext uri="{FF2B5EF4-FFF2-40B4-BE49-F238E27FC236}">
-                <a16:creationId xmlns:a16="http://schemas.microsoft.com/office/drawing/2014/main" id="{6EC5E2B6-56D8-2950-2989-2CA956431A57}"/>
+                <a16:creationId xmlns:a16="http://schemas.microsoft.com/office/drawing/2014/main" id="{8B358EA0-578D-7F51-4C46-323472194A32}"/>
               </a:ext>
             </a:extLst>
           </p:cNvPr>
@@ -16307,7 +20261,7 @@
         </p:nvSpPr>
         <p:spPr>
           <a:xfrm>
-            <a:off x="7972947" y="4546745"/>
+            <a:off x="8020081" y="2736799"/>
             <a:ext cx="370614" cy="369332"/>
           </a:xfrm>
           <a:prstGeom prst="rect">
@@ -16333,7 +20287,7 @@
           <p:cNvPr id="148" name="Elbow Connector 147">
             <a:extLst>
               <a:ext uri="{FF2B5EF4-FFF2-40B4-BE49-F238E27FC236}">
-                <a16:creationId xmlns:a16="http://schemas.microsoft.com/office/drawing/2014/main" id="{E2C22964-1A79-DF6F-11CB-AA2ED2389F3B}"/>
+                <a16:creationId xmlns:a16="http://schemas.microsoft.com/office/drawing/2014/main" id="{B7F06132-3A6C-A784-7D8D-1B25F2E72538}"/>
               </a:ext>
             </a:extLst>
           </p:cNvPr>
@@ -16344,7 +20298,7 @@
         </p:nvCxnSpPr>
         <p:spPr>
           <a:xfrm rot="10800000" flipH="1" flipV="1">
-            <a:off x="6398112" y="4219283"/>
+            <a:off x="6445246" y="2409337"/>
             <a:ext cx="61298" cy="504725"/>
           </a:xfrm>
           <a:prstGeom prst="bentConnector3">
@@ -16376,7 +20330,7 @@
           <p:cNvPr id="152" name="TextBox 151">
             <a:extLst>
               <a:ext uri="{FF2B5EF4-FFF2-40B4-BE49-F238E27FC236}">
-                <a16:creationId xmlns:a16="http://schemas.microsoft.com/office/drawing/2014/main" id="{F71DA6D7-CCD9-ADBB-97CA-8528B218DF66}"/>
+                <a16:creationId xmlns:a16="http://schemas.microsoft.com/office/drawing/2014/main" id="{C731E75D-F2CE-AE85-7D31-3749E1BA2616}"/>
               </a:ext>
             </a:extLst>
           </p:cNvPr>
@@ -16385,7 +20339,7 @@
         </p:nvSpPr>
         <p:spPr>
           <a:xfrm>
-            <a:off x="6886416" y="5026821"/>
+            <a:off x="6933550" y="3216875"/>
             <a:ext cx="696003" cy="246221"/>
           </a:xfrm>
           <a:prstGeom prst="rect">
@@ -16416,7 +20370,7 @@
           <p:cNvPr id="154" name="Right Brace 153">
             <a:extLst>
               <a:ext uri="{FF2B5EF4-FFF2-40B4-BE49-F238E27FC236}">
-                <a16:creationId xmlns:a16="http://schemas.microsoft.com/office/drawing/2014/main" id="{8581082B-D67F-93AE-F34A-EE44EE6041E9}"/>
+                <a16:creationId xmlns:a16="http://schemas.microsoft.com/office/drawing/2014/main" id="{01315884-FD97-7EEA-38CB-A655991C0B26}"/>
               </a:ext>
             </a:extLst>
           </p:cNvPr>
@@ -16425,7 +20379,7 @@
         </p:nvSpPr>
         <p:spPr>
           <a:xfrm>
-            <a:off x="10232136" y="4496533"/>
+            <a:off x="10279270" y="2686587"/>
             <a:ext cx="138162" cy="393374"/>
           </a:xfrm>
           <a:prstGeom prst="rightBrace">
@@ -16457,10 +20411,10 @@
       </p:sp>
       <p:sp>
         <p:nvSpPr>
-          <p:cNvPr id="3" name="textruta 5">
-            <a:extLst>
-              <a:ext uri="{FF2B5EF4-FFF2-40B4-BE49-F238E27FC236}">
-                <a16:creationId xmlns:a16="http://schemas.microsoft.com/office/drawing/2014/main" id="{DCD37A85-53A7-04DE-FAA1-BB7E94E9B34E}"/>
+          <p:cNvPr id="9" name="TextBox 8">
+            <a:extLst>
+              <a:ext uri="{FF2B5EF4-FFF2-40B4-BE49-F238E27FC236}">
+                <a16:creationId xmlns:a16="http://schemas.microsoft.com/office/drawing/2014/main" id="{EA521F35-2A7B-0A80-9DAA-A5DE8ED074BD}"/>
               </a:ext>
             </a:extLst>
           </p:cNvPr>
@@ -16469,151 +20423,7 @@
         </p:nvSpPr>
         <p:spPr>
           <a:xfrm>
-            <a:off x="4651737" y="947704"/>
-            <a:ext cx="6694077" cy="461665"/>
-          </a:xfrm>
-          <a:prstGeom prst="rect">
-            <a:avLst/>
-          </a:prstGeom>
-          <a:noFill/>
-        </p:spPr>
-        <p:txBody>
-          <a:bodyPr wrap="none" rtlCol="0">
-            <a:spAutoFit/>
-          </a:bodyPr>
-          <a:lstStyle/>
-          <a:p>
-            <a:r>
-              <a:rPr lang="en-US" sz="2400" b="1" noProof="1"/>
-              <a:t>File operations that works locally and on ssh server</a:t>
-            </a:r>
-          </a:p>
-        </p:txBody>
-      </p:sp>
-      <p:sp>
-        <p:nvSpPr>
-          <p:cNvPr id="7" name="textruta 4">
-            <a:extLst>
-              <a:ext uri="{FF2B5EF4-FFF2-40B4-BE49-F238E27FC236}">
-                <a16:creationId xmlns:a16="http://schemas.microsoft.com/office/drawing/2014/main" id="{FF3C9341-A2A2-DB9D-5BC3-402F8F43647B}"/>
-              </a:ext>
-            </a:extLst>
-          </p:cNvPr>
-          <p:cNvSpPr txBox="1"/>
-          <p:nvPr/>
-        </p:nvSpPr>
-        <p:spPr>
-          <a:xfrm>
-            <a:off x="4813121" y="1521282"/>
-            <a:ext cx="5927153" cy="954107"/>
-          </a:xfrm>
-          <a:prstGeom prst="rect">
-            <a:avLst/>
-          </a:prstGeom>
-          <a:noFill/>
-          <a:ln w="12700">
-            <a:solidFill>
-              <a:schemeClr val="accent1"/>
-            </a:solidFill>
-          </a:ln>
-        </p:spPr>
-        <p:txBody>
-          <a:bodyPr wrap="square" rtlCol="0">
-            <a:spAutoFit/>
-          </a:bodyPr>
-          <a:lstStyle/>
-          <a:p>
-            <a:r>
-              <a:rPr lang="en-US" sz="800" b="1" noProof="1"/>
-              <a:t>Some file operations should work both locally and on server.  </a:t>
-            </a:r>
-            <a:br>
-              <a:rPr lang="en-US" sz="800" b="1" noProof="1"/>
-            </a:br>
-            <a:endParaRPr lang="en-US" sz="800" b="1" noProof="1"/>
-          </a:p>
-          <a:p>
-            <a:pPr marL="171450" indent="-171450">
-              <a:buFont typeface="Courier New" panose="02070309020205020404" pitchFamily="49" charset="0"/>
-              <a:buChar char="o"/>
-            </a:pPr>
-            <a:r>
-              <a:rPr lang="en-US" sz="800" noProof="1">
-                <a:solidFill>
-                  <a:schemeClr val="accent1"/>
-                </a:solidFill>
-              </a:rPr>
-              <a:t>ssh_folder/ssh-folderlib.js </a:t>
-            </a:r>
-            <a:r>
-              <a:rPr lang="en-US" sz="800" noProof="1"/>
-              <a:t>is  javascript wrappers to bash scripts in “ssh_folder”.</a:t>
-            </a:r>
-            <a:br>
-              <a:rPr lang="en-US" sz="800" noProof="1"/>
-            </a:br>
-            <a:r>
-              <a:rPr lang="en-US" sz="800" noProof="1"/>
-              <a:t>Some functions are exclusive ssh, some are made to work both locally and over ssh</a:t>
-            </a:r>
-          </a:p>
-          <a:p>
-            <a:pPr marL="171450" indent="-171450">
-              <a:buFont typeface="Courier New" panose="02070309020205020404" pitchFamily="49" charset="0"/>
-              <a:buChar char="o"/>
-            </a:pPr>
-            <a:r>
-              <a:rPr lang="en-US" sz="800" noProof="1">
-                <a:solidFill>
-                  <a:schemeClr val="accent1"/>
-                </a:solidFill>
-              </a:rPr>
-              <a:t>fs_existsSync  </a:t>
-            </a:r>
-            <a:r>
-              <a:rPr lang="en-US" sz="800" noProof="1"/>
-              <a:t>-- works transparently as fs.existsSync both  on server and locally</a:t>
-            </a:r>
-            <a:br>
-              <a:rPr lang="en-US" sz="800" noProof="1"/>
-            </a:br>
-            <a:r>
-              <a:rPr lang="en-US" sz="800" noProof="1">
-                <a:solidFill>
-                  <a:schemeClr val="accent1"/>
-                </a:solidFill>
-              </a:rPr>
-              <a:t>fs.existsSync  </a:t>
-            </a:r>
-            <a:r>
-              <a:rPr lang="en-US" sz="800" noProof="1"/>
-              <a:t>-- works only locally (used for signal files, settings, Notes, etc that should not be on ssh server)</a:t>
-            </a:r>
-          </a:p>
-          <a:p>
-            <a:pPr marL="171450" indent="-171450">
-              <a:buFont typeface="Courier New" panose="02070309020205020404" pitchFamily="49" charset="0"/>
-              <a:buChar char="o"/>
-            </a:pPr>
-            <a:endParaRPr lang="en-US" sz="800" noProof="1"/>
-          </a:p>
-        </p:txBody>
-      </p:sp>
-      <p:sp>
-        <p:nvSpPr>
-          <p:cNvPr id="9" name="TextBox 8">
-            <a:extLst>
-              <a:ext uri="{FF2B5EF4-FFF2-40B4-BE49-F238E27FC236}">
-                <a16:creationId xmlns:a16="http://schemas.microsoft.com/office/drawing/2014/main" id="{ABB4C26E-1F75-21FF-1C5B-FA2AA1E1E0E0}"/>
-              </a:ext>
-            </a:extLst>
-          </p:cNvPr>
-          <p:cNvSpPr txBox="1"/>
-          <p:nvPr/>
-        </p:nvSpPr>
-        <p:spPr>
-          <a:xfrm>
-            <a:off x="513990" y="3407195"/>
+            <a:off x="561124" y="1597249"/>
             <a:ext cx="5019595" cy="307777"/>
           </a:xfrm>
           <a:prstGeom prst="rect">
@@ -16643,10 +20453,10 @@
       </p:sp>
       <p:sp>
         <p:nvSpPr>
-          <p:cNvPr id="11" name="TextBox 10">
-            <a:extLst>
-              <a:ext uri="{FF2B5EF4-FFF2-40B4-BE49-F238E27FC236}">
-                <a16:creationId xmlns:a16="http://schemas.microsoft.com/office/drawing/2014/main" id="{6AD517F4-28AB-E486-0DB1-C8B56C3E504D}"/>
+          <p:cNvPr id="124" name="TextBox 123">
+            <a:extLst>
+              <a:ext uri="{FF2B5EF4-FFF2-40B4-BE49-F238E27FC236}">
+                <a16:creationId xmlns:a16="http://schemas.microsoft.com/office/drawing/2014/main" id="{E0204CE5-9065-1AB6-FECE-9B20F0E87078}"/>
               </a:ext>
             </a:extLst>
           </p:cNvPr>
@@ -16655,20 +20465,13 @@
         </p:nvSpPr>
         <p:spPr>
           <a:xfrm>
-            <a:off x="5996356" y="8720843"/>
-            <a:ext cx="5592030" cy="553998"/>
+            <a:off x="6082448" y="6369293"/>
+            <a:ext cx="5484041" cy="400110"/>
           </a:xfrm>
           <a:prstGeom prst="rect">
             <a:avLst/>
           </a:prstGeom>
-          <a:solidFill>
-            <a:schemeClr val="bg1"/>
-          </a:solidFill>
-          <a:ln>
-            <a:solidFill>
-              <a:schemeClr val="accent1"/>
-            </a:solidFill>
-          </a:ln>
+          <a:noFill/>
         </p:spPr>
         <p:txBody>
           <a:bodyPr wrap="square">
@@ -16677,65 +20480,6 @@
           <a:lstStyle/>
           <a:p>
             <a:r>
-              <a:rPr lang="en-US" sz="1000" b="1" noProof="1"/>
-              <a:t>Reading and Writing files </a:t>
-            </a:r>
-            <a:r>
-              <a:rPr lang="en-US" sz="1000" noProof="1"/>
-              <a:t>relative the server’s repo base, is done with additional scripts:</a:t>
-            </a:r>
-          </a:p>
-          <a:p>
-            <a:pPr marL="171450" indent="-171450">
-              <a:buFont typeface="Arial" panose="020B0604020202020204" pitchFamily="34" charset="0"/>
-              <a:buChar char="•"/>
-            </a:pPr>
-            <a:r>
-              <a:rPr lang="en-US" sz="1000" noProof="1"/>
-              <a:t>ssh-get  --  Used for edit-link in changed list, and for .gitignore tool</a:t>
-            </a:r>
-          </a:p>
-          <a:p>
-            <a:pPr marL="171450" indent="-171450">
-              <a:buFont typeface="Arial" panose="020B0604020202020204" pitchFamily="34" charset="0"/>
-              <a:buChar char="•"/>
-            </a:pPr>
-            <a:r>
-              <a:rPr lang="en-US" sz="1000" noProof="1"/>
-              <a:t>ssh-put  --  Used to update server file after a file is modified in pragma-merge. Also for .gitignore tool</a:t>
-            </a:r>
-          </a:p>
-        </p:txBody>
-      </p:sp>
-      <p:sp>
-        <p:nvSpPr>
-          <p:cNvPr id="124" name="TextBox 123">
-            <a:extLst>
-              <a:ext uri="{FF2B5EF4-FFF2-40B4-BE49-F238E27FC236}">
-                <a16:creationId xmlns:a16="http://schemas.microsoft.com/office/drawing/2014/main" id="{A3A75491-E066-021D-9B1B-CCADDB40C015}"/>
-              </a:ext>
-            </a:extLst>
-          </p:cNvPr>
-          <p:cNvSpPr txBox="1"/>
-          <p:nvPr/>
-        </p:nvSpPr>
-        <p:spPr>
-          <a:xfrm>
-            <a:off x="6035314" y="8179239"/>
-            <a:ext cx="5484041" cy="400110"/>
-          </a:xfrm>
-          <a:prstGeom prst="rect">
-            <a:avLst/>
-          </a:prstGeom>
-          <a:noFill/>
-        </p:spPr>
-        <p:txBody>
-          <a:bodyPr wrap="square">
-            <a:spAutoFit/>
-          </a:bodyPr>
-          <a:lstStyle/>
-          <a:p>
-            <a:r>
               <a:rPr lang="en-US" sz="1000" noProof="1"/>
               <a:t>*)  NOTE, git difftool waits until pragma-merge is closed. That’s why I start a delayed local</a:t>
             </a:r>
@@ -16752,1836 +20496,7 @@
     </p:spTree>
     <p:extLst>
       <p:ext uri="{BB962C8B-B14F-4D97-AF65-F5344CB8AC3E}">
-        <p14:creationId xmlns:p14="http://schemas.microsoft.com/office/powerpoint/2010/main" val="3253474692"/>
-      </p:ext>
-    </p:extLst>
-  </p:cSld>
-  <p:clrMapOvr>
-    <a:masterClrMapping/>
-  </p:clrMapOvr>
-</p:sld>
-</file>
-
-<file path=ppt/slides/slide9.xml><?xml version="1.0" encoding="utf-8"?>
-<p:sld xmlns:a="http://schemas.openxmlformats.org/drawingml/2006/main" xmlns:r="http://schemas.openxmlformats.org/officeDocument/2006/relationships" xmlns:p="http://schemas.openxmlformats.org/presentationml/2006/main">
-  <p:cSld>
-    <p:spTree>
-      <p:nvGrpSpPr>
-        <p:cNvPr id="1" name=""/>
-        <p:cNvGrpSpPr/>
-        <p:nvPr/>
-      </p:nvGrpSpPr>
-      <p:grpSpPr>
-        <a:xfrm>
-          <a:off x="0" y="0"/>
-          <a:ext cx="0" cy="0"/>
-          <a:chOff x="0" y="0"/>
-          <a:chExt cx="0" cy="0"/>
-        </a:xfrm>
-      </p:grpSpPr>
-      <p:sp>
-        <p:nvSpPr>
-          <p:cNvPr id="4" name="textruta 3">
-            <a:extLst>
-              <a:ext uri="{FF2B5EF4-FFF2-40B4-BE49-F238E27FC236}">
-                <a16:creationId xmlns:a16="http://schemas.microsoft.com/office/drawing/2014/main" id="{4AD88DAB-01A9-A441-A11C-9B4000367464}"/>
-              </a:ext>
-            </a:extLst>
-          </p:cNvPr>
-          <p:cNvSpPr txBox="1"/>
-          <p:nvPr/>
-        </p:nvSpPr>
-        <p:spPr>
-          <a:xfrm>
-            <a:off x="489993" y="887480"/>
-            <a:ext cx="1099660" cy="461665"/>
-          </a:xfrm>
-          <a:prstGeom prst="rect">
-            <a:avLst/>
-          </a:prstGeom>
-          <a:noFill/>
-        </p:spPr>
-        <p:txBody>
-          <a:bodyPr wrap="none" rtlCol="0">
-            <a:spAutoFit/>
-          </a:bodyPr>
-          <a:lstStyle/>
-          <a:p>
-            <a:r>
-              <a:rPr lang="en-US" sz="2400" b="1" noProof="1"/>
-              <a:t>History</a:t>
-            </a:r>
-          </a:p>
-        </p:txBody>
-      </p:sp>
-      <p:sp>
-        <p:nvSpPr>
-          <p:cNvPr id="5" name="Rektangel 4">
-            <a:extLst>
-              <a:ext uri="{FF2B5EF4-FFF2-40B4-BE49-F238E27FC236}">
-                <a16:creationId xmlns:a16="http://schemas.microsoft.com/office/drawing/2014/main" id="{6298B066-77DC-F744-A641-81AB722329F0}"/>
-              </a:ext>
-            </a:extLst>
-          </p:cNvPr>
-          <p:cNvSpPr/>
-          <p:nvPr/>
-        </p:nvSpPr>
-        <p:spPr>
-          <a:xfrm>
-            <a:off x="489993" y="1361519"/>
-            <a:ext cx="3685232" cy="3293209"/>
-          </a:xfrm>
-          <a:prstGeom prst="rect">
-            <a:avLst/>
-          </a:prstGeom>
-          <a:solidFill>
-            <a:schemeClr val="bg1"/>
-          </a:solidFill>
-          <a:ln>
-            <a:solidFill>
-              <a:schemeClr val="accent1"/>
-            </a:solidFill>
-          </a:ln>
-        </p:spPr>
-        <p:txBody>
-          <a:bodyPr wrap="square">
-            <a:spAutoFit/>
-          </a:bodyPr>
-          <a:lstStyle/>
-          <a:p>
-            <a:r>
-              <a:rPr lang="en-US" sz="800" b="1" noProof="1"/>
-              <a:t>History is browsed with arrow buttons</a:t>
-            </a:r>
-          </a:p>
-          <a:p>
-            <a:endParaRPr lang="en-US" sz="800" noProof="1"/>
-          </a:p>
-          <a:p>
-            <a:pPr marL="171450" indent="-171450">
-              <a:buFont typeface="Courier New" panose="02070309020205020404" pitchFamily="49" charset="0"/>
-              <a:buChar char="o"/>
-            </a:pPr>
-            <a:r>
-              <a:rPr lang="en-US" sz="800" noProof="1"/>
-              <a:t>History signaled by getMode() == “HISTORY”</a:t>
-            </a:r>
-          </a:p>
-          <a:p>
-            <a:pPr marL="171450" indent="-171450">
-              <a:buFont typeface="Courier New" panose="02070309020205020404" pitchFamily="49" charset="0"/>
-              <a:buChar char="o"/>
-            </a:pPr>
-            <a:r>
-              <a:rPr lang="en-US" sz="800" noProof="1"/>
-              <a:t>History list can be shortened by </a:t>
-            </a:r>
-            <a:r>
-              <a:rPr lang="en-US" sz="800" b="1" noProof="1"/>
-              <a:t>Search</a:t>
-            </a:r>
-          </a:p>
-          <a:p>
-            <a:pPr marL="171450" indent="-171450">
-              <a:buFont typeface="Courier New" panose="02070309020205020404" pitchFamily="49" charset="0"/>
-              <a:buChar char="o"/>
-            </a:pPr>
-            <a:r>
-              <a:rPr lang="en-US" sz="800" noProof="1"/>
-              <a:t>History snapshot is compared with previous commit</a:t>
-            </a:r>
-          </a:p>
-          <a:p>
-            <a:pPr marL="171450" indent="-171450">
-              <a:buFont typeface="Courier New" panose="02070309020205020404" pitchFamily="49" charset="0"/>
-              <a:buChar char="o"/>
-            </a:pPr>
-            <a:r>
-              <a:rPr lang="en-US" sz="800" noProof="1"/>
-              <a:t>History snapshot can compare with “pinned” commit (=fixed commit)</a:t>
-            </a:r>
-          </a:p>
-          <a:p>
-            <a:pPr marL="324000" lvl="1" indent="-171450">
-              <a:buFont typeface="Arial" panose="020B0604020202020204" pitchFamily="34" charset="0"/>
-              <a:buChar char="•"/>
-            </a:pPr>
-            <a:endParaRPr lang="en-US" sz="800" noProof="1"/>
-          </a:p>
-          <a:p>
-            <a:pPr marL="171450" indent="-171450">
-              <a:buFont typeface="Courier New" panose="02070309020205020404" pitchFamily="49" charset="0"/>
-              <a:buChar char="o"/>
-            </a:pPr>
-            <a:r>
-              <a:rPr lang="en-US" sz="800" noProof="1">
-                <a:solidFill>
-                  <a:schemeClr val="accent1"/>
-                </a:solidFill>
-              </a:rPr>
-              <a:t>gitHistory() </a:t>
-            </a:r>
-            <a:endParaRPr lang="en-US" sz="800" noProof="1"/>
-          </a:p>
-          <a:p>
-            <a:pPr marL="324000" lvl="1" indent="-171450">
-              <a:buFont typeface="Arial" panose="020B0604020202020204" pitchFamily="34" charset="0"/>
-              <a:buChar char="•"/>
-            </a:pPr>
-            <a:r>
-              <a:rPr lang="en-US" sz="800" noProof="1"/>
-              <a:t>returns history, both with and without search</a:t>
-            </a:r>
-          </a:p>
-          <a:p>
-            <a:endParaRPr lang="en-US" sz="800" noProof="1">
-              <a:solidFill>
-                <a:schemeClr val="accent1"/>
-              </a:solidFill>
-            </a:endParaRPr>
-          </a:p>
-          <a:p>
-            <a:pPr marL="171450" indent="-171450">
-              <a:buFont typeface="Courier New" panose="02070309020205020404" pitchFamily="49" charset="0"/>
-              <a:buChar char="o"/>
-            </a:pPr>
-            <a:r>
-              <a:rPr lang="en-US" sz="800" noProof="1">
-                <a:solidFill>
-                  <a:schemeClr val="accent1"/>
-                </a:solidFill>
-              </a:rPr>
-              <a:t>localState keeps track of where you are in history</a:t>
-            </a:r>
-            <a:r>
-              <a:rPr lang="en-US" sz="800" noProof="1"/>
-              <a:t>:</a:t>
-            </a:r>
-          </a:p>
-          <a:p>
-            <a:pPr marL="324000" lvl="1" indent="-171450">
-              <a:buFont typeface="Arial" panose="020B0604020202020204" pitchFamily="34" charset="0"/>
-              <a:buChar char="•"/>
-            </a:pPr>
-            <a:r>
-              <a:rPr lang="en-US" sz="800" noProof="1"/>
-              <a:t>.historyNumber (-1 if not browsing history, index to )</a:t>
-            </a:r>
-          </a:p>
-          <a:p>
-            <a:pPr marL="324000" lvl="1" indent="-171450">
-              <a:buFont typeface="Arial" panose="020B0604020202020204" pitchFamily="34" charset="0"/>
-              <a:buChar char="•"/>
-            </a:pPr>
-            <a:r>
-              <a:rPr lang="en-US" sz="800" noProof="1"/>
-              <a:t>.historyHash (hash of commit)</a:t>
-            </a:r>
-          </a:p>
-          <a:p>
-            <a:pPr marL="324000" lvl="1" indent="-171450">
-              <a:buFont typeface="Arial" panose="020B0604020202020204" pitchFamily="34" charset="0"/>
-              <a:buChar char="•"/>
-            </a:pPr>
-            <a:r>
-              <a:rPr lang="en-US" sz="800" noProof="1"/>
-              <a:t>.historyString (descriptive text for messsage window)</a:t>
-            </a:r>
-            <a:br>
-              <a:rPr lang="en-US" sz="800" noProof="1"/>
-            </a:br>
-            <a:endParaRPr lang="en-US" sz="800" noProof="1"/>
-          </a:p>
-          <a:p>
-            <a:pPr marL="324000" lvl="1" indent="-171450">
-              <a:buFont typeface="Arial" panose="020B0604020202020204" pitchFamily="34" charset="0"/>
-              <a:buChar char="•"/>
-            </a:pPr>
-            <a:r>
-              <a:rPr lang="en-US" sz="800" noProof="1"/>
-              <a:t>.pinnedCommit=”” (means ordinary history)</a:t>
-            </a:r>
-          </a:p>
-          <a:p>
-            <a:pPr marL="324000" lvl="1" indent="-171450">
-              <a:buFont typeface="Arial" panose="020B0604020202020204" pitchFamily="34" charset="0"/>
-              <a:buChar char="•"/>
-            </a:pPr>
-            <a:r>
-              <a:rPr lang="en-US" sz="800" noProof="1"/>
-              <a:t>.pinnedCommit=hash (means pinned history)</a:t>
-            </a:r>
-            <a:br>
-              <a:rPr lang="en-US" sz="800" noProof="1"/>
-            </a:br>
-            <a:endParaRPr lang="en-US" sz="800" noProof="1"/>
-          </a:p>
-          <a:p>
-            <a:pPr marL="171450" indent="-171450">
-              <a:buFont typeface="Courier New" panose="02070309020205020404" pitchFamily="49" charset="0"/>
-              <a:buChar char="o"/>
-            </a:pPr>
-            <a:r>
-              <a:rPr lang="en-US" sz="800" noProof="1">
-                <a:solidFill>
-                  <a:schemeClr val="accent1"/>
-                </a:solidFill>
-              </a:rPr>
-              <a:t>gitShowHistorical(commit) </a:t>
-            </a:r>
-            <a:endParaRPr lang="en-US" sz="800" noProof="1"/>
-          </a:p>
-          <a:p>
-            <a:pPr marL="324000" lvl="1" indent="-171450">
-              <a:buFont typeface="Arial" panose="020B0604020202020204" pitchFamily="34" charset="0"/>
-              <a:buChar char="•"/>
-            </a:pPr>
-            <a:r>
-              <a:rPr lang="en-US" sz="800" noProof="1"/>
-              <a:t>returns status_data with changed file info</a:t>
-            </a:r>
-          </a:p>
-          <a:p>
-            <a:pPr marL="324000" lvl="1" indent="-171450">
-              <a:buFont typeface="Arial" panose="020B0604020202020204" pitchFamily="34" charset="0"/>
-              <a:buChar char="•"/>
-            </a:pPr>
-            <a:r>
-              <a:rPr lang="en-US" sz="800" noProof="1"/>
-              <a:t>if pinned, the status_data is relative pinned</a:t>
-            </a:r>
-          </a:p>
-          <a:p>
-            <a:pPr marL="324000" lvl="1" indent="-171450">
-              <a:buFont typeface="Arial" panose="020B0604020202020204" pitchFamily="34" charset="0"/>
-              <a:buChar char="•"/>
-            </a:pPr>
-            <a:r>
-              <a:rPr lang="en-US" sz="800" noProof="1"/>
-              <a:t>The status_data will always be comparison between newest and oldest of the two commits (showing change going forward in time)</a:t>
-            </a:r>
-          </a:p>
-          <a:p>
-            <a:pPr marL="324000" lvl="1" indent="-171450">
-              <a:buFont typeface="Arial" panose="020B0604020202020204" pitchFamily="34" charset="0"/>
-              <a:buChar char="•"/>
-            </a:pPr>
-            <a:r>
-              <a:rPr lang="en-US" sz="800" noProof="1"/>
-              <a:t>if not-pinned, status_data is relative previous commit</a:t>
-            </a:r>
-          </a:p>
-          <a:p>
-            <a:pPr marL="324000" lvl="1" indent="-171450">
-              <a:buFont typeface="Arial" panose="020B0604020202020204" pitchFamily="34" charset="0"/>
-              <a:buChar char="•"/>
-            </a:pPr>
-            <a:r>
-              <a:rPr lang="en-US" sz="800" noProof="1"/>
-              <a:t>localState.history_status_data</a:t>
-            </a:r>
-          </a:p>
-          <a:p>
-            <a:pPr marL="324000" lvl="1" indent="-171450">
-              <a:buFont typeface="Arial" panose="020B0604020202020204" pitchFamily="34" charset="0"/>
-              <a:buChar char="•"/>
-            </a:pPr>
-            <a:endParaRPr lang="en-US" sz="800" noProof="1"/>
-          </a:p>
-        </p:txBody>
-      </p:sp>
-      <p:sp>
-        <p:nvSpPr>
-          <p:cNvPr id="14" name="Rektangel 13">
-            <a:extLst>
-              <a:ext uri="{FF2B5EF4-FFF2-40B4-BE49-F238E27FC236}">
-                <a16:creationId xmlns:a16="http://schemas.microsoft.com/office/drawing/2014/main" id="{C15FF9A1-43E2-7348-9382-D2ADB3B355C8}"/>
-              </a:ext>
-            </a:extLst>
-          </p:cNvPr>
-          <p:cNvSpPr/>
-          <p:nvPr/>
-        </p:nvSpPr>
-        <p:spPr>
-          <a:xfrm>
-            <a:off x="4489123" y="3848849"/>
-            <a:ext cx="3372291" cy="2431435"/>
-          </a:xfrm>
-          <a:prstGeom prst="rect">
-            <a:avLst/>
-          </a:prstGeom>
-          <a:solidFill>
-            <a:schemeClr val="bg1"/>
-          </a:solidFill>
-          <a:ln>
-            <a:solidFill>
-              <a:schemeClr val="accent1"/>
-            </a:solidFill>
-          </a:ln>
-        </p:spPr>
-        <p:txBody>
-          <a:bodyPr wrap="square">
-            <a:spAutoFit/>
-          </a:bodyPr>
-          <a:lstStyle/>
-          <a:p>
-            <a:r>
-              <a:rPr lang="en-US" sz="800" b="1" noProof="1"/>
-              <a:t>Settings are loaded at Pragma-git start, and updated from Settings window</a:t>
-            </a:r>
-          </a:p>
-          <a:p>
-            <a:endParaRPr lang="en-US" sz="800" noProof="1">
-              <a:solidFill>
-                <a:schemeClr val="accent1"/>
-              </a:solidFill>
-            </a:endParaRPr>
-          </a:p>
-          <a:p>
-            <a:r>
-              <a:rPr lang="en-US" sz="800" noProof="1">
-                <a:solidFill>
-                  <a:schemeClr val="accent1"/>
-                </a:solidFill>
-              </a:rPr>
-              <a:t>Handling of settings in app.js</a:t>
-            </a:r>
-            <a:endParaRPr lang="en-US" sz="800" noProof="1"/>
-          </a:p>
-          <a:p>
-            <a:pPr marL="171450" indent="-171450">
-              <a:buFont typeface="Courier New" panose="02070309020205020404" pitchFamily="49" charset="0"/>
-              <a:buChar char="o"/>
-            </a:pPr>
-            <a:r>
-              <a:rPr lang="en-US" sz="800" noProof="1"/>
-              <a:t>loadSettings is called on Pragma-git start</a:t>
-            </a:r>
-          </a:p>
-          <a:p>
-            <a:pPr marL="324000" lvl="1" indent="-171450">
-              <a:buFont typeface="Arial" panose="020B0604020202020204" pitchFamily="34" charset="0"/>
-              <a:buChar char="•"/>
-            </a:pPr>
-            <a:r>
-              <a:rPr lang="en-US" sz="800" noProof="1"/>
-              <a:t>reads settings from settings.json</a:t>
-            </a:r>
-          </a:p>
-          <a:p>
-            <a:pPr marL="324000" lvl="1" indent="-171450">
-              <a:buFont typeface="Arial" panose="020B0604020202020204" pitchFamily="34" charset="0"/>
-              <a:buChar char="•"/>
-            </a:pPr>
-            <a:r>
-              <a:rPr lang="en-US" sz="800" noProof="1"/>
-              <a:t>stores settings in global.state in predefined order</a:t>
-            </a:r>
-          </a:p>
-          <a:p>
-            <a:pPr marL="171450" indent="-171450">
-              <a:buFont typeface="Courier New" panose="02070309020205020404" pitchFamily="49" charset="0"/>
-              <a:buChar char="o"/>
-            </a:pPr>
-            <a:r>
-              <a:rPr lang="en-US" sz="800" noProof="1"/>
-              <a:t>updateWithNewSettings is called :</a:t>
-            </a:r>
-          </a:p>
-          <a:p>
-            <a:pPr marL="324000" lvl="1" indent="-171450">
-              <a:buFont typeface="Arial" panose="020B0604020202020204" pitchFamily="34" charset="0"/>
-              <a:buChar char="•"/>
-            </a:pPr>
-            <a:r>
-              <a:rPr lang="en-US" sz="800" noProof="1"/>
-              <a:t>from loadSettings</a:t>
-            </a:r>
-          </a:p>
-          <a:p>
-            <a:pPr marL="324000" lvl="1" indent="-171450">
-              <a:buFont typeface="Arial" panose="020B0604020202020204" pitchFamily="34" charset="0"/>
-              <a:buChar char="•"/>
-            </a:pPr>
-            <a:r>
-              <a:rPr lang="en-US" sz="800" noProof="1"/>
-              <a:t>when leaving Settings window</a:t>
-            </a:r>
-          </a:p>
-          <a:p>
-            <a:pPr marL="171450" indent="-171450">
-              <a:buFont typeface="Courier New" panose="02070309020205020404" pitchFamily="49" charset="0"/>
-              <a:buChar char="o"/>
-            </a:pPr>
-            <a:r>
-              <a:rPr lang="en-US" sz="800" noProof="1"/>
-              <a:t>settings are saved when closing Pragma-git</a:t>
-            </a:r>
-          </a:p>
-          <a:p>
-            <a:pPr marL="171450" indent="-171450">
-              <a:buFont typeface="Courier New" panose="02070309020205020404" pitchFamily="49" charset="0"/>
-              <a:buChar char="o"/>
-            </a:pPr>
-            <a:r>
-              <a:rPr lang="en-US" sz="800" noProof="1"/>
-              <a:t>debug flags :  </a:t>
-            </a:r>
-          </a:p>
-          <a:p>
-            <a:pPr marL="324000" lvl="1" indent="-171450">
-              <a:buFont typeface="Arial" panose="020B0604020202020204" pitchFamily="34" charset="0"/>
-              <a:buChar char="•"/>
-            </a:pPr>
-            <a:r>
-              <a:rPr lang="en-US" sz="800" noProof="1"/>
-              <a:t>state.debug (main, enable git debug flags)</a:t>
-            </a:r>
-          </a:p>
-          <a:p>
-            <a:pPr marL="324000" lvl="1" indent="-171450">
-              <a:buFont typeface="Arial" panose="020B0604020202020204" pitchFamily="34" charset="0"/>
-              <a:buChar char="•"/>
-            </a:pPr>
-            <a:r>
-              <a:rPr lang="en-US" sz="800" noProof="1"/>
-              <a:t>state.graph.debug</a:t>
-            </a:r>
-            <a:br>
-              <a:rPr lang="en-US" sz="800" noProof="1"/>
-            </a:br>
-            <a:r>
-              <a:rPr lang="en-US" sz="800" noProof="1"/>
-              <a:t>are both read-only. Change directly in settings.json</a:t>
-            </a:r>
-          </a:p>
-          <a:p>
-            <a:endParaRPr lang="en-US" sz="800" noProof="1">
-              <a:solidFill>
-                <a:schemeClr val="accent1"/>
-              </a:solidFill>
-            </a:endParaRPr>
-          </a:p>
-          <a:p>
-            <a:r>
-              <a:rPr lang="en-US" sz="800" noProof="1">
-                <a:solidFill>
-                  <a:schemeClr val="accent1"/>
-                </a:solidFill>
-              </a:rPr>
-              <a:t>Settings window  settings.html :</a:t>
-            </a:r>
-            <a:endParaRPr lang="en-US" sz="800" noProof="1"/>
-          </a:p>
-          <a:p>
-            <a:pPr marL="171450" indent="-171450">
-              <a:buFont typeface="Courier New" panose="02070309020205020404" pitchFamily="49" charset="0"/>
-              <a:buChar char="o"/>
-            </a:pPr>
-            <a:r>
-              <a:rPr lang="en-US" sz="800" noProof="1"/>
-              <a:t>is populated from global.state </a:t>
-            </a:r>
-            <a:br>
-              <a:rPr lang="en-US" sz="800" noProof="1"/>
-            </a:br>
-            <a:r>
-              <a:rPr lang="en-US" sz="800" noProof="1"/>
-              <a:t>when   settings.js/injectIntoSettingsJs is called from settings.html</a:t>
-            </a:r>
-          </a:p>
-          <a:p>
-            <a:pPr marL="171450" indent="-171450">
-              <a:buFont typeface="Courier New" panose="02070309020205020404" pitchFamily="49" charset="0"/>
-              <a:buChar char="o"/>
-            </a:pPr>
-            <a:r>
-              <a:rPr lang="en-US" sz="800" noProof="1"/>
-              <a:t>closeWindow stores data in global.state before closing</a:t>
-            </a:r>
-          </a:p>
-        </p:txBody>
-      </p:sp>
-      <p:sp>
-        <p:nvSpPr>
-          <p:cNvPr id="15" name="textruta 14">
-            <a:extLst>
-              <a:ext uri="{FF2B5EF4-FFF2-40B4-BE49-F238E27FC236}">
-                <a16:creationId xmlns:a16="http://schemas.microsoft.com/office/drawing/2014/main" id="{9D47FF24-DA49-8046-9CB0-28C71CB63318}"/>
-              </a:ext>
-            </a:extLst>
-          </p:cNvPr>
-          <p:cNvSpPr txBox="1"/>
-          <p:nvPr/>
-        </p:nvSpPr>
-        <p:spPr>
-          <a:xfrm>
-            <a:off x="4447440" y="3416887"/>
-            <a:ext cx="1204882" cy="461665"/>
-          </a:xfrm>
-          <a:prstGeom prst="rect">
-            <a:avLst/>
-          </a:prstGeom>
-          <a:noFill/>
-        </p:spPr>
-        <p:txBody>
-          <a:bodyPr wrap="none" rtlCol="0">
-            <a:spAutoFit/>
-          </a:bodyPr>
-          <a:lstStyle/>
-          <a:p>
-            <a:r>
-              <a:rPr lang="en-US" sz="2400" b="1" noProof="1"/>
-              <a:t>Settings</a:t>
-            </a:r>
-          </a:p>
-        </p:txBody>
-      </p:sp>
-      <p:sp>
-        <p:nvSpPr>
-          <p:cNvPr id="16" name="textruta 15">
-            <a:extLst>
-              <a:ext uri="{FF2B5EF4-FFF2-40B4-BE49-F238E27FC236}">
-                <a16:creationId xmlns:a16="http://schemas.microsoft.com/office/drawing/2014/main" id="{9192722C-8F33-C74E-A8DA-E92B802175F0}"/>
-              </a:ext>
-            </a:extLst>
-          </p:cNvPr>
-          <p:cNvSpPr txBox="1"/>
-          <p:nvPr/>
-        </p:nvSpPr>
-        <p:spPr>
-          <a:xfrm>
-            <a:off x="489993" y="4804493"/>
-            <a:ext cx="1592103" cy="461665"/>
-          </a:xfrm>
-          <a:prstGeom prst="rect">
-            <a:avLst/>
-          </a:prstGeom>
-          <a:noFill/>
-        </p:spPr>
-        <p:txBody>
-          <a:bodyPr wrap="none" rtlCol="0">
-            <a:spAutoFit/>
-          </a:bodyPr>
-          <a:lstStyle/>
-          <a:p>
-            <a:r>
-              <a:rPr lang="en-US" sz="2400" b="1" noProof="1"/>
-              <a:t>Dark mode</a:t>
-            </a:r>
-          </a:p>
-        </p:txBody>
-      </p:sp>
-      <p:sp>
-        <p:nvSpPr>
-          <p:cNvPr id="17" name="Rektangel 16">
-            <a:extLst>
-              <a:ext uri="{FF2B5EF4-FFF2-40B4-BE49-F238E27FC236}">
-                <a16:creationId xmlns:a16="http://schemas.microsoft.com/office/drawing/2014/main" id="{0C6FE680-6AF2-4545-AE31-D52F0731E861}"/>
-              </a:ext>
-            </a:extLst>
-          </p:cNvPr>
-          <p:cNvSpPr/>
-          <p:nvPr/>
-        </p:nvSpPr>
-        <p:spPr>
-          <a:xfrm>
-            <a:off x="489993" y="5244410"/>
-            <a:ext cx="3685232" cy="2554545"/>
-          </a:xfrm>
-          <a:prstGeom prst="rect">
-            <a:avLst/>
-          </a:prstGeom>
-          <a:solidFill>
-            <a:schemeClr val="bg1"/>
-          </a:solidFill>
-          <a:ln>
-            <a:solidFill>
-              <a:schemeClr val="accent1"/>
-            </a:solidFill>
-          </a:ln>
-        </p:spPr>
-        <p:txBody>
-          <a:bodyPr wrap="square">
-            <a:spAutoFit/>
-          </a:bodyPr>
-          <a:lstStyle/>
-          <a:p>
-            <a:r>
-              <a:rPr lang="en-US" sz="800" b="1" noProof="1"/>
-              <a:t>Dark / light mode is defined from color_styles.css using css variables</a:t>
-            </a:r>
-          </a:p>
-          <a:p>
-            <a:endParaRPr lang="en-US" sz="800" noProof="1">
-              <a:solidFill>
-                <a:schemeClr val="accent1"/>
-              </a:solidFill>
-            </a:endParaRPr>
-          </a:p>
-          <a:p>
-            <a:r>
-              <a:rPr lang="en-US" sz="800" noProof="1">
-                <a:solidFill>
-                  <a:schemeClr val="accent1"/>
-                </a:solidFill>
-              </a:rPr>
-              <a:t>The mechanism</a:t>
-            </a:r>
-            <a:endParaRPr lang="en-US" sz="800" noProof="1"/>
-          </a:p>
-          <a:p>
-            <a:pPr marL="171450" indent="-171450">
-              <a:buFont typeface="Courier New" panose="02070309020205020404" pitchFamily="49" charset="0"/>
-              <a:buChar char="o"/>
-            </a:pPr>
-            <a:r>
-              <a:rPr lang="en-US" sz="800" noProof="1"/>
-              <a:t>&lt;body&gt; of each document is predefined with class=“light”</a:t>
-            </a:r>
-          </a:p>
-          <a:p>
-            <a:pPr marL="171450" indent="-171450">
-              <a:buFont typeface="Courier New" panose="02070309020205020404" pitchFamily="49" charset="0"/>
-              <a:buChar char="o"/>
-            </a:pPr>
-            <a:r>
-              <a:rPr lang="en-US" sz="800" noProof="1"/>
-              <a:t>script after &lt;body&gt;  adds a class=”dark” if dark mode</a:t>
-            </a:r>
-          </a:p>
-          <a:p>
-            <a:pPr marL="171450" indent="-171450">
-              <a:buFont typeface="Courier New" panose="02070309020205020404" pitchFamily="49" charset="0"/>
-              <a:buChar char="o"/>
-            </a:pPr>
-            <a:r>
-              <a:rPr lang="en-US" sz="800" noProof="1"/>
-              <a:t>darkmode is defined by localState.dark (true if darkmode, false if light)</a:t>
-            </a:r>
-          </a:p>
-          <a:p>
-            <a:pPr marL="171450" indent="-171450">
-              <a:buFont typeface="Courier New" panose="02070309020205020404" pitchFamily="49" charset="0"/>
-              <a:buChar char="o"/>
-            </a:pPr>
-            <a:r>
-              <a:rPr lang="en-US" sz="800" noProof="1"/>
-              <a:t> localState.dark is set from value of state.darkmode setting</a:t>
-            </a:r>
-          </a:p>
-          <a:p>
-            <a:pPr marL="171450" indent="-171450">
-              <a:buFont typeface="Courier New" panose="02070309020205020404" pitchFamily="49" charset="0"/>
-              <a:buChar char="o"/>
-            </a:pPr>
-            <a:endParaRPr lang="en-US" sz="800" noProof="1"/>
-          </a:p>
-          <a:p>
-            <a:r>
-              <a:rPr lang="en-US" sz="800" noProof="1">
-                <a:solidFill>
-                  <a:schemeClr val="accent1"/>
-                </a:solidFill>
-              </a:rPr>
-              <a:t>Main app :</a:t>
-            </a:r>
-            <a:endParaRPr lang="en-US" sz="800" noProof="1"/>
-          </a:p>
-          <a:p>
-            <a:pPr marL="171450" indent="-171450">
-              <a:buFont typeface="Courier New" panose="02070309020205020404" pitchFamily="49" charset="0"/>
-              <a:buChar char="o"/>
-            </a:pPr>
-            <a:r>
-              <a:rPr lang="en-US" sz="800" noProof="1"/>
-              <a:t>Main. window is mostly constant (except for text-fields and input texts)</a:t>
-            </a:r>
-            <a:br>
-              <a:rPr lang="en-US" sz="800" noProof="1"/>
-            </a:br>
-            <a:endParaRPr lang="en-US" sz="800" noProof="1"/>
-          </a:p>
-          <a:p>
-            <a:r>
-              <a:rPr lang="en-US" sz="800" noProof="1">
-                <a:solidFill>
-                  <a:schemeClr val="accent1"/>
-                </a:solidFill>
-              </a:rPr>
-              <a:t>Other windows behaves differently :</a:t>
-            </a:r>
-            <a:endParaRPr lang="en-US" sz="800" noProof="1"/>
-          </a:p>
-          <a:p>
-            <a:pPr marL="171450" indent="-171450">
-              <a:buFont typeface="Courier New" panose="02070309020205020404" pitchFamily="49" charset="0"/>
-              <a:buChar char="o"/>
-            </a:pPr>
-            <a:r>
-              <a:rPr lang="en-US" sz="800" noProof="1"/>
-              <a:t>Have styles reading css variables from color_styles.css</a:t>
-            </a:r>
-          </a:p>
-          <a:p>
-            <a:pPr marL="171450" indent="-171450">
-              <a:buFont typeface="Courier New" panose="02070309020205020404" pitchFamily="49" charset="0"/>
-              <a:buChar char="o"/>
-            </a:pPr>
-            <a:r>
-              <a:rPr lang="en-US" sz="800" noProof="1"/>
-              <a:t>A general img invert filter is applied which transforms black icons to white </a:t>
-            </a:r>
-            <a:br>
-              <a:rPr lang="en-US" sz="800" noProof="1"/>
-            </a:br>
-            <a:r>
-              <a:rPr lang="en-US" sz="800" noProof="1"/>
-              <a:t>(exceptions for color icons are defined in each document’s style section)</a:t>
-            </a:r>
-          </a:p>
-          <a:p>
-            <a:pPr marL="171450" indent="-171450">
-              <a:buFont typeface="Courier New" panose="02070309020205020404" pitchFamily="49" charset="0"/>
-              <a:buChar char="o"/>
-            </a:pPr>
-            <a:endParaRPr lang="en-US" sz="800" noProof="1"/>
-          </a:p>
-          <a:p>
-            <a:r>
-              <a:rPr lang="en-US" sz="800" noProof="1">
-                <a:solidFill>
-                  <a:schemeClr val="accent1"/>
-                </a:solidFill>
-              </a:rPr>
-              <a:t>Merge and Notes windows :</a:t>
-            </a:r>
-            <a:endParaRPr lang="en-US" sz="800" noProof="1"/>
-          </a:p>
-          <a:p>
-            <a:pPr marL="171450" indent="-171450">
-              <a:buFont typeface="Courier New" panose="02070309020205020404" pitchFamily="49" charset="0"/>
-              <a:buChar char="o"/>
-            </a:pPr>
-            <a:r>
-              <a:rPr lang="en-US" sz="800" noProof="1"/>
-              <a:t>Merge: hacked the CodeMirror css in pragma-merge.html</a:t>
-            </a:r>
-          </a:p>
-          <a:p>
-            <a:pPr marL="171450" indent="-171450">
-              <a:buFont typeface="Courier New" panose="02070309020205020404" pitchFamily="49" charset="0"/>
-              <a:buChar char="o"/>
-            </a:pPr>
-            <a:r>
-              <a:rPr lang="en-US" sz="800" noProof="1"/>
-              <a:t>Notes: hacked ToastUI editor css in notes.html</a:t>
-            </a:r>
-          </a:p>
-          <a:p>
-            <a:pPr marL="171450" indent="-171450">
-              <a:buFont typeface="Courier New" panose="02070309020205020404" pitchFamily="49" charset="0"/>
-              <a:buChar char="o"/>
-            </a:pPr>
-            <a:r>
-              <a:rPr lang="en-US" sz="800" noProof="1"/>
-              <a:t>Both have special css for icons and text-based buttons</a:t>
-            </a:r>
-          </a:p>
-        </p:txBody>
-      </p:sp>
-      <p:sp>
-        <p:nvSpPr>
-          <p:cNvPr id="18" name="Rektangel 17">
-            <a:extLst>
-              <a:ext uri="{FF2B5EF4-FFF2-40B4-BE49-F238E27FC236}">
-                <a16:creationId xmlns:a16="http://schemas.microsoft.com/office/drawing/2014/main" id="{1DB0E46F-C9CA-A948-A22C-D89EEA13217F}"/>
-              </a:ext>
-            </a:extLst>
-          </p:cNvPr>
-          <p:cNvSpPr/>
-          <p:nvPr/>
-        </p:nvSpPr>
-        <p:spPr>
-          <a:xfrm>
-            <a:off x="4496434" y="6939072"/>
-            <a:ext cx="3364980" cy="2062103"/>
-          </a:xfrm>
-          <a:prstGeom prst="rect">
-            <a:avLst/>
-          </a:prstGeom>
-          <a:solidFill>
-            <a:schemeClr val="bg1"/>
-          </a:solidFill>
-          <a:ln>
-            <a:solidFill>
-              <a:schemeClr val="accent1"/>
-            </a:solidFill>
-          </a:ln>
-        </p:spPr>
-        <p:txBody>
-          <a:bodyPr wrap="square">
-            <a:spAutoFit/>
-          </a:bodyPr>
-          <a:lstStyle/>
-          <a:p>
-            <a:pPr marL="171450" indent="-171450">
-              <a:buFont typeface="Courier New" panose="02070309020205020404" pitchFamily="49" charset="0"/>
-              <a:buChar char="o"/>
-            </a:pPr>
-            <a:r>
-              <a:rPr lang="en-US" sz="800" noProof="1">
-                <a:solidFill>
-                  <a:schemeClr val="accent1"/>
-                </a:solidFill>
-              </a:rPr>
-              <a:t>Notes, Graph window, Pragma-merge </a:t>
-            </a:r>
-          </a:p>
-          <a:p>
-            <a:pPr marL="324000" lvl="1" indent="-171450">
-              <a:buFont typeface="Arial" panose="020B0604020202020204" pitchFamily="34" charset="0"/>
-              <a:buChar char="•"/>
-            </a:pPr>
-            <a:r>
-              <a:rPr lang="en-US" sz="800" noProof="1"/>
-              <a:t>Based on npm find-in-nw</a:t>
-            </a:r>
-          </a:p>
-          <a:p>
-            <a:pPr marL="324000" lvl="1" indent="-171450">
-              <a:buFont typeface="Arial" panose="020B0604020202020204" pitchFamily="34" charset="0"/>
-              <a:buChar char="•"/>
-            </a:pPr>
-            <a:r>
-              <a:rPr lang="en-US" sz="800" noProof="1"/>
-              <a:t>Extend npm find-in-nw on the fly, with “extend_find-in-nw.js”</a:t>
-            </a:r>
-            <a:br>
-              <a:rPr lang="en-US" sz="800" noProof="1"/>
-            </a:br>
-            <a:r>
-              <a:rPr lang="en-US" sz="800" noProof="1"/>
-              <a:t>- make search case insensitive, add navigation CTRL-G, ↑,↓</a:t>
-            </a:r>
-            <a:br>
-              <a:rPr lang="en-US" sz="800" noProof="1"/>
-            </a:br>
-            <a:r>
-              <a:rPr lang="en-US" sz="800" noProof="1"/>
-              <a:t>- in Graph : searches document.body</a:t>
-            </a:r>
-            <a:br>
-              <a:rPr lang="en-US" sz="800" noProof="1"/>
-            </a:br>
-            <a:r>
-              <a:rPr lang="en-US" sz="800" noProof="1"/>
-              <a:t>- in Notes : search depends on wysiwyg / markdown modes</a:t>
-            </a:r>
-            <a:br>
-              <a:rPr lang="en-US" sz="800" noProof="1"/>
-            </a:br>
-            <a:r>
-              <a:rPr lang="en-US" sz="800" noProof="1"/>
-              <a:t>- in Pragma-merge : editor id in pragmaMergeSearchInEditorId</a:t>
-            </a:r>
-          </a:p>
-          <a:p>
-            <a:pPr marL="324000" lvl="1" indent="-171450">
-              <a:buFont typeface="Arial" panose="020B0604020202020204" pitchFamily="34" charset="0"/>
-              <a:buChar char="•"/>
-            </a:pPr>
-            <a:r>
-              <a:rPr lang="en-US" sz="800" noProof="1"/>
-              <a:t>Code added at end of Notes.html, graph.html, pragma-merge.html</a:t>
-            </a:r>
-          </a:p>
-          <a:p>
-            <a:pPr marL="324000" lvl="1" indent="-171450">
-              <a:buFont typeface="Arial" panose="020B0604020202020204" pitchFamily="34" charset="0"/>
-              <a:buChar char="•"/>
-            </a:pPr>
-            <a:endParaRPr lang="en-US" sz="800" noProof="1"/>
-          </a:p>
-          <a:p>
-            <a:pPr marL="171450" indent="-171450">
-              <a:buFont typeface="Courier New" panose="02070309020205020404" pitchFamily="49" charset="0"/>
-              <a:buChar char="o"/>
-            </a:pPr>
-            <a:r>
-              <a:rPr lang="en-US" sz="800" noProof="1">
-                <a:solidFill>
-                  <a:schemeClr val="accent1"/>
-                </a:solidFill>
-              </a:rPr>
-              <a:t>Notes window extra</a:t>
-            </a:r>
-          </a:p>
-          <a:p>
-            <a:pPr marL="324000" lvl="1" indent="-171450">
-              <a:buFont typeface="Arial" panose="020B0604020202020204" pitchFamily="34" charset="0"/>
-              <a:buChar char="•"/>
-            </a:pPr>
-            <a:r>
-              <a:rPr lang="en-US" sz="800" noProof="1"/>
-              <a:t>“Notes.html” : Listen to mouseover on markdown/wysiwyg switches</a:t>
-            </a:r>
-            <a:br>
-              <a:rPr lang="en-US" sz="800" noProof="1"/>
-            </a:br>
-            <a:r>
-              <a:rPr lang="en-US" sz="800" noProof="1"/>
-              <a:t>and clear marked finds (“tokens”), before switching.</a:t>
-            </a:r>
-            <a:br>
-              <a:rPr lang="en-US" sz="800" noProof="1"/>
-            </a:br>
-            <a:r>
-              <a:rPr lang="en-US" sz="800" noProof="1"/>
-              <a:t>Then close search box.</a:t>
-            </a:r>
-          </a:p>
-          <a:p>
-            <a:pPr marL="324000" lvl="1" indent="-171450">
-              <a:buFont typeface="Arial" panose="020B0604020202020204" pitchFamily="34" charset="0"/>
-              <a:buChar char="•"/>
-            </a:pPr>
-            <a:r>
-              <a:rPr lang="en-US" sz="800" noProof="1"/>
-              <a:t>“Notes.js” : Stop save from happening if find is active</a:t>
-            </a:r>
-          </a:p>
-          <a:p>
-            <a:pPr marL="324000" lvl="1" indent="-171450">
-              <a:buFont typeface="Arial" panose="020B0604020202020204" pitchFamily="34" charset="0"/>
-              <a:buChar char="•"/>
-            </a:pPr>
-            <a:endParaRPr lang="en-US" sz="800" noProof="1"/>
-          </a:p>
-          <a:p>
-            <a:pPr marL="324000" lvl="1" indent="-171450">
-              <a:buFont typeface="Arial" panose="020B0604020202020204" pitchFamily="34" charset="0"/>
-              <a:buChar char="•"/>
-            </a:pPr>
-            <a:endParaRPr lang="en-US" sz="800" noProof="1"/>
-          </a:p>
-        </p:txBody>
-      </p:sp>
-      <p:sp>
-        <p:nvSpPr>
-          <p:cNvPr id="19" name="textruta 18">
-            <a:extLst>
-              <a:ext uri="{FF2B5EF4-FFF2-40B4-BE49-F238E27FC236}">
-                <a16:creationId xmlns:a16="http://schemas.microsoft.com/office/drawing/2014/main" id="{A7C2C043-D2F7-C944-B558-2BA54F5E7D29}"/>
-              </a:ext>
-            </a:extLst>
-          </p:cNvPr>
-          <p:cNvSpPr txBox="1"/>
-          <p:nvPr/>
-        </p:nvSpPr>
-        <p:spPr>
-          <a:xfrm>
-            <a:off x="4447440" y="6494382"/>
-            <a:ext cx="1704634" cy="461665"/>
-          </a:xfrm>
-          <a:prstGeom prst="rect">
-            <a:avLst/>
-          </a:prstGeom>
-          <a:noFill/>
-        </p:spPr>
-        <p:txBody>
-          <a:bodyPr wrap="none" rtlCol="0">
-            <a:spAutoFit/>
-          </a:bodyPr>
-          <a:lstStyle/>
-          <a:p>
-            <a:r>
-              <a:rPr lang="en-US" sz="2400" b="1" noProof="1"/>
-              <a:t>Find in html</a:t>
-            </a:r>
-          </a:p>
-        </p:txBody>
-      </p:sp>
-      <p:sp>
-        <p:nvSpPr>
-          <p:cNvPr id="20" name="Rektangel 19">
-            <a:extLst>
-              <a:ext uri="{FF2B5EF4-FFF2-40B4-BE49-F238E27FC236}">
-                <a16:creationId xmlns:a16="http://schemas.microsoft.com/office/drawing/2014/main" id="{116B39BA-29B4-7748-8FA3-5994271F75AA}"/>
-              </a:ext>
-            </a:extLst>
-          </p:cNvPr>
-          <p:cNvSpPr/>
-          <p:nvPr/>
-        </p:nvSpPr>
-        <p:spPr>
-          <a:xfrm>
-            <a:off x="465896" y="8400871"/>
-            <a:ext cx="3685232" cy="1200329"/>
-          </a:xfrm>
-          <a:prstGeom prst="rect">
-            <a:avLst/>
-          </a:prstGeom>
-          <a:solidFill>
-            <a:schemeClr val="bg1"/>
-          </a:solidFill>
-          <a:ln>
-            <a:solidFill>
-              <a:schemeClr val="accent1"/>
-            </a:solidFill>
-          </a:ln>
-        </p:spPr>
-        <p:txBody>
-          <a:bodyPr wrap="square">
-            <a:spAutoFit/>
-          </a:bodyPr>
-          <a:lstStyle/>
-          <a:p>
-            <a:r>
-              <a:rPr lang="en-US" sz="800" noProof="1">
-                <a:solidFill>
-                  <a:schemeClr val="accent1"/>
-                </a:solidFill>
-              </a:rPr>
-              <a:t>About.html</a:t>
-            </a:r>
-            <a:endParaRPr lang="en-US" sz="800" noProof="1"/>
-          </a:p>
-          <a:p>
-            <a:pPr marL="171450" indent="-171450">
-              <a:buFont typeface="Courier New" panose="02070309020205020404" pitchFamily="49" charset="0"/>
-              <a:buChar char="o"/>
-            </a:pPr>
-            <a:r>
-              <a:rPr lang="en-US" sz="800" noProof="1"/>
-              <a:t>is self-contained</a:t>
-            </a:r>
-          </a:p>
-          <a:p>
-            <a:pPr marL="171450" indent="-171450">
-              <a:buFont typeface="Courier New" panose="02070309020205020404" pitchFamily="49" charset="0"/>
-              <a:buChar char="o"/>
-            </a:pPr>
-            <a:r>
-              <a:rPr lang="en-US" sz="800" noProof="1"/>
-              <a:t>inserts “about_search.html” in div, to have same text here as in help for history search.</a:t>
-            </a:r>
-            <a:endParaRPr lang="en-US" sz="800" noProof="1">
-              <a:solidFill>
-                <a:schemeClr val="accent1"/>
-              </a:solidFill>
-            </a:endParaRPr>
-          </a:p>
-          <a:p>
-            <a:r>
-              <a:rPr lang="en-US" sz="800" noProof="1">
-                <a:solidFill>
-                  <a:schemeClr val="accent1"/>
-                </a:solidFill>
-              </a:rPr>
-              <a:t>about_search.html</a:t>
-            </a:r>
-            <a:endParaRPr lang="en-US" sz="800" noProof="1"/>
-          </a:p>
-          <a:p>
-            <a:pPr marL="171450" indent="-171450">
-              <a:buFont typeface="Courier New" panose="02070309020205020404" pitchFamily="49" charset="0"/>
-              <a:buChar char="o"/>
-            </a:pPr>
-            <a:r>
-              <a:rPr lang="en-US" sz="800" noProof="1"/>
-              <a:t>is self-contained</a:t>
-            </a:r>
-            <a:endParaRPr lang="en-US" sz="800" noProof="1">
-              <a:solidFill>
-                <a:schemeClr val="accent1"/>
-              </a:solidFill>
-            </a:endParaRPr>
-          </a:p>
-          <a:p>
-            <a:r>
-              <a:rPr lang="en-US" sz="800" noProof="1">
-                <a:solidFill>
-                  <a:schemeClr val="accent1"/>
-                </a:solidFill>
-              </a:rPr>
-              <a:t>Other help texts</a:t>
-            </a:r>
-            <a:endParaRPr lang="en-US" sz="800" noProof="1"/>
-          </a:p>
-          <a:p>
-            <a:pPr marL="171450" indent="-171450">
-              <a:buFont typeface="Courier New" panose="02070309020205020404" pitchFamily="49" charset="0"/>
-              <a:buChar char="o"/>
-            </a:pPr>
-            <a:r>
-              <a:rPr lang="en-US" sz="800" noProof="1"/>
-              <a:t>HELP/TEMPLATE_help.html &lt;div id="inner-content"&gt;, is replaced with text from HELP/ by app.js</a:t>
-            </a:r>
-          </a:p>
-        </p:txBody>
-      </p:sp>
-      <p:sp>
-        <p:nvSpPr>
-          <p:cNvPr id="21" name="textruta 20">
-            <a:extLst>
-              <a:ext uri="{FF2B5EF4-FFF2-40B4-BE49-F238E27FC236}">
-                <a16:creationId xmlns:a16="http://schemas.microsoft.com/office/drawing/2014/main" id="{7DE9AEB1-C5B0-C249-BF18-9D6FEFA03971}"/>
-              </a:ext>
-            </a:extLst>
-          </p:cNvPr>
-          <p:cNvSpPr txBox="1"/>
-          <p:nvPr/>
-        </p:nvSpPr>
-        <p:spPr>
-          <a:xfrm>
-            <a:off x="416902" y="7929139"/>
-            <a:ext cx="885388" cy="461665"/>
-          </a:xfrm>
-          <a:prstGeom prst="rect">
-            <a:avLst/>
-          </a:prstGeom>
-          <a:noFill/>
-        </p:spPr>
-        <p:txBody>
-          <a:bodyPr wrap="square" rtlCol="0">
-            <a:spAutoFit/>
-          </a:bodyPr>
-          <a:lstStyle/>
-          <a:p>
-            <a:r>
-              <a:rPr lang="en-US" sz="2400" b="1" noProof="1"/>
-              <a:t>Help</a:t>
-            </a:r>
-          </a:p>
-        </p:txBody>
-      </p:sp>
-      <p:sp>
-        <p:nvSpPr>
-          <p:cNvPr id="22" name="textruta 21">
-            <a:extLst>
-              <a:ext uri="{FF2B5EF4-FFF2-40B4-BE49-F238E27FC236}">
-                <a16:creationId xmlns:a16="http://schemas.microsoft.com/office/drawing/2014/main" id="{AF028C6E-A947-D149-8E6C-A4419B0C31F8}"/>
-              </a:ext>
-            </a:extLst>
-          </p:cNvPr>
-          <p:cNvSpPr txBox="1"/>
-          <p:nvPr/>
-        </p:nvSpPr>
-        <p:spPr>
-          <a:xfrm>
-            <a:off x="416902" y="122259"/>
-            <a:ext cx="4211089" cy="830997"/>
-          </a:xfrm>
-          <a:prstGeom prst="rect">
-            <a:avLst/>
-          </a:prstGeom>
-          <a:noFill/>
-        </p:spPr>
-        <p:txBody>
-          <a:bodyPr wrap="none" rtlCol="0">
-            <a:spAutoFit/>
-          </a:bodyPr>
-          <a:lstStyle/>
-          <a:p>
-            <a:r>
-              <a:rPr lang="en-US" sz="4800" b="1" noProof="1">
-                <a:solidFill>
-                  <a:schemeClr val="accent1"/>
-                </a:solidFill>
-              </a:rPr>
-              <a:t>Other Windows</a:t>
-            </a:r>
-          </a:p>
-        </p:txBody>
-      </p:sp>
-      <p:sp>
-        <p:nvSpPr>
-          <p:cNvPr id="2" name="textruta 1">
-            <a:extLst>
-              <a:ext uri="{FF2B5EF4-FFF2-40B4-BE49-F238E27FC236}">
-                <a16:creationId xmlns:a16="http://schemas.microsoft.com/office/drawing/2014/main" id="{9851A2CD-4B90-C07F-1152-611E6755CCD9}"/>
-              </a:ext>
-            </a:extLst>
-          </p:cNvPr>
-          <p:cNvSpPr txBox="1"/>
-          <p:nvPr/>
-        </p:nvSpPr>
-        <p:spPr>
-          <a:xfrm>
-            <a:off x="4489123" y="1381925"/>
-            <a:ext cx="3274288" cy="1938992"/>
-          </a:xfrm>
-          <a:prstGeom prst="rect">
-            <a:avLst/>
-          </a:prstGeom>
-          <a:noFill/>
-          <a:ln>
-            <a:solidFill>
-              <a:schemeClr val="accent1"/>
-            </a:solidFill>
-          </a:ln>
-        </p:spPr>
-        <p:txBody>
-          <a:bodyPr wrap="square" rtlCol="0">
-            <a:spAutoFit/>
-          </a:bodyPr>
-          <a:lstStyle/>
-          <a:p>
-            <a:r>
-              <a:rPr lang="en-US" sz="800" b="1" noProof="1"/>
-              <a:t>Explicitly defined in .html file</a:t>
-            </a:r>
-          </a:p>
-          <a:p>
-            <a:pPr marL="171450" indent="-171450">
-              <a:buFont typeface="Courier New" panose="02070309020205020404" pitchFamily="49" charset="0"/>
-              <a:buChar char="o"/>
-            </a:pPr>
-            <a:r>
-              <a:rPr lang="en-US" sz="800" noProof="1"/>
-              <a:t>This is for dialogs with predefined content</a:t>
-            </a:r>
-          </a:p>
-          <a:p>
-            <a:pPr marL="171450" indent="-171450">
-              <a:buFont typeface="Courier New" panose="02070309020205020404" pitchFamily="49" charset="0"/>
-              <a:buChar char="o"/>
-            </a:pPr>
-            <a:r>
-              <a:rPr lang="en-US" sz="800" noProof="1"/>
-              <a:t>Shows as html-dialog , inside main app.js window</a:t>
-            </a:r>
-            <a:endParaRPr lang="en-US" sz="800" b="1" noProof="1"/>
-          </a:p>
-          <a:p>
-            <a:endParaRPr lang="en-US" sz="800" noProof="1"/>
-          </a:p>
-          <a:p>
-            <a:r>
-              <a:rPr lang="en-US" sz="800" b="1" noProof="1"/>
-              <a:t>Template-dialog in.html file</a:t>
-            </a:r>
-          </a:p>
-          <a:p>
-            <a:pPr marL="171450" indent="-171450">
-              <a:buFont typeface="Courier New" panose="02070309020205020404" pitchFamily="49" charset="0"/>
-              <a:buChar char="o"/>
-            </a:pPr>
-            <a:r>
-              <a:rPr lang="en-US" sz="800" noProof="1"/>
-              <a:t>Local to app.html, and settings.html</a:t>
-            </a:r>
-          </a:p>
-          <a:p>
-            <a:pPr marL="171450" indent="-171450">
-              <a:buFont typeface="Courier New" panose="02070309020205020404" pitchFamily="49" charset="0"/>
-              <a:buChar char="o"/>
-            </a:pPr>
-            <a:r>
-              <a:rPr lang="en-US" sz="800" noProof="1"/>
-              <a:t>displayAlert(title, message)</a:t>
-            </a:r>
-          </a:p>
-          <a:p>
-            <a:pPr marL="171450" indent="-171450">
-              <a:buFont typeface="Courier New" panose="02070309020205020404" pitchFamily="49" charset="0"/>
-              <a:buChar char="o"/>
-            </a:pPr>
-            <a:r>
-              <a:rPr lang="en-US" sz="800" noProof="1"/>
-              <a:t>Shows as html-dialog , inside main window</a:t>
-            </a:r>
-          </a:p>
-          <a:p>
-            <a:pPr marL="171450" indent="-171450">
-              <a:buFont typeface="Courier New" panose="02070309020205020404" pitchFamily="49" charset="0"/>
-              <a:buChar char="o"/>
-            </a:pPr>
-            <a:endParaRPr lang="en-US" sz="800" b="1" noProof="1"/>
-          </a:p>
-          <a:p>
-            <a:r>
-              <a:rPr lang="en-US" sz="800" b="1" noProof="1"/>
-              <a:t>exernalDialog.html (sizing performed in app.html)</a:t>
-            </a:r>
-          </a:p>
-          <a:p>
-            <a:pPr marL="171450" indent="-171450">
-              <a:buFont typeface="Courier New" panose="02070309020205020404" pitchFamily="49" charset="0"/>
-              <a:buChar char="o"/>
-            </a:pPr>
-            <a:r>
-              <a:rPr lang="en-US" sz="800" noProof="1"/>
-              <a:t>displayLongAlert(title, message, type)</a:t>
-            </a:r>
-            <a:br>
-              <a:rPr lang="en-US" sz="800" noProof="1"/>
-            </a:br>
-            <a:r>
-              <a:rPr lang="en-US" sz="800" noProof="1"/>
-              <a:t>defined in app.js</a:t>
-            </a:r>
-          </a:p>
-          <a:p>
-            <a:pPr marL="171450" indent="-171450">
-              <a:buFont typeface="Courier New" panose="02070309020205020404" pitchFamily="49" charset="0"/>
-              <a:buChar char="o"/>
-            </a:pPr>
-            <a:r>
-              <a:rPr lang="en-US" sz="800" noProof="1"/>
-              <a:t>Shows as external window, on top of main  app.js window</a:t>
-            </a:r>
-            <a:br>
-              <a:rPr lang="en-US" sz="800" noProof="1"/>
-            </a:br>
-            <a:br>
-              <a:rPr lang="en-US" sz="800" noProof="1"/>
-            </a:br>
-            <a:endParaRPr lang="en-US" sz="800" noProof="1"/>
-          </a:p>
-        </p:txBody>
-      </p:sp>
-      <p:sp>
-        <p:nvSpPr>
-          <p:cNvPr id="3" name="textruta 2">
-            <a:extLst>
-              <a:ext uri="{FF2B5EF4-FFF2-40B4-BE49-F238E27FC236}">
-                <a16:creationId xmlns:a16="http://schemas.microsoft.com/office/drawing/2014/main" id="{06DEBF44-050B-2220-C4D8-56D460476702}"/>
-              </a:ext>
-            </a:extLst>
-          </p:cNvPr>
-          <p:cNvSpPr txBox="1"/>
-          <p:nvPr/>
-        </p:nvSpPr>
-        <p:spPr>
-          <a:xfrm>
-            <a:off x="4489123" y="841210"/>
-            <a:ext cx="1116011" cy="461665"/>
-          </a:xfrm>
-          <a:prstGeom prst="rect">
-            <a:avLst/>
-          </a:prstGeom>
-          <a:noFill/>
-        </p:spPr>
-        <p:txBody>
-          <a:bodyPr wrap="none" rtlCol="0">
-            <a:spAutoFit/>
-          </a:bodyPr>
-          <a:lstStyle/>
-          <a:p>
-            <a:r>
-              <a:rPr lang="en-US" sz="2400" b="1" noProof="1"/>
-              <a:t>Dialogs</a:t>
-            </a:r>
-          </a:p>
-        </p:txBody>
-      </p:sp>
-      <p:sp>
-        <p:nvSpPr>
-          <p:cNvPr id="6" name="textruta 5">
-            <a:extLst>
-              <a:ext uri="{FF2B5EF4-FFF2-40B4-BE49-F238E27FC236}">
-                <a16:creationId xmlns:a16="http://schemas.microsoft.com/office/drawing/2014/main" id="{A188559A-F5E8-46DD-F138-41217EC70A89}"/>
-              </a:ext>
-            </a:extLst>
-          </p:cNvPr>
-          <p:cNvSpPr txBox="1"/>
-          <p:nvPr/>
-        </p:nvSpPr>
-        <p:spPr>
-          <a:xfrm>
-            <a:off x="8256717" y="4608845"/>
-            <a:ext cx="3274288" cy="2554545"/>
-          </a:xfrm>
-          <a:prstGeom prst="rect">
-            <a:avLst/>
-          </a:prstGeom>
-          <a:noFill/>
-          <a:ln>
-            <a:solidFill>
-              <a:schemeClr val="accent1"/>
-            </a:solidFill>
-          </a:ln>
-        </p:spPr>
-        <p:txBody>
-          <a:bodyPr wrap="square" rtlCol="0">
-            <a:spAutoFit/>
-          </a:bodyPr>
-          <a:lstStyle/>
-          <a:p>
-            <a:r>
-              <a:rPr lang="en-US" sz="800" b="1" noProof="1"/>
-              <a:t>Windows menu (MacOS only):</a:t>
-            </a:r>
-            <a:br>
-              <a:rPr lang="en-US" sz="800" b="1" noProof="1"/>
-            </a:br>
-            <a:endParaRPr lang="en-US" sz="800" b="1" noProof="1"/>
-          </a:p>
-          <a:p>
-            <a:pPr marL="171450" indent="-171450">
-              <a:buFont typeface="Courier New" panose="02070309020205020404" pitchFamily="49" charset="0"/>
-              <a:buChar char="o"/>
-            </a:pPr>
-            <a:r>
-              <a:rPr lang="en-US" sz="800" noProof="1">
-                <a:solidFill>
-                  <a:schemeClr val="accent1"/>
-                </a:solidFill>
-              </a:rPr>
-              <a:t>initializeWindowMenu</a:t>
-            </a:r>
-            <a:r>
-              <a:rPr lang="en-US" sz="800" noProof="1"/>
-              <a:t>: creates default MacOs menu in native language. Windows menu is recreated</a:t>
-            </a:r>
-            <a:br>
-              <a:rPr lang="en-US" sz="800" noProof="1"/>
-            </a:br>
-            <a:endParaRPr lang="en-US" sz="800" noProof="1"/>
-          </a:p>
-          <a:p>
-            <a:pPr marL="171450" indent="-171450">
-              <a:buFont typeface="Courier New" panose="02070309020205020404" pitchFamily="49" charset="0"/>
-              <a:buChar char="o"/>
-            </a:pPr>
-            <a:r>
-              <a:rPr lang="en-US" sz="800" noProof="1">
-                <a:solidFill>
-                  <a:schemeClr val="accent1"/>
-                </a:solidFill>
-              </a:rPr>
-              <a:t>addWindowMenu</a:t>
-            </a:r>
-            <a:r>
-              <a:rPr lang="en-US" sz="800" noProof="1"/>
-              <a:t> : stores the submenu handle with the title as key window_menu_handles_mapping[title]</a:t>
-            </a:r>
-            <a:br>
-              <a:rPr lang="en-US" sz="800" noProof="1"/>
-            </a:br>
-            <a:endParaRPr lang="en-US" sz="800" noProof="1"/>
-          </a:p>
-          <a:p>
-            <a:pPr marL="171450" indent="-171450">
-              <a:buFont typeface="Courier New" panose="02070309020205020404" pitchFamily="49" charset="0"/>
-              <a:buChar char="o"/>
-            </a:pPr>
-            <a:r>
-              <a:rPr lang="en-US" sz="800" noProof="1">
-                <a:solidFill>
-                  <a:schemeClr val="accent1"/>
-                </a:solidFill>
-              </a:rPr>
-              <a:t>deleteWindowMenu </a:t>
-            </a:r>
-            <a:r>
-              <a:rPr lang="en-US" sz="800" noProof="1"/>
-              <a:t>: close using window title to find submenu handle.  </a:t>
-            </a:r>
-            <a:br>
-              <a:rPr lang="en-US" sz="800" noProof="1"/>
-            </a:br>
-            <a:endParaRPr lang="en-US" sz="800" noProof="1"/>
-          </a:p>
-          <a:p>
-            <a:pPr marL="171450" indent="-171450">
-              <a:buFont typeface="Courier New" panose="02070309020205020404" pitchFamily="49" charset="0"/>
-              <a:buChar char="o"/>
-            </a:pPr>
-            <a:r>
-              <a:rPr lang="en-US" sz="800" noProof="1">
-                <a:solidFill>
-                  <a:schemeClr val="accent1"/>
-                </a:solidFill>
-              </a:rPr>
-              <a:t>recreateAllWindowsMenu </a:t>
-            </a:r>
-            <a:r>
-              <a:rPr lang="en-US" sz="800" noProof="1"/>
-              <a:t>: generates a populated MacOS window menu from scratch (used by Main when restarting after Settings scale change) </a:t>
-            </a:r>
-          </a:p>
-          <a:p>
-            <a:pPr marL="171450" indent="-171450">
-              <a:buFont typeface="Courier New" panose="02070309020205020404" pitchFamily="49" charset="0"/>
-              <a:buChar char="o"/>
-            </a:pPr>
-            <a:endParaRPr lang="en-US" sz="800" noProof="1"/>
-          </a:p>
-          <a:p>
-            <a:pPr marL="171450" indent="-171450">
-              <a:buFont typeface="Courier New" panose="02070309020205020404" pitchFamily="49" charset="0"/>
-              <a:buChar char="o"/>
-            </a:pPr>
-            <a:r>
-              <a:rPr lang="en-US" sz="800" noProof="1">
-                <a:solidFill>
-                  <a:schemeClr val="accent1"/>
-                </a:solidFill>
-              </a:rPr>
-              <a:t>gui.Window.getAll</a:t>
-            </a:r>
-            <a:r>
-              <a:rPr lang="en-US" sz="800" noProof="1"/>
-              <a:t> is used several places to find open windows (and child windows that are not supposed to be in the windows menu).  A function is called that iterates each found window, and performs the action.  See ‘minimizeWindow’, ‘closeAllWindows’, ‘hideAllWindows’,’ showAllWindows’</a:t>
-            </a:r>
-          </a:p>
-        </p:txBody>
-      </p:sp>
-      <p:sp>
-        <p:nvSpPr>
-          <p:cNvPr id="7" name="textruta 6">
-            <a:extLst>
-              <a:ext uri="{FF2B5EF4-FFF2-40B4-BE49-F238E27FC236}">
-                <a16:creationId xmlns:a16="http://schemas.microsoft.com/office/drawing/2014/main" id="{4108F045-DC67-5945-2D67-046A62557881}"/>
-              </a:ext>
-            </a:extLst>
-          </p:cNvPr>
-          <p:cNvSpPr txBox="1"/>
-          <p:nvPr/>
-        </p:nvSpPr>
-        <p:spPr>
-          <a:xfrm>
-            <a:off x="8173611" y="4017061"/>
-            <a:ext cx="3974871" cy="461665"/>
-          </a:xfrm>
-          <a:prstGeom prst="rect">
-            <a:avLst/>
-          </a:prstGeom>
-          <a:noFill/>
-        </p:spPr>
-        <p:txBody>
-          <a:bodyPr wrap="none" rtlCol="0">
-            <a:spAutoFit/>
-          </a:bodyPr>
-          <a:lstStyle/>
-          <a:p>
-            <a:r>
-              <a:rPr lang="en-US" sz="2400" b="1" noProof="1"/>
-              <a:t>Windows menu (MacOS only)</a:t>
-            </a:r>
-          </a:p>
-        </p:txBody>
-      </p:sp>
-      <p:sp>
-        <p:nvSpPr>
-          <p:cNvPr id="8" name="textruta 7">
-            <a:extLst>
-              <a:ext uri="{FF2B5EF4-FFF2-40B4-BE49-F238E27FC236}">
-                <a16:creationId xmlns:a16="http://schemas.microsoft.com/office/drawing/2014/main" id="{C2961014-07D4-C6A9-2F8B-DEB31EC6254D}"/>
-              </a:ext>
-            </a:extLst>
-          </p:cNvPr>
-          <p:cNvSpPr txBox="1"/>
-          <p:nvPr/>
-        </p:nvSpPr>
-        <p:spPr>
-          <a:xfrm>
-            <a:off x="8256717" y="1376136"/>
-            <a:ext cx="3274288" cy="2431435"/>
-          </a:xfrm>
-          <a:prstGeom prst="rect">
-            <a:avLst/>
-          </a:prstGeom>
-          <a:noFill/>
-          <a:ln>
-            <a:solidFill>
-              <a:schemeClr val="accent1"/>
-            </a:solidFill>
-          </a:ln>
-        </p:spPr>
-        <p:txBody>
-          <a:bodyPr wrap="square" rtlCol="0">
-            <a:spAutoFit/>
-          </a:bodyPr>
-          <a:lstStyle/>
-          <a:p>
-            <a:r>
-              <a:rPr lang="en-US" sz="800" b="1" noProof="1"/>
-              <a:t>Windows opened from Main, Settings</a:t>
-            </a:r>
-            <a:br>
-              <a:rPr lang="en-US" sz="800" b="1" noProof="1"/>
-            </a:br>
-            <a:endParaRPr lang="en-US" sz="800" b="1" noProof="1"/>
-          </a:p>
-          <a:p>
-            <a:pPr marL="171450" indent="-171450">
-              <a:buFont typeface="Courier New" panose="02070309020205020404" pitchFamily="49" charset="0"/>
-              <a:buChar char="o"/>
-            </a:pPr>
-            <a:r>
-              <a:rPr lang="en-US" sz="800" noProof="1"/>
-              <a:t>.</a:t>
-            </a:r>
-            <a:r>
-              <a:rPr lang="en-US" sz="800" noProof="1">
-                <a:solidFill>
-                  <a:schemeClr val="accent1"/>
-                </a:solidFill>
-              </a:rPr>
-              <a:t> localState </a:t>
-            </a:r>
-            <a:r>
-              <a:rPr lang="en-US" sz="800" noProof="1"/>
-              <a:t>(transient info) :</a:t>
-            </a:r>
-            <a:br>
-              <a:rPr lang="en-US" sz="800" noProof="1"/>
-            </a:br>
-            <a:r>
-              <a:rPr lang="en-US" sz="800" noProof="1"/>
-              <a:t> helpWindow, .settings, . fileListWindow, …</a:t>
-            </a:r>
-            <a:br>
-              <a:rPr lang="en-US" sz="800" noProof="1"/>
-            </a:br>
-            <a:r>
-              <a:rPr lang="en-US" sz="800" noProof="1"/>
-              <a:t>(true if window is open, false if closed)</a:t>
-            </a:r>
-            <a:br>
-              <a:rPr lang="en-US" sz="800" noProof="1"/>
-            </a:br>
-            <a:endParaRPr lang="en-US" sz="800" noProof="1"/>
-          </a:p>
-          <a:p>
-            <a:pPr marL="171450" indent="-171450">
-              <a:buFont typeface="Courier New" panose="02070309020205020404" pitchFamily="49" charset="0"/>
-              <a:buChar char="o"/>
-            </a:pPr>
-            <a:r>
-              <a:rPr lang="en-US" sz="800" noProof="1"/>
-              <a:t>External windows are opened hidden, with option ’show: false’</a:t>
-            </a:r>
-            <a:br>
-              <a:rPr lang="en-US" sz="800" noProof="1"/>
-            </a:br>
-            <a:r>
-              <a:rPr lang="en-US" sz="800" noProof="1"/>
-              <a:t>(to work around buggy multiple workspaces).  </a:t>
-            </a:r>
-            <a:br>
-              <a:rPr lang="en-US" sz="800" noProof="1"/>
-            </a:br>
-            <a:endParaRPr lang="en-US" sz="800" noProof="1"/>
-          </a:p>
-          <a:p>
-            <a:pPr marL="171450" indent="-171450">
-              <a:buFont typeface="Courier New" panose="02070309020205020404" pitchFamily="49" charset="0"/>
-              <a:buChar char="o"/>
-            </a:pPr>
-            <a:r>
-              <a:rPr lang="en-US" sz="800" noProof="1">
-                <a:solidFill>
-                  <a:schemeClr val="accent1"/>
-                </a:solidFill>
-              </a:rPr>
-              <a:t>showWindow(win) </a:t>
-            </a:r>
-            <a:r>
-              <a:rPr lang="en-US" sz="800" noProof="1"/>
-              <a:t>is used to show hidden window.   </a:t>
-            </a:r>
-          </a:p>
-          <a:p>
-            <a:pPr marL="355600" lvl="1" indent="-177800">
-              <a:buFont typeface="Arial" panose="020B0604020202020204" pitchFamily="34" charset="0"/>
-              <a:buChar char="•"/>
-            </a:pPr>
-            <a:r>
-              <a:rPr lang="en-US" sz="800" noProof="1"/>
-              <a:t>Called from 'loaded’ event, when opening new window using ‘nw.Window.open’.   </a:t>
-            </a:r>
-          </a:p>
-          <a:p>
-            <a:pPr marL="355600" lvl="1" indent="-177800">
-              <a:buFont typeface="Arial" panose="020B0604020202020204" pitchFamily="34" charset="0"/>
-              <a:buChar char="•"/>
-            </a:pPr>
-            <a:r>
-              <a:rPr lang="en-US" sz="800" noProof="1"/>
-              <a:t>See two versions in ‘app.js’:</a:t>
-            </a:r>
-            <a:br>
-              <a:rPr lang="en-US" sz="800" noProof="1"/>
-            </a:br>
-            <a:r>
-              <a:rPr lang="en-US" sz="800" noProof="1"/>
-              <a:t>- callback’, case statement 'clicked-notes’</a:t>
-            </a:r>
-            <a:br>
-              <a:rPr lang="en-US" sz="800" noProof="1"/>
-            </a:br>
-            <a:r>
-              <a:rPr lang="en-US" sz="800" noProof="1"/>
-              <a:t>or</a:t>
-            </a:r>
-            <a:br>
-              <a:rPr lang="en-US" sz="800" noProof="1"/>
-            </a:br>
-            <a:r>
-              <a:rPr lang="en-US" sz="800" noProof="1"/>
-              <a:t>- ‘showAbout’ function</a:t>
-            </a:r>
-          </a:p>
-          <a:p>
-            <a:pPr marL="355600" lvl="1" indent="-177800">
-              <a:buFont typeface="Arial" panose="020B0604020202020204" pitchFamily="34" charset="0"/>
-              <a:buChar char="•"/>
-            </a:pPr>
-            <a:r>
-              <a:rPr lang="en-US" sz="800" noProof="1"/>
-              <a:t>Two ways to handle multiple windows (MacOS and Linux behaves differently)</a:t>
-            </a:r>
-            <a:br>
-              <a:rPr lang="en-US" sz="800" noProof="1"/>
-            </a:br>
-            <a:endParaRPr lang="en-US" sz="800" noProof="1"/>
-          </a:p>
-        </p:txBody>
-      </p:sp>
-      <p:sp>
-        <p:nvSpPr>
-          <p:cNvPr id="9" name="textruta 8">
-            <a:extLst>
-              <a:ext uri="{FF2B5EF4-FFF2-40B4-BE49-F238E27FC236}">
-                <a16:creationId xmlns:a16="http://schemas.microsoft.com/office/drawing/2014/main" id="{279F5223-2ED1-3322-DF84-D0ED0C8FE18E}"/>
-              </a:ext>
-            </a:extLst>
-          </p:cNvPr>
-          <p:cNvSpPr txBox="1"/>
-          <p:nvPr/>
-        </p:nvSpPr>
-        <p:spPr>
-          <a:xfrm>
-            <a:off x="8173611" y="784352"/>
-            <a:ext cx="3523400" cy="461665"/>
-          </a:xfrm>
-          <a:prstGeom prst="rect">
-            <a:avLst/>
-          </a:prstGeom>
-          <a:noFill/>
-        </p:spPr>
-        <p:txBody>
-          <a:bodyPr wrap="none" rtlCol="0">
-            <a:spAutoFit/>
-          </a:bodyPr>
-          <a:lstStyle/>
-          <a:p>
-            <a:r>
-              <a:rPr lang="en-US" sz="2400" b="1" noProof="1"/>
-              <a:t>External Windows general</a:t>
-            </a:r>
-          </a:p>
-        </p:txBody>
-      </p:sp>
-    </p:spTree>
-    <p:extLst>
-      <p:ext uri="{BB962C8B-B14F-4D97-AF65-F5344CB8AC3E}">
-        <p14:creationId xmlns:p14="http://schemas.microsoft.com/office/powerpoint/2010/main" val="748310116"/>
+        <p14:creationId xmlns:p14="http://schemas.microsoft.com/office/powerpoint/2010/main" val="1415523114"/>
       </p:ext>
     </p:extLst>
   </p:cSld>

--- a/docs/Tech-overview.pptx
+++ b/docs/Tech-overview.pptx
@@ -18458,7 +18458,7 @@
         <p:spPr>
           <a:xfrm>
             <a:off x="606743" y="1976909"/>
-            <a:ext cx="5019594" cy="5509200"/>
+            <a:ext cx="5019594" cy="4524315"/>
           </a:xfrm>
           <a:prstGeom prst="rect">
             <a:avLst/>
@@ -18615,7 +18615,7 @@
             </a:br>
             <a:r>
               <a:rPr lang="en-US" sz="800" noProof="1"/>
-              <a:t>(FILE_LIST_ON_SSH  = /tmp/test.txt)</a:t>
+              <a:t>(FILE_LIST_ON_SSH  = /tmp/git_diff_file_list.txt)</a:t>
             </a:r>
             <a:br>
               <a:rPr lang="en-US" sz="800" b="1" noProof="1"/>
@@ -18633,12 +18633,9 @@
                   <a:schemeClr val="accent1"/>
                 </a:solidFill>
               </a:rPr>
-              <a:t>CLIENT : ssh-git-client (when difftool or mergetool) </a:t>
-            </a:r>
-            <a:r>
-              <a:rPr lang="en-US" sz="800" noProof="1"/>
-              <a:t>starts new shell</a:t>
-            </a:r>
+              <a:t>CLIENT : ssh-git-client (when difftool or mergetool)</a:t>
+            </a:r>
+            <a:endParaRPr lang="en-US" sz="800" noProof="1"/>
           </a:p>
           <a:p>
             <a:pPr marL="324000" lvl="1" indent="-171450">
@@ -18647,103 +18644,14 @@
             </a:pPr>
             <a:r>
               <a:rPr lang="en-US" sz="800" noProof="1"/>
-              <a:t>If difftool or mergetool command, </a:t>
+              <a:t>Check if $FILE_LIST_ON_SSH  exists</a:t>
             </a:r>
             <a:br>
               <a:rPr lang="en-US" sz="800" noProof="1"/>
             </a:br>
             <a:r>
               <a:rPr lang="en-US" sz="800" noProof="1"/>
-              <a:t>start “delayed-start-pragma-merge” in new shell</a:t>
-            </a:r>
-          </a:p>
-          <a:p>
-            <a:pPr marL="324000" lvl="1" indent="-171450">
-              <a:buFont typeface="Arial" panose="020B0604020202020204" pitchFamily="34" charset="0"/>
-              <a:buChar char="•"/>
-            </a:pPr>
-            <a:r>
-              <a:rPr lang="en-US" sz="800" noProof="1"/>
-              <a:t>Run the git diff/merge command on server</a:t>
-            </a:r>
-            <a:br>
-              <a:rPr lang="en-US" sz="800" noProof="1"/>
-            </a:br>
-            <a:endParaRPr lang="en-US" sz="800" noProof="1">
-              <a:solidFill>
-                <a:schemeClr val="accent1"/>
-              </a:solidFill>
-            </a:endParaRPr>
-          </a:p>
-          <a:p>
-            <a:pPr marL="171450" indent="-171450">
-              <a:buFont typeface="Courier New" panose="02070309020205020404" pitchFamily="49" charset="0"/>
-              <a:buChar char="o"/>
-            </a:pPr>
-            <a:r>
-              <a:rPr lang="en-US" sz="800" noProof="1">
-                <a:solidFill>
-                  <a:schemeClr val="accent1"/>
-                </a:solidFill>
-              </a:rPr>
-              <a:t>-&gt; CLIENT : delayed-start-pragma-merge</a:t>
-            </a:r>
-            <a:endParaRPr lang="en-US" sz="800" noProof="1"/>
-          </a:p>
-          <a:p>
-            <a:pPr marL="324000" lvl="1" indent="-171450">
-              <a:buFont typeface="Arial" panose="020B0604020202020204" pitchFamily="34" charset="0"/>
-              <a:buChar char="•"/>
-            </a:pPr>
-            <a:r>
-              <a:rPr lang="en-US" sz="800" noProof="1"/>
-              <a:t>Waits a few second for ssh-git-client to run on server</a:t>
-            </a:r>
-            <a:br>
-              <a:rPr lang="en-US" sz="800" noProof="1"/>
-            </a:br>
-            <a:r>
-              <a:rPr lang="en-US" sz="800" noProof="1"/>
-              <a:t>TODO: instead, check if $FILE_LIST_ON_SSH has been created</a:t>
-            </a:r>
-          </a:p>
-          <a:p>
-            <a:pPr marL="324000" lvl="1" indent="-171450">
-              <a:buFont typeface="Arial" panose="020B0604020202020204" pitchFamily="34" charset="0"/>
-              <a:buChar char="•"/>
-            </a:pPr>
-            <a:r>
-              <a:rPr lang="en-US" sz="800" noProof="1"/>
-              <a:t>Start ssh-get-merge-files, to pick up files from server</a:t>
-            </a:r>
-          </a:p>
-          <a:p>
-            <a:pPr marL="171450" indent="-171450">
-              <a:buFont typeface="Courier New" panose="02070309020205020404" pitchFamily="49" charset="0"/>
-              <a:buChar char="o"/>
-            </a:pPr>
-            <a:endParaRPr lang="en-US" sz="800" noProof="1">
-              <a:solidFill>
-                <a:schemeClr val="accent1"/>
-              </a:solidFill>
-            </a:endParaRPr>
-          </a:p>
-          <a:p>
-            <a:pPr marL="171450" indent="-171450">
-              <a:buFont typeface="Courier New" panose="02070309020205020404" pitchFamily="49" charset="0"/>
-              <a:buChar char="o"/>
-            </a:pPr>
-            <a:r>
-              <a:rPr lang="en-US" sz="800" noProof="1">
-                <a:solidFill>
-                  <a:schemeClr val="accent1"/>
-                </a:solidFill>
-              </a:rPr>
-              <a:t>-&gt; CLIENT; ssh-get-merge-files – </a:t>
-            </a:r>
-            <a:r>
-              <a:rPr lang="en-US" sz="800" noProof="1"/>
-              <a:t>picks up server files to client</a:t>
+              <a:t>If so: Picks up server files to client</a:t>
             </a:r>
           </a:p>
           <a:p>
@@ -19169,46 +19077,6 @@
       </p:sp>
       <p:sp>
         <p:nvSpPr>
-          <p:cNvPr id="28" name="TextBox 27">
-            <a:extLst>
-              <a:ext uri="{FF2B5EF4-FFF2-40B4-BE49-F238E27FC236}">
-                <a16:creationId xmlns:a16="http://schemas.microsoft.com/office/drawing/2014/main" id="{CC1CC32D-4682-DDFA-08D8-F2BCB69E4AC2}"/>
-              </a:ext>
-            </a:extLst>
-          </p:cNvPr>
-          <p:cNvSpPr txBox="1"/>
-          <p:nvPr/>
-        </p:nvSpPr>
-        <p:spPr>
-          <a:xfrm>
-            <a:off x="6497400" y="2800096"/>
-            <a:ext cx="1933528" cy="246221"/>
-          </a:xfrm>
-          <a:prstGeom prst="rect">
-            <a:avLst/>
-          </a:prstGeom>
-          <a:noFill/>
-        </p:spPr>
-        <p:txBody>
-          <a:bodyPr wrap="square">
-            <a:spAutoFit/>
-          </a:bodyPr>
-          <a:lstStyle/>
-          <a:p>
-            <a:r>
-              <a:rPr lang="en-US" sz="1000" noProof="1">
-                <a:solidFill>
-                  <a:schemeClr val="accent1"/>
-                </a:solidFill>
-              </a:rPr>
-              <a:t>delayed-start-pragma-merge</a:t>
-            </a:r>
-            <a:endParaRPr lang="en-US" sz="1000" dirty="0"/>
-          </a:p>
-        </p:txBody>
-      </p:sp>
-      <p:sp>
-        <p:nvSpPr>
           <p:cNvPr id="29" name="TextBox 28">
             <a:extLst>
               <a:ext uri="{FF2B5EF4-FFF2-40B4-BE49-F238E27FC236}">
@@ -19301,7 +19169,7 @@
         </p:nvSpPr>
         <p:spPr>
           <a:xfrm>
-            <a:off x="9110163" y="2668966"/>
+            <a:off x="9110163" y="2857506"/>
             <a:ext cx="1348913" cy="400110"/>
           </a:xfrm>
           <a:prstGeom prst="rect">
@@ -19363,12 +19231,90 @@
           </a:p>
         </p:txBody>
       </p:sp>
+      <p:sp>
+        <p:nvSpPr>
+          <p:cNvPr id="46" name="TextBox 45">
+            <a:extLst>
+              <a:ext uri="{FF2B5EF4-FFF2-40B4-BE49-F238E27FC236}">
+                <a16:creationId xmlns:a16="http://schemas.microsoft.com/office/drawing/2014/main" id="{F19CDB1A-EBE4-CE30-3404-1F0553AA9FF5}"/>
+              </a:ext>
+            </a:extLst>
+          </p:cNvPr>
+          <p:cNvSpPr txBox="1"/>
+          <p:nvPr/>
+        </p:nvSpPr>
+        <p:spPr>
+          <a:xfrm>
+            <a:off x="9186409" y="3383968"/>
+            <a:ext cx="2317325" cy="246221"/>
+          </a:xfrm>
+          <a:prstGeom prst="rect">
+            <a:avLst/>
+          </a:prstGeom>
+          <a:noFill/>
+        </p:spPr>
+        <p:txBody>
+          <a:bodyPr wrap="square">
+            <a:spAutoFit/>
+          </a:bodyPr>
+          <a:lstStyle/>
+          <a:p>
+            <a:r>
+              <a:rPr lang="en-US" sz="1000" noProof="1"/>
+              <a:t>$TMP/pragma-merge-running-ssh</a:t>
+            </a:r>
+            <a:endParaRPr lang="en-US" sz="1000" dirty="0"/>
+          </a:p>
+        </p:txBody>
+      </p:sp>
+      <p:sp>
+        <p:nvSpPr>
+          <p:cNvPr id="47" name="TextBox 46">
+            <a:extLst>
+              <a:ext uri="{FF2B5EF4-FFF2-40B4-BE49-F238E27FC236}">
+                <a16:creationId xmlns:a16="http://schemas.microsoft.com/office/drawing/2014/main" id="{8646281E-85BC-5DF3-3988-A0AA51D3C13B}"/>
+              </a:ext>
+            </a:extLst>
+          </p:cNvPr>
+          <p:cNvSpPr txBox="1"/>
+          <p:nvPr/>
+        </p:nvSpPr>
+        <p:spPr>
+          <a:xfrm>
+            <a:off x="9186409" y="3598056"/>
+            <a:ext cx="2317325" cy="400110"/>
+          </a:xfrm>
+          <a:prstGeom prst="rect">
+            <a:avLst/>
+          </a:prstGeom>
+          <a:noFill/>
+        </p:spPr>
+        <p:txBody>
+          <a:bodyPr wrap="square">
+            <a:spAutoFit/>
+          </a:bodyPr>
+          <a:lstStyle/>
+          <a:p>
+            <a:r>
+              <a:rPr lang="en-US" sz="1000" noProof="1"/>
+              <a:t>$FILE_LIST_ON_SSH</a:t>
+            </a:r>
+          </a:p>
+          <a:p>
+            <a:r>
+              <a:rPr lang="en-US" sz="1000" noProof="1"/>
+              <a:t>(list of $BASE, …, $MERGED)</a:t>
+            </a:r>
+            <a:endParaRPr lang="en-US" sz="1000" dirty="0"/>
+          </a:p>
+        </p:txBody>
+      </p:sp>
       <p:cxnSp>
         <p:nvCxnSpPr>
-          <p:cNvPr id="42" name="Straight Arrow Connector 41">
-            <a:extLst>
-              <a:ext uri="{FF2B5EF4-FFF2-40B4-BE49-F238E27FC236}">
-                <a16:creationId xmlns:a16="http://schemas.microsoft.com/office/drawing/2014/main" id="{60903B31-E932-61A5-A3D1-E1DB5CF7681A}"/>
+          <p:cNvPr id="52" name="Straight Arrow Connector 51">
+            <a:extLst>
+              <a:ext uri="{FF2B5EF4-FFF2-40B4-BE49-F238E27FC236}">
+                <a16:creationId xmlns:a16="http://schemas.microsoft.com/office/drawing/2014/main" id="{0E714552-0705-9D58-E461-2C8491339554}"/>
               </a:ext>
             </a:extLst>
           </p:cNvPr>
@@ -19379,8 +19325,8 @@
         </p:nvCxnSpPr>
         <p:spPr>
           <a:xfrm>
-            <a:off x="6865307" y="3136295"/>
-            <a:ext cx="0" cy="493894"/>
+            <a:off x="6776306" y="3863880"/>
+            <a:ext cx="0" cy="790035"/>
           </a:xfrm>
           <a:prstGeom prst="straightConnector1">
             <a:avLst/>
@@ -19406,10 +19352,10 @@
       </p:cxnSp>
       <p:sp>
         <p:nvSpPr>
-          <p:cNvPr id="46" name="TextBox 45">
-            <a:extLst>
-              <a:ext uri="{FF2B5EF4-FFF2-40B4-BE49-F238E27FC236}">
-                <a16:creationId xmlns:a16="http://schemas.microsoft.com/office/drawing/2014/main" id="{F19CDB1A-EBE4-CE30-3404-1F0553AA9FF5}"/>
+          <p:cNvPr id="55" name="TextBox 54">
+            <a:extLst>
+              <a:ext uri="{FF2B5EF4-FFF2-40B4-BE49-F238E27FC236}">
+                <a16:creationId xmlns:a16="http://schemas.microsoft.com/office/drawing/2014/main" id="{387A9F6C-A406-5B6C-7E8B-C14BBD414588}"/>
               </a:ext>
             </a:extLst>
           </p:cNvPr>
@@ -19418,8 +19364,8 @@
         </p:nvSpPr>
         <p:spPr>
           <a:xfrm>
-            <a:off x="9186409" y="3383968"/>
-            <a:ext cx="2317325" cy="246221"/>
+            <a:off x="6789504" y="3803306"/>
+            <a:ext cx="2145471" cy="400110"/>
           </a:xfrm>
           <a:prstGeom prst="rect">
             <a:avLst/>
@@ -19434,125 +19380,6 @@
           <a:p>
             <a:r>
               <a:rPr lang="en-US" sz="1000" noProof="1"/>
-              <a:t>$TMP/pragma-merge-running-ssh</a:t>
-            </a:r>
-            <a:endParaRPr lang="en-US" sz="1000" dirty="0"/>
-          </a:p>
-        </p:txBody>
-      </p:sp>
-      <p:sp>
-        <p:nvSpPr>
-          <p:cNvPr id="47" name="TextBox 46">
-            <a:extLst>
-              <a:ext uri="{FF2B5EF4-FFF2-40B4-BE49-F238E27FC236}">
-                <a16:creationId xmlns:a16="http://schemas.microsoft.com/office/drawing/2014/main" id="{8646281E-85BC-5DF3-3988-A0AA51D3C13B}"/>
-              </a:ext>
-            </a:extLst>
-          </p:cNvPr>
-          <p:cNvSpPr txBox="1"/>
-          <p:nvPr/>
-        </p:nvSpPr>
-        <p:spPr>
-          <a:xfrm>
-            <a:off x="9186409" y="3598056"/>
-            <a:ext cx="2317325" cy="400110"/>
-          </a:xfrm>
-          <a:prstGeom prst="rect">
-            <a:avLst/>
-          </a:prstGeom>
-          <a:noFill/>
-        </p:spPr>
-        <p:txBody>
-          <a:bodyPr wrap="square">
-            <a:spAutoFit/>
-          </a:bodyPr>
-          <a:lstStyle/>
-          <a:p>
-            <a:r>
-              <a:rPr lang="en-US" sz="1000" noProof="1"/>
-              <a:t>$FILE_LIST_ON_SSH</a:t>
-            </a:r>
-          </a:p>
-          <a:p>
-            <a:r>
-              <a:rPr lang="en-US" sz="1000" noProof="1"/>
-              <a:t>(list of $BASE, …, $MERGED)</a:t>
-            </a:r>
-            <a:endParaRPr lang="en-US" sz="1000" dirty="0"/>
-          </a:p>
-        </p:txBody>
-      </p:sp>
-      <p:cxnSp>
-        <p:nvCxnSpPr>
-          <p:cNvPr id="52" name="Straight Arrow Connector 51">
-            <a:extLst>
-              <a:ext uri="{FF2B5EF4-FFF2-40B4-BE49-F238E27FC236}">
-                <a16:creationId xmlns:a16="http://schemas.microsoft.com/office/drawing/2014/main" id="{0E714552-0705-9D58-E461-2C8491339554}"/>
-              </a:ext>
-            </a:extLst>
-          </p:cNvPr>
-          <p:cNvCxnSpPr>
-            <a:cxnSpLocks/>
-          </p:cNvCxnSpPr>
-          <p:nvPr/>
-        </p:nvCxnSpPr>
-        <p:spPr>
-          <a:xfrm>
-            <a:off x="6776306" y="3863880"/>
-            <a:ext cx="0" cy="790035"/>
-          </a:xfrm>
-          <a:prstGeom prst="straightConnector1">
-            <a:avLst/>
-          </a:prstGeom>
-          <a:ln>
-            <a:tailEnd type="triangle"/>
-          </a:ln>
-        </p:spPr>
-        <p:style>
-          <a:lnRef idx="1">
-            <a:schemeClr val="accent1"/>
-          </a:lnRef>
-          <a:fillRef idx="0">
-            <a:schemeClr val="accent1"/>
-          </a:fillRef>
-          <a:effectRef idx="0">
-            <a:schemeClr val="accent1"/>
-          </a:effectRef>
-          <a:fontRef idx="minor">
-            <a:schemeClr val="tx1"/>
-          </a:fontRef>
-        </p:style>
-      </p:cxnSp>
-      <p:sp>
-        <p:nvSpPr>
-          <p:cNvPr id="55" name="TextBox 54">
-            <a:extLst>
-              <a:ext uri="{FF2B5EF4-FFF2-40B4-BE49-F238E27FC236}">
-                <a16:creationId xmlns:a16="http://schemas.microsoft.com/office/drawing/2014/main" id="{387A9F6C-A406-5B6C-7E8B-C14BBD414588}"/>
-              </a:ext>
-            </a:extLst>
-          </p:cNvPr>
-          <p:cNvSpPr txBox="1"/>
-          <p:nvPr/>
-        </p:nvSpPr>
-        <p:spPr>
-          <a:xfrm>
-            <a:off x="6789504" y="3803306"/>
-            <a:ext cx="2145471" cy="400110"/>
-          </a:xfrm>
-          <a:prstGeom prst="rect">
-            <a:avLst/>
-          </a:prstGeom>
-          <a:noFill/>
-        </p:spPr>
-        <p:txBody>
-          <a:bodyPr wrap="square">
-            <a:spAutoFit/>
-          </a:bodyPr>
-          <a:lstStyle/>
-          <a:p>
-            <a:r>
-              <a:rPr lang="en-US" sz="1000" noProof="1"/>
               <a:t>Download $FILE_LIST_ON_SSH to</a:t>
             </a:r>
             <a:br>
@@ -19580,7 +19407,7 @@
         </p:nvSpPr>
         <p:spPr>
           <a:xfrm>
-            <a:off x="8800012" y="2274000"/>
+            <a:off x="8800012" y="2462540"/>
             <a:ext cx="2370855" cy="400110"/>
           </a:xfrm>
           <a:prstGeom prst="rect">
@@ -19637,8 +19464,8 @@
         </p:nvCxnSpPr>
         <p:spPr>
           <a:xfrm>
-            <a:off x="9019186" y="2508824"/>
-            <a:ext cx="0" cy="726962"/>
+            <a:off x="9019186" y="2883274"/>
+            <a:ext cx="0" cy="352512"/>
           </a:xfrm>
           <a:prstGeom prst="straightConnector1">
             <a:avLst/>
@@ -19678,12 +19505,12 @@
         </p:nvCxnSpPr>
         <p:spPr>
           <a:xfrm rot="10800000" flipV="1">
-            <a:off x="8183522" y="2838015"/>
-            <a:ext cx="2279630" cy="1234283"/>
+            <a:off x="8183522" y="3088007"/>
+            <a:ext cx="2435764" cy="984288"/>
           </a:xfrm>
           <a:prstGeom prst="bentConnector3">
             <a:avLst>
-              <a:gd name="adj1" fmla="val -29674"/>
+              <a:gd name="adj1" fmla="val -23533"/>
             </a:avLst>
           </a:prstGeom>
           <a:ln>
@@ -20051,9 +19878,9 @@
           <p:nvPr/>
         </p:nvCxnSpPr>
         <p:spPr>
-          <a:xfrm flipV="1">
-            <a:off x="8183522" y="2410353"/>
-            <a:ext cx="635279" cy="98471"/>
+          <a:xfrm>
+            <a:off x="8183522" y="2508824"/>
+            <a:ext cx="647681" cy="0"/>
           </a:xfrm>
           <a:prstGeom prst="straightConnector1">
             <a:avLst/>
@@ -20214,101 +20041,24 @@
       </p:sp>
       <p:sp>
         <p:nvSpPr>
-          <p:cNvPr id="123" name="TextBox 122">
-            <a:extLst>
-              <a:ext uri="{FF2B5EF4-FFF2-40B4-BE49-F238E27FC236}">
-                <a16:creationId xmlns:a16="http://schemas.microsoft.com/office/drawing/2014/main" id="{82A768C5-C01A-F7A0-9460-AB7B5E06D572}"/>
-              </a:ext>
-            </a:extLst>
-          </p:cNvPr>
-          <p:cNvSpPr txBox="1"/>
-          <p:nvPr/>
-        </p:nvSpPr>
-        <p:spPr>
-          <a:xfrm>
-            <a:off x="10602102" y="2229497"/>
-            <a:ext cx="370614" cy="369332"/>
-          </a:xfrm>
-          <a:prstGeom prst="rect">
-            <a:avLst/>
-          </a:prstGeom>
-          <a:noFill/>
-        </p:spPr>
-        <p:txBody>
-          <a:bodyPr wrap="none" rtlCol="0">
-            <a:spAutoFit/>
-          </a:bodyPr>
-          <a:lstStyle/>
-          <a:p>
-            <a:r>
-              <a:rPr lang="en-US" dirty="0"/>
-              <a:t>*)</a:t>
-            </a:r>
-          </a:p>
-        </p:txBody>
-      </p:sp>
-      <p:sp>
-        <p:nvSpPr>
-          <p:cNvPr id="125" name="TextBox 124">
-            <a:extLst>
-              <a:ext uri="{FF2B5EF4-FFF2-40B4-BE49-F238E27FC236}">
-                <a16:creationId xmlns:a16="http://schemas.microsoft.com/office/drawing/2014/main" id="{8B358EA0-578D-7F51-4C46-323472194A32}"/>
-              </a:ext>
-            </a:extLst>
-          </p:cNvPr>
-          <p:cNvSpPr txBox="1"/>
-          <p:nvPr/>
-        </p:nvSpPr>
-        <p:spPr>
-          <a:xfrm>
-            <a:off x="8020081" y="2736799"/>
-            <a:ext cx="370614" cy="369332"/>
-          </a:xfrm>
-          <a:prstGeom prst="rect">
-            <a:avLst/>
-          </a:prstGeom>
-          <a:noFill/>
-        </p:spPr>
-        <p:txBody>
-          <a:bodyPr wrap="none" rtlCol="0">
-            <a:spAutoFit/>
-          </a:bodyPr>
-          <a:lstStyle/>
-          <a:p>
-            <a:r>
-              <a:rPr lang="en-US" dirty="0"/>
-              <a:t>*)</a:t>
-            </a:r>
-          </a:p>
-        </p:txBody>
-      </p:sp>
-      <p:cxnSp>
-        <p:nvCxnSpPr>
-          <p:cNvPr id="148" name="Elbow Connector 147">
-            <a:extLst>
-              <a:ext uri="{FF2B5EF4-FFF2-40B4-BE49-F238E27FC236}">
-                <a16:creationId xmlns:a16="http://schemas.microsoft.com/office/drawing/2014/main" id="{B7F06132-3A6C-A784-7D8D-1B25F2E72538}"/>
-              </a:ext>
-            </a:extLst>
-          </p:cNvPr>
-          <p:cNvCxnSpPr>
-            <a:cxnSpLocks/>
-          </p:cNvCxnSpPr>
-          <p:nvPr/>
-        </p:nvCxnSpPr>
-        <p:spPr>
-          <a:xfrm rot="10800000" flipH="1" flipV="1">
-            <a:off x="6445246" y="2409337"/>
-            <a:ext cx="61298" cy="504725"/>
-          </a:xfrm>
-          <a:prstGeom prst="bentConnector3">
-            <a:avLst>
-              <a:gd name="adj1" fmla="val -372932"/>
-            </a:avLst>
-          </a:prstGeom>
-          <a:ln>
-            <a:tailEnd type="triangle"/>
-          </a:ln>
+          <p:cNvPr id="154" name="Right Brace 153">
+            <a:extLst>
+              <a:ext uri="{FF2B5EF4-FFF2-40B4-BE49-F238E27FC236}">
+                <a16:creationId xmlns:a16="http://schemas.microsoft.com/office/drawing/2014/main" id="{01315884-FD97-7EEA-38CB-A655991C0B26}"/>
+              </a:ext>
+            </a:extLst>
+          </p:cNvPr>
+          <p:cNvSpPr/>
+          <p:nvPr/>
+        </p:nvSpPr>
+        <p:spPr>
+          <a:xfrm>
+            <a:off x="10302322" y="2880051"/>
+            <a:ext cx="138162" cy="393374"/>
+          </a:xfrm>
+          <a:prstGeom prst="rightBrace">
+            <a:avLst/>
+          </a:prstGeom>
         </p:spPr>
         <p:style>
           <a:lnRef idx="1">
@@ -20324,82 +20074,6 @@
             <a:schemeClr val="tx1"/>
           </a:fontRef>
         </p:style>
-      </p:cxnSp>
-      <p:sp>
-        <p:nvSpPr>
-          <p:cNvPr id="152" name="TextBox 151">
-            <a:extLst>
-              <a:ext uri="{FF2B5EF4-FFF2-40B4-BE49-F238E27FC236}">
-                <a16:creationId xmlns:a16="http://schemas.microsoft.com/office/drawing/2014/main" id="{C731E75D-F2CE-AE85-7D31-3749E1BA2616}"/>
-              </a:ext>
-            </a:extLst>
-          </p:cNvPr>
-          <p:cNvSpPr txBox="1"/>
-          <p:nvPr/>
-        </p:nvSpPr>
-        <p:spPr>
-          <a:xfrm>
-            <a:off x="6933550" y="3216875"/>
-            <a:ext cx="696003" cy="246221"/>
-          </a:xfrm>
-          <a:prstGeom prst="rect">
-            <a:avLst/>
-          </a:prstGeom>
-          <a:noFill/>
-        </p:spPr>
-        <p:txBody>
-          <a:bodyPr wrap="square">
-            <a:spAutoFit/>
-          </a:bodyPr>
-          <a:lstStyle/>
-          <a:p>
-            <a:r>
-              <a:rPr lang="en-US" sz="1000" noProof="1">
-                <a:solidFill>
-                  <a:schemeClr val="accent1"/>
-                </a:solidFill>
-              </a:rPr>
-              <a:t>(wait 2 s)</a:t>
-            </a:r>
-            <a:endParaRPr lang="en-US" sz="1000" dirty="0"/>
-          </a:p>
-        </p:txBody>
-      </p:sp>
-      <p:sp>
-        <p:nvSpPr>
-          <p:cNvPr id="154" name="Right Brace 153">
-            <a:extLst>
-              <a:ext uri="{FF2B5EF4-FFF2-40B4-BE49-F238E27FC236}">
-                <a16:creationId xmlns:a16="http://schemas.microsoft.com/office/drawing/2014/main" id="{01315884-FD97-7EEA-38CB-A655991C0B26}"/>
-              </a:ext>
-            </a:extLst>
-          </p:cNvPr>
-          <p:cNvSpPr/>
-          <p:nvPr/>
-        </p:nvSpPr>
-        <p:spPr>
-          <a:xfrm>
-            <a:off x="10279270" y="2686587"/>
-            <a:ext cx="138162" cy="393374"/>
-          </a:xfrm>
-          <a:prstGeom prst="rightBrace">
-            <a:avLst/>
-          </a:prstGeom>
-        </p:spPr>
-        <p:style>
-          <a:lnRef idx="1">
-            <a:schemeClr val="accent1"/>
-          </a:lnRef>
-          <a:fillRef idx="0">
-            <a:schemeClr val="accent1"/>
-          </a:fillRef>
-          <a:effectRef idx="0">
-            <a:schemeClr val="accent1"/>
-          </a:effectRef>
-          <a:fontRef idx="minor">
-            <a:schemeClr val="tx1"/>
-          </a:fontRef>
-        </p:style>
         <p:txBody>
           <a:bodyPr rtlCol="0" anchor="ctr"/>
           <a:lstStyle/>
@@ -20448,48 +20122,6 @@
               <a:t>SSH-folder-documentation.xlsx</a:t>
             </a:r>
             <a:endParaRPr lang="en-US" sz="1400" b="1" dirty="0"/>
-          </a:p>
-        </p:txBody>
-      </p:sp>
-      <p:sp>
-        <p:nvSpPr>
-          <p:cNvPr id="124" name="TextBox 123">
-            <a:extLst>
-              <a:ext uri="{FF2B5EF4-FFF2-40B4-BE49-F238E27FC236}">
-                <a16:creationId xmlns:a16="http://schemas.microsoft.com/office/drawing/2014/main" id="{E0204CE5-9065-1AB6-FECE-9B20F0E87078}"/>
-              </a:ext>
-            </a:extLst>
-          </p:cNvPr>
-          <p:cNvSpPr txBox="1"/>
-          <p:nvPr/>
-        </p:nvSpPr>
-        <p:spPr>
-          <a:xfrm>
-            <a:off x="6082448" y="6369293"/>
-            <a:ext cx="5484041" cy="400110"/>
-          </a:xfrm>
-          <a:prstGeom prst="rect">
-            <a:avLst/>
-          </a:prstGeom>
-          <a:noFill/>
-        </p:spPr>
-        <p:txBody>
-          <a:bodyPr wrap="square">
-            <a:spAutoFit/>
-          </a:bodyPr>
-          <a:lstStyle/>
-          <a:p>
-            <a:r>
-              <a:rPr lang="en-US" sz="1000" noProof="1"/>
-              <a:t>*)  NOTE, git difftool waits until pragma-merge is closed. That’s why I start a delayed local</a:t>
-            </a:r>
-          </a:p>
-          <a:p>
-            <a:r>
-              <a:rPr lang="en-US" sz="1000" noProof="1"/>
-              <a:t> pick-up of files -- to give server difftool time to generate BASE, … .</a:t>
-            </a:r>
-            <a:endParaRPr lang="en-US" sz="1000" dirty="0"/>
           </a:p>
         </p:txBody>
       </p:sp>

--- a/docs/Tech-overview.pptx
+++ b/docs/Tech-overview.pptx
@@ -265,7 +265,7 @@
           <a:p>
             <a:fld id="{CA855E1B-8830-B64E-B102-DB2BBD0D9567}" type="datetimeFigureOut">
               <a:rPr lang="sv-SE" smtClean="0"/>
-              <a:t>2025-10-07</a:t>
+              <a:t>2026-03-27</a:t>
             </a:fld>
             <a:endParaRPr lang="sv-SE"/>
           </a:p>
@@ -435,7 +435,7 @@
           <a:p>
             <a:fld id="{CA855E1B-8830-B64E-B102-DB2BBD0D9567}" type="datetimeFigureOut">
               <a:rPr lang="sv-SE" smtClean="0"/>
-              <a:t>2025-10-07</a:t>
+              <a:t>2026-03-27</a:t>
             </a:fld>
             <a:endParaRPr lang="sv-SE"/>
           </a:p>
@@ -615,7 +615,7 @@
           <a:p>
             <a:fld id="{CA855E1B-8830-B64E-B102-DB2BBD0D9567}" type="datetimeFigureOut">
               <a:rPr lang="sv-SE" smtClean="0"/>
-              <a:t>2025-10-07</a:t>
+              <a:t>2026-03-27</a:t>
             </a:fld>
             <a:endParaRPr lang="sv-SE"/>
           </a:p>
@@ -785,7 +785,7 @@
           <a:p>
             <a:fld id="{CA855E1B-8830-B64E-B102-DB2BBD0D9567}" type="datetimeFigureOut">
               <a:rPr lang="sv-SE" smtClean="0"/>
-              <a:t>2025-10-07</a:t>
+              <a:t>2026-03-27</a:t>
             </a:fld>
             <a:endParaRPr lang="sv-SE"/>
           </a:p>
@@ -1029,7 +1029,7 @@
           <a:p>
             <a:fld id="{CA855E1B-8830-B64E-B102-DB2BBD0D9567}" type="datetimeFigureOut">
               <a:rPr lang="sv-SE" smtClean="0"/>
-              <a:t>2025-10-07</a:t>
+              <a:t>2026-03-27</a:t>
             </a:fld>
             <a:endParaRPr lang="sv-SE"/>
           </a:p>
@@ -1261,7 +1261,7 @@
           <a:p>
             <a:fld id="{CA855E1B-8830-B64E-B102-DB2BBD0D9567}" type="datetimeFigureOut">
               <a:rPr lang="sv-SE" smtClean="0"/>
-              <a:t>2025-10-07</a:t>
+              <a:t>2026-03-27</a:t>
             </a:fld>
             <a:endParaRPr lang="sv-SE"/>
           </a:p>
@@ -1628,7 +1628,7 @@
           <a:p>
             <a:fld id="{CA855E1B-8830-B64E-B102-DB2BBD0D9567}" type="datetimeFigureOut">
               <a:rPr lang="sv-SE" smtClean="0"/>
-              <a:t>2025-10-07</a:t>
+              <a:t>2026-03-27</a:t>
             </a:fld>
             <a:endParaRPr lang="sv-SE"/>
           </a:p>
@@ -1746,7 +1746,7 @@
           <a:p>
             <a:fld id="{CA855E1B-8830-B64E-B102-DB2BBD0D9567}" type="datetimeFigureOut">
               <a:rPr lang="sv-SE" smtClean="0"/>
-              <a:t>2025-10-07</a:t>
+              <a:t>2026-03-27</a:t>
             </a:fld>
             <a:endParaRPr lang="sv-SE"/>
           </a:p>
@@ -1841,7 +1841,7 @@
           <a:p>
             <a:fld id="{CA855E1B-8830-B64E-B102-DB2BBD0D9567}" type="datetimeFigureOut">
               <a:rPr lang="sv-SE" smtClean="0"/>
-              <a:t>2025-10-07</a:t>
+              <a:t>2026-03-27</a:t>
             </a:fld>
             <a:endParaRPr lang="sv-SE"/>
           </a:p>
@@ -2118,7 +2118,7 @@
           <a:p>
             <a:fld id="{CA855E1B-8830-B64E-B102-DB2BBD0D9567}" type="datetimeFigureOut">
               <a:rPr lang="sv-SE" smtClean="0"/>
-              <a:t>2025-10-07</a:t>
+              <a:t>2026-03-27</a:t>
             </a:fld>
             <a:endParaRPr lang="sv-SE"/>
           </a:p>
@@ -2375,7 +2375,7 @@
           <a:p>
             <a:fld id="{CA855E1B-8830-B64E-B102-DB2BBD0D9567}" type="datetimeFigureOut">
               <a:rPr lang="sv-SE" smtClean="0"/>
-              <a:t>2025-10-07</a:t>
+              <a:t>2026-03-27</a:t>
             </a:fld>
             <a:endParaRPr lang="sv-SE"/>
           </a:p>
@@ -2588,7 +2588,7 @@
           <a:p>
             <a:fld id="{CA855E1B-8830-B64E-B102-DB2BBD0D9567}" type="datetimeFigureOut">
               <a:rPr lang="sv-SE" smtClean="0"/>
-              <a:t>2025-10-07</a:t>
+              <a:t>2026-03-27</a:t>
             </a:fld>
             <a:endParaRPr lang="sv-SE"/>
           </a:p>
@@ -17169,7 +17169,7 @@
         <p:spPr>
           <a:xfrm>
             <a:off x="498476" y="1440853"/>
-            <a:ext cx="5497880" cy="3908762"/>
+            <a:ext cx="5497880" cy="3785652"/>
           </a:xfrm>
           <a:prstGeom prst="rect">
             <a:avLst/>
@@ -17318,12 +17318,6 @@
               <a:rPr lang="en-US" sz="800" noProof="1"/>
               <a:t>Other arguments are same as for local git (except –PIPED, see below)</a:t>
             </a:r>
-          </a:p>
-          <a:p>
-            <a:pPr marL="324000" lvl="1" indent="-171450">
-              <a:buFont typeface="Arial" panose="020B0604020202020204" pitchFamily="34" charset="0"/>
-              <a:buChar char="•"/>
-            </a:pPr>
             <a:endParaRPr lang="en-US" sz="800" b="1" noProof="1"/>
           </a:p>
           <a:p>
@@ -17541,7 +17535,7 @@
         </p:nvSpPr>
         <p:spPr>
           <a:xfrm>
-            <a:off x="6451812" y="5334949"/>
+            <a:off x="6451812" y="5971498"/>
             <a:ext cx="5019594" cy="2800767"/>
           </a:xfrm>
           <a:prstGeom prst="rect">
@@ -18009,7 +18003,7 @@
         <p:spPr>
           <a:xfrm>
             <a:off x="6424164" y="1456305"/>
-            <a:ext cx="5497880" cy="3170099"/>
+            <a:ext cx="5497880" cy="3785652"/>
           </a:xfrm>
           <a:prstGeom prst="rect">
             <a:avLst/>
@@ -18236,11 +18230,60 @@
             </a:r>
           </a:p>
           <a:p>
+            <a:endParaRPr lang="en-US" sz="800" b="1" noProof="1"/>
+          </a:p>
+          <a:p>
+            <a:pPr marL="171450" indent="-171450">
+              <a:buFont typeface="Courier New" panose="02070309020205020404" pitchFamily="49" charset="0"/>
+              <a:buChar char="o"/>
+            </a:pPr>
+            <a:r>
+              <a:rPr lang="en-US" sz="800" noProof="1">
+                <a:solidFill>
+                  <a:schemeClr val="accent1"/>
+                </a:solidFill>
+              </a:rPr>
+              <a:t>WSL for windows</a:t>
+            </a:r>
+            <a:endParaRPr lang="en-US" sz="800" noProof="1"/>
+          </a:p>
+          <a:p>
             <a:pPr marL="324000" lvl="1" indent="-171450">
               <a:buFont typeface="Arial" panose="020B0604020202020204" pitchFamily="34" charset="0"/>
               <a:buChar char="•"/>
             </a:pPr>
+            <a:r>
+              <a:rPr lang="en-US" sz="800" noProof="1"/>
+              <a:t>Runs in WSL on windows (which requires some path translations).  Normal bash for linux and Mac</a:t>
+            </a:r>
+          </a:p>
+          <a:p>
+            <a:endParaRPr lang="en-US" sz="800" b="1" noProof="1"/>
+          </a:p>
+          <a:p>
+            <a:pPr marL="171450" indent="-171450">
+              <a:buFont typeface="Courier New" panose="02070309020205020404" pitchFamily="49" charset="0"/>
+              <a:buChar char="o"/>
+            </a:pPr>
+            <a:r>
+              <a:rPr lang="en-US" sz="800" noProof="1">
+                <a:solidFill>
+                  <a:schemeClr val="accent1"/>
+                </a:solidFill>
+              </a:rPr>
+              <a:t>Requirements</a:t>
+            </a:r>
             <a:endParaRPr lang="en-US" sz="800" noProof="1"/>
+          </a:p>
+          <a:p>
+            <a:pPr marL="324000" lvl="1" indent="-171450">
+              <a:buFont typeface="Arial" panose="020B0604020202020204" pitchFamily="34" charset="0"/>
+              <a:buChar char="•"/>
+            </a:pPr>
+            <a:r>
+              <a:rPr lang="en-US" sz="800" noProof="1"/>
+              <a:t>password-less login (Tool for setup in Settings / Add Repo button, set switch to “server”)</a:t>
+            </a:r>
           </a:p>
         </p:txBody>
       </p:sp>
@@ -18293,7 +18336,7 @@
         </p:nvSpPr>
         <p:spPr>
           <a:xfrm>
-            <a:off x="6314718" y="4800600"/>
+            <a:off x="6314718" y="5437149"/>
             <a:ext cx="3354508" cy="461665"/>
           </a:xfrm>
           <a:prstGeom prst="rect">
